--- a/資訊檢索系統期末專案.pptx
+++ b/資訊檢索系統期末專案.pptx
@@ -6,8 +6,13 @@
   </p:sldMasterIdLst>
   <p:sldIdLst>
     <p:sldId id="256" r:id="rId2"/>
-    <p:sldId id="257" r:id="rId3"/>
-    <p:sldId id="258" r:id="rId4"/>
+    <p:sldId id="260" r:id="rId3"/>
+    <p:sldId id="257" r:id="rId4"/>
+    <p:sldId id="263" r:id="rId5"/>
+    <p:sldId id="261" r:id="rId6"/>
+    <p:sldId id="264" r:id="rId7"/>
+    <p:sldId id="265" r:id="rId8"/>
+    <p:sldId id="258" r:id="rId9"/>
   </p:sldIdLst>
   <p:sldSz cx="12192000" cy="6858000"/>
   <p:notesSz cx="6858000" cy="9144000"/>
@@ -106,7 +111,2896 @@
       </a:defRPr>
     </a:lvl9pPr>
   </p:defaultTextStyle>
+  <p:extLst>
+    <p:ext uri="{EFAFB233-063F-42B5-8137-9DF3F51BA10A}">
+      <p15:sldGuideLst xmlns:p15="http://schemas.microsoft.com/office/powerpoint/2012/main"/>
+    </p:ext>
+  </p:extLst>
 </p:presentation>
+</file>
+
+<file path=ppt/diagrams/colors1.xml><?xml version="1.0" encoding="utf-8"?>
+<dgm:colorsDef xmlns:dgm="http://schemas.openxmlformats.org/drawingml/2006/diagram" xmlns:a="http://schemas.openxmlformats.org/drawingml/2006/main" uniqueId="urn:microsoft.com/office/officeart/2005/8/colors/accent1_2">
+  <dgm:title val=""/>
+  <dgm:desc val=""/>
+  <dgm:catLst>
+    <dgm:cat type="accent1" pri="11200"/>
+  </dgm:catLst>
+  <dgm:styleLbl name="node0">
+    <dgm:fillClrLst meth="repeat">
+      <a:schemeClr val="accent1"/>
+    </dgm:fillClrLst>
+    <dgm:linClrLst meth="repeat">
+      <a:schemeClr val="lt1"/>
+    </dgm:linClrLst>
+    <dgm:effectClrLst/>
+    <dgm:txLinClrLst/>
+    <dgm:txFillClrLst/>
+    <dgm:txEffectClrLst/>
+  </dgm:styleLbl>
+  <dgm:styleLbl name="alignNode1">
+    <dgm:fillClrLst meth="repeat">
+      <a:schemeClr val="accent1"/>
+    </dgm:fillClrLst>
+    <dgm:linClrLst meth="repeat">
+      <a:schemeClr val="accent1"/>
+    </dgm:linClrLst>
+    <dgm:effectClrLst/>
+    <dgm:txLinClrLst/>
+    <dgm:txFillClrLst/>
+    <dgm:txEffectClrLst/>
+  </dgm:styleLbl>
+  <dgm:styleLbl name="node1">
+    <dgm:fillClrLst meth="repeat">
+      <a:schemeClr val="accent1"/>
+    </dgm:fillClrLst>
+    <dgm:linClrLst meth="repeat">
+      <a:schemeClr val="lt1"/>
+    </dgm:linClrLst>
+    <dgm:effectClrLst/>
+    <dgm:txLinClrLst/>
+    <dgm:txFillClrLst/>
+    <dgm:txEffectClrLst/>
+  </dgm:styleLbl>
+  <dgm:styleLbl name="lnNode1">
+    <dgm:fillClrLst meth="repeat">
+      <a:schemeClr val="accent1"/>
+    </dgm:fillClrLst>
+    <dgm:linClrLst meth="repeat">
+      <a:schemeClr val="lt1"/>
+    </dgm:linClrLst>
+    <dgm:effectClrLst/>
+    <dgm:txLinClrLst/>
+    <dgm:txFillClrLst/>
+    <dgm:txEffectClrLst/>
+  </dgm:styleLbl>
+  <dgm:styleLbl name="vennNode1">
+    <dgm:fillClrLst meth="repeat">
+      <a:schemeClr val="accent1">
+        <a:alpha val="50000"/>
+      </a:schemeClr>
+    </dgm:fillClrLst>
+    <dgm:linClrLst meth="repeat">
+      <a:schemeClr val="lt1"/>
+    </dgm:linClrLst>
+    <dgm:effectClrLst/>
+    <dgm:txLinClrLst/>
+    <dgm:txFillClrLst/>
+    <dgm:txEffectClrLst/>
+  </dgm:styleLbl>
+  <dgm:styleLbl name="node2">
+    <dgm:fillClrLst meth="repeat">
+      <a:schemeClr val="accent1"/>
+    </dgm:fillClrLst>
+    <dgm:linClrLst meth="repeat">
+      <a:schemeClr val="lt1"/>
+    </dgm:linClrLst>
+    <dgm:effectClrLst/>
+    <dgm:txLinClrLst/>
+    <dgm:txFillClrLst/>
+    <dgm:txEffectClrLst/>
+  </dgm:styleLbl>
+  <dgm:styleLbl name="node3">
+    <dgm:fillClrLst meth="repeat">
+      <a:schemeClr val="accent1"/>
+    </dgm:fillClrLst>
+    <dgm:linClrLst meth="repeat">
+      <a:schemeClr val="lt1"/>
+    </dgm:linClrLst>
+    <dgm:effectClrLst/>
+    <dgm:txLinClrLst/>
+    <dgm:txFillClrLst/>
+    <dgm:txEffectClrLst/>
+  </dgm:styleLbl>
+  <dgm:styleLbl name="node4">
+    <dgm:fillClrLst meth="repeat">
+      <a:schemeClr val="accent1"/>
+    </dgm:fillClrLst>
+    <dgm:linClrLst meth="repeat">
+      <a:schemeClr val="lt1"/>
+    </dgm:linClrLst>
+    <dgm:effectClrLst/>
+    <dgm:txLinClrLst/>
+    <dgm:txFillClrLst/>
+    <dgm:txEffectClrLst/>
+  </dgm:styleLbl>
+  <dgm:styleLbl name="fgImgPlace1">
+    <dgm:fillClrLst meth="repeat">
+      <a:schemeClr val="accent1">
+        <a:tint val="50000"/>
+      </a:schemeClr>
+    </dgm:fillClrLst>
+    <dgm:linClrLst meth="repeat">
+      <a:schemeClr val="lt1"/>
+    </dgm:linClrLst>
+    <dgm:effectClrLst/>
+    <dgm:txLinClrLst/>
+    <dgm:txFillClrLst meth="repeat">
+      <a:schemeClr val="lt1"/>
+    </dgm:txFillClrLst>
+    <dgm:txEffectClrLst/>
+  </dgm:styleLbl>
+  <dgm:styleLbl name="alignImgPlace1">
+    <dgm:fillClrLst meth="repeat">
+      <a:schemeClr val="accent1">
+        <a:tint val="50000"/>
+      </a:schemeClr>
+    </dgm:fillClrLst>
+    <dgm:linClrLst meth="repeat">
+      <a:schemeClr val="lt1"/>
+    </dgm:linClrLst>
+    <dgm:effectClrLst/>
+    <dgm:txLinClrLst/>
+    <dgm:txFillClrLst meth="repeat">
+      <a:schemeClr val="lt1"/>
+    </dgm:txFillClrLst>
+    <dgm:txEffectClrLst/>
+  </dgm:styleLbl>
+  <dgm:styleLbl name="bgImgPlace1">
+    <dgm:fillClrLst meth="repeat">
+      <a:schemeClr val="accent1">
+        <a:tint val="50000"/>
+      </a:schemeClr>
+    </dgm:fillClrLst>
+    <dgm:linClrLst meth="repeat">
+      <a:schemeClr val="lt1"/>
+    </dgm:linClrLst>
+    <dgm:effectClrLst/>
+    <dgm:txLinClrLst/>
+    <dgm:txFillClrLst meth="repeat">
+      <a:schemeClr val="lt1"/>
+    </dgm:txFillClrLst>
+    <dgm:txEffectClrLst/>
+  </dgm:styleLbl>
+  <dgm:styleLbl name="sibTrans2D1">
+    <dgm:fillClrLst meth="repeat">
+      <a:schemeClr val="accent1">
+        <a:tint val="60000"/>
+      </a:schemeClr>
+    </dgm:fillClrLst>
+    <dgm:linClrLst meth="repeat">
+      <a:schemeClr val="accent1">
+        <a:tint val="60000"/>
+      </a:schemeClr>
+    </dgm:linClrLst>
+    <dgm:effectClrLst/>
+    <dgm:txLinClrLst/>
+    <dgm:txFillClrLst/>
+    <dgm:txEffectClrLst/>
+  </dgm:styleLbl>
+  <dgm:styleLbl name="fgSibTrans2D1">
+    <dgm:fillClrLst meth="repeat">
+      <a:schemeClr val="accent1">
+        <a:tint val="60000"/>
+      </a:schemeClr>
+    </dgm:fillClrLst>
+    <dgm:linClrLst meth="repeat">
+      <a:schemeClr val="accent1">
+        <a:tint val="60000"/>
+      </a:schemeClr>
+    </dgm:linClrLst>
+    <dgm:effectClrLst/>
+    <dgm:txLinClrLst/>
+    <dgm:txFillClrLst/>
+    <dgm:txEffectClrLst/>
+  </dgm:styleLbl>
+  <dgm:styleLbl name="bgSibTrans2D1">
+    <dgm:fillClrLst meth="repeat">
+      <a:schemeClr val="accent1">
+        <a:tint val="60000"/>
+      </a:schemeClr>
+    </dgm:fillClrLst>
+    <dgm:linClrLst meth="repeat">
+      <a:schemeClr val="accent1">
+        <a:tint val="60000"/>
+      </a:schemeClr>
+    </dgm:linClrLst>
+    <dgm:effectClrLst/>
+    <dgm:txLinClrLst/>
+    <dgm:txFillClrLst/>
+    <dgm:txEffectClrLst/>
+  </dgm:styleLbl>
+  <dgm:styleLbl name="sibTrans1D1">
+    <dgm:fillClrLst meth="repeat">
+      <a:schemeClr val="accent1"/>
+    </dgm:fillClrLst>
+    <dgm:linClrLst meth="repeat">
+      <a:schemeClr val="accent1"/>
+    </dgm:linClrLst>
+    <dgm:effectClrLst/>
+    <dgm:txLinClrLst/>
+    <dgm:txFillClrLst meth="repeat">
+      <a:schemeClr val="tx1"/>
+    </dgm:txFillClrLst>
+    <dgm:txEffectClrLst/>
+  </dgm:styleLbl>
+  <dgm:styleLbl name="callout">
+    <dgm:fillClrLst meth="repeat">
+      <a:schemeClr val="accent1"/>
+    </dgm:fillClrLst>
+    <dgm:linClrLst meth="repeat">
+      <a:schemeClr val="accent1">
+        <a:tint val="50000"/>
+      </a:schemeClr>
+    </dgm:linClrLst>
+    <dgm:effectClrLst/>
+    <dgm:txLinClrLst/>
+    <dgm:txFillClrLst meth="repeat">
+      <a:schemeClr val="tx1"/>
+    </dgm:txFillClrLst>
+    <dgm:txEffectClrLst/>
+  </dgm:styleLbl>
+  <dgm:styleLbl name="asst0">
+    <dgm:fillClrLst meth="repeat">
+      <a:schemeClr val="accent1"/>
+    </dgm:fillClrLst>
+    <dgm:linClrLst meth="repeat">
+      <a:schemeClr val="lt1"/>
+    </dgm:linClrLst>
+    <dgm:effectClrLst/>
+    <dgm:txLinClrLst/>
+    <dgm:txFillClrLst/>
+    <dgm:txEffectClrLst/>
+  </dgm:styleLbl>
+  <dgm:styleLbl name="asst1">
+    <dgm:fillClrLst meth="repeat">
+      <a:schemeClr val="accent1"/>
+    </dgm:fillClrLst>
+    <dgm:linClrLst meth="repeat">
+      <a:schemeClr val="lt1"/>
+    </dgm:linClrLst>
+    <dgm:effectClrLst/>
+    <dgm:txLinClrLst/>
+    <dgm:txFillClrLst/>
+    <dgm:txEffectClrLst/>
+  </dgm:styleLbl>
+  <dgm:styleLbl name="asst2">
+    <dgm:fillClrLst meth="repeat">
+      <a:schemeClr val="accent1"/>
+    </dgm:fillClrLst>
+    <dgm:linClrLst meth="repeat">
+      <a:schemeClr val="lt1"/>
+    </dgm:linClrLst>
+    <dgm:effectClrLst/>
+    <dgm:txLinClrLst/>
+    <dgm:txFillClrLst/>
+    <dgm:txEffectClrLst/>
+  </dgm:styleLbl>
+  <dgm:styleLbl name="asst3">
+    <dgm:fillClrLst meth="repeat">
+      <a:schemeClr val="accent1"/>
+    </dgm:fillClrLst>
+    <dgm:linClrLst meth="repeat">
+      <a:schemeClr val="lt1"/>
+    </dgm:linClrLst>
+    <dgm:effectClrLst/>
+    <dgm:txLinClrLst/>
+    <dgm:txFillClrLst/>
+    <dgm:txEffectClrLst/>
+  </dgm:styleLbl>
+  <dgm:styleLbl name="asst4">
+    <dgm:fillClrLst meth="repeat">
+      <a:schemeClr val="accent1"/>
+    </dgm:fillClrLst>
+    <dgm:linClrLst meth="repeat">
+      <a:schemeClr val="lt1"/>
+    </dgm:linClrLst>
+    <dgm:effectClrLst/>
+    <dgm:txLinClrLst/>
+    <dgm:txFillClrLst/>
+    <dgm:txEffectClrLst/>
+  </dgm:styleLbl>
+  <dgm:styleLbl name="parChTrans2D1">
+    <dgm:fillClrLst meth="repeat">
+      <a:schemeClr val="accent1">
+        <a:tint val="60000"/>
+      </a:schemeClr>
+    </dgm:fillClrLst>
+    <dgm:linClrLst meth="repeat">
+      <a:schemeClr val="accent1">
+        <a:tint val="60000"/>
+      </a:schemeClr>
+    </dgm:linClrLst>
+    <dgm:effectClrLst/>
+    <dgm:txLinClrLst/>
+    <dgm:txFillClrLst meth="repeat">
+      <a:schemeClr val="lt1"/>
+    </dgm:txFillClrLst>
+    <dgm:txEffectClrLst/>
+  </dgm:styleLbl>
+  <dgm:styleLbl name="parChTrans2D2">
+    <dgm:fillClrLst meth="repeat">
+      <a:schemeClr val="accent1"/>
+    </dgm:fillClrLst>
+    <dgm:linClrLst meth="repeat">
+      <a:schemeClr val="accent1"/>
+    </dgm:linClrLst>
+    <dgm:effectClrLst/>
+    <dgm:txLinClrLst/>
+    <dgm:txFillClrLst meth="repeat">
+      <a:schemeClr val="lt1"/>
+    </dgm:txFillClrLst>
+    <dgm:txEffectClrLst/>
+  </dgm:styleLbl>
+  <dgm:styleLbl name="parChTrans2D3">
+    <dgm:fillClrLst meth="repeat">
+      <a:schemeClr val="accent1"/>
+    </dgm:fillClrLst>
+    <dgm:linClrLst meth="repeat">
+      <a:schemeClr val="accent1"/>
+    </dgm:linClrLst>
+    <dgm:effectClrLst/>
+    <dgm:txLinClrLst/>
+    <dgm:txFillClrLst meth="repeat">
+      <a:schemeClr val="lt1"/>
+    </dgm:txFillClrLst>
+    <dgm:txEffectClrLst/>
+  </dgm:styleLbl>
+  <dgm:styleLbl name="parChTrans2D4">
+    <dgm:fillClrLst meth="repeat">
+      <a:schemeClr val="accent1"/>
+    </dgm:fillClrLst>
+    <dgm:linClrLst meth="repeat">
+      <a:schemeClr val="accent1"/>
+    </dgm:linClrLst>
+    <dgm:effectClrLst/>
+    <dgm:txLinClrLst/>
+    <dgm:txFillClrLst meth="repeat">
+      <a:schemeClr val="lt1"/>
+    </dgm:txFillClrLst>
+    <dgm:txEffectClrLst/>
+  </dgm:styleLbl>
+  <dgm:styleLbl name="parChTrans1D1">
+    <dgm:fillClrLst meth="repeat">
+      <a:schemeClr val="accent1"/>
+    </dgm:fillClrLst>
+    <dgm:linClrLst meth="repeat">
+      <a:schemeClr val="accent1">
+        <a:shade val="60000"/>
+      </a:schemeClr>
+    </dgm:linClrLst>
+    <dgm:effectClrLst/>
+    <dgm:txLinClrLst/>
+    <dgm:txFillClrLst meth="repeat">
+      <a:schemeClr val="tx1"/>
+    </dgm:txFillClrLst>
+    <dgm:txEffectClrLst/>
+  </dgm:styleLbl>
+  <dgm:styleLbl name="parChTrans1D2">
+    <dgm:fillClrLst meth="repeat">
+      <a:schemeClr val="accent1"/>
+    </dgm:fillClrLst>
+    <dgm:linClrLst meth="repeat">
+      <a:schemeClr val="accent1">
+        <a:shade val="60000"/>
+      </a:schemeClr>
+    </dgm:linClrLst>
+    <dgm:effectClrLst/>
+    <dgm:txLinClrLst/>
+    <dgm:txFillClrLst meth="repeat">
+      <a:schemeClr val="tx1"/>
+    </dgm:txFillClrLst>
+    <dgm:txEffectClrLst/>
+  </dgm:styleLbl>
+  <dgm:styleLbl name="parChTrans1D3">
+    <dgm:fillClrLst meth="repeat">
+      <a:schemeClr val="accent1"/>
+    </dgm:fillClrLst>
+    <dgm:linClrLst meth="repeat">
+      <a:schemeClr val="accent1">
+        <a:shade val="80000"/>
+      </a:schemeClr>
+    </dgm:linClrLst>
+    <dgm:effectClrLst/>
+    <dgm:txLinClrLst/>
+    <dgm:txFillClrLst meth="repeat">
+      <a:schemeClr val="tx1"/>
+    </dgm:txFillClrLst>
+    <dgm:txEffectClrLst/>
+  </dgm:styleLbl>
+  <dgm:styleLbl name="parChTrans1D4">
+    <dgm:fillClrLst meth="repeat">
+      <a:schemeClr val="accent1"/>
+    </dgm:fillClrLst>
+    <dgm:linClrLst meth="repeat">
+      <a:schemeClr val="accent1">
+        <a:shade val="80000"/>
+      </a:schemeClr>
+    </dgm:linClrLst>
+    <dgm:effectClrLst/>
+    <dgm:txLinClrLst/>
+    <dgm:txFillClrLst meth="repeat">
+      <a:schemeClr val="tx1"/>
+    </dgm:txFillClrLst>
+    <dgm:txEffectClrLst/>
+  </dgm:styleLbl>
+  <dgm:styleLbl name="fgAcc1">
+    <dgm:fillClrLst meth="repeat">
+      <a:schemeClr val="lt1">
+        <a:alpha val="90000"/>
+      </a:schemeClr>
+    </dgm:fillClrLst>
+    <dgm:linClrLst meth="repeat">
+      <a:schemeClr val="accent1"/>
+    </dgm:linClrLst>
+    <dgm:effectClrLst/>
+    <dgm:txLinClrLst/>
+    <dgm:txFillClrLst meth="repeat">
+      <a:schemeClr val="dk1"/>
+    </dgm:txFillClrLst>
+    <dgm:txEffectClrLst/>
+  </dgm:styleLbl>
+  <dgm:styleLbl name="conFgAcc1">
+    <dgm:fillClrLst meth="repeat">
+      <a:schemeClr val="lt1">
+        <a:alpha val="90000"/>
+      </a:schemeClr>
+    </dgm:fillClrLst>
+    <dgm:linClrLst meth="repeat">
+      <a:schemeClr val="accent1"/>
+    </dgm:linClrLst>
+    <dgm:effectClrLst/>
+    <dgm:txLinClrLst/>
+    <dgm:txFillClrLst meth="repeat">
+      <a:schemeClr val="dk1"/>
+    </dgm:txFillClrLst>
+    <dgm:txEffectClrLst/>
+  </dgm:styleLbl>
+  <dgm:styleLbl name="alignAcc1">
+    <dgm:fillClrLst meth="repeat">
+      <a:schemeClr val="lt1">
+        <a:alpha val="90000"/>
+      </a:schemeClr>
+    </dgm:fillClrLst>
+    <dgm:linClrLst meth="repeat">
+      <a:schemeClr val="accent1"/>
+    </dgm:linClrLst>
+    <dgm:effectClrLst/>
+    <dgm:txLinClrLst/>
+    <dgm:txFillClrLst meth="repeat">
+      <a:schemeClr val="dk1"/>
+    </dgm:txFillClrLst>
+    <dgm:txEffectClrLst/>
+  </dgm:styleLbl>
+  <dgm:styleLbl name="trAlignAcc1">
+    <dgm:fillClrLst meth="repeat">
+      <a:schemeClr val="lt1">
+        <a:alpha val="40000"/>
+      </a:schemeClr>
+    </dgm:fillClrLst>
+    <dgm:linClrLst meth="repeat">
+      <a:schemeClr val="accent1"/>
+    </dgm:linClrLst>
+    <dgm:effectClrLst/>
+    <dgm:txLinClrLst/>
+    <dgm:txFillClrLst meth="repeat">
+      <a:schemeClr val="dk1"/>
+    </dgm:txFillClrLst>
+    <dgm:txEffectClrLst/>
+  </dgm:styleLbl>
+  <dgm:styleLbl name="bgAcc1">
+    <dgm:fillClrLst meth="repeat">
+      <a:schemeClr val="lt1">
+        <a:alpha val="90000"/>
+      </a:schemeClr>
+    </dgm:fillClrLst>
+    <dgm:linClrLst meth="repeat">
+      <a:schemeClr val="accent1"/>
+    </dgm:linClrLst>
+    <dgm:effectClrLst/>
+    <dgm:txLinClrLst/>
+    <dgm:txFillClrLst meth="repeat">
+      <a:schemeClr val="dk1"/>
+    </dgm:txFillClrLst>
+    <dgm:txEffectClrLst/>
+  </dgm:styleLbl>
+  <dgm:styleLbl name="solidFgAcc1">
+    <dgm:fillClrLst meth="repeat">
+      <a:schemeClr val="lt1"/>
+    </dgm:fillClrLst>
+    <dgm:linClrLst meth="repeat">
+      <a:schemeClr val="accent1"/>
+    </dgm:linClrLst>
+    <dgm:effectClrLst/>
+    <dgm:txLinClrLst/>
+    <dgm:txFillClrLst meth="repeat">
+      <a:schemeClr val="dk1"/>
+    </dgm:txFillClrLst>
+    <dgm:txEffectClrLst/>
+  </dgm:styleLbl>
+  <dgm:styleLbl name="solidAlignAcc1">
+    <dgm:fillClrLst meth="repeat">
+      <a:schemeClr val="lt1"/>
+    </dgm:fillClrLst>
+    <dgm:linClrLst meth="repeat">
+      <a:schemeClr val="accent1"/>
+    </dgm:linClrLst>
+    <dgm:effectClrLst/>
+    <dgm:txLinClrLst/>
+    <dgm:txFillClrLst meth="repeat">
+      <a:schemeClr val="dk1"/>
+    </dgm:txFillClrLst>
+    <dgm:txEffectClrLst/>
+  </dgm:styleLbl>
+  <dgm:styleLbl name="solidBgAcc1">
+    <dgm:fillClrLst meth="repeat">
+      <a:schemeClr val="lt1"/>
+    </dgm:fillClrLst>
+    <dgm:linClrLst meth="repeat">
+      <a:schemeClr val="accent1"/>
+    </dgm:linClrLst>
+    <dgm:effectClrLst/>
+    <dgm:txLinClrLst/>
+    <dgm:txFillClrLst meth="repeat">
+      <a:schemeClr val="dk1"/>
+    </dgm:txFillClrLst>
+    <dgm:txEffectClrLst/>
+  </dgm:styleLbl>
+  <dgm:styleLbl name="fgAccFollowNode1">
+    <dgm:fillClrLst meth="repeat">
+      <a:schemeClr val="accent1">
+        <a:alpha val="90000"/>
+        <a:tint val="40000"/>
+      </a:schemeClr>
+    </dgm:fillClrLst>
+    <dgm:linClrLst meth="repeat">
+      <a:schemeClr val="accent1">
+        <a:alpha val="90000"/>
+        <a:tint val="40000"/>
+      </a:schemeClr>
+    </dgm:linClrLst>
+    <dgm:effectClrLst/>
+    <dgm:txLinClrLst/>
+    <dgm:txFillClrLst meth="repeat">
+      <a:schemeClr val="dk1"/>
+    </dgm:txFillClrLst>
+    <dgm:txEffectClrLst/>
+  </dgm:styleLbl>
+  <dgm:styleLbl name="alignAccFollowNode1">
+    <dgm:fillClrLst meth="repeat">
+      <a:schemeClr val="accent1">
+        <a:alpha val="90000"/>
+        <a:tint val="40000"/>
+      </a:schemeClr>
+    </dgm:fillClrLst>
+    <dgm:linClrLst meth="repeat">
+      <a:schemeClr val="accent1">
+        <a:alpha val="90000"/>
+        <a:tint val="40000"/>
+      </a:schemeClr>
+    </dgm:linClrLst>
+    <dgm:effectClrLst/>
+    <dgm:txLinClrLst/>
+    <dgm:txFillClrLst meth="repeat">
+      <a:schemeClr val="dk1"/>
+    </dgm:txFillClrLst>
+    <dgm:txEffectClrLst/>
+  </dgm:styleLbl>
+  <dgm:styleLbl name="bgAccFollowNode1">
+    <dgm:fillClrLst meth="repeat">
+      <a:schemeClr val="accent1">
+        <a:alpha val="90000"/>
+        <a:tint val="40000"/>
+      </a:schemeClr>
+    </dgm:fillClrLst>
+    <dgm:linClrLst meth="repeat">
+      <a:schemeClr val="accent1">
+        <a:alpha val="90000"/>
+        <a:tint val="40000"/>
+      </a:schemeClr>
+    </dgm:linClrLst>
+    <dgm:effectClrLst/>
+    <dgm:txLinClrLst/>
+    <dgm:txFillClrLst meth="repeat">
+      <a:schemeClr val="dk1"/>
+    </dgm:txFillClrLst>
+    <dgm:txEffectClrLst/>
+  </dgm:styleLbl>
+  <dgm:styleLbl name="fgAcc0">
+    <dgm:fillClrLst meth="repeat">
+      <a:schemeClr val="lt1">
+        <a:alpha val="90000"/>
+      </a:schemeClr>
+    </dgm:fillClrLst>
+    <dgm:linClrLst meth="repeat">
+      <a:schemeClr val="accent1"/>
+    </dgm:linClrLst>
+    <dgm:effectClrLst/>
+    <dgm:txLinClrLst/>
+    <dgm:txFillClrLst meth="repeat">
+      <a:schemeClr val="dk1"/>
+    </dgm:txFillClrLst>
+    <dgm:txEffectClrLst/>
+  </dgm:styleLbl>
+  <dgm:styleLbl name="fgAcc2">
+    <dgm:fillClrLst meth="repeat">
+      <a:schemeClr val="lt1">
+        <a:alpha val="90000"/>
+      </a:schemeClr>
+    </dgm:fillClrLst>
+    <dgm:linClrLst meth="repeat">
+      <a:schemeClr val="accent1"/>
+    </dgm:linClrLst>
+    <dgm:effectClrLst/>
+    <dgm:txLinClrLst/>
+    <dgm:txFillClrLst meth="repeat">
+      <a:schemeClr val="dk1"/>
+    </dgm:txFillClrLst>
+    <dgm:txEffectClrLst/>
+  </dgm:styleLbl>
+  <dgm:styleLbl name="fgAcc3">
+    <dgm:fillClrLst meth="repeat">
+      <a:schemeClr val="lt1">
+        <a:alpha val="90000"/>
+      </a:schemeClr>
+    </dgm:fillClrLst>
+    <dgm:linClrLst meth="repeat">
+      <a:schemeClr val="accent1"/>
+    </dgm:linClrLst>
+    <dgm:effectClrLst/>
+    <dgm:txLinClrLst/>
+    <dgm:txFillClrLst meth="repeat">
+      <a:schemeClr val="dk1"/>
+    </dgm:txFillClrLst>
+    <dgm:txEffectClrLst/>
+  </dgm:styleLbl>
+  <dgm:styleLbl name="fgAcc4">
+    <dgm:fillClrLst meth="repeat">
+      <a:schemeClr val="lt1">
+        <a:alpha val="90000"/>
+      </a:schemeClr>
+    </dgm:fillClrLst>
+    <dgm:linClrLst meth="repeat">
+      <a:schemeClr val="accent1"/>
+    </dgm:linClrLst>
+    <dgm:effectClrLst/>
+    <dgm:txLinClrLst/>
+    <dgm:txFillClrLst meth="repeat">
+      <a:schemeClr val="dk1"/>
+    </dgm:txFillClrLst>
+    <dgm:txEffectClrLst/>
+  </dgm:styleLbl>
+  <dgm:styleLbl name="bgShp">
+    <dgm:fillClrLst meth="repeat">
+      <a:schemeClr val="accent1">
+        <a:tint val="40000"/>
+      </a:schemeClr>
+    </dgm:fillClrLst>
+    <dgm:linClrLst meth="repeat">
+      <a:schemeClr val="accent1"/>
+    </dgm:linClrLst>
+    <dgm:effectClrLst/>
+    <dgm:txLinClrLst/>
+    <dgm:txFillClrLst meth="repeat">
+      <a:schemeClr val="dk1"/>
+    </dgm:txFillClrLst>
+    <dgm:txEffectClrLst/>
+  </dgm:styleLbl>
+  <dgm:styleLbl name="dkBgShp">
+    <dgm:fillClrLst meth="repeat">
+      <a:schemeClr val="accent1">
+        <a:shade val="80000"/>
+      </a:schemeClr>
+    </dgm:fillClrLst>
+    <dgm:linClrLst meth="repeat">
+      <a:schemeClr val="accent1"/>
+    </dgm:linClrLst>
+    <dgm:effectClrLst/>
+    <dgm:txLinClrLst/>
+    <dgm:txFillClrLst meth="repeat">
+      <a:schemeClr val="lt1"/>
+    </dgm:txFillClrLst>
+    <dgm:txEffectClrLst/>
+  </dgm:styleLbl>
+  <dgm:styleLbl name="trBgShp">
+    <dgm:fillClrLst meth="repeat">
+      <a:schemeClr val="accent1">
+        <a:tint val="50000"/>
+        <a:alpha val="40000"/>
+      </a:schemeClr>
+    </dgm:fillClrLst>
+    <dgm:linClrLst meth="repeat">
+      <a:schemeClr val="accent1"/>
+    </dgm:linClrLst>
+    <dgm:effectClrLst/>
+    <dgm:txLinClrLst/>
+    <dgm:txFillClrLst meth="repeat">
+      <a:schemeClr val="lt1"/>
+    </dgm:txFillClrLst>
+    <dgm:txEffectClrLst/>
+  </dgm:styleLbl>
+  <dgm:styleLbl name="fgShp">
+    <dgm:fillClrLst meth="repeat">
+      <a:schemeClr val="accent1">
+        <a:tint val="60000"/>
+      </a:schemeClr>
+    </dgm:fillClrLst>
+    <dgm:linClrLst meth="repeat">
+      <a:schemeClr val="lt1"/>
+    </dgm:linClrLst>
+    <dgm:effectClrLst/>
+    <dgm:txLinClrLst/>
+    <dgm:txFillClrLst meth="repeat">
+      <a:schemeClr val="dk1"/>
+    </dgm:txFillClrLst>
+    <dgm:txEffectClrLst/>
+  </dgm:styleLbl>
+  <dgm:styleLbl name="revTx">
+    <dgm:fillClrLst meth="repeat">
+      <a:schemeClr val="lt1">
+        <a:alpha val="0"/>
+      </a:schemeClr>
+    </dgm:fillClrLst>
+    <dgm:linClrLst meth="repeat">
+      <a:schemeClr val="dk1">
+        <a:alpha val="0"/>
+      </a:schemeClr>
+    </dgm:linClrLst>
+    <dgm:effectClrLst/>
+    <dgm:txLinClrLst/>
+    <dgm:txFillClrLst meth="repeat">
+      <a:schemeClr val="tx1"/>
+    </dgm:txFillClrLst>
+    <dgm:txEffectClrLst/>
+  </dgm:styleLbl>
+</dgm:colorsDef>
+</file>
+
+<file path=ppt/diagrams/data1.xml><?xml version="1.0" encoding="utf-8"?>
+<dgm:dataModel xmlns:dgm="http://schemas.openxmlformats.org/drawingml/2006/diagram" xmlns:a="http://schemas.openxmlformats.org/drawingml/2006/main">
+  <dgm:ptLst>
+    <dgm:pt modelId="{39BA76EA-6B06-4563-BA94-837024255026}" type="doc">
+      <dgm:prSet loTypeId="urn:microsoft.com/office/officeart/2005/8/layout/hProcess11" loCatId="process" qsTypeId="urn:microsoft.com/office/officeart/2005/8/quickstyle/simple1" qsCatId="simple" csTypeId="urn:microsoft.com/office/officeart/2005/8/colors/accent1_2" csCatId="accent1" phldr="1"/>
+      <dgm:spPr/>
+    </dgm:pt>
+    <dgm:pt modelId="{EF9695F1-D2F2-46EE-910E-501309FF95E0}">
+      <dgm:prSet phldrT="[文字]"/>
+      <dgm:spPr/>
+      <dgm:t>
+        <a:bodyPr/>
+        <a:lstStyle/>
+        <a:p>
+          <a:r>
+            <a:rPr lang="zh-TW" altLang="en-US" dirty="0">
+              <a:latin typeface="標楷體" panose="03000509000000000000" pitchFamily="65" charset="-120"/>
+              <a:ea typeface="標楷體" panose="03000509000000000000" pitchFamily="65" charset="-120"/>
+            </a:rPr>
+            <a:t>疫情</a:t>
+          </a:r>
+        </a:p>
+      </dgm:t>
+    </dgm:pt>
+    <dgm:pt modelId="{EC524604-523E-4098-83D5-FD165CDA904F}" type="parTrans" cxnId="{C4B1BE5F-AF04-4EEF-83D0-155AFCB5469F}">
+      <dgm:prSet/>
+      <dgm:spPr/>
+      <dgm:t>
+        <a:bodyPr/>
+        <a:lstStyle/>
+        <a:p>
+          <a:endParaRPr lang="zh-TW" altLang="en-US"/>
+        </a:p>
+      </dgm:t>
+    </dgm:pt>
+    <dgm:pt modelId="{CA9B8DBD-E7DF-4E94-A7AA-EE090B32CECF}" type="sibTrans" cxnId="{C4B1BE5F-AF04-4EEF-83D0-155AFCB5469F}">
+      <dgm:prSet/>
+      <dgm:spPr/>
+      <dgm:t>
+        <a:bodyPr/>
+        <a:lstStyle/>
+        <a:p>
+          <a:endParaRPr lang="zh-TW" altLang="en-US"/>
+        </a:p>
+      </dgm:t>
+    </dgm:pt>
+    <dgm:pt modelId="{18C4879F-0E5A-4618-AECC-8E7BC7F77A71}">
+      <dgm:prSet phldrT="[文字]"/>
+      <dgm:spPr/>
+      <dgm:t>
+        <a:bodyPr/>
+        <a:lstStyle/>
+        <a:p>
+          <a:r>
+            <a:rPr lang="en-US" altLang="zh-TW" dirty="0">
+              <a:latin typeface="標楷體" panose="03000509000000000000" pitchFamily="65" charset="-120"/>
+              <a:ea typeface="標楷體" panose="03000509000000000000" pitchFamily="65" charset="-120"/>
+            </a:rPr>
+            <a:t>?</a:t>
+          </a:r>
+          <a:endParaRPr lang="zh-TW" altLang="en-US" dirty="0">
+            <a:latin typeface="標楷體" panose="03000509000000000000" pitchFamily="65" charset="-120"/>
+            <a:ea typeface="標楷體" panose="03000509000000000000" pitchFamily="65" charset="-120"/>
+          </a:endParaRPr>
+        </a:p>
+      </dgm:t>
+    </dgm:pt>
+    <dgm:pt modelId="{BBD651E1-6723-4F5A-A610-16E954E23BB7}" type="parTrans" cxnId="{EE45DFCD-D452-425C-A034-ACFC73791A0F}">
+      <dgm:prSet/>
+      <dgm:spPr/>
+      <dgm:t>
+        <a:bodyPr/>
+        <a:lstStyle/>
+        <a:p>
+          <a:endParaRPr lang="zh-TW" altLang="en-US"/>
+        </a:p>
+      </dgm:t>
+    </dgm:pt>
+    <dgm:pt modelId="{4AE79586-0A41-46F2-837C-5EA922501645}" type="sibTrans" cxnId="{EE45DFCD-D452-425C-A034-ACFC73791A0F}">
+      <dgm:prSet/>
+      <dgm:spPr/>
+      <dgm:t>
+        <a:bodyPr/>
+        <a:lstStyle/>
+        <a:p>
+          <a:endParaRPr lang="zh-TW" altLang="en-US"/>
+        </a:p>
+      </dgm:t>
+    </dgm:pt>
+    <dgm:pt modelId="{8AE3726E-75FB-4CD0-AD19-C9D6B81CA7F7}">
+      <dgm:prSet phldrT="[文字]"/>
+      <dgm:spPr/>
+      <dgm:t>
+        <a:bodyPr/>
+        <a:lstStyle/>
+        <a:p>
+          <a:r>
+            <a:rPr lang="en-US" altLang="zh-TW" dirty="0">
+              <a:latin typeface="Times New Roman" panose="02020603050405020304" pitchFamily="18" charset="0"/>
+              <a:cs typeface="Times New Roman" panose="02020603050405020304" pitchFamily="18" charset="0"/>
+            </a:rPr>
+            <a:t>AI</a:t>
+          </a:r>
+          <a:endParaRPr lang="zh-TW" altLang="en-US" dirty="0">
+            <a:latin typeface="Times New Roman" panose="02020603050405020304" pitchFamily="18" charset="0"/>
+            <a:cs typeface="Times New Roman" panose="02020603050405020304" pitchFamily="18" charset="0"/>
+          </a:endParaRPr>
+        </a:p>
+      </dgm:t>
+    </dgm:pt>
+    <dgm:pt modelId="{D7A024A8-ACF3-4289-8861-6716D2E32EC0}" type="parTrans" cxnId="{82F2F2DE-DF34-4263-A13D-B6AD40142521}">
+      <dgm:prSet/>
+      <dgm:spPr/>
+      <dgm:t>
+        <a:bodyPr/>
+        <a:lstStyle/>
+        <a:p>
+          <a:endParaRPr lang="zh-TW" altLang="en-US"/>
+        </a:p>
+      </dgm:t>
+    </dgm:pt>
+    <dgm:pt modelId="{17BE14E1-9D7C-486E-BDF0-378827A22EBA}" type="sibTrans" cxnId="{82F2F2DE-DF34-4263-A13D-B6AD40142521}">
+      <dgm:prSet/>
+      <dgm:spPr/>
+      <dgm:t>
+        <a:bodyPr/>
+        <a:lstStyle/>
+        <a:p>
+          <a:endParaRPr lang="zh-TW" altLang="en-US"/>
+        </a:p>
+      </dgm:t>
+    </dgm:pt>
+    <dgm:pt modelId="{93756187-EC59-4D7F-9060-1D62A65626E4}">
+      <dgm:prSet phldrT="[文字]"/>
+      <dgm:spPr/>
+      <dgm:t>
+        <a:bodyPr/>
+        <a:lstStyle/>
+        <a:p>
+          <a:r>
+            <a:rPr lang="zh-TW" altLang="en-US" dirty="0">
+              <a:latin typeface="標楷體" panose="03000509000000000000" pitchFamily="65" charset="-120"/>
+              <a:ea typeface="標楷體" panose="03000509000000000000" pitchFamily="65" charset="-120"/>
+            </a:rPr>
+            <a:t>詐騙</a:t>
+          </a:r>
+        </a:p>
+      </dgm:t>
+    </dgm:pt>
+    <dgm:pt modelId="{B5069614-2112-455F-B2DD-F04F2D19C091}" type="parTrans" cxnId="{CA59A4D8-7805-400B-8188-2F85C78D3E52}">
+      <dgm:prSet/>
+      <dgm:spPr/>
+      <dgm:t>
+        <a:bodyPr/>
+        <a:lstStyle/>
+        <a:p>
+          <a:endParaRPr lang="zh-TW" altLang="en-US"/>
+        </a:p>
+      </dgm:t>
+    </dgm:pt>
+    <dgm:pt modelId="{6C58C909-E7D0-4485-B4E3-52911310197C}" type="sibTrans" cxnId="{CA59A4D8-7805-400B-8188-2F85C78D3E52}">
+      <dgm:prSet/>
+      <dgm:spPr/>
+      <dgm:t>
+        <a:bodyPr/>
+        <a:lstStyle/>
+        <a:p>
+          <a:endParaRPr lang="zh-TW" altLang="en-US"/>
+        </a:p>
+      </dgm:t>
+    </dgm:pt>
+    <dgm:pt modelId="{7421BAA9-F779-486E-AD8C-D024EA295426}" type="pres">
+      <dgm:prSet presAssocID="{39BA76EA-6B06-4563-BA94-837024255026}" presName="Name0" presStyleCnt="0">
+        <dgm:presLayoutVars>
+          <dgm:dir/>
+          <dgm:resizeHandles val="exact"/>
+        </dgm:presLayoutVars>
+      </dgm:prSet>
+      <dgm:spPr/>
+    </dgm:pt>
+    <dgm:pt modelId="{F0D71F57-F39E-4BEA-825A-3C2186C4355C}" type="pres">
+      <dgm:prSet presAssocID="{39BA76EA-6B06-4563-BA94-837024255026}" presName="arrow" presStyleLbl="bgShp" presStyleIdx="0" presStyleCnt="1"/>
+      <dgm:spPr/>
+    </dgm:pt>
+    <dgm:pt modelId="{95385AB0-E53D-48C6-A206-C31AB2B8DDFC}" type="pres">
+      <dgm:prSet presAssocID="{39BA76EA-6B06-4563-BA94-837024255026}" presName="points" presStyleCnt="0"/>
+      <dgm:spPr/>
+    </dgm:pt>
+    <dgm:pt modelId="{FB14F5CA-74CD-41F8-B937-5E86E7027DA0}" type="pres">
+      <dgm:prSet presAssocID="{EF9695F1-D2F2-46EE-910E-501309FF95E0}" presName="compositeA" presStyleCnt="0"/>
+      <dgm:spPr/>
+    </dgm:pt>
+    <dgm:pt modelId="{65E73C9B-7DEC-466A-A79B-796DE227ADB9}" type="pres">
+      <dgm:prSet presAssocID="{EF9695F1-D2F2-46EE-910E-501309FF95E0}" presName="textA" presStyleLbl="revTx" presStyleIdx="0" presStyleCnt="4">
+        <dgm:presLayoutVars>
+          <dgm:bulletEnabled val="1"/>
+        </dgm:presLayoutVars>
+      </dgm:prSet>
+      <dgm:spPr/>
+    </dgm:pt>
+    <dgm:pt modelId="{45A6A8F0-B1D6-4688-9CA9-EF202B64FCD6}" type="pres">
+      <dgm:prSet presAssocID="{EF9695F1-D2F2-46EE-910E-501309FF95E0}" presName="circleA" presStyleLbl="node1" presStyleIdx="0" presStyleCnt="4"/>
+      <dgm:spPr/>
+    </dgm:pt>
+    <dgm:pt modelId="{6A66B90A-CB54-426F-9BB1-325491E61F98}" type="pres">
+      <dgm:prSet presAssocID="{EF9695F1-D2F2-46EE-910E-501309FF95E0}" presName="spaceA" presStyleCnt="0"/>
+      <dgm:spPr/>
+    </dgm:pt>
+    <dgm:pt modelId="{9D391CB7-34AC-4350-94F1-E6B10CC9080D}" type="pres">
+      <dgm:prSet presAssocID="{CA9B8DBD-E7DF-4E94-A7AA-EE090B32CECF}" presName="space" presStyleCnt="0"/>
+      <dgm:spPr/>
+    </dgm:pt>
+    <dgm:pt modelId="{4B525CCC-6C12-4810-A9F2-1ED91A5AED70}" type="pres">
+      <dgm:prSet presAssocID="{18C4879F-0E5A-4618-AECC-8E7BC7F77A71}" presName="compositeB" presStyleCnt="0"/>
+      <dgm:spPr/>
+    </dgm:pt>
+    <dgm:pt modelId="{17B2C020-7EDE-4C68-AC0C-0161BCDFDCD1}" type="pres">
+      <dgm:prSet presAssocID="{18C4879F-0E5A-4618-AECC-8E7BC7F77A71}" presName="textB" presStyleLbl="revTx" presStyleIdx="1" presStyleCnt="4">
+        <dgm:presLayoutVars>
+          <dgm:bulletEnabled val="1"/>
+        </dgm:presLayoutVars>
+      </dgm:prSet>
+      <dgm:spPr/>
+    </dgm:pt>
+    <dgm:pt modelId="{388803F4-D24C-43AF-A40C-E269BF2641C9}" type="pres">
+      <dgm:prSet presAssocID="{18C4879F-0E5A-4618-AECC-8E7BC7F77A71}" presName="circleB" presStyleLbl="node1" presStyleIdx="1" presStyleCnt="4"/>
+      <dgm:spPr/>
+    </dgm:pt>
+    <dgm:pt modelId="{5F8572A5-326D-4ABA-B75D-9E8E646DF764}" type="pres">
+      <dgm:prSet presAssocID="{18C4879F-0E5A-4618-AECC-8E7BC7F77A71}" presName="spaceB" presStyleCnt="0"/>
+      <dgm:spPr/>
+    </dgm:pt>
+    <dgm:pt modelId="{16586103-A175-4B4F-8DBD-65F5A3D76BBC}" type="pres">
+      <dgm:prSet presAssocID="{4AE79586-0A41-46F2-837C-5EA922501645}" presName="space" presStyleCnt="0"/>
+      <dgm:spPr/>
+    </dgm:pt>
+    <dgm:pt modelId="{FDAF9D7E-AA21-46CA-88E3-9E322BD6A7C0}" type="pres">
+      <dgm:prSet presAssocID="{93756187-EC59-4D7F-9060-1D62A65626E4}" presName="compositeA" presStyleCnt="0"/>
+      <dgm:spPr/>
+    </dgm:pt>
+    <dgm:pt modelId="{8CE852D7-8899-4908-B7F1-42F32C89D74F}" type="pres">
+      <dgm:prSet presAssocID="{93756187-EC59-4D7F-9060-1D62A65626E4}" presName="textA" presStyleLbl="revTx" presStyleIdx="2" presStyleCnt="4">
+        <dgm:presLayoutVars>
+          <dgm:bulletEnabled val="1"/>
+        </dgm:presLayoutVars>
+      </dgm:prSet>
+      <dgm:spPr/>
+    </dgm:pt>
+    <dgm:pt modelId="{758C6F5C-8415-4852-9352-C5C0D921FEBD}" type="pres">
+      <dgm:prSet presAssocID="{93756187-EC59-4D7F-9060-1D62A65626E4}" presName="circleA" presStyleLbl="node1" presStyleIdx="2" presStyleCnt="4"/>
+      <dgm:spPr/>
+    </dgm:pt>
+    <dgm:pt modelId="{BEBF0864-4BCC-49CF-97CE-B99D6F37512C}" type="pres">
+      <dgm:prSet presAssocID="{93756187-EC59-4D7F-9060-1D62A65626E4}" presName="spaceA" presStyleCnt="0"/>
+      <dgm:spPr/>
+    </dgm:pt>
+    <dgm:pt modelId="{1716BBE6-F9EC-4AE7-8349-42C5686050DC}" type="pres">
+      <dgm:prSet presAssocID="{6C58C909-E7D0-4485-B4E3-52911310197C}" presName="space" presStyleCnt="0"/>
+      <dgm:spPr/>
+    </dgm:pt>
+    <dgm:pt modelId="{B4A60255-0548-4AFB-BF8C-6C15F5D82B5E}" type="pres">
+      <dgm:prSet presAssocID="{8AE3726E-75FB-4CD0-AD19-C9D6B81CA7F7}" presName="compositeB" presStyleCnt="0"/>
+      <dgm:spPr/>
+    </dgm:pt>
+    <dgm:pt modelId="{BA686BC1-F7AD-4885-8EB6-68B6E7717DDD}" type="pres">
+      <dgm:prSet presAssocID="{8AE3726E-75FB-4CD0-AD19-C9D6B81CA7F7}" presName="textB" presStyleLbl="revTx" presStyleIdx="3" presStyleCnt="4">
+        <dgm:presLayoutVars>
+          <dgm:bulletEnabled val="1"/>
+        </dgm:presLayoutVars>
+      </dgm:prSet>
+      <dgm:spPr/>
+    </dgm:pt>
+    <dgm:pt modelId="{394A1AED-D461-4CB8-81C8-FE05655CE086}" type="pres">
+      <dgm:prSet presAssocID="{8AE3726E-75FB-4CD0-AD19-C9D6B81CA7F7}" presName="circleB" presStyleLbl="node1" presStyleIdx="3" presStyleCnt="4"/>
+      <dgm:spPr/>
+    </dgm:pt>
+    <dgm:pt modelId="{BF2C5714-B9F7-41E4-B73F-B93743B6B6A1}" type="pres">
+      <dgm:prSet presAssocID="{8AE3726E-75FB-4CD0-AD19-C9D6B81CA7F7}" presName="spaceB" presStyleCnt="0"/>
+      <dgm:spPr/>
+    </dgm:pt>
+  </dgm:ptLst>
+  <dgm:cxnLst>
+    <dgm:cxn modelId="{C4B1BE5F-AF04-4EEF-83D0-155AFCB5469F}" srcId="{39BA76EA-6B06-4563-BA94-837024255026}" destId="{EF9695F1-D2F2-46EE-910E-501309FF95E0}" srcOrd="0" destOrd="0" parTransId="{EC524604-523E-4098-83D5-FD165CDA904F}" sibTransId="{CA9B8DBD-E7DF-4E94-A7AA-EE090B32CECF}"/>
+    <dgm:cxn modelId="{EB95626F-8061-4199-ADA0-CB28C83C4E6F}" type="presOf" srcId="{18C4879F-0E5A-4618-AECC-8E7BC7F77A71}" destId="{17B2C020-7EDE-4C68-AC0C-0161BCDFDCD1}" srcOrd="0" destOrd="0" presId="urn:microsoft.com/office/officeart/2005/8/layout/hProcess11"/>
+    <dgm:cxn modelId="{2535E9B5-6537-42FC-88C6-8B5F05B58F33}" type="presOf" srcId="{39BA76EA-6B06-4563-BA94-837024255026}" destId="{7421BAA9-F779-486E-AD8C-D024EA295426}" srcOrd="0" destOrd="0" presId="urn:microsoft.com/office/officeart/2005/8/layout/hProcess11"/>
+    <dgm:cxn modelId="{9B4668BF-3AAE-4137-A63A-A18E3C968577}" type="presOf" srcId="{93756187-EC59-4D7F-9060-1D62A65626E4}" destId="{8CE852D7-8899-4908-B7F1-42F32C89D74F}" srcOrd="0" destOrd="0" presId="urn:microsoft.com/office/officeart/2005/8/layout/hProcess11"/>
+    <dgm:cxn modelId="{596135C2-58CD-48ED-A2EA-571A3D4E92F6}" type="presOf" srcId="{EF9695F1-D2F2-46EE-910E-501309FF95E0}" destId="{65E73C9B-7DEC-466A-A79B-796DE227ADB9}" srcOrd="0" destOrd="0" presId="urn:microsoft.com/office/officeart/2005/8/layout/hProcess11"/>
+    <dgm:cxn modelId="{EE45DFCD-D452-425C-A034-ACFC73791A0F}" srcId="{39BA76EA-6B06-4563-BA94-837024255026}" destId="{18C4879F-0E5A-4618-AECC-8E7BC7F77A71}" srcOrd="1" destOrd="0" parTransId="{BBD651E1-6723-4F5A-A610-16E954E23BB7}" sibTransId="{4AE79586-0A41-46F2-837C-5EA922501645}"/>
+    <dgm:cxn modelId="{CA59A4D8-7805-400B-8188-2F85C78D3E52}" srcId="{39BA76EA-6B06-4563-BA94-837024255026}" destId="{93756187-EC59-4D7F-9060-1D62A65626E4}" srcOrd="2" destOrd="0" parTransId="{B5069614-2112-455F-B2DD-F04F2D19C091}" sibTransId="{6C58C909-E7D0-4485-B4E3-52911310197C}"/>
+    <dgm:cxn modelId="{82F2F2DE-DF34-4263-A13D-B6AD40142521}" srcId="{39BA76EA-6B06-4563-BA94-837024255026}" destId="{8AE3726E-75FB-4CD0-AD19-C9D6B81CA7F7}" srcOrd="3" destOrd="0" parTransId="{D7A024A8-ACF3-4289-8861-6716D2E32EC0}" sibTransId="{17BE14E1-9D7C-486E-BDF0-378827A22EBA}"/>
+    <dgm:cxn modelId="{11CC9CF6-8F45-43F1-9FA5-04F8E6D7D234}" type="presOf" srcId="{8AE3726E-75FB-4CD0-AD19-C9D6B81CA7F7}" destId="{BA686BC1-F7AD-4885-8EB6-68B6E7717DDD}" srcOrd="0" destOrd="0" presId="urn:microsoft.com/office/officeart/2005/8/layout/hProcess11"/>
+    <dgm:cxn modelId="{F294262D-245C-4252-8D7A-0ED396F05FE9}" type="presParOf" srcId="{7421BAA9-F779-486E-AD8C-D024EA295426}" destId="{F0D71F57-F39E-4BEA-825A-3C2186C4355C}" srcOrd="0" destOrd="0" presId="urn:microsoft.com/office/officeart/2005/8/layout/hProcess11"/>
+    <dgm:cxn modelId="{22906563-420B-4EBF-A347-258840F71997}" type="presParOf" srcId="{7421BAA9-F779-486E-AD8C-D024EA295426}" destId="{95385AB0-E53D-48C6-A206-C31AB2B8DDFC}" srcOrd="1" destOrd="0" presId="urn:microsoft.com/office/officeart/2005/8/layout/hProcess11"/>
+    <dgm:cxn modelId="{810BC9E2-25D3-4B92-B5E4-9AAEAA55EC4A}" type="presParOf" srcId="{95385AB0-E53D-48C6-A206-C31AB2B8DDFC}" destId="{FB14F5CA-74CD-41F8-B937-5E86E7027DA0}" srcOrd="0" destOrd="0" presId="urn:microsoft.com/office/officeart/2005/8/layout/hProcess11"/>
+    <dgm:cxn modelId="{6130B0CD-8EE8-44B6-8A1D-3411E3DBA195}" type="presParOf" srcId="{FB14F5CA-74CD-41F8-B937-5E86E7027DA0}" destId="{65E73C9B-7DEC-466A-A79B-796DE227ADB9}" srcOrd="0" destOrd="0" presId="urn:microsoft.com/office/officeart/2005/8/layout/hProcess11"/>
+    <dgm:cxn modelId="{CA85181E-E487-4CD2-8439-C07EEC29DEE9}" type="presParOf" srcId="{FB14F5CA-74CD-41F8-B937-5E86E7027DA0}" destId="{45A6A8F0-B1D6-4688-9CA9-EF202B64FCD6}" srcOrd="1" destOrd="0" presId="urn:microsoft.com/office/officeart/2005/8/layout/hProcess11"/>
+    <dgm:cxn modelId="{2F1AC783-D1BE-476D-A519-CD912DF22AF7}" type="presParOf" srcId="{FB14F5CA-74CD-41F8-B937-5E86E7027DA0}" destId="{6A66B90A-CB54-426F-9BB1-325491E61F98}" srcOrd="2" destOrd="0" presId="urn:microsoft.com/office/officeart/2005/8/layout/hProcess11"/>
+    <dgm:cxn modelId="{A54691FD-5871-464E-8618-6FAF642CF963}" type="presParOf" srcId="{95385AB0-E53D-48C6-A206-C31AB2B8DDFC}" destId="{9D391CB7-34AC-4350-94F1-E6B10CC9080D}" srcOrd="1" destOrd="0" presId="urn:microsoft.com/office/officeart/2005/8/layout/hProcess11"/>
+    <dgm:cxn modelId="{6057C4A9-B4EE-41CB-BD70-78F3E519D06B}" type="presParOf" srcId="{95385AB0-E53D-48C6-A206-C31AB2B8DDFC}" destId="{4B525CCC-6C12-4810-A9F2-1ED91A5AED70}" srcOrd="2" destOrd="0" presId="urn:microsoft.com/office/officeart/2005/8/layout/hProcess11"/>
+    <dgm:cxn modelId="{A60262BA-99C4-49D6-B8A9-756F72DA40BA}" type="presParOf" srcId="{4B525CCC-6C12-4810-A9F2-1ED91A5AED70}" destId="{17B2C020-7EDE-4C68-AC0C-0161BCDFDCD1}" srcOrd="0" destOrd="0" presId="urn:microsoft.com/office/officeart/2005/8/layout/hProcess11"/>
+    <dgm:cxn modelId="{51FB640F-1205-4AF6-9279-9A9CA4CEA824}" type="presParOf" srcId="{4B525CCC-6C12-4810-A9F2-1ED91A5AED70}" destId="{388803F4-D24C-43AF-A40C-E269BF2641C9}" srcOrd="1" destOrd="0" presId="urn:microsoft.com/office/officeart/2005/8/layout/hProcess11"/>
+    <dgm:cxn modelId="{40C1C686-DADD-45F8-855E-D6C002294A6C}" type="presParOf" srcId="{4B525CCC-6C12-4810-A9F2-1ED91A5AED70}" destId="{5F8572A5-326D-4ABA-B75D-9E8E646DF764}" srcOrd="2" destOrd="0" presId="urn:microsoft.com/office/officeart/2005/8/layout/hProcess11"/>
+    <dgm:cxn modelId="{10EC52AF-FC42-4C85-8342-378F2DD0F1B8}" type="presParOf" srcId="{95385AB0-E53D-48C6-A206-C31AB2B8DDFC}" destId="{16586103-A175-4B4F-8DBD-65F5A3D76BBC}" srcOrd="3" destOrd="0" presId="urn:microsoft.com/office/officeart/2005/8/layout/hProcess11"/>
+    <dgm:cxn modelId="{61C1DC66-C073-46DE-92BD-38A5B744C3BF}" type="presParOf" srcId="{95385AB0-E53D-48C6-A206-C31AB2B8DDFC}" destId="{FDAF9D7E-AA21-46CA-88E3-9E322BD6A7C0}" srcOrd="4" destOrd="0" presId="urn:microsoft.com/office/officeart/2005/8/layout/hProcess11"/>
+    <dgm:cxn modelId="{94882986-CA3F-4515-B22C-9F571183DACB}" type="presParOf" srcId="{FDAF9D7E-AA21-46CA-88E3-9E322BD6A7C0}" destId="{8CE852D7-8899-4908-B7F1-42F32C89D74F}" srcOrd="0" destOrd="0" presId="urn:microsoft.com/office/officeart/2005/8/layout/hProcess11"/>
+    <dgm:cxn modelId="{B352CA1C-DF7D-4B3D-9D1C-598247D7E8BA}" type="presParOf" srcId="{FDAF9D7E-AA21-46CA-88E3-9E322BD6A7C0}" destId="{758C6F5C-8415-4852-9352-C5C0D921FEBD}" srcOrd="1" destOrd="0" presId="urn:microsoft.com/office/officeart/2005/8/layout/hProcess11"/>
+    <dgm:cxn modelId="{D8875C91-C171-445A-952B-B80A60594B6F}" type="presParOf" srcId="{FDAF9D7E-AA21-46CA-88E3-9E322BD6A7C0}" destId="{BEBF0864-4BCC-49CF-97CE-B99D6F37512C}" srcOrd="2" destOrd="0" presId="urn:microsoft.com/office/officeart/2005/8/layout/hProcess11"/>
+    <dgm:cxn modelId="{8B61EE72-BA5D-4DA4-9096-BD934CC4FDEC}" type="presParOf" srcId="{95385AB0-E53D-48C6-A206-C31AB2B8DDFC}" destId="{1716BBE6-F9EC-4AE7-8349-42C5686050DC}" srcOrd="5" destOrd="0" presId="urn:microsoft.com/office/officeart/2005/8/layout/hProcess11"/>
+    <dgm:cxn modelId="{F6239A18-B077-4153-A75F-3547D2613789}" type="presParOf" srcId="{95385AB0-E53D-48C6-A206-C31AB2B8DDFC}" destId="{B4A60255-0548-4AFB-BF8C-6C15F5D82B5E}" srcOrd="6" destOrd="0" presId="urn:microsoft.com/office/officeart/2005/8/layout/hProcess11"/>
+    <dgm:cxn modelId="{018A4CA8-70BF-4517-B20C-1895FEB59E61}" type="presParOf" srcId="{B4A60255-0548-4AFB-BF8C-6C15F5D82B5E}" destId="{BA686BC1-F7AD-4885-8EB6-68B6E7717DDD}" srcOrd="0" destOrd="0" presId="urn:microsoft.com/office/officeart/2005/8/layout/hProcess11"/>
+    <dgm:cxn modelId="{C269E91E-D549-458B-B48D-85E9AAC24BE1}" type="presParOf" srcId="{B4A60255-0548-4AFB-BF8C-6C15F5D82B5E}" destId="{394A1AED-D461-4CB8-81C8-FE05655CE086}" srcOrd="1" destOrd="0" presId="urn:microsoft.com/office/officeart/2005/8/layout/hProcess11"/>
+    <dgm:cxn modelId="{E1B6A1A2-0FD3-43CD-BC78-7E555E05D896}" type="presParOf" srcId="{B4A60255-0548-4AFB-BF8C-6C15F5D82B5E}" destId="{BF2C5714-B9F7-41E4-B73F-B93743B6B6A1}" srcOrd="2" destOrd="0" presId="urn:microsoft.com/office/officeart/2005/8/layout/hProcess11"/>
+  </dgm:cxnLst>
+  <dgm:bg/>
+  <dgm:whole/>
+  <dgm:extLst>
+    <a:ext uri="http://schemas.microsoft.com/office/drawing/2008/diagram">
+      <dsp:dataModelExt xmlns:dsp="http://schemas.microsoft.com/office/drawing/2008/diagram" relId="rId6" minVer="http://schemas.openxmlformats.org/drawingml/2006/diagram"/>
+    </a:ext>
+  </dgm:extLst>
+</dgm:dataModel>
+</file>
+
+<file path=ppt/diagrams/drawing1.xml><?xml version="1.0" encoding="utf-8"?>
+<dsp:drawing xmlns:dgm="http://schemas.openxmlformats.org/drawingml/2006/diagram" xmlns:dsp="http://schemas.microsoft.com/office/drawing/2008/diagram" xmlns:a="http://schemas.openxmlformats.org/drawingml/2006/main">
+  <dsp:spTree>
+    <dsp:nvGrpSpPr>
+      <dsp:cNvPr id="0" name=""/>
+      <dsp:cNvGrpSpPr/>
+    </dsp:nvGrpSpPr>
+    <dsp:grpSpPr/>
+    <dsp:sp modelId="{F0D71F57-F39E-4BEA-825A-3C2186C4355C}">
+      <dsp:nvSpPr>
+        <dsp:cNvPr id="0" name=""/>
+        <dsp:cNvSpPr/>
+      </dsp:nvSpPr>
+      <dsp:spPr>
+        <a:xfrm>
+          <a:off x="0" y="827550"/>
+          <a:ext cx="8268979" cy="1103400"/>
+        </a:xfrm>
+        <a:prstGeom prst="notchedRightArrow">
+          <a:avLst/>
+        </a:prstGeom>
+        <a:solidFill>
+          <a:schemeClr val="accent1">
+            <a:tint val="40000"/>
+            <a:hueOff val="0"/>
+            <a:satOff val="0"/>
+            <a:lumOff val="0"/>
+            <a:alphaOff val="0"/>
+          </a:schemeClr>
+        </a:solidFill>
+        <a:ln>
+          <a:noFill/>
+        </a:ln>
+        <a:effectLst/>
+      </dsp:spPr>
+      <dsp:style>
+        <a:lnRef idx="0">
+          <a:scrgbClr r="0" g="0" b="0"/>
+        </a:lnRef>
+        <a:fillRef idx="1">
+          <a:scrgbClr r="0" g="0" b="0"/>
+        </a:fillRef>
+        <a:effectRef idx="0">
+          <a:scrgbClr r="0" g="0" b="0"/>
+        </a:effectRef>
+        <a:fontRef idx="minor"/>
+      </dsp:style>
+    </dsp:sp>
+    <dsp:sp modelId="{65E73C9B-7DEC-466A-A79B-796DE227ADB9}">
+      <dsp:nvSpPr>
+        <dsp:cNvPr id="0" name=""/>
+        <dsp:cNvSpPr/>
+      </dsp:nvSpPr>
+      <dsp:spPr>
+        <a:xfrm>
+          <a:off x="3724" y="0"/>
+          <a:ext cx="1791477" cy="1103400"/>
+        </a:xfrm>
+        <a:prstGeom prst="rect">
+          <a:avLst/>
+        </a:prstGeom>
+        <a:noFill/>
+        <a:ln>
+          <a:noFill/>
+        </a:ln>
+        <a:effectLst/>
+      </dsp:spPr>
+      <dsp:style>
+        <a:lnRef idx="0">
+          <a:scrgbClr r="0" g="0" b="0"/>
+        </a:lnRef>
+        <a:fillRef idx="0">
+          <a:scrgbClr r="0" g="0" b="0"/>
+        </a:fillRef>
+        <a:effectRef idx="0">
+          <a:scrgbClr r="0" g="0" b="0"/>
+        </a:effectRef>
+        <a:fontRef idx="minor"/>
+      </dsp:style>
+      <dsp:txBody>
+        <a:bodyPr spcFirstLastPara="0" vert="horz" wrap="square" lIns="263144" tIns="263144" rIns="263144" bIns="263144" numCol="1" spcCol="1270" anchor="b" anchorCtr="0">
+          <a:noAutofit/>
+        </a:bodyPr>
+        <a:lstStyle/>
+        <a:p>
+          <a:pPr marL="0" lvl="0" indent="0" algn="ctr" defTabSz="1644650">
+            <a:lnSpc>
+              <a:spcPct val="90000"/>
+            </a:lnSpc>
+            <a:spcBef>
+              <a:spcPct val="0"/>
+            </a:spcBef>
+            <a:spcAft>
+              <a:spcPct val="35000"/>
+            </a:spcAft>
+            <a:buNone/>
+          </a:pPr>
+          <a:r>
+            <a:rPr lang="zh-TW" altLang="en-US" sz="3700" kern="1200" dirty="0">
+              <a:latin typeface="標楷體" panose="03000509000000000000" pitchFamily="65" charset="-120"/>
+              <a:ea typeface="標楷體" panose="03000509000000000000" pitchFamily="65" charset="-120"/>
+            </a:rPr>
+            <a:t>疫情</a:t>
+          </a:r>
+        </a:p>
+      </dsp:txBody>
+      <dsp:txXfrm>
+        <a:off x="3724" y="0"/>
+        <a:ext cx="1791477" cy="1103400"/>
+      </dsp:txXfrm>
+    </dsp:sp>
+    <dsp:sp modelId="{45A6A8F0-B1D6-4688-9CA9-EF202B64FCD6}">
+      <dsp:nvSpPr>
+        <dsp:cNvPr id="0" name=""/>
+        <dsp:cNvSpPr/>
+      </dsp:nvSpPr>
+      <dsp:spPr>
+        <a:xfrm>
+          <a:off x="761538" y="1241325"/>
+          <a:ext cx="275850" cy="275850"/>
+        </a:xfrm>
+        <a:prstGeom prst="ellipse">
+          <a:avLst/>
+        </a:prstGeom>
+        <a:solidFill>
+          <a:schemeClr val="accent1">
+            <a:hueOff val="0"/>
+            <a:satOff val="0"/>
+            <a:lumOff val="0"/>
+            <a:alphaOff val="0"/>
+          </a:schemeClr>
+        </a:solidFill>
+        <a:ln w="15875" cap="flat" cmpd="sng" algn="ctr">
+          <a:solidFill>
+            <a:schemeClr val="lt1">
+              <a:hueOff val="0"/>
+              <a:satOff val="0"/>
+              <a:lumOff val="0"/>
+              <a:alphaOff val="0"/>
+            </a:schemeClr>
+          </a:solidFill>
+          <a:prstDash val="solid"/>
+        </a:ln>
+        <a:effectLst/>
+      </dsp:spPr>
+      <dsp:style>
+        <a:lnRef idx="2">
+          <a:scrgbClr r="0" g="0" b="0"/>
+        </a:lnRef>
+        <a:fillRef idx="1">
+          <a:scrgbClr r="0" g="0" b="0"/>
+        </a:fillRef>
+        <a:effectRef idx="0">
+          <a:scrgbClr r="0" g="0" b="0"/>
+        </a:effectRef>
+        <a:fontRef idx="minor">
+          <a:schemeClr val="lt1"/>
+        </a:fontRef>
+      </dsp:style>
+    </dsp:sp>
+    <dsp:sp modelId="{17B2C020-7EDE-4C68-AC0C-0161BCDFDCD1}">
+      <dsp:nvSpPr>
+        <dsp:cNvPr id="0" name=""/>
+        <dsp:cNvSpPr/>
+      </dsp:nvSpPr>
+      <dsp:spPr>
+        <a:xfrm>
+          <a:off x="1884776" y="1655101"/>
+          <a:ext cx="1791477" cy="1103400"/>
+        </a:xfrm>
+        <a:prstGeom prst="rect">
+          <a:avLst/>
+        </a:prstGeom>
+        <a:noFill/>
+        <a:ln>
+          <a:noFill/>
+        </a:ln>
+        <a:effectLst/>
+      </dsp:spPr>
+      <dsp:style>
+        <a:lnRef idx="0">
+          <a:scrgbClr r="0" g="0" b="0"/>
+        </a:lnRef>
+        <a:fillRef idx="0">
+          <a:scrgbClr r="0" g="0" b="0"/>
+        </a:fillRef>
+        <a:effectRef idx="0">
+          <a:scrgbClr r="0" g="0" b="0"/>
+        </a:effectRef>
+        <a:fontRef idx="minor"/>
+      </dsp:style>
+      <dsp:txBody>
+        <a:bodyPr spcFirstLastPara="0" vert="horz" wrap="square" lIns="263144" tIns="263144" rIns="263144" bIns="263144" numCol="1" spcCol="1270" anchor="t" anchorCtr="0">
+          <a:noAutofit/>
+        </a:bodyPr>
+        <a:lstStyle/>
+        <a:p>
+          <a:pPr marL="0" lvl="0" indent="0" algn="ctr" defTabSz="1644650">
+            <a:lnSpc>
+              <a:spcPct val="90000"/>
+            </a:lnSpc>
+            <a:spcBef>
+              <a:spcPct val="0"/>
+            </a:spcBef>
+            <a:spcAft>
+              <a:spcPct val="35000"/>
+            </a:spcAft>
+            <a:buNone/>
+          </a:pPr>
+          <a:r>
+            <a:rPr lang="en-US" altLang="zh-TW" sz="3700" kern="1200" dirty="0">
+              <a:latin typeface="標楷體" panose="03000509000000000000" pitchFamily="65" charset="-120"/>
+              <a:ea typeface="標楷體" panose="03000509000000000000" pitchFamily="65" charset="-120"/>
+            </a:rPr>
+            <a:t>?</a:t>
+          </a:r>
+          <a:endParaRPr lang="zh-TW" altLang="en-US" sz="3700" kern="1200" dirty="0">
+            <a:latin typeface="標楷體" panose="03000509000000000000" pitchFamily="65" charset="-120"/>
+            <a:ea typeface="標楷體" panose="03000509000000000000" pitchFamily="65" charset="-120"/>
+          </a:endParaRPr>
+        </a:p>
+      </dsp:txBody>
+      <dsp:txXfrm>
+        <a:off x="1884776" y="1655101"/>
+        <a:ext cx="1791477" cy="1103400"/>
+      </dsp:txXfrm>
+    </dsp:sp>
+    <dsp:sp modelId="{388803F4-D24C-43AF-A40C-E269BF2641C9}">
+      <dsp:nvSpPr>
+        <dsp:cNvPr id="0" name=""/>
+        <dsp:cNvSpPr/>
+      </dsp:nvSpPr>
+      <dsp:spPr>
+        <a:xfrm>
+          <a:off x="2642589" y="1241325"/>
+          <a:ext cx="275850" cy="275850"/>
+        </a:xfrm>
+        <a:prstGeom prst="ellipse">
+          <a:avLst/>
+        </a:prstGeom>
+        <a:solidFill>
+          <a:schemeClr val="accent1">
+            <a:hueOff val="0"/>
+            <a:satOff val="0"/>
+            <a:lumOff val="0"/>
+            <a:alphaOff val="0"/>
+          </a:schemeClr>
+        </a:solidFill>
+        <a:ln w="15875" cap="flat" cmpd="sng" algn="ctr">
+          <a:solidFill>
+            <a:schemeClr val="lt1">
+              <a:hueOff val="0"/>
+              <a:satOff val="0"/>
+              <a:lumOff val="0"/>
+              <a:alphaOff val="0"/>
+            </a:schemeClr>
+          </a:solidFill>
+          <a:prstDash val="solid"/>
+        </a:ln>
+        <a:effectLst/>
+      </dsp:spPr>
+      <dsp:style>
+        <a:lnRef idx="2">
+          <a:scrgbClr r="0" g="0" b="0"/>
+        </a:lnRef>
+        <a:fillRef idx="1">
+          <a:scrgbClr r="0" g="0" b="0"/>
+        </a:fillRef>
+        <a:effectRef idx="0">
+          <a:scrgbClr r="0" g="0" b="0"/>
+        </a:effectRef>
+        <a:fontRef idx="minor">
+          <a:schemeClr val="lt1"/>
+        </a:fontRef>
+      </dsp:style>
+    </dsp:sp>
+    <dsp:sp modelId="{8CE852D7-8899-4908-B7F1-42F32C89D74F}">
+      <dsp:nvSpPr>
+        <dsp:cNvPr id="0" name=""/>
+        <dsp:cNvSpPr/>
+      </dsp:nvSpPr>
+      <dsp:spPr>
+        <a:xfrm>
+          <a:off x="3765827" y="0"/>
+          <a:ext cx="1791477" cy="1103400"/>
+        </a:xfrm>
+        <a:prstGeom prst="rect">
+          <a:avLst/>
+        </a:prstGeom>
+        <a:noFill/>
+        <a:ln>
+          <a:noFill/>
+        </a:ln>
+        <a:effectLst/>
+      </dsp:spPr>
+      <dsp:style>
+        <a:lnRef idx="0">
+          <a:scrgbClr r="0" g="0" b="0"/>
+        </a:lnRef>
+        <a:fillRef idx="0">
+          <a:scrgbClr r="0" g="0" b="0"/>
+        </a:fillRef>
+        <a:effectRef idx="0">
+          <a:scrgbClr r="0" g="0" b="0"/>
+        </a:effectRef>
+        <a:fontRef idx="minor"/>
+      </dsp:style>
+      <dsp:txBody>
+        <a:bodyPr spcFirstLastPara="0" vert="horz" wrap="square" lIns="263144" tIns="263144" rIns="263144" bIns="263144" numCol="1" spcCol="1270" anchor="b" anchorCtr="0">
+          <a:noAutofit/>
+        </a:bodyPr>
+        <a:lstStyle/>
+        <a:p>
+          <a:pPr marL="0" lvl="0" indent="0" algn="ctr" defTabSz="1644650">
+            <a:lnSpc>
+              <a:spcPct val="90000"/>
+            </a:lnSpc>
+            <a:spcBef>
+              <a:spcPct val="0"/>
+            </a:spcBef>
+            <a:spcAft>
+              <a:spcPct val="35000"/>
+            </a:spcAft>
+            <a:buNone/>
+          </a:pPr>
+          <a:r>
+            <a:rPr lang="zh-TW" altLang="en-US" sz="3700" kern="1200" dirty="0">
+              <a:latin typeface="標楷體" panose="03000509000000000000" pitchFamily="65" charset="-120"/>
+              <a:ea typeface="標楷體" panose="03000509000000000000" pitchFamily="65" charset="-120"/>
+            </a:rPr>
+            <a:t>詐騙</a:t>
+          </a:r>
+        </a:p>
+      </dsp:txBody>
+      <dsp:txXfrm>
+        <a:off x="3765827" y="0"/>
+        <a:ext cx="1791477" cy="1103400"/>
+      </dsp:txXfrm>
+    </dsp:sp>
+    <dsp:sp modelId="{758C6F5C-8415-4852-9352-C5C0D921FEBD}">
+      <dsp:nvSpPr>
+        <dsp:cNvPr id="0" name=""/>
+        <dsp:cNvSpPr/>
+      </dsp:nvSpPr>
+      <dsp:spPr>
+        <a:xfrm>
+          <a:off x="4523641" y="1241325"/>
+          <a:ext cx="275850" cy="275850"/>
+        </a:xfrm>
+        <a:prstGeom prst="ellipse">
+          <a:avLst/>
+        </a:prstGeom>
+        <a:solidFill>
+          <a:schemeClr val="accent1">
+            <a:hueOff val="0"/>
+            <a:satOff val="0"/>
+            <a:lumOff val="0"/>
+            <a:alphaOff val="0"/>
+          </a:schemeClr>
+        </a:solidFill>
+        <a:ln w="15875" cap="flat" cmpd="sng" algn="ctr">
+          <a:solidFill>
+            <a:schemeClr val="lt1">
+              <a:hueOff val="0"/>
+              <a:satOff val="0"/>
+              <a:lumOff val="0"/>
+              <a:alphaOff val="0"/>
+            </a:schemeClr>
+          </a:solidFill>
+          <a:prstDash val="solid"/>
+        </a:ln>
+        <a:effectLst/>
+      </dsp:spPr>
+      <dsp:style>
+        <a:lnRef idx="2">
+          <a:scrgbClr r="0" g="0" b="0"/>
+        </a:lnRef>
+        <a:fillRef idx="1">
+          <a:scrgbClr r="0" g="0" b="0"/>
+        </a:fillRef>
+        <a:effectRef idx="0">
+          <a:scrgbClr r="0" g="0" b="0"/>
+        </a:effectRef>
+        <a:fontRef idx="minor">
+          <a:schemeClr val="lt1"/>
+        </a:fontRef>
+      </dsp:style>
+    </dsp:sp>
+    <dsp:sp modelId="{BA686BC1-F7AD-4885-8EB6-68B6E7717DDD}">
+      <dsp:nvSpPr>
+        <dsp:cNvPr id="0" name=""/>
+        <dsp:cNvSpPr/>
+      </dsp:nvSpPr>
+      <dsp:spPr>
+        <a:xfrm>
+          <a:off x="5646878" y="1655101"/>
+          <a:ext cx="1791477" cy="1103400"/>
+        </a:xfrm>
+        <a:prstGeom prst="rect">
+          <a:avLst/>
+        </a:prstGeom>
+        <a:noFill/>
+        <a:ln>
+          <a:noFill/>
+        </a:ln>
+        <a:effectLst/>
+      </dsp:spPr>
+      <dsp:style>
+        <a:lnRef idx="0">
+          <a:scrgbClr r="0" g="0" b="0"/>
+        </a:lnRef>
+        <a:fillRef idx="0">
+          <a:scrgbClr r="0" g="0" b="0"/>
+        </a:fillRef>
+        <a:effectRef idx="0">
+          <a:scrgbClr r="0" g="0" b="0"/>
+        </a:effectRef>
+        <a:fontRef idx="minor"/>
+      </dsp:style>
+      <dsp:txBody>
+        <a:bodyPr spcFirstLastPara="0" vert="horz" wrap="square" lIns="263144" tIns="263144" rIns="263144" bIns="263144" numCol="1" spcCol="1270" anchor="t" anchorCtr="0">
+          <a:noAutofit/>
+        </a:bodyPr>
+        <a:lstStyle/>
+        <a:p>
+          <a:pPr marL="0" lvl="0" indent="0" algn="ctr" defTabSz="1644650">
+            <a:lnSpc>
+              <a:spcPct val="90000"/>
+            </a:lnSpc>
+            <a:spcBef>
+              <a:spcPct val="0"/>
+            </a:spcBef>
+            <a:spcAft>
+              <a:spcPct val="35000"/>
+            </a:spcAft>
+            <a:buNone/>
+          </a:pPr>
+          <a:r>
+            <a:rPr lang="en-US" altLang="zh-TW" sz="3700" kern="1200" dirty="0">
+              <a:latin typeface="Times New Roman" panose="02020603050405020304" pitchFamily="18" charset="0"/>
+              <a:cs typeface="Times New Roman" panose="02020603050405020304" pitchFamily="18" charset="0"/>
+            </a:rPr>
+            <a:t>AI</a:t>
+          </a:r>
+          <a:endParaRPr lang="zh-TW" altLang="en-US" sz="3700" kern="1200" dirty="0">
+            <a:latin typeface="Times New Roman" panose="02020603050405020304" pitchFamily="18" charset="0"/>
+            <a:cs typeface="Times New Roman" panose="02020603050405020304" pitchFamily="18" charset="0"/>
+          </a:endParaRPr>
+        </a:p>
+      </dsp:txBody>
+      <dsp:txXfrm>
+        <a:off x="5646878" y="1655101"/>
+        <a:ext cx="1791477" cy="1103400"/>
+      </dsp:txXfrm>
+    </dsp:sp>
+    <dsp:sp modelId="{394A1AED-D461-4CB8-81C8-FE05655CE086}">
+      <dsp:nvSpPr>
+        <dsp:cNvPr id="0" name=""/>
+        <dsp:cNvSpPr/>
+      </dsp:nvSpPr>
+      <dsp:spPr>
+        <a:xfrm>
+          <a:off x="6404692" y="1241325"/>
+          <a:ext cx="275850" cy="275850"/>
+        </a:xfrm>
+        <a:prstGeom prst="ellipse">
+          <a:avLst/>
+        </a:prstGeom>
+        <a:solidFill>
+          <a:schemeClr val="accent1">
+            <a:hueOff val="0"/>
+            <a:satOff val="0"/>
+            <a:lumOff val="0"/>
+            <a:alphaOff val="0"/>
+          </a:schemeClr>
+        </a:solidFill>
+        <a:ln w="15875" cap="flat" cmpd="sng" algn="ctr">
+          <a:solidFill>
+            <a:schemeClr val="lt1">
+              <a:hueOff val="0"/>
+              <a:satOff val="0"/>
+              <a:lumOff val="0"/>
+              <a:alphaOff val="0"/>
+            </a:schemeClr>
+          </a:solidFill>
+          <a:prstDash val="solid"/>
+        </a:ln>
+        <a:effectLst/>
+      </dsp:spPr>
+      <dsp:style>
+        <a:lnRef idx="2">
+          <a:scrgbClr r="0" g="0" b="0"/>
+        </a:lnRef>
+        <a:fillRef idx="1">
+          <a:scrgbClr r="0" g="0" b="0"/>
+        </a:fillRef>
+        <a:effectRef idx="0">
+          <a:scrgbClr r="0" g="0" b="0"/>
+        </a:effectRef>
+        <a:fontRef idx="minor">
+          <a:schemeClr val="lt1"/>
+        </a:fontRef>
+      </dsp:style>
+    </dsp:sp>
+  </dsp:spTree>
+</dsp:drawing>
+</file>
+
+<file path=ppt/diagrams/layout1.xml><?xml version="1.0" encoding="utf-8"?>
+<dgm:layoutDef xmlns:dgm="http://schemas.openxmlformats.org/drawingml/2006/diagram" xmlns:a="http://schemas.openxmlformats.org/drawingml/2006/main" uniqueId="urn:microsoft.com/office/officeart/2005/8/layout/hProcess11">
+  <dgm:title val=""/>
+  <dgm:desc val=""/>
+  <dgm:catLst>
+    <dgm:cat type="process" pri="8000"/>
+    <dgm:cat type="convert" pri="14000"/>
+  </dgm:catLst>
+  <dgm:sampData useDef="1">
+    <dgm:dataModel>
+      <dgm:ptLst/>
+      <dgm:bg/>
+      <dgm:whole/>
+    </dgm:dataModel>
+  </dgm:sampData>
+  <dgm:styleData>
+    <dgm:dataModel>
+      <dgm:ptLst>
+        <dgm:pt modelId="0" type="doc"/>
+        <dgm:pt modelId="1"/>
+        <dgm:pt modelId="2"/>
+      </dgm:ptLst>
+      <dgm:cxnLst>
+        <dgm:cxn modelId="4" srcId="0" destId="1" srcOrd="0" destOrd="0"/>
+        <dgm:cxn modelId="5" srcId="0" destId="2" srcOrd="1" destOrd="0"/>
+      </dgm:cxnLst>
+      <dgm:bg/>
+      <dgm:whole/>
+    </dgm:dataModel>
+  </dgm:styleData>
+  <dgm:clrData>
+    <dgm:dataModel>
+      <dgm:ptLst>
+        <dgm:pt modelId="0" type="doc"/>
+        <dgm:pt modelId="1"/>
+        <dgm:pt modelId="2"/>
+        <dgm:pt modelId="3"/>
+        <dgm:pt modelId="4"/>
+      </dgm:ptLst>
+      <dgm:cxnLst>
+        <dgm:cxn modelId="5" srcId="0" destId="1" srcOrd="0" destOrd="0"/>
+        <dgm:cxn modelId="6" srcId="0" destId="2" srcOrd="1" destOrd="0"/>
+        <dgm:cxn modelId="7" srcId="0" destId="3" srcOrd="2" destOrd="0"/>
+        <dgm:cxn modelId="8" srcId="0" destId="4" srcOrd="3" destOrd="0"/>
+      </dgm:cxnLst>
+      <dgm:bg/>
+      <dgm:whole/>
+    </dgm:dataModel>
+  </dgm:clrData>
+  <dgm:layoutNode name="Name0">
+    <dgm:varLst>
+      <dgm:dir/>
+      <dgm:resizeHandles val="exact"/>
+    </dgm:varLst>
+    <dgm:alg type="composite"/>
+    <dgm:shape xmlns:r="http://schemas.openxmlformats.org/officeDocument/2006/relationships" r:blip="">
+      <dgm:adjLst/>
+    </dgm:shape>
+    <dgm:presOf/>
+    <dgm:choose name="Name1">
+      <dgm:if name="Name2" func="var" arg="dir" op="equ" val="norm">
+        <dgm:constrLst>
+          <dgm:constr type="w" for="ch" forName="arrow" refType="w"/>
+          <dgm:constr type="h" for="ch" forName="arrow" refType="h" fact="0.4"/>
+          <dgm:constr type="ctrY" for="ch" forName="arrow" refType="h" fact="0.5"/>
+          <dgm:constr type="l" for="ch" forName="arrow"/>
+          <dgm:constr type="w" for="ch" forName="points" refType="w" fact="0.9"/>
+          <dgm:constr type="h" for="ch" forName="points" refType="h"/>
+          <dgm:constr type="t" for="ch" forName="points"/>
+          <dgm:constr type="l" for="ch" forName="points"/>
+        </dgm:constrLst>
+      </dgm:if>
+      <dgm:else name="Name3">
+        <dgm:constrLst>
+          <dgm:constr type="w" for="ch" forName="arrow" refType="w"/>
+          <dgm:constr type="h" for="ch" forName="arrow" refType="h" fact="0.4"/>
+          <dgm:constr type="ctrY" for="ch" forName="arrow" refType="h" fact="0.5"/>
+          <dgm:constr type="r" for="ch" forName="arrow" refType="w"/>
+          <dgm:constr type="w" for="ch" forName="points" refType="w" fact="0.9"/>
+          <dgm:constr type="h" for="ch" forName="points" refType="h"/>
+          <dgm:constr type="t" for="ch" forName="points"/>
+          <dgm:constr type="r" for="ch" forName="points" refType="w"/>
+        </dgm:constrLst>
+      </dgm:else>
+    </dgm:choose>
+    <dgm:ruleLst/>
+    <dgm:layoutNode name="arrow" styleLbl="bgShp">
+      <dgm:alg type="sp"/>
+      <dgm:choose name="Name4">
+        <dgm:if name="Name5" func="var" arg="dir" op="equ" val="norm">
+          <dgm:shape xmlns:r="http://schemas.openxmlformats.org/officeDocument/2006/relationships" type="notchedRightArrow" r:blip="">
+            <dgm:adjLst/>
+          </dgm:shape>
+        </dgm:if>
+        <dgm:else name="Name6">
+          <dgm:shape xmlns:r="http://schemas.openxmlformats.org/officeDocument/2006/relationships" rot="180" type="notchedRightArrow" r:blip="">
+            <dgm:adjLst/>
+          </dgm:shape>
+        </dgm:else>
+      </dgm:choose>
+      <dgm:presOf/>
+      <dgm:constrLst/>
+      <dgm:ruleLst/>
+    </dgm:layoutNode>
+    <dgm:layoutNode name="points">
+      <dgm:choose name="Name7">
+        <dgm:if name="Name8" func="var" arg="dir" op="equ" val="norm">
+          <dgm:alg type="lin">
+            <dgm:param type="linDir" val="fromL"/>
+          </dgm:alg>
+        </dgm:if>
+        <dgm:else name="Name9">
+          <dgm:alg type="lin">
+            <dgm:param type="linDir" val="fromR"/>
+          </dgm:alg>
+        </dgm:else>
+      </dgm:choose>
+      <dgm:shape xmlns:r="http://schemas.openxmlformats.org/officeDocument/2006/relationships" r:blip="">
+        <dgm:adjLst/>
+      </dgm:shape>
+      <dgm:presOf/>
+      <dgm:constrLst>
+        <dgm:constr type="w" for="ch" forName="compositeA" refType="w"/>
+        <dgm:constr type="h" for="ch" forName="compositeA" refType="h"/>
+        <dgm:constr type="w" for="ch" forName="compositeB" refType="w" refFor="ch" refForName="compositeA" op="equ"/>
+        <dgm:constr type="h" for="ch" forName="compositeB" refType="h" refFor="ch" refForName="compositeA" op="equ"/>
+        <dgm:constr type="primFontSz" for="des" ptType="node" op="equ" val="65"/>
+        <dgm:constr type="w" for="ch" forName="space" refType="w" refFor="ch" refForName="compositeA" op="equ" fact="0.05"/>
+      </dgm:constrLst>
+      <dgm:ruleLst/>
+      <dgm:forEach name="Name10" axis="ch" ptType="node">
+        <dgm:choose name="Name11">
+          <dgm:if name="Name12" axis="self" ptType="node" func="posOdd" op="equ" val="1">
+            <dgm:layoutNode name="compositeA">
+              <dgm:alg type="composite"/>
+              <dgm:shape xmlns:r="http://schemas.openxmlformats.org/officeDocument/2006/relationships" r:blip="">
+                <dgm:adjLst/>
+              </dgm:shape>
+              <dgm:presOf/>
+              <dgm:constrLst>
+                <dgm:constr type="w" for="ch" forName="textA" refType="w"/>
+                <dgm:constr type="h" for="ch" forName="textA" refType="h" fact="0.4"/>
+                <dgm:constr type="t" for="ch" forName="textA"/>
+                <dgm:constr type="l" for="ch" forName="textA"/>
+                <dgm:constr type="h" for="ch" forName="circleA" refType="h" fact="0.1"/>
+                <dgm:constr type="h" for="ch" forName="circleA" refType="w" op="lte"/>
+                <dgm:constr type="w" for="ch" forName="circleA" refType="h" refFor="ch" refForName="circleA" op="equ"/>
+                <dgm:constr type="ctrY" for="ch" forName="circleA" refType="h" fact="0.5"/>
+                <dgm:constr type="ctrX" for="ch" forName="circleA" refType="w" refFor="ch" refForName="textA" fact="0.5"/>
+                <dgm:constr type="w" for="ch" forName="spaceA" refType="w"/>
+                <dgm:constr type="h" for="ch" forName="spaceA" refType="h" fact="0.4"/>
+                <dgm:constr type="b" for="ch" forName="spaceA" refType="h"/>
+                <dgm:constr type="l" for="ch" forName="spaceA"/>
+              </dgm:constrLst>
+              <dgm:ruleLst/>
+              <dgm:layoutNode name="textA" styleLbl="revTx">
+                <dgm:varLst>
+                  <dgm:bulletEnabled val="1"/>
+                </dgm:varLst>
+                <dgm:alg type="tx">
+                  <dgm:param type="txAnchorVert" val="b"/>
+                  <dgm:param type="txAnchorVertCh" val="b"/>
+                  <dgm:param type="txAnchorHorzCh" val="ctr"/>
+                </dgm:alg>
+                <dgm:shape xmlns:r="http://schemas.openxmlformats.org/officeDocument/2006/relationships" type="rect" r:blip="">
+                  <dgm:adjLst/>
+                </dgm:shape>
+                <dgm:presOf axis="desOrSelf" ptType="node"/>
+                <dgm:constrLst/>
+                <dgm:ruleLst>
+                  <dgm:rule type="primFontSz" val="5" fact="NaN" max="NaN"/>
+                </dgm:ruleLst>
+              </dgm:layoutNode>
+              <dgm:layoutNode name="circleA">
+                <dgm:alg type="sp"/>
+                <dgm:shape xmlns:r="http://schemas.openxmlformats.org/officeDocument/2006/relationships" type="ellipse" r:blip="">
+                  <dgm:adjLst/>
+                </dgm:shape>
+                <dgm:presOf/>
+                <dgm:constrLst/>
+                <dgm:ruleLst/>
+              </dgm:layoutNode>
+              <dgm:layoutNode name="spaceA">
+                <dgm:alg type="sp"/>
+                <dgm:shape xmlns:r="http://schemas.openxmlformats.org/officeDocument/2006/relationships" r:blip="">
+                  <dgm:adjLst/>
+                </dgm:shape>
+                <dgm:presOf/>
+                <dgm:constrLst/>
+                <dgm:ruleLst/>
+              </dgm:layoutNode>
+            </dgm:layoutNode>
+          </dgm:if>
+          <dgm:else name="Name13">
+            <dgm:layoutNode name="compositeB">
+              <dgm:alg type="composite"/>
+              <dgm:shape xmlns:r="http://schemas.openxmlformats.org/officeDocument/2006/relationships" r:blip="">
+                <dgm:adjLst/>
+              </dgm:shape>
+              <dgm:presOf/>
+              <dgm:constrLst>
+                <dgm:constr type="w" for="ch" forName="textB" refType="w"/>
+                <dgm:constr type="h" for="ch" forName="textB" refType="h" fact="0.4"/>
+                <dgm:constr type="b" for="ch" forName="textB" refType="h"/>
+                <dgm:constr type="l" for="ch" forName="textB"/>
+                <dgm:constr type="h" for="ch" forName="circleB" refType="h" fact="0.1"/>
+                <dgm:constr type="w" for="ch" forName="circleB" refType="h" refFor="ch" refForName="circleB" op="equ"/>
+                <dgm:constr type="h" for="ch" forName="circleB" refType="w" op="lte"/>
+                <dgm:constr type="ctrY" for="ch" forName="circleB" refType="h" fact="0.5"/>
+                <dgm:constr type="ctrX" for="ch" forName="circleB" refType="w" refFor="ch" refForName="textB" fact="0.5"/>
+                <dgm:constr type="w" for="ch" forName="spaceB" refType="w"/>
+                <dgm:constr type="h" for="ch" forName="spaceB" refType="h" fact="0.4"/>
+                <dgm:constr type="t" for="ch" forName="spaceB"/>
+                <dgm:constr type="l" for="ch" forName="spaceB"/>
+              </dgm:constrLst>
+              <dgm:ruleLst/>
+              <dgm:layoutNode name="textB" styleLbl="revTx">
+                <dgm:varLst>
+                  <dgm:bulletEnabled val="1"/>
+                </dgm:varLst>
+                <dgm:alg type="tx">
+                  <dgm:param type="txAnchorVert" val="t"/>
+                  <dgm:param type="txAnchorVertCh" val="t"/>
+                  <dgm:param type="txAnchorHorzCh" val="ctr"/>
+                </dgm:alg>
+                <dgm:shape xmlns:r="http://schemas.openxmlformats.org/officeDocument/2006/relationships" type="rect" r:blip="">
+                  <dgm:adjLst/>
+                </dgm:shape>
+                <dgm:presOf axis="desOrSelf" ptType="node"/>
+                <dgm:constrLst/>
+                <dgm:ruleLst>
+                  <dgm:rule type="primFontSz" val="5" fact="NaN" max="NaN"/>
+                </dgm:ruleLst>
+              </dgm:layoutNode>
+              <dgm:layoutNode name="circleB">
+                <dgm:alg type="sp"/>
+                <dgm:shape xmlns:r="http://schemas.openxmlformats.org/officeDocument/2006/relationships" type="ellipse" r:blip="">
+                  <dgm:adjLst/>
+                </dgm:shape>
+                <dgm:presOf/>
+                <dgm:constrLst/>
+                <dgm:ruleLst/>
+              </dgm:layoutNode>
+              <dgm:layoutNode name="spaceB">
+                <dgm:alg type="sp"/>
+                <dgm:shape xmlns:r="http://schemas.openxmlformats.org/officeDocument/2006/relationships" r:blip="">
+                  <dgm:adjLst/>
+                </dgm:shape>
+                <dgm:presOf/>
+                <dgm:constrLst/>
+                <dgm:ruleLst/>
+              </dgm:layoutNode>
+            </dgm:layoutNode>
+          </dgm:else>
+        </dgm:choose>
+        <dgm:forEach name="Name14" axis="followSib" ptType="sibTrans" cnt="1">
+          <dgm:layoutNode name="space">
+            <dgm:alg type="sp"/>
+            <dgm:shape xmlns:r="http://schemas.openxmlformats.org/officeDocument/2006/relationships" r:blip="">
+              <dgm:adjLst/>
+            </dgm:shape>
+            <dgm:presOf/>
+            <dgm:constrLst/>
+            <dgm:ruleLst/>
+          </dgm:layoutNode>
+        </dgm:forEach>
+      </dgm:forEach>
+    </dgm:layoutNode>
+  </dgm:layoutNode>
+</dgm:layoutDef>
+</file>
+
+<file path=ppt/diagrams/quickStyle1.xml><?xml version="1.0" encoding="utf-8"?>
+<dgm:styleDef xmlns:dgm="http://schemas.openxmlformats.org/drawingml/2006/diagram" xmlns:a="http://schemas.openxmlformats.org/drawingml/2006/main" uniqueId="urn:microsoft.com/office/officeart/2005/8/quickstyle/simple1">
+  <dgm:title val=""/>
+  <dgm:desc val=""/>
+  <dgm:catLst>
+    <dgm:cat type="simple" pri="10100"/>
+  </dgm:catLst>
+  <dgm:scene3d>
+    <a:camera prst="orthographicFront"/>
+    <a:lightRig rig="threePt" dir="t"/>
+  </dgm:scene3d>
+  <dgm:styleLbl name="node0">
+    <dgm:scene3d>
+      <a:camera prst="orthographicFront"/>
+      <a:lightRig rig="threePt" dir="t"/>
+    </dgm:scene3d>
+    <dgm:sp3d/>
+    <dgm:txPr/>
+    <dgm:style>
+      <a:lnRef idx="2">
+        <a:scrgbClr r="0" g="0" b="0"/>
+      </a:lnRef>
+      <a:fillRef idx="1">
+        <a:scrgbClr r="0" g="0" b="0"/>
+      </a:fillRef>
+      <a:effectRef idx="0">
+        <a:scrgbClr r="0" g="0" b="0"/>
+      </a:effectRef>
+      <a:fontRef idx="minor">
+        <a:schemeClr val="lt1"/>
+      </a:fontRef>
+    </dgm:style>
+  </dgm:styleLbl>
+  <dgm:styleLbl name="lnNode1">
+    <dgm:scene3d>
+      <a:camera prst="orthographicFront"/>
+      <a:lightRig rig="threePt" dir="t"/>
+    </dgm:scene3d>
+    <dgm:sp3d/>
+    <dgm:txPr/>
+    <dgm:style>
+      <a:lnRef idx="2">
+        <a:scrgbClr r="0" g="0" b="0"/>
+      </a:lnRef>
+      <a:fillRef idx="1">
+        <a:scrgbClr r="0" g="0" b="0"/>
+      </a:fillRef>
+      <a:effectRef idx="0">
+        <a:scrgbClr r="0" g="0" b="0"/>
+      </a:effectRef>
+      <a:fontRef idx="minor">
+        <a:schemeClr val="lt1"/>
+      </a:fontRef>
+    </dgm:style>
+  </dgm:styleLbl>
+  <dgm:styleLbl name="vennNode1">
+    <dgm:scene3d>
+      <a:camera prst="orthographicFront"/>
+      <a:lightRig rig="threePt" dir="t"/>
+    </dgm:scene3d>
+    <dgm:sp3d/>
+    <dgm:txPr/>
+    <dgm:style>
+      <a:lnRef idx="2">
+        <a:scrgbClr r="0" g="0" b="0"/>
+      </a:lnRef>
+      <a:fillRef idx="1">
+        <a:scrgbClr r="0" g="0" b="0"/>
+      </a:fillRef>
+      <a:effectRef idx="0">
+        <a:scrgbClr r="0" g="0" b="0"/>
+      </a:effectRef>
+      <a:fontRef idx="minor">
+        <a:schemeClr val="tx1"/>
+      </a:fontRef>
+    </dgm:style>
+  </dgm:styleLbl>
+  <dgm:styleLbl name="alignNode1">
+    <dgm:scene3d>
+      <a:camera prst="orthographicFront"/>
+      <a:lightRig rig="threePt" dir="t"/>
+    </dgm:scene3d>
+    <dgm:sp3d/>
+    <dgm:txPr/>
+    <dgm:style>
+      <a:lnRef idx="2">
+        <a:scrgbClr r="0" g="0" b="0"/>
+      </a:lnRef>
+      <a:fillRef idx="1">
+        <a:scrgbClr r="0" g="0" b="0"/>
+      </a:fillRef>
+      <a:effectRef idx="0">
+        <a:scrgbClr r="0" g="0" b="0"/>
+      </a:effectRef>
+      <a:fontRef idx="minor">
+        <a:schemeClr val="lt1"/>
+      </a:fontRef>
+    </dgm:style>
+  </dgm:styleLbl>
+  <dgm:styleLbl name="node1">
+    <dgm:scene3d>
+      <a:camera prst="orthographicFront"/>
+      <a:lightRig rig="threePt" dir="t"/>
+    </dgm:scene3d>
+    <dgm:sp3d/>
+    <dgm:txPr/>
+    <dgm:style>
+      <a:lnRef idx="2">
+        <a:scrgbClr r="0" g="0" b="0"/>
+      </a:lnRef>
+      <a:fillRef idx="1">
+        <a:scrgbClr r="0" g="0" b="0"/>
+      </a:fillRef>
+      <a:effectRef idx="0">
+        <a:scrgbClr r="0" g="0" b="0"/>
+      </a:effectRef>
+      <a:fontRef idx="minor">
+        <a:schemeClr val="lt1"/>
+      </a:fontRef>
+    </dgm:style>
+  </dgm:styleLbl>
+  <dgm:styleLbl name="node2">
+    <dgm:scene3d>
+      <a:camera prst="orthographicFront"/>
+      <a:lightRig rig="threePt" dir="t"/>
+    </dgm:scene3d>
+    <dgm:sp3d/>
+    <dgm:txPr/>
+    <dgm:style>
+      <a:lnRef idx="2">
+        <a:scrgbClr r="0" g="0" b="0"/>
+      </a:lnRef>
+      <a:fillRef idx="1">
+        <a:scrgbClr r="0" g="0" b="0"/>
+      </a:fillRef>
+      <a:effectRef idx="0">
+        <a:scrgbClr r="0" g="0" b="0"/>
+      </a:effectRef>
+      <a:fontRef idx="minor">
+        <a:schemeClr val="lt1"/>
+      </a:fontRef>
+    </dgm:style>
+  </dgm:styleLbl>
+  <dgm:styleLbl name="node3">
+    <dgm:scene3d>
+      <a:camera prst="orthographicFront"/>
+      <a:lightRig rig="threePt" dir="t"/>
+    </dgm:scene3d>
+    <dgm:sp3d/>
+    <dgm:txPr/>
+    <dgm:style>
+      <a:lnRef idx="2">
+        <a:scrgbClr r="0" g="0" b="0"/>
+      </a:lnRef>
+      <a:fillRef idx="1">
+        <a:scrgbClr r="0" g="0" b="0"/>
+      </a:fillRef>
+      <a:effectRef idx="0">
+        <a:scrgbClr r="0" g="0" b="0"/>
+      </a:effectRef>
+      <a:fontRef idx="minor">
+        <a:schemeClr val="lt1"/>
+      </a:fontRef>
+    </dgm:style>
+  </dgm:styleLbl>
+  <dgm:styleLbl name="node4">
+    <dgm:scene3d>
+      <a:camera prst="orthographicFront"/>
+      <a:lightRig rig="threePt" dir="t"/>
+    </dgm:scene3d>
+    <dgm:sp3d/>
+    <dgm:txPr/>
+    <dgm:style>
+      <a:lnRef idx="2">
+        <a:scrgbClr r="0" g="0" b="0"/>
+      </a:lnRef>
+      <a:fillRef idx="1">
+        <a:scrgbClr r="0" g="0" b="0"/>
+      </a:fillRef>
+      <a:effectRef idx="0">
+        <a:scrgbClr r="0" g="0" b="0"/>
+      </a:effectRef>
+      <a:fontRef idx="minor">
+        <a:schemeClr val="lt1"/>
+      </a:fontRef>
+    </dgm:style>
+  </dgm:styleLbl>
+  <dgm:styleLbl name="fgImgPlace1">
+    <dgm:scene3d>
+      <a:camera prst="orthographicFront"/>
+      <a:lightRig rig="threePt" dir="t"/>
+    </dgm:scene3d>
+    <dgm:sp3d/>
+    <dgm:txPr/>
+    <dgm:style>
+      <a:lnRef idx="2">
+        <a:scrgbClr r="0" g="0" b="0"/>
+      </a:lnRef>
+      <a:fillRef idx="1">
+        <a:scrgbClr r="0" g="0" b="0"/>
+      </a:fillRef>
+      <a:effectRef idx="0">
+        <a:scrgbClr r="0" g="0" b="0"/>
+      </a:effectRef>
+      <a:fontRef idx="minor"/>
+    </dgm:style>
+  </dgm:styleLbl>
+  <dgm:styleLbl name="alignImgPlace1">
+    <dgm:scene3d>
+      <a:camera prst="orthographicFront"/>
+      <a:lightRig rig="threePt" dir="t"/>
+    </dgm:scene3d>
+    <dgm:sp3d/>
+    <dgm:txPr/>
+    <dgm:style>
+      <a:lnRef idx="2">
+        <a:scrgbClr r="0" g="0" b="0"/>
+      </a:lnRef>
+      <a:fillRef idx="1">
+        <a:scrgbClr r="0" g="0" b="0"/>
+      </a:fillRef>
+      <a:effectRef idx="0">
+        <a:scrgbClr r="0" g="0" b="0"/>
+      </a:effectRef>
+      <a:fontRef idx="minor"/>
+    </dgm:style>
+  </dgm:styleLbl>
+  <dgm:styleLbl name="bgImgPlace1">
+    <dgm:scene3d>
+      <a:camera prst="orthographicFront"/>
+      <a:lightRig rig="threePt" dir="t"/>
+    </dgm:scene3d>
+    <dgm:sp3d/>
+    <dgm:txPr/>
+    <dgm:style>
+      <a:lnRef idx="2">
+        <a:scrgbClr r="0" g="0" b="0"/>
+      </a:lnRef>
+      <a:fillRef idx="1">
+        <a:scrgbClr r="0" g="0" b="0"/>
+      </a:fillRef>
+      <a:effectRef idx="0">
+        <a:scrgbClr r="0" g="0" b="0"/>
+      </a:effectRef>
+      <a:fontRef idx="minor"/>
+    </dgm:style>
+  </dgm:styleLbl>
+  <dgm:styleLbl name="sibTrans2D1">
+    <dgm:scene3d>
+      <a:camera prst="orthographicFront"/>
+      <a:lightRig rig="threePt" dir="t"/>
+    </dgm:scene3d>
+    <dgm:sp3d/>
+    <dgm:txPr/>
+    <dgm:style>
+      <a:lnRef idx="0">
+        <a:scrgbClr r="0" g="0" b="0"/>
+      </a:lnRef>
+      <a:fillRef idx="1">
+        <a:scrgbClr r="0" g="0" b="0"/>
+      </a:fillRef>
+      <a:effectRef idx="0">
+        <a:scrgbClr r="0" g="0" b="0"/>
+      </a:effectRef>
+      <a:fontRef idx="minor">
+        <a:schemeClr val="lt1"/>
+      </a:fontRef>
+    </dgm:style>
+  </dgm:styleLbl>
+  <dgm:styleLbl name="fgSibTrans2D1">
+    <dgm:scene3d>
+      <a:camera prst="orthographicFront"/>
+      <a:lightRig rig="threePt" dir="t"/>
+    </dgm:scene3d>
+    <dgm:sp3d/>
+    <dgm:txPr/>
+    <dgm:style>
+      <a:lnRef idx="0">
+        <a:scrgbClr r="0" g="0" b="0"/>
+      </a:lnRef>
+      <a:fillRef idx="1">
+        <a:scrgbClr r="0" g="0" b="0"/>
+      </a:fillRef>
+      <a:effectRef idx="0">
+        <a:scrgbClr r="0" g="0" b="0"/>
+      </a:effectRef>
+      <a:fontRef idx="minor">
+        <a:schemeClr val="lt1"/>
+      </a:fontRef>
+    </dgm:style>
+  </dgm:styleLbl>
+  <dgm:styleLbl name="bgSibTrans2D1">
+    <dgm:scene3d>
+      <a:camera prst="orthographicFront"/>
+      <a:lightRig rig="threePt" dir="t"/>
+    </dgm:scene3d>
+    <dgm:sp3d/>
+    <dgm:txPr/>
+    <dgm:style>
+      <a:lnRef idx="0">
+        <a:scrgbClr r="0" g="0" b="0"/>
+      </a:lnRef>
+      <a:fillRef idx="1">
+        <a:scrgbClr r="0" g="0" b="0"/>
+      </a:fillRef>
+      <a:effectRef idx="0">
+        <a:scrgbClr r="0" g="0" b="0"/>
+      </a:effectRef>
+      <a:fontRef idx="minor">
+        <a:schemeClr val="lt1"/>
+      </a:fontRef>
+    </dgm:style>
+  </dgm:styleLbl>
+  <dgm:styleLbl name="sibTrans1D1">
+    <dgm:scene3d>
+      <a:camera prst="orthographicFront"/>
+      <a:lightRig rig="threePt" dir="t"/>
+    </dgm:scene3d>
+    <dgm:sp3d/>
+    <dgm:txPr/>
+    <dgm:style>
+      <a:lnRef idx="1">
+        <a:scrgbClr r="0" g="0" b="0"/>
+      </a:lnRef>
+      <a:fillRef idx="0">
+        <a:scrgbClr r="0" g="0" b="0"/>
+      </a:fillRef>
+      <a:effectRef idx="0">
+        <a:scrgbClr r="0" g="0" b="0"/>
+      </a:effectRef>
+      <a:fontRef idx="minor"/>
+    </dgm:style>
+  </dgm:styleLbl>
+  <dgm:styleLbl name="callout">
+    <dgm:scene3d>
+      <a:camera prst="orthographicFront"/>
+      <a:lightRig rig="threePt" dir="t"/>
+    </dgm:scene3d>
+    <dgm:sp3d/>
+    <dgm:txPr/>
+    <dgm:style>
+      <a:lnRef idx="2">
+        <a:scrgbClr r="0" g="0" b="0"/>
+      </a:lnRef>
+      <a:fillRef idx="1">
+        <a:scrgbClr r="0" g="0" b="0"/>
+      </a:fillRef>
+      <a:effectRef idx="0">
+        <a:scrgbClr r="0" g="0" b="0"/>
+      </a:effectRef>
+      <a:fontRef idx="minor"/>
+    </dgm:style>
+  </dgm:styleLbl>
+  <dgm:styleLbl name="asst0">
+    <dgm:scene3d>
+      <a:camera prst="orthographicFront"/>
+      <a:lightRig rig="threePt" dir="t"/>
+    </dgm:scene3d>
+    <dgm:sp3d/>
+    <dgm:txPr/>
+    <dgm:style>
+      <a:lnRef idx="2">
+        <a:scrgbClr r="0" g="0" b="0"/>
+      </a:lnRef>
+      <a:fillRef idx="1">
+        <a:scrgbClr r="0" g="0" b="0"/>
+      </a:fillRef>
+      <a:effectRef idx="0">
+        <a:scrgbClr r="0" g="0" b="0"/>
+      </a:effectRef>
+      <a:fontRef idx="minor">
+        <a:schemeClr val="lt1"/>
+      </a:fontRef>
+    </dgm:style>
+  </dgm:styleLbl>
+  <dgm:styleLbl name="asst1">
+    <dgm:scene3d>
+      <a:camera prst="orthographicFront"/>
+      <a:lightRig rig="threePt" dir="t"/>
+    </dgm:scene3d>
+    <dgm:sp3d/>
+    <dgm:txPr/>
+    <dgm:style>
+      <a:lnRef idx="2">
+        <a:scrgbClr r="0" g="0" b="0"/>
+      </a:lnRef>
+      <a:fillRef idx="1">
+        <a:scrgbClr r="0" g="0" b="0"/>
+      </a:fillRef>
+      <a:effectRef idx="0">
+        <a:scrgbClr r="0" g="0" b="0"/>
+      </a:effectRef>
+      <a:fontRef idx="minor">
+        <a:schemeClr val="lt1"/>
+      </a:fontRef>
+    </dgm:style>
+  </dgm:styleLbl>
+  <dgm:styleLbl name="asst2">
+    <dgm:scene3d>
+      <a:camera prst="orthographicFront"/>
+      <a:lightRig rig="threePt" dir="t"/>
+    </dgm:scene3d>
+    <dgm:sp3d/>
+    <dgm:txPr/>
+    <dgm:style>
+      <a:lnRef idx="2">
+        <a:scrgbClr r="0" g="0" b="0"/>
+      </a:lnRef>
+      <a:fillRef idx="1">
+        <a:scrgbClr r="0" g="0" b="0"/>
+      </a:fillRef>
+      <a:effectRef idx="0">
+        <a:scrgbClr r="0" g="0" b="0"/>
+      </a:effectRef>
+      <a:fontRef idx="minor">
+        <a:schemeClr val="lt1"/>
+      </a:fontRef>
+    </dgm:style>
+  </dgm:styleLbl>
+  <dgm:styleLbl name="asst3">
+    <dgm:scene3d>
+      <a:camera prst="orthographicFront"/>
+      <a:lightRig rig="threePt" dir="t"/>
+    </dgm:scene3d>
+    <dgm:sp3d/>
+    <dgm:txPr/>
+    <dgm:style>
+      <a:lnRef idx="2">
+        <a:scrgbClr r="0" g="0" b="0"/>
+      </a:lnRef>
+      <a:fillRef idx="1">
+        <a:scrgbClr r="0" g="0" b="0"/>
+      </a:fillRef>
+      <a:effectRef idx="0">
+        <a:scrgbClr r="0" g="0" b="0"/>
+      </a:effectRef>
+      <a:fontRef idx="minor">
+        <a:schemeClr val="lt1"/>
+      </a:fontRef>
+    </dgm:style>
+  </dgm:styleLbl>
+  <dgm:styleLbl name="asst4">
+    <dgm:scene3d>
+      <a:camera prst="orthographicFront"/>
+      <a:lightRig rig="threePt" dir="t"/>
+    </dgm:scene3d>
+    <dgm:sp3d/>
+    <dgm:txPr/>
+    <dgm:style>
+      <a:lnRef idx="2">
+        <a:scrgbClr r="0" g="0" b="0"/>
+      </a:lnRef>
+      <a:fillRef idx="1">
+        <a:scrgbClr r="0" g="0" b="0"/>
+      </a:fillRef>
+      <a:effectRef idx="0">
+        <a:scrgbClr r="0" g="0" b="0"/>
+      </a:effectRef>
+      <a:fontRef idx="minor">
+        <a:schemeClr val="lt1"/>
+      </a:fontRef>
+    </dgm:style>
+  </dgm:styleLbl>
+  <dgm:styleLbl name="parChTrans2D1">
+    <dgm:scene3d>
+      <a:camera prst="orthographicFront"/>
+      <a:lightRig rig="threePt" dir="t"/>
+    </dgm:scene3d>
+    <dgm:sp3d/>
+    <dgm:txPr/>
+    <dgm:style>
+      <a:lnRef idx="2">
+        <a:scrgbClr r="0" g="0" b="0"/>
+      </a:lnRef>
+      <a:fillRef idx="1">
+        <a:scrgbClr r="0" g="0" b="0"/>
+      </a:fillRef>
+      <a:effectRef idx="0">
+        <a:scrgbClr r="0" g="0" b="0"/>
+      </a:effectRef>
+      <a:fontRef idx="minor">
+        <a:schemeClr val="lt1"/>
+      </a:fontRef>
+    </dgm:style>
+  </dgm:styleLbl>
+  <dgm:styleLbl name="parChTrans2D2">
+    <dgm:scene3d>
+      <a:camera prst="orthographicFront"/>
+      <a:lightRig rig="threePt" dir="t"/>
+    </dgm:scene3d>
+    <dgm:sp3d/>
+    <dgm:txPr/>
+    <dgm:style>
+      <a:lnRef idx="2">
+        <a:scrgbClr r="0" g="0" b="0"/>
+      </a:lnRef>
+      <a:fillRef idx="1">
+        <a:scrgbClr r="0" g="0" b="0"/>
+      </a:fillRef>
+      <a:effectRef idx="0">
+        <a:scrgbClr r="0" g="0" b="0"/>
+      </a:effectRef>
+      <a:fontRef idx="minor">
+        <a:schemeClr val="lt1"/>
+      </a:fontRef>
+    </dgm:style>
+  </dgm:styleLbl>
+  <dgm:styleLbl name="parChTrans2D3">
+    <dgm:scene3d>
+      <a:camera prst="orthographicFront"/>
+      <a:lightRig rig="threePt" dir="t"/>
+    </dgm:scene3d>
+    <dgm:sp3d/>
+    <dgm:txPr/>
+    <dgm:style>
+      <a:lnRef idx="2">
+        <a:scrgbClr r="0" g="0" b="0"/>
+      </a:lnRef>
+      <a:fillRef idx="1">
+        <a:scrgbClr r="0" g="0" b="0"/>
+      </a:fillRef>
+      <a:effectRef idx="0">
+        <a:scrgbClr r="0" g="0" b="0"/>
+      </a:effectRef>
+      <a:fontRef idx="minor">
+        <a:schemeClr val="lt1"/>
+      </a:fontRef>
+    </dgm:style>
+  </dgm:styleLbl>
+  <dgm:styleLbl name="parChTrans2D4">
+    <dgm:scene3d>
+      <a:camera prst="orthographicFront"/>
+      <a:lightRig rig="threePt" dir="t"/>
+    </dgm:scene3d>
+    <dgm:sp3d/>
+    <dgm:txPr/>
+    <dgm:style>
+      <a:lnRef idx="2">
+        <a:scrgbClr r="0" g="0" b="0"/>
+      </a:lnRef>
+      <a:fillRef idx="1">
+        <a:scrgbClr r="0" g="0" b="0"/>
+      </a:fillRef>
+      <a:effectRef idx="0">
+        <a:scrgbClr r="0" g="0" b="0"/>
+      </a:effectRef>
+      <a:fontRef idx="minor">
+        <a:schemeClr val="lt1"/>
+      </a:fontRef>
+    </dgm:style>
+  </dgm:styleLbl>
+  <dgm:styleLbl name="parChTrans1D1">
+    <dgm:scene3d>
+      <a:camera prst="orthographicFront"/>
+      <a:lightRig rig="threePt" dir="t"/>
+    </dgm:scene3d>
+    <dgm:sp3d/>
+    <dgm:txPr/>
+    <dgm:style>
+      <a:lnRef idx="2">
+        <a:scrgbClr r="0" g="0" b="0"/>
+      </a:lnRef>
+      <a:fillRef idx="0">
+        <a:scrgbClr r="0" g="0" b="0"/>
+      </a:fillRef>
+      <a:effectRef idx="0">
+        <a:scrgbClr r="0" g="0" b="0"/>
+      </a:effectRef>
+      <a:fontRef idx="minor"/>
+    </dgm:style>
+  </dgm:styleLbl>
+  <dgm:styleLbl name="parChTrans1D2">
+    <dgm:scene3d>
+      <a:camera prst="orthographicFront"/>
+      <a:lightRig rig="threePt" dir="t"/>
+    </dgm:scene3d>
+    <dgm:sp3d/>
+    <dgm:txPr/>
+    <dgm:style>
+      <a:lnRef idx="2">
+        <a:scrgbClr r="0" g="0" b="0"/>
+      </a:lnRef>
+      <a:fillRef idx="0">
+        <a:scrgbClr r="0" g="0" b="0"/>
+      </a:fillRef>
+      <a:effectRef idx="0">
+        <a:scrgbClr r="0" g="0" b="0"/>
+      </a:effectRef>
+      <a:fontRef idx="minor"/>
+    </dgm:style>
+  </dgm:styleLbl>
+  <dgm:styleLbl name="parChTrans1D3">
+    <dgm:scene3d>
+      <a:camera prst="orthographicFront"/>
+      <a:lightRig rig="threePt" dir="t"/>
+    </dgm:scene3d>
+    <dgm:sp3d/>
+    <dgm:txPr/>
+    <dgm:style>
+      <a:lnRef idx="2">
+        <a:scrgbClr r="0" g="0" b="0"/>
+      </a:lnRef>
+      <a:fillRef idx="0">
+        <a:scrgbClr r="0" g="0" b="0"/>
+      </a:fillRef>
+      <a:effectRef idx="0">
+        <a:scrgbClr r="0" g="0" b="0"/>
+      </a:effectRef>
+      <a:fontRef idx="minor"/>
+    </dgm:style>
+  </dgm:styleLbl>
+  <dgm:styleLbl name="parChTrans1D4">
+    <dgm:scene3d>
+      <a:camera prst="orthographicFront"/>
+      <a:lightRig rig="threePt" dir="t"/>
+    </dgm:scene3d>
+    <dgm:sp3d/>
+    <dgm:txPr/>
+    <dgm:style>
+      <a:lnRef idx="2">
+        <a:scrgbClr r="0" g="0" b="0"/>
+      </a:lnRef>
+      <a:fillRef idx="0">
+        <a:scrgbClr r="0" g="0" b="0"/>
+      </a:fillRef>
+      <a:effectRef idx="0">
+        <a:scrgbClr r="0" g="0" b="0"/>
+      </a:effectRef>
+      <a:fontRef idx="minor"/>
+    </dgm:style>
+  </dgm:styleLbl>
+  <dgm:styleLbl name="fgAcc1">
+    <dgm:scene3d>
+      <a:camera prst="orthographicFront"/>
+      <a:lightRig rig="threePt" dir="t"/>
+    </dgm:scene3d>
+    <dgm:sp3d/>
+    <dgm:txPr/>
+    <dgm:style>
+      <a:lnRef idx="2">
+        <a:scrgbClr r="0" g="0" b="0"/>
+      </a:lnRef>
+      <a:fillRef idx="1">
+        <a:scrgbClr r="0" g="0" b="0"/>
+      </a:fillRef>
+      <a:effectRef idx="0">
+        <a:scrgbClr r="0" g="0" b="0"/>
+      </a:effectRef>
+      <a:fontRef idx="minor"/>
+    </dgm:style>
+  </dgm:styleLbl>
+  <dgm:styleLbl name="conFgAcc1">
+    <dgm:scene3d>
+      <a:camera prst="orthographicFront"/>
+      <a:lightRig rig="threePt" dir="t"/>
+    </dgm:scene3d>
+    <dgm:sp3d/>
+    <dgm:txPr/>
+    <dgm:style>
+      <a:lnRef idx="2">
+        <a:scrgbClr r="0" g="0" b="0"/>
+      </a:lnRef>
+      <a:fillRef idx="1">
+        <a:scrgbClr r="0" g="0" b="0"/>
+      </a:fillRef>
+      <a:effectRef idx="0">
+        <a:scrgbClr r="0" g="0" b="0"/>
+      </a:effectRef>
+      <a:fontRef idx="minor"/>
+    </dgm:style>
+  </dgm:styleLbl>
+  <dgm:styleLbl name="alignAcc1">
+    <dgm:scene3d>
+      <a:camera prst="orthographicFront"/>
+      <a:lightRig rig="threePt" dir="t"/>
+    </dgm:scene3d>
+    <dgm:sp3d/>
+    <dgm:txPr/>
+    <dgm:style>
+      <a:lnRef idx="2">
+        <a:scrgbClr r="0" g="0" b="0"/>
+      </a:lnRef>
+      <a:fillRef idx="1">
+        <a:scrgbClr r="0" g="0" b="0"/>
+      </a:fillRef>
+      <a:effectRef idx="0">
+        <a:scrgbClr r="0" g="0" b="0"/>
+      </a:effectRef>
+      <a:fontRef idx="minor"/>
+    </dgm:style>
+  </dgm:styleLbl>
+  <dgm:styleLbl name="trAlignAcc1">
+    <dgm:scene3d>
+      <a:camera prst="orthographicFront"/>
+      <a:lightRig rig="threePt" dir="t"/>
+    </dgm:scene3d>
+    <dgm:sp3d/>
+    <dgm:txPr/>
+    <dgm:style>
+      <a:lnRef idx="1">
+        <a:scrgbClr r="0" g="0" b="0"/>
+      </a:lnRef>
+      <a:fillRef idx="1">
+        <a:scrgbClr r="0" g="0" b="0"/>
+      </a:fillRef>
+      <a:effectRef idx="0">
+        <a:scrgbClr r="0" g="0" b="0"/>
+      </a:effectRef>
+      <a:fontRef idx="minor"/>
+    </dgm:style>
+  </dgm:styleLbl>
+  <dgm:styleLbl name="bgAcc1">
+    <dgm:scene3d>
+      <a:camera prst="orthographicFront"/>
+      <a:lightRig rig="threePt" dir="t"/>
+    </dgm:scene3d>
+    <dgm:sp3d/>
+    <dgm:txPr/>
+    <dgm:style>
+      <a:lnRef idx="2">
+        <a:scrgbClr r="0" g="0" b="0"/>
+      </a:lnRef>
+      <a:fillRef idx="1">
+        <a:scrgbClr r="0" g="0" b="0"/>
+      </a:fillRef>
+      <a:effectRef idx="0">
+        <a:scrgbClr r="0" g="0" b="0"/>
+      </a:effectRef>
+      <a:fontRef idx="minor"/>
+    </dgm:style>
+  </dgm:styleLbl>
+  <dgm:styleLbl name="solidFgAcc1">
+    <dgm:scene3d>
+      <a:camera prst="orthographicFront"/>
+      <a:lightRig rig="threePt" dir="t"/>
+    </dgm:scene3d>
+    <dgm:sp3d/>
+    <dgm:txPr/>
+    <dgm:style>
+      <a:lnRef idx="2">
+        <a:scrgbClr r="0" g="0" b="0"/>
+      </a:lnRef>
+      <a:fillRef idx="1">
+        <a:scrgbClr r="0" g="0" b="0"/>
+      </a:fillRef>
+      <a:effectRef idx="0">
+        <a:scrgbClr r="0" g="0" b="0"/>
+      </a:effectRef>
+      <a:fontRef idx="minor"/>
+    </dgm:style>
+  </dgm:styleLbl>
+  <dgm:styleLbl name="solidAlignAcc1">
+    <dgm:scene3d>
+      <a:camera prst="orthographicFront"/>
+      <a:lightRig rig="threePt" dir="t"/>
+    </dgm:scene3d>
+    <dgm:sp3d/>
+    <dgm:txPr/>
+    <dgm:style>
+      <a:lnRef idx="2">
+        <a:scrgbClr r="0" g="0" b="0"/>
+      </a:lnRef>
+      <a:fillRef idx="1">
+        <a:scrgbClr r="0" g="0" b="0"/>
+      </a:fillRef>
+      <a:effectRef idx="0">
+        <a:scrgbClr r="0" g="0" b="0"/>
+      </a:effectRef>
+      <a:fontRef idx="minor"/>
+    </dgm:style>
+  </dgm:styleLbl>
+  <dgm:styleLbl name="solidBgAcc1">
+    <dgm:scene3d>
+      <a:camera prst="orthographicFront"/>
+      <a:lightRig rig="threePt" dir="t"/>
+    </dgm:scene3d>
+    <dgm:sp3d/>
+    <dgm:txPr/>
+    <dgm:style>
+      <a:lnRef idx="2">
+        <a:scrgbClr r="0" g="0" b="0"/>
+      </a:lnRef>
+      <a:fillRef idx="1">
+        <a:scrgbClr r="0" g="0" b="0"/>
+      </a:fillRef>
+      <a:effectRef idx="0">
+        <a:scrgbClr r="0" g="0" b="0"/>
+      </a:effectRef>
+      <a:fontRef idx="minor"/>
+    </dgm:style>
+  </dgm:styleLbl>
+  <dgm:styleLbl name="fgAccFollowNode1">
+    <dgm:scene3d>
+      <a:camera prst="orthographicFront"/>
+      <a:lightRig rig="threePt" dir="t"/>
+    </dgm:scene3d>
+    <dgm:sp3d/>
+    <dgm:txPr/>
+    <dgm:style>
+      <a:lnRef idx="2">
+        <a:scrgbClr r="0" g="0" b="0"/>
+      </a:lnRef>
+      <a:fillRef idx="1">
+        <a:scrgbClr r="0" g="0" b="0"/>
+      </a:fillRef>
+      <a:effectRef idx="0">
+        <a:scrgbClr r="0" g="0" b="0"/>
+      </a:effectRef>
+      <a:fontRef idx="minor"/>
+    </dgm:style>
+  </dgm:styleLbl>
+  <dgm:styleLbl name="alignAccFollowNode1">
+    <dgm:scene3d>
+      <a:camera prst="orthographicFront"/>
+      <a:lightRig rig="threePt" dir="t"/>
+    </dgm:scene3d>
+    <dgm:sp3d/>
+    <dgm:txPr/>
+    <dgm:style>
+      <a:lnRef idx="2">
+        <a:scrgbClr r="0" g="0" b="0"/>
+      </a:lnRef>
+      <a:fillRef idx="1">
+        <a:scrgbClr r="0" g="0" b="0"/>
+      </a:fillRef>
+      <a:effectRef idx="0">
+        <a:scrgbClr r="0" g="0" b="0"/>
+      </a:effectRef>
+      <a:fontRef idx="minor"/>
+    </dgm:style>
+  </dgm:styleLbl>
+  <dgm:styleLbl name="bgAccFollowNode1">
+    <dgm:scene3d>
+      <a:camera prst="orthographicFront"/>
+      <a:lightRig rig="threePt" dir="t"/>
+    </dgm:scene3d>
+    <dgm:sp3d/>
+    <dgm:txPr/>
+    <dgm:style>
+      <a:lnRef idx="2">
+        <a:scrgbClr r="0" g="0" b="0"/>
+      </a:lnRef>
+      <a:fillRef idx="1">
+        <a:scrgbClr r="0" g="0" b="0"/>
+      </a:fillRef>
+      <a:effectRef idx="0">
+        <a:scrgbClr r="0" g="0" b="0"/>
+      </a:effectRef>
+      <a:fontRef idx="minor"/>
+    </dgm:style>
+  </dgm:styleLbl>
+  <dgm:styleLbl name="fgAcc0">
+    <dgm:scene3d>
+      <a:camera prst="orthographicFront"/>
+      <a:lightRig rig="threePt" dir="t"/>
+    </dgm:scene3d>
+    <dgm:sp3d/>
+    <dgm:txPr/>
+    <dgm:style>
+      <a:lnRef idx="2">
+        <a:scrgbClr r="0" g="0" b="0"/>
+      </a:lnRef>
+      <a:fillRef idx="1">
+        <a:scrgbClr r="0" g="0" b="0"/>
+      </a:fillRef>
+      <a:effectRef idx="0">
+        <a:scrgbClr r="0" g="0" b="0"/>
+      </a:effectRef>
+      <a:fontRef idx="minor"/>
+    </dgm:style>
+  </dgm:styleLbl>
+  <dgm:styleLbl name="fgAcc2">
+    <dgm:scene3d>
+      <a:camera prst="orthographicFront"/>
+      <a:lightRig rig="threePt" dir="t"/>
+    </dgm:scene3d>
+    <dgm:sp3d/>
+    <dgm:txPr/>
+    <dgm:style>
+      <a:lnRef idx="2">
+        <a:scrgbClr r="0" g="0" b="0"/>
+      </a:lnRef>
+      <a:fillRef idx="1">
+        <a:scrgbClr r="0" g="0" b="0"/>
+      </a:fillRef>
+      <a:effectRef idx="0">
+        <a:scrgbClr r="0" g="0" b="0"/>
+      </a:effectRef>
+      <a:fontRef idx="minor"/>
+    </dgm:style>
+  </dgm:styleLbl>
+  <dgm:styleLbl name="fgAcc3">
+    <dgm:scene3d>
+      <a:camera prst="orthographicFront"/>
+      <a:lightRig rig="threePt" dir="t"/>
+    </dgm:scene3d>
+    <dgm:sp3d/>
+    <dgm:txPr/>
+    <dgm:style>
+      <a:lnRef idx="2">
+        <a:scrgbClr r="0" g="0" b="0"/>
+      </a:lnRef>
+      <a:fillRef idx="1">
+        <a:scrgbClr r="0" g="0" b="0"/>
+      </a:fillRef>
+      <a:effectRef idx="0">
+        <a:scrgbClr r="0" g="0" b="0"/>
+      </a:effectRef>
+      <a:fontRef idx="minor"/>
+    </dgm:style>
+  </dgm:styleLbl>
+  <dgm:styleLbl name="fgAcc4">
+    <dgm:scene3d>
+      <a:camera prst="orthographicFront"/>
+      <a:lightRig rig="threePt" dir="t"/>
+    </dgm:scene3d>
+    <dgm:sp3d/>
+    <dgm:txPr/>
+    <dgm:style>
+      <a:lnRef idx="2">
+        <a:scrgbClr r="0" g="0" b="0"/>
+      </a:lnRef>
+      <a:fillRef idx="1">
+        <a:scrgbClr r="0" g="0" b="0"/>
+      </a:fillRef>
+      <a:effectRef idx="0">
+        <a:scrgbClr r="0" g="0" b="0"/>
+      </a:effectRef>
+      <a:fontRef idx="minor"/>
+    </dgm:style>
+  </dgm:styleLbl>
+  <dgm:styleLbl name="bgShp">
+    <dgm:scene3d>
+      <a:camera prst="orthographicFront"/>
+      <a:lightRig rig="threePt" dir="t"/>
+    </dgm:scene3d>
+    <dgm:sp3d/>
+    <dgm:txPr/>
+    <dgm:style>
+      <a:lnRef idx="0">
+        <a:scrgbClr r="0" g="0" b="0"/>
+      </a:lnRef>
+      <a:fillRef idx="1">
+        <a:scrgbClr r="0" g="0" b="0"/>
+      </a:fillRef>
+      <a:effectRef idx="0">
+        <a:scrgbClr r="0" g="0" b="0"/>
+      </a:effectRef>
+      <a:fontRef idx="minor"/>
+    </dgm:style>
+  </dgm:styleLbl>
+  <dgm:styleLbl name="dkBgShp">
+    <dgm:scene3d>
+      <a:camera prst="orthographicFront"/>
+      <a:lightRig rig="threePt" dir="t"/>
+    </dgm:scene3d>
+    <dgm:sp3d/>
+    <dgm:txPr/>
+    <dgm:style>
+      <a:lnRef idx="0">
+        <a:scrgbClr r="0" g="0" b="0"/>
+      </a:lnRef>
+      <a:fillRef idx="1">
+        <a:scrgbClr r="0" g="0" b="0"/>
+      </a:fillRef>
+      <a:effectRef idx="0">
+        <a:scrgbClr r="0" g="0" b="0"/>
+      </a:effectRef>
+      <a:fontRef idx="minor"/>
+    </dgm:style>
+  </dgm:styleLbl>
+  <dgm:styleLbl name="trBgShp">
+    <dgm:scene3d>
+      <a:camera prst="orthographicFront"/>
+      <a:lightRig rig="threePt" dir="t"/>
+    </dgm:scene3d>
+    <dgm:sp3d/>
+    <dgm:txPr/>
+    <dgm:style>
+      <a:lnRef idx="0">
+        <a:scrgbClr r="0" g="0" b="0"/>
+      </a:lnRef>
+      <a:fillRef idx="1">
+        <a:scrgbClr r="0" g="0" b="0"/>
+      </a:fillRef>
+      <a:effectRef idx="0">
+        <a:scrgbClr r="0" g="0" b="0"/>
+      </a:effectRef>
+      <a:fontRef idx="minor"/>
+    </dgm:style>
+  </dgm:styleLbl>
+  <dgm:styleLbl name="fgShp">
+    <dgm:scene3d>
+      <a:camera prst="orthographicFront"/>
+      <a:lightRig rig="threePt" dir="t"/>
+    </dgm:scene3d>
+    <dgm:sp3d/>
+    <dgm:txPr/>
+    <dgm:style>
+      <a:lnRef idx="2">
+        <a:scrgbClr r="0" g="0" b="0"/>
+      </a:lnRef>
+      <a:fillRef idx="1">
+        <a:scrgbClr r="0" g="0" b="0"/>
+      </a:fillRef>
+      <a:effectRef idx="0">
+        <a:scrgbClr r="0" g="0" b="0"/>
+      </a:effectRef>
+      <a:fontRef idx="minor"/>
+    </dgm:style>
+  </dgm:styleLbl>
+  <dgm:styleLbl name="revTx">
+    <dgm:scene3d>
+      <a:camera prst="orthographicFront"/>
+      <a:lightRig rig="threePt" dir="t"/>
+    </dgm:scene3d>
+    <dgm:sp3d/>
+    <dgm:txPr/>
+    <dgm:style>
+      <a:lnRef idx="0">
+        <a:scrgbClr r="0" g="0" b="0"/>
+      </a:lnRef>
+      <a:fillRef idx="0">
+        <a:scrgbClr r="0" g="0" b="0"/>
+      </a:fillRef>
+      <a:effectRef idx="0">
+        <a:scrgbClr r="0" g="0" b="0"/>
+      </a:effectRef>
+      <a:fontRef idx="minor"/>
+    </dgm:style>
+  </dgm:styleLbl>
+</dgm:styleDef>
 </file>
 
 <file path=ppt/slideLayouts/slideLayout1.xml><?xml version="1.0" encoding="utf-8"?>
@@ -441,7 +3335,7 @@
             <a:fld id="{B61BEF0D-F0BB-DE4B-95CE-6DB70DBA9567}" type="datetimeFigureOut">
               <a:rPr lang="en-US" dirty="0"/>
               <a:pPr/>
-              <a:t>4/15/2026</a:t>
+              <a:t>4/22/2026</a:t>
             </a:fld>
             <a:endParaRPr lang="en-US" dirty="0"/>
           </a:p>
@@ -762,7 +3656,7 @@
             <a:fld id="{B61BEF0D-F0BB-DE4B-95CE-6DB70DBA9567}" type="datetimeFigureOut">
               <a:rPr lang="en-US" dirty="0"/>
               <a:pPr/>
-              <a:t>4/15/2026</a:t>
+              <a:t>4/22/2026</a:t>
             </a:fld>
             <a:endParaRPr lang="en-US" dirty="0"/>
           </a:p>
@@ -1007,7 +3901,7 @@
             <a:fld id="{B61BEF0D-F0BB-DE4B-95CE-6DB70DBA9567}" type="datetimeFigureOut">
               <a:rPr lang="en-US" dirty="0"/>
               <a:pPr/>
-              <a:t>4/15/2026</a:t>
+              <a:t>4/22/2026</a:t>
             </a:fld>
             <a:endParaRPr lang="en-US" dirty="0"/>
           </a:p>
@@ -1343,7 +4237,7 @@
             <a:fld id="{B61BEF0D-F0BB-DE4B-95CE-6DB70DBA9567}" type="datetimeFigureOut">
               <a:rPr lang="en-US" dirty="0"/>
               <a:pPr/>
-              <a:t>4/15/2026</a:t>
+              <a:t>4/22/2026</a:t>
             </a:fld>
             <a:endParaRPr lang="en-US" dirty="0"/>
           </a:p>
@@ -1687,7 +4581,7 @@
             <a:fld id="{B61BEF0D-F0BB-DE4B-95CE-6DB70DBA9567}" type="datetimeFigureOut">
               <a:rPr lang="en-US" dirty="0"/>
               <a:pPr/>
-              <a:t>4/15/2026</a:t>
+              <a:t>4/22/2026</a:t>
             </a:fld>
             <a:endParaRPr lang="en-US" dirty="0"/>
           </a:p>
@@ -2058,7 +4952,7 @@
             <a:fld id="{B61BEF0D-F0BB-DE4B-95CE-6DB70DBA9567}" type="datetimeFigureOut">
               <a:rPr lang="en-US" dirty="0"/>
               <a:pPr/>
-              <a:t>4/15/2026</a:t>
+              <a:t>4/22/2026</a:t>
             </a:fld>
             <a:endParaRPr lang="en-US" dirty="0"/>
           </a:p>
@@ -2525,7 +5419,7 @@
             <a:fld id="{B61BEF0D-F0BB-DE4B-95CE-6DB70DBA9567}" type="datetimeFigureOut">
               <a:rPr lang="en-US" dirty="0"/>
               <a:pPr/>
-              <a:t>4/15/2026</a:t>
+              <a:t>4/22/2026</a:t>
             </a:fld>
             <a:endParaRPr lang="en-US" dirty="0"/>
           </a:p>
@@ -2727,7 +5621,7 @@
             <a:fld id="{B61BEF0D-F0BB-DE4B-95CE-6DB70DBA9567}" type="datetimeFigureOut">
               <a:rPr lang="en-US" dirty="0"/>
               <a:pPr/>
-              <a:t>4/15/2026</a:t>
+              <a:t>4/22/2026</a:t>
             </a:fld>
             <a:endParaRPr lang="en-US" dirty="0"/>
           </a:p>
@@ -2935,7 +5829,7 @@
             <a:fld id="{B61BEF0D-F0BB-DE4B-95CE-6DB70DBA9567}" type="datetimeFigureOut">
               <a:rPr lang="en-US" dirty="0"/>
               <a:pPr/>
-              <a:t>4/15/2026</a:t>
+              <a:t>4/22/2026</a:t>
             </a:fld>
             <a:endParaRPr lang="en-US" dirty="0"/>
           </a:p>
@@ -3163,7 +6057,7 @@
           <a:p>
             <a:fld id="{52647F38-B617-4D2F-AE0A-013F0C4D2C57}" type="datetimeFigureOut">
               <a:rPr lang="en-US" dirty="0"/>
-              <a:t>4/15/2026</a:t>
+              <a:t>4/22/2026</a:t>
             </a:fld>
             <a:endParaRPr lang="en-US" dirty="0"/>
           </a:p>
@@ -3407,7 +6301,7 @@
             <a:fld id="{B61BEF0D-F0BB-DE4B-95CE-6DB70DBA9567}" type="datetimeFigureOut">
               <a:rPr lang="en-US" dirty="0"/>
               <a:pPr/>
-              <a:t>4/15/2026</a:t>
+              <a:t>4/22/2026</a:t>
             </a:fld>
             <a:endParaRPr lang="en-US" dirty="0"/>
           </a:p>
@@ -3701,7 +6595,7 @@
           <a:p>
             <a:fld id="{05BFA754-D5C3-4E66-96A6-867B257F58DC}" type="datetimeFigureOut">
               <a:rPr lang="en-US" dirty="0"/>
-              <a:t>4/15/2026</a:t>
+              <a:t>4/22/2026</a:t>
             </a:fld>
             <a:endParaRPr lang="en-US" dirty="0"/>
           </a:p>
@@ -4091,7 +6985,7 @@
             <a:fld id="{B61BEF0D-F0BB-DE4B-95CE-6DB70DBA9567}" type="datetimeFigureOut">
               <a:rPr lang="en-US" dirty="0"/>
               <a:pPr/>
-              <a:t>4/15/2026</a:t>
+              <a:t>4/22/2026</a:t>
             </a:fld>
             <a:endParaRPr lang="en-US" dirty="0"/>
           </a:p>
@@ -4237,7 +7131,7 @@
             <a:fld id="{B61BEF0D-F0BB-DE4B-95CE-6DB70DBA9567}" type="datetimeFigureOut">
               <a:rPr lang="en-US" dirty="0"/>
               <a:pPr/>
-              <a:t>4/15/2026</a:t>
+              <a:t>4/22/2026</a:t>
             </a:fld>
             <a:endParaRPr lang="en-US" dirty="0"/>
           </a:p>
@@ -4360,7 +7254,7 @@
             <a:fld id="{B61BEF0D-F0BB-DE4B-95CE-6DB70DBA9567}" type="datetimeFigureOut">
               <a:rPr lang="en-US" dirty="0"/>
               <a:pPr/>
-              <a:t>4/15/2026</a:t>
+              <a:t>4/22/2026</a:t>
             </a:fld>
             <a:endParaRPr lang="en-US" dirty="0"/>
           </a:p>
@@ -4612,7 +7506,7 @@
             <a:fld id="{B61BEF0D-F0BB-DE4B-95CE-6DB70DBA9567}" type="datetimeFigureOut">
               <a:rPr lang="en-US" dirty="0"/>
               <a:pPr/>
-              <a:t>4/15/2026</a:t>
+              <a:t>4/22/2026</a:t>
             </a:fld>
             <a:endParaRPr lang="en-US" dirty="0"/>
           </a:p>
@@ -4924,7 +7818,7 @@
             <a:fld id="{B61BEF0D-F0BB-DE4B-95CE-6DB70DBA9567}" type="datetimeFigureOut">
               <a:rPr lang="en-US" dirty="0"/>
               <a:pPr/>
-              <a:t>4/15/2026</a:t>
+              <a:t>4/22/2026</a:t>
             </a:fld>
             <a:endParaRPr lang="en-US" dirty="0"/>
           </a:p>
@@ -5272,7 +8166,7 @@
             <a:fld id="{B61BEF0D-F0BB-DE4B-95CE-6DB70DBA9567}" type="datetimeFigureOut">
               <a:rPr lang="en-US" dirty="0"/>
               <a:pPr/>
-              <a:t>4/15/2026</a:t>
+              <a:t>4/22/2026</a:t>
             </a:fld>
             <a:endParaRPr lang="en-US" dirty="0"/>
           </a:p>
@@ -5842,7 +8736,7 @@
                 <a:latin typeface="標楷體" panose="03000509000000000000" pitchFamily="65" charset="-120"/>
                 <a:ea typeface="標楷體" panose="03000509000000000000" pitchFamily="65" charset="-120"/>
               </a:rPr>
-              <a:t>資訊檢索系統期末專案</a:t>
+              <a:t>事實查核趨勢</a:t>
             </a:r>
           </a:p>
         </p:txBody>
@@ -5982,6 +8876,111 @@
       </p:grpSpPr>
       <p:sp>
         <p:nvSpPr>
+          <p:cNvPr id="4" name="標題 3">
+            <a:extLst>
+              <a:ext uri="{FF2B5EF4-FFF2-40B4-BE49-F238E27FC236}">
+                <a16:creationId xmlns:a16="http://schemas.microsoft.com/office/drawing/2014/main" id="{F1D5CE53-83F5-4BBA-BB3E-ABF11BF3B6B0}"/>
+              </a:ext>
+            </a:extLst>
+          </p:cNvPr>
+          <p:cNvSpPr>
+            <a:spLocks noGrp="1"/>
+          </p:cNvSpPr>
+          <p:nvPr>
+            <p:ph type="title"/>
+          </p:nvPr>
+        </p:nvSpPr>
+        <p:spPr/>
+        <p:txBody>
+          <a:bodyPr/>
+          <a:lstStyle/>
+          <a:p>
+            <a:r>
+              <a:rPr lang="en-US" altLang="zh-TW" dirty="0">
+                <a:latin typeface="Times New Roman" panose="02020603050405020304" pitchFamily="18" charset="0"/>
+                <a:ea typeface="標楷體" panose="03000509000000000000" pitchFamily="65" charset="-120"/>
+                <a:cs typeface="Times New Roman" panose="02020603050405020304" pitchFamily="18" charset="0"/>
+              </a:rPr>
+              <a:t>4/16</a:t>
+            </a:r>
+            <a:r>
+              <a:rPr lang="zh-TW" altLang="en-US" dirty="0">
+                <a:latin typeface="Times New Roman" panose="02020603050405020304" pitchFamily="18" charset="0"/>
+                <a:ea typeface="標楷體" panose="03000509000000000000" pitchFamily="65" charset="-120"/>
+                <a:cs typeface="Times New Roman" panose="02020603050405020304" pitchFamily="18" charset="0"/>
+              </a:rPr>
+              <a:t>進度</a:t>
+            </a:r>
+            <a:endParaRPr lang="zh-TW" altLang="en-US" dirty="0">
+              <a:latin typeface="標楷體" panose="03000509000000000000" pitchFamily="65" charset="-120"/>
+              <a:ea typeface="標楷體" panose="03000509000000000000" pitchFamily="65" charset="-120"/>
+            </a:endParaRPr>
+          </a:p>
+        </p:txBody>
+      </p:sp>
+      <p:sp>
+        <p:nvSpPr>
+          <p:cNvPr id="5" name="文字版面配置區 4">
+            <a:extLst>
+              <a:ext uri="{FF2B5EF4-FFF2-40B4-BE49-F238E27FC236}">
+                <a16:creationId xmlns:a16="http://schemas.microsoft.com/office/drawing/2014/main" id="{9F5CBA14-3D57-4898-86A7-E9F06D90C241}"/>
+              </a:ext>
+            </a:extLst>
+          </p:cNvPr>
+          <p:cNvSpPr>
+            <a:spLocks noGrp="1"/>
+          </p:cNvSpPr>
+          <p:nvPr>
+            <p:ph type="body" idx="1"/>
+          </p:nvPr>
+        </p:nvSpPr>
+        <p:spPr/>
+        <p:txBody>
+          <a:bodyPr/>
+          <a:lstStyle/>
+          <a:p>
+            <a:r>
+              <a:rPr lang="zh-TW" altLang="en-US" dirty="0">
+                <a:latin typeface="標楷體" panose="03000509000000000000" pitchFamily="65" charset="-120"/>
+                <a:ea typeface="標楷體" panose="03000509000000000000" pitchFamily="65" charset="-120"/>
+              </a:rPr>
+              <a:t>對事實查核中心網站進行爬蟲</a:t>
+            </a:r>
+          </a:p>
+        </p:txBody>
+      </p:sp>
+    </p:spTree>
+    <p:extLst>
+      <p:ext uri="{BB962C8B-B14F-4D97-AF65-F5344CB8AC3E}">
+        <p14:creationId xmlns:p14="http://schemas.microsoft.com/office/powerpoint/2010/main" val="645880314"/>
+      </p:ext>
+    </p:extLst>
+  </p:cSld>
+  <p:clrMapOvr>
+    <a:masterClrMapping/>
+  </p:clrMapOvr>
+</p:sld>
+</file>
+
+<file path=ppt/slides/slide3.xml><?xml version="1.0" encoding="utf-8"?>
+<p:sld xmlns:a="http://schemas.openxmlformats.org/drawingml/2006/main" xmlns:r="http://schemas.openxmlformats.org/officeDocument/2006/relationships" xmlns:p="http://schemas.openxmlformats.org/presentationml/2006/main">
+  <p:cSld>
+    <p:spTree>
+      <p:nvGrpSpPr>
+        <p:cNvPr id="1" name=""/>
+        <p:cNvGrpSpPr/>
+        <p:nvPr/>
+      </p:nvGrpSpPr>
+      <p:grpSpPr>
+        <a:xfrm>
+          <a:off x="0" y="0"/>
+          <a:ext cx="0" cy="0"/>
+          <a:chOff x="0" y="0"/>
+          <a:chExt cx="0" cy="0"/>
+        </a:xfrm>
+      </p:grpSpPr>
+      <p:sp>
+        <p:nvSpPr>
           <p:cNvPr id="2" name="標題 1">
             <a:extLst>
               <a:ext uri="{FF2B5EF4-FFF2-40B4-BE49-F238E27FC236}">
@@ -6003,20 +9002,12 @@
           <a:p>
             <a:pPr algn="l"/>
             <a:r>
-              <a:rPr lang="en-US" altLang="zh-TW" dirty="0">
-                <a:latin typeface="Times New Roman" panose="02020603050405020304" pitchFamily="18" charset="0"/>
-                <a:ea typeface="標楷體" panose="03000509000000000000" pitchFamily="65" charset="-120"/>
-                <a:cs typeface="Times New Roman" panose="02020603050405020304" pitchFamily="18" charset="0"/>
-              </a:rPr>
-              <a:t>4/16</a:t>
-            </a:r>
-            <a:r>
               <a:rPr lang="zh-TW" altLang="en-US" dirty="0">
                 <a:latin typeface="Times New Roman" panose="02020603050405020304" pitchFamily="18" charset="0"/>
                 <a:ea typeface="標楷體" panose="03000509000000000000" pitchFamily="65" charset="-120"/>
                 <a:cs typeface="Times New Roman" panose="02020603050405020304" pitchFamily="18" charset="0"/>
               </a:rPr>
-              <a:t>進度：爬網站（使用</a:t>
+              <a:t>爬網站（使用</a:t>
             </a:r>
             <a:r>
               <a:rPr lang="en-US" altLang="zh-TW" dirty="0" err="1">
@@ -6109,7 +9100,710 @@
 </p:sld>
 </file>
 
-<file path=ppt/slides/slide3.xml><?xml version="1.0" encoding="utf-8"?>
+<file path=ppt/slides/slide4.xml><?xml version="1.0" encoding="utf-8"?>
+<p:sld xmlns:a="http://schemas.openxmlformats.org/drawingml/2006/main" xmlns:r="http://schemas.openxmlformats.org/officeDocument/2006/relationships" xmlns:p="http://schemas.openxmlformats.org/presentationml/2006/main">
+  <p:cSld>
+    <p:spTree>
+      <p:nvGrpSpPr>
+        <p:cNvPr id="1" name=""/>
+        <p:cNvGrpSpPr/>
+        <p:nvPr/>
+      </p:nvGrpSpPr>
+      <p:grpSpPr>
+        <a:xfrm>
+          <a:off x="0" y="0"/>
+          <a:ext cx="0" cy="0"/>
+          <a:chOff x="0" y="0"/>
+          <a:chExt cx="0" cy="0"/>
+        </a:xfrm>
+      </p:grpSpPr>
+      <p:sp>
+        <p:nvSpPr>
+          <p:cNvPr id="4" name="標題 3">
+            <a:extLst>
+              <a:ext uri="{FF2B5EF4-FFF2-40B4-BE49-F238E27FC236}">
+                <a16:creationId xmlns:a16="http://schemas.microsoft.com/office/drawing/2014/main" id="{F1D5CE53-83F5-4BBA-BB3E-ABF11BF3B6B0}"/>
+              </a:ext>
+            </a:extLst>
+          </p:cNvPr>
+          <p:cNvSpPr>
+            <a:spLocks noGrp="1"/>
+          </p:cNvSpPr>
+          <p:nvPr>
+            <p:ph type="title"/>
+          </p:nvPr>
+        </p:nvSpPr>
+        <p:spPr/>
+        <p:txBody>
+          <a:bodyPr/>
+          <a:lstStyle/>
+          <a:p>
+            <a:r>
+              <a:rPr lang="en-US" altLang="zh-TW" dirty="0">
+                <a:latin typeface="Times New Roman" panose="02020603050405020304" pitchFamily="18" charset="0"/>
+                <a:cs typeface="Times New Roman" panose="02020603050405020304" pitchFamily="18" charset="0"/>
+              </a:rPr>
+              <a:t>4/23</a:t>
+            </a:r>
+            <a:r>
+              <a:rPr lang="zh-TW" altLang="en-US" dirty="0">
+                <a:latin typeface="標楷體" panose="03000509000000000000" pitchFamily="65" charset="-120"/>
+                <a:ea typeface="標楷體" panose="03000509000000000000" pitchFamily="65" charset="-120"/>
+              </a:rPr>
+              <a:t>進度</a:t>
+            </a:r>
+          </a:p>
+        </p:txBody>
+      </p:sp>
+      <p:sp>
+        <p:nvSpPr>
+          <p:cNvPr id="5" name="文字版面配置區 4">
+            <a:extLst>
+              <a:ext uri="{FF2B5EF4-FFF2-40B4-BE49-F238E27FC236}">
+                <a16:creationId xmlns:a16="http://schemas.microsoft.com/office/drawing/2014/main" id="{9F5CBA14-3D57-4898-86A7-E9F06D90C241}"/>
+              </a:ext>
+            </a:extLst>
+          </p:cNvPr>
+          <p:cNvSpPr>
+            <a:spLocks noGrp="1"/>
+          </p:cNvSpPr>
+          <p:nvPr>
+            <p:ph type="body" idx="1"/>
+          </p:nvPr>
+        </p:nvSpPr>
+        <p:spPr/>
+        <p:txBody>
+          <a:bodyPr/>
+          <a:lstStyle/>
+          <a:p>
+            <a:r>
+              <a:rPr lang="zh-TW" altLang="en-US" dirty="0">
+                <a:latin typeface="標楷體" panose="03000509000000000000" pitchFamily="65" charset="-120"/>
+                <a:ea typeface="標楷體" panose="03000509000000000000" pitchFamily="65" charset="-120"/>
+              </a:rPr>
+              <a:t>功能說明</a:t>
+            </a:r>
+          </a:p>
+        </p:txBody>
+      </p:sp>
+    </p:spTree>
+    <p:extLst>
+      <p:ext uri="{BB962C8B-B14F-4D97-AF65-F5344CB8AC3E}">
+        <p14:creationId xmlns:p14="http://schemas.microsoft.com/office/powerpoint/2010/main" val="593641216"/>
+      </p:ext>
+    </p:extLst>
+  </p:cSld>
+  <p:clrMapOvr>
+    <a:masterClrMapping/>
+  </p:clrMapOvr>
+</p:sld>
+</file>
+
+<file path=ppt/slides/slide5.xml><?xml version="1.0" encoding="utf-8"?>
+<p:sld xmlns:a="http://schemas.openxmlformats.org/drawingml/2006/main" xmlns:r="http://schemas.openxmlformats.org/officeDocument/2006/relationships" xmlns:p="http://schemas.openxmlformats.org/presentationml/2006/main">
+  <p:cSld>
+    <p:spTree>
+      <p:nvGrpSpPr>
+        <p:cNvPr id="1" name=""/>
+        <p:cNvGrpSpPr/>
+        <p:nvPr/>
+      </p:nvGrpSpPr>
+      <p:grpSpPr>
+        <a:xfrm>
+          <a:off x="0" y="0"/>
+          <a:ext cx="0" cy="0"/>
+          <a:chOff x="0" y="0"/>
+          <a:chExt cx="0" cy="0"/>
+        </a:xfrm>
+      </p:grpSpPr>
+      <p:sp>
+        <p:nvSpPr>
+          <p:cNvPr id="2" name="標題 1">
+            <a:extLst>
+              <a:ext uri="{FF2B5EF4-FFF2-40B4-BE49-F238E27FC236}">
+                <a16:creationId xmlns:a16="http://schemas.microsoft.com/office/drawing/2014/main" id="{2DE3768E-4ECB-4AFC-9D38-D8D0C87616D5}"/>
+              </a:ext>
+            </a:extLst>
+          </p:cNvPr>
+          <p:cNvSpPr>
+            <a:spLocks noGrp="1"/>
+          </p:cNvSpPr>
+          <p:nvPr>
+            <p:ph type="title"/>
+          </p:nvPr>
+        </p:nvSpPr>
+        <p:spPr/>
+        <p:txBody>
+          <a:bodyPr/>
+          <a:lstStyle/>
+          <a:p>
+            <a:pPr algn="l"/>
+            <a:r>
+              <a:rPr lang="zh-TW" altLang="en-US" dirty="0">
+                <a:latin typeface="標楷體" panose="03000509000000000000" pitchFamily="65" charset="-120"/>
+                <a:ea typeface="標楷體" panose="03000509000000000000" pitchFamily="65" charset="-120"/>
+              </a:rPr>
+              <a:t>功能一</a:t>
+            </a:r>
+            <a:r>
+              <a:rPr lang="en-US" altLang="zh-TW" dirty="0">
+                <a:latin typeface="標楷體" panose="03000509000000000000" pitchFamily="65" charset="-120"/>
+                <a:ea typeface="標楷體" panose="03000509000000000000" pitchFamily="65" charset="-120"/>
+              </a:rPr>
+              <a:t>:</a:t>
+            </a:r>
+            <a:r>
+              <a:rPr lang="zh-TW" altLang="en-US" dirty="0">
+                <a:latin typeface="標楷體" panose="03000509000000000000" pitchFamily="65" charset="-120"/>
+                <a:ea typeface="標楷體" panose="03000509000000000000" pitchFamily="65" charset="-120"/>
+              </a:rPr>
+              <a:t>趨勢分析</a:t>
+            </a:r>
+          </a:p>
+        </p:txBody>
+      </p:sp>
+      <p:sp>
+        <p:nvSpPr>
+          <p:cNvPr id="3" name="內容版面配置區 2">
+            <a:extLst>
+              <a:ext uri="{FF2B5EF4-FFF2-40B4-BE49-F238E27FC236}">
+                <a16:creationId xmlns:a16="http://schemas.microsoft.com/office/drawing/2014/main" id="{140B7DEE-05AE-4C0B-879F-0C5512A4BDD8}"/>
+              </a:ext>
+            </a:extLst>
+          </p:cNvPr>
+          <p:cNvSpPr>
+            <a:spLocks noGrp="1"/>
+          </p:cNvSpPr>
+          <p:nvPr>
+            <p:ph idx="1"/>
+          </p:nvPr>
+        </p:nvSpPr>
+        <p:spPr/>
+        <p:txBody>
+          <a:bodyPr/>
+          <a:lstStyle/>
+          <a:p>
+            <a:r>
+              <a:rPr lang="zh-TW" altLang="en-US" dirty="0">
+                <a:latin typeface="標楷體" panose="03000509000000000000" pitchFamily="65" charset="-120"/>
+                <a:ea typeface="標楷體" panose="03000509000000000000" pitchFamily="65" charset="-120"/>
+              </a:rPr>
+              <a:t>利用時間線整理關鍵字趨勢</a:t>
+            </a:r>
+            <a:endParaRPr lang="en-US" altLang="zh-TW" dirty="0">
+              <a:latin typeface="標楷體" panose="03000509000000000000" pitchFamily="65" charset="-120"/>
+              <a:ea typeface="標楷體" panose="03000509000000000000" pitchFamily="65" charset="-120"/>
+            </a:endParaRPr>
+          </a:p>
+          <a:p>
+            <a:r>
+              <a:rPr lang="zh-TW" altLang="en-US" dirty="0">
+                <a:latin typeface="標楷體" panose="03000509000000000000" pitchFamily="65" charset="-120"/>
+                <a:ea typeface="標楷體" panose="03000509000000000000" pitchFamily="65" charset="-120"/>
+              </a:rPr>
+              <a:t>範例</a:t>
+            </a:r>
+            <a:r>
+              <a:rPr lang="en-US" altLang="zh-TW" dirty="0">
+                <a:latin typeface="標楷體" panose="03000509000000000000" pitchFamily="65" charset="-120"/>
+                <a:ea typeface="標楷體" panose="03000509000000000000" pitchFamily="65" charset="-120"/>
+              </a:rPr>
+              <a:t>:</a:t>
+            </a:r>
+          </a:p>
+          <a:p>
+            <a:endParaRPr lang="zh-TW" altLang="en-US" dirty="0">
+              <a:latin typeface="標楷體" panose="03000509000000000000" pitchFamily="65" charset="-120"/>
+              <a:ea typeface="標楷體" panose="03000509000000000000" pitchFamily="65" charset="-120"/>
+            </a:endParaRPr>
+          </a:p>
+        </p:txBody>
+      </p:sp>
+      <p:graphicFrame>
+        <p:nvGraphicFramePr>
+          <p:cNvPr id="10" name="資料庫圖表 9">
+            <a:extLst>
+              <a:ext uri="{FF2B5EF4-FFF2-40B4-BE49-F238E27FC236}">
+                <a16:creationId xmlns:a16="http://schemas.microsoft.com/office/drawing/2014/main" id="{4C5D166F-4D53-442F-B7CB-5ED2942E8350}"/>
+              </a:ext>
+            </a:extLst>
+          </p:cNvPr>
+          <p:cNvGraphicFramePr/>
+          <p:nvPr>
+            <p:extLst>
+              <p:ext uri="{D42A27DB-BD31-4B8C-83A1-F6EECF244321}">
+                <p14:modId xmlns:p14="http://schemas.microsoft.com/office/powerpoint/2010/main" val="3832958467"/>
+              </p:ext>
+            </p:extLst>
+          </p:nvPr>
+        </p:nvGraphicFramePr>
+        <p:xfrm>
+          <a:off x="2627618" y="3388299"/>
+          <a:ext cx="8268979" cy="2758502"/>
+        </p:xfrm>
+        <a:graphic>
+          <a:graphicData uri="http://schemas.openxmlformats.org/drawingml/2006/diagram">
+            <dgm:relIds xmlns:dgm="http://schemas.openxmlformats.org/drawingml/2006/diagram" xmlns:r="http://schemas.openxmlformats.org/officeDocument/2006/relationships" r:dm="rId2" r:lo="rId3" r:qs="rId4" r:cs="rId5"/>
+          </a:graphicData>
+        </a:graphic>
+      </p:graphicFrame>
+      <p:sp>
+        <p:nvSpPr>
+          <p:cNvPr id="12" name="文字方塊 11">
+            <a:extLst>
+              <a:ext uri="{FF2B5EF4-FFF2-40B4-BE49-F238E27FC236}">
+                <a16:creationId xmlns:a16="http://schemas.microsoft.com/office/drawing/2014/main" id="{21832B86-F6DD-4BBC-A2F3-A710A1BAABF7}"/>
+              </a:ext>
+            </a:extLst>
+          </p:cNvPr>
+          <p:cNvSpPr txBox="1"/>
+          <p:nvPr/>
+        </p:nvSpPr>
+        <p:spPr>
+          <a:xfrm>
+            <a:off x="6861843" y="5236704"/>
+            <a:ext cx="855677" cy="369332"/>
+          </a:xfrm>
+          <a:prstGeom prst="rect">
+            <a:avLst/>
+          </a:prstGeom>
+          <a:noFill/>
+        </p:spPr>
+        <p:txBody>
+          <a:bodyPr wrap="square" rtlCol="0">
+            <a:spAutoFit/>
+          </a:bodyPr>
+          <a:lstStyle/>
+          <a:p>
+            <a:pPr algn="ctr"/>
+            <a:r>
+              <a:rPr lang="en-US" altLang="zh-TW" dirty="0">
+                <a:solidFill>
+                  <a:srgbClr val="FF0000"/>
+                </a:solidFill>
+                <a:latin typeface="Times New Roman" panose="02020603050405020304" pitchFamily="18" charset="0"/>
+                <a:cs typeface="Times New Roman" panose="02020603050405020304" pitchFamily="18" charset="0"/>
+              </a:rPr>
+              <a:t>2025</a:t>
+            </a:r>
+            <a:endParaRPr lang="zh-TW" altLang="en-US" dirty="0">
+              <a:solidFill>
+                <a:srgbClr val="FF0000"/>
+              </a:solidFill>
+              <a:latin typeface="Times New Roman" panose="02020603050405020304" pitchFamily="18" charset="0"/>
+              <a:cs typeface="Times New Roman" panose="02020603050405020304" pitchFamily="18" charset="0"/>
+            </a:endParaRPr>
+          </a:p>
+        </p:txBody>
+      </p:sp>
+      <p:sp>
+        <p:nvSpPr>
+          <p:cNvPr id="14" name="文字方塊 13">
+            <a:extLst>
+              <a:ext uri="{FF2B5EF4-FFF2-40B4-BE49-F238E27FC236}">
+                <a16:creationId xmlns:a16="http://schemas.microsoft.com/office/drawing/2014/main" id="{B581054D-3DDF-4BF2-9797-A7709186DDD2}"/>
+              </a:ext>
+            </a:extLst>
+          </p:cNvPr>
+          <p:cNvSpPr txBox="1"/>
+          <p:nvPr/>
+        </p:nvSpPr>
+        <p:spPr>
+          <a:xfrm>
+            <a:off x="8708705" y="3847068"/>
+            <a:ext cx="855677" cy="369332"/>
+          </a:xfrm>
+          <a:prstGeom prst="rect">
+            <a:avLst/>
+          </a:prstGeom>
+          <a:noFill/>
+        </p:spPr>
+        <p:txBody>
+          <a:bodyPr wrap="square" rtlCol="0">
+            <a:spAutoFit/>
+          </a:bodyPr>
+          <a:lstStyle/>
+          <a:p>
+            <a:pPr algn="ctr"/>
+            <a:r>
+              <a:rPr lang="en-US" altLang="zh-TW" dirty="0">
+                <a:solidFill>
+                  <a:srgbClr val="FF0000"/>
+                </a:solidFill>
+                <a:latin typeface="Times New Roman" panose="02020603050405020304" pitchFamily="18" charset="0"/>
+                <a:cs typeface="Times New Roman" panose="02020603050405020304" pitchFamily="18" charset="0"/>
+              </a:rPr>
+              <a:t>2026</a:t>
+            </a:r>
+            <a:endParaRPr lang="zh-TW" altLang="en-US" dirty="0">
+              <a:solidFill>
+                <a:srgbClr val="FF0000"/>
+              </a:solidFill>
+              <a:latin typeface="Times New Roman" panose="02020603050405020304" pitchFamily="18" charset="0"/>
+              <a:cs typeface="Times New Roman" panose="02020603050405020304" pitchFamily="18" charset="0"/>
+            </a:endParaRPr>
+          </a:p>
+        </p:txBody>
+      </p:sp>
+      <p:sp>
+        <p:nvSpPr>
+          <p:cNvPr id="15" name="文字方塊 14">
+            <a:extLst>
+              <a:ext uri="{FF2B5EF4-FFF2-40B4-BE49-F238E27FC236}">
+                <a16:creationId xmlns:a16="http://schemas.microsoft.com/office/drawing/2014/main" id="{E0519AC0-E20A-4D1E-A88A-7AE6C894A583}"/>
+              </a:ext>
+            </a:extLst>
+          </p:cNvPr>
+          <p:cNvSpPr txBox="1"/>
+          <p:nvPr/>
+        </p:nvSpPr>
+        <p:spPr>
+          <a:xfrm>
+            <a:off x="3103575" y="5236704"/>
+            <a:ext cx="855677" cy="369332"/>
+          </a:xfrm>
+          <a:prstGeom prst="rect">
+            <a:avLst/>
+          </a:prstGeom>
+          <a:noFill/>
+        </p:spPr>
+        <p:txBody>
+          <a:bodyPr wrap="square" rtlCol="0">
+            <a:spAutoFit/>
+          </a:bodyPr>
+          <a:lstStyle/>
+          <a:p>
+            <a:pPr algn="ctr"/>
+            <a:r>
+              <a:rPr lang="en-US" altLang="zh-TW" dirty="0">
+                <a:solidFill>
+                  <a:srgbClr val="FF0000"/>
+                </a:solidFill>
+                <a:latin typeface="Times New Roman" panose="02020603050405020304" pitchFamily="18" charset="0"/>
+                <a:cs typeface="Times New Roman" panose="02020603050405020304" pitchFamily="18" charset="0"/>
+              </a:rPr>
+              <a:t>2019</a:t>
+            </a:r>
+            <a:endParaRPr lang="zh-TW" altLang="en-US" dirty="0">
+              <a:solidFill>
+                <a:srgbClr val="FF0000"/>
+              </a:solidFill>
+              <a:latin typeface="Times New Roman" panose="02020603050405020304" pitchFamily="18" charset="0"/>
+              <a:cs typeface="Times New Roman" panose="02020603050405020304" pitchFamily="18" charset="0"/>
+            </a:endParaRPr>
+          </a:p>
+        </p:txBody>
+      </p:sp>
+      <p:sp>
+        <p:nvSpPr>
+          <p:cNvPr id="16" name="文字方塊 15">
+            <a:extLst>
+              <a:ext uri="{FF2B5EF4-FFF2-40B4-BE49-F238E27FC236}">
+                <a16:creationId xmlns:a16="http://schemas.microsoft.com/office/drawing/2014/main" id="{68B178DD-B111-4D35-BE1F-F3FF1085E67A}"/>
+              </a:ext>
+            </a:extLst>
+          </p:cNvPr>
+          <p:cNvSpPr txBox="1"/>
+          <p:nvPr/>
+        </p:nvSpPr>
+        <p:spPr>
+          <a:xfrm>
+            <a:off x="5016265" y="3847068"/>
+            <a:ext cx="855677" cy="369332"/>
+          </a:xfrm>
+          <a:prstGeom prst="rect">
+            <a:avLst/>
+          </a:prstGeom>
+          <a:noFill/>
+        </p:spPr>
+        <p:txBody>
+          <a:bodyPr wrap="square" rtlCol="0">
+            <a:spAutoFit/>
+          </a:bodyPr>
+          <a:lstStyle/>
+          <a:p>
+            <a:pPr algn="ctr"/>
+            <a:r>
+              <a:rPr lang="en-US" altLang="zh-TW" dirty="0">
+                <a:solidFill>
+                  <a:srgbClr val="FF0000"/>
+                </a:solidFill>
+                <a:latin typeface="Times New Roman" panose="02020603050405020304" pitchFamily="18" charset="0"/>
+                <a:cs typeface="Times New Roman" panose="02020603050405020304" pitchFamily="18" charset="0"/>
+              </a:rPr>
+              <a:t>20XX</a:t>
+            </a:r>
+            <a:endParaRPr lang="zh-TW" altLang="en-US" dirty="0">
+              <a:solidFill>
+                <a:srgbClr val="FF0000"/>
+              </a:solidFill>
+              <a:latin typeface="Times New Roman" panose="02020603050405020304" pitchFamily="18" charset="0"/>
+              <a:cs typeface="Times New Roman" panose="02020603050405020304" pitchFamily="18" charset="0"/>
+            </a:endParaRPr>
+          </a:p>
+        </p:txBody>
+      </p:sp>
+    </p:spTree>
+    <p:extLst>
+      <p:ext uri="{BB962C8B-B14F-4D97-AF65-F5344CB8AC3E}">
+        <p14:creationId xmlns:p14="http://schemas.microsoft.com/office/powerpoint/2010/main" val="1384927080"/>
+      </p:ext>
+    </p:extLst>
+  </p:cSld>
+  <p:clrMapOvr>
+    <a:masterClrMapping/>
+  </p:clrMapOvr>
+</p:sld>
+</file>
+
+<file path=ppt/slides/slide6.xml><?xml version="1.0" encoding="utf-8"?>
+<p:sld xmlns:a="http://schemas.openxmlformats.org/drawingml/2006/main" xmlns:r="http://schemas.openxmlformats.org/officeDocument/2006/relationships" xmlns:p="http://schemas.openxmlformats.org/presentationml/2006/main">
+  <p:cSld>
+    <p:spTree>
+      <p:nvGrpSpPr>
+        <p:cNvPr id="1" name=""/>
+        <p:cNvGrpSpPr/>
+        <p:nvPr/>
+      </p:nvGrpSpPr>
+      <p:grpSpPr>
+        <a:xfrm>
+          <a:off x="0" y="0"/>
+          <a:ext cx="0" cy="0"/>
+          <a:chOff x="0" y="0"/>
+          <a:chExt cx="0" cy="0"/>
+        </a:xfrm>
+      </p:grpSpPr>
+      <p:sp>
+        <p:nvSpPr>
+          <p:cNvPr id="2" name="標題 1">
+            <a:extLst>
+              <a:ext uri="{FF2B5EF4-FFF2-40B4-BE49-F238E27FC236}">
+                <a16:creationId xmlns:a16="http://schemas.microsoft.com/office/drawing/2014/main" id="{2DE3768E-4ECB-4AFC-9D38-D8D0C87616D5}"/>
+              </a:ext>
+            </a:extLst>
+          </p:cNvPr>
+          <p:cNvSpPr>
+            <a:spLocks noGrp="1"/>
+          </p:cNvSpPr>
+          <p:nvPr>
+            <p:ph type="title"/>
+          </p:nvPr>
+        </p:nvSpPr>
+        <p:spPr/>
+        <p:txBody>
+          <a:bodyPr>
+            <a:normAutofit/>
+          </a:bodyPr>
+          <a:lstStyle/>
+          <a:p>
+            <a:pPr algn="l"/>
+            <a:r>
+              <a:rPr lang="zh-TW" altLang="en-US" dirty="0">
+                <a:latin typeface="標楷體" panose="03000509000000000000" pitchFamily="65" charset="-120"/>
+                <a:ea typeface="標楷體" panose="03000509000000000000" pitchFamily="65" charset="-120"/>
+              </a:rPr>
+              <a:t>功能二</a:t>
+            </a:r>
+            <a:r>
+              <a:rPr lang="en-US" altLang="zh-TW" dirty="0">
+                <a:latin typeface="標楷體" panose="03000509000000000000" pitchFamily="65" charset="-120"/>
+                <a:ea typeface="標楷體" panose="03000509000000000000" pitchFamily="65" charset="-120"/>
+              </a:rPr>
+              <a:t>:</a:t>
+            </a:r>
+            <a:r>
+              <a:rPr lang="zh-TW" altLang="en-US" dirty="0">
+                <a:latin typeface="標楷體" panose="03000509000000000000" pitchFamily="65" charset="-120"/>
+                <a:ea typeface="標楷體" panose="03000509000000000000" pitchFamily="65" charset="-120"/>
+              </a:rPr>
+              <a:t>推薦類似文章</a:t>
+            </a:r>
+          </a:p>
+        </p:txBody>
+      </p:sp>
+      <p:sp>
+        <p:nvSpPr>
+          <p:cNvPr id="3" name="內容版面配置區 2">
+            <a:extLst>
+              <a:ext uri="{FF2B5EF4-FFF2-40B4-BE49-F238E27FC236}">
+                <a16:creationId xmlns:a16="http://schemas.microsoft.com/office/drawing/2014/main" id="{140B7DEE-05AE-4C0B-879F-0C5512A4BDD8}"/>
+              </a:ext>
+            </a:extLst>
+          </p:cNvPr>
+          <p:cNvSpPr>
+            <a:spLocks noGrp="1"/>
+          </p:cNvSpPr>
+          <p:nvPr>
+            <p:ph idx="1"/>
+          </p:nvPr>
+        </p:nvSpPr>
+        <p:spPr/>
+        <p:txBody>
+          <a:bodyPr/>
+          <a:lstStyle/>
+          <a:p>
+            <a:r>
+              <a:rPr lang="zh-TW" altLang="en-US" dirty="0">
+                <a:latin typeface="標楷體" panose="03000509000000000000" pitchFamily="65" charset="-120"/>
+                <a:ea typeface="標楷體" panose="03000509000000000000" pitchFamily="65" charset="-120"/>
+              </a:rPr>
+              <a:t>相關內容面向的查核報告</a:t>
+            </a:r>
+            <a:endParaRPr lang="en-US" altLang="zh-TW" dirty="0">
+              <a:latin typeface="標楷體" panose="03000509000000000000" pitchFamily="65" charset="-120"/>
+              <a:ea typeface="標楷體" panose="03000509000000000000" pitchFamily="65" charset="-120"/>
+            </a:endParaRPr>
+          </a:p>
+          <a:p>
+            <a:r>
+              <a:rPr lang="zh-TW" altLang="en-US" dirty="0">
+                <a:latin typeface="標楷體" panose="03000509000000000000" pitchFamily="65" charset="-120"/>
+                <a:ea typeface="標楷體" panose="03000509000000000000" pitchFamily="65" charset="-120"/>
+              </a:rPr>
+              <a:t>範例</a:t>
+            </a:r>
+            <a:r>
+              <a:rPr lang="en-US" altLang="zh-TW" dirty="0">
+                <a:latin typeface="標楷體" panose="03000509000000000000" pitchFamily="65" charset="-120"/>
+                <a:ea typeface="標楷體" panose="03000509000000000000" pitchFamily="65" charset="-120"/>
+              </a:rPr>
+              <a:t>:</a:t>
+            </a:r>
+            <a:r>
+              <a:rPr lang="zh-TW" altLang="en-US" dirty="0">
+                <a:latin typeface="標楷體" panose="03000509000000000000" pitchFamily="65" charset="-120"/>
+                <a:ea typeface="標楷體" panose="03000509000000000000" pitchFamily="65" charset="-120"/>
+              </a:rPr>
+              <a:t>有相同類型的文章</a:t>
+            </a:r>
+          </a:p>
+        </p:txBody>
+      </p:sp>
+    </p:spTree>
+    <p:extLst>
+      <p:ext uri="{BB962C8B-B14F-4D97-AF65-F5344CB8AC3E}">
+        <p14:creationId xmlns:p14="http://schemas.microsoft.com/office/powerpoint/2010/main" val="3433268771"/>
+      </p:ext>
+    </p:extLst>
+  </p:cSld>
+  <p:clrMapOvr>
+    <a:masterClrMapping/>
+  </p:clrMapOvr>
+</p:sld>
+</file>
+
+<file path=ppt/slides/slide7.xml><?xml version="1.0" encoding="utf-8"?>
+<p:sld xmlns:a="http://schemas.openxmlformats.org/drawingml/2006/main" xmlns:r="http://schemas.openxmlformats.org/officeDocument/2006/relationships" xmlns:p="http://schemas.openxmlformats.org/presentationml/2006/main" show="0">
+  <p:cSld>
+    <p:spTree>
+      <p:nvGrpSpPr>
+        <p:cNvPr id="1" name=""/>
+        <p:cNvGrpSpPr/>
+        <p:nvPr/>
+      </p:nvGrpSpPr>
+      <p:grpSpPr>
+        <a:xfrm>
+          <a:off x="0" y="0"/>
+          <a:ext cx="0" cy="0"/>
+          <a:chOff x="0" y="0"/>
+          <a:chExt cx="0" cy="0"/>
+        </a:xfrm>
+      </p:grpSpPr>
+      <p:sp>
+        <p:nvSpPr>
+          <p:cNvPr id="2" name="標題 1">
+            <a:extLst>
+              <a:ext uri="{FF2B5EF4-FFF2-40B4-BE49-F238E27FC236}">
+                <a16:creationId xmlns:a16="http://schemas.microsoft.com/office/drawing/2014/main" id="{2DE3768E-4ECB-4AFC-9D38-D8D0C87616D5}"/>
+              </a:ext>
+            </a:extLst>
+          </p:cNvPr>
+          <p:cNvSpPr>
+            <a:spLocks noGrp="1"/>
+          </p:cNvSpPr>
+          <p:nvPr>
+            <p:ph type="title"/>
+          </p:nvPr>
+        </p:nvSpPr>
+        <p:spPr/>
+        <p:txBody>
+          <a:bodyPr>
+            <a:normAutofit/>
+          </a:bodyPr>
+          <a:lstStyle/>
+          <a:p>
+            <a:pPr algn="l"/>
+            <a:r>
+              <a:rPr lang="zh-TW" altLang="en-US" dirty="0">
+                <a:latin typeface="標楷體" panose="03000509000000000000" pitchFamily="65" charset="-120"/>
+                <a:ea typeface="標楷體" panose="03000509000000000000" pitchFamily="65" charset="-120"/>
+              </a:rPr>
+              <a:t>功能三</a:t>
+            </a:r>
+            <a:r>
+              <a:rPr lang="en-US" altLang="zh-TW" dirty="0">
+                <a:latin typeface="標楷體" panose="03000509000000000000" pitchFamily="65" charset="-120"/>
+                <a:ea typeface="標楷體" panose="03000509000000000000" pitchFamily="65" charset="-120"/>
+              </a:rPr>
+              <a:t>:</a:t>
+            </a:r>
+            <a:r>
+              <a:rPr lang="en-US" altLang="zh-TW" dirty="0">
+                <a:latin typeface="Times New Roman" panose="02020603050405020304" pitchFamily="18" charset="0"/>
+                <a:ea typeface="標楷體" panose="03000509000000000000" pitchFamily="65" charset="-120"/>
+                <a:cs typeface="Times New Roman" panose="02020603050405020304" pitchFamily="18" charset="0"/>
+              </a:rPr>
+              <a:t>AI</a:t>
+            </a:r>
+            <a:r>
+              <a:rPr lang="zh-TW" altLang="en-US" dirty="0">
+                <a:latin typeface="標楷體" panose="03000509000000000000" pitchFamily="65" charset="-120"/>
+                <a:ea typeface="標楷體" panose="03000509000000000000" pitchFamily="65" charset="-120"/>
+              </a:rPr>
+              <a:t>判斷事實</a:t>
+            </a:r>
+          </a:p>
+        </p:txBody>
+      </p:sp>
+      <p:sp>
+        <p:nvSpPr>
+          <p:cNvPr id="3" name="內容版面配置區 2">
+            <a:extLst>
+              <a:ext uri="{FF2B5EF4-FFF2-40B4-BE49-F238E27FC236}">
+                <a16:creationId xmlns:a16="http://schemas.microsoft.com/office/drawing/2014/main" id="{140B7DEE-05AE-4C0B-879F-0C5512A4BDD8}"/>
+              </a:ext>
+            </a:extLst>
+          </p:cNvPr>
+          <p:cNvSpPr>
+            <a:spLocks noGrp="1"/>
+          </p:cNvSpPr>
+          <p:nvPr>
+            <p:ph idx="1"/>
+          </p:nvPr>
+        </p:nvSpPr>
+        <p:spPr/>
+        <p:txBody>
+          <a:bodyPr/>
+          <a:lstStyle/>
+          <a:p>
+            <a:endParaRPr lang="zh-TW" altLang="en-US" dirty="0"/>
+          </a:p>
+        </p:txBody>
+      </p:sp>
+    </p:spTree>
+    <p:extLst>
+      <p:ext uri="{BB962C8B-B14F-4D97-AF65-F5344CB8AC3E}">
+        <p14:creationId xmlns:p14="http://schemas.microsoft.com/office/powerpoint/2010/main" val="1784176158"/>
+      </p:ext>
+    </p:extLst>
+  </p:cSld>
+  <p:clrMapOvr>
+    <a:masterClrMapping/>
+  </p:clrMapOvr>
+</p:sld>
+</file>
+
+<file path=ppt/slides/slide8.xml><?xml version="1.0" encoding="utf-8"?>
 <p:sld xmlns:a="http://schemas.openxmlformats.org/drawingml/2006/main" xmlns:r="http://schemas.openxmlformats.org/officeDocument/2006/relationships" xmlns:p="http://schemas.openxmlformats.org/presentationml/2006/main">
   <p:cSld>
     <p:spTree>

--- a/資訊檢索系統期末專案.pptx
+++ b/資訊檢索系統期末專案.pptx
@@ -3335,7 +3335,7 @@
             <a:fld id="{B61BEF0D-F0BB-DE4B-95CE-6DB70DBA9567}" type="datetimeFigureOut">
               <a:rPr lang="en-US" dirty="0"/>
               <a:pPr/>
-              <a:t>4/22/2026</a:t>
+              <a:t>4/29/2026</a:t>
             </a:fld>
             <a:endParaRPr lang="en-US" dirty="0"/>
           </a:p>
@@ -3656,7 +3656,7 @@
             <a:fld id="{B61BEF0D-F0BB-DE4B-95CE-6DB70DBA9567}" type="datetimeFigureOut">
               <a:rPr lang="en-US" dirty="0"/>
               <a:pPr/>
-              <a:t>4/22/2026</a:t>
+              <a:t>4/29/2026</a:t>
             </a:fld>
             <a:endParaRPr lang="en-US" dirty="0"/>
           </a:p>
@@ -3901,7 +3901,7 @@
             <a:fld id="{B61BEF0D-F0BB-DE4B-95CE-6DB70DBA9567}" type="datetimeFigureOut">
               <a:rPr lang="en-US" dirty="0"/>
               <a:pPr/>
-              <a:t>4/22/2026</a:t>
+              <a:t>4/29/2026</a:t>
             </a:fld>
             <a:endParaRPr lang="en-US" dirty="0"/>
           </a:p>
@@ -4237,7 +4237,7 @@
             <a:fld id="{B61BEF0D-F0BB-DE4B-95CE-6DB70DBA9567}" type="datetimeFigureOut">
               <a:rPr lang="en-US" dirty="0"/>
               <a:pPr/>
-              <a:t>4/22/2026</a:t>
+              <a:t>4/29/2026</a:t>
             </a:fld>
             <a:endParaRPr lang="en-US" dirty="0"/>
           </a:p>
@@ -4581,7 +4581,7 @@
             <a:fld id="{B61BEF0D-F0BB-DE4B-95CE-6DB70DBA9567}" type="datetimeFigureOut">
               <a:rPr lang="en-US" dirty="0"/>
               <a:pPr/>
-              <a:t>4/22/2026</a:t>
+              <a:t>4/29/2026</a:t>
             </a:fld>
             <a:endParaRPr lang="en-US" dirty="0"/>
           </a:p>
@@ -4952,7 +4952,7 @@
             <a:fld id="{B61BEF0D-F0BB-DE4B-95CE-6DB70DBA9567}" type="datetimeFigureOut">
               <a:rPr lang="en-US" dirty="0"/>
               <a:pPr/>
-              <a:t>4/22/2026</a:t>
+              <a:t>4/29/2026</a:t>
             </a:fld>
             <a:endParaRPr lang="en-US" dirty="0"/>
           </a:p>
@@ -5419,7 +5419,7 @@
             <a:fld id="{B61BEF0D-F0BB-DE4B-95CE-6DB70DBA9567}" type="datetimeFigureOut">
               <a:rPr lang="en-US" dirty="0"/>
               <a:pPr/>
-              <a:t>4/22/2026</a:t>
+              <a:t>4/29/2026</a:t>
             </a:fld>
             <a:endParaRPr lang="en-US" dirty="0"/>
           </a:p>
@@ -5621,7 +5621,7 @@
             <a:fld id="{B61BEF0D-F0BB-DE4B-95CE-6DB70DBA9567}" type="datetimeFigureOut">
               <a:rPr lang="en-US" dirty="0"/>
               <a:pPr/>
-              <a:t>4/22/2026</a:t>
+              <a:t>4/29/2026</a:t>
             </a:fld>
             <a:endParaRPr lang="en-US" dirty="0"/>
           </a:p>
@@ -5829,7 +5829,7 @@
             <a:fld id="{B61BEF0D-F0BB-DE4B-95CE-6DB70DBA9567}" type="datetimeFigureOut">
               <a:rPr lang="en-US" dirty="0"/>
               <a:pPr/>
-              <a:t>4/22/2026</a:t>
+              <a:t>4/29/2026</a:t>
             </a:fld>
             <a:endParaRPr lang="en-US" dirty="0"/>
           </a:p>
@@ -6057,7 +6057,7 @@
           <a:p>
             <a:fld id="{52647F38-B617-4D2F-AE0A-013F0C4D2C57}" type="datetimeFigureOut">
               <a:rPr lang="en-US" dirty="0"/>
-              <a:t>4/22/2026</a:t>
+              <a:t>4/29/2026</a:t>
             </a:fld>
             <a:endParaRPr lang="en-US" dirty="0"/>
           </a:p>
@@ -6301,7 +6301,7 @@
             <a:fld id="{B61BEF0D-F0BB-DE4B-95CE-6DB70DBA9567}" type="datetimeFigureOut">
               <a:rPr lang="en-US" dirty="0"/>
               <a:pPr/>
-              <a:t>4/22/2026</a:t>
+              <a:t>4/29/2026</a:t>
             </a:fld>
             <a:endParaRPr lang="en-US" dirty="0"/>
           </a:p>
@@ -6595,7 +6595,7 @@
           <a:p>
             <a:fld id="{05BFA754-D5C3-4E66-96A6-867B257F58DC}" type="datetimeFigureOut">
               <a:rPr lang="en-US" dirty="0"/>
-              <a:t>4/22/2026</a:t>
+              <a:t>4/29/2026</a:t>
             </a:fld>
             <a:endParaRPr lang="en-US" dirty="0"/>
           </a:p>
@@ -6985,7 +6985,7 @@
             <a:fld id="{B61BEF0D-F0BB-DE4B-95CE-6DB70DBA9567}" type="datetimeFigureOut">
               <a:rPr lang="en-US" dirty="0"/>
               <a:pPr/>
-              <a:t>4/22/2026</a:t>
+              <a:t>4/29/2026</a:t>
             </a:fld>
             <a:endParaRPr lang="en-US" dirty="0"/>
           </a:p>
@@ -7131,7 +7131,7 @@
             <a:fld id="{B61BEF0D-F0BB-DE4B-95CE-6DB70DBA9567}" type="datetimeFigureOut">
               <a:rPr lang="en-US" dirty="0"/>
               <a:pPr/>
-              <a:t>4/22/2026</a:t>
+              <a:t>4/29/2026</a:t>
             </a:fld>
             <a:endParaRPr lang="en-US" dirty="0"/>
           </a:p>
@@ -7254,7 +7254,7 @@
             <a:fld id="{B61BEF0D-F0BB-DE4B-95CE-6DB70DBA9567}" type="datetimeFigureOut">
               <a:rPr lang="en-US" dirty="0"/>
               <a:pPr/>
-              <a:t>4/22/2026</a:t>
+              <a:t>4/29/2026</a:t>
             </a:fld>
             <a:endParaRPr lang="en-US" dirty="0"/>
           </a:p>
@@ -7506,7 +7506,7 @@
             <a:fld id="{B61BEF0D-F0BB-DE4B-95CE-6DB70DBA9567}" type="datetimeFigureOut">
               <a:rPr lang="en-US" dirty="0"/>
               <a:pPr/>
-              <a:t>4/22/2026</a:t>
+              <a:t>4/29/2026</a:t>
             </a:fld>
             <a:endParaRPr lang="en-US" dirty="0"/>
           </a:p>
@@ -7818,7 +7818,7 @@
             <a:fld id="{B61BEF0D-F0BB-DE4B-95CE-6DB70DBA9567}" type="datetimeFigureOut">
               <a:rPr lang="en-US" dirty="0"/>
               <a:pPr/>
-              <a:t>4/22/2026</a:t>
+              <a:t>4/29/2026</a:t>
             </a:fld>
             <a:endParaRPr lang="en-US" dirty="0"/>
           </a:p>
@@ -8166,7 +8166,7 @@
             <a:fld id="{B61BEF0D-F0BB-DE4B-95CE-6DB70DBA9567}" type="datetimeFigureOut">
               <a:rPr lang="en-US" dirty="0"/>
               <a:pPr/>
-              <a:t>4/22/2026</a:t>
+              <a:t>4/29/2026</a:t>
             </a:fld>
             <a:endParaRPr lang="en-US" dirty="0"/>
           </a:p>
@@ -8946,6 +8946,53 @@
               </a:rPr>
               <a:t>對事實查核中心網站進行爬蟲</a:t>
             </a:r>
+            <a:br>
+              <a:rPr lang="en-US" altLang="zh-TW" dirty="0">
+                <a:latin typeface="標楷體" panose="03000509000000000000" pitchFamily="65" charset="-120"/>
+                <a:ea typeface="標楷體" panose="03000509000000000000" pitchFamily="65" charset="-120"/>
+              </a:rPr>
+            </a:br>
+            <a:r>
+              <a:rPr lang="en-US" altLang="zh-TW" dirty="0">
+                <a:latin typeface="標楷體" panose="03000509000000000000" pitchFamily="65" charset="-120"/>
+                <a:ea typeface="標楷體" panose="03000509000000000000" pitchFamily="65" charset="-120"/>
+              </a:rPr>
+              <a:t>(</a:t>
+            </a:r>
+            <a:r>
+              <a:rPr lang="en-US" altLang="zh-TW" dirty="0">
+                <a:latin typeface="Times New Roman" panose="02020603050405020304" pitchFamily="18" charset="0"/>
+                <a:ea typeface="標楷體" panose="03000509000000000000" pitchFamily="65" charset="-120"/>
+                <a:cs typeface="Times New Roman" panose="02020603050405020304" pitchFamily="18" charset="0"/>
+              </a:rPr>
+              <a:t>4111</a:t>
+            </a:r>
+            <a:r>
+              <a:rPr lang="zh-TW" altLang="en-US" dirty="0">
+                <a:latin typeface="標楷體" panose="03000509000000000000" pitchFamily="65" charset="-120"/>
+                <a:ea typeface="標楷體" panose="03000509000000000000" pitchFamily="65" charset="-120"/>
+              </a:rPr>
+              <a:t>篇文章直到</a:t>
+            </a:r>
+            <a:r>
+              <a:rPr lang="en-US" altLang="zh-TW" dirty="0">
+                <a:latin typeface="Times New Roman" panose="02020603050405020304" pitchFamily="18" charset="0"/>
+                <a:ea typeface="標楷體" panose="03000509000000000000" pitchFamily="65" charset="-120"/>
+                <a:cs typeface="Times New Roman" panose="02020603050405020304" pitchFamily="18" charset="0"/>
+              </a:rPr>
+              <a:t>4/23</a:t>
+            </a:r>
+            <a:r>
+              <a:rPr lang="en-US" altLang="zh-TW" dirty="0">
+                <a:latin typeface="標楷體" panose="03000509000000000000" pitchFamily="65" charset="-120"/>
+                <a:ea typeface="標楷體" panose="03000509000000000000" pitchFamily="65" charset="-120"/>
+              </a:rPr>
+              <a:t>)</a:t>
+            </a:r>
+            <a:endParaRPr lang="zh-TW" altLang="en-US" dirty="0">
+              <a:latin typeface="標楷體" panose="03000509000000000000" pitchFamily="65" charset="-120"/>
+              <a:ea typeface="標楷體" panose="03000509000000000000" pitchFamily="65" charset="-120"/>
+            </a:endParaRPr>
           </a:p>
         </p:txBody>
       </p:sp>

--- a/資訊檢索系統期末專案.pptx
+++ b/資訊檢索系統期末專案.pptx
@@ -12,7 +12,10 @@
     <p:sldId id="261" r:id="rId6"/>
     <p:sldId id="264" r:id="rId7"/>
     <p:sldId id="265" r:id="rId8"/>
-    <p:sldId id="258" r:id="rId9"/>
+    <p:sldId id="266" r:id="rId9"/>
+    <p:sldId id="267" r:id="rId10"/>
+    <p:sldId id="268" r:id="rId11"/>
+    <p:sldId id="258" r:id="rId12"/>
   </p:sldIdLst>
   <p:sldSz cx="12192000" cy="6858000"/>
   <p:notesSz cx="6858000" cy="9144000"/>
@@ -866,7 +869,1077 @@
 </dgm:colorsDef>
 </file>
 
+<file path=ppt/diagrams/colors2.xml><?xml version="1.0" encoding="utf-8"?>
+<dgm:colorsDef xmlns:dgm="http://schemas.openxmlformats.org/drawingml/2006/diagram" xmlns:a="http://schemas.openxmlformats.org/drawingml/2006/main" uniqueId="urn:microsoft.com/office/officeart/2005/8/colors/accent1_2">
+  <dgm:title val=""/>
+  <dgm:desc val=""/>
+  <dgm:catLst>
+    <dgm:cat type="accent1" pri="11200"/>
+  </dgm:catLst>
+  <dgm:styleLbl name="node0">
+    <dgm:fillClrLst meth="repeat">
+      <a:schemeClr val="accent1"/>
+    </dgm:fillClrLst>
+    <dgm:linClrLst meth="repeat">
+      <a:schemeClr val="lt1"/>
+    </dgm:linClrLst>
+    <dgm:effectClrLst/>
+    <dgm:txLinClrLst/>
+    <dgm:txFillClrLst/>
+    <dgm:txEffectClrLst/>
+  </dgm:styleLbl>
+  <dgm:styleLbl name="alignNode1">
+    <dgm:fillClrLst meth="repeat">
+      <a:schemeClr val="accent1"/>
+    </dgm:fillClrLst>
+    <dgm:linClrLst meth="repeat">
+      <a:schemeClr val="accent1"/>
+    </dgm:linClrLst>
+    <dgm:effectClrLst/>
+    <dgm:txLinClrLst/>
+    <dgm:txFillClrLst/>
+    <dgm:txEffectClrLst/>
+  </dgm:styleLbl>
+  <dgm:styleLbl name="node1">
+    <dgm:fillClrLst meth="repeat">
+      <a:schemeClr val="accent1"/>
+    </dgm:fillClrLst>
+    <dgm:linClrLst meth="repeat">
+      <a:schemeClr val="lt1"/>
+    </dgm:linClrLst>
+    <dgm:effectClrLst/>
+    <dgm:txLinClrLst/>
+    <dgm:txFillClrLst/>
+    <dgm:txEffectClrLst/>
+  </dgm:styleLbl>
+  <dgm:styleLbl name="lnNode1">
+    <dgm:fillClrLst meth="repeat">
+      <a:schemeClr val="accent1"/>
+    </dgm:fillClrLst>
+    <dgm:linClrLst meth="repeat">
+      <a:schemeClr val="lt1"/>
+    </dgm:linClrLst>
+    <dgm:effectClrLst/>
+    <dgm:txLinClrLst/>
+    <dgm:txFillClrLst/>
+    <dgm:txEffectClrLst/>
+  </dgm:styleLbl>
+  <dgm:styleLbl name="vennNode1">
+    <dgm:fillClrLst meth="repeat">
+      <a:schemeClr val="accent1">
+        <a:alpha val="50000"/>
+      </a:schemeClr>
+    </dgm:fillClrLst>
+    <dgm:linClrLst meth="repeat">
+      <a:schemeClr val="lt1"/>
+    </dgm:linClrLst>
+    <dgm:effectClrLst/>
+    <dgm:txLinClrLst/>
+    <dgm:txFillClrLst/>
+    <dgm:txEffectClrLst/>
+  </dgm:styleLbl>
+  <dgm:styleLbl name="node2">
+    <dgm:fillClrLst meth="repeat">
+      <a:schemeClr val="accent1"/>
+    </dgm:fillClrLst>
+    <dgm:linClrLst meth="repeat">
+      <a:schemeClr val="lt1"/>
+    </dgm:linClrLst>
+    <dgm:effectClrLst/>
+    <dgm:txLinClrLst/>
+    <dgm:txFillClrLst/>
+    <dgm:txEffectClrLst/>
+  </dgm:styleLbl>
+  <dgm:styleLbl name="node3">
+    <dgm:fillClrLst meth="repeat">
+      <a:schemeClr val="accent1"/>
+    </dgm:fillClrLst>
+    <dgm:linClrLst meth="repeat">
+      <a:schemeClr val="lt1"/>
+    </dgm:linClrLst>
+    <dgm:effectClrLst/>
+    <dgm:txLinClrLst/>
+    <dgm:txFillClrLst/>
+    <dgm:txEffectClrLst/>
+  </dgm:styleLbl>
+  <dgm:styleLbl name="node4">
+    <dgm:fillClrLst meth="repeat">
+      <a:schemeClr val="accent1"/>
+    </dgm:fillClrLst>
+    <dgm:linClrLst meth="repeat">
+      <a:schemeClr val="lt1"/>
+    </dgm:linClrLst>
+    <dgm:effectClrLst/>
+    <dgm:txLinClrLst/>
+    <dgm:txFillClrLst/>
+    <dgm:txEffectClrLst/>
+  </dgm:styleLbl>
+  <dgm:styleLbl name="fgImgPlace1">
+    <dgm:fillClrLst meth="repeat">
+      <a:schemeClr val="accent1">
+        <a:tint val="50000"/>
+      </a:schemeClr>
+    </dgm:fillClrLst>
+    <dgm:linClrLst meth="repeat">
+      <a:schemeClr val="lt1"/>
+    </dgm:linClrLst>
+    <dgm:effectClrLst/>
+    <dgm:txLinClrLst/>
+    <dgm:txFillClrLst meth="repeat">
+      <a:schemeClr val="lt1"/>
+    </dgm:txFillClrLst>
+    <dgm:txEffectClrLst/>
+  </dgm:styleLbl>
+  <dgm:styleLbl name="alignImgPlace1">
+    <dgm:fillClrLst meth="repeat">
+      <a:schemeClr val="accent1">
+        <a:tint val="50000"/>
+      </a:schemeClr>
+    </dgm:fillClrLst>
+    <dgm:linClrLst meth="repeat">
+      <a:schemeClr val="lt1"/>
+    </dgm:linClrLst>
+    <dgm:effectClrLst/>
+    <dgm:txLinClrLst/>
+    <dgm:txFillClrLst meth="repeat">
+      <a:schemeClr val="lt1"/>
+    </dgm:txFillClrLst>
+    <dgm:txEffectClrLst/>
+  </dgm:styleLbl>
+  <dgm:styleLbl name="bgImgPlace1">
+    <dgm:fillClrLst meth="repeat">
+      <a:schemeClr val="accent1">
+        <a:tint val="50000"/>
+      </a:schemeClr>
+    </dgm:fillClrLst>
+    <dgm:linClrLst meth="repeat">
+      <a:schemeClr val="lt1"/>
+    </dgm:linClrLst>
+    <dgm:effectClrLst/>
+    <dgm:txLinClrLst/>
+    <dgm:txFillClrLst meth="repeat">
+      <a:schemeClr val="lt1"/>
+    </dgm:txFillClrLst>
+    <dgm:txEffectClrLst/>
+  </dgm:styleLbl>
+  <dgm:styleLbl name="sibTrans2D1">
+    <dgm:fillClrLst meth="repeat">
+      <a:schemeClr val="accent1">
+        <a:tint val="60000"/>
+      </a:schemeClr>
+    </dgm:fillClrLst>
+    <dgm:linClrLst meth="repeat">
+      <a:schemeClr val="accent1">
+        <a:tint val="60000"/>
+      </a:schemeClr>
+    </dgm:linClrLst>
+    <dgm:effectClrLst/>
+    <dgm:txLinClrLst/>
+    <dgm:txFillClrLst/>
+    <dgm:txEffectClrLst/>
+  </dgm:styleLbl>
+  <dgm:styleLbl name="fgSibTrans2D1">
+    <dgm:fillClrLst meth="repeat">
+      <a:schemeClr val="accent1">
+        <a:tint val="60000"/>
+      </a:schemeClr>
+    </dgm:fillClrLst>
+    <dgm:linClrLst meth="repeat">
+      <a:schemeClr val="accent1">
+        <a:tint val="60000"/>
+      </a:schemeClr>
+    </dgm:linClrLst>
+    <dgm:effectClrLst/>
+    <dgm:txLinClrLst/>
+    <dgm:txFillClrLst/>
+    <dgm:txEffectClrLst/>
+  </dgm:styleLbl>
+  <dgm:styleLbl name="bgSibTrans2D1">
+    <dgm:fillClrLst meth="repeat">
+      <a:schemeClr val="accent1">
+        <a:tint val="60000"/>
+      </a:schemeClr>
+    </dgm:fillClrLst>
+    <dgm:linClrLst meth="repeat">
+      <a:schemeClr val="accent1">
+        <a:tint val="60000"/>
+      </a:schemeClr>
+    </dgm:linClrLst>
+    <dgm:effectClrLst/>
+    <dgm:txLinClrLst/>
+    <dgm:txFillClrLst/>
+    <dgm:txEffectClrLst/>
+  </dgm:styleLbl>
+  <dgm:styleLbl name="sibTrans1D1">
+    <dgm:fillClrLst meth="repeat">
+      <a:schemeClr val="accent1"/>
+    </dgm:fillClrLst>
+    <dgm:linClrLst meth="repeat">
+      <a:schemeClr val="accent1"/>
+    </dgm:linClrLst>
+    <dgm:effectClrLst/>
+    <dgm:txLinClrLst/>
+    <dgm:txFillClrLst meth="repeat">
+      <a:schemeClr val="tx1"/>
+    </dgm:txFillClrLst>
+    <dgm:txEffectClrLst/>
+  </dgm:styleLbl>
+  <dgm:styleLbl name="callout">
+    <dgm:fillClrLst meth="repeat">
+      <a:schemeClr val="accent1"/>
+    </dgm:fillClrLst>
+    <dgm:linClrLst meth="repeat">
+      <a:schemeClr val="accent1">
+        <a:tint val="50000"/>
+      </a:schemeClr>
+    </dgm:linClrLst>
+    <dgm:effectClrLst/>
+    <dgm:txLinClrLst/>
+    <dgm:txFillClrLst meth="repeat">
+      <a:schemeClr val="tx1"/>
+    </dgm:txFillClrLst>
+    <dgm:txEffectClrLst/>
+  </dgm:styleLbl>
+  <dgm:styleLbl name="asst0">
+    <dgm:fillClrLst meth="repeat">
+      <a:schemeClr val="accent1"/>
+    </dgm:fillClrLst>
+    <dgm:linClrLst meth="repeat">
+      <a:schemeClr val="lt1"/>
+    </dgm:linClrLst>
+    <dgm:effectClrLst/>
+    <dgm:txLinClrLst/>
+    <dgm:txFillClrLst/>
+    <dgm:txEffectClrLst/>
+  </dgm:styleLbl>
+  <dgm:styleLbl name="asst1">
+    <dgm:fillClrLst meth="repeat">
+      <a:schemeClr val="accent1"/>
+    </dgm:fillClrLst>
+    <dgm:linClrLst meth="repeat">
+      <a:schemeClr val="lt1"/>
+    </dgm:linClrLst>
+    <dgm:effectClrLst/>
+    <dgm:txLinClrLst/>
+    <dgm:txFillClrLst/>
+    <dgm:txEffectClrLst/>
+  </dgm:styleLbl>
+  <dgm:styleLbl name="asst2">
+    <dgm:fillClrLst meth="repeat">
+      <a:schemeClr val="accent1"/>
+    </dgm:fillClrLst>
+    <dgm:linClrLst meth="repeat">
+      <a:schemeClr val="lt1"/>
+    </dgm:linClrLst>
+    <dgm:effectClrLst/>
+    <dgm:txLinClrLst/>
+    <dgm:txFillClrLst/>
+    <dgm:txEffectClrLst/>
+  </dgm:styleLbl>
+  <dgm:styleLbl name="asst3">
+    <dgm:fillClrLst meth="repeat">
+      <a:schemeClr val="accent1"/>
+    </dgm:fillClrLst>
+    <dgm:linClrLst meth="repeat">
+      <a:schemeClr val="lt1"/>
+    </dgm:linClrLst>
+    <dgm:effectClrLst/>
+    <dgm:txLinClrLst/>
+    <dgm:txFillClrLst/>
+    <dgm:txEffectClrLst/>
+  </dgm:styleLbl>
+  <dgm:styleLbl name="asst4">
+    <dgm:fillClrLst meth="repeat">
+      <a:schemeClr val="accent1"/>
+    </dgm:fillClrLst>
+    <dgm:linClrLst meth="repeat">
+      <a:schemeClr val="lt1"/>
+    </dgm:linClrLst>
+    <dgm:effectClrLst/>
+    <dgm:txLinClrLst/>
+    <dgm:txFillClrLst/>
+    <dgm:txEffectClrLst/>
+  </dgm:styleLbl>
+  <dgm:styleLbl name="parChTrans2D1">
+    <dgm:fillClrLst meth="repeat">
+      <a:schemeClr val="accent1">
+        <a:tint val="60000"/>
+      </a:schemeClr>
+    </dgm:fillClrLst>
+    <dgm:linClrLst meth="repeat">
+      <a:schemeClr val="accent1">
+        <a:tint val="60000"/>
+      </a:schemeClr>
+    </dgm:linClrLst>
+    <dgm:effectClrLst/>
+    <dgm:txLinClrLst/>
+    <dgm:txFillClrLst meth="repeat">
+      <a:schemeClr val="lt1"/>
+    </dgm:txFillClrLst>
+    <dgm:txEffectClrLst/>
+  </dgm:styleLbl>
+  <dgm:styleLbl name="parChTrans2D2">
+    <dgm:fillClrLst meth="repeat">
+      <a:schemeClr val="accent1"/>
+    </dgm:fillClrLst>
+    <dgm:linClrLst meth="repeat">
+      <a:schemeClr val="accent1"/>
+    </dgm:linClrLst>
+    <dgm:effectClrLst/>
+    <dgm:txLinClrLst/>
+    <dgm:txFillClrLst meth="repeat">
+      <a:schemeClr val="lt1"/>
+    </dgm:txFillClrLst>
+    <dgm:txEffectClrLst/>
+  </dgm:styleLbl>
+  <dgm:styleLbl name="parChTrans2D3">
+    <dgm:fillClrLst meth="repeat">
+      <a:schemeClr val="accent1"/>
+    </dgm:fillClrLst>
+    <dgm:linClrLst meth="repeat">
+      <a:schemeClr val="accent1"/>
+    </dgm:linClrLst>
+    <dgm:effectClrLst/>
+    <dgm:txLinClrLst/>
+    <dgm:txFillClrLst meth="repeat">
+      <a:schemeClr val="lt1"/>
+    </dgm:txFillClrLst>
+    <dgm:txEffectClrLst/>
+  </dgm:styleLbl>
+  <dgm:styleLbl name="parChTrans2D4">
+    <dgm:fillClrLst meth="repeat">
+      <a:schemeClr val="accent1"/>
+    </dgm:fillClrLst>
+    <dgm:linClrLst meth="repeat">
+      <a:schemeClr val="accent1"/>
+    </dgm:linClrLst>
+    <dgm:effectClrLst/>
+    <dgm:txLinClrLst/>
+    <dgm:txFillClrLst meth="repeat">
+      <a:schemeClr val="lt1"/>
+    </dgm:txFillClrLst>
+    <dgm:txEffectClrLst/>
+  </dgm:styleLbl>
+  <dgm:styleLbl name="parChTrans1D1">
+    <dgm:fillClrLst meth="repeat">
+      <a:schemeClr val="accent1"/>
+    </dgm:fillClrLst>
+    <dgm:linClrLst meth="repeat">
+      <a:schemeClr val="accent1">
+        <a:shade val="60000"/>
+      </a:schemeClr>
+    </dgm:linClrLst>
+    <dgm:effectClrLst/>
+    <dgm:txLinClrLst/>
+    <dgm:txFillClrLst meth="repeat">
+      <a:schemeClr val="tx1"/>
+    </dgm:txFillClrLst>
+    <dgm:txEffectClrLst/>
+  </dgm:styleLbl>
+  <dgm:styleLbl name="parChTrans1D2">
+    <dgm:fillClrLst meth="repeat">
+      <a:schemeClr val="accent1"/>
+    </dgm:fillClrLst>
+    <dgm:linClrLst meth="repeat">
+      <a:schemeClr val="accent1">
+        <a:shade val="60000"/>
+      </a:schemeClr>
+    </dgm:linClrLst>
+    <dgm:effectClrLst/>
+    <dgm:txLinClrLst/>
+    <dgm:txFillClrLst meth="repeat">
+      <a:schemeClr val="tx1"/>
+    </dgm:txFillClrLst>
+    <dgm:txEffectClrLst/>
+  </dgm:styleLbl>
+  <dgm:styleLbl name="parChTrans1D3">
+    <dgm:fillClrLst meth="repeat">
+      <a:schemeClr val="accent1"/>
+    </dgm:fillClrLst>
+    <dgm:linClrLst meth="repeat">
+      <a:schemeClr val="accent1">
+        <a:shade val="80000"/>
+      </a:schemeClr>
+    </dgm:linClrLst>
+    <dgm:effectClrLst/>
+    <dgm:txLinClrLst/>
+    <dgm:txFillClrLst meth="repeat">
+      <a:schemeClr val="tx1"/>
+    </dgm:txFillClrLst>
+    <dgm:txEffectClrLst/>
+  </dgm:styleLbl>
+  <dgm:styleLbl name="parChTrans1D4">
+    <dgm:fillClrLst meth="repeat">
+      <a:schemeClr val="accent1"/>
+    </dgm:fillClrLst>
+    <dgm:linClrLst meth="repeat">
+      <a:schemeClr val="accent1">
+        <a:shade val="80000"/>
+      </a:schemeClr>
+    </dgm:linClrLst>
+    <dgm:effectClrLst/>
+    <dgm:txLinClrLst/>
+    <dgm:txFillClrLst meth="repeat">
+      <a:schemeClr val="tx1"/>
+    </dgm:txFillClrLst>
+    <dgm:txEffectClrLst/>
+  </dgm:styleLbl>
+  <dgm:styleLbl name="fgAcc1">
+    <dgm:fillClrLst meth="repeat">
+      <a:schemeClr val="lt1">
+        <a:alpha val="90000"/>
+      </a:schemeClr>
+    </dgm:fillClrLst>
+    <dgm:linClrLst meth="repeat">
+      <a:schemeClr val="accent1"/>
+    </dgm:linClrLst>
+    <dgm:effectClrLst/>
+    <dgm:txLinClrLst/>
+    <dgm:txFillClrLst meth="repeat">
+      <a:schemeClr val="dk1"/>
+    </dgm:txFillClrLst>
+    <dgm:txEffectClrLst/>
+  </dgm:styleLbl>
+  <dgm:styleLbl name="conFgAcc1">
+    <dgm:fillClrLst meth="repeat">
+      <a:schemeClr val="lt1">
+        <a:alpha val="90000"/>
+      </a:schemeClr>
+    </dgm:fillClrLst>
+    <dgm:linClrLst meth="repeat">
+      <a:schemeClr val="accent1"/>
+    </dgm:linClrLst>
+    <dgm:effectClrLst/>
+    <dgm:txLinClrLst/>
+    <dgm:txFillClrLst meth="repeat">
+      <a:schemeClr val="dk1"/>
+    </dgm:txFillClrLst>
+    <dgm:txEffectClrLst/>
+  </dgm:styleLbl>
+  <dgm:styleLbl name="alignAcc1">
+    <dgm:fillClrLst meth="repeat">
+      <a:schemeClr val="lt1">
+        <a:alpha val="90000"/>
+      </a:schemeClr>
+    </dgm:fillClrLst>
+    <dgm:linClrLst meth="repeat">
+      <a:schemeClr val="accent1"/>
+    </dgm:linClrLst>
+    <dgm:effectClrLst/>
+    <dgm:txLinClrLst/>
+    <dgm:txFillClrLst meth="repeat">
+      <a:schemeClr val="dk1"/>
+    </dgm:txFillClrLst>
+    <dgm:txEffectClrLst/>
+  </dgm:styleLbl>
+  <dgm:styleLbl name="trAlignAcc1">
+    <dgm:fillClrLst meth="repeat">
+      <a:schemeClr val="lt1">
+        <a:alpha val="40000"/>
+      </a:schemeClr>
+    </dgm:fillClrLst>
+    <dgm:linClrLst meth="repeat">
+      <a:schemeClr val="accent1"/>
+    </dgm:linClrLst>
+    <dgm:effectClrLst/>
+    <dgm:txLinClrLst/>
+    <dgm:txFillClrLst meth="repeat">
+      <a:schemeClr val="dk1"/>
+    </dgm:txFillClrLst>
+    <dgm:txEffectClrLst/>
+  </dgm:styleLbl>
+  <dgm:styleLbl name="bgAcc1">
+    <dgm:fillClrLst meth="repeat">
+      <a:schemeClr val="lt1">
+        <a:alpha val="90000"/>
+      </a:schemeClr>
+    </dgm:fillClrLst>
+    <dgm:linClrLst meth="repeat">
+      <a:schemeClr val="accent1"/>
+    </dgm:linClrLst>
+    <dgm:effectClrLst/>
+    <dgm:txLinClrLst/>
+    <dgm:txFillClrLst meth="repeat">
+      <a:schemeClr val="dk1"/>
+    </dgm:txFillClrLst>
+    <dgm:txEffectClrLst/>
+  </dgm:styleLbl>
+  <dgm:styleLbl name="solidFgAcc1">
+    <dgm:fillClrLst meth="repeat">
+      <a:schemeClr val="lt1"/>
+    </dgm:fillClrLst>
+    <dgm:linClrLst meth="repeat">
+      <a:schemeClr val="accent1"/>
+    </dgm:linClrLst>
+    <dgm:effectClrLst/>
+    <dgm:txLinClrLst/>
+    <dgm:txFillClrLst meth="repeat">
+      <a:schemeClr val="dk1"/>
+    </dgm:txFillClrLst>
+    <dgm:txEffectClrLst/>
+  </dgm:styleLbl>
+  <dgm:styleLbl name="solidAlignAcc1">
+    <dgm:fillClrLst meth="repeat">
+      <a:schemeClr val="lt1"/>
+    </dgm:fillClrLst>
+    <dgm:linClrLst meth="repeat">
+      <a:schemeClr val="accent1"/>
+    </dgm:linClrLst>
+    <dgm:effectClrLst/>
+    <dgm:txLinClrLst/>
+    <dgm:txFillClrLst meth="repeat">
+      <a:schemeClr val="dk1"/>
+    </dgm:txFillClrLst>
+    <dgm:txEffectClrLst/>
+  </dgm:styleLbl>
+  <dgm:styleLbl name="solidBgAcc1">
+    <dgm:fillClrLst meth="repeat">
+      <a:schemeClr val="lt1"/>
+    </dgm:fillClrLst>
+    <dgm:linClrLst meth="repeat">
+      <a:schemeClr val="accent1"/>
+    </dgm:linClrLst>
+    <dgm:effectClrLst/>
+    <dgm:txLinClrLst/>
+    <dgm:txFillClrLst meth="repeat">
+      <a:schemeClr val="dk1"/>
+    </dgm:txFillClrLst>
+    <dgm:txEffectClrLst/>
+  </dgm:styleLbl>
+  <dgm:styleLbl name="fgAccFollowNode1">
+    <dgm:fillClrLst meth="repeat">
+      <a:schemeClr val="accent1">
+        <a:alpha val="90000"/>
+        <a:tint val="40000"/>
+      </a:schemeClr>
+    </dgm:fillClrLst>
+    <dgm:linClrLst meth="repeat">
+      <a:schemeClr val="accent1">
+        <a:alpha val="90000"/>
+        <a:tint val="40000"/>
+      </a:schemeClr>
+    </dgm:linClrLst>
+    <dgm:effectClrLst/>
+    <dgm:txLinClrLst/>
+    <dgm:txFillClrLst meth="repeat">
+      <a:schemeClr val="dk1"/>
+    </dgm:txFillClrLst>
+    <dgm:txEffectClrLst/>
+  </dgm:styleLbl>
+  <dgm:styleLbl name="alignAccFollowNode1">
+    <dgm:fillClrLst meth="repeat">
+      <a:schemeClr val="accent1">
+        <a:alpha val="90000"/>
+        <a:tint val="40000"/>
+      </a:schemeClr>
+    </dgm:fillClrLst>
+    <dgm:linClrLst meth="repeat">
+      <a:schemeClr val="accent1">
+        <a:alpha val="90000"/>
+        <a:tint val="40000"/>
+      </a:schemeClr>
+    </dgm:linClrLst>
+    <dgm:effectClrLst/>
+    <dgm:txLinClrLst/>
+    <dgm:txFillClrLst meth="repeat">
+      <a:schemeClr val="dk1"/>
+    </dgm:txFillClrLst>
+    <dgm:txEffectClrLst/>
+  </dgm:styleLbl>
+  <dgm:styleLbl name="bgAccFollowNode1">
+    <dgm:fillClrLst meth="repeat">
+      <a:schemeClr val="accent1">
+        <a:alpha val="90000"/>
+        <a:tint val="40000"/>
+      </a:schemeClr>
+    </dgm:fillClrLst>
+    <dgm:linClrLst meth="repeat">
+      <a:schemeClr val="accent1">
+        <a:alpha val="90000"/>
+        <a:tint val="40000"/>
+      </a:schemeClr>
+    </dgm:linClrLst>
+    <dgm:effectClrLst/>
+    <dgm:txLinClrLst/>
+    <dgm:txFillClrLst meth="repeat">
+      <a:schemeClr val="dk1"/>
+    </dgm:txFillClrLst>
+    <dgm:txEffectClrLst/>
+  </dgm:styleLbl>
+  <dgm:styleLbl name="fgAcc0">
+    <dgm:fillClrLst meth="repeat">
+      <a:schemeClr val="lt1">
+        <a:alpha val="90000"/>
+      </a:schemeClr>
+    </dgm:fillClrLst>
+    <dgm:linClrLst meth="repeat">
+      <a:schemeClr val="accent1"/>
+    </dgm:linClrLst>
+    <dgm:effectClrLst/>
+    <dgm:txLinClrLst/>
+    <dgm:txFillClrLst meth="repeat">
+      <a:schemeClr val="dk1"/>
+    </dgm:txFillClrLst>
+    <dgm:txEffectClrLst/>
+  </dgm:styleLbl>
+  <dgm:styleLbl name="fgAcc2">
+    <dgm:fillClrLst meth="repeat">
+      <a:schemeClr val="lt1">
+        <a:alpha val="90000"/>
+      </a:schemeClr>
+    </dgm:fillClrLst>
+    <dgm:linClrLst meth="repeat">
+      <a:schemeClr val="accent1"/>
+    </dgm:linClrLst>
+    <dgm:effectClrLst/>
+    <dgm:txLinClrLst/>
+    <dgm:txFillClrLst meth="repeat">
+      <a:schemeClr val="dk1"/>
+    </dgm:txFillClrLst>
+    <dgm:txEffectClrLst/>
+  </dgm:styleLbl>
+  <dgm:styleLbl name="fgAcc3">
+    <dgm:fillClrLst meth="repeat">
+      <a:schemeClr val="lt1">
+        <a:alpha val="90000"/>
+      </a:schemeClr>
+    </dgm:fillClrLst>
+    <dgm:linClrLst meth="repeat">
+      <a:schemeClr val="accent1"/>
+    </dgm:linClrLst>
+    <dgm:effectClrLst/>
+    <dgm:txLinClrLst/>
+    <dgm:txFillClrLst meth="repeat">
+      <a:schemeClr val="dk1"/>
+    </dgm:txFillClrLst>
+    <dgm:txEffectClrLst/>
+  </dgm:styleLbl>
+  <dgm:styleLbl name="fgAcc4">
+    <dgm:fillClrLst meth="repeat">
+      <a:schemeClr val="lt1">
+        <a:alpha val="90000"/>
+      </a:schemeClr>
+    </dgm:fillClrLst>
+    <dgm:linClrLst meth="repeat">
+      <a:schemeClr val="accent1"/>
+    </dgm:linClrLst>
+    <dgm:effectClrLst/>
+    <dgm:txLinClrLst/>
+    <dgm:txFillClrLst meth="repeat">
+      <a:schemeClr val="dk1"/>
+    </dgm:txFillClrLst>
+    <dgm:txEffectClrLst/>
+  </dgm:styleLbl>
+  <dgm:styleLbl name="bgShp">
+    <dgm:fillClrLst meth="repeat">
+      <a:schemeClr val="accent1">
+        <a:tint val="40000"/>
+      </a:schemeClr>
+    </dgm:fillClrLst>
+    <dgm:linClrLst meth="repeat">
+      <a:schemeClr val="accent1"/>
+    </dgm:linClrLst>
+    <dgm:effectClrLst/>
+    <dgm:txLinClrLst/>
+    <dgm:txFillClrLst meth="repeat">
+      <a:schemeClr val="dk1"/>
+    </dgm:txFillClrLst>
+    <dgm:txEffectClrLst/>
+  </dgm:styleLbl>
+  <dgm:styleLbl name="dkBgShp">
+    <dgm:fillClrLst meth="repeat">
+      <a:schemeClr val="accent1">
+        <a:shade val="80000"/>
+      </a:schemeClr>
+    </dgm:fillClrLst>
+    <dgm:linClrLst meth="repeat">
+      <a:schemeClr val="accent1"/>
+    </dgm:linClrLst>
+    <dgm:effectClrLst/>
+    <dgm:txLinClrLst/>
+    <dgm:txFillClrLst meth="repeat">
+      <a:schemeClr val="lt1"/>
+    </dgm:txFillClrLst>
+    <dgm:txEffectClrLst/>
+  </dgm:styleLbl>
+  <dgm:styleLbl name="trBgShp">
+    <dgm:fillClrLst meth="repeat">
+      <a:schemeClr val="accent1">
+        <a:tint val="50000"/>
+        <a:alpha val="40000"/>
+      </a:schemeClr>
+    </dgm:fillClrLst>
+    <dgm:linClrLst meth="repeat">
+      <a:schemeClr val="accent1"/>
+    </dgm:linClrLst>
+    <dgm:effectClrLst/>
+    <dgm:txLinClrLst/>
+    <dgm:txFillClrLst meth="repeat">
+      <a:schemeClr val="lt1"/>
+    </dgm:txFillClrLst>
+    <dgm:txEffectClrLst/>
+  </dgm:styleLbl>
+  <dgm:styleLbl name="fgShp">
+    <dgm:fillClrLst meth="repeat">
+      <a:schemeClr val="accent1">
+        <a:tint val="60000"/>
+      </a:schemeClr>
+    </dgm:fillClrLst>
+    <dgm:linClrLst meth="repeat">
+      <a:schemeClr val="lt1"/>
+    </dgm:linClrLst>
+    <dgm:effectClrLst/>
+    <dgm:txLinClrLst/>
+    <dgm:txFillClrLst meth="repeat">
+      <a:schemeClr val="dk1"/>
+    </dgm:txFillClrLst>
+    <dgm:txEffectClrLst/>
+  </dgm:styleLbl>
+  <dgm:styleLbl name="revTx">
+    <dgm:fillClrLst meth="repeat">
+      <a:schemeClr val="lt1">
+        <a:alpha val="0"/>
+      </a:schemeClr>
+    </dgm:fillClrLst>
+    <dgm:linClrLst meth="repeat">
+      <a:schemeClr val="dk1">
+        <a:alpha val="0"/>
+      </a:schemeClr>
+    </dgm:linClrLst>
+    <dgm:effectClrLst/>
+    <dgm:txLinClrLst/>
+    <dgm:txFillClrLst meth="repeat">
+      <a:schemeClr val="tx1"/>
+    </dgm:txFillClrLst>
+    <dgm:txEffectClrLst/>
+  </dgm:styleLbl>
+</dgm:colorsDef>
+</file>
+
 <file path=ppt/diagrams/data1.xml><?xml version="1.0" encoding="utf-8"?>
+<dgm:dataModel xmlns:dgm="http://schemas.openxmlformats.org/drawingml/2006/diagram" xmlns:a="http://schemas.openxmlformats.org/drawingml/2006/main">
+  <dgm:ptLst>
+    <dgm:pt modelId="{39BA76EA-6B06-4563-BA94-837024255026}" type="doc">
+      <dgm:prSet loTypeId="urn:microsoft.com/office/officeart/2005/8/layout/hProcess11" loCatId="process" qsTypeId="urn:microsoft.com/office/officeart/2005/8/quickstyle/simple1" qsCatId="simple" csTypeId="urn:microsoft.com/office/officeart/2005/8/colors/accent1_2" csCatId="accent1" phldr="1"/>
+      <dgm:spPr/>
+    </dgm:pt>
+    <dgm:pt modelId="{EF9695F1-D2F2-46EE-910E-501309FF95E0}">
+      <dgm:prSet phldrT="[文字]"/>
+      <dgm:spPr/>
+      <dgm:t>
+        <a:bodyPr/>
+        <a:lstStyle/>
+        <a:p>
+          <a:r>
+            <a:rPr lang="zh-TW" altLang="en-US" dirty="0">
+              <a:latin typeface="標楷體" panose="03000509000000000000" pitchFamily="65" charset="-120"/>
+              <a:ea typeface="標楷體" panose="03000509000000000000" pitchFamily="65" charset="-120"/>
+            </a:rPr>
+            <a:t>疫情</a:t>
+          </a:r>
+        </a:p>
+      </dgm:t>
+    </dgm:pt>
+    <dgm:pt modelId="{EC524604-523E-4098-83D5-FD165CDA904F}" type="parTrans" cxnId="{C4B1BE5F-AF04-4EEF-83D0-155AFCB5469F}">
+      <dgm:prSet/>
+      <dgm:spPr/>
+      <dgm:t>
+        <a:bodyPr/>
+        <a:lstStyle/>
+        <a:p>
+          <a:endParaRPr lang="zh-TW" altLang="en-US"/>
+        </a:p>
+      </dgm:t>
+    </dgm:pt>
+    <dgm:pt modelId="{CA9B8DBD-E7DF-4E94-A7AA-EE090B32CECF}" type="sibTrans" cxnId="{C4B1BE5F-AF04-4EEF-83D0-155AFCB5469F}">
+      <dgm:prSet/>
+      <dgm:spPr/>
+      <dgm:t>
+        <a:bodyPr/>
+        <a:lstStyle/>
+        <a:p>
+          <a:endParaRPr lang="zh-TW" altLang="en-US"/>
+        </a:p>
+      </dgm:t>
+    </dgm:pt>
+    <dgm:pt modelId="{18C4879F-0E5A-4618-AECC-8E7BC7F77A71}">
+      <dgm:prSet phldrT="[文字]"/>
+      <dgm:spPr/>
+      <dgm:t>
+        <a:bodyPr/>
+        <a:lstStyle/>
+        <a:p>
+          <a:r>
+            <a:rPr lang="en-US" altLang="zh-TW" dirty="0">
+              <a:latin typeface="標楷體" panose="03000509000000000000" pitchFamily="65" charset="-120"/>
+              <a:ea typeface="標楷體" panose="03000509000000000000" pitchFamily="65" charset="-120"/>
+            </a:rPr>
+            <a:t>?</a:t>
+          </a:r>
+          <a:endParaRPr lang="zh-TW" altLang="en-US" dirty="0">
+            <a:latin typeface="標楷體" panose="03000509000000000000" pitchFamily="65" charset="-120"/>
+            <a:ea typeface="標楷體" panose="03000509000000000000" pitchFamily="65" charset="-120"/>
+          </a:endParaRPr>
+        </a:p>
+      </dgm:t>
+    </dgm:pt>
+    <dgm:pt modelId="{BBD651E1-6723-4F5A-A610-16E954E23BB7}" type="parTrans" cxnId="{EE45DFCD-D452-425C-A034-ACFC73791A0F}">
+      <dgm:prSet/>
+      <dgm:spPr/>
+      <dgm:t>
+        <a:bodyPr/>
+        <a:lstStyle/>
+        <a:p>
+          <a:endParaRPr lang="zh-TW" altLang="en-US"/>
+        </a:p>
+      </dgm:t>
+    </dgm:pt>
+    <dgm:pt modelId="{4AE79586-0A41-46F2-837C-5EA922501645}" type="sibTrans" cxnId="{EE45DFCD-D452-425C-A034-ACFC73791A0F}">
+      <dgm:prSet/>
+      <dgm:spPr/>
+      <dgm:t>
+        <a:bodyPr/>
+        <a:lstStyle/>
+        <a:p>
+          <a:endParaRPr lang="zh-TW" altLang="en-US"/>
+        </a:p>
+      </dgm:t>
+    </dgm:pt>
+    <dgm:pt modelId="{8AE3726E-75FB-4CD0-AD19-C9D6B81CA7F7}">
+      <dgm:prSet phldrT="[文字]"/>
+      <dgm:spPr/>
+      <dgm:t>
+        <a:bodyPr/>
+        <a:lstStyle/>
+        <a:p>
+          <a:r>
+            <a:rPr lang="en-US" altLang="zh-TW" dirty="0">
+              <a:latin typeface="Times New Roman" panose="02020603050405020304" pitchFamily="18" charset="0"/>
+              <a:cs typeface="Times New Roman" panose="02020603050405020304" pitchFamily="18" charset="0"/>
+            </a:rPr>
+            <a:t>AI</a:t>
+          </a:r>
+          <a:endParaRPr lang="zh-TW" altLang="en-US" dirty="0">
+            <a:latin typeface="Times New Roman" panose="02020603050405020304" pitchFamily="18" charset="0"/>
+            <a:cs typeface="Times New Roman" panose="02020603050405020304" pitchFamily="18" charset="0"/>
+          </a:endParaRPr>
+        </a:p>
+      </dgm:t>
+    </dgm:pt>
+    <dgm:pt modelId="{D7A024A8-ACF3-4289-8861-6716D2E32EC0}" type="parTrans" cxnId="{82F2F2DE-DF34-4263-A13D-B6AD40142521}">
+      <dgm:prSet/>
+      <dgm:spPr/>
+      <dgm:t>
+        <a:bodyPr/>
+        <a:lstStyle/>
+        <a:p>
+          <a:endParaRPr lang="zh-TW" altLang="en-US"/>
+        </a:p>
+      </dgm:t>
+    </dgm:pt>
+    <dgm:pt modelId="{17BE14E1-9D7C-486E-BDF0-378827A22EBA}" type="sibTrans" cxnId="{82F2F2DE-DF34-4263-A13D-B6AD40142521}">
+      <dgm:prSet/>
+      <dgm:spPr/>
+      <dgm:t>
+        <a:bodyPr/>
+        <a:lstStyle/>
+        <a:p>
+          <a:endParaRPr lang="zh-TW" altLang="en-US"/>
+        </a:p>
+      </dgm:t>
+    </dgm:pt>
+    <dgm:pt modelId="{93756187-EC59-4D7F-9060-1D62A65626E4}">
+      <dgm:prSet phldrT="[文字]"/>
+      <dgm:spPr/>
+      <dgm:t>
+        <a:bodyPr/>
+        <a:lstStyle/>
+        <a:p>
+          <a:r>
+            <a:rPr lang="zh-TW" altLang="en-US" dirty="0">
+              <a:latin typeface="標楷體" panose="03000509000000000000" pitchFamily="65" charset="-120"/>
+              <a:ea typeface="標楷體" panose="03000509000000000000" pitchFamily="65" charset="-120"/>
+            </a:rPr>
+            <a:t>詐騙</a:t>
+          </a:r>
+        </a:p>
+      </dgm:t>
+    </dgm:pt>
+    <dgm:pt modelId="{B5069614-2112-455F-B2DD-F04F2D19C091}" type="parTrans" cxnId="{CA59A4D8-7805-400B-8188-2F85C78D3E52}">
+      <dgm:prSet/>
+      <dgm:spPr/>
+      <dgm:t>
+        <a:bodyPr/>
+        <a:lstStyle/>
+        <a:p>
+          <a:endParaRPr lang="zh-TW" altLang="en-US"/>
+        </a:p>
+      </dgm:t>
+    </dgm:pt>
+    <dgm:pt modelId="{6C58C909-E7D0-4485-B4E3-52911310197C}" type="sibTrans" cxnId="{CA59A4D8-7805-400B-8188-2F85C78D3E52}">
+      <dgm:prSet/>
+      <dgm:spPr/>
+      <dgm:t>
+        <a:bodyPr/>
+        <a:lstStyle/>
+        <a:p>
+          <a:endParaRPr lang="zh-TW" altLang="en-US"/>
+        </a:p>
+      </dgm:t>
+    </dgm:pt>
+    <dgm:pt modelId="{7421BAA9-F779-486E-AD8C-D024EA295426}" type="pres">
+      <dgm:prSet presAssocID="{39BA76EA-6B06-4563-BA94-837024255026}" presName="Name0" presStyleCnt="0">
+        <dgm:presLayoutVars>
+          <dgm:dir/>
+          <dgm:resizeHandles val="exact"/>
+        </dgm:presLayoutVars>
+      </dgm:prSet>
+      <dgm:spPr/>
+    </dgm:pt>
+    <dgm:pt modelId="{F0D71F57-F39E-4BEA-825A-3C2186C4355C}" type="pres">
+      <dgm:prSet presAssocID="{39BA76EA-6B06-4563-BA94-837024255026}" presName="arrow" presStyleLbl="bgShp" presStyleIdx="0" presStyleCnt="1"/>
+      <dgm:spPr/>
+    </dgm:pt>
+    <dgm:pt modelId="{95385AB0-E53D-48C6-A206-C31AB2B8DDFC}" type="pres">
+      <dgm:prSet presAssocID="{39BA76EA-6B06-4563-BA94-837024255026}" presName="points" presStyleCnt="0"/>
+      <dgm:spPr/>
+    </dgm:pt>
+    <dgm:pt modelId="{FB14F5CA-74CD-41F8-B937-5E86E7027DA0}" type="pres">
+      <dgm:prSet presAssocID="{EF9695F1-D2F2-46EE-910E-501309FF95E0}" presName="compositeA" presStyleCnt="0"/>
+      <dgm:spPr/>
+    </dgm:pt>
+    <dgm:pt modelId="{65E73C9B-7DEC-466A-A79B-796DE227ADB9}" type="pres">
+      <dgm:prSet presAssocID="{EF9695F1-D2F2-46EE-910E-501309FF95E0}" presName="textA" presStyleLbl="revTx" presStyleIdx="0" presStyleCnt="4">
+        <dgm:presLayoutVars>
+          <dgm:bulletEnabled val="1"/>
+        </dgm:presLayoutVars>
+      </dgm:prSet>
+      <dgm:spPr/>
+    </dgm:pt>
+    <dgm:pt modelId="{45A6A8F0-B1D6-4688-9CA9-EF202B64FCD6}" type="pres">
+      <dgm:prSet presAssocID="{EF9695F1-D2F2-46EE-910E-501309FF95E0}" presName="circleA" presStyleLbl="node1" presStyleIdx="0" presStyleCnt="4"/>
+      <dgm:spPr/>
+    </dgm:pt>
+    <dgm:pt modelId="{6A66B90A-CB54-426F-9BB1-325491E61F98}" type="pres">
+      <dgm:prSet presAssocID="{EF9695F1-D2F2-46EE-910E-501309FF95E0}" presName="spaceA" presStyleCnt="0"/>
+      <dgm:spPr/>
+    </dgm:pt>
+    <dgm:pt modelId="{9D391CB7-34AC-4350-94F1-E6B10CC9080D}" type="pres">
+      <dgm:prSet presAssocID="{CA9B8DBD-E7DF-4E94-A7AA-EE090B32CECF}" presName="space" presStyleCnt="0"/>
+      <dgm:spPr/>
+    </dgm:pt>
+    <dgm:pt modelId="{4B525CCC-6C12-4810-A9F2-1ED91A5AED70}" type="pres">
+      <dgm:prSet presAssocID="{18C4879F-0E5A-4618-AECC-8E7BC7F77A71}" presName="compositeB" presStyleCnt="0"/>
+      <dgm:spPr/>
+    </dgm:pt>
+    <dgm:pt modelId="{17B2C020-7EDE-4C68-AC0C-0161BCDFDCD1}" type="pres">
+      <dgm:prSet presAssocID="{18C4879F-0E5A-4618-AECC-8E7BC7F77A71}" presName="textB" presStyleLbl="revTx" presStyleIdx="1" presStyleCnt="4">
+        <dgm:presLayoutVars>
+          <dgm:bulletEnabled val="1"/>
+        </dgm:presLayoutVars>
+      </dgm:prSet>
+      <dgm:spPr/>
+    </dgm:pt>
+    <dgm:pt modelId="{388803F4-D24C-43AF-A40C-E269BF2641C9}" type="pres">
+      <dgm:prSet presAssocID="{18C4879F-0E5A-4618-AECC-8E7BC7F77A71}" presName="circleB" presStyleLbl="node1" presStyleIdx="1" presStyleCnt="4"/>
+      <dgm:spPr/>
+    </dgm:pt>
+    <dgm:pt modelId="{5F8572A5-326D-4ABA-B75D-9E8E646DF764}" type="pres">
+      <dgm:prSet presAssocID="{18C4879F-0E5A-4618-AECC-8E7BC7F77A71}" presName="spaceB" presStyleCnt="0"/>
+      <dgm:spPr/>
+    </dgm:pt>
+    <dgm:pt modelId="{16586103-A175-4B4F-8DBD-65F5A3D76BBC}" type="pres">
+      <dgm:prSet presAssocID="{4AE79586-0A41-46F2-837C-5EA922501645}" presName="space" presStyleCnt="0"/>
+      <dgm:spPr/>
+    </dgm:pt>
+    <dgm:pt modelId="{FDAF9D7E-AA21-46CA-88E3-9E322BD6A7C0}" type="pres">
+      <dgm:prSet presAssocID="{93756187-EC59-4D7F-9060-1D62A65626E4}" presName="compositeA" presStyleCnt="0"/>
+      <dgm:spPr/>
+    </dgm:pt>
+    <dgm:pt modelId="{8CE852D7-8899-4908-B7F1-42F32C89D74F}" type="pres">
+      <dgm:prSet presAssocID="{93756187-EC59-4D7F-9060-1D62A65626E4}" presName="textA" presStyleLbl="revTx" presStyleIdx="2" presStyleCnt="4">
+        <dgm:presLayoutVars>
+          <dgm:bulletEnabled val="1"/>
+        </dgm:presLayoutVars>
+      </dgm:prSet>
+      <dgm:spPr/>
+    </dgm:pt>
+    <dgm:pt modelId="{758C6F5C-8415-4852-9352-C5C0D921FEBD}" type="pres">
+      <dgm:prSet presAssocID="{93756187-EC59-4D7F-9060-1D62A65626E4}" presName="circleA" presStyleLbl="node1" presStyleIdx="2" presStyleCnt="4"/>
+      <dgm:spPr/>
+    </dgm:pt>
+    <dgm:pt modelId="{BEBF0864-4BCC-49CF-97CE-B99D6F37512C}" type="pres">
+      <dgm:prSet presAssocID="{93756187-EC59-4D7F-9060-1D62A65626E4}" presName="spaceA" presStyleCnt="0"/>
+      <dgm:spPr/>
+    </dgm:pt>
+    <dgm:pt modelId="{1716BBE6-F9EC-4AE7-8349-42C5686050DC}" type="pres">
+      <dgm:prSet presAssocID="{6C58C909-E7D0-4485-B4E3-52911310197C}" presName="space" presStyleCnt="0"/>
+      <dgm:spPr/>
+    </dgm:pt>
+    <dgm:pt modelId="{B4A60255-0548-4AFB-BF8C-6C15F5D82B5E}" type="pres">
+      <dgm:prSet presAssocID="{8AE3726E-75FB-4CD0-AD19-C9D6B81CA7F7}" presName="compositeB" presStyleCnt="0"/>
+      <dgm:spPr/>
+    </dgm:pt>
+    <dgm:pt modelId="{BA686BC1-F7AD-4885-8EB6-68B6E7717DDD}" type="pres">
+      <dgm:prSet presAssocID="{8AE3726E-75FB-4CD0-AD19-C9D6B81CA7F7}" presName="textB" presStyleLbl="revTx" presStyleIdx="3" presStyleCnt="4">
+        <dgm:presLayoutVars>
+          <dgm:bulletEnabled val="1"/>
+        </dgm:presLayoutVars>
+      </dgm:prSet>
+      <dgm:spPr/>
+    </dgm:pt>
+    <dgm:pt modelId="{394A1AED-D461-4CB8-81C8-FE05655CE086}" type="pres">
+      <dgm:prSet presAssocID="{8AE3726E-75FB-4CD0-AD19-C9D6B81CA7F7}" presName="circleB" presStyleLbl="node1" presStyleIdx="3" presStyleCnt="4"/>
+      <dgm:spPr/>
+    </dgm:pt>
+    <dgm:pt modelId="{BF2C5714-B9F7-41E4-B73F-B93743B6B6A1}" type="pres">
+      <dgm:prSet presAssocID="{8AE3726E-75FB-4CD0-AD19-C9D6B81CA7F7}" presName="spaceB" presStyleCnt="0"/>
+      <dgm:spPr/>
+    </dgm:pt>
+  </dgm:ptLst>
+  <dgm:cxnLst>
+    <dgm:cxn modelId="{C4B1BE5F-AF04-4EEF-83D0-155AFCB5469F}" srcId="{39BA76EA-6B06-4563-BA94-837024255026}" destId="{EF9695F1-D2F2-46EE-910E-501309FF95E0}" srcOrd="0" destOrd="0" parTransId="{EC524604-523E-4098-83D5-FD165CDA904F}" sibTransId="{CA9B8DBD-E7DF-4E94-A7AA-EE090B32CECF}"/>
+    <dgm:cxn modelId="{EB95626F-8061-4199-ADA0-CB28C83C4E6F}" type="presOf" srcId="{18C4879F-0E5A-4618-AECC-8E7BC7F77A71}" destId="{17B2C020-7EDE-4C68-AC0C-0161BCDFDCD1}" srcOrd="0" destOrd="0" presId="urn:microsoft.com/office/officeart/2005/8/layout/hProcess11"/>
+    <dgm:cxn modelId="{2535E9B5-6537-42FC-88C6-8B5F05B58F33}" type="presOf" srcId="{39BA76EA-6B06-4563-BA94-837024255026}" destId="{7421BAA9-F779-486E-AD8C-D024EA295426}" srcOrd="0" destOrd="0" presId="urn:microsoft.com/office/officeart/2005/8/layout/hProcess11"/>
+    <dgm:cxn modelId="{9B4668BF-3AAE-4137-A63A-A18E3C968577}" type="presOf" srcId="{93756187-EC59-4D7F-9060-1D62A65626E4}" destId="{8CE852D7-8899-4908-B7F1-42F32C89D74F}" srcOrd="0" destOrd="0" presId="urn:microsoft.com/office/officeart/2005/8/layout/hProcess11"/>
+    <dgm:cxn modelId="{596135C2-58CD-48ED-A2EA-571A3D4E92F6}" type="presOf" srcId="{EF9695F1-D2F2-46EE-910E-501309FF95E0}" destId="{65E73C9B-7DEC-466A-A79B-796DE227ADB9}" srcOrd="0" destOrd="0" presId="urn:microsoft.com/office/officeart/2005/8/layout/hProcess11"/>
+    <dgm:cxn modelId="{EE45DFCD-D452-425C-A034-ACFC73791A0F}" srcId="{39BA76EA-6B06-4563-BA94-837024255026}" destId="{18C4879F-0E5A-4618-AECC-8E7BC7F77A71}" srcOrd="1" destOrd="0" parTransId="{BBD651E1-6723-4F5A-A610-16E954E23BB7}" sibTransId="{4AE79586-0A41-46F2-837C-5EA922501645}"/>
+    <dgm:cxn modelId="{CA59A4D8-7805-400B-8188-2F85C78D3E52}" srcId="{39BA76EA-6B06-4563-BA94-837024255026}" destId="{93756187-EC59-4D7F-9060-1D62A65626E4}" srcOrd="2" destOrd="0" parTransId="{B5069614-2112-455F-B2DD-F04F2D19C091}" sibTransId="{6C58C909-E7D0-4485-B4E3-52911310197C}"/>
+    <dgm:cxn modelId="{82F2F2DE-DF34-4263-A13D-B6AD40142521}" srcId="{39BA76EA-6B06-4563-BA94-837024255026}" destId="{8AE3726E-75FB-4CD0-AD19-C9D6B81CA7F7}" srcOrd="3" destOrd="0" parTransId="{D7A024A8-ACF3-4289-8861-6716D2E32EC0}" sibTransId="{17BE14E1-9D7C-486E-BDF0-378827A22EBA}"/>
+    <dgm:cxn modelId="{11CC9CF6-8F45-43F1-9FA5-04F8E6D7D234}" type="presOf" srcId="{8AE3726E-75FB-4CD0-AD19-C9D6B81CA7F7}" destId="{BA686BC1-F7AD-4885-8EB6-68B6E7717DDD}" srcOrd="0" destOrd="0" presId="urn:microsoft.com/office/officeart/2005/8/layout/hProcess11"/>
+    <dgm:cxn modelId="{F294262D-245C-4252-8D7A-0ED396F05FE9}" type="presParOf" srcId="{7421BAA9-F779-486E-AD8C-D024EA295426}" destId="{F0D71F57-F39E-4BEA-825A-3C2186C4355C}" srcOrd="0" destOrd="0" presId="urn:microsoft.com/office/officeart/2005/8/layout/hProcess11"/>
+    <dgm:cxn modelId="{22906563-420B-4EBF-A347-258840F71997}" type="presParOf" srcId="{7421BAA9-F779-486E-AD8C-D024EA295426}" destId="{95385AB0-E53D-48C6-A206-C31AB2B8DDFC}" srcOrd="1" destOrd="0" presId="urn:microsoft.com/office/officeart/2005/8/layout/hProcess11"/>
+    <dgm:cxn modelId="{810BC9E2-25D3-4B92-B5E4-9AAEAA55EC4A}" type="presParOf" srcId="{95385AB0-E53D-48C6-A206-C31AB2B8DDFC}" destId="{FB14F5CA-74CD-41F8-B937-5E86E7027DA0}" srcOrd="0" destOrd="0" presId="urn:microsoft.com/office/officeart/2005/8/layout/hProcess11"/>
+    <dgm:cxn modelId="{6130B0CD-8EE8-44B6-8A1D-3411E3DBA195}" type="presParOf" srcId="{FB14F5CA-74CD-41F8-B937-5E86E7027DA0}" destId="{65E73C9B-7DEC-466A-A79B-796DE227ADB9}" srcOrd="0" destOrd="0" presId="urn:microsoft.com/office/officeart/2005/8/layout/hProcess11"/>
+    <dgm:cxn modelId="{CA85181E-E487-4CD2-8439-C07EEC29DEE9}" type="presParOf" srcId="{FB14F5CA-74CD-41F8-B937-5E86E7027DA0}" destId="{45A6A8F0-B1D6-4688-9CA9-EF202B64FCD6}" srcOrd="1" destOrd="0" presId="urn:microsoft.com/office/officeart/2005/8/layout/hProcess11"/>
+    <dgm:cxn modelId="{2F1AC783-D1BE-476D-A519-CD912DF22AF7}" type="presParOf" srcId="{FB14F5CA-74CD-41F8-B937-5E86E7027DA0}" destId="{6A66B90A-CB54-426F-9BB1-325491E61F98}" srcOrd="2" destOrd="0" presId="urn:microsoft.com/office/officeart/2005/8/layout/hProcess11"/>
+    <dgm:cxn modelId="{A54691FD-5871-464E-8618-6FAF642CF963}" type="presParOf" srcId="{95385AB0-E53D-48C6-A206-C31AB2B8DDFC}" destId="{9D391CB7-34AC-4350-94F1-E6B10CC9080D}" srcOrd="1" destOrd="0" presId="urn:microsoft.com/office/officeart/2005/8/layout/hProcess11"/>
+    <dgm:cxn modelId="{6057C4A9-B4EE-41CB-BD70-78F3E519D06B}" type="presParOf" srcId="{95385AB0-E53D-48C6-A206-C31AB2B8DDFC}" destId="{4B525CCC-6C12-4810-A9F2-1ED91A5AED70}" srcOrd="2" destOrd="0" presId="urn:microsoft.com/office/officeart/2005/8/layout/hProcess11"/>
+    <dgm:cxn modelId="{A60262BA-99C4-49D6-B8A9-756F72DA40BA}" type="presParOf" srcId="{4B525CCC-6C12-4810-A9F2-1ED91A5AED70}" destId="{17B2C020-7EDE-4C68-AC0C-0161BCDFDCD1}" srcOrd="0" destOrd="0" presId="urn:microsoft.com/office/officeart/2005/8/layout/hProcess11"/>
+    <dgm:cxn modelId="{51FB640F-1205-4AF6-9279-9A9CA4CEA824}" type="presParOf" srcId="{4B525CCC-6C12-4810-A9F2-1ED91A5AED70}" destId="{388803F4-D24C-43AF-A40C-E269BF2641C9}" srcOrd="1" destOrd="0" presId="urn:microsoft.com/office/officeart/2005/8/layout/hProcess11"/>
+    <dgm:cxn modelId="{40C1C686-DADD-45F8-855E-D6C002294A6C}" type="presParOf" srcId="{4B525CCC-6C12-4810-A9F2-1ED91A5AED70}" destId="{5F8572A5-326D-4ABA-B75D-9E8E646DF764}" srcOrd="2" destOrd="0" presId="urn:microsoft.com/office/officeart/2005/8/layout/hProcess11"/>
+    <dgm:cxn modelId="{10EC52AF-FC42-4C85-8342-378F2DD0F1B8}" type="presParOf" srcId="{95385AB0-E53D-48C6-A206-C31AB2B8DDFC}" destId="{16586103-A175-4B4F-8DBD-65F5A3D76BBC}" srcOrd="3" destOrd="0" presId="urn:microsoft.com/office/officeart/2005/8/layout/hProcess11"/>
+    <dgm:cxn modelId="{61C1DC66-C073-46DE-92BD-38A5B744C3BF}" type="presParOf" srcId="{95385AB0-E53D-48C6-A206-C31AB2B8DDFC}" destId="{FDAF9D7E-AA21-46CA-88E3-9E322BD6A7C0}" srcOrd="4" destOrd="0" presId="urn:microsoft.com/office/officeart/2005/8/layout/hProcess11"/>
+    <dgm:cxn modelId="{94882986-CA3F-4515-B22C-9F571183DACB}" type="presParOf" srcId="{FDAF9D7E-AA21-46CA-88E3-9E322BD6A7C0}" destId="{8CE852D7-8899-4908-B7F1-42F32C89D74F}" srcOrd="0" destOrd="0" presId="urn:microsoft.com/office/officeart/2005/8/layout/hProcess11"/>
+    <dgm:cxn modelId="{B352CA1C-DF7D-4B3D-9D1C-598247D7E8BA}" type="presParOf" srcId="{FDAF9D7E-AA21-46CA-88E3-9E322BD6A7C0}" destId="{758C6F5C-8415-4852-9352-C5C0D921FEBD}" srcOrd="1" destOrd="0" presId="urn:microsoft.com/office/officeart/2005/8/layout/hProcess11"/>
+    <dgm:cxn modelId="{D8875C91-C171-445A-952B-B80A60594B6F}" type="presParOf" srcId="{FDAF9D7E-AA21-46CA-88E3-9E322BD6A7C0}" destId="{BEBF0864-4BCC-49CF-97CE-B99D6F37512C}" srcOrd="2" destOrd="0" presId="urn:microsoft.com/office/officeart/2005/8/layout/hProcess11"/>
+    <dgm:cxn modelId="{8B61EE72-BA5D-4DA4-9096-BD934CC4FDEC}" type="presParOf" srcId="{95385AB0-E53D-48C6-A206-C31AB2B8DDFC}" destId="{1716BBE6-F9EC-4AE7-8349-42C5686050DC}" srcOrd="5" destOrd="0" presId="urn:microsoft.com/office/officeart/2005/8/layout/hProcess11"/>
+    <dgm:cxn modelId="{F6239A18-B077-4153-A75F-3547D2613789}" type="presParOf" srcId="{95385AB0-E53D-48C6-A206-C31AB2B8DDFC}" destId="{B4A60255-0548-4AFB-BF8C-6C15F5D82B5E}" srcOrd="6" destOrd="0" presId="urn:microsoft.com/office/officeart/2005/8/layout/hProcess11"/>
+    <dgm:cxn modelId="{018A4CA8-70BF-4517-B20C-1895FEB59E61}" type="presParOf" srcId="{B4A60255-0548-4AFB-BF8C-6C15F5D82B5E}" destId="{BA686BC1-F7AD-4885-8EB6-68B6E7717DDD}" srcOrd="0" destOrd="0" presId="urn:microsoft.com/office/officeart/2005/8/layout/hProcess11"/>
+    <dgm:cxn modelId="{C269E91E-D549-458B-B48D-85E9AAC24BE1}" type="presParOf" srcId="{B4A60255-0548-4AFB-BF8C-6C15F5D82B5E}" destId="{394A1AED-D461-4CB8-81C8-FE05655CE086}" srcOrd="1" destOrd="0" presId="urn:microsoft.com/office/officeart/2005/8/layout/hProcess11"/>
+    <dgm:cxn modelId="{E1B6A1A2-0FD3-43CD-BC78-7E555E05D896}" type="presParOf" srcId="{B4A60255-0548-4AFB-BF8C-6C15F5D82B5E}" destId="{BF2C5714-B9F7-41E4-B73F-B93743B6B6A1}" srcOrd="2" destOrd="0" presId="urn:microsoft.com/office/officeart/2005/8/layout/hProcess11"/>
+  </dgm:cxnLst>
+  <dgm:bg/>
+  <dgm:whole/>
+  <dgm:extLst>
+    <a:ext uri="http://schemas.microsoft.com/office/drawing/2008/diagram">
+      <dsp:dataModelExt xmlns:dsp="http://schemas.microsoft.com/office/drawing/2008/diagram" relId="rId6" minVer="http://schemas.openxmlformats.org/drawingml/2006/diagram"/>
+    </a:ext>
+  </dgm:extLst>
+</dgm:dataModel>
+</file>
+
+<file path=ppt/diagrams/data2.xml><?xml version="1.0" encoding="utf-8"?>
 <dgm:dataModel xmlns:dgm="http://schemas.openxmlformats.org/drawingml/2006/diagram" xmlns:a="http://schemas.openxmlformats.org/drawingml/2006/main">
   <dgm:ptLst>
     <dgm:pt modelId="{39BA76EA-6B06-4563-BA94-837024255026}" type="doc">
@@ -1697,7 +2770,787 @@
 </dsp:drawing>
 </file>
 
+<file path=ppt/diagrams/drawing2.xml><?xml version="1.0" encoding="utf-8"?>
+<dsp:drawing xmlns:dgm="http://schemas.openxmlformats.org/drawingml/2006/diagram" xmlns:dsp="http://schemas.microsoft.com/office/drawing/2008/diagram" xmlns:a="http://schemas.openxmlformats.org/drawingml/2006/main">
+  <dsp:spTree>
+    <dsp:nvGrpSpPr>
+      <dsp:cNvPr id="0" name=""/>
+      <dsp:cNvGrpSpPr/>
+    </dsp:nvGrpSpPr>
+    <dsp:grpSpPr/>
+    <dsp:sp modelId="{F0D71F57-F39E-4BEA-825A-3C2186C4355C}">
+      <dsp:nvSpPr>
+        <dsp:cNvPr id="0" name=""/>
+        <dsp:cNvSpPr/>
+      </dsp:nvSpPr>
+      <dsp:spPr>
+        <a:xfrm>
+          <a:off x="0" y="827550"/>
+          <a:ext cx="8268979" cy="1103400"/>
+        </a:xfrm>
+        <a:prstGeom prst="notchedRightArrow">
+          <a:avLst/>
+        </a:prstGeom>
+        <a:solidFill>
+          <a:schemeClr val="accent1">
+            <a:tint val="40000"/>
+            <a:hueOff val="0"/>
+            <a:satOff val="0"/>
+            <a:lumOff val="0"/>
+            <a:alphaOff val="0"/>
+          </a:schemeClr>
+        </a:solidFill>
+        <a:ln>
+          <a:noFill/>
+        </a:ln>
+        <a:effectLst/>
+      </dsp:spPr>
+      <dsp:style>
+        <a:lnRef idx="0">
+          <a:scrgbClr r="0" g="0" b="0"/>
+        </a:lnRef>
+        <a:fillRef idx="1">
+          <a:scrgbClr r="0" g="0" b="0"/>
+        </a:fillRef>
+        <a:effectRef idx="0">
+          <a:scrgbClr r="0" g="0" b="0"/>
+        </a:effectRef>
+        <a:fontRef idx="minor"/>
+      </dsp:style>
+    </dsp:sp>
+    <dsp:sp modelId="{65E73C9B-7DEC-466A-A79B-796DE227ADB9}">
+      <dsp:nvSpPr>
+        <dsp:cNvPr id="0" name=""/>
+        <dsp:cNvSpPr/>
+      </dsp:nvSpPr>
+      <dsp:spPr>
+        <a:xfrm>
+          <a:off x="3724" y="0"/>
+          <a:ext cx="1791477" cy="1103400"/>
+        </a:xfrm>
+        <a:prstGeom prst="rect">
+          <a:avLst/>
+        </a:prstGeom>
+        <a:noFill/>
+        <a:ln>
+          <a:noFill/>
+        </a:ln>
+        <a:effectLst/>
+      </dsp:spPr>
+      <dsp:style>
+        <a:lnRef idx="0">
+          <a:scrgbClr r="0" g="0" b="0"/>
+        </a:lnRef>
+        <a:fillRef idx="0">
+          <a:scrgbClr r="0" g="0" b="0"/>
+        </a:fillRef>
+        <a:effectRef idx="0">
+          <a:scrgbClr r="0" g="0" b="0"/>
+        </a:effectRef>
+        <a:fontRef idx="minor"/>
+      </dsp:style>
+      <dsp:txBody>
+        <a:bodyPr spcFirstLastPara="0" vert="horz" wrap="square" lIns="263144" tIns="263144" rIns="263144" bIns="263144" numCol="1" spcCol="1270" anchor="b" anchorCtr="0">
+          <a:noAutofit/>
+        </a:bodyPr>
+        <a:lstStyle/>
+        <a:p>
+          <a:pPr marL="0" lvl="0" indent="0" algn="ctr" defTabSz="1644650">
+            <a:lnSpc>
+              <a:spcPct val="90000"/>
+            </a:lnSpc>
+            <a:spcBef>
+              <a:spcPct val="0"/>
+            </a:spcBef>
+            <a:spcAft>
+              <a:spcPct val="35000"/>
+            </a:spcAft>
+            <a:buNone/>
+          </a:pPr>
+          <a:r>
+            <a:rPr lang="zh-TW" altLang="en-US" sz="3700" kern="1200" dirty="0">
+              <a:latin typeface="標楷體" panose="03000509000000000000" pitchFamily="65" charset="-120"/>
+              <a:ea typeface="標楷體" panose="03000509000000000000" pitchFamily="65" charset="-120"/>
+            </a:rPr>
+            <a:t>疫情</a:t>
+          </a:r>
+        </a:p>
+      </dsp:txBody>
+      <dsp:txXfrm>
+        <a:off x="3724" y="0"/>
+        <a:ext cx="1791477" cy="1103400"/>
+      </dsp:txXfrm>
+    </dsp:sp>
+    <dsp:sp modelId="{45A6A8F0-B1D6-4688-9CA9-EF202B64FCD6}">
+      <dsp:nvSpPr>
+        <dsp:cNvPr id="0" name=""/>
+        <dsp:cNvSpPr/>
+      </dsp:nvSpPr>
+      <dsp:spPr>
+        <a:xfrm>
+          <a:off x="761538" y="1241325"/>
+          <a:ext cx="275850" cy="275850"/>
+        </a:xfrm>
+        <a:prstGeom prst="ellipse">
+          <a:avLst/>
+        </a:prstGeom>
+        <a:solidFill>
+          <a:schemeClr val="accent1">
+            <a:hueOff val="0"/>
+            <a:satOff val="0"/>
+            <a:lumOff val="0"/>
+            <a:alphaOff val="0"/>
+          </a:schemeClr>
+        </a:solidFill>
+        <a:ln w="15875" cap="flat" cmpd="sng" algn="ctr">
+          <a:solidFill>
+            <a:schemeClr val="lt1">
+              <a:hueOff val="0"/>
+              <a:satOff val="0"/>
+              <a:lumOff val="0"/>
+              <a:alphaOff val="0"/>
+            </a:schemeClr>
+          </a:solidFill>
+          <a:prstDash val="solid"/>
+        </a:ln>
+        <a:effectLst/>
+      </dsp:spPr>
+      <dsp:style>
+        <a:lnRef idx="2">
+          <a:scrgbClr r="0" g="0" b="0"/>
+        </a:lnRef>
+        <a:fillRef idx="1">
+          <a:scrgbClr r="0" g="0" b="0"/>
+        </a:fillRef>
+        <a:effectRef idx="0">
+          <a:scrgbClr r="0" g="0" b="0"/>
+        </a:effectRef>
+        <a:fontRef idx="minor">
+          <a:schemeClr val="lt1"/>
+        </a:fontRef>
+      </dsp:style>
+    </dsp:sp>
+    <dsp:sp modelId="{17B2C020-7EDE-4C68-AC0C-0161BCDFDCD1}">
+      <dsp:nvSpPr>
+        <dsp:cNvPr id="0" name=""/>
+        <dsp:cNvSpPr/>
+      </dsp:nvSpPr>
+      <dsp:spPr>
+        <a:xfrm>
+          <a:off x="1884776" y="1655101"/>
+          <a:ext cx="1791477" cy="1103400"/>
+        </a:xfrm>
+        <a:prstGeom prst="rect">
+          <a:avLst/>
+        </a:prstGeom>
+        <a:noFill/>
+        <a:ln>
+          <a:noFill/>
+        </a:ln>
+        <a:effectLst/>
+      </dsp:spPr>
+      <dsp:style>
+        <a:lnRef idx="0">
+          <a:scrgbClr r="0" g="0" b="0"/>
+        </a:lnRef>
+        <a:fillRef idx="0">
+          <a:scrgbClr r="0" g="0" b="0"/>
+        </a:fillRef>
+        <a:effectRef idx="0">
+          <a:scrgbClr r="0" g="0" b="0"/>
+        </a:effectRef>
+        <a:fontRef idx="minor"/>
+      </dsp:style>
+      <dsp:txBody>
+        <a:bodyPr spcFirstLastPara="0" vert="horz" wrap="square" lIns="263144" tIns="263144" rIns="263144" bIns="263144" numCol="1" spcCol="1270" anchor="t" anchorCtr="0">
+          <a:noAutofit/>
+        </a:bodyPr>
+        <a:lstStyle/>
+        <a:p>
+          <a:pPr marL="0" lvl="0" indent="0" algn="ctr" defTabSz="1644650">
+            <a:lnSpc>
+              <a:spcPct val="90000"/>
+            </a:lnSpc>
+            <a:spcBef>
+              <a:spcPct val="0"/>
+            </a:spcBef>
+            <a:spcAft>
+              <a:spcPct val="35000"/>
+            </a:spcAft>
+            <a:buNone/>
+          </a:pPr>
+          <a:r>
+            <a:rPr lang="en-US" altLang="zh-TW" sz="3700" kern="1200" dirty="0">
+              <a:latin typeface="標楷體" panose="03000509000000000000" pitchFamily="65" charset="-120"/>
+              <a:ea typeface="標楷體" panose="03000509000000000000" pitchFamily="65" charset="-120"/>
+            </a:rPr>
+            <a:t>?</a:t>
+          </a:r>
+          <a:endParaRPr lang="zh-TW" altLang="en-US" sz="3700" kern="1200" dirty="0">
+            <a:latin typeface="標楷體" panose="03000509000000000000" pitchFamily="65" charset="-120"/>
+            <a:ea typeface="標楷體" panose="03000509000000000000" pitchFamily="65" charset="-120"/>
+          </a:endParaRPr>
+        </a:p>
+      </dsp:txBody>
+      <dsp:txXfrm>
+        <a:off x="1884776" y="1655101"/>
+        <a:ext cx="1791477" cy="1103400"/>
+      </dsp:txXfrm>
+    </dsp:sp>
+    <dsp:sp modelId="{388803F4-D24C-43AF-A40C-E269BF2641C9}">
+      <dsp:nvSpPr>
+        <dsp:cNvPr id="0" name=""/>
+        <dsp:cNvSpPr/>
+      </dsp:nvSpPr>
+      <dsp:spPr>
+        <a:xfrm>
+          <a:off x="2642589" y="1241325"/>
+          <a:ext cx="275850" cy="275850"/>
+        </a:xfrm>
+        <a:prstGeom prst="ellipse">
+          <a:avLst/>
+        </a:prstGeom>
+        <a:solidFill>
+          <a:schemeClr val="accent1">
+            <a:hueOff val="0"/>
+            <a:satOff val="0"/>
+            <a:lumOff val="0"/>
+            <a:alphaOff val="0"/>
+          </a:schemeClr>
+        </a:solidFill>
+        <a:ln w="15875" cap="flat" cmpd="sng" algn="ctr">
+          <a:solidFill>
+            <a:schemeClr val="lt1">
+              <a:hueOff val="0"/>
+              <a:satOff val="0"/>
+              <a:lumOff val="0"/>
+              <a:alphaOff val="0"/>
+            </a:schemeClr>
+          </a:solidFill>
+          <a:prstDash val="solid"/>
+        </a:ln>
+        <a:effectLst/>
+      </dsp:spPr>
+      <dsp:style>
+        <a:lnRef idx="2">
+          <a:scrgbClr r="0" g="0" b="0"/>
+        </a:lnRef>
+        <a:fillRef idx="1">
+          <a:scrgbClr r="0" g="0" b="0"/>
+        </a:fillRef>
+        <a:effectRef idx="0">
+          <a:scrgbClr r="0" g="0" b="0"/>
+        </a:effectRef>
+        <a:fontRef idx="minor">
+          <a:schemeClr val="lt1"/>
+        </a:fontRef>
+      </dsp:style>
+    </dsp:sp>
+    <dsp:sp modelId="{8CE852D7-8899-4908-B7F1-42F32C89D74F}">
+      <dsp:nvSpPr>
+        <dsp:cNvPr id="0" name=""/>
+        <dsp:cNvSpPr/>
+      </dsp:nvSpPr>
+      <dsp:spPr>
+        <a:xfrm>
+          <a:off x="3765827" y="0"/>
+          <a:ext cx="1791477" cy="1103400"/>
+        </a:xfrm>
+        <a:prstGeom prst="rect">
+          <a:avLst/>
+        </a:prstGeom>
+        <a:noFill/>
+        <a:ln>
+          <a:noFill/>
+        </a:ln>
+        <a:effectLst/>
+      </dsp:spPr>
+      <dsp:style>
+        <a:lnRef idx="0">
+          <a:scrgbClr r="0" g="0" b="0"/>
+        </a:lnRef>
+        <a:fillRef idx="0">
+          <a:scrgbClr r="0" g="0" b="0"/>
+        </a:fillRef>
+        <a:effectRef idx="0">
+          <a:scrgbClr r="0" g="0" b="0"/>
+        </a:effectRef>
+        <a:fontRef idx="minor"/>
+      </dsp:style>
+      <dsp:txBody>
+        <a:bodyPr spcFirstLastPara="0" vert="horz" wrap="square" lIns="263144" tIns="263144" rIns="263144" bIns="263144" numCol="1" spcCol="1270" anchor="b" anchorCtr="0">
+          <a:noAutofit/>
+        </a:bodyPr>
+        <a:lstStyle/>
+        <a:p>
+          <a:pPr marL="0" lvl="0" indent="0" algn="ctr" defTabSz="1644650">
+            <a:lnSpc>
+              <a:spcPct val="90000"/>
+            </a:lnSpc>
+            <a:spcBef>
+              <a:spcPct val="0"/>
+            </a:spcBef>
+            <a:spcAft>
+              <a:spcPct val="35000"/>
+            </a:spcAft>
+            <a:buNone/>
+          </a:pPr>
+          <a:r>
+            <a:rPr lang="zh-TW" altLang="en-US" sz="3700" kern="1200" dirty="0">
+              <a:latin typeface="標楷體" panose="03000509000000000000" pitchFamily="65" charset="-120"/>
+              <a:ea typeface="標楷體" panose="03000509000000000000" pitchFamily="65" charset="-120"/>
+            </a:rPr>
+            <a:t>詐騙</a:t>
+          </a:r>
+        </a:p>
+      </dsp:txBody>
+      <dsp:txXfrm>
+        <a:off x="3765827" y="0"/>
+        <a:ext cx="1791477" cy="1103400"/>
+      </dsp:txXfrm>
+    </dsp:sp>
+    <dsp:sp modelId="{758C6F5C-8415-4852-9352-C5C0D921FEBD}">
+      <dsp:nvSpPr>
+        <dsp:cNvPr id="0" name=""/>
+        <dsp:cNvSpPr/>
+      </dsp:nvSpPr>
+      <dsp:spPr>
+        <a:xfrm>
+          <a:off x="4523641" y="1241325"/>
+          <a:ext cx="275850" cy="275850"/>
+        </a:xfrm>
+        <a:prstGeom prst="ellipse">
+          <a:avLst/>
+        </a:prstGeom>
+        <a:solidFill>
+          <a:schemeClr val="accent1">
+            <a:hueOff val="0"/>
+            <a:satOff val="0"/>
+            <a:lumOff val="0"/>
+            <a:alphaOff val="0"/>
+          </a:schemeClr>
+        </a:solidFill>
+        <a:ln w="15875" cap="flat" cmpd="sng" algn="ctr">
+          <a:solidFill>
+            <a:schemeClr val="lt1">
+              <a:hueOff val="0"/>
+              <a:satOff val="0"/>
+              <a:lumOff val="0"/>
+              <a:alphaOff val="0"/>
+            </a:schemeClr>
+          </a:solidFill>
+          <a:prstDash val="solid"/>
+        </a:ln>
+        <a:effectLst/>
+      </dsp:spPr>
+      <dsp:style>
+        <a:lnRef idx="2">
+          <a:scrgbClr r="0" g="0" b="0"/>
+        </a:lnRef>
+        <a:fillRef idx="1">
+          <a:scrgbClr r="0" g="0" b="0"/>
+        </a:fillRef>
+        <a:effectRef idx="0">
+          <a:scrgbClr r="0" g="0" b="0"/>
+        </a:effectRef>
+        <a:fontRef idx="minor">
+          <a:schemeClr val="lt1"/>
+        </a:fontRef>
+      </dsp:style>
+    </dsp:sp>
+    <dsp:sp modelId="{BA686BC1-F7AD-4885-8EB6-68B6E7717DDD}">
+      <dsp:nvSpPr>
+        <dsp:cNvPr id="0" name=""/>
+        <dsp:cNvSpPr/>
+      </dsp:nvSpPr>
+      <dsp:spPr>
+        <a:xfrm>
+          <a:off x="5646878" y="1655101"/>
+          <a:ext cx="1791477" cy="1103400"/>
+        </a:xfrm>
+        <a:prstGeom prst="rect">
+          <a:avLst/>
+        </a:prstGeom>
+        <a:noFill/>
+        <a:ln>
+          <a:noFill/>
+        </a:ln>
+        <a:effectLst/>
+      </dsp:spPr>
+      <dsp:style>
+        <a:lnRef idx="0">
+          <a:scrgbClr r="0" g="0" b="0"/>
+        </a:lnRef>
+        <a:fillRef idx="0">
+          <a:scrgbClr r="0" g="0" b="0"/>
+        </a:fillRef>
+        <a:effectRef idx="0">
+          <a:scrgbClr r="0" g="0" b="0"/>
+        </a:effectRef>
+        <a:fontRef idx="minor"/>
+      </dsp:style>
+      <dsp:txBody>
+        <a:bodyPr spcFirstLastPara="0" vert="horz" wrap="square" lIns="263144" tIns="263144" rIns="263144" bIns="263144" numCol="1" spcCol="1270" anchor="t" anchorCtr="0">
+          <a:noAutofit/>
+        </a:bodyPr>
+        <a:lstStyle/>
+        <a:p>
+          <a:pPr marL="0" lvl="0" indent="0" algn="ctr" defTabSz="1644650">
+            <a:lnSpc>
+              <a:spcPct val="90000"/>
+            </a:lnSpc>
+            <a:spcBef>
+              <a:spcPct val="0"/>
+            </a:spcBef>
+            <a:spcAft>
+              <a:spcPct val="35000"/>
+            </a:spcAft>
+            <a:buNone/>
+          </a:pPr>
+          <a:r>
+            <a:rPr lang="en-US" altLang="zh-TW" sz="3700" kern="1200" dirty="0">
+              <a:latin typeface="Times New Roman" panose="02020603050405020304" pitchFamily="18" charset="0"/>
+              <a:cs typeface="Times New Roman" panose="02020603050405020304" pitchFamily="18" charset="0"/>
+            </a:rPr>
+            <a:t>AI</a:t>
+          </a:r>
+          <a:endParaRPr lang="zh-TW" altLang="en-US" sz="3700" kern="1200" dirty="0">
+            <a:latin typeface="Times New Roman" panose="02020603050405020304" pitchFamily="18" charset="0"/>
+            <a:cs typeface="Times New Roman" panose="02020603050405020304" pitchFamily="18" charset="0"/>
+          </a:endParaRPr>
+        </a:p>
+      </dsp:txBody>
+      <dsp:txXfrm>
+        <a:off x="5646878" y="1655101"/>
+        <a:ext cx="1791477" cy="1103400"/>
+      </dsp:txXfrm>
+    </dsp:sp>
+    <dsp:sp modelId="{394A1AED-D461-4CB8-81C8-FE05655CE086}">
+      <dsp:nvSpPr>
+        <dsp:cNvPr id="0" name=""/>
+        <dsp:cNvSpPr/>
+      </dsp:nvSpPr>
+      <dsp:spPr>
+        <a:xfrm>
+          <a:off x="6404692" y="1241325"/>
+          <a:ext cx="275850" cy="275850"/>
+        </a:xfrm>
+        <a:prstGeom prst="ellipse">
+          <a:avLst/>
+        </a:prstGeom>
+        <a:solidFill>
+          <a:schemeClr val="accent1">
+            <a:hueOff val="0"/>
+            <a:satOff val="0"/>
+            <a:lumOff val="0"/>
+            <a:alphaOff val="0"/>
+          </a:schemeClr>
+        </a:solidFill>
+        <a:ln w="15875" cap="flat" cmpd="sng" algn="ctr">
+          <a:solidFill>
+            <a:schemeClr val="lt1">
+              <a:hueOff val="0"/>
+              <a:satOff val="0"/>
+              <a:lumOff val="0"/>
+              <a:alphaOff val="0"/>
+            </a:schemeClr>
+          </a:solidFill>
+          <a:prstDash val="solid"/>
+        </a:ln>
+        <a:effectLst/>
+      </dsp:spPr>
+      <dsp:style>
+        <a:lnRef idx="2">
+          <a:scrgbClr r="0" g="0" b="0"/>
+        </a:lnRef>
+        <a:fillRef idx="1">
+          <a:scrgbClr r="0" g="0" b="0"/>
+        </a:fillRef>
+        <a:effectRef idx="0">
+          <a:scrgbClr r="0" g="0" b="0"/>
+        </a:effectRef>
+        <a:fontRef idx="minor">
+          <a:schemeClr val="lt1"/>
+        </a:fontRef>
+      </dsp:style>
+    </dsp:sp>
+  </dsp:spTree>
+</dsp:drawing>
+</file>
+
 <file path=ppt/diagrams/layout1.xml><?xml version="1.0" encoding="utf-8"?>
+<dgm:layoutDef xmlns:dgm="http://schemas.openxmlformats.org/drawingml/2006/diagram" xmlns:a="http://schemas.openxmlformats.org/drawingml/2006/main" uniqueId="urn:microsoft.com/office/officeart/2005/8/layout/hProcess11">
+  <dgm:title val=""/>
+  <dgm:desc val=""/>
+  <dgm:catLst>
+    <dgm:cat type="process" pri="8000"/>
+    <dgm:cat type="convert" pri="14000"/>
+  </dgm:catLst>
+  <dgm:sampData useDef="1">
+    <dgm:dataModel>
+      <dgm:ptLst/>
+      <dgm:bg/>
+      <dgm:whole/>
+    </dgm:dataModel>
+  </dgm:sampData>
+  <dgm:styleData>
+    <dgm:dataModel>
+      <dgm:ptLst>
+        <dgm:pt modelId="0" type="doc"/>
+        <dgm:pt modelId="1"/>
+        <dgm:pt modelId="2"/>
+      </dgm:ptLst>
+      <dgm:cxnLst>
+        <dgm:cxn modelId="4" srcId="0" destId="1" srcOrd="0" destOrd="0"/>
+        <dgm:cxn modelId="5" srcId="0" destId="2" srcOrd="1" destOrd="0"/>
+      </dgm:cxnLst>
+      <dgm:bg/>
+      <dgm:whole/>
+    </dgm:dataModel>
+  </dgm:styleData>
+  <dgm:clrData>
+    <dgm:dataModel>
+      <dgm:ptLst>
+        <dgm:pt modelId="0" type="doc"/>
+        <dgm:pt modelId="1"/>
+        <dgm:pt modelId="2"/>
+        <dgm:pt modelId="3"/>
+        <dgm:pt modelId="4"/>
+      </dgm:ptLst>
+      <dgm:cxnLst>
+        <dgm:cxn modelId="5" srcId="0" destId="1" srcOrd="0" destOrd="0"/>
+        <dgm:cxn modelId="6" srcId="0" destId="2" srcOrd="1" destOrd="0"/>
+        <dgm:cxn modelId="7" srcId="0" destId="3" srcOrd="2" destOrd="0"/>
+        <dgm:cxn modelId="8" srcId="0" destId="4" srcOrd="3" destOrd="0"/>
+      </dgm:cxnLst>
+      <dgm:bg/>
+      <dgm:whole/>
+    </dgm:dataModel>
+  </dgm:clrData>
+  <dgm:layoutNode name="Name0">
+    <dgm:varLst>
+      <dgm:dir/>
+      <dgm:resizeHandles val="exact"/>
+    </dgm:varLst>
+    <dgm:alg type="composite"/>
+    <dgm:shape xmlns:r="http://schemas.openxmlformats.org/officeDocument/2006/relationships" r:blip="">
+      <dgm:adjLst/>
+    </dgm:shape>
+    <dgm:presOf/>
+    <dgm:choose name="Name1">
+      <dgm:if name="Name2" func="var" arg="dir" op="equ" val="norm">
+        <dgm:constrLst>
+          <dgm:constr type="w" for="ch" forName="arrow" refType="w"/>
+          <dgm:constr type="h" for="ch" forName="arrow" refType="h" fact="0.4"/>
+          <dgm:constr type="ctrY" for="ch" forName="arrow" refType="h" fact="0.5"/>
+          <dgm:constr type="l" for="ch" forName="arrow"/>
+          <dgm:constr type="w" for="ch" forName="points" refType="w" fact="0.9"/>
+          <dgm:constr type="h" for="ch" forName="points" refType="h"/>
+          <dgm:constr type="t" for="ch" forName="points"/>
+          <dgm:constr type="l" for="ch" forName="points"/>
+        </dgm:constrLst>
+      </dgm:if>
+      <dgm:else name="Name3">
+        <dgm:constrLst>
+          <dgm:constr type="w" for="ch" forName="arrow" refType="w"/>
+          <dgm:constr type="h" for="ch" forName="arrow" refType="h" fact="0.4"/>
+          <dgm:constr type="ctrY" for="ch" forName="arrow" refType="h" fact="0.5"/>
+          <dgm:constr type="r" for="ch" forName="arrow" refType="w"/>
+          <dgm:constr type="w" for="ch" forName="points" refType="w" fact="0.9"/>
+          <dgm:constr type="h" for="ch" forName="points" refType="h"/>
+          <dgm:constr type="t" for="ch" forName="points"/>
+          <dgm:constr type="r" for="ch" forName="points" refType="w"/>
+        </dgm:constrLst>
+      </dgm:else>
+    </dgm:choose>
+    <dgm:ruleLst/>
+    <dgm:layoutNode name="arrow" styleLbl="bgShp">
+      <dgm:alg type="sp"/>
+      <dgm:choose name="Name4">
+        <dgm:if name="Name5" func="var" arg="dir" op="equ" val="norm">
+          <dgm:shape xmlns:r="http://schemas.openxmlformats.org/officeDocument/2006/relationships" type="notchedRightArrow" r:blip="">
+            <dgm:adjLst/>
+          </dgm:shape>
+        </dgm:if>
+        <dgm:else name="Name6">
+          <dgm:shape xmlns:r="http://schemas.openxmlformats.org/officeDocument/2006/relationships" rot="180" type="notchedRightArrow" r:blip="">
+            <dgm:adjLst/>
+          </dgm:shape>
+        </dgm:else>
+      </dgm:choose>
+      <dgm:presOf/>
+      <dgm:constrLst/>
+      <dgm:ruleLst/>
+    </dgm:layoutNode>
+    <dgm:layoutNode name="points">
+      <dgm:choose name="Name7">
+        <dgm:if name="Name8" func="var" arg="dir" op="equ" val="norm">
+          <dgm:alg type="lin">
+            <dgm:param type="linDir" val="fromL"/>
+          </dgm:alg>
+        </dgm:if>
+        <dgm:else name="Name9">
+          <dgm:alg type="lin">
+            <dgm:param type="linDir" val="fromR"/>
+          </dgm:alg>
+        </dgm:else>
+      </dgm:choose>
+      <dgm:shape xmlns:r="http://schemas.openxmlformats.org/officeDocument/2006/relationships" r:blip="">
+        <dgm:adjLst/>
+      </dgm:shape>
+      <dgm:presOf/>
+      <dgm:constrLst>
+        <dgm:constr type="w" for="ch" forName="compositeA" refType="w"/>
+        <dgm:constr type="h" for="ch" forName="compositeA" refType="h"/>
+        <dgm:constr type="w" for="ch" forName="compositeB" refType="w" refFor="ch" refForName="compositeA" op="equ"/>
+        <dgm:constr type="h" for="ch" forName="compositeB" refType="h" refFor="ch" refForName="compositeA" op="equ"/>
+        <dgm:constr type="primFontSz" for="des" ptType="node" op="equ" val="65"/>
+        <dgm:constr type="w" for="ch" forName="space" refType="w" refFor="ch" refForName="compositeA" op="equ" fact="0.05"/>
+      </dgm:constrLst>
+      <dgm:ruleLst/>
+      <dgm:forEach name="Name10" axis="ch" ptType="node">
+        <dgm:choose name="Name11">
+          <dgm:if name="Name12" axis="self" ptType="node" func="posOdd" op="equ" val="1">
+            <dgm:layoutNode name="compositeA">
+              <dgm:alg type="composite"/>
+              <dgm:shape xmlns:r="http://schemas.openxmlformats.org/officeDocument/2006/relationships" r:blip="">
+                <dgm:adjLst/>
+              </dgm:shape>
+              <dgm:presOf/>
+              <dgm:constrLst>
+                <dgm:constr type="w" for="ch" forName="textA" refType="w"/>
+                <dgm:constr type="h" for="ch" forName="textA" refType="h" fact="0.4"/>
+                <dgm:constr type="t" for="ch" forName="textA"/>
+                <dgm:constr type="l" for="ch" forName="textA"/>
+                <dgm:constr type="h" for="ch" forName="circleA" refType="h" fact="0.1"/>
+                <dgm:constr type="h" for="ch" forName="circleA" refType="w" op="lte"/>
+                <dgm:constr type="w" for="ch" forName="circleA" refType="h" refFor="ch" refForName="circleA" op="equ"/>
+                <dgm:constr type="ctrY" for="ch" forName="circleA" refType="h" fact="0.5"/>
+                <dgm:constr type="ctrX" for="ch" forName="circleA" refType="w" refFor="ch" refForName="textA" fact="0.5"/>
+                <dgm:constr type="w" for="ch" forName="spaceA" refType="w"/>
+                <dgm:constr type="h" for="ch" forName="spaceA" refType="h" fact="0.4"/>
+                <dgm:constr type="b" for="ch" forName="spaceA" refType="h"/>
+                <dgm:constr type="l" for="ch" forName="spaceA"/>
+              </dgm:constrLst>
+              <dgm:ruleLst/>
+              <dgm:layoutNode name="textA" styleLbl="revTx">
+                <dgm:varLst>
+                  <dgm:bulletEnabled val="1"/>
+                </dgm:varLst>
+                <dgm:alg type="tx">
+                  <dgm:param type="txAnchorVert" val="b"/>
+                  <dgm:param type="txAnchorVertCh" val="b"/>
+                  <dgm:param type="txAnchorHorzCh" val="ctr"/>
+                </dgm:alg>
+                <dgm:shape xmlns:r="http://schemas.openxmlformats.org/officeDocument/2006/relationships" type="rect" r:blip="">
+                  <dgm:adjLst/>
+                </dgm:shape>
+                <dgm:presOf axis="desOrSelf" ptType="node"/>
+                <dgm:constrLst/>
+                <dgm:ruleLst>
+                  <dgm:rule type="primFontSz" val="5" fact="NaN" max="NaN"/>
+                </dgm:ruleLst>
+              </dgm:layoutNode>
+              <dgm:layoutNode name="circleA">
+                <dgm:alg type="sp"/>
+                <dgm:shape xmlns:r="http://schemas.openxmlformats.org/officeDocument/2006/relationships" type="ellipse" r:blip="">
+                  <dgm:adjLst/>
+                </dgm:shape>
+                <dgm:presOf/>
+                <dgm:constrLst/>
+                <dgm:ruleLst/>
+              </dgm:layoutNode>
+              <dgm:layoutNode name="spaceA">
+                <dgm:alg type="sp"/>
+                <dgm:shape xmlns:r="http://schemas.openxmlformats.org/officeDocument/2006/relationships" r:blip="">
+                  <dgm:adjLst/>
+                </dgm:shape>
+                <dgm:presOf/>
+                <dgm:constrLst/>
+                <dgm:ruleLst/>
+              </dgm:layoutNode>
+            </dgm:layoutNode>
+          </dgm:if>
+          <dgm:else name="Name13">
+            <dgm:layoutNode name="compositeB">
+              <dgm:alg type="composite"/>
+              <dgm:shape xmlns:r="http://schemas.openxmlformats.org/officeDocument/2006/relationships" r:blip="">
+                <dgm:adjLst/>
+              </dgm:shape>
+              <dgm:presOf/>
+              <dgm:constrLst>
+                <dgm:constr type="w" for="ch" forName="textB" refType="w"/>
+                <dgm:constr type="h" for="ch" forName="textB" refType="h" fact="0.4"/>
+                <dgm:constr type="b" for="ch" forName="textB" refType="h"/>
+                <dgm:constr type="l" for="ch" forName="textB"/>
+                <dgm:constr type="h" for="ch" forName="circleB" refType="h" fact="0.1"/>
+                <dgm:constr type="w" for="ch" forName="circleB" refType="h" refFor="ch" refForName="circleB" op="equ"/>
+                <dgm:constr type="h" for="ch" forName="circleB" refType="w" op="lte"/>
+                <dgm:constr type="ctrY" for="ch" forName="circleB" refType="h" fact="0.5"/>
+                <dgm:constr type="ctrX" for="ch" forName="circleB" refType="w" refFor="ch" refForName="textB" fact="0.5"/>
+                <dgm:constr type="w" for="ch" forName="spaceB" refType="w"/>
+                <dgm:constr type="h" for="ch" forName="spaceB" refType="h" fact="0.4"/>
+                <dgm:constr type="t" for="ch" forName="spaceB"/>
+                <dgm:constr type="l" for="ch" forName="spaceB"/>
+              </dgm:constrLst>
+              <dgm:ruleLst/>
+              <dgm:layoutNode name="textB" styleLbl="revTx">
+                <dgm:varLst>
+                  <dgm:bulletEnabled val="1"/>
+                </dgm:varLst>
+                <dgm:alg type="tx">
+                  <dgm:param type="txAnchorVert" val="t"/>
+                  <dgm:param type="txAnchorVertCh" val="t"/>
+                  <dgm:param type="txAnchorHorzCh" val="ctr"/>
+                </dgm:alg>
+                <dgm:shape xmlns:r="http://schemas.openxmlformats.org/officeDocument/2006/relationships" type="rect" r:blip="">
+                  <dgm:adjLst/>
+                </dgm:shape>
+                <dgm:presOf axis="desOrSelf" ptType="node"/>
+                <dgm:constrLst/>
+                <dgm:ruleLst>
+                  <dgm:rule type="primFontSz" val="5" fact="NaN" max="NaN"/>
+                </dgm:ruleLst>
+              </dgm:layoutNode>
+              <dgm:layoutNode name="circleB">
+                <dgm:alg type="sp"/>
+                <dgm:shape xmlns:r="http://schemas.openxmlformats.org/officeDocument/2006/relationships" type="ellipse" r:blip="">
+                  <dgm:adjLst/>
+                </dgm:shape>
+                <dgm:presOf/>
+                <dgm:constrLst/>
+                <dgm:ruleLst/>
+              </dgm:layoutNode>
+              <dgm:layoutNode name="spaceB">
+                <dgm:alg type="sp"/>
+                <dgm:shape xmlns:r="http://schemas.openxmlformats.org/officeDocument/2006/relationships" r:blip="">
+                  <dgm:adjLst/>
+                </dgm:shape>
+                <dgm:presOf/>
+                <dgm:constrLst/>
+                <dgm:ruleLst/>
+              </dgm:layoutNode>
+            </dgm:layoutNode>
+          </dgm:else>
+        </dgm:choose>
+        <dgm:forEach name="Name14" axis="followSib" ptType="sibTrans" cnt="1">
+          <dgm:layoutNode name="space">
+            <dgm:alg type="sp"/>
+            <dgm:shape xmlns:r="http://schemas.openxmlformats.org/officeDocument/2006/relationships" r:blip="">
+              <dgm:adjLst/>
+            </dgm:shape>
+            <dgm:presOf/>
+            <dgm:constrLst/>
+            <dgm:ruleLst/>
+          </dgm:layoutNode>
+        </dgm:forEach>
+      </dgm:forEach>
+    </dgm:layoutNode>
+  </dgm:layoutNode>
+</dgm:layoutDef>
+</file>
+
+<file path=ppt/diagrams/layout2.xml><?xml version="1.0" encoding="utf-8"?>
 <dgm:layoutDef xmlns:dgm="http://schemas.openxmlformats.org/drawingml/2006/diagram" xmlns:a="http://schemas.openxmlformats.org/drawingml/2006/main" uniqueId="urn:microsoft.com/office/officeart/2005/8/layout/hProcess11">
   <dgm:title val=""/>
   <dgm:desc val=""/>
@@ -3003,6 +4856,1040 @@
 </dgm:styleDef>
 </file>
 
+<file path=ppt/diagrams/quickStyle2.xml><?xml version="1.0" encoding="utf-8"?>
+<dgm:styleDef xmlns:dgm="http://schemas.openxmlformats.org/drawingml/2006/diagram" xmlns:a="http://schemas.openxmlformats.org/drawingml/2006/main" uniqueId="urn:microsoft.com/office/officeart/2005/8/quickstyle/simple1">
+  <dgm:title val=""/>
+  <dgm:desc val=""/>
+  <dgm:catLst>
+    <dgm:cat type="simple" pri="10100"/>
+  </dgm:catLst>
+  <dgm:scene3d>
+    <a:camera prst="orthographicFront"/>
+    <a:lightRig rig="threePt" dir="t"/>
+  </dgm:scene3d>
+  <dgm:styleLbl name="node0">
+    <dgm:scene3d>
+      <a:camera prst="orthographicFront"/>
+      <a:lightRig rig="threePt" dir="t"/>
+    </dgm:scene3d>
+    <dgm:sp3d/>
+    <dgm:txPr/>
+    <dgm:style>
+      <a:lnRef idx="2">
+        <a:scrgbClr r="0" g="0" b="0"/>
+      </a:lnRef>
+      <a:fillRef idx="1">
+        <a:scrgbClr r="0" g="0" b="0"/>
+      </a:fillRef>
+      <a:effectRef idx="0">
+        <a:scrgbClr r="0" g="0" b="0"/>
+      </a:effectRef>
+      <a:fontRef idx="minor">
+        <a:schemeClr val="lt1"/>
+      </a:fontRef>
+    </dgm:style>
+  </dgm:styleLbl>
+  <dgm:styleLbl name="lnNode1">
+    <dgm:scene3d>
+      <a:camera prst="orthographicFront"/>
+      <a:lightRig rig="threePt" dir="t"/>
+    </dgm:scene3d>
+    <dgm:sp3d/>
+    <dgm:txPr/>
+    <dgm:style>
+      <a:lnRef idx="2">
+        <a:scrgbClr r="0" g="0" b="0"/>
+      </a:lnRef>
+      <a:fillRef idx="1">
+        <a:scrgbClr r="0" g="0" b="0"/>
+      </a:fillRef>
+      <a:effectRef idx="0">
+        <a:scrgbClr r="0" g="0" b="0"/>
+      </a:effectRef>
+      <a:fontRef idx="minor">
+        <a:schemeClr val="lt1"/>
+      </a:fontRef>
+    </dgm:style>
+  </dgm:styleLbl>
+  <dgm:styleLbl name="vennNode1">
+    <dgm:scene3d>
+      <a:camera prst="orthographicFront"/>
+      <a:lightRig rig="threePt" dir="t"/>
+    </dgm:scene3d>
+    <dgm:sp3d/>
+    <dgm:txPr/>
+    <dgm:style>
+      <a:lnRef idx="2">
+        <a:scrgbClr r="0" g="0" b="0"/>
+      </a:lnRef>
+      <a:fillRef idx="1">
+        <a:scrgbClr r="0" g="0" b="0"/>
+      </a:fillRef>
+      <a:effectRef idx="0">
+        <a:scrgbClr r="0" g="0" b="0"/>
+      </a:effectRef>
+      <a:fontRef idx="minor">
+        <a:schemeClr val="tx1"/>
+      </a:fontRef>
+    </dgm:style>
+  </dgm:styleLbl>
+  <dgm:styleLbl name="alignNode1">
+    <dgm:scene3d>
+      <a:camera prst="orthographicFront"/>
+      <a:lightRig rig="threePt" dir="t"/>
+    </dgm:scene3d>
+    <dgm:sp3d/>
+    <dgm:txPr/>
+    <dgm:style>
+      <a:lnRef idx="2">
+        <a:scrgbClr r="0" g="0" b="0"/>
+      </a:lnRef>
+      <a:fillRef idx="1">
+        <a:scrgbClr r="0" g="0" b="0"/>
+      </a:fillRef>
+      <a:effectRef idx="0">
+        <a:scrgbClr r="0" g="0" b="0"/>
+      </a:effectRef>
+      <a:fontRef idx="minor">
+        <a:schemeClr val="lt1"/>
+      </a:fontRef>
+    </dgm:style>
+  </dgm:styleLbl>
+  <dgm:styleLbl name="node1">
+    <dgm:scene3d>
+      <a:camera prst="orthographicFront"/>
+      <a:lightRig rig="threePt" dir="t"/>
+    </dgm:scene3d>
+    <dgm:sp3d/>
+    <dgm:txPr/>
+    <dgm:style>
+      <a:lnRef idx="2">
+        <a:scrgbClr r="0" g="0" b="0"/>
+      </a:lnRef>
+      <a:fillRef idx="1">
+        <a:scrgbClr r="0" g="0" b="0"/>
+      </a:fillRef>
+      <a:effectRef idx="0">
+        <a:scrgbClr r="0" g="0" b="0"/>
+      </a:effectRef>
+      <a:fontRef idx="minor">
+        <a:schemeClr val="lt1"/>
+      </a:fontRef>
+    </dgm:style>
+  </dgm:styleLbl>
+  <dgm:styleLbl name="node2">
+    <dgm:scene3d>
+      <a:camera prst="orthographicFront"/>
+      <a:lightRig rig="threePt" dir="t"/>
+    </dgm:scene3d>
+    <dgm:sp3d/>
+    <dgm:txPr/>
+    <dgm:style>
+      <a:lnRef idx="2">
+        <a:scrgbClr r="0" g="0" b="0"/>
+      </a:lnRef>
+      <a:fillRef idx="1">
+        <a:scrgbClr r="0" g="0" b="0"/>
+      </a:fillRef>
+      <a:effectRef idx="0">
+        <a:scrgbClr r="0" g="0" b="0"/>
+      </a:effectRef>
+      <a:fontRef idx="minor">
+        <a:schemeClr val="lt1"/>
+      </a:fontRef>
+    </dgm:style>
+  </dgm:styleLbl>
+  <dgm:styleLbl name="node3">
+    <dgm:scene3d>
+      <a:camera prst="orthographicFront"/>
+      <a:lightRig rig="threePt" dir="t"/>
+    </dgm:scene3d>
+    <dgm:sp3d/>
+    <dgm:txPr/>
+    <dgm:style>
+      <a:lnRef idx="2">
+        <a:scrgbClr r="0" g="0" b="0"/>
+      </a:lnRef>
+      <a:fillRef idx="1">
+        <a:scrgbClr r="0" g="0" b="0"/>
+      </a:fillRef>
+      <a:effectRef idx="0">
+        <a:scrgbClr r="0" g="0" b="0"/>
+      </a:effectRef>
+      <a:fontRef idx="minor">
+        <a:schemeClr val="lt1"/>
+      </a:fontRef>
+    </dgm:style>
+  </dgm:styleLbl>
+  <dgm:styleLbl name="node4">
+    <dgm:scene3d>
+      <a:camera prst="orthographicFront"/>
+      <a:lightRig rig="threePt" dir="t"/>
+    </dgm:scene3d>
+    <dgm:sp3d/>
+    <dgm:txPr/>
+    <dgm:style>
+      <a:lnRef idx="2">
+        <a:scrgbClr r="0" g="0" b="0"/>
+      </a:lnRef>
+      <a:fillRef idx="1">
+        <a:scrgbClr r="0" g="0" b="0"/>
+      </a:fillRef>
+      <a:effectRef idx="0">
+        <a:scrgbClr r="0" g="0" b="0"/>
+      </a:effectRef>
+      <a:fontRef idx="minor">
+        <a:schemeClr val="lt1"/>
+      </a:fontRef>
+    </dgm:style>
+  </dgm:styleLbl>
+  <dgm:styleLbl name="fgImgPlace1">
+    <dgm:scene3d>
+      <a:camera prst="orthographicFront"/>
+      <a:lightRig rig="threePt" dir="t"/>
+    </dgm:scene3d>
+    <dgm:sp3d/>
+    <dgm:txPr/>
+    <dgm:style>
+      <a:lnRef idx="2">
+        <a:scrgbClr r="0" g="0" b="0"/>
+      </a:lnRef>
+      <a:fillRef idx="1">
+        <a:scrgbClr r="0" g="0" b="0"/>
+      </a:fillRef>
+      <a:effectRef idx="0">
+        <a:scrgbClr r="0" g="0" b="0"/>
+      </a:effectRef>
+      <a:fontRef idx="minor"/>
+    </dgm:style>
+  </dgm:styleLbl>
+  <dgm:styleLbl name="alignImgPlace1">
+    <dgm:scene3d>
+      <a:camera prst="orthographicFront"/>
+      <a:lightRig rig="threePt" dir="t"/>
+    </dgm:scene3d>
+    <dgm:sp3d/>
+    <dgm:txPr/>
+    <dgm:style>
+      <a:lnRef idx="2">
+        <a:scrgbClr r="0" g="0" b="0"/>
+      </a:lnRef>
+      <a:fillRef idx="1">
+        <a:scrgbClr r="0" g="0" b="0"/>
+      </a:fillRef>
+      <a:effectRef idx="0">
+        <a:scrgbClr r="0" g="0" b="0"/>
+      </a:effectRef>
+      <a:fontRef idx="minor"/>
+    </dgm:style>
+  </dgm:styleLbl>
+  <dgm:styleLbl name="bgImgPlace1">
+    <dgm:scene3d>
+      <a:camera prst="orthographicFront"/>
+      <a:lightRig rig="threePt" dir="t"/>
+    </dgm:scene3d>
+    <dgm:sp3d/>
+    <dgm:txPr/>
+    <dgm:style>
+      <a:lnRef idx="2">
+        <a:scrgbClr r="0" g="0" b="0"/>
+      </a:lnRef>
+      <a:fillRef idx="1">
+        <a:scrgbClr r="0" g="0" b="0"/>
+      </a:fillRef>
+      <a:effectRef idx="0">
+        <a:scrgbClr r="0" g="0" b="0"/>
+      </a:effectRef>
+      <a:fontRef idx="minor"/>
+    </dgm:style>
+  </dgm:styleLbl>
+  <dgm:styleLbl name="sibTrans2D1">
+    <dgm:scene3d>
+      <a:camera prst="orthographicFront"/>
+      <a:lightRig rig="threePt" dir="t"/>
+    </dgm:scene3d>
+    <dgm:sp3d/>
+    <dgm:txPr/>
+    <dgm:style>
+      <a:lnRef idx="0">
+        <a:scrgbClr r="0" g="0" b="0"/>
+      </a:lnRef>
+      <a:fillRef idx="1">
+        <a:scrgbClr r="0" g="0" b="0"/>
+      </a:fillRef>
+      <a:effectRef idx="0">
+        <a:scrgbClr r="0" g="0" b="0"/>
+      </a:effectRef>
+      <a:fontRef idx="minor">
+        <a:schemeClr val="lt1"/>
+      </a:fontRef>
+    </dgm:style>
+  </dgm:styleLbl>
+  <dgm:styleLbl name="fgSibTrans2D1">
+    <dgm:scene3d>
+      <a:camera prst="orthographicFront"/>
+      <a:lightRig rig="threePt" dir="t"/>
+    </dgm:scene3d>
+    <dgm:sp3d/>
+    <dgm:txPr/>
+    <dgm:style>
+      <a:lnRef idx="0">
+        <a:scrgbClr r="0" g="0" b="0"/>
+      </a:lnRef>
+      <a:fillRef idx="1">
+        <a:scrgbClr r="0" g="0" b="0"/>
+      </a:fillRef>
+      <a:effectRef idx="0">
+        <a:scrgbClr r="0" g="0" b="0"/>
+      </a:effectRef>
+      <a:fontRef idx="minor">
+        <a:schemeClr val="lt1"/>
+      </a:fontRef>
+    </dgm:style>
+  </dgm:styleLbl>
+  <dgm:styleLbl name="bgSibTrans2D1">
+    <dgm:scene3d>
+      <a:camera prst="orthographicFront"/>
+      <a:lightRig rig="threePt" dir="t"/>
+    </dgm:scene3d>
+    <dgm:sp3d/>
+    <dgm:txPr/>
+    <dgm:style>
+      <a:lnRef idx="0">
+        <a:scrgbClr r="0" g="0" b="0"/>
+      </a:lnRef>
+      <a:fillRef idx="1">
+        <a:scrgbClr r="0" g="0" b="0"/>
+      </a:fillRef>
+      <a:effectRef idx="0">
+        <a:scrgbClr r="0" g="0" b="0"/>
+      </a:effectRef>
+      <a:fontRef idx="minor">
+        <a:schemeClr val="lt1"/>
+      </a:fontRef>
+    </dgm:style>
+  </dgm:styleLbl>
+  <dgm:styleLbl name="sibTrans1D1">
+    <dgm:scene3d>
+      <a:camera prst="orthographicFront"/>
+      <a:lightRig rig="threePt" dir="t"/>
+    </dgm:scene3d>
+    <dgm:sp3d/>
+    <dgm:txPr/>
+    <dgm:style>
+      <a:lnRef idx="1">
+        <a:scrgbClr r="0" g="0" b="0"/>
+      </a:lnRef>
+      <a:fillRef idx="0">
+        <a:scrgbClr r="0" g="0" b="0"/>
+      </a:fillRef>
+      <a:effectRef idx="0">
+        <a:scrgbClr r="0" g="0" b="0"/>
+      </a:effectRef>
+      <a:fontRef idx="minor"/>
+    </dgm:style>
+  </dgm:styleLbl>
+  <dgm:styleLbl name="callout">
+    <dgm:scene3d>
+      <a:camera prst="orthographicFront"/>
+      <a:lightRig rig="threePt" dir="t"/>
+    </dgm:scene3d>
+    <dgm:sp3d/>
+    <dgm:txPr/>
+    <dgm:style>
+      <a:lnRef idx="2">
+        <a:scrgbClr r="0" g="0" b="0"/>
+      </a:lnRef>
+      <a:fillRef idx="1">
+        <a:scrgbClr r="0" g="0" b="0"/>
+      </a:fillRef>
+      <a:effectRef idx="0">
+        <a:scrgbClr r="0" g="0" b="0"/>
+      </a:effectRef>
+      <a:fontRef idx="minor"/>
+    </dgm:style>
+  </dgm:styleLbl>
+  <dgm:styleLbl name="asst0">
+    <dgm:scene3d>
+      <a:camera prst="orthographicFront"/>
+      <a:lightRig rig="threePt" dir="t"/>
+    </dgm:scene3d>
+    <dgm:sp3d/>
+    <dgm:txPr/>
+    <dgm:style>
+      <a:lnRef idx="2">
+        <a:scrgbClr r="0" g="0" b="0"/>
+      </a:lnRef>
+      <a:fillRef idx="1">
+        <a:scrgbClr r="0" g="0" b="0"/>
+      </a:fillRef>
+      <a:effectRef idx="0">
+        <a:scrgbClr r="0" g="0" b="0"/>
+      </a:effectRef>
+      <a:fontRef idx="minor">
+        <a:schemeClr val="lt1"/>
+      </a:fontRef>
+    </dgm:style>
+  </dgm:styleLbl>
+  <dgm:styleLbl name="asst1">
+    <dgm:scene3d>
+      <a:camera prst="orthographicFront"/>
+      <a:lightRig rig="threePt" dir="t"/>
+    </dgm:scene3d>
+    <dgm:sp3d/>
+    <dgm:txPr/>
+    <dgm:style>
+      <a:lnRef idx="2">
+        <a:scrgbClr r="0" g="0" b="0"/>
+      </a:lnRef>
+      <a:fillRef idx="1">
+        <a:scrgbClr r="0" g="0" b="0"/>
+      </a:fillRef>
+      <a:effectRef idx="0">
+        <a:scrgbClr r="0" g="0" b="0"/>
+      </a:effectRef>
+      <a:fontRef idx="minor">
+        <a:schemeClr val="lt1"/>
+      </a:fontRef>
+    </dgm:style>
+  </dgm:styleLbl>
+  <dgm:styleLbl name="asst2">
+    <dgm:scene3d>
+      <a:camera prst="orthographicFront"/>
+      <a:lightRig rig="threePt" dir="t"/>
+    </dgm:scene3d>
+    <dgm:sp3d/>
+    <dgm:txPr/>
+    <dgm:style>
+      <a:lnRef idx="2">
+        <a:scrgbClr r="0" g="0" b="0"/>
+      </a:lnRef>
+      <a:fillRef idx="1">
+        <a:scrgbClr r="0" g="0" b="0"/>
+      </a:fillRef>
+      <a:effectRef idx="0">
+        <a:scrgbClr r="0" g="0" b="0"/>
+      </a:effectRef>
+      <a:fontRef idx="minor">
+        <a:schemeClr val="lt1"/>
+      </a:fontRef>
+    </dgm:style>
+  </dgm:styleLbl>
+  <dgm:styleLbl name="asst3">
+    <dgm:scene3d>
+      <a:camera prst="orthographicFront"/>
+      <a:lightRig rig="threePt" dir="t"/>
+    </dgm:scene3d>
+    <dgm:sp3d/>
+    <dgm:txPr/>
+    <dgm:style>
+      <a:lnRef idx="2">
+        <a:scrgbClr r="0" g="0" b="0"/>
+      </a:lnRef>
+      <a:fillRef idx="1">
+        <a:scrgbClr r="0" g="0" b="0"/>
+      </a:fillRef>
+      <a:effectRef idx="0">
+        <a:scrgbClr r="0" g="0" b="0"/>
+      </a:effectRef>
+      <a:fontRef idx="minor">
+        <a:schemeClr val="lt1"/>
+      </a:fontRef>
+    </dgm:style>
+  </dgm:styleLbl>
+  <dgm:styleLbl name="asst4">
+    <dgm:scene3d>
+      <a:camera prst="orthographicFront"/>
+      <a:lightRig rig="threePt" dir="t"/>
+    </dgm:scene3d>
+    <dgm:sp3d/>
+    <dgm:txPr/>
+    <dgm:style>
+      <a:lnRef idx="2">
+        <a:scrgbClr r="0" g="0" b="0"/>
+      </a:lnRef>
+      <a:fillRef idx="1">
+        <a:scrgbClr r="0" g="0" b="0"/>
+      </a:fillRef>
+      <a:effectRef idx="0">
+        <a:scrgbClr r="0" g="0" b="0"/>
+      </a:effectRef>
+      <a:fontRef idx="minor">
+        <a:schemeClr val="lt1"/>
+      </a:fontRef>
+    </dgm:style>
+  </dgm:styleLbl>
+  <dgm:styleLbl name="parChTrans2D1">
+    <dgm:scene3d>
+      <a:camera prst="orthographicFront"/>
+      <a:lightRig rig="threePt" dir="t"/>
+    </dgm:scene3d>
+    <dgm:sp3d/>
+    <dgm:txPr/>
+    <dgm:style>
+      <a:lnRef idx="2">
+        <a:scrgbClr r="0" g="0" b="0"/>
+      </a:lnRef>
+      <a:fillRef idx="1">
+        <a:scrgbClr r="0" g="0" b="0"/>
+      </a:fillRef>
+      <a:effectRef idx="0">
+        <a:scrgbClr r="0" g="0" b="0"/>
+      </a:effectRef>
+      <a:fontRef idx="minor">
+        <a:schemeClr val="lt1"/>
+      </a:fontRef>
+    </dgm:style>
+  </dgm:styleLbl>
+  <dgm:styleLbl name="parChTrans2D2">
+    <dgm:scene3d>
+      <a:camera prst="orthographicFront"/>
+      <a:lightRig rig="threePt" dir="t"/>
+    </dgm:scene3d>
+    <dgm:sp3d/>
+    <dgm:txPr/>
+    <dgm:style>
+      <a:lnRef idx="2">
+        <a:scrgbClr r="0" g="0" b="0"/>
+      </a:lnRef>
+      <a:fillRef idx="1">
+        <a:scrgbClr r="0" g="0" b="0"/>
+      </a:fillRef>
+      <a:effectRef idx="0">
+        <a:scrgbClr r="0" g="0" b="0"/>
+      </a:effectRef>
+      <a:fontRef idx="minor">
+        <a:schemeClr val="lt1"/>
+      </a:fontRef>
+    </dgm:style>
+  </dgm:styleLbl>
+  <dgm:styleLbl name="parChTrans2D3">
+    <dgm:scene3d>
+      <a:camera prst="orthographicFront"/>
+      <a:lightRig rig="threePt" dir="t"/>
+    </dgm:scene3d>
+    <dgm:sp3d/>
+    <dgm:txPr/>
+    <dgm:style>
+      <a:lnRef idx="2">
+        <a:scrgbClr r="0" g="0" b="0"/>
+      </a:lnRef>
+      <a:fillRef idx="1">
+        <a:scrgbClr r="0" g="0" b="0"/>
+      </a:fillRef>
+      <a:effectRef idx="0">
+        <a:scrgbClr r="0" g="0" b="0"/>
+      </a:effectRef>
+      <a:fontRef idx="minor">
+        <a:schemeClr val="lt1"/>
+      </a:fontRef>
+    </dgm:style>
+  </dgm:styleLbl>
+  <dgm:styleLbl name="parChTrans2D4">
+    <dgm:scene3d>
+      <a:camera prst="orthographicFront"/>
+      <a:lightRig rig="threePt" dir="t"/>
+    </dgm:scene3d>
+    <dgm:sp3d/>
+    <dgm:txPr/>
+    <dgm:style>
+      <a:lnRef idx="2">
+        <a:scrgbClr r="0" g="0" b="0"/>
+      </a:lnRef>
+      <a:fillRef idx="1">
+        <a:scrgbClr r="0" g="0" b="0"/>
+      </a:fillRef>
+      <a:effectRef idx="0">
+        <a:scrgbClr r="0" g="0" b="0"/>
+      </a:effectRef>
+      <a:fontRef idx="minor">
+        <a:schemeClr val="lt1"/>
+      </a:fontRef>
+    </dgm:style>
+  </dgm:styleLbl>
+  <dgm:styleLbl name="parChTrans1D1">
+    <dgm:scene3d>
+      <a:camera prst="orthographicFront"/>
+      <a:lightRig rig="threePt" dir="t"/>
+    </dgm:scene3d>
+    <dgm:sp3d/>
+    <dgm:txPr/>
+    <dgm:style>
+      <a:lnRef idx="2">
+        <a:scrgbClr r="0" g="0" b="0"/>
+      </a:lnRef>
+      <a:fillRef idx="0">
+        <a:scrgbClr r="0" g="0" b="0"/>
+      </a:fillRef>
+      <a:effectRef idx="0">
+        <a:scrgbClr r="0" g="0" b="0"/>
+      </a:effectRef>
+      <a:fontRef idx="minor"/>
+    </dgm:style>
+  </dgm:styleLbl>
+  <dgm:styleLbl name="parChTrans1D2">
+    <dgm:scene3d>
+      <a:camera prst="orthographicFront"/>
+      <a:lightRig rig="threePt" dir="t"/>
+    </dgm:scene3d>
+    <dgm:sp3d/>
+    <dgm:txPr/>
+    <dgm:style>
+      <a:lnRef idx="2">
+        <a:scrgbClr r="0" g="0" b="0"/>
+      </a:lnRef>
+      <a:fillRef idx="0">
+        <a:scrgbClr r="0" g="0" b="0"/>
+      </a:fillRef>
+      <a:effectRef idx="0">
+        <a:scrgbClr r="0" g="0" b="0"/>
+      </a:effectRef>
+      <a:fontRef idx="minor"/>
+    </dgm:style>
+  </dgm:styleLbl>
+  <dgm:styleLbl name="parChTrans1D3">
+    <dgm:scene3d>
+      <a:camera prst="orthographicFront"/>
+      <a:lightRig rig="threePt" dir="t"/>
+    </dgm:scene3d>
+    <dgm:sp3d/>
+    <dgm:txPr/>
+    <dgm:style>
+      <a:lnRef idx="2">
+        <a:scrgbClr r="0" g="0" b="0"/>
+      </a:lnRef>
+      <a:fillRef idx="0">
+        <a:scrgbClr r="0" g="0" b="0"/>
+      </a:fillRef>
+      <a:effectRef idx="0">
+        <a:scrgbClr r="0" g="0" b="0"/>
+      </a:effectRef>
+      <a:fontRef idx="minor"/>
+    </dgm:style>
+  </dgm:styleLbl>
+  <dgm:styleLbl name="parChTrans1D4">
+    <dgm:scene3d>
+      <a:camera prst="orthographicFront"/>
+      <a:lightRig rig="threePt" dir="t"/>
+    </dgm:scene3d>
+    <dgm:sp3d/>
+    <dgm:txPr/>
+    <dgm:style>
+      <a:lnRef idx="2">
+        <a:scrgbClr r="0" g="0" b="0"/>
+      </a:lnRef>
+      <a:fillRef idx="0">
+        <a:scrgbClr r="0" g="0" b="0"/>
+      </a:fillRef>
+      <a:effectRef idx="0">
+        <a:scrgbClr r="0" g="0" b="0"/>
+      </a:effectRef>
+      <a:fontRef idx="minor"/>
+    </dgm:style>
+  </dgm:styleLbl>
+  <dgm:styleLbl name="fgAcc1">
+    <dgm:scene3d>
+      <a:camera prst="orthographicFront"/>
+      <a:lightRig rig="threePt" dir="t"/>
+    </dgm:scene3d>
+    <dgm:sp3d/>
+    <dgm:txPr/>
+    <dgm:style>
+      <a:lnRef idx="2">
+        <a:scrgbClr r="0" g="0" b="0"/>
+      </a:lnRef>
+      <a:fillRef idx="1">
+        <a:scrgbClr r="0" g="0" b="0"/>
+      </a:fillRef>
+      <a:effectRef idx="0">
+        <a:scrgbClr r="0" g="0" b="0"/>
+      </a:effectRef>
+      <a:fontRef idx="minor"/>
+    </dgm:style>
+  </dgm:styleLbl>
+  <dgm:styleLbl name="conFgAcc1">
+    <dgm:scene3d>
+      <a:camera prst="orthographicFront"/>
+      <a:lightRig rig="threePt" dir="t"/>
+    </dgm:scene3d>
+    <dgm:sp3d/>
+    <dgm:txPr/>
+    <dgm:style>
+      <a:lnRef idx="2">
+        <a:scrgbClr r="0" g="0" b="0"/>
+      </a:lnRef>
+      <a:fillRef idx="1">
+        <a:scrgbClr r="0" g="0" b="0"/>
+      </a:fillRef>
+      <a:effectRef idx="0">
+        <a:scrgbClr r="0" g="0" b="0"/>
+      </a:effectRef>
+      <a:fontRef idx="minor"/>
+    </dgm:style>
+  </dgm:styleLbl>
+  <dgm:styleLbl name="alignAcc1">
+    <dgm:scene3d>
+      <a:camera prst="orthographicFront"/>
+      <a:lightRig rig="threePt" dir="t"/>
+    </dgm:scene3d>
+    <dgm:sp3d/>
+    <dgm:txPr/>
+    <dgm:style>
+      <a:lnRef idx="2">
+        <a:scrgbClr r="0" g="0" b="0"/>
+      </a:lnRef>
+      <a:fillRef idx="1">
+        <a:scrgbClr r="0" g="0" b="0"/>
+      </a:fillRef>
+      <a:effectRef idx="0">
+        <a:scrgbClr r="0" g="0" b="0"/>
+      </a:effectRef>
+      <a:fontRef idx="minor"/>
+    </dgm:style>
+  </dgm:styleLbl>
+  <dgm:styleLbl name="trAlignAcc1">
+    <dgm:scene3d>
+      <a:camera prst="orthographicFront"/>
+      <a:lightRig rig="threePt" dir="t"/>
+    </dgm:scene3d>
+    <dgm:sp3d/>
+    <dgm:txPr/>
+    <dgm:style>
+      <a:lnRef idx="1">
+        <a:scrgbClr r="0" g="0" b="0"/>
+      </a:lnRef>
+      <a:fillRef idx="1">
+        <a:scrgbClr r="0" g="0" b="0"/>
+      </a:fillRef>
+      <a:effectRef idx="0">
+        <a:scrgbClr r="0" g="0" b="0"/>
+      </a:effectRef>
+      <a:fontRef idx="minor"/>
+    </dgm:style>
+  </dgm:styleLbl>
+  <dgm:styleLbl name="bgAcc1">
+    <dgm:scene3d>
+      <a:camera prst="orthographicFront"/>
+      <a:lightRig rig="threePt" dir="t"/>
+    </dgm:scene3d>
+    <dgm:sp3d/>
+    <dgm:txPr/>
+    <dgm:style>
+      <a:lnRef idx="2">
+        <a:scrgbClr r="0" g="0" b="0"/>
+      </a:lnRef>
+      <a:fillRef idx="1">
+        <a:scrgbClr r="0" g="0" b="0"/>
+      </a:fillRef>
+      <a:effectRef idx="0">
+        <a:scrgbClr r="0" g="0" b="0"/>
+      </a:effectRef>
+      <a:fontRef idx="minor"/>
+    </dgm:style>
+  </dgm:styleLbl>
+  <dgm:styleLbl name="solidFgAcc1">
+    <dgm:scene3d>
+      <a:camera prst="orthographicFront"/>
+      <a:lightRig rig="threePt" dir="t"/>
+    </dgm:scene3d>
+    <dgm:sp3d/>
+    <dgm:txPr/>
+    <dgm:style>
+      <a:lnRef idx="2">
+        <a:scrgbClr r="0" g="0" b="0"/>
+      </a:lnRef>
+      <a:fillRef idx="1">
+        <a:scrgbClr r="0" g="0" b="0"/>
+      </a:fillRef>
+      <a:effectRef idx="0">
+        <a:scrgbClr r="0" g="0" b="0"/>
+      </a:effectRef>
+      <a:fontRef idx="minor"/>
+    </dgm:style>
+  </dgm:styleLbl>
+  <dgm:styleLbl name="solidAlignAcc1">
+    <dgm:scene3d>
+      <a:camera prst="orthographicFront"/>
+      <a:lightRig rig="threePt" dir="t"/>
+    </dgm:scene3d>
+    <dgm:sp3d/>
+    <dgm:txPr/>
+    <dgm:style>
+      <a:lnRef idx="2">
+        <a:scrgbClr r="0" g="0" b="0"/>
+      </a:lnRef>
+      <a:fillRef idx="1">
+        <a:scrgbClr r="0" g="0" b="0"/>
+      </a:fillRef>
+      <a:effectRef idx="0">
+        <a:scrgbClr r="0" g="0" b="0"/>
+      </a:effectRef>
+      <a:fontRef idx="minor"/>
+    </dgm:style>
+  </dgm:styleLbl>
+  <dgm:styleLbl name="solidBgAcc1">
+    <dgm:scene3d>
+      <a:camera prst="orthographicFront"/>
+      <a:lightRig rig="threePt" dir="t"/>
+    </dgm:scene3d>
+    <dgm:sp3d/>
+    <dgm:txPr/>
+    <dgm:style>
+      <a:lnRef idx="2">
+        <a:scrgbClr r="0" g="0" b="0"/>
+      </a:lnRef>
+      <a:fillRef idx="1">
+        <a:scrgbClr r="0" g="0" b="0"/>
+      </a:fillRef>
+      <a:effectRef idx="0">
+        <a:scrgbClr r="0" g="0" b="0"/>
+      </a:effectRef>
+      <a:fontRef idx="minor"/>
+    </dgm:style>
+  </dgm:styleLbl>
+  <dgm:styleLbl name="fgAccFollowNode1">
+    <dgm:scene3d>
+      <a:camera prst="orthographicFront"/>
+      <a:lightRig rig="threePt" dir="t"/>
+    </dgm:scene3d>
+    <dgm:sp3d/>
+    <dgm:txPr/>
+    <dgm:style>
+      <a:lnRef idx="2">
+        <a:scrgbClr r="0" g="0" b="0"/>
+      </a:lnRef>
+      <a:fillRef idx="1">
+        <a:scrgbClr r="0" g="0" b="0"/>
+      </a:fillRef>
+      <a:effectRef idx="0">
+        <a:scrgbClr r="0" g="0" b="0"/>
+      </a:effectRef>
+      <a:fontRef idx="minor"/>
+    </dgm:style>
+  </dgm:styleLbl>
+  <dgm:styleLbl name="alignAccFollowNode1">
+    <dgm:scene3d>
+      <a:camera prst="orthographicFront"/>
+      <a:lightRig rig="threePt" dir="t"/>
+    </dgm:scene3d>
+    <dgm:sp3d/>
+    <dgm:txPr/>
+    <dgm:style>
+      <a:lnRef idx="2">
+        <a:scrgbClr r="0" g="0" b="0"/>
+      </a:lnRef>
+      <a:fillRef idx="1">
+        <a:scrgbClr r="0" g="0" b="0"/>
+      </a:fillRef>
+      <a:effectRef idx="0">
+        <a:scrgbClr r="0" g="0" b="0"/>
+      </a:effectRef>
+      <a:fontRef idx="minor"/>
+    </dgm:style>
+  </dgm:styleLbl>
+  <dgm:styleLbl name="bgAccFollowNode1">
+    <dgm:scene3d>
+      <a:camera prst="orthographicFront"/>
+      <a:lightRig rig="threePt" dir="t"/>
+    </dgm:scene3d>
+    <dgm:sp3d/>
+    <dgm:txPr/>
+    <dgm:style>
+      <a:lnRef idx="2">
+        <a:scrgbClr r="0" g="0" b="0"/>
+      </a:lnRef>
+      <a:fillRef idx="1">
+        <a:scrgbClr r="0" g="0" b="0"/>
+      </a:fillRef>
+      <a:effectRef idx="0">
+        <a:scrgbClr r="0" g="0" b="0"/>
+      </a:effectRef>
+      <a:fontRef idx="minor"/>
+    </dgm:style>
+  </dgm:styleLbl>
+  <dgm:styleLbl name="fgAcc0">
+    <dgm:scene3d>
+      <a:camera prst="orthographicFront"/>
+      <a:lightRig rig="threePt" dir="t"/>
+    </dgm:scene3d>
+    <dgm:sp3d/>
+    <dgm:txPr/>
+    <dgm:style>
+      <a:lnRef idx="2">
+        <a:scrgbClr r="0" g="0" b="0"/>
+      </a:lnRef>
+      <a:fillRef idx="1">
+        <a:scrgbClr r="0" g="0" b="0"/>
+      </a:fillRef>
+      <a:effectRef idx="0">
+        <a:scrgbClr r="0" g="0" b="0"/>
+      </a:effectRef>
+      <a:fontRef idx="minor"/>
+    </dgm:style>
+  </dgm:styleLbl>
+  <dgm:styleLbl name="fgAcc2">
+    <dgm:scene3d>
+      <a:camera prst="orthographicFront"/>
+      <a:lightRig rig="threePt" dir="t"/>
+    </dgm:scene3d>
+    <dgm:sp3d/>
+    <dgm:txPr/>
+    <dgm:style>
+      <a:lnRef idx="2">
+        <a:scrgbClr r="0" g="0" b="0"/>
+      </a:lnRef>
+      <a:fillRef idx="1">
+        <a:scrgbClr r="0" g="0" b="0"/>
+      </a:fillRef>
+      <a:effectRef idx="0">
+        <a:scrgbClr r="0" g="0" b="0"/>
+      </a:effectRef>
+      <a:fontRef idx="minor"/>
+    </dgm:style>
+  </dgm:styleLbl>
+  <dgm:styleLbl name="fgAcc3">
+    <dgm:scene3d>
+      <a:camera prst="orthographicFront"/>
+      <a:lightRig rig="threePt" dir="t"/>
+    </dgm:scene3d>
+    <dgm:sp3d/>
+    <dgm:txPr/>
+    <dgm:style>
+      <a:lnRef idx="2">
+        <a:scrgbClr r="0" g="0" b="0"/>
+      </a:lnRef>
+      <a:fillRef idx="1">
+        <a:scrgbClr r="0" g="0" b="0"/>
+      </a:fillRef>
+      <a:effectRef idx="0">
+        <a:scrgbClr r="0" g="0" b="0"/>
+      </a:effectRef>
+      <a:fontRef idx="minor"/>
+    </dgm:style>
+  </dgm:styleLbl>
+  <dgm:styleLbl name="fgAcc4">
+    <dgm:scene3d>
+      <a:camera prst="orthographicFront"/>
+      <a:lightRig rig="threePt" dir="t"/>
+    </dgm:scene3d>
+    <dgm:sp3d/>
+    <dgm:txPr/>
+    <dgm:style>
+      <a:lnRef idx="2">
+        <a:scrgbClr r="0" g="0" b="0"/>
+      </a:lnRef>
+      <a:fillRef idx="1">
+        <a:scrgbClr r="0" g="0" b="0"/>
+      </a:fillRef>
+      <a:effectRef idx="0">
+        <a:scrgbClr r="0" g="0" b="0"/>
+      </a:effectRef>
+      <a:fontRef idx="minor"/>
+    </dgm:style>
+  </dgm:styleLbl>
+  <dgm:styleLbl name="bgShp">
+    <dgm:scene3d>
+      <a:camera prst="orthographicFront"/>
+      <a:lightRig rig="threePt" dir="t"/>
+    </dgm:scene3d>
+    <dgm:sp3d/>
+    <dgm:txPr/>
+    <dgm:style>
+      <a:lnRef idx="0">
+        <a:scrgbClr r="0" g="0" b="0"/>
+      </a:lnRef>
+      <a:fillRef idx="1">
+        <a:scrgbClr r="0" g="0" b="0"/>
+      </a:fillRef>
+      <a:effectRef idx="0">
+        <a:scrgbClr r="0" g="0" b="0"/>
+      </a:effectRef>
+      <a:fontRef idx="minor"/>
+    </dgm:style>
+  </dgm:styleLbl>
+  <dgm:styleLbl name="dkBgShp">
+    <dgm:scene3d>
+      <a:camera prst="orthographicFront"/>
+      <a:lightRig rig="threePt" dir="t"/>
+    </dgm:scene3d>
+    <dgm:sp3d/>
+    <dgm:txPr/>
+    <dgm:style>
+      <a:lnRef idx="0">
+        <a:scrgbClr r="0" g="0" b="0"/>
+      </a:lnRef>
+      <a:fillRef idx="1">
+        <a:scrgbClr r="0" g="0" b="0"/>
+      </a:fillRef>
+      <a:effectRef idx="0">
+        <a:scrgbClr r="0" g="0" b="0"/>
+      </a:effectRef>
+      <a:fontRef idx="minor"/>
+    </dgm:style>
+  </dgm:styleLbl>
+  <dgm:styleLbl name="trBgShp">
+    <dgm:scene3d>
+      <a:camera prst="orthographicFront"/>
+      <a:lightRig rig="threePt" dir="t"/>
+    </dgm:scene3d>
+    <dgm:sp3d/>
+    <dgm:txPr/>
+    <dgm:style>
+      <a:lnRef idx="0">
+        <a:scrgbClr r="0" g="0" b="0"/>
+      </a:lnRef>
+      <a:fillRef idx="1">
+        <a:scrgbClr r="0" g="0" b="0"/>
+      </a:fillRef>
+      <a:effectRef idx="0">
+        <a:scrgbClr r="0" g="0" b="0"/>
+      </a:effectRef>
+      <a:fontRef idx="minor"/>
+    </dgm:style>
+  </dgm:styleLbl>
+  <dgm:styleLbl name="fgShp">
+    <dgm:scene3d>
+      <a:camera prst="orthographicFront"/>
+      <a:lightRig rig="threePt" dir="t"/>
+    </dgm:scene3d>
+    <dgm:sp3d/>
+    <dgm:txPr/>
+    <dgm:style>
+      <a:lnRef idx="2">
+        <a:scrgbClr r="0" g="0" b="0"/>
+      </a:lnRef>
+      <a:fillRef idx="1">
+        <a:scrgbClr r="0" g="0" b="0"/>
+      </a:fillRef>
+      <a:effectRef idx="0">
+        <a:scrgbClr r="0" g="0" b="0"/>
+      </a:effectRef>
+      <a:fontRef idx="minor"/>
+    </dgm:style>
+  </dgm:styleLbl>
+  <dgm:styleLbl name="revTx">
+    <dgm:scene3d>
+      <a:camera prst="orthographicFront"/>
+      <a:lightRig rig="threePt" dir="t"/>
+    </dgm:scene3d>
+    <dgm:sp3d/>
+    <dgm:txPr/>
+    <dgm:style>
+      <a:lnRef idx="0">
+        <a:scrgbClr r="0" g="0" b="0"/>
+      </a:lnRef>
+      <a:fillRef idx="0">
+        <a:scrgbClr r="0" g="0" b="0"/>
+      </a:fillRef>
+      <a:effectRef idx="0">
+        <a:scrgbClr r="0" g="0" b="0"/>
+      </a:effectRef>
+      <a:fontRef idx="minor"/>
+    </dgm:style>
+  </dgm:styleLbl>
+</dgm:styleDef>
+</file>
+
 <file path=ppt/slideLayouts/slideLayout1.xml><?xml version="1.0" encoding="utf-8"?>
 <p:sldLayout xmlns:a="http://schemas.openxmlformats.org/drawingml/2006/main" xmlns:r="http://schemas.openxmlformats.org/officeDocument/2006/relationships" xmlns:p="http://schemas.openxmlformats.org/presentationml/2006/main" showMasterSp="0" type="title" preserve="1">
   <p:cSld name="標題投影片">
@@ -3335,7 +6222,7 @@
             <a:fld id="{B61BEF0D-F0BB-DE4B-95CE-6DB70DBA9567}" type="datetimeFigureOut">
               <a:rPr lang="en-US" dirty="0"/>
               <a:pPr/>
-              <a:t>4/29/2026</a:t>
+              <a:t>5/6/2026</a:t>
             </a:fld>
             <a:endParaRPr lang="en-US" dirty="0"/>
           </a:p>
@@ -3656,7 +6543,7 @@
             <a:fld id="{B61BEF0D-F0BB-DE4B-95CE-6DB70DBA9567}" type="datetimeFigureOut">
               <a:rPr lang="en-US" dirty="0"/>
               <a:pPr/>
-              <a:t>4/29/2026</a:t>
+              <a:t>5/6/2026</a:t>
             </a:fld>
             <a:endParaRPr lang="en-US" dirty="0"/>
           </a:p>
@@ -3901,7 +6788,7 @@
             <a:fld id="{B61BEF0D-F0BB-DE4B-95CE-6DB70DBA9567}" type="datetimeFigureOut">
               <a:rPr lang="en-US" dirty="0"/>
               <a:pPr/>
-              <a:t>4/29/2026</a:t>
+              <a:t>5/6/2026</a:t>
             </a:fld>
             <a:endParaRPr lang="en-US" dirty="0"/>
           </a:p>
@@ -4237,7 +7124,7 @@
             <a:fld id="{B61BEF0D-F0BB-DE4B-95CE-6DB70DBA9567}" type="datetimeFigureOut">
               <a:rPr lang="en-US" dirty="0"/>
               <a:pPr/>
-              <a:t>4/29/2026</a:t>
+              <a:t>5/6/2026</a:t>
             </a:fld>
             <a:endParaRPr lang="en-US" dirty="0"/>
           </a:p>
@@ -4581,7 +7468,7 @@
             <a:fld id="{B61BEF0D-F0BB-DE4B-95CE-6DB70DBA9567}" type="datetimeFigureOut">
               <a:rPr lang="en-US" dirty="0"/>
               <a:pPr/>
-              <a:t>4/29/2026</a:t>
+              <a:t>5/6/2026</a:t>
             </a:fld>
             <a:endParaRPr lang="en-US" dirty="0"/>
           </a:p>
@@ -4952,7 +7839,7 @@
             <a:fld id="{B61BEF0D-F0BB-DE4B-95CE-6DB70DBA9567}" type="datetimeFigureOut">
               <a:rPr lang="en-US" dirty="0"/>
               <a:pPr/>
-              <a:t>4/29/2026</a:t>
+              <a:t>5/6/2026</a:t>
             </a:fld>
             <a:endParaRPr lang="en-US" dirty="0"/>
           </a:p>
@@ -5419,7 +8306,7 @@
             <a:fld id="{B61BEF0D-F0BB-DE4B-95CE-6DB70DBA9567}" type="datetimeFigureOut">
               <a:rPr lang="en-US" dirty="0"/>
               <a:pPr/>
-              <a:t>4/29/2026</a:t>
+              <a:t>5/6/2026</a:t>
             </a:fld>
             <a:endParaRPr lang="en-US" dirty="0"/>
           </a:p>
@@ -5621,7 +8508,7 @@
             <a:fld id="{B61BEF0D-F0BB-DE4B-95CE-6DB70DBA9567}" type="datetimeFigureOut">
               <a:rPr lang="en-US" dirty="0"/>
               <a:pPr/>
-              <a:t>4/29/2026</a:t>
+              <a:t>5/6/2026</a:t>
             </a:fld>
             <a:endParaRPr lang="en-US" dirty="0"/>
           </a:p>
@@ -5829,7 +8716,7 @@
             <a:fld id="{B61BEF0D-F0BB-DE4B-95CE-6DB70DBA9567}" type="datetimeFigureOut">
               <a:rPr lang="en-US" dirty="0"/>
               <a:pPr/>
-              <a:t>4/29/2026</a:t>
+              <a:t>5/6/2026</a:t>
             </a:fld>
             <a:endParaRPr lang="en-US" dirty="0"/>
           </a:p>
@@ -6057,7 +8944,7 @@
           <a:p>
             <a:fld id="{52647F38-B617-4D2F-AE0A-013F0C4D2C57}" type="datetimeFigureOut">
               <a:rPr lang="en-US" dirty="0"/>
-              <a:t>4/29/2026</a:t>
+              <a:t>5/6/2026</a:t>
             </a:fld>
             <a:endParaRPr lang="en-US" dirty="0"/>
           </a:p>
@@ -6301,7 +9188,7 @@
             <a:fld id="{B61BEF0D-F0BB-DE4B-95CE-6DB70DBA9567}" type="datetimeFigureOut">
               <a:rPr lang="en-US" dirty="0"/>
               <a:pPr/>
-              <a:t>4/29/2026</a:t>
+              <a:t>5/6/2026</a:t>
             </a:fld>
             <a:endParaRPr lang="en-US" dirty="0"/>
           </a:p>
@@ -6595,7 +9482,7 @@
           <a:p>
             <a:fld id="{05BFA754-D5C3-4E66-96A6-867B257F58DC}" type="datetimeFigureOut">
               <a:rPr lang="en-US" dirty="0"/>
-              <a:t>4/29/2026</a:t>
+              <a:t>5/6/2026</a:t>
             </a:fld>
             <a:endParaRPr lang="en-US" dirty="0"/>
           </a:p>
@@ -6985,7 +9872,7 @@
             <a:fld id="{B61BEF0D-F0BB-DE4B-95CE-6DB70DBA9567}" type="datetimeFigureOut">
               <a:rPr lang="en-US" dirty="0"/>
               <a:pPr/>
-              <a:t>4/29/2026</a:t>
+              <a:t>5/6/2026</a:t>
             </a:fld>
             <a:endParaRPr lang="en-US" dirty="0"/>
           </a:p>
@@ -7131,7 +10018,7 @@
             <a:fld id="{B61BEF0D-F0BB-DE4B-95CE-6DB70DBA9567}" type="datetimeFigureOut">
               <a:rPr lang="en-US" dirty="0"/>
               <a:pPr/>
-              <a:t>4/29/2026</a:t>
+              <a:t>5/6/2026</a:t>
             </a:fld>
             <a:endParaRPr lang="en-US" dirty="0"/>
           </a:p>
@@ -7254,7 +10141,7 @@
             <a:fld id="{B61BEF0D-F0BB-DE4B-95CE-6DB70DBA9567}" type="datetimeFigureOut">
               <a:rPr lang="en-US" dirty="0"/>
               <a:pPr/>
-              <a:t>4/29/2026</a:t>
+              <a:t>5/6/2026</a:t>
             </a:fld>
             <a:endParaRPr lang="en-US" dirty="0"/>
           </a:p>
@@ -7506,7 +10393,7 @@
             <a:fld id="{B61BEF0D-F0BB-DE4B-95CE-6DB70DBA9567}" type="datetimeFigureOut">
               <a:rPr lang="en-US" dirty="0"/>
               <a:pPr/>
-              <a:t>4/29/2026</a:t>
+              <a:t>5/6/2026</a:t>
             </a:fld>
             <a:endParaRPr lang="en-US" dirty="0"/>
           </a:p>
@@ -7818,7 +10705,7 @@
             <a:fld id="{B61BEF0D-F0BB-DE4B-95CE-6DB70DBA9567}" type="datetimeFigureOut">
               <a:rPr lang="en-US" dirty="0"/>
               <a:pPr/>
-              <a:t>4/29/2026</a:t>
+              <a:t>5/6/2026</a:t>
             </a:fld>
             <a:endParaRPr lang="en-US" dirty="0"/>
           </a:p>
@@ -8166,7 +11053,7 @@
             <a:fld id="{B61BEF0D-F0BB-DE4B-95CE-6DB70DBA9567}" type="datetimeFigureOut">
               <a:rPr lang="en-US" dirty="0"/>
               <a:pPr/>
-              <a:t>4/29/2026</a:t>
+              <a:t>5/6/2026</a:t>
             </a:fld>
             <a:endParaRPr lang="en-US" dirty="0"/>
           </a:p>
@@ -8857,6 +11744,218 @@
 </p:sld>
 </file>
 
+<file path=ppt/slides/slide10.xml><?xml version="1.0" encoding="utf-8"?>
+<p:sld xmlns:a="http://schemas.openxmlformats.org/drawingml/2006/main" xmlns:r="http://schemas.openxmlformats.org/officeDocument/2006/relationships" xmlns:p="http://schemas.openxmlformats.org/presentationml/2006/main">
+  <p:cSld>
+    <p:spTree>
+      <p:nvGrpSpPr>
+        <p:cNvPr id="1" name=""/>
+        <p:cNvGrpSpPr/>
+        <p:nvPr/>
+      </p:nvGrpSpPr>
+      <p:grpSpPr>
+        <a:xfrm>
+          <a:off x="0" y="0"/>
+          <a:ext cx="0" cy="0"/>
+          <a:chOff x="0" y="0"/>
+          <a:chExt cx="0" cy="0"/>
+        </a:xfrm>
+      </p:grpSpPr>
+      <p:sp>
+        <p:nvSpPr>
+          <p:cNvPr id="4" name="標題 3">
+            <a:extLst>
+              <a:ext uri="{FF2B5EF4-FFF2-40B4-BE49-F238E27FC236}">
+                <a16:creationId xmlns:a16="http://schemas.microsoft.com/office/drawing/2014/main" id="{F1D5CE53-83F5-4BBA-BB3E-ABF11BF3B6B0}"/>
+              </a:ext>
+            </a:extLst>
+          </p:cNvPr>
+          <p:cNvSpPr>
+            <a:spLocks noGrp="1"/>
+          </p:cNvSpPr>
+          <p:nvPr>
+            <p:ph type="title"/>
+          </p:nvPr>
+        </p:nvSpPr>
+        <p:spPr/>
+        <p:txBody>
+          <a:bodyPr/>
+          <a:lstStyle/>
+          <a:p>
+            <a:r>
+              <a:rPr lang="en-US" altLang="zh-TW" dirty="0">
+                <a:latin typeface="Times New Roman" panose="02020603050405020304" pitchFamily="18" charset="0"/>
+                <a:ea typeface="標楷體" panose="03000509000000000000" pitchFamily="65" charset="-120"/>
+                <a:cs typeface="Times New Roman" panose="02020603050405020304" pitchFamily="18" charset="0"/>
+              </a:rPr>
+              <a:t>5/7</a:t>
+            </a:r>
+            <a:r>
+              <a:rPr lang="zh-TW" altLang="en-US" dirty="0">
+                <a:latin typeface="標楷體" panose="03000509000000000000" pitchFamily="65" charset="-120"/>
+                <a:ea typeface="標楷體" panose="03000509000000000000" pitchFamily="65" charset="-120"/>
+              </a:rPr>
+              <a:t>進度</a:t>
+            </a:r>
+          </a:p>
+        </p:txBody>
+      </p:sp>
+      <p:sp>
+        <p:nvSpPr>
+          <p:cNvPr id="5" name="文字版面配置區 4">
+            <a:extLst>
+              <a:ext uri="{FF2B5EF4-FFF2-40B4-BE49-F238E27FC236}">
+                <a16:creationId xmlns:a16="http://schemas.microsoft.com/office/drawing/2014/main" id="{9F5CBA14-3D57-4898-86A7-E9F06D90C241}"/>
+              </a:ext>
+            </a:extLst>
+          </p:cNvPr>
+          <p:cNvSpPr>
+            <a:spLocks noGrp="1"/>
+          </p:cNvSpPr>
+          <p:nvPr>
+            <p:ph type="body" idx="1"/>
+          </p:nvPr>
+        </p:nvSpPr>
+        <p:spPr/>
+        <p:txBody>
+          <a:bodyPr/>
+          <a:lstStyle/>
+          <a:p>
+            <a:r>
+              <a:rPr lang="zh-TW" altLang="en-US" dirty="0">
+                <a:latin typeface="標楷體" panose="03000509000000000000" pitchFamily="65" charset="-120"/>
+                <a:ea typeface="標楷體" panose="03000509000000000000" pitchFamily="65" charset="-120"/>
+              </a:rPr>
+              <a:t>功能一實作</a:t>
+            </a:r>
+          </a:p>
+        </p:txBody>
+      </p:sp>
+    </p:spTree>
+    <p:extLst>
+      <p:ext uri="{BB962C8B-B14F-4D97-AF65-F5344CB8AC3E}">
+        <p14:creationId xmlns:p14="http://schemas.microsoft.com/office/powerpoint/2010/main" val="4220093802"/>
+      </p:ext>
+    </p:extLst>
+  </p:cSld>
+  <p:clrMapOvr>
+    <a:masterClrMapping/>
+  </p:clrMapOvr>
+</p:sld>
+</file>
+
+<file path=ppt/slides/slide11.xml><?xml version="1.0" encoding="utf-8"?>
+<p:sld xmlns:a="http://schemas.openxmlformats.org/drawingml/2006/main" xmlns:r="http://schemas.openxmlformats.org/officeDocument/2006/relationships" xmlns:p="http://schemas.openxmlformats.org/presentationml/2006/main">
+  <p:cSld>
+    <p:spTree>
+      <p:nvGrpSpPr>
+        <p:cNvPr id="1" name=""/>
+        <p:cNvGrpSpPr/>
+        <p:nvPr/>
+      </p:nvGrpSpPr>
+      <p:grpSpPr>
+        <a:xfrm>
+          <a:off x="0" y="0"/>
+          <a:ext cx="0" cy="0"/>
+          <a:chOff x="0" y="0"/>
+          <a:chExt cx="0" cy="0"/>
+        </a:xfrm>
+      </p:grpSpPr>
+      <p:sp>
+        <p:nvSpPr>
+          <p:cNvPr id="2" name="標題 1">
+            <a:extLst>
+              <a:ext uri="{FF2B5EF4-FFF2-40B4-BE49-F238E27FC236}">
+                <a16:creationId xmlns:a16="http://schemas.microsoft.com/office/drawing/2014/main" id="{FD584AA1-206F-4D0E-B712-E4BF12872D0E}"/>
+              </a:ext>
+            </a:extLst>
+          </p:cNvPr>
+          <p:cNvSpPr>
+            <a:spLocks noGrp="1"/>
+          </p:cNvSpPr>
+          <p:nvPr>
+            <p:ph type="title"/>
+          </p:nvPr>
+        </p:nvSpPr>
+        <p:spPr/>
+        <p:txBody>
+          <a:bodyPr/>
+          <a:lstStyle/>
+          <a:p>
+            <a:r>
+              <a:rPr lang="zh-TW" altLang="en-US" dirty="0"/>
+              <a:t>相關連結</a:t>
+            </a:r>
+          </a:p>
+        </p:txBody>
+      </p:sp>
+      <p:sp>
+        <p:nvSpPr>
+          <p:cNvPr id="3" name="內容版面配置區 2">
+            <a:extLst>
+              <a:ext uri="{FF2B5EF4-FFF2-40B4-BE49-F238E27FC236}">
+                <a16:creationId xmlns:a16="http://schemas.microsoft.com/office/drawing/2014/main" id="{AA876783-6B37-4DAD-A196-F3B9DAA3E685}"/>
+              </a:ext>
+            </a:extLst>
+          </p:cNvPr>
+          <p:cNvSpPr>
+            <a:spLocks noGrp="1"/>
+          </p:cNvSpPr>
+          <p:nvPr>
+            <p:ph idx="1"/>
+          </p:nvPr>
+        </p:nvSpPr>
+        <p:spPr/>
+        <p:txBody>
+          <a:bodyPr/>
+          <a:lstStyle/>
+          <a:p>
+            <a:r>
+              <a:rPr lang="zh-TW" altLang="en-US" dirty="0">
+                <a:latin typeface="標楷體" panose="03000509000000000000" pitchFamily="65" charset="-120"/>
+                <a:ea typeface="標楷體" panose="03000509000000000000" pitchFamily="65" charset="-120"/>
+                <a:cs typeface="Times New Roman" panose="02020603050405020304" pitchFamily="18" charset="0"/>
+                <a:hlinkClick r:id="rId2"/>
+              </a:rPr>
+              <a:t>資訊檢索系統期末專案</a:t>
+            </a:r>
+            <a:endParaRPr lang="en-US" altLang="zh-TW" dirty="0">
+              <a:latin typeface="標楷體" panose="03000509000000000000" pitchFamily="65" charset="-120"/>
+              <a:ea typeface="標楷體" panose="03000509000000000000" pitchFamily="65" charset="-120"/>
+              <a:cs typeface="Times New Roman" panose="02020603050405020304" pitchFamily="18" charset="0"/>
+            </a:endParaRPr>
+          </a:p>
+          <a:p>
+            <a:r>
+              <a:rPr lang="zh-TW" altLang="en-US" dirty="0">
+                <a:latin typeface="標楷體" panose="03000509000000000000" pitchFamily="65" charset="-120"/>
+                <a:ea typeface="標楷體" panose="03000509000000000000" pitchFamily="65" charset="-120"/>
+                <a:cs typeface="Times New Roman" panose="02020603050405020304" pitchFamily="18" charset="0"/>
+                <a:hlinkClick r:id="rId3"/>
+              </a:rPr>
+              <a:t>台灣事實查核中心</a:t>
+            </a:r>
+            <a:endParaRPr lang="zh-TW" altLang="en-US" dirty="0">
+              <a:latin typeface="標楷體" panose="03000509000000000000" pitchFamily="65" charset="-120"/>
+              <a:ea typeface="標楷體" panose="03000509000000000000" pitchFamily="65" charset="-120"/>
+              <a:cs typeface="Times New Roman" panose="02020603050405020304" pitchFamily="18" charset="0"/>
+            </a:endParaRPr>
+          </a:p>
+        </p:txBody>
+      </p:sp>
+    </p:spTree>
+    <p:extLst>
+      <p:ext uri="{BB962C8B-B14F-4D97-AF65-F5344CB8AC3E}">
+        <p14:creationId xmlns:p14="http://schemas.microsoft.com/office/powerpoint/2010/main" val="1128931381"/>
+      </p:ext>
+    </p:extLst>
+  </p:cSld>
+  <p:clrMapOvr>
+    <a:masterClrMapping/>
+  </p:clrMapOvr>
+</p:sld>
+</file>
+
 <file path=ppt/slides/slide2.xml><?xml version="1.0" encoding="utf-8"?>
 <p:sld xmlns:a="http://schemas.openxmlformats.org/drawingml/2006/main" xmlns:r="http://schemas.openxmlformats.org/officeDocument/2006/relationships" xmlns:p="http://schemas.openxmlformats.org/presentationml/2006/main">
   <p:cSld>
@@ -9077,10 +12176,40 @@
       </p:sp>
       <p:pic>
         <p:nvPicPr>
-          <p:cNvPr id="5" name="內容版面配置區 4">
+          <p:cNvPr id="4" name="圖片 3">
             <a:extLst>
               <a:ext uri="{FF2B5EF4-FFF2-40B4-BE49-F238E27FC236}">
-                <a16:creationId xmlns:a16="http://schemas.microsoft.com/office/drawing/2014/main" id="{29F252B5-0A66-4BB2-8051-1F4B456F37BA}"/>
+                <a16:creationId xmlns:a16="http://schemas.microsoft.com/office/drawing/2014/main" id="{ABA5D7E2-FAD3-4BD3-A59F-B363558D5756}"/>
+              </a:ext>
+            </a:extLst>
+          </p:cNvPr>
+          <p:cNvPicPr>
+            <a:picLocks noChangeAspect="1"/>
+          </p:cNvPicPr>
+          <p:nvPr/>
+        </p:nvPicPr>
+        <p:blipFill>
+          <a:blip r:embed="rId2"/>
+          <a:stretch>
+            <a:fillRect/>
+          </a:stretch>
+        </p:blipFill>
+        <p:spPr>
+          <a:xfrm>
+            <a:off x="1295401" y="2197463"/>
+            <a:ext cx="7158891" cy="3678405"/>
+          </a:xfrm>
+          <a:prstGeom prst="rect">
+            <a:avLst/>
+          </a:prstGeom>
+        </p:spPr>
+      </p:pic>
+      <p:pic>
+        <p:nvPicPr>
+          <p:cNvPr id="14" name="內容版面配置區 13">
+            <a:extLst>
+              <a:ext uri="{FF2B5EF4-FFF2-40B4-BE49-F238E27FC236}">
+                <a16:creationId xmlns:a16="http://schemas.microsoft.com/office/drawing/2014/main" id="{346165D8-DFA2-418D-9266-F63ADF631F7F}"/>
               </a:ext>
             </a:extLst>
           </p:cNvPr>
@@ -9092,33 +12221,6 @@
           </p:nvPr>
         </p:nvPicPr>
         <p:blipFill>
-          <a:blip r:embed="rId2"/>
-          <a:stretch>
-            <a:fillRect/>
-          </a:stretch>
-        </p:blipFill>
-        <p:spPr>
-          <a:xfrm>
-            <a:off x="1384833" y="2423239"/>
-            <a:ext cx="6872079" cy="3317875"/>
-          </a:xfrm>
-        </p:spPr>
-      </p:pic>
-      <p:pic>
-        <p:nvPicPr>
-          <p:cNvPr id="7" name="圖片 6">
-            <a:extLst>
-              <a:ext uri="{FF2B5EF4-FFF2-40B4-BE49-F238E27FC236}">
-                <a16:creationId xmlns:a16="http://schemas.microsoft.com/office/drawing/2014/main" id="{2C1C6121-B86D-4628-89D9-E16BBA4421EA}"/>
-              </a:ext>
-            </a:extLst>
-          </p:cNvPr>
-          <p:cNvPicPr>
-            <a:picLocks noChangeAspect="1"/>
-          </p:cNvPicPr>
-          <p:nvPr/>
-        </p:nvPicPr>
-        <p:blipFill>
           <a:blip r:embed="rId3"/>
           <a:stretch>
             <a:fillRect/>
@@ -9126,12 +12228,9 @@
         </p:blipFill>
         <p:spPr>
           <a:xfrm>
-            <a:off x="5106099" y="2996703"/>
-            <a:ext cx="6095999" cy="3150597"/>
+            <a:off x="5060487" y="2769326"/>
+            <a:ext cx="6338964" cy="3106542"/>
           </a:xfrm>
-          <a:prstGeom prst="rect">
-            <a:avLst/>
-          </a:prstGeom>
         </p:spPr>
       </p:pic>
     </p:spTree>
@@ -9869,10 +12968,10 @@
       </p:grpSpPr>
       <p:sp>
         <p:nvSpPr>
-          <p:cNvPr id="2" name="標題 1">
+          <p:cNvPr id="4" name="標題 3">
             <a:extLst>
               <a:ext uri="{FF2B5EF4-FFF2-40B4-BE49-F238E27FC236}">
-                <a16:creationId xmlns:a16="http://schemas.microsoft.com/office/drawing/2014/main" id="{FD584AA1-206F-4D0E-B712-E4BF12872D0E}"/>
+                <a16:creationId xmlns:a16="http://schemas.microsoft.com/office/drawing/2014/main" id="{F1D5CE53-83F5-4BBA-BB3E-ABF11BF3B6B0}"/>
               </a:ext>
             </a:extLst>
           </p:cNvPr>
@@ -9889,8 +12988,125 @@
           <a:lstStyle/>
           <a:p>
             <a:r>
-              <a:rPr lang="zh-TW" altLang="en-US" dirty="0"/>
-              <a:t>相關連結</a:t>
+              <a:rPr lang="en-US" altLang="zh-TW" dirty="0">
+                <a:latin typeface="Times New Roman" panose="02020603050405020304" pitchFamily="18" charset="0"/>
+                <a:cs typeface="Times New Roman" panose="02020603050405020304" pitchFamily="18" charset="0"/>
+              </a:rPr>
+              <a:t>4/30</a:t>
+            </a:r>
+            <a:r>
+              <a:rPr lang="zh-TW" altLang="en-US" dirty="0">
+                <a:latin typeface="標楷體" panose="03000509000000000000" pitchFamily="65" charset="-120"/>
+                <a:ea typeface="標楷體" panose="03000509000000000000" pitchFamily="65" charset="-120"/>
+              </a:rPr>
+              <a:t>進度</a:t>
+            </a:r>
+          </a:p>
+        </p:txBody>
+      </p:sp>
+      <p:sp>
+        <p:nvSpPr>
+          <p:cNvPr id="5" name="文字版面配置區 4">
+            <a:extLst>
+              <a:ext uri="{FF2B5EF4-FFF2-40B4-BE49-F238E27FC236}">
+                <a16:creationId xmlns:a16="http://schemas.microsoft.com/office/drawing/2014/main" id="{9F5CBA14-3D57-4898-86A7-E9F06D90C241}"/>
+              </a:ext>
+            </a:extLst>
+          </p:cNvPr>
+          <p:cNvSpPr>
+            <a:spLocks noGrp="1"/>
+          </p:cNvSpPr>
+          <p:nvPr>
+            <p:ph type="body" idx="1"/>
+          </p:nvPr>
+        </p:nvSpPr>
+        <p:spPr/>
+        <p:txBody>
+          <a:bodyPr/>
+          <a:lstStyle/>
+          <a:p>
+            <a:r>
+              <a:rPr lang="zh-TW" altLang="en-US" dirty="0">
+                <a:latin typeface="標楷體" panose="03000509000000000000" pitchFamily="65" charset="-120"/>
+                <a:ea typeface="標楷體" panose="03000509000000000000" pitchFamily="65" charset="-120"/>
+              </a:rPr>
+              <a:t>功能一實作</a:t>
+            </a:r>
+          </a:p>
+        </p:txBody>
+      </p:sp>
+    </p:spTree>
+    <p:extLst>
+      <p:ext uri="{BB962C8B-B14F-4D97-AF65-F5344CB8AC3E}">
+        <p14:creationId xmlns:p14="http://schemas.microsoft.com/office/powerpoint/2010/main" val="1054002380"/>
+      </p:ext>
+    </p:extLst>
+  </p:cSld>
+  <p:clrMapOvr>
+    <a:masterClrMapping/>
+  </p:clrMapOvr>
+</p:sld>
+</file>
+
+<file path=ppt/slides/slide9.xml><?xml version="1.0" encoding="utf-8"?>
+<p:sld xmlns:a="http://schemas.openxmlformats.org/drawingml/2006/main" xmlns:r="http://schemas.openxmlformats.org/officeDocument/2006/relationships" xmlns:p="http://schemas.openxmlformats.org/presentationml/2006/main">
+  <p:cSld>
+    <p:spTree>
+      <p:nvGrpSpPr>
+        <p:cNvPr id="1" name=""/>
+        <p:cNvGrpSpPr/>
+        <p:nvPr/>
+      </p:nvGrpSpPr>
+      <p:grpSpPr>
+        <a:xfrm>
+          <a:off x="0" y="0"/>
+          <a:ext cx="0" cy="0"/>
+          <a:chOff x="0" y="0"/>
+          <a:chExt cx="0" cy="0"/>
+        </a:xfrm>
+      </p:grpSpPr>
+      <p:sp>
+        <p:nvSpPr>
+          <p:cNvPr id="2" name="標題 1">
+            <a:extLst>
+              <a:ext uri="{FF2B5EF4-FFF2-40B4-BE49-F238E27FC236}">
+                <a16:creationId xmlns:a16="http://schemas.microsoft.com/office/drawing/2014/main" id="{2DE3768E-4ECB-4AFC-9D38-D8D0C87616D5}"/>
+              </a:ext>
+            </a:extLst>
+          </p:cNvPr>
+          <p:cNvSpPr>
+            <a:spLocks noGrp="1"/>
+          </p:cNvSpPr>
+          <p:nvPr>
+            <p:ph type="title"/>
+          </p:nvPr>
+        </p:nvSpPr>
+        <p:spPr/>
+        <p:txBody>
+          <a:bodyPr/>
+          <a:lstStyle/>
+          <a:p>
+            <a:pPr algn="l"/>
+            <a:r>
+              <a:rPr lang="zh-TW" altLang="en-US" dirty="0">
+                <a:latin typeface="標楷體" panose="03000509000000000000" pitchFamily="65" charset="-120"/>
+                <a:ea typeface="標楷體" panose="03000509000000000000" pitchFamily="65" charset="-120"/>
+              </a:rPr>
+              <a:t>功能一</a:t>
+            </a:r>
+            <a:r>
+              <a:rPr lang="en-US" altLang="zh-TW" dirty="0">
+                <a:latin typeface="標楷體" panose="03000509000000000000" pitchFamily="65" charset="-120"/>
+                <a:ea typeface="標楷體" panose="03000509000000000000" pitchFamily="65" charset="-120"/>
+              </a:rPr>
+              <a:t>:</a:t>
+            </a:r>
+            <a:r>
+              <a:rPr lang="zh-TW" altLang="en-US" dirty="0">
+                <a:latin typeface="標楷體" panose="03000509000000000000" pitchFamily="65" charset="-120"/>
+                <a:ea typeface="標楷體" panose="03000509000000000000" pitchFamily="65" charset="-120"/>
+              </a:rPr>
+              <a:t>趨勢分析</a:t>
             </a:r>
           </a:p>
         </p:txBody>
@@ -9900,7 +13116,7 @@
           <p:cNvPr id="3" name="內容版面配置區 2">
             <a:extLst>
               <a:ext uri="{FF2B5EF4-FFF2-40B4-BE49-F238E27FC236}">
-                <a16:creationId xmlns:a16="http://schemas.microsoft.com/office/drawing/2014/main" id="{AA876783-6B37-4DAD-A196-F3B9DAA3E685}"/>
+                <a16:creationId xmlns:a16="http://schemas.microsoft.com/office/drawing/2014/main" id="{140B7DEE-05AE-4C0B-879F-0C5512A4BDD8}"/>
               </a:ext>
             </a:extLst>
           </p:cNvPr>
@@ -9920,15 +13136,12 @@
               <a:rPr lang="zh-TW" altLang="en-US" dirty="0">
                 <a:latin typeface="標楷體" panose="03000509000000000000" pitchFamily="65" charset="-120"/>
                 <a:ea typeface="標楷體" panose="03000509000000000000" pitchFamily="65" charset="-120"/>
-                <a:cs typeface="Times New Roman" panose="02020603050405020304" pitchFamily="18" charset="0"/>
-                <a:hlinkClick r:id="rId2"/>
               </a:rPr>
-              <a:t>資訊檢索系統期末專案</a:t>
+              <a:t>利用時間線整理關鍵字趨勢</a:t>
             </a:r>
             <a:endParaRPr lang="en-US" altLang="zh-TW" dirty="0">
               <a:latin typeface="標楷體" panose="03000509000000000000" pitchFamily="65" charset="-120"/>
               <a:ea typeface="標楷體" panose="03000509000000000000" pitchFamily="65" charset="-120"/>
-              <a:cs typeface="Times New Roman" panose="02020603050405020304" pitchFamily="18" charset="0"/>
             </a:endParaRPr>
           </a:p>
           <a:p>
@@ -9936,14 +13149,238 @@
               <a:rPr lang="zh-TW" altLang="en-US" dirty="0">
                 <a:latin typeface="標楷體" panose="03000509000000000000" pitchFamily="65" charset="-120"/>
                 <a:ea typeface="標楷體" panose="03000509000000000000" pitchFamily="65" charset="-120"/>
-                <a:cs typeface="Times New Roman" panose="02020603050405020304" pitchFamily="18" charset="0"/>
-                <a:hlinkClick r:id="rId3"/>
               </a:rPr>
-              <a:t>台灣事實查核中心</a:t>
-            </a:r>
+              <a:t>範例</a:t>
+            </a:r>
+            <a:r>
+              <a:rPr lang="en-US" altLang="zh-TW" dirty="0">
+                <a:latin typeface="標楷體" panose="03000509000000000000" pitchFamily="65" charset="-120"/>
+                <a:ea typeface="標楷體" panose="03000509000000000000" pitchFamily="65" charset="-120"/>
+              </a:rPr>
+              <a:t>:</a:t>
+            </a:r>
+          </a:p>
+          <a:p>
             <a:endParaRPr lang="zh-TW" altLang="en-US" dirty="0">
               <a:latin typeface="標楷體" panose="03000509000000000000" pitchFamily="65" charset="-120"/>
               <a:ea typeface="標楷體" panose="03000509000000000000" pitchFamily="65" charset="-120"/>
+            </a:endParaRPr>
+          </a:p>
+        </p:txBody>
+      </p:sp>
+      <p:graphicFrame>
+        <p:nvGraphicFramePr>
+          <p:cNvPr id="10" name="資料庫圖表 9">
+            <a:extLst>
+              <a:ext uri="{FF2B5EF4-FFF2-40B4-BE49-F238E27FC236}">
+                <a16:creationId xmlns:a16="http://schemas.microsoft.com/office/drawing/2014/main" id="{4C5D166F-4D53-442F-B7CB-5ED2942E8350}"/>
+              </a:ext>
+            </a:extLst>
+          </p:cNvPr>
+          <p:cNvGraphicFramePr/>
+          <p:nvPr/>
+        </p:nvGraphicFramePr>
+        <p:xfrm>
+          <a:off x="2627618" y="3388299"/>
+          <a:ext cx="8268979" cy="2758502"/>
+        </p:xfrm>
+        <a:graphic>
+          <a:graphicData uri="http://schemas.openxmlformats.org/drawingml/2006/diagram">
+            <dgm:relIds xmlns:dgm="http://schemas.openxmlformats.org/drawingml/2006/diagram" xmlns:r="http://schemas.openxmlformats.org/officeDocument/2006/relationships" r:dm="rId2" r:lo="rId3" r:qs="rId4" r:cs="rId5"/>
+          </a:graphicData>
+        </a:graphic>
+      </p:graphicFrame>
+      <p:sp>
+        <p:nvSpPr>
+          <p:cNvPr id="12" name="文字方塊 11">
+            <a:extLst>
+              <a:ext uri="{FF2B5EF4-FFF2-40B4-BE49-F238E27FC236}">
+                <a16:creationId xmlns:a16="http://schemas.microsoft.com/office/drawing/2014/main" id="{21832B86-F6DD-4BBC-A2F3-A710A1BAABF7}"/>
+              </a:ext>
+            </a:extLst>
+          </p:cNvPr>
+          <p:cNvSpPr txBox="1"/>
+          <p:nvPr/>
+        </p:nvSpPr>
+        <p:spPr>
+          <a:xfrm>
+            <a:off x="6861843" y="5236704"/>
+            <a:ext cx="855677" cy="369332"/>
+          </a:xfrm>
+          <a:prstGeom prst="rect">
+            <a:avLst/>
+          </a:prstGeom>
+          <a:noFill/>
+        </p:spPr>
+        <p:txBody>
+          <a:bodyPr wrap="square" rtlCol="0">
+            <a:spAutoFit/>
+          </a:bodyPr>
+          <a:lstStyle/>
+          <a:p>
+            <a:pPr algn="ctr"/>
+            <a:r>
+              <a:rPr lang="en-US" altLang="zh-TW" dirty="0">
+                <a:solidFill>
+                  <a:srgbClr val="FF0000"/>
+                </a:solidFill>
+                <a:latin typeface="Times New Roman" panose="02020603050405020304" pitchFamily="18" charset="0"/>
+                <a:cs typeface="Times New Roman" panose="02020603050405020304" pitchFamily="18" charset="0"/>
+              </a:rPr>
+              <a:t>2025</a:t>
+            </a:r>
+            <a:endParaRPr lang="zh-TW" altLang="en-US" dirty="0">
+              <a:solidFill>
+                <a:srgbClr val="FF0000"/>
+              </a:solidFill>
+              <a:latin typeface="Times New Roman" panose="02020603050405020304" pitchFamily="18" charset="0"/>
+              <a:cs typeface="Times New Roman" panose="02020603050405020304" pitchFamily="18" charset="0"/>
+            </a:endParaRPr>
+          </a:p>
+        </p:txBody>
+      </p:sp>
+      <p:sp>
+        <p:nvSpPr>
+          <p:cNvPr id="14" name="文字方塊 13">
+            <a:extLst>
+              <a:ext uri="{FF2B5EF4-FFF2-40B4-BE49-F238E27FC236}">
+                <a16:creationId xmlns:a16="http://schemas.microsoft.com/office/drawing/2014/main" id="{B581054D-3DDF-4BF2-9797-A7709186DDD2}"/>
+              </a:ext>
+            </a:extLst>
+          </p:cNvPr>
+          <p:cNvSpPr txBox="1"/>
+          <p:nvPr/>
+        </p:nvSpPr>
+        <p:spPr>
+          <a:xfrm>
+            <a:off x="8708705" y="3847068"/>
+            <a:ext cx="855677" cy="369332"/>
+          </a:xfrm>
+          <a:prstGeom prst="rect">
+            <a:avLst/>
+          </a:prstGeom>
+          <a:noFill/>
+        </p:spPr>
+        <p:txBody>
+          <a:bodyPr wrap="square" rtlCol="0">
+            <a:spAutoFit/>
+          </a:bodyPr>
+          <a:lstStyle/>
+          <a:p>
+            <a:pPr algn="ctr"/>
+            <a:r>
+              <a:rPr lang="en-US" altLang="zh-TW" dirty="0">
+                <a:solidFill>
+                  <a:srgbClr val="FF0000"/>
+                </a:solidFill>
+                <a:latin typeface="Times New Roman" panose="02020603050405020304" pitchFamily="18" charset="0"/>
+                <a:cs typeface="Times New Roman" panose="02020603050405020304" pitchFamily="18" charset="0"/>
+              </a:rPr>
+              <a:t>2026</a:t>
+            </a:r>
+            <a:endParaRPr lang="zh-TW" altLang="en-US" dirty="0">
+              <a:solidFill>
+                <a:srgbClr val="FF0000"/>
+              </a:solidFill>
+              <a:latin typeface="Times New Roman" panose="02020603050405020304" pitchFamily="18" charset="0"/>
+              <a:cs typeface="Times New Roman" panose="02020603050405020304" pitchFamily="18" charset="0"/>
+            </a:endParaRPr>
+          </a:p>
+        </p:txBody>
+      </p:sp>
+      <p:sp>
+        <p:nvSpPr>
+          <p:cNvPr id="15" name="文字方塊 14">
+            <a:extLst>
+              <a:ext uri="{FF2B5EF4-FFF2-40B4-BE49-F238E27FC236}">
+                <a16:creationId xmlns:a16="http://schemas.microsoft.com/office/drawing/2014/main" id="{E0519AC0-E20A-4D1E-A88A-7AE6C894A583}"/>
+              </a:ext>
+            </a:extLst>
+          </p:cNvPr>
+          <p:cNvSpPr txBox="1"/>
+          <p:nvPr/>
+        </p:nvSpPr>
+        <p:spPr>
+          <a:xfrm>
+            <a:off x="3103575" y="5236704"/>
+            <a:ext cx="855677" cy="369332"/>
+          </a:xfrm>
+          <a:prstGeom prst="rect">
+            <a:avLst/>
+          </a:prstGeom>
+          <a:noFill/>
+        </p:spPr>
+        <p:txBody>
+          <a:bodyPr wrap="square" rtlCol="0">
+            <a:spAutoFit/>
+          </a:bodyPr>
+          <a:lstStyle/>
+          <a:p>
+            <a:pPr algn="ctr"/>
+            <a:r>
+              <a:rPr lang="en-US" altLang="zh-TW" dirty="0">
+                <a:solidFill>
+                  <a:srgbClr val="FF0000"/>
+                </a:solidFill>
+                <a:latin typeface="Times New Roman" panose="02020603050405020304" pitchFamily="18" charset="0"/>
+                <a:cs typeface="Times New Roman" panose="02020603050405020304" pitchFamily="18" charset="0"/>
+              </a:rPr>
+              <a:t>2019</a:t>
+            </a:r>
+            <a:endParaRPr lang="zh-TW" altLang="en-US" dirty="0">
+              <a:solidFill>
+                <a:srgbClr val="FF0000"/>
+              </a:solidFill>
+              <a:latin typeface="Times New Roman" panose="02020603050405020304" pitchFamily="18" charset="0"/>
+              <a:cs typeface="Times New Roman" panose="02020603050405020304" pitchFamily="18" charset="0"/>
+            </a:endParaRPr>
+          </a:p>
+        </p:txBody>
+      </p:sp>
+      <p:sp>
+        <p:nvSpPr>
+          <p:cNvPr id="16" name="文字方塊 15">
+            <a:extLst>
+              <a:ext uri="{FF2B5EF4-FFF2-40B4-BE49-F238E27FC236}">
+                <a16:creationId xmlns:a16="http://schemas.microsoft.com/office/drawing/2014/main" id="{68B178DD-B111-4D35-BE1F-F3FF1085E67A}"/>
+              </a:ext>
+            </a:extLst>
+          </p:cNvPr>
+          <p:cNvSpPr txBox="1"/>
+          <p:nvPr/>
+        </p:nvSpPr>
+        <p:spPr>
+          <a:xfrm>
+            <a:off x="5016265" y="3847068"/>
+            <a:ext cx="855677" cy="369332"/>
+          </a:xfrm>
+          <a:prstGeom prst="rect">
+            <a:avLst/>
+          </a:prstGeom>
+          <a:noFill/>
+        </p:spPr>
+        <p:txBody>
+          <a:bodyPr wrap="square" rtlCol="0">
+            <a:spAutoFit/>
+          </a:bodyPr>
+          <a:lstStyle/>
+          <a:p>
+            <a:pPr algn="ctr"/>
+            <a:r>
+              <a:rPr lang="en-US" altLang="zh-TW" dirty="0">
+                <a:solidFill>
+                  <a:srgbClr val="FF0000"/>
+                </a:solidFill>
+                <a:latin typeface="Times New Roman" panose="02020603050405020304" pitchFamily="18" charset="0"/>
+                <a:cs typeface="Times New Roman" panose="02020603050405020304" pitchFamily="18" charset="0"/>
+              </a:rPr>
+              <a:t>20XX</a:t>
+            </a:r>
+            <a:endParaRPr lang="zh-TW" altLang="en-US" dirty="0">
+              <a:solidFill>
+                <a:srgbClr val="FF0000"/>
+              </a:solidFill>
+              <a:latin typeface="Times New Roman" panose="02020603050405020304" pitchFamily="18" charset="0"/>
               <a:cs typeface="Times New Roman" panose="02020603050405020304" pitchFamily="18" charset="0"/>
             </a:endParaRPr>
           </a:p>
@@ -9952,7 +13389,7 @@
     </p:spTree>
     <p:extLst>
       <p:ext uri="{BB962C8B-B14F-4D97-AF65-F5344CB8AC3E}">
-        <p14:creationId xmlns:p14="http://schemas.microsoft.com/office/powerpoint/2010/main" val="1128931381"/>
+        <p14:creationId xmlns:p14="http://schemas.microsoft.com/office/powerpoint/2010/main" val="1904621165"/>
       </p:ext>
     </p:extLst>
   </p:cSld>

--- a/資訊檢索系統期末專案.pptx
+++ b/資訊檢索系統期末專案.pptx
@@ -12,10 +12,19 @@
     <p:sldId id="261" r:id="rId6"/>
     <p:sldId id="264" r:id="rId7"/>
     <p:sldId id="265" r:id="rId8"/>
-    <p:sldId id="266" r:id="rId9"/>
-    <p:sldId id="267" r:id="rId10"/>
-    <p:sldId id="268" r:id="rId11"/>
-    <p:sldId id="258" r:id="rId12"/>
+    <p:sldId id="268" r:id="rId9"/>
+    <p:sldId id="269" r:id="rId10"/>
+    <p:sldId id="279" r:id="rId11"/>
+    <p:sldId id="270" r:id="rId12"/>
+    <p:sldId id="271" r:id="rId13"/>
+    <p:sldId id="273" r:id="rId14"/>
+    <p:sldId id="258" r:id="rId15"/>
+    <p:sldId id="274" r:id="rId16"/>
+    <p:sldId id="275" r:id="rId17"/>
+    <p:sldId id="276" r:id="rId18"/>
+    <p:sldId id="277" r:id="rId19"/>
+    <p:sldId id="278" r:id="rId20"/>
+    <p:sldId id="280" r:id="rId21"/>
   </p:sldIdLst>
   <p:sldSz cx="12192000" cy="6858000"/>
   <p:notesSz cx="6858000" cy="9144000"/>
@@ -123,753 +132,6 @@
 </file>
 
 <file path=ppt/diagrams/colors1.xml><?xml version="1.0" encoding="utf-8"?>
-<dgm:colorsDef xmlns:dgm="http://schemas.openxmlformats.org/drawingml/2006/diagram" xmlns:a="http://schemas.openxmlformats.org/drawingml/2006/main" uniqueId="urn:microsoft.com/office/officeart/2005/8/colors/accent1_2">
-  <dgm:title val=""/>
-  <dgm:desc val=""/>
-  <dgm:catLst>
-    <dgm:cat type="accent1" pri="11200"/>
-  </dgm:catLst>
-  <dgm:styleLbl name="node0">
-    <dgm:fillClrLst meth="repeat">
-      <a:schemeClr val="accent1"/>
-    </dgm:fillClrLst>
-    <dgm:linClrLst meth="repeat">
-      <a:schemeClr val="lt1"/>
-    </dgm:linClrLst>
-    <dgm:effectClrLst/>
-    <dgm:txLinClrLst/>
-    <dgm:txFillClrLst/>
-    <dgm:txEffectClrLst/>
-  </dgm:styleLbl>
-  <dgm:styleLbl name="alignNode1">
-    <dgm:fillClrLst meth="repeat">
-      <a:schemeClr val="accent1"/>
-    </dgm:fillClrLst>
-    <dgm:linClrLst meth="repeat">
-      <a:schemeClr val="accent1"/>
-    </dgm:linClrLst>
-    <dgm:effectClrLst/>
-    <dgm:txLinClrLst/>
-    <dgm:txFillClrLst/>
-    <dgm:txEffectClrLst/>
-  </dgm:styleLbl>
-  <dgm:styleLbl name="node1">
-    <dgm:fillClrLst meth="repeat">
-      <a:schemeClr val="accent1"/>
-    </dgm:fillClrLst>
-    <dgm:linClrLst meth="repeat">
-      <a:schemeClr val="lt1"/>
-    </dgm:linClrLst>
-    <dgm:effectClrLst/>
-    <dgm:txLinClrLst/>
-    <dgm:txFillClrLst/>
-    <dgm:txEffectClrLst/>
-  </dgm:styleLbl>
-  <dgm:styleLbl name="lnNode1">
-    <dgm:fillClrLst meth="repeat">
-      <a:schemeClr val="accent1"/>
-    </dgm:fillClrLst>
-    <dgm:linClrLst meth="repeat">
-      <a:schemeClr val="lt1"/>
-    </dgm:linClrLst>
-    <dgm:effectClrLst/>
-    <dgm:txLinClrLst/>
-    <dgm:txFillClrLst/>
-    <dgm:txEffectClrLst/>
-  </dgm:styleLbl>
-  <dgm:styleLbl name="vennNode1">
-    <dgm:fillClrLst meth="repeat">
-      <a:schemeClr val="accent1">
-        <a:alpha val="50000"/>
-      </a:schemeClr>
-    </dgm:fillClrLst>
-    <dgm:linClrLst meth="repeat">
-      <a:schemeClr val="lt1"/>
-    </dgm:linClrLst>
-    <dgm:effectClrLst/>
-    <dgm:txLinClrLst/>
-    <dgm:txFillClrLst/>
-    <dgm:txEffectClrLst/>
-  </dgm:styleLbl>
-  <dgm:styleLbl name="node2">
-    <dgm:fillClrLst meth="repeat">
-      <a:schemeClr val="accent1"/>
-    </dgm:fillClrLst>
-    <dgm:linClrLst meth="repeat">
-      <a:schemeClr val="lt1"/>
-    </dgm:linClrLst>
-    <dgm:effectClrLst/>
-    <dgm:txLinClrLst/>
-    <dgm:txFillClrLst/>
-    <dgm:txEffectClrLst/>
-  </dgm:styleLbl>
-  <dgm:styleLbl name="node3">
-    <dgm:fillClrLst meth="repeat">
-      <a:schemeClr val="accent1"/>
-    </dgm:fillClrLst>
-    <dgm:linClrLst meth="repeat">
-      <a:schemeClr val="lt1"/>
-    </dgm:linClrLst>
-    <dgm:effectClrLst/>
-    <dgm:txLinClrLst/>
-    <dgm:txFillClrLst/>
-    <dgm:txEffectClrLst/>
-  </dgm:styleLbl>
-  <dgm:styleLbl name="node4">
-    <dgm:fillClrLst meth="repeat">
-      <a:schemeClr val="accent1"/>
-    </dgm:fillClrLst>
-    <dgm:linClrLst meth="repeat">
-      <a:schemeClr val="lt1"/>
-    </dgm:linClrLst>
-    <dgm:effectClrLst/>
-    <dgm:txLinClrLst/>
-    <dgm:txFillClrLst/>
-    <dgm:txEffectClrLst/>
-  </dgm:styleLbl>
-  <dgm:styleLbl name="fgImgPlace1">
-    <dgm:fillClrLst meth="repeat">
-      <a:schemeClr val="accent1">
-        <a:tint val="50000"/>
-      </a:schemeClr>
-    </dgm:fillClrLst>
-    <dgm:linClrLst meth="repeat">
-      <a:schemeClr val="lt1"/>
-    </dgm:linClrLst>
-    <dgm:effectClrLst/>
-    <dgm:txLinClrLst/>
-    <dgm:txFillClrLst meth="repeat">
-      <a:schemeClr val="lt1"/>
-    </dgm:txFillClrLst>
-    <dgm:txEffectClrLst/>
-  </dgm:styleLbl>
-  <dgm:styleLbl name="alignImgPlace1">
-    <dgm:fillClrLst meth="repeat">
-      <a:schemeClr val="accent1">
-        <a:tint val="50000"/>
-      </a:schemeClr>
-    </dgm:fillClrLst>
-    <dgm:linClrLst meth="repeat">
-      <a:schemeClr val="lt1"/>
-    </dgm:linClrLst>
-    <dgm:effectClrLst/>
-    <dgm:txLinClrLst/>
-    <dgm:txFillClrLst meth="repeat">
-      <a:schemeClr val="lt1"/>
-    </dgm:txFillClrLst>
-    <dgm:txEffectClrLst/>
-  </dgm:styleLbl>
-  <dgm:styleLbl name="bgImgPlace1">
-    <dgm:fillClrLst meth="repeat">
-      <a:schemeClr val="accent1">
-        <a:tint val="50000"/>
-      </a:schemeClr>
-    </dgm:fillClrLst>
-    <dgm:linClrLst meth="repeat">
-      <a:schemeClr val="lt1"/>
-    </dgm:linClrLst>
-    <dgm:effectClrLst/>
-    <dgm:txLinClrLst/>
-    <dgm:txFillClrLst meth="repeat">
-      <a:schemeClr val="lt1"/>
-    </dgm:txFillClrLst>
-    <dgm:txEffectClrLst/>
-  </dgm:styleLbl>
-  <dgm:styleLbl name="sibTrans2D1">
-    <dgm:fillClrLst meth="repeat">
-      <a:schemeClr val="accent1">
-        <a:tint val="60000"/>
-      </a:schemeClr>
-    </dgm:fillClrLst>
-    <dgm:linClrLst meth="repeat">
-      <a:schemeClr val="accent1">
-        <a:tint val="60000"/>
-      </a:schemeClr>
-    </dgm:linClrLst>
-    <dgm:effectClrLst/>
-    <dgm:txLinClrLst/>
-    <dgm:txFillClrLst/>
-    <dgm:txEffectClrLst/>
-  </dgm:styleLbl>
-  <dgm:styleLbl name="fgSibTrans2D1">
-    <dgm:fillClrLst meth="repeat">
-      <a:schemeClr val="accent1">
-        <a:tint val="60000"/>
-      </a:schemeClr>
-    </dgm:fillClrLst>
-    <dgm:linClrLst meth="repeat">
-      <a:schemeClr val="accent1">
-        <a:tint val="60000"/>
-      </a:schemeClr>
-    </dgm:linClrLst>
-    <dgm:effectClrLst/>
-    <dgm:txLinClrLst/>
-    <dgm:txFillClrLst/>
-    <dgm:txEffectClrLst/>
-  </dgm:styleLbl>
-  <dgm:styleLbl name="bgSibTrans2D1">
-    <dgm:fillClrLst meth="repeat">
-      <a:schemeClr val="accent1">
-        <a:tint val="60000"/>
-      </a:schemeClr>
-    </dgm:fillClrLst>
-    <dgm:linClrLst meth="repeat">
-      <a:schemeClr val="accent1">
-        <a:tint val="60000"/>
-      </a:schemeClr>
-    </dgm:linClrLst>
-    <dgm:effectClrLst/>
-    <dgm:txLinClrLst/>
-    <dgm:txFillClrLst/>
-    <dgm:txEffectClrLst/>
-  </dgm:styleLbl>
-  <dgm:styleLbl name="sibTrans1D1">
-    <dgm:fillClrLst meth="repeat">
-      <a:schemeClr val="accent1"/>
-    </dgm:fillClrLst>
-    <dgm:linClrLst meth="repeat">
-      <a:schemeClr val="accent1"/>
-    </dgm:linClrLst>
-    <dgm:effectClrLst/>
-    <dgm:txLinClrLst/>
-    <dgm:txFillClrLst meth="repeat">
-      <a:schemeClr val="tx1"/>
-    </dgm:txFillClrLst>
-    <dgm:txEffectClrLst/>
-  </dgm:styleLbl>
-  <dgm:styleLbl name="callout">
-    <dgm:fillClrLst meth="repeat">
-      <a:schemeClr val="accent1"/>
-    </dgm:fillClrLst>
-    <dgm:linClrLst meth="repeat">
-      <a:schemeClr val="accent1">
-        <a:tint val="50000"/>
-      </a:schemeClr>
-    </dgm:linClrLst>
-    <dgm:effectClrLst/>
-    <dgm:txLinClrLst/>
-    <dgm:txFillClrLst meth="repeat">
-      <a:schemeClr val="tx1"/>
-    </dgm:txFillClrLst>
-    <dgm:txEffectClrLst/>
-  </dgm:styleLbl>
-  <dgm:styleLbl name="asst0">
-    <dgm:fillClrLst meth="repeat">
-      <a:schemeClr val="accent1"/>
-    </dgm:fillClrLst>
-    <dgm:linClrLst meth="repeat">
-      <a:schemeClr val="lt1"/>
-    </dgm:linClrLst>
-    <dgm:effectClrLst/>
-    <dgm:txLinClrLst/>
-    <dgm:txFillClrLst/>
-    <dgm:txEffectClrLst/>
-  </dgm:styleLbl>
-  <dgm:styleLbl name="asst1">
-    <dgm:fillClrLst meth="repeat">
-      <a:schemeClr val="accent1"/>
-    </dgm:fillClrLst>
-    <dgm:linClrLst meth="repeat">
-      <a:schemeClr val="lt1"/>
-    </dgm:linClrLst>
-    <dgm:effectClrLst/>
-    <dgm:txLinClrLst/>
-    <dgm:txFillClrLst/>
-    <dgm:txEffectClrLst/>
-  </dgm:styleLbl>
-  <dgm:styleLbl name="asst2">
-    <dgm:fillClrLst meth="repeat">
-      <a:schemeClr val="accent1"/>
-    </dgm:fillClrLst>
-    <dgm:linClrLst meth="repeat">
-      <a:schemeClr val="lt1"/>
-    </dgm:linClrLst>
-    <dgm:effectClrLst/>
-    <dgm:txLinClrLst/>
-    <dgm:txFillClrLst/>
-    <dgm:txEffectClrLst/>
-  </dgm:styleLbl>
-  <dgm:styleLbl name="asst3">
-    <dgm:fillClrLst meth="repeat">
-      <a:schemeClr val="accent1"/>
-    </dgm:fillClrLst>
-    <dgm:linClrLst meth="repeat">
-      <a:schemeClr val="lt1"/>
-    </dgm:linClrLst>
-    <dgm:effectClrLst/>
-    <dgm:txLinClrLst/>
-    <dgm:txFillClrLst/>
-    <dgm:txEffectClrLst/>
-  </dgm:styleLbl>
-  <dgm:styleLbl name="asst4">
-    <dgm:fillClrLst meth="repeat">
-      <a:schemeClr val="accent1"/>
-    </dgm:fillClrLst>
-    <dgm:linClrLst meth="repeat">
-      <a:schemeClr val="lt1"/>
-    </dgm:linClrLst>
-    <dgm:effectClrLst/>
-    <dgm:txLinClrLst/>
-    <dgm:txFillClrLst/>
-    <dgm:txEffectClrLst/>
-  </dgm:styleLbl>
-  <dgm:styleLbl name="parChTrans2D1">
-    <dgm:fillClrLst meth="repeat">
-      <a:schemeClr val="accent1">
-        <a:tint val="60000"/>
-      </a:schemeClr>
-    </dgm:fillClrLst>
-    <dgm:linClrLst meth="repeat">
-      <a:schemeClr val="accent1">
-        <a:tint val="60000"/>
-      </a:schemeClr>
-    </dgm:linClrLst>
-    <dgm:effectClrLst/>
-    <dgm:txLinClrLst/>
-    <dgm:txFillClrLst meth="repeat">
-      <a:schemeClr val="lt1"/>
-    </dgm:txFillClrLst>
-    <dgm:txEffectClrLst/>
-  </dgm:styleLbl>
-  <dgm:styleLbl name="parChTrans2D2">
-    <dgm:fillClrLst meth="repeat">
-      <a:schemeClr val="accent1"/>
-    </dgm:fillClrLst>
-    <dgm:linClrLst meth="repeat">
-      <a:schemeClr val="accent1"/>
-    </dgm:linClrLst>
-    <dgm:effectClrLst/>
-    <dgm:txLinClrLst/>
-    <dgm:txFillClrLst meth="repeat">
-      <a:schemeClr val="lt1"/>
-    </dgm:txFillClrLst>
-    <dgm:txEffectClrLst/>
-  </dgm:styleLbl>
-  <dgm:styleLbl name="parChTrans2D3">
-    <dgm:fillClrLst meth="repeat">
-      <a:schemeClr val="accent1"/>
-    </dgm:fillClrLst>
-    <dgm:linClrLst meth="repeat">
-      <a:schemeClr val="accent1"/>
-    </dgm:linClrLst>
-    <dgm:effectClrLst/>
-    <dgm:txLinClrLst/>
-    <dgm:txFillClrLst meth="repeat">
-      <a:schemeClr val="lt1"/>
-    </dgm:txFillClrLst>
-    <dgm:txEffectClrLst/>
-  </dgm:styleLbl>
-  <dgm:styleLbl name="parChTrans2D4">
-    <dgm:fillClrLst meth="repeat">
-      <a:schemeClr val="accent1"/>
-    </dgm:fillClrLst>
-    <dgm:linClrLst meth="repeat">
-      <a:schemeClr val="accent1"/>
-    </dgm:linClrLst>
-    <dgm:effectClrLst/>
-    <dgm:txLinClrLst/>
-    <dgm:txFillClrLst meth="repeat">
-      <a:schemeClr val="lt1"/>
-    </dgm:txFillClrLst>
-    <dgm:txEffectClrLst/>
-  </dgm:styleLbl>
-  <dgm:styleLbl name="parChTrans1D1">
-    <dgm:fillClrLst meth="repeat">
-      <a:schemeClr val="accent1"/>
-    </dgm:fillClrLst>
-    <dgm:linClrLst meth="repeat">
-      <a:schemeClr val="accent1">
-        <a:shade val="60000"/>
-      </a:schemeClr>
-    </dgm:linClrLst>
-    <dgm:effectClrLst/>
-    <dgm:txLinClrLst/>
-    <dgm:txFillClrLst meth="repeat">
-      <a:schemeClr val="tx1"/>
-    </dgm:txFillClrLst>
-    <dgm:txEffectClrLst/>
-  </dgm:styleLbl>
-  <dgm:styleLbl name="parChTrans1D2">
-    <dgm:fillClrLst meth="repeat">
-      <a:schemeClr val="accent1"/>
-    </dgm:fillClrLst>
-    <dgm:linClrLst meth="repeat">
-      <a:schemeClr val="accent1">
-        <a:shade val="60000"/>
-      </a:schemeClr>
-    </dgm:linClrLst>
-    <dgm:effectClrLst/>
-    <dgm:txLinClrLst/>
-    <dgm:txFillClrLst meth="repeat">
-      <a:schemeClr val="tx1"/>
-    </dgm:txFillClrLst>
-    <dgm:txEffectClrLst/>
-  </dgm:styleLbl>
-  <dgm:styleLbl name="parChTrans1D3">
-    <dgm:fillClrLst meth="repeat">
-      <a:schemeClr val="accent1"/>
-    </dgm:fillClrLst>
-    <dgm:linClrLst meth="repeat">
-      <a:schemeClr val="accent1">
-        <a:shade val="80000"/>
-      </a:schemeClr>
-    </dgm:linClrLst>
-    <dgm:effectClrLst/>
-    <dgm:txLinClrLst/>
-    <dgm:txFillClrLst meth="repeat">
-      <a:schemeClr val="tx1"/>
-    </dgm:txFillClrLst>
-    <dgm:txEffectClrLst/>
-  </dgm:styleLbl>
-  <dgm:styleLbl name="parChTrans1D4">
-    <dgm:fillClrLst meth="repeat">
-      <a:schemeClr val="accent1"/>
-    </dgm:fillClrLst>
-    <dgm:linClrLst meth="repeat">
-      <a:schemeClr val="accent1">
-        <a:shade val="80000"/>
-      </a:schemeClr>
-    </dgm:linClrLst>
-    <dgm:effectClrLst/>
-    <dgm:txLinClrLst/>
-    <dgm:txFillClrLst meth="repeat">
-      <a:schemeClr val="tx1"/>
-    </dgm:txFillClrLst>
-    <dgm:txEffectClrLst/>
-  </dgm:styleLbl>
-  <dgm:styleLbl name="fgAcc1">
-    <dgm:fillClrLst meth="repeat">
-      <a:schemeClr val="lt1">
-        <a:alpha val="90000"/>
-      </a:schemeClr>
-    </dgm:fillClrLst>
-    <dgm:linClrLst meth="repeat">
-      <a:schemeClr val="accent1"/>
-    </dgm:linClrLst>
-    <dgm:effectClrLst/>
-    <dgm:txLinClrLst/>
-    <dgm:txFillClrLst meth="repeat">
-      <a:schemeClr val="dk1"/>
-    </dgm:txFillClrLst>
-    <dgm:txEffectClrLst/>
-  </dgm:styleLbl>
-  <dgm:styleLbl name="conFgAcc1">
-    <dgm:fillClrLst meth="repeat">
-      <a:schemeClr val="lt1">
-        <a:alpha val="90000"/>
-      </a:schemeClr>
-    </dgm:fillClrLst>
-    <dgm:linClrLst meth="repeat">
-      <a:schemeClr val="accent1"/>
-    </dgm:linClrLst>
-    <dgm:effectClrLst/>
-    <dgm:txLinClrLst/>
-    <dgm:txFillClrLst meth="repeat">
-      <a:schemeClr val="dk1"/>
-    </dgm:txFillClrLst>
-    <dgm:txEffectClrLst/>
-  </dgm:styleLbl>
-  <dgm:styleLbl name="alignAcc1">
-    <dgm:fillClrLst meth="repeat">
-      <a:schemeClr val="lt1">
-        <a:alpha val="90000"/>
-      </a:schemeClr>
-    </dgm:fillClrLst>
-    <dgm:linClrLst meth="repeat">
-      <a:schemeClr val="accent1"/>
-    </dgm:linClrLst>
-    <dgm:effectClrLst/>
-    <dgm:txLinClrLst/>
-    <dgm:txFillClrLst meth="repeat">
-      <a:schemeClr val="dk1"/>
-    </dgm:txFillClrLst>
-    <dgm:txEffectClrLst/>
-  </dgm:styleLbl>
-  <dgm:styleLbl name="trAlignAcc1">
-    <dgm:fillClrLst meth="repeat">
-      <a:schemeClr val="lt1">
-        <a:alpha val="40000"/>
-      </a:schemeClr>
-    </dgm:fillClrLst>
-    <dgm:linClrLst meth="repeat">
-      <a:schemeClr val="accent1"/>
-    </dgm:linClrLst>
-    <dgm:effectClrLst/>
-    <dgm:txLinClrLst/>
-    <dgm:txFillClrLst meth="repeat">
-      <a:schemeClr val="dk1"/>
-    </dgm:txFillClrLst>
-    <dgm:txEffectClrLst/>
-  </dgm:styleLbl>
-  <dgm:styleLbl name="bgAcc1">
-    <dgm:fillClrLst meth="repeat">
-      <a:schemeClr val="lt1">
-        <a:alpha val="90000"/>
-      </a:schemeClr>
-    </dgm:fillClrLst>
-    <dgm:linClrLst meth="repeat">
-      <a:schemeClr val="accent1"/>
-    </dgm:linClrLst>
-    <dgm:effectClrLst/>
-    <dgm:txLinClrLst/>
-    <dgm:txFillClrLst meth="repeat">
-      <a:schemeClr val="dk1"/>
-    </dgm:txFillClrLst>
-    <dgm:txEffectClrLst/>
-  </dgm:styleLbl>
-  <dgm:styleLbl name="solidFgAcc1">
-    <dgm:fillClrLst meth="repeat">
-      <a:schemeClr val="lt1"/>
-    </dgm:fillClrLst>
-    <dgm:linClrLst meth="repeat">
-      <a:schemeClr val="accent1"/>
-    </dgm:linClrLst>
-    <dgm:effectClrLst/>
-    <dgm:txLinClrLst/>
-    <dgm:txFillClrLst meth="repeat">
-      <a:schemeClr val="dk1"/>
-    </dgm:txFillClrLst>
-    <dgm:txEffectClrLst/>
-  </dgm:styleLbl>
-  <dgm:styleLbl name="solidAlignAcc1">
-    <dgm:fillClrLst meth="repeat">
-      <a:schemeClr val="lt1"/>
-    </dgm:fillClrLst>
-    <dgm:linClrLst meth="repeat">
-      <a:schemeClr val="accent1"/>
-    </dgm:linClrLst>
-    <dgm:effectClrLst/>
-    <dgm:txLinClrLst/>
-    <dgm:txFillClrLst meth="repeat">
-      <a:schemeClr val="dk1"/>
-    </dgm:txFillClrLst>
-    <dgm:txEffectClrLst/>
-  </dgm:styleLbl>
-  <dgm:styleLbl name="solidBgAcc1">
-    <dgm:fillClrLst meth="repeat">
-      <a:schemeClr val="lt1"/>
-    </dgm:fillClrLst>
-    <dgm:linClrLst meth="repeat">
-      <a:schemeClr val="accent1"/>
-    </dgm:linClrLst>
-    <dgm:effectClrLst/>
-    <dgm:txLinClrLst/>
-    <dgm:txFillClrLst meth="repeat">
-      <a:schemeClr val="dk1"/>
-    </dgm:txFillClrLst>
-    <dgm:txEffectClrLst/>
-  </dgm:styleLbl>
-  <dgm:styleLbl name="fgAccFollowNode1">
-    <dgm:fillClrLst meth="repeat">
-      <a:schemeClr val="accent1">
-        <a:alpha val="90000"/>
-        <a:tint val="40000"/>
-      </a:schemeClr>
-    </dgm:fillClrLst>
-    <dgm:linClrLst meth="repeat">
-      <a:schemeClr val="accent1">
-        <a:alpha val="90000"/>
-        <a:tint val="40000"/>
-      </a:schemeClr>
-    </dgm:linClrLst>
-    <dgm:effectClrLst/>
-    <dgm:txLinClrLst/>
-    <dgm:txFillClrLst meth="repeat">
-      <a:schemeClr val="dk1"/>
-    </dgm:txFillClrLst>
-    <dgm:txEffectClrLst/>
-  </dgm:styleLbl>
-  <dgm:styleLbl name="alignAccFollowNode1">
-    <dgm:fillClrLst meth="repeat">
-      <a:schemeClr val="accent1">
-        <a:alpha val="90000"/>
-        <a:tint val="40000"/>
-      </a:schemeClr>
-    </dgm:fillClrLst>
-    <dgm:linClrLst meth="repeat">
-      <a:schemeClr val="accent1">
-        <a:alpha val="90000"/>
-        <a:tint val="40000"/>
-      </a:schemeClr>
-    </dgm:linClrLst>
-    <dgm:effectClrLst/>
-    <dgm:txLinClrLst/>
-    <dgm:txFillClrLst meth="repeat">
-      <a:schemeClr val="dk1"/>
-    </dgm:txFillClrLst>
-    <dgm:txEffectClrLst/>
-  </dgm:styleLbl>
-  <dgm:styleLbl name="bgAccFollowNode1">
-    <dgm:fillClrLst meth="repeat">
-      <a:schemeClr val="accent1">
-        <a:alpha val="90000"/>
-        <a:tint val="40000"/>
-      </a:schemeClr>
-    </dgm:fillClrLst>
-    <dgm:linClrLst meth="repeat">
-      <a:schemeClr val="accent1">
-        <a:alpha val="90000"/>
-        <a:tint val="40000"/>
-      </a:schemeClr>
-    </dgm:linClrLst>
-    <dgm:effectClrLst/>
-    <dgm:txLinClrLst/>
-    <dgm:txFillClrLst meth="repeat">
-      <a:schemeClr val="dk1"/>
-    </dgm:txFillClrLst>
-    <dgm:txEffectClrLst/>
-  </dgm:styleLbl>
-  <dgm:styleLbl name="fgAcc0">
-    <dgm:fillClrLst meth="repeat">
-      <a:schemeClr val="lt1">
-        <a:alpha val="90000"/>
-      </a:schemeClr>
-    </dgm:fillClrLst>
-    <dgm:linClrLst meth="repeat">
-      <a:schemeClr val="accent1"/>
-    </dgm:linClrLst>
-    <dgm:effectClrLst/>
-    <dgm:txLinClrLst/>
-    <dgm:txFillClrLst meth="repeat">
-      <a:schemeClr val="dk1"/>
-    </dgm:txFillClrLst>
-    <dgm:txEffectClrLst/>
-  </dgm:styleLbl>
-  <dgm:styleLbl name="fgAcc2">
-    <dgm:fillClrLst meth="repeat">
-      <a:schemeClr val="lt1">
-        <a:alpha val="90000"/>
-      </a:schemeClr>
-    </dgm:fillClrLst>
-    <dgm:linClrLst meth="repeat">
-      <a:schemeClr val="accent1"/>
-    </dgm:linClrLst>
-    <dgm:effectClrLst/>
-    <dgm:txLinClrLst/>
-    <dgm:txFillClrLst meth="repeat">
-      <a:schemeClr val="dk1"/>
-    </dgm:txFillClrLst>
-    <dgm:txEffectClrLst/>
-  </dgm:styleLbl>
-  <dgm:styleLbl name="fgAcc3">
-    <dgm:fillClrLst meth="repeat">
-      <a:schemeClr val="lt1">
-        <a:alpha val="90000"/>
-      </a:schemeClr>
-    </dgm:fillClrLst>
-    <dgm:linClrLst meth="repeat">
-      <a:schemeClr val="accent1"/>
-    </dgm:linClrLst>
-    <dgm:effectClrLst/>
-    <dgm:txLinClrLst/>
-    <dgm:txFillClrLst meth="repeat">
-      <a:schemeClr val="dk1"/>
-    </dgm:txFillClrLst>
-    <dgm:txEffectClrLst/>
-  </dgm:styleLbl>
-  <dgm:styleLbl name="fgAcc4">
-    <dgm:fillClrLst meth="repeat">
-      <a:schemeClr val="lt1">
-        <a:alpha val="90000"/>
-      </a:schemeClr>
-    </dgm:fillClrLst>
-    <dgm:linClrLst meth="repeat">
-      <a:schemeClr val="accent1"/>
-    </dgm:linClrLst>
-    <dgm:effectClrLst/>
-    <dgm:txLinClrLst/>
-    <dgm:txFillClrLst meth="repeat">
-      <a:schemeClr val="dk1"/>
-    </dgm:txFillClrLst>
-    <dgm:txEffectClrLst/>
-  </dgm:styleLbl>
-  <dgm:styleLbl name="bgShp">
-    <dgm:fillClrLst meth="repeat">
-      <a:schemeClr val="accent1">
-        <a:tint val="40000"/>
-      </a:schemeClr>
-    </dgm:fillClrLst>
-    <dgm:linClrLst meth="repeat">
-      <a:schemeClr val="accent1"/>
-    </dgm:linClrLst>
-    <dgm:effectClrLst/>
-    <dgm:txLinClrLst/>
-    <dgm:txFillClrLst meth="repeat">
-      <a:schemeClr val="dk1"/>
-    </dgm:txFillClrLst>
-    <dgm:txEffectClrLst/>
-  </dgm:styleLbl>
-  <dgm:styleLbl name="dkBgShp">
-    <dgm:fillClrLst meth="repeat">
-      <a:schemeClr val="accent1">
-        <a:shade val="80000"/>
-      </a:schemeClr>
-    </dgm:fillClrLst>
-    <dgm:linClrLst meth="repeat">
-      <a:schemeClr val="accent1"/>
-    </dgm:linClrLst>
-    <dgm:effectClrLst/>
-    <dgm:txLinClrLst/>
-    <dgm:txFillClrLst meth="repeat">
-      <a:schemeClr val="lt1"/>
-    </dgm:txFillClrLst>
-    <dgm:txEffectClrLst/>
-  </dgm:styleLbl>
-  <dgm:styleLbl name="trBgShp">
-    <dgm:fillClrLst meth="repeat">
-      <a:schemeClr val="accent1">
-        <a:tint val="50000"/>
-        <a:alpha val="40000"/>
-      </a:schemeClr>
-    </dgm:fillClrLst>
-    <dgm:linClrLst meth="repeat">
-      <a:schemeClr val="accent1"/>
-    </dgm:linClrLst>
-    <dgm:effectClrLst/>
-    <dgm:txLinClrLst/>
-    <dgm:txFillClrLst meth="repeat">
-      <a:schemeClr val="lt1"/>
-    </dgm:txFillClrLst>
-    <dgm:txEffectClrLst/>
-  </dgm:styleLbl>
-  <dgm:styleLbl name="fgShp">
-    <dgm:fillClrLst meth="repeat">
-      <a:schemeClr val="accent1">
-        <a:tint val="60000"/>
-      </a:schemeClr>
-    </dgm:fillClrLst>
-    <dgm:linClrLst meth="repeat">
-      <a:schemeClr val="lt1"/>
-    </dgm:linClrLst>
-    <dgm:effectClrLst/>
-    <dgm:txLinClrLst/>
-    <dgm:txFillClrLst meth="repeat">
-      <a:schemeClr val="dk1"/>
-    </dgm:txFillClrLst>
-    <dgm:txEffectClrLst/>
-  </dgm:styleLbl>
-  <dgm:styleLbl name="revTx">
-    <dgm:fillClrLst meth="repeat">
-      <a:schemeClr val="lt1">
-        <a:alpha val="0"/>
-      </a:schemeClr>
-    </dgm:fillClrLst>
-    <dgm:linClrLst meth="repeat">
-      <a:schemeClr val="dk1">
-        <a:alpha val="0"/>
-      </a:schemeClr>
-    </dgm:linClrLst>
-    <dgm:effectClrLst/>
-    <dgm:txLinClrLst/>
-    <dgm:txFillClrLst meth="repeat">
-      <a:schemeClr val="tx1"/>
-    </dgm:txFillClrLst>
-    <dgm:txEffectClrLst/>
-  </dgm:styleLbl>
-</dgm:colorsDef>
-</file>
-
-<file path=ppt/diagrams/colors2.xml><?xml version="1.0" encoding="utf-8"?>
 <dgm:colorsDef xmlns:dgm="http://schemas.openxmlformats.org/drawingml/2006/diagram" xmlns:a="http://schemas.openxmlformats.org/drawingml/2006/main" uniqueId="urn:microsoft.com/office/officeart/2005/8/colors/accent1_2">
   <dgm:title val=""/>
   <dgm:desc val=""/>
@@ -1939,838 +1201,7 @@
 </dgm:dataModel>
 </file>
 
-<file path=ppt/diagrams/data2.xml><?xml version="1.0" encoding="utf-8"?>
-<dgm:dataModel xmlns:dgm="http://schemas.openxmlformats.org/drawingml/2006/diagram" xmlns:a="http://schemas.openxmlformats.org/drawingml/2006/main">
-  <dgm:ptLst>
-    <dgm:pt modelId="{39BA76EA-6B06-4563-BA94-837024255026}" type="doc">
-      <dgm:prSet loTypeId="urn:microsoft.com/office/officeart/2005/8/layout/hProcess11" loCatId="process" qsTypeId="urn:microsoft.com/office/officeart/2005/8/quickstyle/simple1" qsCatId="simple" csTypeId="urn:microsoft.com/office/officeart/2005/8/colors/accent1_2" csCatId="accent1" phldr="1"/>
-      <dgm:spPr/>
-    </dgm:pt>
-    <dgm:pt modelId="{EF9695F1-D2F2-46EE-910E-501309FF95E0}">
-      <dgm:prSet phldrT="[文字]"/>
-      <dgm:spPr/>
-      <dgm:t>
-        <a:bodyPr/>
-        <a:lstStyle/>
-        <a:p>
-          <a:r>
-            <a:rPr lang="zh-TW" altLang="en-US" dirty="0">
-              <a:latin typeface="標楷體" panose="03000509000000000000" pitchFamily="65" charset="-120"/>
-              <a:ea typeface="標楷體" panose="03000509000000000000" pitchFamily="65" charset="-120"/>
-            </a:rPr>
-            <a:t>疫情</a:t>
-          </a:r>
-        </a:p>
-      </dgm:t>
-    </dgm:pt>
-    <dgm:pt modelId="{EC524604-523E-4098-83D5-FD165CDA904F}" type="parTrans" cxnId="{C4B1BE5F-AF04-4EEF-83D0-155AFCB5469F}">
-      <dgm:prSet/>
-      <dgm:spPr/>
-      <dgm:t>
-        <a:bodyPr/>
-        <a:lstStyle/>
-        <a:p>
-          <a:endParaRPr lang="zh-TW" altLang="en-US"/>
-        </a:p>
-      </dgm:t>
-    </dgm:pt>
-    <dgm:pt modelId="{CA9B8DBD-E7DF-4E94-A7AA-EE090B32CECF}" type="sibTrans" cxnId="{C4B1BE5F-AF04-4EEF-83D0-155AFCB5469F}">
-      <dgm:prSet/>
-      <dgm:spPr/>
-      <dgm:t>
-        <a:bodyPr/>
-        <a:lstStyle/>
-        <a:p>
-          <a:endParaRPr lang="zh-TW" altLang="en-US"/>
-        </a:p>
-      </dgm:t>
-    </dgm:pt>
-    <dgm:pt modelId="{18C4879F-0E5A-4618-AECC-8E7BC7F77A71}">
-      <dgm:prSet phldrT="[文字]"/>
-      <dgm:spPr/>
-      <dgm:t>
-        <a:bodyPr/>
-        <a:lstStyle/>
-        <a:p>
-          <a:r>
-            <a:rPr lang="en-US" altLang="zh-TW" dirty="0">
-              <a:latin typeface="標楷體" panose="03000509000000000000" pitchFamily="65" charset="-120"/>
-              <a:ea typeface="標楷體" panose="03000509000000000000" pitchFamily="65" charset="-120"/>
-            </a:rPr>
-            <a:t>?</a:t>
-          </a:r>
-          <a:endParaRPr lang="zh-TW" altLang="en-US" dirty="0">
-            <a:latin typeface="標楷體" panose="03000509000000000000" pitchFamily="65" charset="-120"/>
-            <a:ea typeface="標楷體" panose="03000509000000000000" pitchFamily="65" charset="-120"/>
-          </a:endParaRPr>
-        </a:p>
-      </dgm:t>
-    </dgm:pt>
-    <dgm:pt modelId="{BBD651E1-6723-4F5A-A610-16E954E23BB7}" type="parTrans" cxnId="{EE45DFCD-D452-425C-A034-ACFC73791A0F}">
-      <dgm:prSet/>
-      <dgm:spPr/>
-      <dgm:t>
-        <a:bodyPr/>
-        <a:lstStyle/>
-        <a:p>
-          <a:endParaRPr lang="zh-TW" altLang="en-US"/>
-        </a:p>
-      </dgm:t>
-    </dgm:pt>
-    <dgm:pt modelId="{4AE79586-0A41-46F2-837C-5EA922501645}" type="sibTrans" cxnId="{EE45DFCD-D452-425C-A034-ACFC73791A0F}">
-      <dgm:prSet/>
-      <dgm:spPr/>
-      <dgm:t>
-        <a:bodyPr/>
-        <a:lstStyle/>
-        <a:p>
-          <a:endParaRPr lang="zh-TW" altLang="en-US"/>
-        </a:p>
-      </dgm:t>
-    </dgm:pt>
-    <dgm:pt modelId="{8AE3726E-75FB-4CD0-AD19-C9D6B81CA7F7}">
-      <dgm:prSet phldrT="[文字]"/>
-      <dgm:spPr/>
-      <dgm:t>
-        <a:bodyPr/>
-        <a:lstStyle/>
-        <a:p>
-          <a:r>
-            <a:rPr lang="en-US" altLang="zh-TW" dirty="0">
-              <a:latin typeface="Times New Roman" panose="02020603050405020304" pitchFamily="18" charset="0"/>
-              <a:cs typeface="Times New Roman" panose="02020603050405020304" pitchFamily="18" charset="0"/>
-            </a:rPr>
-            <a:t>AI</a:t>
-          </a:r>
-          <a:endParaRPr lang="zh-TW" altLang="en-US" dirty="0">
-            <a:latin typeface="Times New Roman" panose="02020603050405020304" pitchFamily="18" charset="0"/>
-            <a:cs typeface="Times New Roman" panose="02020603050405020304" pitchFamily="18" charset="0"/>
-          </a:endParaRPr>
-        </a:p>
-      </dgm:t>
-    </dgm:pt>
-    <dgm:pt modelId="{D7A024A8-ACF3-4289-8861-6716D2E32EC0}" type="parTrans" cxnId="{82F2F2DE-DF34-4263-A13D-B6AD40142521}">
-      <dgm:prSet/>
-      <dgm:spPr/>
-      <dgm:t>
-        <a:bodyPr/>
-        <a:lstStyle/>
-        <a:p>
-          <a:endParaRPr lang="zh-TW" altLang="en-US"/>
-        </a:p>
-      </dgm:t>
-    </dgm:pt>
-    <dgm:pt modelId="{17BE14E1-9D7C-486E-BDF0-378827A22EBA}" type="sibTrans" cxnId="{82F2F2DE-DF34-4263-A13D-B6AD40142521}">
-      <dgm:prSet/>
-      <dgm:spPr/>
-      <dgm:t>
-        <a:bodyPr/>
-        <a:lstStyle/>
-        <a:p>
-          <a:endParaRPr lang="zh-TW" altLang="en-US"/>
-        </a:p>
-      </dgm:t>
-    </dgm:pt>
-    <dgm:pt modelId="{93756187-EC59-4D7F-9060-1D62A65626E4}">
-      <dgm:prSet phldrT="[文字]"/>
-      <dgm:spPr/>
-      <dgm:t>
-        <a:bodyPr/>
-        <a:lstStyle/>
-        <a:p>
-          <a:r>
-            <a:rPr lang="zh-TW" altLang="en-US" dirty="0">
-              <a:latin typeface="標楷體" panose="03000509000000000000" pitchFamily="65" charset="-120"/>
-              <a:ea typeface="標楷體" panose="03000509000000000000" pitchFamily="65" charset="-120"/>
-            </a:rPr>
-            <a:t>詐騙</a:t>
-          </a:r>
-        </a:p>
-      </dgm:t>
-    </dgm:pt>
-    <dgm:pt modelId="{B5069614-2112-455F-B2DD-F04F2D19C091}" type="parTrans" cxnId="{CA59A4D8-7805-400B-8188-2F85C78D3E52}">
-      <dgm:prSet/>
-      <dgm:spPr/>
-      <dgm:t>
-        <a:bodyPr/>
-        <a:lstStyle/>
-        <a:p>
-          <a:endParaRPr lang="zh-TW" altLang="en-US"/>
-        </a:p>
-      </dgm:t>
-    </dgm:pt>
-    <dgm:pt modelId="{6C58C909-E7D0-4485-B4E3-52911310197C}" type="sibTrans" cxnId="{CA59A4D8-7805-400B-8188-2F85C78D3E52}">
-      <dgm:prSet/>
-      <dgm:spPr/>
-      <dgm:t>
-        <a:bodyPr/>
-        <a:lstStyle/>
-        <a:p>
-          <a:endParaRPr lang="zh-TW" altLang="en-US"/>
-        </a:p>
-      </dgm:t>
-    </dgm:pt>
-    <dgm:pt modelId="{7421BAA9-F779-486E-AD8C-D024EA295426}" type="pres">
-      <dgm:prSet presAssocID="{39BA76EA-6B06-4563-BA94-837024255026}" presName="Name0" presStyleCnt="0">
-        <dgm:presLayoutVars>
-          <dgm:dir/>
-          <dgm:resizeHandles val="exact"/>
-        </dgm:presLayoutVars>
-      </dgm:prSet>
-      <dgm:spPr/>
-    </dgm:pt>
-    <dgm:pt modelId="{F0D71F57-F39E-4BEA-825A-3C2186C4355C}" type="pres">
-      <dgm:prSet presAssocID="{39BA76EA-6B06-4563-BA94-837024255026}" presName="arrow" presStyleLbl="bgShp" presStyleIdx="0" presStyleCnt="1"/>
-      <dgm:spPr/>
-    </dgm:pt>
-    <dgm:pt modelId="{95385AB0-E53D-48C6-A206-C31AB2B8DDFC}" type="pres">
-      <dgm:prSet presAssocID="{39BA76EA-6B06-4563-BA94-837024255026}" presName="points" presStyleCnt="0"/>
-      <dgm:spPr/>
-    </dgm:pt>
-    <dgm:pt modelId="{FB14F5CA-74CD-41F8-B937-5E86E7027DA0}" type="pres">
-      <dgm:prSet presAssocID="{EF9695F1-D2F2-46EE-910E-501309FF95E0}" presName="compositeA" presStyleCnt="0"/>
-      <dgm:spPr/>
-    </dgm:pt>
-    <dgm:pt modelId="{65E73C9B-7DEC-466A-A79B-796DE227ADB9}" type="pres">
-      <dgm:prSet presAssocID="{EF9695F1-D2F2-46EE-910E-501309FF95E0}" presName="textA" presStyleLbl="revTx" presStyleIdx="0" presStyleCnt="4">
-        <dgm:presLayoutVars>
-          <dgm:bulletEnabled val="1"/>
-        </dgm:presLayoutVars>
-      </dgm:prSet>
-      <dgm:spPr/>
-    </dgm:pt>
-    <dgm:pt modelId="{45A6A8F0-B1D6-4688-9CA9-EF202B64FCD6}" type="pres">
-      <dgm:prSet presAssocID="{EF9695F1-D2F2-46EE-910E-501309FF95E0}" presName="circleA" presStyleLbl="node1" presStyleIdx="0" presStyleCnt="4"/>
-      <dgm:spPr/>
-    </dgm:pt>
-    <dgm:pt modelId="{6A66B90A-CB54-426F-9BB1-325491E61F98}" type="pres">
-      <dgm:prSet presAssocID="{EF9695F1-D2F2-46EE-910E-501309FF95E0}" presName="spaceA" presStyleCnt="0"/>
-      <dgm:spPr/>
-    </dgm:pt>
-    <dgm:pt modelId="{9D391CB7-34AC-4350-94F1-E6B10CC9080D}" type="pres">
-      <dgm:prSet presAssocID="{CA9B8DBD-E7DF-4E94-A7AA-EE090B32CECF}" presName="space" presStyleCnt="0"/>
-      <dgm:spPr/>
-    </dgm:pt>
-    <dgm:pt modelId="{4B525CCC-6C12-4810-A9F2-1ED91A5AED70}" type="pres">
-      <dgm:prSet presAssocID="{18C4879F-0E5A-4618-AECC-8E7BC7F77A71}" presName="compositeB" presStyleCnt="0"/>
-      <dgm:spPr/>
-    </dgm:pt>
-    <dgm:pt modelId="{17B2C020-7EDE-4C68-AC0C-0161BCDFDCD1}" type="pres">
-      <dgm:prSet presAssocID="{18C4879F-0E5A-4618-AECC-8E7BC7F77A71}" presName="textB" presStyleLbl="revTx" presStyleIdx="1" presStyleCnt="4">
-        <dgm:presLayoutVars>
-          <dgm:bulletEnabled val="1"/>
-        </dgm:presLayoutVars>
-      </dgm:prSet>
-      <dgm:spPr/>
-    </dgm:pt>
-    <dgm:pt modelId="{388803F4-D24C-43AF-A40C-E269BF2641C9}" type="pres">
-      <dgm:prSet presAssocID="{18C4879F-0E5A-4618-AECC-8E7BC7F77A71}" presName="circleB" presStyleLbl="node1" presStyleIdx="1" presStyleCnt="4"/>
-      <dgm:spPr/>
-    </dgm:pt>
-    <dgm:pt modelId="{5F8572A5-326D-4ABA-B75D-9E8E646DF764}" type="pres">
-      <dgm:prSet presAssocID="{18C4879F-0E5A-4618-AECC-8E7BC7F77A71}" presName="spaceB" presStyleCnt="0"/>
-      <dgm:spPr/>
-    </dgm:pt>
-    <dgm:pt modelId="{16586103-A175-4B4F-8DBD-65F5A3D76BBC}" type="pres">
-      <dgm:prSet presAssocID="{4AE79586-0A41-46F2-837C-5EA922501645}" presName="space" presStyleCnt="0"/>
-      <dgm:spPr/>
-    </dgm:pt>
-    <dgm:pt modelId="{FDAF9D7E-AA21-46CA-88E3-9E322BD6A7C0}" type="pres">
-      <dgm:prSet presAssocID="{93756187-EC59-4D7F-9060-1D62A65626E4}" presName="compositeA" presStyleCnt="0"/>
-      <dgm:spPr/>
-    </dgm:pt>
-    <dgm:pt modelId="{8CE852D7-8899-4908-B7F1-42F32C89D74F}" type="pres">
-      <dgm:prSet presAssocID="{93756187-EC59-4D7F-9060-1D62A65626E4}" presName="textA" presStyleLbl="revTx" presStyleIdx="2" presStyleCnt="4">
-        <dgm:presLayoutVars>
-          <dgm:bulletEnabled val="1"/>
-        </dgm:presLayoutVars>
-      </dgm:prSet>
-      <dgm:spPr/>
-    </dgm:pt>
-    <dgm:pt modelId="{758C6F5C-8415-4852-9352-C5C0D921FEBD}" type="pres">
-      <dgm:prSet presAssocID="{93756187-EC59-4D7F-9060-1D62A65626E4}" presName="circleA" presStyleLbl="node1" presStyleIdx="2" presStyleCnt="4"/>
-      <dgm:spPr/>
-    </dgm:pt>
-    <dgm:pt modelId="{BEBF0864-4BCC-49CF-97CE-B99D6F37512C}" type="pres">
-      <dgm:prSet presAssocID="{93756187-EC59-4D7F-9060-1D62A65626E4}" presName="spaceA" presStyleCnt="0"/>
-      <dgm:spPr/>
-    </dgm:pt>
-    <dgm:pt modelId="{1716BBE6-F9EC-4AE7-8349-42C5686050DC}" type="pres">
-      <dgm:prSet presAssocID="{6C58C909-E7D0-4485-B4E3-52911310197C}" presName="space" presStyleCnt="0"/>
-      <dgm:spPr/>
-    </dgm:pt>
-    <dgm:pt modelId="{B4A60255-0548-4AFB-BF8C-6C15F5D82B5E}" type="pres">
-      <dgm:prSet presAssocID="{8AE3726E-75FB-4CD0-AD19-C9D6B81CA7F7}" presName="compositeB" presStyleCnt="0"/>
-      <dgm:spPr/>
-    </dgm:pt>
-    <dgm:pt modelId="{BA686BC1-F7AD-4885-8EB6-68B6E7717DDD}" type="pres">
-      <dgm:prSet presAssocID="{8AE3726E-75FB-4CD0-AD19-C9D6B81CA7F7}" presName="textB" presStyleLbl="revTx" presStyleIdx="3" presStyleCnt="4">
-        <dgm:presLayoutVars>
-          <dgm:bulletEnabled val="1"/>
-        </dgm:presLayoutVars>
-      </dgm:prSet>
-      <dgm:spPr/>
-    </dgm:pt>
-    <dgm:pt modelId="{394A1AED-D461-4CB8-81C8-FE05655CE086}" type="pres">
-      <dgm:prSet presAssocID="{8AE3726E-75FB-4CD0-AD19-C9D6B81CA7F7}" presName="circleB" presStyleLbl="node1" presStyleIdx="3" presStyleCnt="4"/>
-      <dgm:spPr/>
-    </dgm:pt>
-    <dgm:pt modelId="{BF2C5714-B9F7-41E4-B73F-B93743B6B6A1}" type="pres">
-      <dgm:prSet presAssocID="{8AE3726E-75FB-4CD0-AD19-C9D6B81CA7F7}" presName="spaceB" presStyleCnt="0"/>
-      <dgm:spPr/>
-    </dgm:pt>
-  </dgm:ptLst>
-  <dgm:cxnLst>
-    <dgm:cxn modelId="{C4B1BE5F-AF04-4EEF-83D0-155AFCB5469F}" srcId="{39BA76EA-6B06-4563-BA94-837024255026}" destId="{EF9695F1-D2F2-46EE-910E-501309FF95E0}" srcOrd="0" destOrd="0" parTransId="{EC524604-523E-4098-83D5-FD165CDA904F}" sibTransId="{CA9B8DBD-E7DF-4E94-A7AA-EE090B32CECF}"/>
-    <dgm:cxn modelId="{EB95626F-8061-4199-ADA0-CB28C83C4E6F}" type="presOf" srcId="{18C4879F-0E5A-4618-AECC-8E7BC7F77A71}" destId="{17B2C020-7EDE-4C68-AC0C-0161BCDFDCD1}" srcOrd="0" destOrd="0" presId="urn:microsoft.com/office/officeart/2005/8/layout/hProcess11"/>
-    <dgm:cxn modelId="{2535E9B5-6537-42FC-88C6-8B5F05B58F33}" type="presOf" srcId="{39BA76EA-6B06-4563-BA94-837024255026}" destId="{7421BAA9-F779-486E-AD8C-D024EA295426}" srcOrd="0" destOrd="0" presId="urn:microsoft.com/office/officeart/2005/8/layout/hProcess11"/>
-    <dgm:cxn modelId="{9B4668BF-3AAE-4137-A63A-A18E3C968577}" type="presOf" srcId="{93756187-EC59-4D7F-9060-1D62A65626E4}" destId="{8CE852D7-8899-4908-B7F1-42F32C89D74F}" srcOrd="0" destOrd="0" presId="urn:microsoft.com/office/officeart/2005/8/layout/hProcess11"/>
-    <dgm:cxn modelId="{596135C2-58CD-48ED-A2EA-571A3D4E92F6}" type="presOf" srcId="{EF9695F1-D2F2-46EE-910E-501309FF95E0}" destId="{65E73C9B-7DEC-466A-A79B-796DE227ADB9}" srcOrd="0" destOrd="0" presId="urn:microsoft.com/office/officeart/2005/8/layout/hProcess11"/>
-    <dgm:cxn modelId="{EE45DFCD-D452-425C-A034-ACFC73791A0F}" srcId="{39BA76EA-6B06-4563-BA94-837024255026}" destId="{18C4879F-0E5A-4618-AECC-8E7BC7F77A71}" srcOrd="1" destOrd="0" parTransId="{BBD651E1-6723-4F5A-A610-16E954E23BB7}" sibTransId="{4AE79586-0A41-46F2-837C-5EA922501645}"/>
-    <dgm:cxn modelId="{CA59A4D8-7805-400B-8188-2F85C78D3E52}" srcId="{39BA76EA-6B06-4563-BA94-837024255026}" destId="{93756187-EC59-4D7F-9060-1D62A65626E4}" srcOrd="2" destOrd="0" parTransId="{B5069614-2112-455F-B2DD-F04F2D19C091}" sibTransId="{6C58C909-E7D0-4485-B4E3-52911310197C}"/>
-    <dgm:cxn modelId="{82F2F2DE-DF34-4263-A13D-B6AD40142521}" srcId="{39BA76EA-6B06-4563-BA94-837024255026}" destId="{8AE3726E-75FB-4CD0-AD19-C9D6B81CA7F7}" srcOrd="3" destOrd="0" parTransId="{D7A024A8-ACF3-4289-8861-6716D2E32EC0}" sibTransId="{17BE14E1-9D7C-486E-BDF0-378827A22EBA}"/>
-    <dgm:cxn modelId="{11CC9CF6-8F45-43F1-9FA5-04F8E6D7D234}" type="presOf" srcId="{8AE3726E-75FB-4CD0-AD19-C9D6B81CA7F7}" destId="{BA686BC1-F7AD-4885-8EB6-68B6E7717DDD}" srcOrd="0" destOrd="0" presId="urn:microsoft.com/office/officeart/2005/8/layout/hProcess11"/>
-    <dgm:cxn modelId="{F294262D-245C-4252-8D7A-0ED396F05FE9}" type="presParOf" srcId="{7421BAA9-F779-486E-AD8C-D024EA295426}" destId="{F0D71F57-F39E-4BEA-825A-3C2186C4355C}" srcOrd="0" destOrd="0" presId="urn:microsoft.com/office/officeart/2005/8/layout/hProcess11"/>
-    <dgm:cxn modelId="{22906563-420B-4EBF-A347-258840F71997}" type="presParOf" srcId="{7421BAA9-F779-486E-AD8C-D024EA295426}" destId="{95385AB0-E53D-48C6-A206-C31AB2B8DDFC}" srcOrd="1" destOrd="0" presId="urn:microsoft.com/office/officeart/2005/8/layout/hProcess11"/>
-    <dgm:cxn modelId="{810BC9E2-25D3-4B92-B5E4-9AAEAA55EC4A}" type="presParOf" srcId="{95385AB0-E53D-48C6-A206-C31AB2B8DDFC}" destId="{FB14F5CA-74CD-41F8-B937-5E86E7027DA0}" srcOrd="0" destOrd="0" presId="urn:microsoft.com/office/officeart/2005/8/layout/hProcess11"/>
-    <dgm:cxn modelId="{6130B0CD-8EE8-44B6-8A1D-3411E3DBA195}" type="presParOf" srcId="{FB14F5CA-74CD-41F8-B937-5E86E7027DA0}" destId="{65E73C9B-7DEC-466A-A79B-796DE227ADB9}" srcOrd="0" destOrd="0" presId="urn:microsoft.com/office/officeart/2005/8/layout/hProcess11"/>
-    <dgm:cxn modelId="{CA85181E-E487-4CD2-8439-C07EEC29DEE9}" type="presParOf" srcId="{FB14F5CA-74CD-41F8-B937-5E86E7027DA0}" destId="{45A6A8F0-B1D6-4688-9CA9-EF202B64FCD6}" srcOrd="1" destOrd="0" presId="urn:microsoft.com/office/officeart/2005/8/layout/hProcess11"/>
-    <dgm:cxn modelId="{2F1AC783-D1BE-476D-A519-CD912DF22AF7}" type="presParOf" srcId="{FB14F5CA-74CD-41F8-B937-5E86E7027DA0}" destId="{6A66B90A-CB54-426F-9BB1-325491E61F98}" srcOrd="2" destOrd="0" presId="urn:microsoft.com/office/officeart/2005/8/layout/hProcess11"/>
-    <dgm:cxn modelId="{A54691FD-5871-464E-8618-6FAF642CF963}" type="presParOf" srcId="{95385AB0-E53D-48C6-A206-C31AB2B8DDFC}" destId="{9D391CB7-34AC-4350-94F1-E6B10CC9080D}" srcOrd="1" destOrd="0" presId="urn:microsoft.com/office/officeart/2005/8/layout/hProcess11"/>
-    <dgm:cxn modelId="{6057C4A9-B4EE-41CB-BD70-78F3E519D06B}" type="presParOf" srcId="{95385AB0-E53D-48C6-A206-C31AB2B8DDFC}" destId="{4B525CCC-6C12-4810-A9F2-1ED91A5AED70}" srcOrd="2" destOrd="0" presId="urn:microsoft.com/office/officeart/2005/8/layout/hProcess11"/>
-    <dgm:cxn modelId="{A60262BA-99C4-49D6-B8A9-756F72DA40BA}" type="presParOf" srcId="{4B525CCC-6C12-4810-A9F2-1ED91A5AED70}" destId="{17B2C020-7EDE-4C68-AC0C-0161BCDFDCD1}" srcOrd="0" destOrd="0" presId="urn:microsoft.com/office/officeart/2005/8/layout/hProcess11"/>
-    <dgm:cxn modelId="{51FB640F-1205-4AF6-9279-9A9CA4CEA824}" type="presParOf" srcId="{4B525CCC-6C12-4810-A9F2-1ED91A5AED70}" destId="{388803F4-D24C-43AF-A40C-E269BF2641C9}" srcOrd="1" destOrd="0" presId="urn:microsoft.com/office/officeart/2005/8/layout/hProcess11"/>
-    <dgm:cxn modelId="{40C1C686-DADD-45F8-855E-D6C002294A6C}" type="presParOf" srcId="{4B525CCC-6C12-4810-A9F2-1ED91A5AED70}" destId="{5F8572A5-326D-4ABA-B75D-9E8E646DF764}" srcOrd="2" destOrd="0" presId="urn:microsoft.com/office/officeart/2005/8/layout/hProcess11"/>
-    <dgm:cxn modelId="{10EC52AF-FC42-4C85-8342-378F2DD0F1B8}" type="presParOf" srcId="{95385AB0-E53D-48C6-A206-C31AB2B8DDFC}" destId="{16586103-A175-4B4F-8DBD-65F5A3D76BBC}" srcOrd="3" destOrd="0" presId="urn:microsoft.com/office/officeart/2005/8/layout/hProcess11"/>
-    <dgm:cxn modelId="{61C1DC66-C073-46DE-92BD-38A5B744C3BF}" type="presParOf" srcId="{95385AB0-E53D-48C6-A206-C31AB2B8DDFC}" destId="{FDAF9D7E-AA21-46CA-88E3-9E322BD6A7C0}" srcOrd="4" destOrd="0" presId="urn:microsoft.com/office/officeart/2005/8/layout/hProcess11"/>
-    <dgm:cxn modelId="{94882986-CA3F-4515-B22C-9F571183DACB}" type="presParOf" srcId="{FDAF9D7E-AA21-46CA-88E3-9E322BD6A7C0}" destId="{8CE852D7-8899-4908-B7F1-42F32C89D74F}" srcOrd="0" destOrd="0" presId="urn:microsoft.com/office/officeart/2005/8/layout/hProcess11"/>
-    <dgm:cxn modelId="{B352CA1C-DF7D-4B3D-9D1C-598247D7E8BA}" type="presParOf" srcId="{FDAF9D7E-AA21-46CA-88E3-9E322BD6A7C0}" destId="{758C6F5C-8415-4852-9352-C5C0D921FEBD}" srcOrd="1" destOrd="0" presId="urn:microsoft.com/office/officeart/2005/8/layout/hProcess11"/>
-    <dgm:cxn modelId="{D8875C91-C171-445A-952B-B80A60594B6F}" type="presParOf" srcId="{FDAF9D7E-AA21-46CA-88E3-9E322BD6A7C0}" destId="{BEBF0864-4BCC-49CF-97CE-B99D6F37512C}" srcOrd="2" destOrd="0" presId="urn:microsoft.com/office/officeart/2005/8/layout/hProcess11"/>
-    <dgm:cxn modelId="{8B61EE72-BA5D-4DA4-9096-BD934CC4FDEC}" type="presParOf" srcId="{95385AB0-E53D-48C6-A206-C31AB2B8DDFC}" destId="{1716BBE6-F9EC-4AE7-8349-42C5686050DC}" srcOrd="5" destOrd="0" presId="urn:microsoft.com/office/officeart/2005/8/layout/hProcess11"/>
-    <dgm:cxn modelId="{F6239A18-B077-4153-A75F-3547D2613789}" type="presParOf" srcId="{95385AB0-E53D-48C6-A206-C31AB2B8DDFC}" destId="{B4A60255-0548-4AFB-BF8C-6C15F5D82B5E}" srcOrd="6" destOrd="0" presId="urn:microsoft.com/office/officeart/2005/8/layout/hProcess11"/>
-    <dgm:cxn modelId="{018A4CA8-70BF-4517-B20C-1895FEB59E61}" type="presParOf" srcId="{B4A60255-0548-4AFB-BF8C-6C15F5D82B5E}" destId="{BA686BC1-F7AD-4885-8EB6-68B6E7717DDD}" srcOrd="0" destOrd="0" presId="urn:microsoft.com/office/officeart/2005/8/layout/hProcess11"/>
-    <dgm:cxn modelId="{C269E91E-D549-458B-B48D-85E9AAC24BE1}" type="presParOf" srcId="{B4A60255-0548-4AFB-BF8C-6C15F5D82B5E}" destId="{394A1AED-D461-4CB8-81C8-FE05655CE086}" srcOrd="1" destOrd="0" presId="urn:microsoft.com/office/officeart/2005/8/layout/hProcess11"/>
-    <dgm:cxn modelId="{E1B6A1A2-0FD3-43CD-BC78-7E555E05D896}" type="presParOf" srcId="{B4A60255-0548-4AFB-BF8C-6C15F5D82B5E}" destId="{BF2C5714-B9F7-41E4-B73F-B93743B6B6A1}" srcOrd="2" destOrd="0" presId="urn:microsoft.com/office/officeart/2005/8/layout/hProcess11"/>
-  </dgm:cxnLst>
-  <dgm:bg/>
-  <dgm:whole/>
-  <dgm:extLst>
-    <a:ext uri="http://schemas.microsoft.com/office/drawing/2008/diagram">
-      <dsp:dataModelExt xmlns:dsp="http://schemas.microsoft.com/office/drawing/2008/diagram" relId="rId6" minVer="http://schemas.openxmlformats.org/drawingml/2006/diagram"/>
-    </a:ext>
-  </dgm:extLst>
-</dgm:dataModel>
-</file>
-
 <file path=ppt/diagrams/drawing1.xml><?xml version="1.0" encoding="utf-8"?>
-<dsp:drawing xmlns:dgm="http://schemas.openxmlformats.org/drawingml/2006/diagram" xmlns:dsp="http://schemas.microsoft.com/office/drawing/2008/diagram" xmlns:a="http://schemas.openxmlformats.org/drawingml/2006/main">
-  <dsp:spTree>
-    <dsp:nvGrpSpPr>
-      <dsp:cNvPr id="0" name=""/>
-      <dsp:cNvGrpSpPr/>
-    </dsp:nvGrpSpPr>
-    <dsp:grpSpPr/>
-    <dsp:sp modelId="{F0D71F57-F39E-4BEA-825A-3C2186C4355C}">
-      <dsp:nvSpPr>
-        <dsp:cNvPr id="0" name=""/>
-        <dsp:cNvSpPr/>
-      </dsp:nvSpPr>
-      <dsp:spPr>
-        <a:xfrm>
-          <a:off x="0" y="827550"/>
-          <a:ext cx="8268979" cy="1103400"/>
-        </a:xfrm>
-        <a:prstGeom prst="notchedRightArrow">
-          <a:avLst/>
-        </a:prstGeom>
-        <a:solidFill>
-          <a:schemeClr val="accent1">
-            <a:tint val="40000"/>
-            <a:hueOff val="0"/>
-            <a:satOff val="0"/>
-            <a:lumOff val="0"/>
-            <a:alphaOff val="0"/>
-          </a:schemeClr>
-        </a:solidFill>
-        <a:ln>
-          <a:noFill/>
-        </a:ln>
-        <a:effectLst/>
-      </dsp:spPr>
-      <dsp:style>
-        <a:lnRef idx="0">
-          <a:scrgbClr r="0" g="0" b="0"/>
-        </a:lnRef>
-        <a:fillRef idx="1">
-          <a:scrgbClr r="0" g="0" b="0"/>
-        </a:fillRef>
-        <a:effectRef idx="0">
-          <a:scrgbClr r="0" g="0" b="0"/>
-        </a:effectRef>
-        <a:fontRef idx="minor"/>
-      </dsp:style>
-    </dsp:sp>
-    <dsp:sp modelId="{65E73C9B-7DEC-466A-A79B-796DE227ADB9}">
-      <dsp:nvSpPr>
-        <dsp:cNvPr id="0" name=""/>
-        <dsp:cNvSpPr/>
-      </dsp:nvSpPr>
-      <dsp:spPr>
-        <a:xfrm>
-          <a:off x="3724" y="0"/>
-          <a:ext cx="1791477" cy="1103400"/>
-        </a:xfrm>
-        <a:prstGeom prst="rect">
-          <a:avLst/>
-        </a:prstGeom>
-        <a:noFill/>
-        <a:ln>
-          <a:noFill/>
-        </a:ln>
-        <a:effectLst/>
-      </dsp:spPr>
-      <dsp:style>
-        <a:lnRef idx="0">
-          <a:scrgbClr r="0" g="0" b="0"/>
-        </a:lnRef>
-        <a:fillRef idx="0">
-          <a:scrgbClr r="0" g="0" b="0"/>
-        </a:fillRef>
-        <a:effectRef idx="0">
-          <a:scrgbClr r="0" g="0" b="0"/>
-        </a:effectRef>
-        <a:fontRef idx="minor"/>
-      </dsp:style>
-      <dsp:txBody>
-        <a:bodyPr spcFirstLastPara="0" vert="horz" wrap="square" lIns="263144" tIns="263144" rIns="263144" bIns="263144" numCol="1" spcCol="1270" anchor="b" anchorCtr="0">
-          <a:noAutofit/>
-        </a:bodyPr>
-        <a:lstStyle/>
-        <a:p>
-          <a:pPr marL="0" lvl="0" indent="0" algn="ctr" defTabSz="1644650">
-            <a:lnSpc>
-              <a:spcPct val="90000"/>
-            </a:lnSpc>
-            <a:spcBef>
-              <a:spcPct val="0"/>
-            </a:spcBef>
-            <a:spcAft>
-              <a:spcPct val="35000"/>
-            </a:spcAft>
-            <a:buNone/>
-          </a:pPr>
-          <a:r>
-            <a:rPr lang="zh-TW" altLang="en-US" sz="3700" kern="1200" dirty="0">
-              <a:latin typeface="標楷體" panose="03000509000000000000" pitchFamily="65" charset="-120"/>
-              <a:ea typeface="標楷體" panose="03000509000000000000" pitchFamily="65" charset="-120"/>
-            </a:rPr>
-            <a:t>疫情</a:t>
-          </a:r>
-        </a:p>
-      </dsp:txBody>
-      <dsp:txXfrm>
-        <a:off x="3724" y="0"/>
-        <a:ext cx="1791477" cy="1103400"/>
-      </dsp:txXfrm>
-    </dsp:sp>
-    <dsp:sp modelId="{45A6A8F0-B1D6-4688-9CA9-EF202B64FCD6}">
-      <dsp:nvSpPr>
-        <dsp:cNvPr id="0" name=""/>
-        <dsp:cNvSpPr/>
-      </dsp:nvSpPr>
-      <dsp:spPr>
-        <a:xfrm>
-          <a:off x="761538" y="1241325"/>
-          <a:ext cx="275850" cy="275850"/>
-        </a:xfrm>
-        <a:prstGeom prst="ellipse">
-          <a:avLst/>
-        </a:prstGeom>
-        <a:solidFill>
-          <a:schemeClr val="accent1">
-            <a:hueOff val="0"/>
-            <a:satOff val="0"/>
-            <a:lumOff val="0"/>
-            <a:alphaOff val="0"/>
-          </a:schemeClr>
-        </a:solidFill>
-        <a:ln w="15875" cap="flat" cmpd="sng" algn="ctr">
-          <a:solidFill>
-            <a:schemeClr val="lt1">
-              <a:hueOff val="0"/>
-              <a:satOff val="0"/>
-              <a:lumOff val="0"/>
-              <a:alphaOff val="0"/>
-            </a:schemeClr>
-          </a:solidFill>
-          <a:prstDash val="solid"/>
-        </a:ln>
-        <a:effectLst/>
-      </dsp:spPr>
-      <dsp:style>
-        <a:lnRef idx="2">
-          <a:scrgbClr r="0" g="0" b="0"/>
-        </a:lnRef>
-        <a:fillRef idx="1">
-          <a:scrgbClr r="0" g="0" b="0"/>
-        </a:fillRef>
-        <a:effectRef idx="0">
-          <a:scrgbClr r="0" g="0" b="0"/>
-        </a:effectRef>
-        <a:fontRef idx="minor">
-          <a:schemeClr val="lt1"/>
-        </a:fontRef>
-      </dsp:style>
-    </dsp:sp>
-    <dsp:sp modelId="{17B2C020-7EDE-4C68-AC0C-0161BCDFDCD1}">
-      <dsp:nvSpPr>
-        <dsp:cNvPr id="0" name=""/>
-        <dsp:cNvSpPr/>
-      </dsp:nvSpPr>
-      <dsp:spPr>
-        <a:xfrm>
-          <a:off x="1884776" y="1655101"/>
-          <a:ext cx="1791477" cy="1103400"/>
-        </a:xfrm>
-        <a:prstGeom prst="rect">
-          <a:avLst/>
-        </a:prstGeom>
-        <a:noFill/>
-        <a:ln>
-          <a:noFill/>
-        </a:ln>
-        <a:effectLst/>
-      </dsp:spPr>
-      <dsp:style>
-        <a:lnRef idx="0">
-          <a:scrgbClr r="0" g="0" b="0"/>
-        </a:lnRef>
-        <a:fillRef idx="0">
-          <a:scrgbClr r="0" g="0" b="0"/>
-        </a:fillRef>
-        <a:effectRef idx="0">
-          <a:scrgbClr r="0" g="0" b="0"/>
-        </a:effectRef>
-        <a:fontRef idx="minor"/>
-      </dsp:style>
-      <dsp:txBody>
-        <a:bodyPr spcFirstLastPara="0" vert="horz" wrap="square" lIns="263144" tIns="263144" rIns="263144" bIns="263144" numCol="1" spcCol="1270" anchor="t" anchorCtr="0">
-          <a:noAutofit/>
-        </a:bodyPr>
-        <a:lstStyle/>
-        <a:p>
-          <a:pPr marL="0" lvl="0" indent="0" algn="ctr" defTabSz="1644650">
-            <a:lnSpc>
-              <a:spcPct val="90000"/>
-            </a:lnSpc>
-            <a:spcBef>
-              <a:spcPct val="0"/>
-            </a:spcBef>
-            <a:spcAft>
-              <a:spcPct val="35000"/>
-            </a:spcAft>
-            <a:buNone/>
-          </a:pPr>
-          <a:r>
-            <a:rPr lang="en-US" altLang="zh-TW" sz="3700" kern="1200" dirty="0">
-              <a:latin typeface="標楷體" panose="03000509000000000000" pitchFamily="65" charset="-120"/>
-              <a:ea typeface="標楷體" panose="03000509000000000000" pitchFamily="65" charset="-120"/>
-            </a:rPr>
-            <a:t>?</a:t>
-          </a:r>
-          <a:endParaRPr lang="zh-TW" altLang="en-US" sz="3700" kern="1200" dirty="0">
-            <a:latin typeface="標楷體" panose="03000509000000000000" pitchFamily="65" charset="-120"/>
-            <a:ea typeface="標楷體" panose="03000509000000000000" pitchFamily="65" charset="-120"/>
-          </a:endParaRPr>
-        </a:p>
-      </dsp:txBody>
-      <dsp:txXfrm>
-        <a:off x="1884776" y="1655101"/>
-        <a:ext cx="1791477" cy="1103400"/>
-      </dsp:txXfrm>
-    </dsp:sp>
-    <dsp:sp modelId="{388803F4-D24C-43AF-A40C-E269BF2641C9}">
-      <dsp:nvSpPr>
-        <dsp:cNvPr id="0" name=""/>
-        <dsp:cNvSpPr/>
-      </dsp:nvSpPr>
-      <dsp:spPr>
-        <a:xfrm>
-          <a:off x="2642589" y="1241325"/>
-          <a:ext cx="275850" cy="275850"/>
-        </a:xfrm>
-        <a:prstGeom prst="ellipse">
-          <a:avLst/>
-        </a:prstGeom>
-        <a:solidFill>
-          <a:schemeClr val="accent1">
-            <a:hueOff val="0"/>
-            <a:satOff val="0"/>
-            <a:lumOff val="0"/>
-            <a:alphaOff val="0"/>
-          </a:schemeClr>
-        </a:solidFill>
-        <a:ln w="15875" cap="flat" cmpd="sng" algn="ctr">
-          <a:solidFill>
-            <a:schemeClr val="lt1">
-              <a:hueOff val="0"/>
-              <a:satOff val="0"/>
-              <a:lumOff val="0"/>
-              <a:alphaOff val="0"/>
-            </a:schemeClr>
-          </a:solidFill>
-          <a:prstDash val="solid"/>
-        </a:ln>
-        <a:effectLst/>
-      </dsp:spPr>
-      <dsp:style>
-        <a:lnRef idx="2">
-          <a:scrgbClr r="0" g="0" b="0"/>
-        </a:lnRef>
-        <a:fillRef idx="1">
-          <a:scrgbClr r="0" g="0" b="0"/>
-        </a:fillRef>
-        <a:effectRef idx="0">
-          <a:scrgbClr r="0" g="0" b="0"/>
-        </a:effectRef>
-        <a:fontRef idx="minor">
-          <a:schemeClr val="lt1"/>
-        </a:fontRef>
-      </dsp:style>
-    </dsp:sp>
-    <dsp:sp modelId="{8CE852D7-8899-4908-B7F1-42F32C89D74F}">
-      <dsp:nvSpPr>
-        <dsp:cNvPr id="0" name=""/>
-        <dsp:cNvSpPr/>
-      </dsp:nvSpPr>
-      <dsp:spPr>
-        <a:xfrm>
-          <a:off x="3765827" y="0"/>
-          <a:ext cx="1791477" cy="1103400"/>
-        </a:xfrm>
-        <a:prstGeom prst="rect">
-          <a:avLst/>
-        </a:prstGeom>
-        <a:noFill/>
-        <a:ln>
-          <a:noFill/>
-        </a:ln>
-        <a:effectLst/>
-      </dsp:spPr>
-      <dsp:style>
-        <a:lnRef idx="0">
-          <a:scrgbClr r="0" g="0" b="0"/>
-        </a:lnRef>
-        <a:fillRef idx="0">
-          <a:scrgbClr r="0" g="0" b="0"/>
-        </a:fillRef>
-        <a:effectRef idx="0">
-          <a:scrgbClr r="0" g="0" b="0"/>
-        </a:effectRef>
-        <a:fontRef idx="minor"/>
-      </dsp:style>
-      <dsp:txBody>
-        <a:bodyPr spcFirstLastPara="0" vert="horz" wrap="square" lIns="263144" tIns="263144" rIns="263144" bIns="263144" numCol="1" spcCol="1270" anchor="b" anchorCtr="0">
-          <a:noAutofit/>
-        </a:bodyPr>
-        <a:lstStyle/>
-        <a:p>
-          <a:pPr marL="0" lvl="0" indent="0" algn="ctr" defTabSz="1644650">
-            <a:lnSpc>
-              <a:spcPct val="90000"/>
-            </a:lnSpc>
-            <a:spcBef>
-              <a:spcPct val="0"/>
-            </a:spcBef>
-            <a:spcAft>
-              <a:spcPct val="35000"/>
-            </a:spcAft>
-            <a:buNone/>
-          </a:pPr>
-          <a:r>
-            <a:rPr lang="zh-TW" altLang="en-US" sz="3700" kern="1200" dirty="0">
-              <a:latin typeface="標楷體" panose="03000509000000000000" pitchFamily="65" charset="-120"/>
-              <a:ea typeface="標楷體" panose="03000509000000000000" pitchFamily="65" charset="-120"/>
-            </a:rPr>
-            <a:t>詐騙</a:t>
-          </a:r>
-        </a:p>
-      </dsp:txBody>
-      <dsp:txXfrm>
-        <a:off x="3765827" y="0"/>
-        <a:ext cx="1791477" cy="1103400"/>
-      </dsp:txXfrm>
-    </dsp:sp>
-    <dsp:sp modelId="{758C6F5C-8415-4852-9352-C5C0D921FEBD}">
-      <dsp:nvSpPr>
-        <dsp:cNvPr id="0" name=""/>
-        <dsp:cNvSpPr/>
-      </dsp:nvSpPr>
-      <dsp:spPr>
-        <a:xfrm>
-          <a:off x="4523641" y="1241325"/>
-          <a:ext cx="275850" cy="275850"/>
-        </a:xfrm>
-        <a:prstGeom prst="ellipse">
-          <a:avLst/>
-        </a:prstGeom>
-        <a:solidFill>
-          <a:schemeClr val="accent1">
-            <a:hueOff val="0"/>
-            <a:satOff val="0"/>
-            <a:lumOff val="0"/>
-            <a:alphaOff val="0"/>
-          </a:schemeClr>
-        </a:solidFill>
-        <a:ln w="15875" cap="flat" cmpd="sng" algn="ctr">
-          <a:solidFill>
-            <a:schemeClr val="lt1">
-              <a:hueOff val="0"/>
-              <a:satOff val="0"/>
-              <a:lumOff val="0"/>
-              <a:alphaOff val="0"/>
-            </a:schemeClr>
-          </a:solidFill>
-          <a:prstDash val="solid"/>
-        </a:ln>
-        <a:effectLst/>
-      </dsp:spPr>
-      <dsp:style>
-        <a:lnRef idx="2">
-          <a:scrgbClr r="0" g="0" b="0"/>
-        </a:lnRef>
-        <a:fillRef idx="1">
-          <a:scrgbClr r="0" g="0" b="0"/>
-        </a:fillRef>
-        <a:effectRef idx="0">
-          <a:scrgbClr r="0" g="0" b="0"/>
-        </a:effectRef>
-        <a:fontRef idx="minor">
-          <a:schemeClr val="lt1"/>
-        </a:fontRef>
-      </dsp:style>
-    </dsp:sp>
-    <dsp:sp modelId="{BA686BC1-F7AD-4885-8EB6-68B6E7717DDD}">
-      <dsp:nvSpPr>
-        <dsp:cNvPr id="0" name=""/>
-        <dsp:cNvSpPr/>
-      </dsp:nvSpPr>
-      <dsp:spPr>
-        <a:xfrm>
-          <a:off x="5646878" y="1655101"/>
-          <a:ext cx="1791477" cy="1103400"/>
-        </a:xfrm>
-        <a:prstGeom prst="rect">
-          <a:avLst/>
-        </a:prstGeom>
-        <a:noFill/>
-        <a:ln>
-          <a:noFill/>
-        </a:ln>
-        <a:effectLst/>
-      </dsp:spPr>
-      <dsp:style>
-        <a:lnRef idx="0">
-          <a:scrgbClr r="0" g="0" b="0"/>
-        </a:lnRef>
-        <a:fillRef idx="0">
-          <a:scrgbClr r="0" g="0" b="0"/>
-        </a:fillRef>
-        <a:effectRef idx="0">
-          <a:scrgbClr r="0" g="0" b="0"/>
-        </a:effectRef>
-        <a:fontRef idx="minor"/>
-      </dsp:style>
-      <dsp:txBody>
-        <a:bodyPr spcFirstLastPara="0" vert="horz" wrap="square" lIns="263144" tIns="263144" rIns="263144" bIns="263144" numCol="1" spcCol="1270" anchor="t" anchorCtr="0">
-          <a:noAutofit/>
-        </a:bodyPr>
-        <a:lstStyle/>
-        <a:p>
-          <a:pPr marL="0" lvl="0" indent="0" algn="ctr" defTabSz="1644650">
-            <a:lnSpc>
-              <a:spcPct val="90000"/>
-            </a:lnSpc>
-            <a:spcBef>
-              <a:spcPct val="0"/>
-            </a:spcBef>
-            <a:spcAft>
-              <a:spcPct val="35000"/>
-            </a:spcAft>
-            <a:buNone/>
-          </a:pPr>
-          <a:r>
-            <a:rPr lang="en-US" altLang="zh-TW" sz="3700" kern="1200" dirty="0">
-              <a:latin typeface="Times New Roman" panose="02020603050405020304" pitchFamily="18" charset="0"/>
-              <a:cs typeface="Times New Roman" panose="02020603050405020304" pitchFamily="18" charset="0"/>
-            </a:rPr>
-            <a:t>AI</a:t>
-          </a:r>
-          <a:endParaRPr lang="zh-TW" altLang="en-US" sz="3700" kern="1200" dirty="0">
-            <a:latin typeface="Times New Roman" panose="02020603050405020304" pitchFamily="18" charset="0"/>
-            <a:cs typeface="Times New Roman" panose="02020603050405020304" pitchFamily="18" charset="0"/>
-          </a:endParaRPr>
-        </a:p>
-      </dsp:txBody>
-      <dsp:txXfrm>
-        <a:off x="5646878" y="1655101"/>
-        <a:ext cx="1791477" cy="1103400"/>
-      </dsp:txXfrm>
-    </dsp:sp>
-    <dsp:sp modelId="{394A1AED-D461-4CB8-81C8-FE05655CE086}">
-      <dsp:nvSpPr>
-        <dsp:cNvPr id="0" name=""/>
-        <dsp:cNvSpPr/>
-      </dsp:nvSpPr>
-      <dsp:spPr>
-        <a:xfrm>
-          <a:off x="6404692" y="1241325"/>
-          <a:ext cx="275850" cy="275850"/>
-        </a:xfrm>
-        <a:prstGeom prst="ellipse">
-          <a:avLst/>
-        </a:prstGeom>
-        <a:solidFill>
-          <a:schemeClr val="accent1">
-            <a:hueOff val="0"/>
-            <a:satOff val="0"/>
-            <a:lumOff val="0"/>
-            <a:alphaOff val="0"/>
-          </a:schemeClr>
-        </a:solidFill>
-        <a:ln w="15875" cap="flat" cmpd="sng" algn="ctr">
-          <a:solidFill>
-            <a:schemeClr val="lt1">
-              <a:hueOff val="0"/>
-              <a:satOff val="0"/>
-              <a:lumOff val="0"/>
-              <a:alphaOff val="0"/>
-            </a:schemeClr>
-          </a:solidFill>
-          <a:prstDash val="solid"/>
-        </a:ln>
-        <a:effectLst/>
-      </dsp:spPr>
-      <dsp:style>
-        <a:lnRef idx="2">
-          <a:scrgbClr r="0" g="0" b="0"/>
-        </a:lnRef>
-        <a:fillRef idx="1">
-          <a:scrgbClr r="0" g="0" b="0"/>
-        </a:fillRef>
-        <a:effectRef idx="0">
-          <a:scrgbClr r="0" g="0" b="0"/>
-        </a:effectRef>
-        <a:fontRef idx="minor">
-          <a:schemeClr val="lt1"/>
-        </a:fontRef>
-      </dsp:style>
-    </dsp:sp>
-  </dsp:spTree>
-</dsp:drawing>
-</file>
-
-<file path=ppt/diagrams/drawing2.xml><?xml version="1.0" encoding="utf-8"?>
 <dsp:drawing xmlns:dgm="http://schemas.openxmlformats.org/drawingml/2006/diagram" xmlns:dsp="http://schemas.microsoft.com/office/drawing/2008/diagram" xmlns:a="http://schemas.openxmlformats.org/drawingml/2006/main">
   <dsp:spTree>
     <dsp:nvGrpSpPr>
@@ -3550,1313 +1981,7 @@
 </dgm:layoutDef>
 </file>
 
-<file path=ppt/diagrams/layout2.xml><?xml version="1.0" encoding="utf-8"?>
-<dgm:layoutDef xmlns:dgm="http://schemas.openxmlformats.org/drawingml/2006/diagram" xmlns:a="http://schemas.openxmlformats.org/drawingml/2006/main" uniqueId="urn:microsoft.com/office/officeart/2005/8/layout/hProcess11">
-  <dgm:title val=""/>
-  <dgm:desc val=""/>
-  <dgm:catLst>
-    <dgm:cat type="process" pri="8000"/>
-    <dgm:cat type="convert" pri="14000"/>
-  </dgm:catLst>
-  <dgm:sampData useDef="1">
-    <dgm:dataModel>
-      <dgm:ptLst/>
-      <dgm:bg/>
-      <dgm:whole/>
-    </dgm:dataModel>
-  </dgm:sampData>
-  <dgm:styleData>
-    <dgm:dataModel>
-      <dgm:ptLst>
-        <dgm:pt modelId="0" type="doc"/>
-        <dgm:pt modelId="1"/>
-        <dgm:pt modelId="2"/>
-      </dgm:ptLst>
-      <dgm:cxnLst>
-        <dgm:cxn modelId="4" srcId="0" destId="1" srcOrd="0" destOrd="0"/>
-        <dgm:cxn modelId="5" srcId="0" destId="2" srcOrd="1" destOrd="0"/>
-      </dgm:cxnLst>
-      <dgm:bg/>
-      <dgm:whole/>
-    </dgm:dataModel>
-  </dgm:styleData>
-  <dgm:clrData>
-    <dgm:dataModel>
-      <dgm:ptLst>
-        <dgm:pt modelId="0" type="doc"/>
-        <dgm:pt modelId="1"/>
-        <dgm:pt modelId="2"/>
-        <dgm:pt modelId="3"/>
-        <dgm:pt modelId="4"/>
-      </dgm:ptLst>
-      <dgm:cxnLst>
-        <dgm:cxn modelId="5" srcId="0" destId="1" srcOrd="0" destOrd="0"/>
-        <dgm:cxn modelId="6" srcId="0" destId="2" srcOrd="1" destOrd="0"/>
-        <dgm:cxn modelId="7" srcId="0" destId="3" srcOrd="2" destOrd="0"/>
-        <dgm:cxn modelId="8" srcId="0" destId="4" srcOrd="3" destOrd="0"/>
-      </dgm:cxnLst>
-      <dgm:bg/>
-      <dgm:whole/>
-    </dgm:dataModel>
-  </dgm:clrData>
-  <dgm:layoutNode name="Name0">
-    <dgm:varLst>
-      <dgm:dir/>
-      <dgm:resizeHandles val="exact"/>
-    </dgm:varLst>
-    <dgm:alg type="composite"/>
-    <dgm:shape xmlns:r="http://schemas.openxmlformats.org/officeDocument/2006/relationships" r:blip="">
-      <dgm:adjLst/>
-    </dgm:shape>
-    <dgm:presOf/>
-    <dgm:choose name="Name1">
-      <dgm:if name="Name2" func="var" arg="dir" op="equ" val="norm">
-        <dgm:constrLst>
-          <dgm:constr type="w" for="ch" forName="arrow" refType="w"/>
-          <dgm:constr type="h" for="ch" forName="arrow" refType="h" fact="0.4"/>
-          <dgm:constr type="ctrY" for="ch" forName="arrow" refType="h" fact="0.5"/>
-          <dgm:constr type="l" for="ch" forName="arrow"/>
-          <dgm:constr type="w" for="ch" forName="points" refType="w" fact="0.9"/>
-          <dgm:constr type="h" for="ch" forName="points" refType="h"/>
-          <dgm:constr type="t" for="ch" forName="points"/>
-          <dgm:constr type="l" for="ch" forName="points"/>
-        </dgm:constrLst>
-      </dgm:if>
-      <dgm:else name="Name3">
-        <dgm:constrLst>
-          <dgm:constr type="w" for="ch" forName="arrow" refType="w"/>
-          <dgm:constr type="h" for="ch" forName="arrow" refType="h" fact="0.4"/>
-          <dgm:constr type="ctrY" for="ch" forName="arrow" refType="h" fact="0.5"/>
-          <dgm:constr type="r" for="ch" forName="arrow" refType="w"/>
-          <dgm:constr type="w" for="ch" forName="points" refType="w" fact="0.9"/>
-          <dgm:constr type="h" for="ch" forName="points" refType="h"/>
-          <dgm:constr type="t" for="ch" forName="points"/>
-          <dgm:constr type="r" for="ch" forName="points" refType="w"/>
-        </dgm:constrLst>
-      </dgm:else>
-    </dgm:choose>
-    <dgm:ruleLst/>
-    <dgm:layoutNode name="arrow" styleLbl="bgShp">
-      <dgm:alg type="sp"/>
-      <dgm:choose name="Name4">
-        <dgm:if name="Name5" func="var" arg="dir" op="equ" val="norm">
-          <dgm:shape xmlns:r="http://schemas.openxmlformats.org/officeDocument/2006/relationships" type="notchedRightArrow" r:blip="">
-            <dgm:adjLst/>
-          </dgm:shape>
-        </dgm:if>
-        <dgm:else name="Name6">
-          <dgm:shape xmlns:r="http://schemas.openxmlformats.org/officeDocument/2006/relationships" rot="180" type="notchedRightArrow" r:blip="">
-            <dgm:adjLst/>
-          </dgm:shape>
-        </dgm:else>
-      </dgm:choose>
-      <dgm:presOf/>
-      <dgm:constrLst/>
-      <dgm:ruleLst/>
-    </dgm:layoutNode>
-    <dgm:layoutNode name="points">
-      <dgm:choose name="Name7">
-        <dgm:if name="Name8" func="var" arg="dir" op="equ" val="norm">
-          <dgm:alg type="lin">
-            <dgm:param type="linDir" val="fromL"/>
-          </dgm:alg>
-        </dgm:if>
-        <dgm:else name="Name9">
-          <dgm:alg type="lin">
-            <dgm:param type="linDir" val="fromR"/>
-          </dgm:alg>
-        </dgm:else>
-      </dgm:choose>
-      <dgm:shape xmlns:r="http://schemas.openxmlformats.org/officeDocument/2006/relationships" r:blip="">
-        <dgm:adjLst/>
-      </dgm:shape>
-      <dgm:presOf/>
-      <dgm:constrLst>
-        <dgm:constr type="w" for="ch" forName="compositeA" refType="w"/>
-        <dgm:constr type="h" for="ch" forName="compositeA" refType="h"/>
-        <dgm:constr type="w" for="ch" forName="compositeB" refType="w" refFor="ch" refForName="compositeA" op="equ"/>
-        <dgm:constr type="h" for="ch" forName="compositeB" refType="h" refFor="ch" refForName="compositeA" op="equ"/>
-        <dgm:constr type="primFontSz" for="des" ptType="node" op="equ" val="65"/>
-        <dgm:constr type="w" for="ch" forName="space" refType="w" refFor="ch" refForName="compositeA" op="equ" fact="0.05"/>
-      </dgm:constrLst>
-      <dgm:ruleLst/>
-      <dgm:forEach name="Name10" axis="ch" ptType="node">
-        <dgm:choose name="Name11">
-          <dgm:if name="Name12" axis="self" ptType="node" func="posOdd" op="equ" val="1">
-            <dgm:layoutNode name="compositeA">
-              <dgm:alg type="composite"/>
-              <dgm:shape xmlns:r="http://schemas.openxmlformats.org/officeDocument/2006/relationships" r:blip="">
-                <dgm:adjLst/>
-              </dgm:shape>
-              <dgm:presOf/>
-              <dgm:constrLst>
-                <dgm:constr type="w" for="ch" forName="textA" refType="w"/>
-                <dgm:constr type="h" for="ch" forName="textA" refType="h" fact="0.4"/>
-                <dgm:constr type="t" for="ch" forName="textA"/>
-                <dgm:constr type="l" for="ch" forName="textA"/>
-                <dgm:constr type="h" for="ch" forName="circleA" refType="h" fact="0.1"/>
-                <dgm:constr type="h" for="ch" forName="circleA" refType="w" op="lte"/>
-                <dgm:constr type="w" for="ch" forName="circleA" refType="h" refFor="ch" refForName="circleA" op="equ"/>
-                <dgm:constr type="ctrY" for="ch" forName="circleA" refType="h" fact="0.5"/>
-                <dgm:constr type="ctrX" for="ch" forName="circleA" refType="w" refFor="ch" refForName="textA" fact="0.5"/>
-                <dgm:constr type="w" for="ch" forName="spaceA" refType="w"/>
-                <dgm:constr type="h" for="ch" forName="spaceA" refType="h" fact="0.4"/>
-                <dgm:constr type="b" for="ch" forName="spaceA" refType="h"/>
-                <dgm:constr type="l" for="ch" forName="spaceA"/>
-              </dgm:constrLst>
-              <dgm:ruleLst/>
-              <dgm:layoutNode name="textA" styleLbl="revTx">
-                <dgm:varLst>
-                  <dgm:bulletEnabled val="1"/>
-                </dgm:varLst>
-                <dgm:alg type="tx">
-                  <dgm:param type="txAnchorVert" val="b"/>
-                  <dgm:param type="txAnchorVertCh" val="b"/>
-                  <dgm:param type="txAnchorHorzCh" val="ctr"/>
-                </dgm:alg>
-                <dgm:shape xmlns:r="http://schemas.openxmlformats.org/officeDocument/2006/relationships" type="rect" r:blip="">
-                  <dgm:adjLst/>
-                </dgm:shape>
-                <dgm:presOf axis="desOrSelf" ptType="node"/>
-                <dgm:constrLst/>
-                <dgm:ruleLst>
-                  <dgm:rule type="primFontSz" val="5" fact="NaN" max="NaN"/>
-                </dgm:ruleLst>
-              </dgm:layoutNode>
-              <dgm:layoutNode name="circleA">
-                <dgm:alg type="sp"/>
-                <dgm:shape xmlns:r="http://schemas.openxmlformats.org/officeDocument/2006/relationships" type="ellipse" r:blip="">
-                  <dgm:adjLst/>
-                </dgm:shape>
-                <dgm:presOf/>
-                <dgm:constrLst/>
-                <dgm:ruleLst/>
-              </dgm:layoutNode>
-              <dgm:layoutNode name="spaceA">
-                <dgm:alg type="sp"/>
-                <dgm:shape xmlns:r="http://schemas.openxmlformats.org/officeDocument/2006/relationships" r:blip="">
-                  <dgm:adjLst/>
-                </dgm:shape>
-                <dgm:presOf/>
-                <dgm:constrLst/>
-                <dgm:ruleLst/>
-              </dgm:layoutNode>
-            </dgm:layoutNode>
-          </dgm:if>
-          <dgm:else name="Name13">
-            <dgm:layoutNode name="compositeB">
-              <dgm:alg type="composite"/>
-              <dgm:shape xmlns:r="http://schemas.openxmlformats.org/officeDocument/2006/relationships" r:blip="">
-                <dgm:adjLst/>
-              </dgm:shape>
-              <dgm:presOf/>
-              <dgm:constrLst>
-                <dgm:constr type="w" for="ch" forName="textB" refType="w"/>
-                <dgm:constr type="h" for="ch" forName="textB" refType="h" fact="0.4"/>
-                <dgm:constr type="b" for="ch" forName="textB" refType="h"/>
-                <dgm:constr type="l" for="ch" forName="textB"/>
-                <dgm:constr type="h" for="ch" forName="circleB" refType="h" fact="0.1"/>
-                <dgm:constr type="w" for="ch" forName="circleB" refType="h" refFor="ch" refForName="circleB" op="equ"/>
-                <dgm:constr type="h" for="ch" forName="circleB" refType="w" op="lte"/>
-                <dgm:constr type="ctrY" for="ch" forName="circleB" refType="h" fact="0.5"/>
-                <dgm:constr type="ctrX" for="ch" forName="circleB" refType="w" refFor="ch" refForName="textB" fact="0.5"/>
-                <dgm:constr type="w" for="ch" forName="spaceB" refType="w"/>
-                <dgm:constr type="h" for="ch" forName="spaceB" refType="h" fact="0.4"/>
-                <dgm:constr type="t" for="ch" forName="spaceB"/>
-                <dgm:constr type="l" for="ch" forName="spaceB"/>
-              </dgm:constrLst>
-              <dgm:ruleLst/>
-              <dgm:layoutNode name="textB" styleLbl="revTx">
-                <dgm:varLst>
-                  <dgm:bulletEnabled val="1"/>
-                </dgm:varLst>
-                <dgm:alg type="tx">
-                  <dgm:param type="txAnchorVert" val="t"/>
-                  <dgm:param type="txAnchorVertCh" val="t"/>
-                  <dgm:param type="txAnchorHorzCh" val="ctr"/>
-                </dgm:alg>
-                <dgm:shape xmlns:r="http://schemas.openxmlformats.org/officeDocument/2006/relationships" type="rect" r:blip="">
-                  <dgm:adjLst/>
-                </dgm:shape>
-                <dgm:presOf axis="desOrSelf" ptType="node"/>
-                <dgm:constrLst/>
-                <dgm:ruleLst>
-                  <dgm:rule type="primFontSz" val="5" fact="NaN" max="NaN"/>
-                </dgm:ruleLst>
-              </dgm:layoutNode>
-              <dgm:layoutNode name="circleB">
-                <dgm:alg type="sp"/>
-                <dgm:shape xmlns:r="http://schemas.openxmlformats.org/officeDocument/2006/relationships" type="ellipse" r:blip="">
-                  <dgm:adjLst/>
-                </dgm:shape>
-                <dgm:presOf/>
-                <dgm:constrLst/>
-                <dgm:ruleLst/>
-              </dgm:layoutNode>
-              <dgm:layoutNode name="spaceB">
-                <dgm:alg type="sp"/>
-                <dgm:shape xmlns:r="http://schemas.openxmlformats.org/officeDocument/2006/relationships" r:blip="">
-                  <dgm:adjLst/>
-                </dgm:shape>
-                <dgm:presOf/>
-                <dgm:constrLst/>
-                <dgm:ruleLst/>
-              </dgm:layoutNode>
-            </dgm:layoutNode>
-          </dgm:else>
-        </dgm:choose>
-        <dgm:forEach name="Name14" axis="followSib" ptType="sibTrans" cnt="1">
-          <dgm:layoutNode name="space">
-            <dgm:alg type="sp"/>
-            <dgm:shape xmlns:r="http://schemas.openxmlformats.org/officeDocument/2006/relationships" r:blip="">
-              <dgm:adjLst/>
-            </dgm:shape>
-            <dgm:presOf/>
-            <dgm:constrLst/>
-            <dgm:ruleLst/>
-          </dgm:layoutNode>
-        </dgm:forEach>
-      </dgm:forEach>
-    </dgm:layoutNode>
-  </dgm:layoutNode>
-</dgm:layoutDef>
-</file>
-
 <file path=ppt/diagrams/quickStyle1.xml><?xml version="1.0" encoding="utf-8"?>
-<dgm:styleDef xmlns:dgm="http://schemas.openxmlformats.org/drawingml/2006/diagram" xmlns:a="http://schemas.openxmlformats.org/drawingml/2006/main" uniqueId="urn:microsoft.com/office/officeart/2005/8/quickstyle/simple1">
-  <dgm:title val=""/>
-  <dgm:desc val=""/>
-  <dgm:catLst>
-    <dgm:cat type="simple" pri="10100"/>
-  </dgm:catLst>
-  <dgm:scene3d>
-    <a:camera prst="orthographicFront"/>
-    <a:lightRig rig="threePt" dir="t"/>
-  </dgm:scene3d>
-  <dgm:styleLbl name="node0">
-    <dgm:scene3d>
-      <a:camera prst="orthographicFront"/>
-      <a:lightRig rig="threePt" dir="t"/>
-    </dgm:scene3d>
-    <dgm:sp3d/>
-    <dgm:txPr/>
-    <dgm:style>
-      <a:lnRef idx="2">
-        <a:scrgbClr r="0" g="0" b="0"/>
-      </a:lnRef>
-      <a:fillRef idx="1">
-        <a:scrgbClr r="0" g="0" b="0"/>
-      </a:fillRef>
-      <a:effectRef idx="0">
-        <a:scrgbClr r="0" g="0" b="0"/>
-      </a:effectRef>
-      <a:fontRef idx="minor">
-        <a:schemeClr val="lt1"/>
-      </a:fontRef>
-    </dgm:style>
-  </dgm:styleLbl>
-  <dgm:styleLbl name="lnNode1">
-    <dgm:scene3d>
-      <a:camera prst="orthographicFront"/>
-      <a:lightRig rig="threePt" dir="t"/>
-    </dgm:scene3d>
-    <dgm:sp3d/>
-    <dgm:txPr/>
-    <dgm:style>
-      <a:lnRef idx="2">
-        <a:scrgbClr r="0" g="0" b="0"/>
-      </a:lnRef>
-      <a:fillRef idx="1">
-        <a:scrgbClr r="0" g="0" b="0"/>
-      </a:fillRef>
-      <a:effectRef idx="0">
-        <a:scrgbClr r="0" g="0" b="0"/>
-      </a:effectRef>
-      <a:fontRef idx="minor">
-        <a:schemeClr val="lt1"/>
-      </a:fontRef>
-    </dgm:style>
-  </dgm:styleLbl>
-  <dgm:styleLbl name="vennNode1">
-    <dgm:scene3d>
-      <a:camera prst="orthographicFront"/>
-      <a:lightRig rig="threePt" dir="t"/>
-    </dgm:scene3d>
-    <dgm:sp3d/>
-    <dgm:txPr/>
-    <dgm:style>
-      <a:lnRef idx="2">
-        <a:scrgbClr r="0" g="0" b="0"/>
-      </a:lnRef>
-      <a:fillRef idx="1">
-        <a:scrgbClr r="0" g="0" b="0"/>
-      </a:fillRef>
-      <a:effectRef idx="0">
-        <a:scrgbClr r="0" g="0" b="0"/>
-      </a:effectRef>
-      <a:fontRef idx="minor">
-        <a:schemeClr val="tx1"/>
-      </a:fontRef>
-    </dgm:style>
-  </dgm:styleLbl>
-  <dgm:styleLbl name="alignNode1">
-    <dgm:scene3d>
-      <a:camera prst="orthographicFront"/>
-      <a:lightRig rig="threePt" dir="t"/>
-    </dgm:scene3d>
-    <dgm:sp3d/>
-    <dgm:txPr/>
-    <dgm:style>
-      <a:lnRef idx="2">
-        <a:scrgbClr r="0" g="0" b="0"/>
-      </a:lnRef>
-      <a:fillRef idx="1">
-        <a:scrgbClr r="0" g="0" b="0"/>
-      </a:fillRef>
-      <a:effectRef idx="0">
-        <a:scrgbClr r="0" g="0" b="0"/>
-      </a:effectRef>
-      <a:fontRef idx="minor">
-        <a:schemeClr val="lt1"/>
-      </a:fontRef>
-    </dgm:style>
-  </dgm:styleLbl>
-  <dgm:styleLbl name="node1">
-    <dgm:scene3d>
-      <a:camera prst="orthographicFront"/>
-      <a:lightRig rig="threePt" dir="t"/>
-    </dgm:scene3d>
-    <dgm:sp3d/>
-    <dgm:txPr/>
-    <dgm:style>
-      <a:lnRef idx="2">
-        <a:scrgbClr r="0" g="0" b="0"/>
-      </a:lnRef>
-      <a:fillRef idx="1">
-        <a:scrgbClr r="0" g="0" b="0"/>
-      </a:fillRef>
-      <a:effectRef idx="0">
-        <a:scrgbClr r="0" g="0" b="0"/>
-      </a:effectRef>
-      <a:fontRef idx="minor">
-        <a:schemeClr val="lt1"/>
-      </a:fontRef>
-    </dgm:style>
-  </dgm:styleLbl>
-  <dgm:styleLbl name="node2">
-    <dgm:scene3d>
-      <a:camera prst="orthographicFront"/>
-      <a:lightRig rig="threePt" dir="t"/>
-    </dgm:scene3d>
-    <dgm:sp3d/>
-    <dgm:txPr/>
-    <dgm:style>
-      <a:lnRef idx="2">
-        <a:scrgbClr r="0" g="0" b="0"/>
-      </a:lnRef>
-      <a:fillRef idx="1">
-        <a:scrgbClr r="0" g="0" b="0"/>
-      </a:fillRef>
-      <a:effectRef idx="0">
-        <a:scrgbClr r="0" g="0" b="0"/>
-      </a:effectRef>
-      <a:fontRef idx="minor">
-        <a:schemeClr val="lt1"/>
-      </a:fontRef>
-    </dgm:style>
-  </dgm:styleLbl>
-  <dgm:styleLbl name="node3">
-    <dgm:scene3d>
-      <a:camera prst="orthographicFront"/>
-      <a:lightRig rig="threePt" dir="t"/>
-    </dgm:scene3d>
-    <dgm:sp3d/>
-    <dgm:txPr/>
-    <dgm:style>
-      <a:lnRef idx="2">
-        <a:scrgbClr r="0" g="0" b="0"/>
-      </a:lnRef>
-      <a:fillRef idx="1">
-        <a:scrgbClr r="0" g="0" b="0"/>
-      </a:fillRef>
-      <a:effectRef idx="0">
-        <a:scrgbClr r="0" g="0" b="0"/>
-      </a:effectRef>
-      <a:fontRef idx="minor">
-        <a:schemeClr val="lt1"/>
-      </a:fontRef>
-    </dgm:style>
-  </dgm:styleLbl>
-  <dgm:styleLbl name="node4">
-    <dgm:scene3d>
-      <a:camera prst="orthographicFront"/>
-      <a:lightRig rig="threePt" dir="t"/>
-    </dgm:scene3d>
-    <dgm:sp3d/>
-    <dgm:txPr/>
-    <dgm:style>
-      <a:lnRef idx="2">
-        <a:scrgbClr r="0" g="0" b="0"/>
-      </a:lnRef>
-      <a:fillRef idx="1">
-        <a:scrgbClr r="0" g="0" b="0"/>
-      </a:fillRef>
-      <a:effectRef idx="0">
-        <a:scrgbClr r="0" g="0" b="0"/>
-      </a:effectRef>
-      <a:fontRef idx="minor">
-        <a:schemeClr val="lt1"/>
-      </a:fontRef>
-    </dgm:style>
-  </dgm:styleLbl>
-  <dgm:styleLbl name="fgImgPlace1">
-    <dgm:scene3d>
-      <a:camera prst="orthographicFront"/>
-      <a:lightRig rig="threePt" dir="t"/>
-    </dgm:scene3d>
-    <dgm:sp3d/>
-    <dgm:txPr/>
-    <dgm:style>
-      <a:lnRef idx="2">
-        <a:scrgbClr r="0" g="0" b="0"/>
-      </a:lnRef>
-      <a:fillRef idx="1">
-        <a:scrgbClr r="0" g="0" b="0"/>
-      </a:fillRef>
-      <a:effectRef idx="0">
-        <a:scrgbClr r="0" g="0" b="0"/>
-      </a:effectRef>
-      <a:fontRef idx="minor"/>
-    </dgm:style>
-  </dgm:styleLbl>
-  <dgm:styleLbl name="alignImgPlace1">
-    <dgm:scene3d>
-      <a:camera prst="orthographicFront"/>
-      <a:lightRig rig="threePt" dir="t"/>
-    </dgm:scene3d>
-    <dgm:sp3d/>
-    <dgm:txPr/>
-    <dgm:style>
-      <a:lnRef idx="2">
-        <a:scrgbClr r="0" g="0" b="0"/>
-      </a:lnRef>
-      <a:fillRef idx="1">
-        <a:scrgbClr r="0" g="0" b="0"/>
-      </a:fillRef>
-      <a:effectRef idx="0">
-        <a:scrgbClr r="0" g="0" b="0"/>
-      </a:effectRef>
-      <a:fontRef idx="minor"/>
-    </dgm:style>
-  </dgm:styleLbl>
-  <dgm:styleLbl name="bgImgPlace1">
-    <dgm:scene3d>
-      <a:camera prst="orthographicFront"/>
-      <a:lightRig rig="threePt" dir="t"/>
-    </dgm:scene3d>
-    <dgm:sp3d/>
-    <dgm:txPr/>
-    <dgm:style>
-      <a:lnRef idx="2">
-        <a:scrgbClr r="0" g="0" b="0"/>
-      </a:lnRef>
-      <a:fillRef idx="1">
-        <a:scrgbClr r="0" g="0" b="0"/>
-      </a:fillRef>
-      <a:effectRef idx="0">
-        <a:scrgbClr r="0" g="0" b="0"/>
-      </a:effectRef>
-      <a:fontRef idx="minor"/>
-    </dgm:style>
-  </dgm:styleLbl>
-  <dgm:styleLbl name="sibTrans2D1">
-    <dgm:scene3d>
-      <a:camera prst="orthographicFront"/>
-      <a:lightRig rig="threePt" dir="t"/>
-    </dgm:scene3d>
-    <dgm:sp3d/>
-    <dgm:txPr/>
-    <dgm:style>
-      <a:lnRef idx="0">
-        <a:scrgbClr r="0" g="0" b="0"/>
-      </a:lnRef>
-      <a:fillRef idx="1">
-        <a:scrgbClr r="0" g="0" b="0"/>
-      </a:fillRef>
-      <a:effectRef idx="0">
-        <a:scrgbClr r="0" g="0" b="0"/>
-      </a:effectRef>
-      <a:fontRef idx="minor">
-        <a:schemeClr val="lt1"/>
-      </a:fontRef>
-    </dgm:style>
-  </dgm:styleLbl>
-  <dgm:styleLbl name="fgSibTrans2D1">
-    <dgm:scene3d>
-      <a:camera prst="orthographicFront"/>
-      <a:lightRig rig="threePt" dir="t"/>
-    </dgm:scene3d>
-    <dgm:sp3d/>
-    <dgm:txPr/>
-    <dgm:style>
-      <a:lnRef idx="0">
-        <a:scrgbClr r="0" g="0" b="0"/>
-      </a:lnRef>
-      <a:fillRef idx="1">
-        <a:scrgbClr r="0" g="0" b="0"/>
-      </a:fillRef>
-      <a:effectRef idx="0">
-        <a:scrgbClr r="0" g="0" b="0"/>
-      </a:effectRef>
-      <a:fontRef idx="minor">
-        <a:schemeClr val="lt1"/>
-      </a:fontRef>
-    </dgm:style>
-  </dgm:styleLbl>
-  <dgm:styleLbl name="bgSibTrans2D1">
-    <dgm:scene3d>
-      <a:camera prst="orthographicFront"/>
-      <a:lightRig rig="threePt" dir="t"/>
-    </dgm:scene3d>
-    <dgm:sp3d/>
-    <dgm:txPr/>
-    <dgm:style>
-      <a:lnRef idx="0">
-        <a:scrgbClr r="0" g="0" b="0"/>
-      </a:lnRef>
-      <a:fillRef idx="1">
-        <a:scrgbClr r="0" g="0" b="0"/>
-      </a:fillRef>
-      <a:effectRef idx="0">
-        <a:scrgbClr r="0" g="0" b="0"/>
-      </a:effectRef>
-      <a:fontRef idx="minor">
-        <a:schemeClr val="lt1"/>
-      </a:fontRef>
-    </dgm:style>
-  </dgm:styleLbl>
-  <dgm:styleLbl name="sibTrans1D1">
-    <dgm:scene3d>
-      <a:camera prst="orthographicFront"/>
-      <a:lightRig rig="threePt" dir="t"/>
-    </dgm:scene3d>
-    <dgm:sp3d/>
-    <dgm:txPr/>
-    <dgm:style>
-      <a:lnRef idx="1">
-        <a:scrgbClr r="0" g="0" b="0"/>
-      </a:lnRef>
-      <a:fillRef idx="0">
-        <a:scrgbClr r="0" g="0" b="0"/>
-      </a:fillRef>
-      <a:effectRef idx="0">
-        <a:scrgbClr r="0" g="0" b="0"/>
-      </a:effectRef>
-      <a:fontRef idx="minor"/>
-    </dgm:style>
-  </dgm:styleLbl>
-  <dgm:styleLbl name="callout">
-    <dgm:scene3d>
-      <a:camera prst="orthographicFront"/>
-      <a:lightRig rig="threePt" dir="t"/>
-    </dgm:scene3d>
-    <dgm:sp3d/>
-    <dgm:txPr/>
-    <dgm:style>
-      <a:lnRef idx="2">
-        <a:scrgbClr r="0" g="0" b="0"/>
-      </a:lnRef>
-      <a:fillRef idx="1">
-        <a:scrgbClr r="0" g="0" b="0"/>
-      </a:fillRef>
-      <a:effectRef idx="0">
-        <a:scrgbClr r="0" g="0" b="0"/>
-      </a:effectRef>
-      <a:fontRef idx="minor"/>
-    </dgm:style>
-  </dgm:styleLbl>
-  <dgm:styleLbl name="asst0">
-    <dgm:scene3d>
-      <a:camera prst="orthographicFront"/>
-      <a:lightRig rig="threePt" dir="t"/>
-    </dgm:scene3d>
-    <dgm:sp3d/>
-    <dgm:txPr/>
-    <dgm:style>
-      <a:lnRef idx="2">
-        <a:scrgbClr r="0" g="0" b="0"/>
-      </a:lnRef>
-      <a:fillRef idx="1">
-        <a:scrgbClr r="0" g="0" b="0"/>
-      </a:fillRef>
-      <a:effectRef idx="0">
-        <a:scrgbClr r="0" g="0" b="0"/>
-      </a:effectRef>
-      <a:fontRef idx="minor">
-        <a:schemeClr val="lt1"/>
-      </a:fontRef>
-    </dgm:style>
-  </dgm:styleLbl>
-  <dgm:styleLbl name="asst1">
-    <dgm:scene3d>
-      <a:camera prst="orthographicFront"/>
-      <a:lightRig rig="threePt" dir="t"/>
-    </dgm:scene3d>
-    <dgm:sp3d/>
-    <dgm:txPr/>
-    <dgm:style>
-      <a:lnRef idx="2">
-        <a:scrgbClr r="0" g="0" b="0"/>
-      </a:lnRef>
-      <a:fillRef idx="1">
-        <a:scrgbClr r="0" g="0" b="0"/>
-      </a:fillRef>
-      <a:effectRef idx="0">
-        <a:scrgbClr r="0" g="0" b="0"/>
-      </a:effectRef>
-      <a:fontRef idx="minor">
-        <a:schemeClr val="lt1"/>
-      </a:fontRef>
-    </dgm:style>
-  </dgm:styleLbl>
-  <dgm:styleLbl name="asst2">
-    <dgm:scene3d>
-      <a:camera prst="orthographicFront"/>
-      <a:lightRig rig="threePt" dir="t"/>
-    </dgm:scene3d>
-    <dgm:sp3d/>
-    <dgm:txPr/>
-    <dgm:style>
-      <a:lnRef idx="2">
-        <a:scrgbClr r="0" g="0" b="0"/>
-      </a:lnRef>
-      <a:fillRef idx="1">
-        <a:scrgbClr r="0" g="0" b="0"/>
-      </a:fillRef>
-      <a:effectRef idx="0">
-        <a:scrgbClr r="0" g="0" b="0"/>
-      </a:effectRef>
-      <a:fontRef idx="minor">
-        <a:schemeClr val="lt1"/>
-      </a:fontRef>
-    </dgm:style>
-  </dgm:styleLbl>
-  <dgm:styleLbl name="asst3">
-    <dgm:scene3d>
-      <a:camera prst="orthographicFront"/>
-      <a:lightRig rig="threePt" dir="t"/>
-    </dgm:scene3d>
-    <dgm:sp3d/>
-    <dgm:txPr/>
-    <dgm:style>
-      <a:lnRef idx="2">
-        <a:scrgbClr r="0" g="0" b="0"/>
-      </a:lnRef>
-      <a:fillRef idx="1">
-        <a:scrgbClr r="0" g="0" b="0"/>
-      </a:fillRef>
-      <a:effectRef idx="0">
-        <a:scrgbClr r="0" g="0" b="0"/>
-      </a:effectRef>
-      <a:fontRef idx="minor">
-        <a:schemeClr val="lt1"/>
-      </a:fontRef>
-    </dgm:style>
-  </dgm:styleLbl>
-  <dgm:styleLbl name="asst4">
-    <dgm:scene3d>
-      <a:camera prst="orthographicFront"/>
-      <a:lightRig rig="threePt" dir="t"/>
-    </dgm:scene3d>
-    <dgm:sp3d/>
-    <dgm:txPr/>
-    <dgm:style>
-      <a:lnRef idx="2">
-        <a:scrgbClr r="0" g="0" b="0"/>
-      </a:lnRef>
-      <a:fillRef idx="1">
-        <a:scrgbClr r="0" g="0" b="0"/>
-      </a:fillRef>
-      <a:effectRef idx="0">
-        <a:scrgbClr r="0" g="0" b="0"/>
-      </a:effectRef>
-      <a:fontRef idx="minor">
-        <a:schemeClr val="lt1"/>
-      </a:fontRef>
-    </dgm:style>
-  </dgm:styleLbl>
-  <dgm:styleLbl name="parChTrans2D1">
-    <dgm:scene3d>
-      <a:camera prst="orthographicFront"/>
-      <a:lightRig rig="threePt" dir="t"/>
-    </dgm:scene3d>
-    <dgm:sp3d/>
-    <dgm:txPr/>
-    <dgm:style>
-      <a:lnRef idx="2">
-        <a:scrgbClr r="0" g="0" b="0"/>
-      </a:lnRef>
-      <a:fillRef idx="1">
-        <a:scrgbClr r="0" g="0" b="0"/>
-      </a:fillRef>
-      <a:effectRef idx="0">
-        <a:scrgbClr r="0" g="0" b="0"/>
-      </a:effectRef>
-      <a:fontRef idx="minor">
-        <a:schemeClr val="lt1"/>
-      </a:fontRef>
-    </dgm:style>
-  </dgm:styleLbl>
-  <dgm:styleLbl name="parChTrans2D2">
-    <dgm:scene3d>
-      <a:camera prst="orthographicFront"/>
-      <a:lightRig rig="threePt" dir="t"/>
-    </dgm:scene3d>
-    <dgm:sp3d/>
-    <dgm:txPr/>
-    <dgm:style>
-      <a:lnRef idx="2">
-        <a:scrgbClr r="0" g="0" b="0"/>
-      </a:lnRef>
-      <a:fillRef idx="1">
-        <a:scrgbClr r="0" g="0" b="0"/>
-      </a:fillRef>
-      <a:effectRef idx="0">
-        <a:scrgbClr r="0" g="0" b="0"/>
-      </a:effectRef>
-      <a:fontRef idx="minor">
-        <a:schemeClr val="lt1"/>
-      </a:fontRef>
-    </dgm:style>
-  </dgm:styleLbl>
-  <dgm:styleLbl name="parChTrans2D3">
-    <dgm:scene3d>
-      <a:camera prst="orthographicFront"/>
-      <a:lightRig rig="threePt" dir="t"/>
-    </dgm:scene3d>
-    <dgm:sp3d/>
-    <dgm:txPr/>
-    <dgm:style>
-      <a:lnRef idx="2">
-        <a:scrgbClr r="0" g="0" b="0"/>
-      </a:lnRef>
-      <a:fillRef idx="1">
-        <a:scrgbClr r="0" g="0" b="0"/>
-      </a:fillRef>
-      <a:effectRef idx="0">
-        <a:scrgbClr r="0" g="0" b="0"/>
-      </a:effectRef>
-      <a:fontRef idx="minor">
-        <a:schemeClr val="lt1"/>
-      </a:fontRef>
-    </dgm:style>
-  </dgm:styleLbl>
-  <dgm:styleLbl name="parChTrans2D4">
-    <dgm:scene3d>
-      <a:camera prst="orthographicFront"/>
-      <a:lightRig rig="threePt" dir="t"/>
-    </dgm:scene3d>
-    <dgm:sp3d/>
-    <dgm:txPr/>
-    <dgm:style>
-      <a:lnRef idx="2">
-        <a:scrgbClr r="0" g="0" b="0"/>
-      </a:lnRef>
-      <a:fillRef idx="1">
-        <a:scrgbClr r="0" g="0" b="0"/>
-      </a:fillRef>
-      <a:effectRef idx="0">
-        <a:scrgbClr r="0" g="0" b="0"/>
-      </a:effectRef>
-      <a:fontRef idx="minor">
-        <a:schemeClr val="lt1"/>
-      </a:fontRef>
-    </dgm:style>
-  </dgm:styleLbl>
-  <dgm:styleLbl name="parChTrans1D1">
-    <dgm:scene3d>
-      <a:camera prst="orthographicFront"/>
-      <a:lightRig rig="threePt" dir="t"/>
-    </dgm:scene3d>
-    <dgm:sp3d/>
-    <dgm:txPr/>
-    <dgm:style>
-      <a:lnRef idx="2">
-        <a:scrgbClr r="0" g="0" b="0"/>
-      </a:lnRef>
-      <a:fillRef idx="0">
-        <a:scrgbClr r="0" g="0" b="0"/>
-      </a:fillRef>
-      <a:effectRef idx="0">
-        <a:scrgbClr r="0" g="0" b="0"/>
-      </a:effectRef>
-      <a:fontRef idx="minor"/>
-    </dgm:style>
-  </dgm:styleLbl>
-  <dgm:styleLbl name="parChTrans1D2">
-    <dgm:scene3d>
-      <a:camera prst="orthographicFront"/>
-      <a:lightRig rig="threePt" dir="t"/>
-    </dgm:scene3d>
-    <dgm:sp3d/>
-    <dgm:txPr/>
-    <dgm:style>
-      <a:lnRef idx="2">
-        <a:scrgbClr r="0" g="0" b="0"/>
-      </a:lnRef>
-      <a:fillRef idx="0">
-        <a:scrgbClr r="0" g="0" b="0"/>
-      </a:fillRef>
-      <a:effectRef idx="0">
-        <a:scrgbClr r="0" g="0" b="0"/>
-      </a:effectRef>
-      <a:fontRef idx="minor"/>
-    </dgm:style>
-  </dgm:styleLbl>
-  <dgm:styleLbl name="parChTrans1D3">
-    <dgm:scene3d>
-      <a:camera prst="orthographicFront"/>
-      <a:lightRig rig="threePt" dir="t"/>
-    </dgm:scene3d>
-    <dgm:sp3d/>
-    <dgm:txPr/>
-    <dgm:style>
-      <a:lnRef idx="2">
-        <a:scrgbClr r="0" g="0" b="0"/>
-      </a:lnRef>
-      <a:fillRef idx="0">
-        <a:scrgbClr r="0" g="0" b="0"/>
-      </a:fillRef>
-      <a:effectRef idx="0">
-        <a:scrgbClr r="0" g="0" b="0"/>
-      </a:effectRef>
-      <a:fontRef idx="minor"/>
-    </dgm:style>
-  </dgm:styleLbl>
-  <dgm:styleLbl name="parChTrans1D4">
-    <dgm:scene3d>
-      <a:camera prst="orthographicFront"/>
-      <a:lightRig rig="threePt" dir="t"/>
-    </dgm:scene3d>
-    <dgm:sp3d/>
-    <dgm:txPr/>
-    <dgm:style>
-      <a:lnRef idx="2">
-        <a:scrgbClr r="0" g="0" b="0"/>
-      </a:lnRef>
-      <a:fillRef idx="0">
-        <a:scrgbClr r="0" g="0" b="0"/>
-      </a:fillRef>
-      <a:effectRef idx="0">
-        <a:scrgbClr r="0" g="0" b="0"/>
-      </a:effectRef>
-      <a:fontRef idx="minor"/>
-    </dgm:style>
-  </dgm:styleLbl>
-  <dgm:styleLbl name="fgAcc1">
-    <dgm:scene3d>
-      <a:camera prst="orthographicFront"/>
-      <a:lightRig rig="threePt" dir="t"/>
-    </dgm:scene3d>
-    <dgm:sp3d/>
-    <dgm:txPr/>
-    <dgm:style>
-      <a:lnRef idx="2">
-        <a:scrgbClr r="0" g="0" b="0"/>
-      </a:lnRef>
-      <a:fillRef idx="1">
-        <a:scrgbClr r="0" g="0" b="0"/>
-      </a:fillRef>
-      <a:effectRef idx="0">
-        <a:scrgbClr r="0" g="0" b="0"/>
-      </a:effectRef>
-      <a:fontRef idx="minor"/>
-    </dgm:style>
-  </dgm:styleLbl>
-  <dgm:styleLbl name="conFgAcc1">
-    <dgm:scene3d>
-      <a:camera prst="orthographicFront"/>
-      <a:lightRig rig="threePt" dir="t"/>
-    </dgm:scene3d>
-    <dgm:sp3d/>
-    <dgm:txPr/>
-    <dgm:style>
-      <a:lnRef idx="2">
-        <a:scrgbClr r="0" g="0" b="0"/>
-      </a:lnRef>
-      <a:fillRef idx="1">
-        <a:scrgbClr r="0" g="0" b="0"/>
-      </a:fillRef>
-      <a:effectRef idx="0">
-        <a:scrgbClr r="0" g="0" b="0"/>
-      </a:effectRef>
-      <a:fontRef idx="minor"/>
-    </dgm:style>
-  </dgm:styleLbl>
-  <dgm:styleLbl name="alignAcc1">
-    <dgm:scene3d>
-      <a:camera prst="orthographicFront"/>
-      <a:lightRig rig="threePt" dir="t"/>
-    </dgm:scene3d>
-    <dgm:sp3d/>
-    <dgm:txPr/>
-    <dgm:style>
-      <a:lnRef idx="2">
-        <a:scrgbClr r="0" g="0" b="0"/>
-      </a:lnRef>
-      <a:fillRef idx="1">
-        <a:scrgbClr r="0" g="0" b="0"/>
-      </a:fillRef>
-      <a:effectRef idx="0">
-        <a:scrgbClr r="0" g="0" b="0"/>
-      </a:effectRef>
-      <a:fontRef idx="minor"/>
-    </dgm:style>
-  </dgm:styleLbl>
-  <dgm:styleLbl name="trAlignAcc1">
-    <dgm:scene3d>
-      <a:camera prst="orthographicFront"/>
-      <a:lightRig rig="threePt" dir="t"/>
-    </dgm:scene3d>
-    <dgm:sp3d/>
-    <dgm:txPr/>
-    <dgm:style>
-      <a:lnRef idx="1">
-        <a:scrgbClr r="0" g="0" b="0"/>
-      </a:lnRef>
-      <a:fillRef idx="1">
-        <a:scrgbClr r="0" g="0" b="0"/>
-      </a:fillRef>
-      <a:effectRef idx="0">
-        <a:scrgbClr r="0" g="0" b="0"/>
-      </a:effectRef>
-      <a:fontRef idx="minor"/>
-    </dgm:style>
-  </dgm:styleLbl>
-  <dgm:styleLbl name="bgAcc1">
-    <dgm:scene3d>
-      <a:camera prst="orthographicFront"/>
-      <a:lightRig rig="threePt" dir="t"/>
-    </dgm:scene3d>
-    <dgm:sp3d/>
-    <dgm:txPr/>
-    <dgm:style>
-      <a:lnRef idx="2">
-        <a:scrgbClr r="0" g="0" b="0"/>
-      </a:lnRef>
-      <a:fillRef idx="1">
-        <a:scrgbClr r="0" g="0" b="0"/>
-      </a:fillRef>
-      <a:effectRef idx="0">
-        <a:scrgbClr r="0" g="0" b="0"/>
-      </a:effectRef>
-      <a:fontRef idx="minor"/>
-    </dgm:style>
-  </dgm:styleLbl>
-  <dgm:styleLbl name="solidFgAcc1">
-    <dgm:scene3d>
-      <a:camera prst="orthographicFront"/>
-      <a:lightRig rig="threePt" dir="t"/>
-    </dgm:scene3d>
-    <dgm:sp3d/>
-    <dgm:txPr/>
-    <dgm:style>
-      <a:lnRef idx="2">
-        <a:scrgbClr r="0" g="0" b="0"/>
-      </a:lnRef>
-      <a:fillRef idx="1">
-        <a:scrgbClr r="0" g="0" b="0"/>
-      </a:fillRef>
-      <a:effectRef idx="0">
-        <a:scrgbClr r="0" g="0" b="0"/>
-      </a:effectRef>
-      <a:fontRef idx="minor"/>
-    </dgm:style>
-  </dgm:styleLbl>
-  <dgm:styleLbl name="solidAlignAcc1">
-    <dgm:scene3d>
-      <a:camera prst="orthographicFront"/>
-      <a:lightRig rig="threePt" dir="t"/>
-    </dgm:scene3d>
-    <dgm:sp3d/>
-    <dgm:txPr/>
-    <dgm:style>
-      <a:lnRef idx="2">
-        <a:scrgbClr r="0" g="0" b="0"/>
-      </a:lnRef>
-      <a:fillRef idx="1">
-        <a:scrgbClr r="0" g="0" b="0"/>
-      </a:fillRef>
-      <a:effectRef idx="0">
-        <a:scrgbClr r="0" g="0" b="0"/>
-      </a:effectRef>
-      <a:fontRef idx="minor"/>
-    </dgm:style>
-  </dgm:styleLbl>
-  <dgm:styleLbl name="solidBgAcc1">
-    <dgm:scene3d>
-      <a:camera prst="orthographicFront"/>
-      <a:lightRig rig="threePt" dir="t"/>
-    </dgm:scene3d>
-    <dgm:sp3d/>
-    <dgm:txPr/>
-    <dgm:style>
-      <a:lnRef idx="2">
-        <a:scrgbClr r="0" g="0" b="0"/>
-      </a:lnRef>
-      <a:fillRef idx="1">
-        <a:scrgbClr r="0" g="0" b="0"/>
-      </a:fillRef>
-      <a:effectRef idx="0">
-        <a:scrgbClr r="0" g="0" b="0"/>
-      </a:effectRef>
-      <a:fontRef idx="minor"/>
-    </dgm:style>
-  </dgm:styleLbl>
-  <dgm:styleLbl name="fgAccFollowNode1">
-    <dgm:scene3d>
-      <a:camera prst="orthographicFront"/>
-      <a:lightRig rig="threePt" dir="t"/>
-    </dgm:scene3d>
-    <dgm:sp3d/>
-    <dgm:txPr/>
-    <dgm:style>
-      <a:lnRef idx="2">
-        <a:scrgbClr r="0" g="0" b="0"/>
-      </a:lnRef>
-      <a:fillRef idx="1">
-        <a:scrgbClr r="0" g="0" b="0"/>
-      </a:fillRef>
-      <a:effectRef idx="0">
-        <a:scrgbClr r="0" g="0" b="0"/>
-      </a:effectRef>
-      <a:fontRef idx="minor"/>
-    </dgm:style>
-  </dgm:styleLbl>
-  <dgm:styleLbl name="alignAccFollowNode1">
-    <dgm:scene3d>
-      <a:camera prst="orthographicFront"/>
-      <a:lightRig rig="threePt" dir="t"/>
-    </dgm:scene3d>
-    <dgm:sp3d/>
-    <dgm:txPr/>
-    <dgm:style>
-      <a:lnRef idx="2">
-        <a:scrgbClr r="0" g="0" b="0"/>
-      </a:lnRef>
-      <a:fillRef idx="1">
-        <a:scrgbClr r="0" g="0" b="0"/>
-      </a:fillRef>
-      <a:effectRef idx="0">
-        <a:scrgbClr r="0" g="0" b="0"/>
-      </a:effectRef>
-      <a:fontRef idx="minor"/>
-    </dgm:style>
-  </dgm:styleLbl>
-  <dgm:styleLbl name="bgAccFollowNode1">
-    <dgm:scene3d>
-      <a:camera prst="orthographicFront"/>
-      <a:lightRig rig="threePt" dir="t"/>
-    </dgm:scene3d>
-    <dgm:sp3d/>
-    <dgm:txPr/>
-    <dgm:style>
-      <a:lnRef idx="2">
-        <a:scrgbClr r="0" g="0" b="0"/>
-      </a:lnRef>
-      <a:fillRef idx="1">
-        <a:scrgbClr r="0" g="0" b="0"/>
-      </a:fillRef>
-      <a:effectRef idx="0">
-        <a:scrgbClr r="0" g="0" b="0"/>
-      </a:effectRef>
-      <a:fontRef idx="minor"/>
-    </dgm:style>
-  </dgm:styleLbl>
-  <dgm:styleLbl name="fgAcc0">
-    <dgm:scene3d>
-      <a:camera prst="orthographicFront"/>
-      <a:lightRig rig="threePt" dir="t"/>
-    </dgm:scene3d>
-    <dgm:sp3d/>
-    <dgm:txPr/>
-    <dgm:style>
-      <a:lnRef idx="2">
-        <a:scrgbClr r="0" g="0" b="0"/>
-      </a:lnRef>
-      <a:fillRef idx="1">
-        <a:scrgbClr r="0" g="0" b="0"/>
-      </a:fillRef>
-      <a:effectRef idx="0">
-        <a:scrgbClr r="0" g="0" b="0"/>
-      </a:effectRef>
-      <a:fontRef idx="minor"/>
-    </dgm:style>
-  </dgm:styleLbl>
-  <dgm:styleLbl name="fgAcc2">
-    <dgm:scene3d>
-      <a:camera prst="orthographicFront"/>
-      <a:lightRig rig="threePt" dir="t"/>
-    </dgm:scene3d>
-    <dgm:sp3d/>
-    <dgm:txPr/>
-    <dgm:style>
-      <a:lnRef idx="2">
-        <a:scrgbClr r="0" g="0" b="0"/>
-      </a:lnRef>
-      <a:fillRef idx="1">
-        <a:scrgbClr r="0" g="0" b="0"/>
-      </a:fillRef>
-      <a:effectRef idx="0">
-        <a:scrgbClr r="0" g="0" b="0"/>
-      </a:effectRef>
-      <a:fontRef idx="minor"/>
-    </dgm:style>
-  </dgm:styleLbl>
-  <dgm:styleLbl name="fgAcc3">
-    <dgm:scene3d>
-      <a:camera prst="orthographicFront"/>
-      <a:lightRig rig="threePt" dir="t"/>
-    </dgm:scene3d>
-    <dgm:sp3d/>
-    <dgm:txPr/>
-    <dgm:style>
-      <a:lnRef idx="2">
-        <a:scrgbClr r="0" g="0" b="0"/>
-      </a:lnRef>
-      <a:fillRef idx="1">
-        <a:scrgbClr r="0" g="0" b="0"/>
-      </a:fillRef>
-      <a:effectRef idx="0">
-        <a:scrgbClr r="0" g="0" b="0"/>
-      </a:effectRef>
-      <a:fontRef idx="minor"/>
-    </dgm:style>
-  </dgm:styleLbl>
-  <dgm:styleLbl name="fgAcc4">
-    <dgm:scene3d>
-      <a:camera prst="orthographicFront"/>
-      <a:lightRig rig="threePt" dir="t"/>
-    </dgm:scene3d>
-    <dgm:sp3d/>
-    <dgm:txPr/>
-    <dgm:style>
-      <a:lnRef idx="2">
-        <a:scrgbClr r="0" g="0" b="0"/>
-      </a:lnRef>
-      <a:fillRef idx="1">
-        <a:scrgbClr r="0" g="0" b="0"/>
-      </a:fillRef>
-      <a:effectRef idx="0">
-        <a:scrgbClr r="0" g="0" b="0"/>
-      </a:effectRef>
-      <a:fontRef idx="minor"/>
-    </dgm:style>
-  </dgm:styleLbl>
-  <dgm:styleLbl name="bgShp">
-    <dgm:scene3d>
-      <a:camera prst="orthographicFront"/>
-      <a:lightRig rig="threePt" dir="t"/>
-    </dgm:scene3d>
-    <dgm:sp3d/>
-    <dgm:txPr/>
-    <dgm:style>
-      <a:lnRef idx="0">
-        <a:scrgbClr r="0" g="0" b="0"/>
-      </a:lnRef>
-      <a:fillRef idx="1">
-        <a:scrgbClr r="0" g="0" b="0"/>
-      </a:fillRef>
-      <a:effectRef idx="0">
-        <a:scrgbClr r="0" g="0" b="0"/>
-      </a:effectRef>
-      <a:fontRef idx="minor"/>
-    </dgm:style>
-  </dgm:styleLbl>
-  <dgm:styleLbl name="dkBgShp">
-    <dgm:scene3d>
-      <a:camera prst="orthographicFront"/>
-      <a:lightRig rig="threePt" dir="t"/>
-    </dgm:scene3d>
-    <dgm:sp3d/>
-    <dgm:txPr/>
-    <dgm:style>
-      <a:lnRef idx="0">
-        <a:scrgbClr r="0" g="0" b="0"/>
-      </a:lnRef>
-      <a:fillRef idx="1">
-        <a:scrgbClr r="0" g="0" b="0"/>
-      </a:fillRef>
-      <a:effectRef idx="0">
-        <a:scrgbClr r="0" g="0" b="0"/>
-      </a:effectRef>
-      <a:fontRef idx="minor"/>
-    </dgm:style>
-  </dgm:styleLbl>
-  <dgm:styleLbl name="trBgShp">
-    <dgm:scene3d>
-      <a:camera prst="orthographicFront"/>
-      <a:lightRig rig="threePt" dir="t"/>
-    </dgm:scene3d>
-    <dgm:sp3d/>
-    <dgm:txPr/>
-    <dgm:style>
-      <a:lnRef idx="0">
-        <a:scrgbClr r="0" g="0" b="0"/>
-      </a:lnRef>
-      <a:fillRef idx="1">
-        <a:scrgbClr r="0" g="0" b="0"/>
-      </a:fillRef>
-      <a:effectRef idx="0">
-        <a:scrgbClr r="0" g="0" b="0"/>
-      </a:effectRef>
-      <a:fontRef idx="minor"/>
-    </dgm:style>
-  </dgm:styleLbl>
-  <dgm:styleLbl name="fgShp">
-    <dgm:scene3d>
-      <a:camera prst="orthographicFront"/>
-      <a:lightRig rig="threePt" dir="t"/>
-    </dgm:scene3d>
-    <dgm:sp3d/>
-    <dgm:txPr/>
-    <dgm:style>
-      <a:lnRef idx="2">
-        <a:scrgbClr r="0" g="0" b="0"/>
-      </a:lnRef>
-      <a:fillRef idx="1">
-        <a:scrgbClr r="0" g="0" b="0"/>
-      </a:fillRef>
-      <a:effectRef idx="0">
-        <a:scrgbClr r="0" g="0" b="0"/>
-      </a:effectRef>
-      <a:fontRef idx="minor"/>
-    </dgm:style>
-  </dgm:styleLbl>
-  <dgm:styleLbl name="revTx">
-    <dgm:scene3d>
-      <a:camera prst="orthographicFront"/>
-      <a:lightRig rig="threePt" dir="t"/>
-    </dgm:scene3d>
-    <dgm:sp3d/>
-    <dgm:txPr/>
-    <dgm:style>
-      <a:lnRef idx="0">
-        <a:scrgbClr r="0" g="0" b="0"/>
-      </a:lnRef>
-      <a:fillRef idx="0">
-        <a:scrgbClr r="0" g="0" b="0"/>
-      </a:fillRef>
-      <a:effectRef idx="0">
-        <a:scrgbClr r="0" g="0" b="0"/>
-      </a:effectRef>
-      <a:fontRef idx="minor"/>
-    </dgm:style>
-  </dgm:styleLbl>
-</dgm:styleDef>
-</file>
-
-<file path=ppt/diagrams/quickStyle2.xml><?xml version="1.0" encoding="utf-8"?>
 <dgm:styleDef xmlns:dgm="http://schemas.openxmlformats.org/drawingml/2006/diagram" xmlns:a="http://schemas.openxmlformats.org/drawingml/2006/main" uniqueId="urn:microsoft.com/office/officeart/2005/8/quickstyle/simple1">
   <dgm:title val=""/>
   <dgm:desc val=""/>
@@ -11763,10 +8888,10 @@
       </p:grpSpPr>
       <p:sp>
         <p:nvSpPr>
-          <p:cNvPr id="4" name="標題 3">
+          <p:cNvPr id="2" name="標題 1">
             <a:extLst>
               <a:ext uri="{FF2B5EF4-FFF2-40B4-BE49-F238E27FC236}">
-                <a16:creationId xmlns:a16="http://schemas.microsoft.com/office/drawing/2014/main" id="{F1D5CE53-83F5-4BBA-BB3E-ABF11BF3B6B0}"/>
+                <a16:creationId xmlns:a16="http://schemas.microsoft.com/office/drawing/2014/main" id="{2DE3768E-4ECB-4AFC-9D38-D8D0C87616D5}"/>
               </a:ext>
             </a:extLst>
           </p:cNvPr>
@@ -11779,62 +8904,138 @@
         </p:nvSpPr>
         <p:spPr/>
         <p:txBody>
-          <a:bodyPr/>
+          <a:bodyPr>
+            <a:normAutofit/>
+          </a:bodyPr>
           <a:lstStyle/>
           <a:p>
+            <a:pPr algn="l"/>
             <a:r>
               <a:rPr lang="en-US" altLang="zh-TW" dirty="0">
                 <a:latin typeface="Times New Roman" panose="02020603050405020304" pitchFamily="18" charset="0"/>
                 <a:ea typeface="標楷體" panose="03000509000000000000" pitchFamily="65" charset="-120"/>
                 <a:cs typeface="Times New Roman" panose="02020603050405020304" pitchFamily="18" charset="0"/>
               </a:rPr>
-              <a:t>5/7</a:t>
+              <a:t>TF</a:t>
             </a:r>
             <a:r>
               <a:rPr lang="zh-TW" altLang="en-US" dirty="0">
-                <a:latin typeface="標楷體" panose="03000509000000000000" pitchFamily="65" charset="-120"/>
+                <a:latin typeface="Times New Roman" panose="02020603050405020304" pitchFamily="18" charset="0"/>
                 <a:ea typeface="標楷體" panose="03000509000000000000" pitchFamily="65" charset="-120"/>
-              </a:rPr>
-              <a:t>進度</a:t>
-            </a:r>
-          </a:p>
-        </p:txBody>
-      </p:sp>
-      <p:sp>
-        <p:nvSpPr>
-          <p:cNvPr id="5" name="文字版面配置區 4">
+                <a:cs typeface="Times New Roman" panose="02020603050405020304" pitchFamily="18" charset="0"/>
+              </a:rPr>
+              <a:t>、</a:t>
+            </a:r>
+            <a:r>
+              <a:rPr lang="en-US" altLang="zh-TW" dirty="0">
+                <a:latin typeface="Times New Roman" panose="02020603050405020304" pitchFamily="18" charset="0"/>
+                <a:ea typeface="標楷體" panose="03000509000000000000" pitchFamily="65" charset="-120"/>
+                <a:cs typeface="Times New Roman" panose="02020603050405020304" pitchFamily="18" charset="0"/>
+              </a:rPr>
+              <a:t>DF</a:t>
+            </a:r>
+            <a:r>
+              <a:rPr lang="zh-TW" altLang="en-US" dirty="0">
+                <a:latin typeface="Times New Roman" panose="02020603050405020304" pitchFamily="18" charset="0"/>
+                <a:ea typeface="標楷體" panose="03000509000000000000" pitchFamily="65" charset="-120"/>
+                <a:cs typeface="Times New Roman" panose="02020603050405020304" pitchFamily="18" charset="0"/>
+              </a:rPr>
+              <a:t>、</a:t>
+            </a:r>
+            <a:r>
+              <a:rPr lang="en-US" altLang="zh-TW" dirty="0">
+                <a:latin typeface="Times New Roman" panose="02020603050405020304" pitchFamily="18" charset="0"/>
+                <a:ea typeface="標楷體" panose="03000509000000000000" pitchFamily="65" charset="-120"/>
+                <a:cs typeface="Times New Roman" panose="02020603050405020304" pitchFamily="18" charset="0"/>
+              </a:rPr>
+              <a:t>IDF</a:t>
+            </a:r>
+            <a:r>
+              <a:rPr lang="zh-TW" altLang="en-US" dirty="0">
+                <a:latin typeface="Times New Roman" panose="02020603050405020304" pitchFamily="18" charset="0"/>
+                <a:ea typeface="標楷體" panose="03000509000000000000" pitchFamily="65" charset="-120"/>
+                <a:cs typeface="Times New Roman" panose="02020603050405020304" pitchFamily="18" charset="0"/>
+              </a:rPr>
+              <a:t>、</a:t>
+            </a:r>
+            <a:r>
+              <a:rPr lang="en-US" altLang="zh-TW" dirty="0">
+                <a:latin typeface="Times New Roman" panose="02020603050405020304" pitchFamily="18" charset="0"/>
+                <a:ea typeface="標楷體" panose="03000509000000000000" pitchFamily="65" charset="-120"/>
+                <a:cs typeface="Times New Roman" panose="02020603050405020304" pitchFamily="18" charset="0"/>
+              </a:rPr>
+              <a:t>TF-IDF</a:t>
+            </a:r>
+            <a:endParaRPr lang="zh-TW" altLang="en-US" dirty="0">
+              <a:latin typeface="標楷體" panose="03000509000000000000" pitchFamily="65" charset="-120"/>
+              <a:ea typeface="標楷體" panose="03000509000000000000" pitchFamily="65" charset="-120"/>
+            </a:endParaRPr>
+          </a:p>
+        </p:txBody>
+      </p:sp>
+      <p:pic>
+        <p:nvPicPr>
+          <p:cNvPr id="13" name="內容版面配置區 12">
             <a:extLst>
               <a:ext uri="{FF2B5EF4-FFF2-40B4-BE49-F238E27FC236}">
-                <a16:creationId xmlns:a16="http://schemas.microsoft.com/office/drawing/2014/main" id="{9F5CBA14-3D57-4898-86A7-E9F06D90C241}"/>
+                <a16:creationId xmlns:a16="http://schemas.microsoft.com/office/drawing/2014/main" id="{1F400E88-CED2-4A9C-9705-B64361E2C31B}"/>
               </a:ext>
             </a:extLst>
           </p:cNvPr>
-          <p:cNvSpPr>
-            <a:spLocks noGrp="1"/>
-          </p:cNvSpPr>
-          <p:nvPr>
-            <p:ph type="body" idx="1"/>
-          </p:nvPr>
-        </p:nvSpPr>
-        <p:spPr/>
-        <p:txBody>
-          <a:bodyPr/>
-          <a:lstStyle/>
-          <a:p>
-            <a:r>
-              <a:rPr lang="zh-TW" altLang="en-US" dirty="0">
-                <a:latin typeface="標楷體" panose="03000509000000000000" pitchFamily="65" charset="-120"/>
-                <a:ea typeface="標楷體" panose="03000509000000000000" pitchFamily="65" charset="-120"/>
-              </a:rPr>
-              <a:t>功能一實作</a:t>
-            </a:r>
-          </a:p>
-        </p:txBody>
-      </p:sp>
+          <p:cNvPicPr>
+            <a:picLocks noGrp="1" noChangeAspect="1"/>
+          </p:cNvPicPr>
+          <p:nvPr>
+            <p:ph idx="1"/>
+          </p:nvPr>
+        </p:nvPicPr>
+        <p:blipFill>
+          <a:blip r:embed="rId2"/>
+          <a:stretch>
+            <a:fillRect/>
+          </a:stretch>
+        </p:blipFill>
+        <p:spPr>
+          <a:xfrm>
+            <a:off x="1295402" y="2448406"/>
+            <a:ext cx="5237391" cy="3317875"/>
+          </a:xfrm>
+        </p:spPr>
+      </p:pic>
+      <p:pic>
+        <p:nvPicPr>
+          <p:cNvPr id="15" name="圖片 14">
+            <a:extLst>
+              <a:ext uri="{FF2B5EF4-FFF2-40B4-BE49-F238E27FC236}">
+                <a16:creationId xmlns:a16="http://schemas.microsoft.com/office/drawing/2014/main" id="{1C26B76B-A030-486C-B5F6-F8A82699F3F0}"/>
+              </a:ext>
+            </a:extLst>
+          </p:cNvPr>
+          <p:cNvPicPr>
+            <a:picLocks noChangeAspect="1"/>
+          </p:cNvPicPr>
+          <p:nvPr/>
+        </p:nvPicPr>
+        <p:blipFill>
+          <a:blip r:embed="rId3"/>
+          <a:stretch>
+            <a:fillRect/>
+          </a:stretch>
+        </p:blipFill>
+        <p:spPr>
+          <a:xfrm>
+            <a:off x="4825912" y="2779332"/>
+            <a:ext cx="5903047" cy="2980746"/>
+          </a:xfrm>
+          <a:prstGeom prst="rect">
+            <a:avLst/>
+          </a:prstGeom>
+        </p:spPr>
+      </p:pic>
     </p:spTree>
     <p:extLst>
       <p:ext uri="{BB962C8B-B14F-4D97-AF65-F5344CB8AC3E}">
-        <p14:creationId xmlns:p14="http://schemas.microsoft.com/office/powerpoint/2010/main" val="4220093802"/>
+        <p14:creationId xmlns:p14="http://schemas.microsoft.com/office/powerpoint/2010/main" val="787263786"/>
       </p:ext>
     </p:extLst>
   </p:cSld>
@@ -11866,6 +9067,403 @@
           <p:cNvPr id="2" name="標題 1">
             <a:extLst>
               <a:ext uri="{FF2B5EF4-FFF2-40B4-BE49-F238E27FC236}">
+                <a16:creationId xmlns:a16="http://schemas.microsoft.com/office/drawing/2014/main" id="{2DE3768E-4ECB-4AFC-9D38-D8D0C87616D5}"/>
+              </a:ext>
+            </a:extLst>
+          </p:cNvPr>
+          <p:cNvSpPr>
+            <a:spLocks noGrp="1"/>
+          </p:cNvSpPr>
+          <p:nvPr>
+            <p:ph type="title"/>
+          </p:nvPr>
+        </p:nvSpPr>
+        <p:spPr/>
+        <p:txBody>
+          <a:bodyPr/>
+          <a:lstStyle/>
+          <a:p>
+            <a:pPr algn="l"/>
+            <a:r>
+              <a:rPr lang="zh-TW" altLang="en-US" dirty="0">
+                <a:latin typeface="標楷體" panose="03000509000000000000" pitchFamily="65" charset="-120"/>
+                <a:ea typeface="標楷體" panose="03000509000000000000" pitchFamily="65" charset="-120"/>
+              </a:rPr>
+              <a:t>功能一實作</a:t>
+            </a:r>
+            <a:r>
+              <a:rPr lang="en-US" altLang="zh-TW" dirty="0">
+                <a:latin typeface="標楷體" panose="03000509000000000000" pitchFamily="65" charset="-120"/>
+                <a:ea typeface="標楷體" panose="03000509000000000000" pitchFamily="65" charset="-120"/>
+              </a:rPr>
+              <a:t>(</a:t>
+            </a:r>
+            <a:r>
+              <a:rPr lang="en-US" altLang="zh-TW" dirty="0">
+                <a:latin typeface="Times New Roman" panose="02020603050405020304" pitchFamily="18" charset="0"/>
+                <a:ea typeface="標楷體" panose="03000509000000000000" pitchFamily="65" charset="-120"/>
+                <a:cs typeface="Times New Roman" panose="02020603050405020304" pitchFamily="18" charset="0"/>
+              </a:rPr>
+              <a:t>2025</a:t>
+            </a:r>
+            <a:r>
+              <a:rPr lang="zh-TW" altLang="en-US" dirty="0">
+                <a:latin typeface="Times New Roman" panose="02020603050405020304" pitchFamily="18" charset="0"/>
+                <a:ea typeface="標楷體" panose="03000509000000000000" pitchFamily="65" charset="-120"/>
+                <a:cs typeface="Times New Roman" panose="02020603050405020304" pitchFamily="18" charset="0"/>
+              </a:rPr>
+              <a:t>的</a:t>
+            </a:r>
+            <a:r>
+              <a:rPr lang="en-US" altLang="zh-TW" dirty="0">
+                <a:latin typeface="Times New Roman" panose="02020603050405020304" pitchFamily="18" charset="0"/>
+                <a:ea typeface="標楷體" panose="03000509000000000000" pitchFamily="65" charset="-120"/>
+                <a:cs typeface="Times New Roman" panose="02020603050405020304" pitchFamily="18" charset="0"/>
+              </a:rPr>
+              <a:t>547</a:t>
+            </a:r>
+            <a:r>
+              <a:rPr lang="zh-TW" altLang="en-US" dirty="0">
+                <a:latin typeface="Times New Roman" panose="02020603050405020304" pitchFamily="18" charset="0"/>
+                <a:ea typeface="標楷體" panose="03000509000000000000" pitchFamily="65" charset="-120"/>
+                <a:cs typeface="Times New Roman" panose="02020603050405020304" pitchFamily="18" charset="0"/>
+              </a:rPr>
+              <a:t>篇</a:t>
+            </a:r>
+            <a:r>
+              <a:rPr lang="en-US" altLang="zh-TW" dirty="0">
+                <a:latin typeface="標楷體" panose="03000509000000000000" pitchFamily="65" charset="-120"/>
+                <a:ea typeface="標楷體" panose="03000509000000000000" pitchFamily="65" charset="-120"/>
+              </a:rPr>
+              <a:t>)</a:t>
+            </a:r>
+            <a:endParaRPr lang="zh-TW" altLang="en-US" dirty="0">
+              <a:latin typeface="標楷體" panose="03000509000000000000" pitchFamily="65" charset="-120"/>
+              <a:ea typeface="標楷體" panose="03000509000000000000" pitchFamily="65" charset="-120"/>
+            </a:endParaRPr>
+          </a:p>
+        </p:txBody>
+      </p:sp>
+      <p:pic>
+        <p:nvPicPr>
+          <p:cNvPr id="9" name="內容版面配置區 8">
+            <a:extLst>
+              <a:ext uri="{FF2B5EF4-FFF2-40B4-BE49-F238E27FC236}">
+                <a16:creationId xmlns:a16="http://schemas.microsoft.com/office/drawing/2014/main" id="{871B16CB-BD06-4798-B7B1-34E9AAC8F17A}"/>
+              </a:ext>
+            </a:extLst>
+          </p:cNvPr>
+          <p:cNvPicPr>
+            <a:picLocks noGrp="1" noChangeAspect="1"/>
+          </p:cNvPicPr>
+          <p:nvPr>
+            <p:ph idx="1"/>
+          </p:nvPr>
+        </p:nvPicPr>
+        <p:blipFill>
+          <a:blip r:embed="rId2"/>
+          <a:stretch>
+            <a:fillRect/>
+          </a:stretch>
+        </p:blipFill>
+        <p:spPr>
+          <a:xfrm>
+            <a:off x="2444694" y="2423239"/>
+            <a:ext cx="7462704" cy="3834512"/>
+          </a:xfrm>
+        </p:spPr>
+      </p:pic>
+    </p:spTree>
+    <p:extLst>
+      <p:ext uri="{BB962C8B-B14F-4D97-AF65-F5344CB8AC3E}">
+        <p14:creationId xmlns:p14="http://schemas.microsoft.com/office/powerpoint/2010/main" val="2110383846"/>
+      </p:ext>
+    </p:extLst>
+  </p:cSld>
+  <p:clrMapOvr>
+    <a:masterClrMapping/>
+  </p:clrMapOvr>
+</p:sld>
+</file>
+
+<file path=ppt/slides/slide12.xml><?xml version="1.0" encoding="utf-8"?>
+<p:sld xmlns:a="http://schemas.openxmlformats.org/drawingml/2006/main" xmlns:r="http://schemas.openxmlformats.org/officeDocument/2006/relationships" xmlns:p="http://schemas.openxmlformats.org/presentationml/2006/main">
+  <p:cSld>
+    <p:spTree>
+      <p:nvGrpSpPr>
+        <p:cNvPr id="1" name=""/>
+        <p:cNvGrpSpPr/>
+        <p:nvPr/>
+      </p:nvGrpSpPr>
+      <p:grpSpPr>
+        <a:xfrm>
+          <a:off x="0" y="0"/>
+          <a:ext cx="0" cy="0"/>
+          <a:chOff x="0" y="0"/>
+          <a:chExt cx="0" cy="0"/>
+        </a:xfrm>
+      </p:grpSpPr>
+      <p:sp>
+        <p:nvSpPr>
+          <p:cNvPr id="2" name="標題 1">
+            <a:extLst>
+              <a:ext uri="{FF2B5EF4-FFF2-40B4-BE49-F238E27FC236}">
+                <a16:creationId xmlns:a16="http://schemas.microsoft.com/office/drawing/2014/main" id="{2DE3768E-4ECB-4AFC-9D38-D8D0C87616D5}"/>
+              </a:ext>
+            </a:extLst>
+          </p:cNvPr>
+          <p:cNvSpPr>
+            <a:spLocks noGrp="1"/>
+          </p:cNvSpPr>
+          <p:nvPr>
+            <p:ph type="title"/>
+          </p:nvPr>
+        </p:nvSpPr>
+        <p:spPr/>
+        <p:txBody>
+          <a:bodyPr>
+            <a:normAutofit/>
+          </a:bodyPr>
+          <a:lstStyle/>
+          <a:p>
+            <a:pPr algn="l"/>
+            <a:r>
+              <a:rPr lang="zh-TW" altLang="en-US" dirty="0">
+                <a:latin typeface="標楷體" panose="03000509000000000000" pitchFamily="65" charset="-120"/>
+                <a:ea typeface="標楷體" panose="03000509000000000000" pitchFamily="65" charset="-120"/>
+              </a:rPr>
+              <a:t>功能二流程和實作</a:t>
+            </a:r>
+          </a:p>
+        </p:txBody>
+      </p:sp>
+      <p:sp>
+        <p:nvSpPr>
+          <p:cNvPr id="3" name="內容版面配置區 2">
+            <a:extLst>
+              <a:ext uri="{FF2B5EF4-FFF2-40B4-BE49-F238E27FC236}">
+                <a16:creationId xmlns:a16="http://schemas.microsoft.com/office/drawing/2014/main" id="{140B7DEE-05AE-4C0B-879F-0C5512A4BDD8}"/>
+              </a:ext>
+            </a:extLst>
+          </p:cNvPr>
+          <p:cNvSpPr>
+            <a:spLocks noGrp="1"/>
+          </p:cNvSpPr>
+          <p:nvPr>
+            <p:ph idx="1"/>
+          </p:nvPr>
+        </p:nvSpPr>
+        <p:spPr/>
+        <p:txBody>
+          <a:bodyPr/>
+          <a:lstStyle/>
+          <a:p>
+            <a:r>
+              <a:rPr lang="zh-TW" altLang="en-US" dirty="0">
+                <a:latin typeface="標楷體" panose="03000509000000000000" pitchFamily="65" charset="-120"/>
+                <a:ea typeface="標楷體" panose="03000509000000000000" pitchFamily="65" charset="-120"/>
+              </a:rPr>
+              <a:t>利用</a:t>
+            </a:r>
+            <a:r>
+              <a:rPr lang="en-US" altLang="zh-TW" dirty="0">
+                <a:latin typeface="Times New Roman" panose="02020603050405020304" pitchFamily="18" charset="0"/>
+                <a:ea typeface="標楷體" panose="03000509000000000000" pitchFamily="65" charset="-120"/>
+                <a:cs typeface="Times New Roman" panose="02020603050405020304" pitchFamily="18" charset="0"/>
+              </a:rPr>
+              <a:t>cos</a:t>
+            </a:r>
+            <a:r>
+              <a:rPr lang="zh-TW" altLang="en-US" dirty="0">
+                <a:latin typeface="標楷體" panose="03000509000000000000" pitchFamily="65" charset="-120"/>
+                <a:ea typeface="標楷體" panose="03000509000000000000" pitchFamily="65" charset="-120"/>
+              </a:rPr>
+              <a:t>相似度推薦給使用者前三名相關的文章</a:t>
+            </a:r>
+          </a:p>
+        </p:txBody>
+      </p:sp>
+      <p:pic>
+        <p:nvPicPr>
+          <p:cNvPr id="9" name="圖片 8">
+            <a:extLst>
+              <a:ext uri="{FF2B5EF4-FFF2-40B4-BE49-F238E27FC236}">
+                <a16:creationId xmlns:a16="http://schemas.microsoft.com/office/drawing/2014/main" id="{C24DA8DB-1000-4792-ADD0-3E6D5CC701CC}"/>
+              </a:ext>
+            </a:extLst>
+          </p:cNvPr>
+          <p:cNvPicPr>
+            <a:picLocks noChangeAspect="1"/>
+          </p:cNvPicPr>
+          <p:nvPr/>
+        </p:nvPicPr>
+        <p:blipFill>
+          <a:blip r:embed="rId2"/>
+          <a:stretch>
+            <a:fillRect/>
+          </a:stretch>
+        </p:blipFill>
+        <p:spPr>
+          <a:xfrm>
+            <a:off x="1295401" y="2994844"/>
+            <a:ext cx="9285513" cy="3248356"/>
+          </a:xfrm>
+          <a:prstGeom prst="rect">
+            <a:avLst/>
+          </a:prstGeom>
+        </p:spPr>
+      </p:pic>
+    </p:spTree>
+    <p:extLst>
+      <p:ext uri="{BB962C8B-B14F-4D97-AF65-F5344CB8AC3E}">
+        <p14:creationId xmlns:p14="http://schemas.microsoft.com/office/powerpoint/2010/main" val="3853850552"/>
+      </p:ext>
+    </p:extLst>
+  </p:cSld>
+  <p:clrMapOvr>
+    <a:masterClrMapping/>
+  </p:clrMapOvr>
+</p:sld>
+</file>
+
+<file path=ppt/slides/slide13.xml><?xml version="1.0" encoding="utf-8"?>
+<p:sld xmlns:a="http://schemas.openxmlformats.org/drawingml/2006/main" xmlns:r="http://schemas.openxmlformats.org/officeDocument/2006/relationships" xmlns:p="http://schemas.openxmlformats.org/presentationml/2006/main">
+  <p:cSld>
+    <p:spTree>
+      <p:nvGrpSpPr>
+        <p:cNvPr id="1" name=""/>
+        <p:cNvGrpSpPr/>
+        <p:nvPr/>
+      </p:nvGrpSpPr>
+      <p:grpSpPr>
+        <a:xfrm>
+          <a:off x="0" y="0"/>
+          <a:ext cx="0" cy="0"/>
+          <a:chOff x="0" y="0"/>
+          <a:chExt cx="0" cy="0"/>
+        </a:xfrm>
+      </p:grpSpPr>
+      <p:sp>
+        <p:nvSpPr>
+          <p:cNvPr id="2" name="標題 1">
+            <a:extLst>
+              <a:ext uri="{FF2B5EF4-FFF2-40B4-BE49-F238E27FC236}">
+                <a16:creationId xmlns:a16="http://schemas.microsoft.com/office/drawing/2014/main" id="{2DE3768E-4ECB-4AFC-9D38-D8D0C87616D5}"/>
+              </a:ext>
+            </a:extLst>
+          </p:cNvPr>
+          <p:cNvSpPr>
+            <a:spLocks noGrp="1"/>
+          </p:cNvSpPr>
+          <p:nvPr>
+            <p:ph type="title"/>
+          </p:nvPr>
+        </p:nvSpPr>
+        <p:spPr/>
+        <p:txBody>
+          <a:bodyPr/>
+          <a:lstStyle/>
+          <a:p>
+            <a:pPr algn="l"/>
+            <a:r>
+              <a:rPr lang="zh-TW" altLang="en-US" dirty="0">
+                <a:latin typeface="標楷體" panose="03000509000000000000" pitchFamily="65" charset="-120"/>
+                <a:ea typeface="標楷體" panose="03000509000000000000" pitchFamily="65" charset="-120"/>
+              </a:rPr>
+              <a:t>停用詞</a:t>
+            </a:r>
+            <a:r>
+              <a:rPr lang="en-US" altLang="zh-TW" dirty="0">
+                <a:latin typeface="標楷體" panose="03000509000000000000" pitchFamily="65" charset="-120"/>
+                <a:ea typeface="標楷體" panose="03000509000000000000" pitchFamily="65" charset="-120"/>
+              </a:rPr>
+              <a:t>(</a:t>
+            </a:r>
+            <a:r>
+              <a:rPr lang="zh-TW" altLang="en-US" dirty="0">
+                <a:latin typeface="標楷體" panose="03000509000000000000" pitchFamily="65" charset="-120"/>
+                <a:ea typeface="標楷體" panose="03000509000000000000" pitchFamily="65" charset="-120"/>
+              </a:rPr>
+              <a:t>待決定</a:t>
+            </a:r>
+            <a:r>
+              <a:rPr lang="en-US" altLang="zh-TW" dirty="0">
+                <a:latin typeface="標楷體" panose="03000509000000000000" pitchFamily="65" charset="-120"/>
+                <a:ea typeface="標楷體" panose="03000509000000000000" pitchFamily="65" charset="-120"/>
+              </a:rPr>
+              <a:t>)</a:t>
+            </a:r>
+            <a:endParaRPr lang="zh-TW" altLang="en-US" dirty="0">
+              <a:latin typeface="標楷體" panose="03000509000000000000" pitchFamily="65" charset="-120"/>
+              <a:ea typeface="標楷體" panose="03000509000000000000" pitchFamily="65" charset="-120"/>
+            </a:endParaRPr>
+          </a:p>
+        </p:txBody>
+      </p:sp>
+      <p:pic>
+        <p:nvPicPr>
+          <p:cNvPr id="6" name="內容版面配置區 5">
+            <a:extLst>
+              <a:ext uri="{FF2B5EF4-FFF2-40B4-BE49-F238E27FC236}">
+                <a16:creationId xmlns:a16="http://schemas.microsoft.com/office/drawing/2014/main" id="{5C99F979-FA47-4BD6-98F5-841ED1C95C31}"/>
+              </a:ext>
+            </a:extLst>
+          </p:cNvPr>
+          <p:cNvPicPr>
+            <a:picLocks noGrp="1" noChangeAspect="1"/>
+          </p:cNvPicPr>
+          <p:nvPr>
+            <p:ph idx="1"/>
+          </p:nvPr>
+        </p:nvPicPr>
+        <p:blipFill>
+          <a:blip r:embed="rId2"/>
+          <a:stretch>
+            <a:fillRect/>
+          </a:stretch>
+        </p:blipFill>
+        <p:spPr>
+          <a:xfrm>
+            <a:off x="1295402" y="2474752"/>
+            <a:ext cx="9837438" cy="1438808"/>
+          </a:xfrm>
+        </p:spPr>
+      </p:pic>
+    </p:spTree>
+    <p:extLst>
+      <p:ext uri="{BB962C8B-B14F-4D97-AF65-F5344CB8AC3E}">
+        <p14:creationId xmlns:p14="http://schemas.microsoft.com/office/powerpoint/2010/main" val="950565359"/>
+      </p:ext>
+    </p:extLst>
+  </p:cSld>
+  <p:clrMapOvr>
+    <a:masterClrMapping/>
+  </p:clrMapOvr>
+</p:sld>
+</file>
+
+<file path=ppt/slides/slide14.xml><?xml version="1.0" encoding="utf-8"?>
+<p:sld xmlns:a="http://schemas.openxmlformats.org/drawingml/2006/main" xmlns:r="http://schemas.openxmlformats.org/officeDocument/2006/relationships" xmlns:p="http://schemas.openxmlformats.org/presentationml/2006/main">
+  <p:cSld>
+    <p:spTree>
+      <p:nvGrpSpPr>
+        <p:cNvPr id="1" name=""/>
+        <p:cNvGrpSpPr/>
+        <p:nvPr/>
+      </p:nvGrpSpPr>
+      <p:grpSpPr>
+        <a:xfrm>
+          <a:off x="0" y="0"/>
+          <a:ext cx="0" cy="0"/>
+          <a:chOff x="0" y="0"/>
+          <a:chExt cx="0" cy="0"/>
+        </a:xfrm>
+      </p:grpSpPr>
+      <p:sp>
+        <p:nvSpPr>
+          <p:cNvPr id="2" name="標題 1">
+            <a:extLst>
+              <a:ext uri="{FF2B5EF4-FFF2-40B4-BE49-F238E27FC236}">
                 <a16:creationId xmlns:a16="http://schemas.microsoft.com/office/drawing/2014/main" id="{FD584AA1-206F-4D0E-B712-E4BF12872D0E}"/>
               </a:ext>
             </a:extLst>
@@ -11883,7 +9481,10 @@
           <a:lstStyle/>
           <a:p>
             <a:r>
-              <a:rPr lang="zh-TW" altLang="en-US" dirty="0"/>
+              <a:rPr lang="zh-TW" altLang="en-US" dirty="0">
+                <a:latin typeface="標楷體" panose="03000509000000000000" pitchFamily="65" charset="-120"/>
+                <a:ea typeface="標楷體" panose="03000509000000000000" pitchFamily="65" charset="-120"/>
+              </a:rPr>
               <a:t>相關連結</a:t>
             </a:r>
           </a:p>
@@ -11947,6 +9548,668 @@
     <p:extLst>
       <p:ext uri="{BB962C8B-B14F-4D97-AF65-F5344CB8AC3E}">
         <p14:creationId xmlns:p14="http://schemas.microsoft.com/office/powerpoint/2010/main" val="1128931381"/>
+      </p:ext>
+    </p:extLst>
+  </p:cSld>
+  <p:clrMapOvr>
+    <a:masterClrMapping/>
+  </p:clrMapOvr>
+</p:sld>
+</file>
+
+<file path=ppt/slides/slide15.xml><?xml version="1.0" encoding="utf-8"?>
+<p:sld xmlns:a="http://schemas.openxmlformats.org/drawingml/2006/main" xmlns:r="http://schemas.openxmlformats.org/officeDocument/2006/relationships" xmlns:p="http://schemas.openxmlformats.org/presentationml/2006/main">
+  <p:cSld>
+    <p:spTree>
+      <p:nvGrpSpPr>
+        <p:cNvPr id="1" name=""/>
+        <p:cNvGrpSpPr/>
+        <p:nvPr/>
+      </p:nvGrpSpPr>
+      <p:grpSpPr>
+        <a:xfrm>
+          <a:off x="0" y="0"/>
+          <a:ext cx="0" cy="0"/>
+          <a:chOff x="0" y="0"/>
+          <a:chExt cx="0" cy="0"/>
+        </a:xfrm>
+      </p:grpSpPr>
+      <p:sp>
+        <p:nvSpPr>
+          <p:cNvPr id="2" name="標題 1">
+            <a:extLst>
+              <a:ext uri="{FF2B5EF4-FFF2-40B4-BE49-F238E27FC236}">
+                <a16:creationId xmlns:a16="http://schemas.microsoft.com/office/drawing/2014/main" id="{2DE3768E-4ECB-4AFC-9D38-D8D0C87616D5}"/>
+              </a:ext>
+            </a:extLst>
+          </p:cNvPr>
+          <p:cNvSpPr>
+            <a:spLocks noGrp="1"/>
+          </p:cNvSpPr>
+          <p:nvPr>
+            <p:ph type="title"/>
+          </p:nvPr>
+        </p:nvSpPr>
+        <p:spPr/>
+        <p:txBody>
+          <a:bodyPr/>
+          <a:lstStyle/>
+          <a:p>
+            <a:pPr algn="l"/>
+            <a:r>
+              <a:rPr lang="zh-TW" altLang="en-US" dirty="0">
+                <a:latin typeface="標楷體" panose="03000509000000000000" pitchFamily="65" charset="-120"/>
+                <a:ea typeface="標楷體" panose="03000509000000000000" pitchFamily="65" charset="-120"/>
+              </a:rPr>
+              <a:t>功能一實作</a:t>
+            </a:r>
+            <a:r>
+              <a:rPr lang="en-US" altLang="zh-TW" dirty="0">
+                <a:latin typeface="標楷體" panose="03000509000000000000" pitchFamily="65" charset="-120"/>
+                <a:ea typeface="標楷體" panose="03000509000000000000" pitchFamily="65" charset="-120"/>
+              </a:rPr>
+              <a:t>(</a:t>
+            </a:r>
+            <a:r>
+              <a:rPr lang="en-US" altLang="zh-TW" dirty="0">
+                <a:latin typeface="Times New Roman" panose="02020603050405020304" pitchFamily="18" charset="0"/>
+                <a:ea typeface="標楷體" panose="03000509000000000000" pitchFamily="65" charset="-120"/>
+                <a:cs typeface="Times New Roman" panose="02020603050405020304" pitchFamily="18" charset="0"/>
+              </a:rPr>
+              <a:t>2024</a:t>
+            </a:r>
+            <a:r>
+              <a:rPr lang="zh-TW" altLang="en-US" dirty="0">
+                <a:latin typeface="Times New Roman" panose="02020603050405020304" pitchFamily="18" charset="0"/>
+                <a:ea typeface="標楷體" panose="03000509000000000000" pitchFamily="65" charset="-120"/>
+                <a:cs typeface="Times New Roman" panose="02020603050405020304" pitchFamily="18" charset="0"/>
+              </a:rPr>
+              <a:t>的</a:t>
+            </a:r>
+            <a:r>
+              <a:rPr lang="en-US" altLang="zh-TW" dirty="0">
+                <a:latin typeface="Times New Roman" panose="02020603050405020304" pitchFamily="18" charset="0"/>
+                <a:ea typeface="標楷體" panose="03000509000000000000" pitchFamily="65" charset="-120"/>
+                <a:cs typeface="Times New Roman" panose="02020603050405020304" pitchFamily="18" charset="0"/>
+              </a:rPr>
+              <a:t>642</a:t>
+            </a:r>
+            <a:r>
+              <a:rPr lang="zh-TW" altLang="en-US" dirty="0">
+                <a:latin typeface="Times New Roman" panose="02020603050405020304" pitchFamily="18" charset="0"/>
+                <a:ea typeface="標楷體" panose="03000509000000000000" pitchFamily="65" charset="-120"/>
+                <a:cs typeface="Times New Roman" panose="02020603050405020304" pitchFamily="18" charset="0"/>
+              </a:rPr>
+              <a:t>篇</a:t>
+            </a:r>
+            <a:r>
+              <a:rPr lang="en-US" altLang="zh-TW" dirty="0">
+                <a:latin typeface="標楷體" panose="03000509000000000000" pitchFamily="65" charset="-120"/>
+                <a:ea typeface="標楷體" panose="03000509000000000000" pitchFamily="65" charset="-120"/>
+              </a:rPr>
+              <a:t>)</a:t>
+            </a:r>
+            <a:endParaRPr lang="zh-TW" altLang="en-US" dirty="0">
+              <a:latin typeface="標楷體" panose="03000509000000000000" pitchFamily="65" charset="-120"/>
+              <a:ea typeface="標楷體" panose="03000509000000000000" pitchFamily="65" charset="-120"/>
+            </a:endParaRPr>
+          </a:p>
+        </p:txBody>
+      </p:sp>
+      <p:pic>
+        <p:nvPicPr>
+          <p:cNvPr id="6" name="內容版面配置區 5">
+            <a:extLst>
+              <a:ext uri="{FF2B5EF4-FFF2-40B4-BE49-F238E27FC236}">
+                <a16:creationId xmlns:a16="http://schemas.microsoft.com/office/drawing/2014/main" id="{91E9F06F-C9B8-44DC-9FD7-7048DBEA3FDD}"/>
+              </a:ext>
+            </a:extLst>
+          </p:cNvPr>
+          <p:cNvPicPr>
+            <a:picLocks noGrp="1" noChangeAspect="1"/>
+          </p:cNvPicPr>
+          <p:nvPr>
+            <p:ph idx="1"/>
+          </p:nvPr>
+        </p:nvPicPr>
+        <p:blipFill>
+          <a:blip r:embed="rId2"/>
+          <a:stretch>
+            <a:fillRect/>
+          </a:stretch>
+        </p:blipFill>
+        <p:spPr>
+          <a:xfrm>
+            <a:off x="2408213" y="2423238"/>
+            <a:ext cx="7447226" cy="3826559"/>
+          </a:xfrm>
+        </p:spPr>
+      </p:pic>
+    </p:spTree>
+    <p:extLst>
+      <p:ext uri="{BB962C8B-B14F-4D97-AF65-F5344CB8AC3E}">
+        <p14:creationId xmlns:p14="http://schemas.microsoft.com/office/powerpoint/2010/main" val="3310180135"/>
+      </p:ext>
+    </p:extLst>
+  </p:cSld>
+  <p:clrMapOvr>
+    <a:masterClrMapping/>
+  </p:clrMapOvr>
+</p:sld>
+</file>
+
+<file path=ppt/slides/slide16.xml><?xml version="1.0" encoding="utf-8"?>
+<p:sld xmlns:a="http://schemas.openxmlformats.org/drawingml/2006/main" xmlns:r="http://schemas.openxmlformats.org/officeDocument/2006/relationships" xmlns:p="http://schemas.openxmlformats.org/presentationml/2006/main">
+  <p:cSld>
+    <p:spTree>
+      <p:nvGrpSpPr>
+        <p:cNvPr id="1" name=""/>
+        <p:cNvGrpSpPr/>
+        <p:nvPr/>
+      </p:nvGrpSpPr>
+      <p:grpSpPr>
+        <a:xfrm>
+          <a:off x="0" y="0"/>
+          <a:ext cx="0" cy="0"/>
+          <a:chOff x="0" y="0"/>
+          <a:chExt cx="0" cy="0"/>
+        </a:xfrm>
+      </p:grpSpPr>
+      <p:sp>
+        <p:nvSpPr>
+          <p:cNvPr id="2" name="標題 1">
+            <a:extLst>
+              <a:ext uri="{FF2B5EF4-FFF2-40B4-BE49-F238E27FC236}">
+                <a16:creationId xmlns:a16="http://schemas.microsoft.com/office/drawing/2014/main" id="{2DE3768E-4ECB-4AFC-9D38-D8D0C87616D5}"/>
+              </a:ext>
+            </a:extLst>
+          </p:cNvPr>
+          <p:cNvSpPr>
+            <a:spLocks noGrp="1"/>
+          </p:cNvSpPr>
+          <p:nvPr>
+            <p:ph type="title"/>
+          </p:nvPr>
+        </p:nvSpPr>
+        <p:spPr/>
+        <p:txBody>
+          <a:bodyPr/>
+          <a:lstStyle/>
+          <a:p>
+            <a:pPr algn="l"/>
+            <a:r>
+              <a:rPr lang="zh-TW" altLang="en-US" dirty="0">
+                <a:latin typeface="標楷體" panose="03000509000000000000" pitchFamily="65" charset="-120"/>
+                <a:ea typeface="標楷體" panose="03000509000000000000" pitchFamily="65" charset="-120"/>
+              </a:rPr>
+              <a:t>功能一實作</a:t>
+            </a:r>
+            <a:r>
+              <a:rPr lang="en-US" altLang="zh-TW" dirty="0">
+                <a:latin typeface="標楷體" panose="03000509000000000000" pitchFamily="65" charset="-120"/>
+                <a:ea typeface="標楷體" panose="03000509000000000000" pitchFamily="65" charset="-120"/>
+              </a:rPr>
+              <a:t>(</a:t>
+            </a:r>
+            <a:r>
+              <a:rPr lang="en-US" altLang="zh-TW" dirty="0">
+                <a:latin typeface="Times New Roman" panose="02020603050405020304" pitchFamily="18" charset="0"/>
+                <a:ea typeface="標楷體" panose="03000509000000000000" pitchFamily="65" charset="-120"/>
+                <a:cs typeface="Times New Roman" panose="02020603050405020304" pitchFamily="18" charset="0"/>
+              </a:rPr>
+              <a:t>2023</a:t>
+            </a:r>
+            <a:r>
+              <a:rPr lang="zh-TW" altLang="en-US" dirty="0">
+                <a:latin typeface="Times New Roman" panose="02020603050405020304" pitchFamily="18" charset="0"/>
+                <a:ea typeface="標楷體" panose="03000509000000000000" pitchFamily="65" charset="-120"/>
+                <a:cs typeface="Times New Roman" panose="02020603050405020304" pitchFamily="18" charset="0"/>
+              </a:rPr>
+              <a:t>的</a:t>
+            </a:r>
+            <a:r>
+              <a:rPr lang="en-US" altLang="zh-TW" dirty="0">
+                <a:latin typeface="Times New Roman" panose="02020603050405020304" pitchFamily="18" charset="0"/>
+                <a:ea typeface="標楷體" panose="03000509000000000000" pitchFamily="65" charset="-120"/>
+                <a:cs typeface="Times New Roman" panose="02020603050405020304" pitchFamily="18" charset="0"/>
+              </a:rPr>
+              <a:t>644</a:t>
+            </a:r>
+            <a:r>
+              <a:rPr lang="zh-TW" altLang="en-US" dirty="0">
+                <a:latin typeface="Times New Roman" panose="02020603050405020304" pitchFamily="18" charset="0"/>
+                <a:ea typeface="標楷體" panose="03000509000000000000" pitchFamily="65" charset="-120"/>
+                <a:cs typeface="Times New Roman" panose="02020603050405020304" pitchFamily="18" charset="0"/>
+              </a:rPr>
+              <a:t>篇</a:t>
+            </a:r>
+            <a:r>
+              <a:rPr lang="en-US" altLang="zh-TW" dirty="0">
+                <a:latin typeface="標楷體" panose="03000509000000000000" pitchFamily="65" charset="-120"/>
+                <a:ea typeface="標楷體" panose="03000509000000000000" pitchFamily="65" charset="-120"/>
+              </a:rPr>
+              <a:t>)</a:t>
+            </a:r>
+            <a:endParaRPr lang="zh-TW" altLang="en-US" dirty="0">
+              <a:latin typeface="標楷體" panose="03000509000000000000" pitchFamily="65" charset="-120"/>
+              <a:ea typeface="標楷體" panose="03000509000000000000" pitchFamily="65" charset="-120"/>
+            </a:endParaRPr>
+          </a:p>
+        </p:txBody>
+      </p:sp>
+      <p:pic>
+        <p:nvPicPr>
+          <p:cNvPr id="9" name="內容版面配置區 8">
+            <a:extLst>
+              <a:ext uri="{FF2B5EF4-FFF2-40B4-BE49-F238E27FC236}">
+                <a16:creationId xmlns:a16="http://schemas.microsoft.com/office/drawing/2014/main" id="{98517570-BCFD-4DE4-BF1B-E3CF1306889E}"/>
+              </a:ext>
+            </a:extLst>
+          </p:cNvPr>
+          <p:cNvPicPr>
+            <a:picLocks noGrp="1" noChangeAspect="1"/>
+          </p:cNvPicPr>
+          <p:nvPr>
+            <p:ph idx="1"/>
+          </p:nvPr>
+        </p:nvPicPr>
+        <p:blipFill>
+          <a:blip r:embed="rId2"/>
+          <a:stretch>
+            <a:fillRect/>
+          </a:stretch>
+        </p:blipFill>
+        <p:spPr>
+          <a:xfrm>
+            <a:off x="2375417" y="2417967"/>
+            <a:ext cx="7441166" cy="3823442"/>
+          </a:xfrm>
+        </p:spPr>
+      </p:pic>
+    </p:spTree>
+    <p:extLst>
+      <p:ext uri="{BB962C8B-B14F-4D97-AF65-F5344CB8AC3E}">
+        <p14:creationId xmlns:p14="http://schemas.microsoft.com/office/powerpoint/2010/main" val="2301068202"/>
+      </p:ext>
+    </p:extLst>
+  </p:cSld>
+  <p:clrMapOvr>
+    <a:masterClrMapping/>
+  </p:clrMapOvr>
+</p:sld>
+</file>
+
+<file path=ppt/slides/slide17.xml><?xml version="1.0" encoding="utf-8"?>
+<p:sld xmlns:a="http://schemas.openxmlformats.org/drawingml/2006/main" xmlns:r="http://schemas.openxmlformats.org/officeDocument/2006/relationships" xmlns:p="http://schemas.openxmlformats.org/presentationml/2006/main">
+  <p:cSld>
+    <p:spTree>
+      <p:nvGrpSpPr>
+        <p:cNvPr id="1" name=""/>
+        <p:cNvGrpSpPr/>
+        <p:nvPr/>
+      </p:nvGrpSpPr>
+      <p:grpSpPr>
+        <a:xfrm>
+          <a:off x="0" y="0"/>
+          <a:ext cx="0" cy="0"/>
+          <a:chOff x="0" y="0"/>
+          <a:chExt cx="0" cy="0"/>
+        </a:xfrm>
+      </p:grpSpPr>
+      <p:sp>
+        <p:nvSpPr>
+          <p:cNvPr id="2" name="標題 1">
+            <a:extLst>
+              <a:ext uri="{FF2B5EF4-FFF2-40B4-BE49-F238E27FC236}">
+                <a16:creationId xmlns:a16="http://schemas.microsoft.com/office/drawing/2014/main" id="{2DE3768E-4ECB-4AFC-9D38-D8D0C87616D5}"/>
+              </a:ext>
+            </a:extLst>
+          </p:cNvPr>
+          <p:cNvSpPr>
+            <a:spLocks noGrp="1"/>
+          </p:cNvSpPr>
+          <p:nvPr>
+            <p:ph type="title"/>
+          </p:nvPr>
+        </p:nvSpPr>
+        <p:spPr/>
+        <p:txBody>
+          <a:bodyPr/>
+          <a:lstStyle/>
+          <a:p>
+            <a:pPr algn="l"/>
+            <a:r>
+              <a:rPr lang="zh-TW" altLang="en-US" dirty="0">
+                <a:latin typeface="標楷體" panose="03000509000000000000" pitchFamily="65" charset="-120"/>
+                <a:ea typeface="標楷體" panose="03000509000000000000" pitchFamily="65" charset="-120"/>
+              </a:rPr>
+              <a:t>功能一實作</a:t>
+            </a:r>
+            <a:r>
+              <a:rPr lang="en-US" altLang="zh-TW" dirty="0">
+                <a:latin typeface="標楷體" panose="03000509000000000000" pitchFamily="65" charset="-120"/>
+                <a:ea typeface="標楷體" panose="03000509000000000000" pitchFamily="65" charset="-120"/>
+              </a:rPr>
+              <a:t>(</a:t>
+            </a:r>
+            <a:r>
+              <a:rPr lang="en-US" altLang="zh-TW" dirty="0">
+                <a:latin typeface="Times New Roman" panose="02020603050405020304" pitchFamily="18" charset="0"/>
+                <a:ea typeface="標楷體" panose="03000509000000000000" pitchFamily="65" charset="-120"/>
+                <a:cs typeface="Times New Roman" panose="02020603050405020304" pitchFamily="18" charset="0"/>
+              </a:rPr>
+              <a:t>2022</a:t>
+            </a:r>
+            <a:r>
+              <a:rPr lang="zh-TW" altLang="en-US" dirty="0">
+                <a:latin typeface="Times New Roman" panose="02020603050405020304" pitchFamily="18" charset="0"/>
+                <a:ea typeface="標楷體" panose="03000509000000000000" pitchFamily="65" charset="-120"/>
+                <a:cs typeface="Times New Roman" panose="02020603050405020304" pitchFamily="18" charset="0"/>
+              </a:rPr>
+              <a:t>的</a:t>
+            </a:r>
+            <a:r>
+              <a:rPr lang="en-US" altLang="zh-TW" dirty="0">
+                <a:latin typeface="Times New Roman" panose="02020603050405020304" pitchFamily="18" charset="0"/>
+                <a:ea typeface="標楷體" panose="03000509000000000000" pitchFamily="65" charset="-120"/>
+                <a:cs typeface="Times New Roman" panose="02020603050405020304" pitchFamily="18" charset="0"/>
+              </a:rPr>
+              <a:t>703</a:t>
+            </a:r>
+            <a:r>
+              <a:rPr lang="zh-TW" altLang="en-US" dirty="0">
+                <a:latin typeface="Times New Roman" panose="02020603050405020304" pitchFamily="18" charset="0"/>
+                <a:ea typeface="標楷體" panose="03000509000000000000" pitchFamily="65" charset="-120"/>
+                <a:cs typeface="Times New Roman" panose="02020603050405020304" pitchFamily="18" charset="0"/>
+              </a:rPr>
+              <a:t>篇</a:t>
+            </a:r>
+            <a:r>
+              <a:rPr lang="en-US" altLang="zh-TW" dirty="0">
+                <a:latin typeface="標楷體" panose="03000509000000000000" pitchFamily="65" charset="-120"/>
+                <a:ea typeface="標楷體" panose="03000509000000000000" pitchFamily="65" charset="-120"/>
+              </a:rPr>
+              <a:t>)</a:t>
+            </a:r>
+            <a:endParaRPr lang="zh-TW" altLang="en-US" dirty="0">
+              <a:latin typeface="標楷體" panose="03000509000000000000" pitchFamily="65" charset="-120"/>
+              <a:ea typeface="標楷體" panose="03000509000000000000" pitchFamily="65" charset="-120"/>
+            </a:endParaRPr>
+          </a:p>
+        </p:txBody>
+      </p:sp>
+      <p:pic>
+        <p:nvPicPr>
+          <p:cNvPr id="5" name="內容版面配置區 4">
+            <a:extLst>
+              <a:ext uri="{FF2B5EF4-FFF2-40B4-BE49-F238E27FC236}">
+                <a16:creationId xmlns:a16="http://schemas.microsoft.com/office/drawing/2014/main" id="{AFFEFD1B-09F6-41EB-9B2B-7F573C660641}"/>
+              </a:ext>
+            </a:extLst>
+          </p:cNvPr>
+          <p:cNvPicPr>
+            <a:picLocks noGrp="1" noChangeAspect="1"/>
+          </p:cNvPicPr>
+          <p:nvPr>
+            <p:ph idx="1"/>
+          </p:nvPr>
+        </p:nvPicPr>
+        <p:blipFill>
+          <a:blip r:embed="rId2"/>
+          <a:stretch>
+            <a:fillRect/>
+          </a:stretch>
+        </p:blipFill>
+        <p:spPr>
+          <a:xfrm>
+            <a:off x="2372386" y="2431628"/>
+            <a:ext cx="7447227" cy="3826559"/>
+          </a:xfrm>
+        </p:spPr>
+      </p:pic>
+    </p:spTree>
+    <p:extLst>
+      <p:ext uri="{BB962C8B-B14F-4D97-AF65-F5344CB8AC3E}">
+        <p14:creationId xmlns:p14="http://schemas.microsoft.com/office/powerpoint/2010/main" val="1351768483"/>
+      </p:ext>
+    </p:extLst>
+  </p:cSld>
+  <p:clrMapOvr>
+    <a:masterClrMapping/>
+  </p:clrMapOvr>
+</p:sld>
+</file>
+
+<file path=ppt/slides/slide18.xml><?xml version="1.0" encoding="utf-8"?>
+<p:sld xmlns:a="http://schemas.openxmlformats.org/drawingml/2006/main" xmlns:r="http://schemas.openxmlformats.org/officeDocument/2006/relationships" xmlns:p="http://schemas.openxmlformats.org/presentationml/2006/main">
+  <p:cSld>
+    <p:spTree>
+      <p:nvGrpSpPr>
+        <p:cNvPr id="1" name=""/>
+        <p:cNvGrpSpPr/>
+        <p:nvPr/>
+      </p:nvGrpSpPr>
+      <p:grpSpPr>
+        <a:xfrm>
+          <a:off x="0" y="0"/>
+          <a:ext cx="0" cy="0"/>
+          <a:chOff x="0" y="0"/>
+          <a:chExt cx="0" cy="0"/>
+        </a:xfrm>
+      </p:grpSpPr>
+      <p:sp>
+        <p:nvSpPr>
+          <p:cNvPr id="2" name="標題 1">
+            <a:extLst>
+              <a:ext uri="{FF2B5EF4-FFF2-40B4-BE49-F238E27FC236}">
+                <a16:creationId xmlns:a16="http://schemas.microsoft.com/office/drawing/2014/main" id="{2DE3768E-4ECB-4AFC-9D38-D8D0C87616D5}"/>
+              </a:ext>
+            </a:extLst>
+          </p:cNvPr>
+          <p:cNvSpPr>
+            <a:spLocks noGrp="1"/>
+          </p:cNvSpPr>
+          <p:nvPr>
+            <p:ph type="title"/>
+          </p:nvPr>
+        </p:nvSpPr>
+        <p:spPr/>
+        <p:txBody>
+          <a:bodyPr/>
+          <a:lstStyle/>
+          <a:p>
+            <a:pPr algn="l"/>
+            <a:r>
+              <a:rPr lang="zh-TW" altLang="en-US" dirty="0">
+                <a:latin typeface="標楷體" panose="03000509000000000000" pitchFamily="65" charset="-120"/>
+                <a:ea typeface="標楷體" panose="03000509000000000000" pitchFamily="65" charset="-120"/>
+              </a:rPr>
+              <a:t>功能一實作</a:t>
+            </a:r>
+            <a:r>
+              <a:rPr lang="en-US" altLang="zh-TW" dirty="0">
+                <a:latin typeface="標楷體" panose="03000509000000000000" pitchFamily="65" charset="-120"/>
+                <a:ea typeface="標楷體" panose="03000509000000000000" pitchFamily="65" charset="-120"/>
+              </a:rPr>
+              <a:t>(</a:t>
+            </a:r>
+            <a:r>
+              <a:rPr lang="en-US" altLang="zh-TW" dirty="0">
+                <a:latin typeface="Times New Roman" panose="02020603050405020304" pitchFamily="18" charset="0"/>
+                <a:ea typeface="標楷體" panose="03000509000000000000" pitchFamily="65" charset="-120"/>
+                <a:cs typeface="Times New Roman" panose="02020603050405020304" pitchFamily="18" charset="0"/>
+              </a:rPr>
+              <a:t>2021</a:t>
+            </a:r>
+            <a:r>
+              <a:rPr lang="zh-TW" altLang="en-US" dirty="0">
+                <a:latin typeface="Times New Roman" panose="02020603050405020304" pitchFamily="18" charset="0"/>
+                <a:ea typeface="標楷體" panose="03000509000000000000" pitchFamily="65" charset="-120"/>
+                <a:cs typeface="Times New Roman" panose="02020603050405020304" pitchFamily="18" charset="0"/>
+              </a:rPr>
+              <a:t>的</a:t>
+            </a:r>
+            <a:r>
+              <a:rPr lang="en-US" altLang="zh-TW" dirty="0">
+                <a:latin typeface="Times New Roman" panose="02020603050405020304" pitchFamily="18" charset="0"/>
+                <a:ea typeface="標楷體" panose="03000509000000000000" pitchFamily="65" charset="-120"/>
+                <a:cs typeface="Times New Roman" panose="02020603050405020304" pitchFamily="18" charset="0"/>
+              </a:rPr>
+              <a:t>664</a:t>
+            </a:r>
+            <a:r>
+              <a:rPr lang="zh-TW" altLang="en-US" dirty="0">
+                <a:latin typeface="Times New Roman" panose="02020603050405020304" pitchFamily="18" charset="0"/>
+                <a:ea typeface="標楷體" panose="03000509000000000000" pitchFamily="65" charset="-120"/>
+                <a:cs typeface="Times New Roman" panose="02020603050405020304" pitchFamily="18" charset="0"/>
+              </a:rPr>
+              <a:t>篇</a:t>
+            </a:r>
+            <a:r>
+              <a:rPr lang="en-US" altLang="zh-TW" dirty="0">
+                <a:latin typeface="標楷體" panose="03000509000000000000" pitchFamily="65" charset="-120"/>
+                <a:ea typeface="標楷體" panose="03000509000000000000" pitchFamily="65" charset="-120"/>
+              </a:rPr>
+              <a:t>)</a:t>
+            </a:r>
+            <a:endParaRPr lang="zh-TW" altLang="en-US" dirty="0">
+              <a:latin typeface="標楷體" panose="03000509000000000000" pitchFamily="65" charset="-120"/>
+              <a:ea typeface="標楷體" panose="03000509000000000000" pitchFamily="65" charset="-120"/>
+            </a:endParaRPr>
+          </a:p>
+        </p:txBody>
+      </p:sp>
+      <p:pic>
+        <p:nvPicPr>
+          <p:cNvPr id="5" name="內容版面配置區 4">
+            <a:extLst>
+              <a:ext uri="{FF2B5EF4-FFF2-40B4-BE49-F238E27FC236}">
+                <a16:creationId xmlns:a16="http://schemas.microsoft.com/office/drawing/2014/main" id="{ED85F20C-7387-4B26-81DF-A6966C86666A}"/>
+              </a:ext>
+            </a:extLst>
+          </p:cNvPr>
+          <p:cNvPicPr>
+            <a:picLocks noGrp="1" noChangeAspect="1"/>
+          </p:cNvPicPr>
+          <p:nvPr>
+            <p:ph idx="1"/>
+          </p:nvPr>
+        </p:nvPicPr>
+        <p:blipFill>
+          <a:blip r:embed="rId2"/>
+          <a:stretch>
+            <a:fillRect/>
+          </a:stretch>
+        </p:blipFill>
+        <p:spPr>
+          <a:xfrm>
+            <a:off x="2364224" y="2406462"/>
+            <a:ext cx="7463552" cy="3834947"/>
+          </a:xfrm>
+        </p:spPr>
+      </p:pic>
+    </p:spTree>
+    <p:extLst>
+      <p:ext uri="{BB962C8B-B14F-4D97-AF65-F5344CB8AC3E}">
+        <p14:creationId xmlns:p14="http://schemas.microsoft.com/office/powerpoint/2010/main" val="991228725"/>
+      </p:ext>
+    </p:extLst>
+  </p:cSld>
+  <p:clrMapOvr>
+    <a:masterClrMapping/>
+  </p:clrMapOvr>
+</p:sld>
+</file>
+
+<file path=ppt/slides/slide19.xml><?xml version="1.0" encoding="utf-8"?>
+<p:sld xmlns:a="http://schemas.openxmlformats.org/drawingml/2006/main" xmlns:r="http://schemas.openxmlformats.org/officeDocument/2006/relationships" xmlns:p="http://schemas.openxmlformats.org/presentationml/2006/main">
+  <p:cSld>
+    <p:spTree>
+      <p:nvGrpSpPr>
+        <p:cNvPr id="1" name=""/>
+        <p:cNvGrpSpPr/>
+        <p:nvPr/>
+      </p:nvGrpSpPr>
+      <p:grpSpPr>
+        <a:xfrm>
+          <a:off x="0" y="0"/>
+          <a:ext cx="0" cy="0"/>
+          <a:chOff x="0" y="0"/>
+          <a:chExt cx="0" cy="0"/>
+        </a:xfrm>
+      </p:grpSpPr>
+      <p:sp>
+        <p:nvSpPr>
+          <p:cNvPr id="2" name="標題 1">
+            <a:extLst>
+              <a:ext uri="{FF2B5EF4-FFF2-40B4-BE49-F238E27FC236}">
+                <a16:creationId xmlns:a16="http://schemas.microsoft.com/office/drawing/2014/main" id="{2DE3768E-4ECB-4AFC-9D38-D8D0C87616D5}"/>
+              </a:ext>
+            </a:extLst>
+          </p:cNvPr>
+          <p:cNvSpPr>
+            <a:spLocks noGrp="1"/>
+          </p:cNvSpPr>
+          <p:nvPr>
+            <p:ph type="title"/>
+          </p:nvPr>
+        </p:nvSpPr>
+        <p:spPr/>
+        <p:txBody>
+          <a:bodyPr>
+            <a:normAutofit/>
+          </a:bodyPr>
+          <a:lstStyle/>
+          <a:p>
+            <a:pPr algn="l"/>
+            <a:r>
+              <a:rPr lang="zh-TW" altLang="en-US" dirty="0">
+                <a:latin typeface="Times New Roman" panose="02020603050405020304" pitchFamily="18" charset="0"/>
+                <a:ea typeface="標楷體" panose="03000509000000000000" pitchFamily="65" charset="-120"/>
+                <a:cs typeface="Times New Roman" panose="02020603050405020304" pitchFamily="18" charset="0"/>
+              </a:rPr>
+              <a:t>詞彙在所有文章的總出現次數</a:t>
+            </a:r>
+            <a:endParaRPr lang="zh-TW" altLang="en-US" dirty="0">
+              <a:latin typeface="標楷體" panose="03000509000000000000" pitchFamily="65" charset="-120"/>
+              <a:ea typeface="標楷體" panose="03000509000000000000" pitchFamily="65" charset="-120"/>
+            </a:endParaRPr>
+          </a:p>
+        </p:txBody>
+      </p:sp>
+      <p:pic>
+        <p:nvPicPr>
+          <p:cNvPr id="7" name="內容版面配置區 6">
+            <a:extLst>
+              <a:ext uri="{FF2B5EF4-FFF2-40B4-BE49-F238E27FC236}">
+                <a16:creationId xmlns:a16="http://schemas.microsoft.com/office/drawing/2014/main" id="{2C47E4CA-9D20-4759-8DC9-398A25C8839E}"/>
+              </a:ext>
+            </a:extLst>
+          </p:cNvPr>
+          <p:cNvPicPr>
+            <a:picLocks noGrp="1" noChangeAspect="1"/>
+          </p:cNvPicPr>
+          <p:nvPr>
+            <p:ph idx="1"/>
+          </p:nvPr>
+        </p:nvPicPr>
+        <p:blipFill>
+          <a:blip r:embed="rId2"/>
+          <a:stretch>
+            <a:fillRect/>
+          </a:stretch>
+        </p:blipFill>
+        <p:spPr>
+          <a:xfrm>
+            <a:off x="4045744" y="2423240"/>
+            <a:ext cx="4100512" cy="3816579"/>
+          </a:xfrm>
+        </p:spPr>
+      </p:pic>
+    </p:spTree>
+    <p:extLst>
+      <p:ext uri="{BB962C8B-B14F-4D97-AF65-F5344CB8AC3E}">
+        <p14:creationId xmlns:p14="http://schemas.microsoft.com/office/powerpoint/2010/main" val="804054446"/>
       </p:ext>
     </p:extLst>
   </p:cSld>
@@ -12064,7 +10327,7 @@
                 <a:ea typeface="標楷體" panose="03000509000000000000" pitchFamily="65" charset="-120"/>
                 <a:cs typeface="Times New Roman" panose="02020603050405020304" pitchFamily="18" charset="0"/>
               </a:rPr>
-              <a:t>4111</a:t>
+              <a:t>4140</a:t>
             </a:r>
             <a:r>
               <a:rPr lang="zh-TW" altLang="en-US" dirty="0">
@@ -12079,7 +10342,7 @@
                 <a:ea typeface="標楷體" panose="03000509000000000000" pitchFamily="65" charset="-120"/>
                 <a:cs typeface="Times New Roman" panose="02020603050405020304" pitchFamily="18" charset="0"/>
               </a:rPr>
-              <a:t>4/23</a:t>
+              <a:t>5/7</a:t>
             </a:r>
             <a:r>
               <a:rPr lang="en-US" altLang="zh-TW" dirty="0">
@@ -12099,6 +10362,119 @@
     <p:extLst>
       <p:ext uri="{BB962C8B-B14F-4D97-AF65-F5344CB8AC3E}">
         <p14:creationId xmlns:p14="http://schemas.microsoft.com/office/powerpoint/2010/main" val="645880314"/>
+      </p:ext>
+    </p:extLst>
+  </p:cSld>
+  <p:clrMapOvr>
+    <a:masterClrMapping/>
+  </p:clrMapOvr>
+</p:sld>
+</file>
+
+<file path=ppt/slides/slide20.xml><?xml version="1.0" encoding="utf-8"?>
+<p:sld xmlns:a="http://schemas.openxmlformats.org/drawingml/2006/main" xmlns:r="http://schemas.openxmlformats.org/officeDocument/2006/relationships" xmlns:p="http://schemas.openxmlformats.org/presentationml/2006/main">
+  <p:cSld>
+    <p:spTree>
+      <p:nvGrpSpPr>
+        <p:cNvPr id="1" name=""/>
+        <p:cNvGrpSpPr/>
+        <p:nvPr/>
+      </p:nvGrpSpPr>
+      <p:grpSpPr>
+        <a:xfrm>
+          <a:off x="0" y="0"/>
+          <a:ext cx="0" cy="0"/>
+          <a:chOff x="0" y="0"/>
+          <a:chExt cx="0" cy="0"/>
+        </a:xfrm>
+      </p:grpSpPr>
+      <p:sp>
+        <p:nvSpPr>
+          <p:cNvPr id="2" name="標題 1">
+            <a:extLst>
+              <a:ext uri="{FF2B5EF4-FFF2-40B4-BE49-F238E27FC236}">
+                <a16:creationId xmlns:a16="http://schemas.microsoft.com/office/drawing/2014/main" id="{2DE3768E-4ECB-4AFC-9D38-D8D0C87616D5}"/>
+              </a:ext>
+            </a:extLst>
+          </p:cNvPr>
+          <p:cNvSpPr>
+            <a:spLocks noGrp="1"/>
+          </p:cNvSpPr>
+          <p:nvPr>
+            <p:ph type="title"/>
+          </p:nvPr>
+        </p:nvSpPr>
+        <p:spPr/>
+        <p:txBody>
+          <a:bodyPr/>
+          <a:lstStyle/>
+          <a:p>
+            <a:pPr algn="l"/>
+            <a:r>
+              <a:rPr lang="en-US" altLang="zh-TW" dirty="0">
+                <a:latin typeface="Times New Roman" panose="02020603050405020304" pitchFamily="18" charset="0"/>
+                <a:ea typeface="標楷體" panose="03000509000000000000" pitchFamily="65" charset="-120"/>
+                <a:cs typeface="Times New Roman" panose="02020603050405020304" pitchFamily="18" charset="0"/>
+              </a:rPr>
+              <a:t>2025</a:t>
+            </a:r>
+            <a:r>
+              <a:rPr lang="zh-TW" altLang="en-US" dirty="0">
+                <a:latin typeface="Times New Roman" panose="02020603050405020304" pitchFamily="18" charset="0"/>
+                <a:ea typeface="標楷體" panose="03000509000000000000" pitchFamily="65" charset="-120"/>
+                <a:cs typeface="Times New Roman" panose="02020603050405020304" pitchFamily="18" charset="0"/>
+              </a:rPr>
+              <a:t>年的</a:t>
+            </a:r>
+            <a:r>
+              <a:rPr lang="en-US" altLang="zh-TW" dirty="0">
+                <a:latin typeface="Times New Roman" panose="02020603050405020304" pitchFamily="18" charset="0"/>
+                <a:ea typeface="標楷體" panose="03000509000000000000" pitchFamily="65" charset="-120"/>
+                <a:cs typeface="Times New Roman" panose="02020603050405020304" pitchFamily="18" charset="0"/>
+              </a:rPr>
+              <a:t>DF</a:t>
+            </a:r>
+            <a:endParaRPr lang="zh-TW" altLang="en-US" dirty="0">
+              <a:latin typeface="Times New Roman" panose="02020603050405020304" pitchFamily="18" charset="0"/>
+              <a:ea typeface="標楷體" panose="03000509000000000000" pitchFamily="65" charset="-120"/>
+              <a:cs typeface="Times New Roman" panose="02020603050405020304" pitchFamily="18" charset="0"/>
+            </a:endParaRPr>
+          </a:p>
+        </p:txBody>
+      </p:sp>
+      <p:pic>
+        <p:nvPicPr>
+          <p:cNvPr id="17" name="內容版面配置區 16">
+            <a:extLst>
+              <a:ext uri="{FF2B5EF4-FFF2-40B4-BE49-F238E27FC236}">
+                <a16:creationId xmlns:a16="http://schemas.microsoft.com/office/drawing/2014/main" id="{47834B59-3F02-418A-83DC-A4716E092551}"/>
+              </a:ext>
+            </a:extLst>
+          </p:cNvPr>
+          <p:cNvPicPr>
+            <a:picLocks noGrp="1" noChangeAspect="1"/>
+          </p:cNvPicPr>
+          <p:nvPr>
+            <p:ph idx="1"/>
+          </p:nvPr>
+        </p:nvPicPr>
+        <p:blipFill>
+          <a:blip r:embed="rId2"/>
+          <a:stretch>
+            <a:fillRect/>
+          </a:stretch>
+        </p:blipFill>
+        <p:spPr>
+          <a:xfrm>
+            <a:off x="2362074" y="2431628"/>
+            <a:ext cx="7467851" cy="3837156"/>
+          </a:xfrm>
+        </p:spPr>
+      </p:pic>
+    </p:spTree>
+    <p:extLst>
+      <p:ext uri="{BB962C8B-B14F-4D97-AF65-F5344CB8AC3E}">
+        <p14:creationId xmlns:p14="http://schemas.microsoft.com/office/powerpoint/2010/main" val="2680993041"/>
       </p:ext>
     </p:extLst>
   </p:cSld>
@@ -12176,10 +10552,39 @@
       </p:sp>
       <p:pic>
         <p:nvPicPr>
-          <p:cNvPr id="4" name="圖片 3">
+          <p:cNvPr id="32" name="內容版面配置區 31">
             <a:extLst>
               <a:ext uri="{FF2B5EF4-FFF2-40B4-BE49-F238E27FC236}">
-                <a16:creationId xmlns:a16="http://schemas.microsoft.com/office/drawing/2014/main" id="{ABA5D7E2-FAD3-4BD3-A59F-B363558D5756}"/>
+                <a16:creationId xmlns:a16="http://schemas.microsoft.com/office/drawing/2014/main" id="{D8C4F5A9-0AC6-4C73-8E8B-A0DACA9492AC}"/>
+              </a:ext>
+            </a:extLst>
+          </p:cNvPr>
+          <p:cNvPicPr>
+            <a:picLocks noGrp="1" noChangeAspect="1"/>
+          </p:cNvPicPr>
+          <p:nvPr>
+            <p:ph idx="1"/>
+          </p:nvPr>
+        </p:nvPicPr>
+        <p:blipFill>
+          <a:blip r:embed="rId2"/>
+          <a:stretch>
+            <a:fillRect/>
+          </a:stretch>
+        </p:blipFill>
+        <p:spPr>
+          <a:xfrm>
+            <a:off x="1295402" y="2416627"/>
+            <a:ext cx="7448901" cy="3827419"/>
+          </a:xfrm>
+        </p:spPr>
+      </p:pic>
+      <p:pic>
+        <p:nvPicPr>
+          <p:cNvPr id="34" name="圖片 33">
+            <a:extLst>
+              <a:ext uri="{FF2B5EF4-FFF2-40B4-BE49-F238E27FC236}">
+                <a16:creationId xmlns:a16="http://schemas.microsoft.com/office/drawing/2014/main" id="{44692092-3620-4EAA-9319-AD37E5E104AB}"/>
               </a:ext>
             </a:extLst>
           </p:cNvPr>
@@ -12189,38 +10594,6 @@
           <p:nvPr/>
         </p:nvPicPr>
         <p:blipFill>
-          <a:blip r:embed="rId2"/>
-          <a:stretch>
-            <a:fillRect/>
-          </a:stretch>
-        </p:blipFill>
-        <p:spPr>
-          <a:xfrm>
-            <a:off x="1295401" y="2197463"/>
-            <a:ext cx="7158891" cy="3678405"/>
-          </a:xfrm>
-          <a:prstGeom prst="rect">
-            <a:avLst/>
-          </a:prstGeom>
-        </p:spPr>
-      </p:pic>
-      <p:pic>
-        <p:nvPicPr>
-          <p:cNvPr id="14" name="內容版面配置區 13">
-            <a:extLst>
-              <a:ext uri="{FF2B5EF4-FFF2-40B4-BE49-F238E27FC236}">
-                <a16:creationId xmlns:a16="http://schemas.microsoft.com/office/drawing/2014/main" id="{346165D8-DFA2-418D-9266-F63ADF631F7F}"/>
-              </a:ext>
-            </a:extLst>
-          </p:cNvPr>
-          <p:cNvPicPr>
-            <a:picLocks noGrp="1" noChangeAspect="1"/>
-          </p:cNvPicPr>
-          <p:nvPr>
-            <p:ph idx="1"/>
-          </p:nvPr>
-        </p:nvPicPr>
-        <p:blipFill>
           <a:blip r:embed="rId3"/>
           <a:stretch>
             <a:fillRect/>
@@ -12228,9 +10601,12 @@
         </p:blipFill>
         <p:spPr>
           <a:xfrm>
-            <a:off x="5060487" y="2769326"/>
-            <a:ext cx="6338964" cy="3106542"/>
+            <a:off x="5174405" y="2416627"/>
+            <a:ext cx="6411415" cy="3313613"/>
           </a:xfrm>
+          <a:prstGeom prst="rect">
+            <a:avLst/>
+          </a:prstGeom>
         </p:spPr>
       </p:pic>
     </p:spTree>
@@ -12990,9 +11366,10 @@
             <a:r>
               <a:rPr lang="en-US" altLang="zh-TW" dirty="0">
                 <a:latin typeface="Times New Roman" panose="02020603050405020304" pitchFamily="18" charset="0"/>
+                <a:ea typeface="標楷體" panose="03000509000000000000" pitchFamily="65" charset="-120"/>
                 <a:cs typeface="Times New Roman" panose="02020603050405020304" pitchFamily="18" charset="0"/>
               </a:rPr>
-              <a:t>4/30</a:t>
+              <a:t>5/7</a:t>
             </a:r>
             <a:r>
               <a:rPr lang="zh-TW" altLang="en-US" dirty="0">
@@ -13030,7 +11407,7 @@
                 <a:latin typeface="標楷體" panose="03000509000000000000" pitchFamily="65" charset="-120"/>
                 <a:ea typeface="標楷體" panose="03000509000000000000" pitchFamily="65" charset="-120"/>
               </a:rPr>
-              <a:t>功能一實作</a:t>
+              <a:t>功能一實作、功能二實作</a:t>
             </a:r>
           </a:p>
         </p:txBody>
@@ -13038,7 +11415,7 @@
     </p:spTree>
     <p:extLst>
       <p:ext uri="{BB962C8B-B14F-4D97-AF65-F5344CB8AC3E}">
-        <p14:creationId xmlns:p14="http://schemas.microsoft.com/office/powerpoint/2010/main" val="1054002380"/>
+        <p14:creationId xmlns:p14="http://schemas.microsoft.com/office/powerpoint/2010/main" val="4220093802"/>
       </p:ext>
     </p:extLst>
   </p:cSld>
@@ -13092,21 +11469,7 @@
                 <a:latin typeface="標楷體" panose="03000509000000000000" pitchFamily="65" charset="-120"/>
                 <a:ea typeface="標楷體" panose="03000509000000000000" pitchFamily="65" charset="-120"/>
               </a:rPr>
-              <a:t>功能一</a:t>
-            </a:r>
-            <a:r>
-              <a:rPr lang="en-US" altLang="zh-TW" dirty="0">
-                <a:latin typeface="標楷體" panose="03000509000000000000" pitchFamily="65" charset="-120"/>
-                <a:ea typeface="標楷體" panose="03000509000000000000" pitchFamily="65" charset="-120"/>
-              </a:rPr>
-              <a:t>:</a:t>
-            </a:r>
-            <a:r>
-              <a:rPr lang="zh-TW" altLang="en-US" dirty="0">
-                <a:latin typeface="標楷體" panose="03000509000000000000" pitchFamily="65" charset="-120"/>
-                <a:ea typeface="標楷體" panose="03000509000000000000" pitchFamily="65" charset="-120"/>
-              </a:rPr>
-              <a:t>趨勢分析</a:t>
+              <a:t>功能一流程</a:t>
             </a:r>
           </a:p>
         </p:txBody>
@@ -13137,7 +11500,110 @@
                 <a:latin typeface="標楷體" panose="03000509000000000000" pitchFamily="65" charset="-120"/>
                 <a:ea typeface="標楷體" panose="03000509000000000000" pitchFamily="65" charset="-120"/>
               </a:rPr>
-              <a:t>利用時間線整理關鍵字趨勢</a:t>
+              <a:t>找出</a:t>
+            </a:r>
+            <a:r>
+              <a:rPr lang="en-US" altLang="zh-TW" dirty="0" err="1">
+                <a:latin typeface="Times New Roman" panose="02020603050405020304" pitchFamily="18" charset="0"/>
+                <a:ea typeface="標楷體" panose="03000509000000000000" pitchFamily="65" charset="-120"/>
+                <a:cs typeface="Times New Roman" panose="02020603050405020304" pitchFamily="18" charset="0"/>
+              </a:rPr>
+              <a:t>tf-idf</a:t>
+            </a:r>
+            <a:r>
+              <a:rPr lang="zh-TW" altLang="en-US" dirty="0">
+                <a:latin typeface="標楷體" panose="03000509000000000000" pitchFamily="65" charset="-120"/>
+                <a:ea typeface="標楷體" panose="03000509000000000000" pitchFamily="65" charset="-120"/>
+              </a:rPr>
+              <a:t>前</a:t>
+            </a:r>
+            <a:r>
+              <a:rPr lang="en-US" altLang="zh-TW" dirty="0">
+                <a:latin typeface="Times New Roman" panose="02020603050405020304" pitchFamily="18" charset="0"/>
+                <a:ea typeface="標楷體" panose="03000509000000000000" pitchFamily="65" charset="-120"/>
+                <a:cs typeface="Times New Roman" panose="02020603050405020304" pitchFamily="18" charset="0"/>
+              </a:rPr>
+              <a:t>10</a:t>
+            </a:r>
+            <a:r>
+              <a:rPr lang="zh-TW" altLang="en-US" dirty="0">
+                <a:latin typeface="標楷體" panose="03000509000000000000" pitchFamily="65" charset="-120"/>
+                <a:ea typeface="標楷體" panose="03000509000000000000" pitchFamily="65" charset="-120"/>
+              </a:rPr>
+              <a:t>名的詞彙</a:t>
+            </a:r>
+            <a:r>
+              <a:rPr lang="en-US" altLang="zh-TW" dirty="0">
+                <a:latin typeface="標楷體" panose="03000509000000000000" pitchFamily="65" charset="-120"/>
+                <a:ea typeface="標楷體" panose="03000509000000000000" pitchFamily="65" charset="-120"/>
+              </a:rPr>
+              <a:t>(</a:t>
+            </a:r>
+            <a:r>
+              <a:rPr lang="zh-TW" altLang="en-US" dirty="0">
+                <a:latin typeface="標楷體" panose="03000509000000000000" pitchFamily="65" charset="-120"/>
+                <a:ea typeface="標楷體" panose="03000509000000000000" pitchFamily="65" charset="-120"/>
+              </a:rPr>
+              <a:t>每篇文章</a:t>
+            </a:r>
+            <a:r>
+              <a:rPr lang="en-US" altLang="zh-TW" dirty="0">
+                <a:latin typeface="標楷體" panose="03000509000000000000" pitchFamily="65" charset="-120"/>
+                <a:ea typeface="標楷體" panose="03000509000000000000" pitchFamily="65" charset="-120"/>
+              </a:rPr>
+              <a:t>)</a:t>
+            </a:r>
+          </a:p>
+          <a:p>
+            <a:r>
+              <a:rPr lang="zh-TW" altLang="en-US" dirty="0">
+                <a:latin typeface="標楷體" panose="03000509000000000000" pitchFamily="65" charset="-120"/>
+                <a:ea typeface="標楷體" panose="03000509000000000000" pitchFamily="65" charset="-120"/>
+              </a:rPr>
+              <a:t>將詞彙成為核心詞彙</a:t>
+            </a:r>
+            <a:r>
+              <a:rPr lang="en-US" altLang="zh-TW" dirty="0">
+                <a:latin typeface="標楷體" panose="03000509000000000000" pitchFamily="65" charset="-120"/>
+                <a:ea typeface="標楷體" panose="03000509000000000000" pitchFamily="65" charset="-120"/>
+              </a:rPr>
+              <a:t>(</a:t>
+            </a:r>
+            <a:r>
+              <a:rPr lang="zh-TW" altLang="en-US" dirty="0">
+                <a:latin typeface="標楷體" panose="03000509000000000000" pitchFamily="65" charset="-120"/>
+                <a:ea typeface="標楷體" panose="03000509000000000000" pitchFamily="65" charset="-120"/>
+              </a:rPr>
+              <a:t>前</a:t>
+            </a:r>
+            <a:r>
+              <a:rPr lang="en-US" altLang="zh-TW" dirty="0">
+                <a:latin typeface="Times New Roman" panose="02020603050405020304" pitchFamily="18" charset="0"/>
+                <a:ea typeface="標楷體" panose="03000509000000000000" pitchFamily="65" charset="-120"/>
+                <a:cs typeface="Times New Roman" panose="02020603050405020304" pitchFamily="18" charset="0"/>
+              </a:rPr>
+              <a:t>10</a:t>
+            </a:r>
+            <a:r>
+              <a:rPr lang="zh-TW" altLang="en-US" dirty="0">
+                <a:latin typeface="標楷體" panose="03000509000000000000" pitchFamily="65" charset="-120"/>
+                <a:ea typeface="標楷體" panose="03000509000000000000" pitchFamily="65" charset="-120"/>
+              </a:rPr>
+              <a:t>名</a:t>
+            </a:r>
+            <a:r>
+              <a:rPr lang="en-US" altLang="zh-TW" dirty="0">
+                <a:latin typeface="標楷體" panose="03000509000000000000" pitchFamily="65" charset="-120"/>
+                <a:ea typeface="標楷體" panose="03000509000000000000" pitchFamily="65" charset="-120"/>
+              </a:rPr>
+              <a:t>)</a:t>
+            </a:r>
+            <a:r>
+              <a:rPr lang="zh-TW" altLang="en-US" dirty="0">
+                <a:latin typeface="標楷體" panose="03000509000000000000" pitchFamily="65" charset="-120"/>
+                <a:ea typeface="標楷體" panose="03000509000000000000" pitchFamily="65" charset="-120"/>
+              </a:rPr>
+              <a:t>的篇數進行排名</a:t>
             </a:r>
             <a:endParaRPr lang="en-US" altLang="zh-TW" dirty="0">
               <a:latin typeface="標楷體" panose="03000509000000000000" pitchFamily="65" charset="-120"/>
@@ -13150,246 +11616,19 @@
                 <a:latin typeface="標楷體" panose="03000509000000000000" pitchFamily="65" charset="-120"/>
                 <a:ea typeface="標楷體" panose="03000509000000000000" pitchFamily="65" charset="-120"/>
               </a:rPr>
-              <a:t>範例</a:t>
-            </a:r>
-            <a:r>
-              <a:rPr lang="en-US" altLang="zh-TW" dirty="0">
-                <a:latin typeface="標楷體" panose="03000509000000000000" pitchFamily="65" charset="-120"/>
-                <a:ea typeface="標楷體" panose="03000509000000000000" pitchFamily="65" charset="-120"/>
-              </a:rPr>
-              <a:t>:</a:t>
-            </a:r>
-          </a:p>
-          <a:p>
-            <a:endParaRPr lang="zh-TW" altLang="en-US" dirty="0">
+              <a:t>取排名前三當作年度關鍵字</a:t>
+            </a:r>
+            <a:endParaRPr lang="en-US" altLang="zh-TW" dirty="0">
               <a:latin typeface="標楷體" panose="03000509000000000000" pitchFamily="65" charset="-120"/>
               <a:ea typeface="標楷體" panose="03000509000000000000" pitchFamily="65" charset="-120"/>
             </a:endParaRPr>
           </a:p>
         </p:txBody>
       </p:sp>
-      <p:graphicFrame>
-        <p:nvGraphicFramePr>
-          <p:cNvPr id="10" name="資料庫圖表 9">
-            <a:extLst>
-              <a:ext uri="{FF2B5EF4-FFF2-40B4-BE49-F238E27FC236}">
-                <a16:creationId xmlns:a16="http://schemas.microsoft.com/office/drawing/2014/main" id="{4C5D166F-4D53-442F-B7CB-5ED2942E8350}"/>
-              </a:ext>
-            </a:extLst>
-          </p:cNvPr>
-          <p:cNvGraphicFramePr/>
-          <p:nvPr/>
-        </p:nvGraphicFramePr>
-        <p:xfrm>
-          <a:off x="2627618" y="3388299"/>
-          <a:ext cx="8268979" cy="2758502"/>
-        </p:xfrm>
-        <a:graphic>
-          <a:graphicData uri="http://schemas.openxmlformats.org/drawingml/2006/diagram">
-            <dgm:relIds xmlns:dgm="http://schemas.openxmlformats.org/drawingml/2006/diagram" xmlns:r="http://schemas.openxmlformats.org/officeDocument/2006/relationships" r:dm="rId2" r:lo="rId3" r:qs="rId4" r:cs="rId5"/>
-          </a:graphicData>
-        </a:graphic>
-      </p:graphicFrame>
-      <p:sp>
-        <p:nvSpPr>
-          <p:cNvPr id="12" name="文字方塊 11">
-            <a:extLst>
-              <a:ext uri="{FF2B5EF4-FFF2-40B4-BE49-F238E27FC236}">
-                <a16:creationId xmlns:a16="http://schemas.microsoft.com/office/drawing/2014/main" id="{21832B86-F6DD-4BBC-A2F3-A710A1BAABF7}"/>
-              </a:ext>
-            </a:extLst>
-          </p:cNvPr>
-          <p:cNvSpPr txBox="1"/>
-          <p:nvPr/>
-        </p:nvSpPr>
-        <p:spPr>
-          <a:xfrm>
-            <a:off x="6861843" y="5236704"/>
-            <a:ext cx="855677" cy="369332"/>
-          </a:xfrm>
-          <a:prstGeom prst="rect">
-            <a:avLst/>
-          </a:prstGeom>
-          <a:noFill/>
-        </p:spPr>
-        <p:txBody>
-          <a:bodyPr wrap="square" rtlCol="0">
-            <a:spAutoFit/>
-          </a:bodyPr>
-          <a:lstStyle/>
-          <a:p>
-            <a:pPr algn="ctr"/>
-            <a:r>
-              <a:rPr lang="en-US" altLang="zh-TW" dirty="0">
-                <a:solidFill>
-                  <a:srgbClr val="FF0000"/>
-                </a:solidFill>
-                <a:latin typeface="Times New Roman" panose="02020603050405020304" pitchFamily="18" charset="0"/>
-                <a:cs typeface="Times New Roman" panose="02020603050405020304" pitchFamily="18" charset="0"/>
-              </a:rPr>
-              <a:t>2025</a:t>
-            </a:r>
-            <a:endParaRPr lang="zh-TW" altLang="en-US" dirty="0">
-              <a:solidFill>
-                <a:srgbClr val="FF0000"/>
-              </a:solidFill>
-              <a:latin typeface="Times New Roman" panose="02020603050405020304" pitchFamily="18" charset="0"/>
-              <a:cs typeface="Times New Roman" panose="02020603050405020304" pitchFamily="18" charset="0"/>
-            </a:endParaRPr>
-          </a:p>
-        </p:txBody>
-      </p:sp>
-      <p:sp>
-        <p:nvSpPr>
-          <p:cNvPr id="14" name="文字方塊 13">
-            <a:extLst>
-              <a:ext uri="{FF2B5EF4-FFF2-40B4-BE49-F238E27FC236}">
-                <a16:creationId xmlns:a16="http://schemas.microsoft.com/office/drawing/2014/main" id="{B581054D-3DDF-4BF2-9797-A7709186DDD2}"/>
-              </a:ext>
-            </a:extLst>
-          </p:cNvPr>
-          <p:cNvSpPr txBox="1"/>
-          <p:nvPr/>
-        </p:nvSpPr>
-        <p:spPr>
-          <a:xfrm>
-            <a:off x="8708705" y="3847068"/>
-            <a:ext cx="855677" cy="369332"/>
-          </a:xfrm>
-          <a:prstGeom prst="rect">
-            <a:avLst/>
-          </a:prstGeom>
-          <a:noFill/>
-        </p:spPr>
-        <p:txBody>
-          <a:bodyPr wrap="square" rtlCol="0">
-            <a:spAutoFit/>
-          </a:bodyPr>
-          <a:lstStyle/>
-          <a:p>
-            <a:pPr algn="ctr"/>
-            <a:r>
-              <a:rPr lang="en-US" altLang="zh-TW" dirty="0">
-                <a:solidFill>
-                  <a:srgbClr val="FF0000"/>
-                </a:solidFill>
-                <a:latin typeface="Times New Roman" panose="02020603050405020304" pitchFamily="18" charset="0"/>
-                <a:cs typeface="Times New Roman" panose="02020603050405020304" pitchFamily="18" charset="0"/>
-              </a:rPr>
-              <a:t>2026</a:t>
-            </a:r>
-            <a:endParaRPr lang="zh-TW" altLang="en-US" dirty="0">
-              <a:solidFill>
-                <a:srgbClr val="FF0000"/>
-              </a:solidFill>
-              <a:latin typeface="Times New Roman" panose="02020603050405020304" pitchFamily="18" charset="0"/>
-              <a:cs typeface="Times New Roman" panose="02020603050405020304" pitchFamily="18" charset="0"/>
-            </a:endParaRPr>
-          </a:p>
-        </p:txBody>
-      </p:sp>
-      <p:sp>
-        <p:nvSpPr>
-          <p:cNvPr id="15" name="文字方塊 14">
-            <a:extLst>
-              <a:ext uri="{FF2B5EF4-FFF2-40B4-BE49-F238E27FC236}">
-                <a16:creationId xmlns:a16="http://schemas.microsoft.com/office/drawing/2014/main" id="{E0519AC0-E20A-4D1E-A88A-7AE6C894A583}"/>
-              </a:ext>
-            </a:extLst>
-          </p:cNvPr>
-          <p:cNvSpPr txBox="1"/>
-          <p:nvPr/>
-        </p:nvSpPr>
-        <p:spPr>
-          <a:xfrm>
-            <a:off x="3103575" y="5236704"/>
-            <a:ext cx="855677" cy="369332"/>
-          </a:xfrm>
-          <a:prstGeom prst="rect">
-            <a:avLst/>
-          </a:prstGeom>
-          <a:noFill/>
-        </p:spPr>
-        <p:txBody>
-          <a:bodyPr wrap="square" rtlCol="0">
-            <a:spAutoFit/>
-          </a:bodyPr>
-          <a:lstStyle/>
-          <a:p>
-            <a:pPr algn="ctr"/>
-            <a:r>
-              <a:rPr lang="en-US" altLang="zh-TW" dirty="0">
-                <a:solidFill>
-                  <a:srgbClr val="FF0000"/>
-                </a:solidFill>
-                <a:latin typeface="Times New Roman" panose="02020603050405020304" pitchFamily="18" charset="0"/>
-                <a:cs typeface="Times New Roman" panose="02020603050405020304" pitchFamily="18" charset="0"/>
-              </a:rPr>
-              <a:t>2019</a:t>
-            </a:r>
-            <a:endParaRPr lang="zh-TW" altLang="en-US" dirty="0">
-              <a:solidFill>
-                <a:srgbClr val="FF0000"/>
-              </a:solidFill>
-              <a:latin typeface="Times New Roman" panose="02020603050405020304" pitchFamily="18" charset="0"/>
-              <a:cs typeface="Times New Roman" panose="02020603050405020304" pitchFamily="18" charset="0"/>
-            </a:endParaRPr>
-          </a:p>
-        </p:txBody>
-      </p:sp>
-      <p:sp>
-        <p:nvSpPr>
-          <p:cNvPr id="16" name="文字方塊 15">
-            <a:extLst>
-              <a:ext uri="{FF2B5EF4-FFF2-40B4-BE49-F238E27FC236}">
-                <a16:creationId xmlns:a16="http://schemas.microsoft.com/office/drawing/2014/main" id="{68B178DD-B111-4D35-BE1F-F3FF1085E67A}"/>
-              </a:ext>
-            </a:extLst>
-          </p:cNvPr>
-          <p:cNvSpPr txBox="1"/>
-          <p:nvPr/>
-        </p:nvSpPr>
-        <p:spPr>
-          <a:xfrm>
-            <a:off x="5016265" y="3847068"/>
-            <a:ext cx="855677" cy="369332"/>
-          </a:xfrm>
-          <a:prstGeom prst="rect">
-            <a:avLst/>
-          </a:prstGeom>
-          <a:noFill/>
-        </p:spPr>
-        <p:txBody>
-          <a:bodyPr wrap="square" rtlCol="0">
-            <a:spAutoFit/>
-          </a:bodyPr>
-          <a:lstStyle/>
-          <a:p>
-            <a:pPr algn="ctr"/>
-            <a:r>
-              <a:rPr lang="en-US" altLang="zh-TW" dirty="0">
-                <a:solidFill>
-                  <a:srgbClr val="FF0000"/>
-                </a:solidFill>
-                <a:latin typeface="Times New Roman" panose="02020603050405020304" pitchFamily="18" charset="0"/>
-                <a:cs typeface="Times New Roman" panose="02020603050405020304" pitchFamily="18" charset="0"/>
-              </a:rPr>
-              <a:t>20XX</a:t>
-            </a:r>
-            <a:endParaRPr lang="zh-TW" altLang="en-US" dirty="0">
-              <a:solidFill>
-                <a:srgbClr val="FF0000"/>
-              </a:solidFill>
-              <a:latin typeface="Times New Roman" panose="02020603050405020304" pitchFamily="18" charset="0"/>
-              <a:cs typeface="Times New Roman" panose="02020603050405020304" pitchFamily="18" charset="0"/>
-            </a:endParaRPr>
-          </a:p>
-        </p:txBody>
-      </p:sp>
     </p:spTree>
     <p:extLst>
       <p:ext uri="{BB962C8B-B14F-4D97-AF65-F5344CB8AC3E}">
-        <p14:creationId xmlns:p14="http://schemas.microsoft.com/office/powerpoint/2010/main" val="1904621165"/>
+        <p14:creationId xmlns:p14="http://schemas.microsoft.com/office/powerpoint/2010/main" val="2626325617"/>
       </p:ext>
     </p:extLst>
   </p:cSld>

--- a/資訊檢索系統期末專案.pptx
+++ b/資訊檢索系統期末專案.pptx
@@ -3347,7 +3347,7 @@
             <a:fld id="{B61BEF0D-F0BB-DE4B-95CE-6DB70DBA9567}" type="datetimeFigureOut">
               <a:rPr lang="en-US" dirty="0"/>
               <a:pPr/>
-              <a:t>5/6/2026</a:t>
+              <a:t>5/7/2026</a:t>
             </a:fld>
             <a:endParaRPr lang="en-US" dirty="0"/>
           </a:p>
@@ -3668,7 +3668,7 @@
             <a:fld id="{B61BEF0D-F0BB-DE4B-95CE-6DB70DBA9567}" type="datetimeFigureOut">
               <a:rPr lang="en-US" dirty="0"/>
               <a:pPr/>
-              <a:t>5/6/2026</a:t>
+              <a:t>5/7/2026</a:t>
             </a:fld>
             <a:endParaRPr lang="en-US" dirty="0"/>
           </a:p>
@@ -3913,7 +3913,7 @@
             <a:fld id="{B61BEF0D-F0BB-DE4B-95CE-6DB70DBA9567}" type="datetimeFigureOut">
               <a:rPr lang="en-US" dirty="0"/>
               <a:pPr/>
-              <a:t>5/6/2026</a:t>
+              <a:t>5/7/2026</a:t>
             </a:fld>
             <a:endParaRPr lang="en-US" dirty="0"/>
           </a:p>
@@ -4249,7 +4249,7 @@
             <a:fld id="{B61BEF0D-F0BB-DE4B-95CE-6DB70DBA9567}" type="datetimeFigureOut">
               <a:rPr lang="en-US" dirty="0"/>
               <a:pPr/>
-              <a:t>5/6/2026</a:t>
+              <a:t>5/7/2026</a:t>
             </a:fld>
             <a:endParaRPr lang="en-US" dirty="0"/>
           </a:p>
@@ -4593,7 +4593,7 @@
             <a:fld id="{B61BEF0D-F0BB-DE4B-95CE-6DB70DBA9567}" type="datetimeFigureOut">
               <a:rPr lang="en-US" dirty="0"/>
               <a:pPr/>
-              <a:t>5/6/2026</a:t>
+              <a:t>5/7/2026</a:t>
             </a:fld>
             <a:endParaRPr lang="en-US" dirty="0"/>
           </a:p>
@@ -4964,7 +4964,7 @@
             <a:fld id="{B61BEF0D-F0BB-DE4B-95CE-6DB70DBA9567}" type="datetimeFigureOut">
               <a:rPr lang="en-US" dirty="0"/>
               <a:pPr/>
-              <a:t>5/6/2026</a:t>
+              <a:t>5/7/2026</a:t>
             </a:fld>
             <a:endParaRPr lang="en-US" dirty="0"/>
           </a:p>
@@ -5431,7 +5431,7 @@
             <a:fld id="{B61BEF0D-F0BB-DE4B-95CE-6DB70DBA9567}" type="datetimeFigureOut">
               <a:rPr lang="en-US" dirty="0"/>
               <a:pPr/>
-              <a:t>5/6/2026</a:t>
+              <a:t>5/7/2026</a:t>
             </a:fld>
             <a:endParaRPr lang="en-US" dirty="0"/>
           </a:p>
@@ -5633,7 +5633,7 @@
             <a:fld id="{B61BEF0D-F0BB-DE4B-95CE-6DB70DBA9567}" type="datetimeFigureOut">
               <a:rPr lang="en-US" dirty="0"/>
               <a:pPr/>
-              <a:t>5/6/2026</a:t>
+              <a:t>5/7/2026</a:t>
             </a:fld>
             <a:endParaRPr lang="en-US" dirty="0"/>
           </a:p>
@@ -5841,7 +5841,7 @@
             <a:fld id="{B61BEF0D-F0BB-DE4B-95CE-6DB70DBA9567}" type="datetimeFigureOut">
               <a:rPr lang="en-US" dirty="0"/>
               <a:pPr/>
-              <a:t>5/6/2026</a:t>
+              <a:t>5/7/2026</a:t>
             </a:fld>
             <a:endParaRPr lang="en-US" dirty="0"/>
           </a:p>
@@ -6069,7 +6069,7 @@
           <a:p>
             <a:fld id="{52647F38-B617-4D2F-AE0A-013F0C4D2C57}" type="datetimeFigureOut">
               <a:rPr lang="en-US" dirty="0"/>
-              <a:t>5/6/2026</a:t>
+              <a:t>5/7/2026</a:t>
             </a:fld>
             <a:endParaRPr lang="en-US" dirty="0"/>
           </a:p>
@@ -6313,7 +6313,7 @@
             <a:fld id="{B61BEF0D-F0BB-DE4B-95CE-6DB70DBA9567}" type="datetimeFigureOut">
               <a:rPr lang="en-US" dirty="0"/>
               <a:pPr/>
-              <a:t>5/6/2026</a:t>
+              <a:t>5/7/2026</a:t>
             </a:fld>
             <a:endParaRPr lang="en-US" dirty="0"/>
           </a:p>
@@ -6607,7 +6607,7 @@
           <a:p>
             <a:fld id="{05BFA754-D5C3-4E66-96A6-867B257F58DC}" type="datetimeFigureOut">
               <a:rPr lang="en-US" dirty="0"/>
-              <a:t>5/6/2026</a:t>
+              <a:t>5/7/2026</a:t>
             </a:fld>
             <a:endParaRPr lang="en-US" dirty="0"/>
           </a:p>
@@ -6997,7 +6997,7 @@
             <a:fld id="{B61BEF0D-F0BB-DE4B-95CE-6DB70DBA9567}" type="datetimeFigureOut">
               <a:rPr lang="en-US" dirty="0"/>
               <a:pPr/>
-              <a:t>5/6/2026</a:t>
+              <a:t>5/7/2026</a:t>
             </a:fld>
             <a:endParaRPr lang="en-US" dirty="0"/>
           </a:p>
@@ -7143,7 +7143,7 @@
             <a:fld id="{B61BEF0D-F0BB-DE4B-95CE-6DB70DBA9567}" type="datetimeFigureOut">
               <a:rPr lang="en-US" dirty="0"/>
               <a:pPr/>
-              <a:t>5/6/2026</a:t>
+              <a:t>5/7/2026</a:t>
             </a:fld>
             <a:endParaRPr lang="en-US" dirty="0"/>
           </a:p>
@@ -7266,7 +7266,7 @@
             <a:fld id="{B61BEF0D-F0BB-DE4B-95CE-6DB70DBA9567}" type="datetimeFigureOut">
               <a:rPr lang="en-US" dirty="0"/>
               <a:pPr/>
-              <a:t>5/6/2026</a:t>
+              <a:t>5/7/2026</a:t>
             </a:fld>
             <a:endParaRPr lang="en-US" dirty="0"/>
           </a:p>
@@ -7518,7 +7518,7 @@
             <a:fld id="{B61BEF0D-F0BB-DE4B-95CE-6DB70DBA9567}" type="datetimeFigureOut">
               <a:rPr lang="en-US" dirty="0"/>
               <a:pPr/>
-              <a:t>5/6/2026</a:t>
+              <a:t>5/7/2026</a:t>
             </a:fld>
             <a:endParaRPr lang="en-US" dirty="0"/>
           </a:p>
@@ -7830,7 +7830,7 @@
             <a:fld id="{B61BEF0D-F0BB-DE4B-95CE-6DB70DBA9567}" type="datetimeFigureOut">
               <a:rPr lang="en-US" dirty="0"/>
               <a:pPr/>
-              <a:t>5/6/2026</a:t>
+              <a:t>5/7/2026</a:t>
             </a:fld>
             <a:endParaRPr lang="en-US" dirty="0"/>
           </a:p>
@@ -8178,7 +8178,7 @@
             <a:fld id="{B61BEF0D-F0BB-DE4B-95CE-6DB70DBA9567}" type="datetimeFigureOut">
               <a:rPr lang="en-US" dirty="0"/>
               <a:pPr/>
-              <a:t>5/6/2026</a:t>
+              <a:t>5/7/2026</a:t>
             </a:fld>
             <a:endParaRPr lang="en-US" dirty="0"/>
           </a:p>
@@ -10258,25 +10258,12 @@
           <a:lstStyle/>
           <a:p>
             <a:r>
-              <a:rPr lang="en-US" altLang="zh-TW" dirty="0">
-                <a:latin typeface="Times New Roman" panose="02020603050405020304" pitchFamily="18" charset="0"/>
+              <a:rPr lang="zh-TW" altLang="en-US" dirty="0">
+                <a:latin typeface="標楷體" panose="03000509000000000000" pitchFamily="65" charset="-120"/>
                 <a:ea typeface="標楷體" panose="03000509000000000000" pitchFamily="65" charset="-120"/>
-                <a:cs typeface="Times New Roman" panose="02020603050405020304" pitchFamily="18" charset="0"/>
-              </a:rPr>
-              <a:t>4/16</a:t>
-            </a:r>
-            <a:r>
-              <a:rPr lang="zh-TW" altLang="en-US" dirty="0">
-                <a:latin typeface="Times New Roman" panose="02020603050405020304" pitchFamily="18" charset="0"/>
-                <a:ea typeface="標楷體" panose="03000509000000000000" pitchFamily="65" charset="-120"/>
-                <a:cs typeface="Times New Roman" panose="02020603050405020304" pitchFamily="18" charset="0"/>
-              </a:rPr>
-              <a:t>進度</a:t>
-            </a:r>
-            <a:endParaRPr lang="zh-TW" altLang="en-US" dirty="0">
-              <a:latin typeface="標楷體" panose="03000509000000000000" pitchFamily="65" charset="-120"/>
-              <a:ea typeface="標楷體" panose="03000509000000000000" pitchFamily="65" charset="-120"/>
-            </a:endParaRPr>
+              </a:rPr>
+              <a:t>對事實查核中心網站進行爬蟲</a:t>
+            </a:r>
           </a:p>
         </p:txBody>
       </p:sp>
@@ -10301,13 +10288,6 @@
           <a:bodyPr/>
           <a:lstStyle/>
           <a:p>
-            <a:r>
-              <a:rPr lang="zh-TW" altLang="en-US" dirty="0">
-                <a:latin typeface="標楷體" panose="03000509000000000000" pitchFamily="65" charset="-120"/>
-                <a:ea typeface="標楷體" panose="03000509000000000000" pitchFamily="65" charset="-120"/>
-              </a:rPr>
-              <a:t>對事實查核中心網站進行爬蟲</a:t>
-            </a:r>
             <a:br>
               <a:rPr lang="en-US" altLang="zh-TW" dirty="0">
                 <a:latin typeface="標楷體" panose="03000509000000000000" pitchFamily="65" charset="-120"/>
@@ -10316,10 +10296,18 @@
             </a:br>
             <a:r>
               <a:rPr lang="en-US" altLang="zh-TW" dirty="0">
+                <a:latin typeface="Times New Roman" panose="02020603050405020304" pitchFamily="18" charset="0"/>
+                <a:ea typeface="標楷體" panose="03000509000000000000" pitchFamily="65" charset="-120"/>
+                <a:cs typeface="Times New Roman" panose="02020603050405020304" pitchFamily="18" charset="0"/>
+              </a:rPr>
+              <a:t>4140</a:t>
+            </a:r>
+            <a:r>
+              <a:rPr lang="zh-TW" altLang="en-US" dirty="0">
                 <a:latin typeface="標楷體" panose="03000509000000000000" pitchFamily="65" charset="-120"/>
                 <a:ea typeface="標楷體" panose="03000509000000000000" pitchFamily="65" charset="-120"/>
               </a:rPr>
-              <a:t>(</a:t>
+              <a:t>篇文章直到</a:t>
             </a:r>
             <a:r>
               <a:rPr lang="en-US" altLang="zh-TW" dirty="0">
@@ -10327,29 +10315,7 @@
                 <a:ea typeface="標楷體" panose="03000509000000000000" pitchFamily="65" charset="-120"/>
                 <a:cs typeface="Times New Roman" panose="02020603050405020304" pitchFamily="18" charset="0"/>
               </a:rPr>
-              <a:t>4140</a:t>
-            </a:r>
-            <a:r>
-              <a:rPr lang="zh-TW" altLang="en-US" dirty="0">
-                <a:latin typeface="標楷體" panose="03000509000000000000" pitchFamily="65" charset="-120"/>
-                <a:ea typeface="標楷體" panose="03000509000000000000" pitchFamily="65" charset="-120"/>
-              </a:rPr>
-              <a:t>篇文章直到</a:t>
-            </a:r>
-            <a:r>
-              <a:rPr lang="en-US" altLang="zh-TW" dirty="0">
-                <a:latin typeface="Times New Roman" panose="02020603050405020304" pitchFamily="18" charset="0"/>
-                <a:ea typeface="標楷體" panose="03000509000000000000" pitchFamily="65" charset="-120"/>
-                <a:cs typeface="Times New Roman" panose="02020603050405020304" pitchFamily="18" charset="0"/>
-              </a:rPr>
               <a:t>5/7</a:t>
-            </a:r>
-            <a:r>
-              <a:rPr lang="en-US" altLang="zh-TW" dirty="0">
-                <a:latin typeface="標楷體" panose="03000509000000000000" pitchFamily="65" charset="-120"/>
-                <a:ea typeface="標楷體" panose="03000509000000000000" pitchFamily="65" charset="-120"/>
-              </a:rPr>
-              <a:t>)</a:t>
             </a:r>
             <a:endParaRPr lang="zh-TW" altLang="en-US" dirty="0">
               <a:latin typeface="標楷體" panose="03000509000000000000" pitchFamily="65" charset="-120"/>
@@ -10661,19 +10627,22 @@
           <a:lstStyle/>
           <a:p>
             <a:r>
-              <a:rPr lang="en-US" altLang="zh-TW" dirty="0">
-                <a:latin typeface="Times New Roman" panose="02020603050405020304" pitchFamily="18" charset="0"/>
-                <a:cs typeface="Times New Roman" panose="02020603050405020304" pitchFamily="18" charset="0"/>
-              </a:rPr>
-              <a:t>4/23</a:t>
-            </a:r>
-            <a:r>
               <a:rPr lang="zh-TW" altLang="en-US" dirty="0">
                 <a:latin typeface="標楷體" panose="03000509000000000000" pitchFamily="65" charset="-120"/>
                 <a:ea typeface="標楷體" panose="03000509000000000000" pitchFamily="65" charset="-120"/>
               </a:rPr>
-              <a:t>進度</a:t>
-            </a:r>
+              <a:t>功能說明</a:t>
+            </a:r>
+            <a:br>
+              <a:rPr lang="zh-TW" altLang="en-US" dirty="0">
+                <a:latin typeface="標楷體" panose="03000509000000000000" pitchFamily="65" charset="-120"/>
+                <a:ea typeface="標楷體" panose="03000509000000000000" pitchFamily="65" charset="-120"/>
+              </a:rPr>
+            </a:br>
+            <a:endParaRPr lang="zh-TW" altLang="en-US" dirty="0">
+              <a:latin typeface="標楷體" panose="03000509000000000000" pitchFamily="65" charset="-120"/>
+              <a:ea typeface="標楷體" panose="03000509000000000000" pitchFamily="65" charset="-120"/>
+            </a:endParaRPr>
           </a:p>
         </p:txBody>
       </p:sp>
@@ -10698,13 +10667,10 @@
           <a:bodyPr/>
           <a:lstStyle/>
           <a:p>
-            <a:r>
-              <a:rPr lang="zh-TW" altLang="en-US" dirty="0">
-                <a:latin typeface="標楷體" panose="03000509000000000000" pitchFamily="65" charset="-120"/>
-                <a:ea typeface="標楷體" panose="03000509000000000000" pitchFamily="65" charset="-120"/>
-              </a:rPr>
-              <a:t>功能說明</a:t>
-            </a:r>
+            <a:endParaRPr lang="zh-TW" altLang="en-US" dirty="0">
+              <a:latin typeface="標楷體" panose="03000509000000000000" pitchFamily="65" charset="-120"/>
+              <a:ea typeface="標楷體" panose="03000509000000000000" pitchFamily="65" charset="-120"/>
+            </a:endParaRPr>
           </a:p>
         </p:txBody>
       </p:sp>
@@ -11364,19 +11330,11 @@
           <a:lstStyle/>
           <a:p>
             <a:r>
-              <a:rPr lang="en-US" altLang="zh-TW" dirty="0">
-                <a:latin typeface="Times New Roman" panose="02020603050405020304" pitchFamily="18" charset="0"/>
-                <a:ea typeface="標楷體" panose="03000509000000000000" pitchFamily="65" charset="-120"/>
-                <a:cs typeface="Times New Roman" panose="02020603050405020304" pitchFamily="18" charset="0"/>
-              </a:rPr>
-              <a:t>5/7</a:t>
-            </a:r>
-            <a:r>
               <a:rPr lang="zh-TW" altLang="en-US" dirty="0">
                 <a:latin typeface="標楷體" panose="03000509000000000000" pitchFamily="65" charset="-120"/>
                 <a:ea typeface="標楷體" panose="03000509000000000000" pitchFamily="65" charset="-120"/>
               </a:rPr>
-              <a:t>進度</a:t>
+              <a:t>功能實作</a:t>
             </a:r>
           </a:p>
         </p:txBody>
@@ -11407,7 +11365,7 @@
                 <a:latin typeface="標楷體" panose="03000509000000000000" pitchFamily="65" charset="-120"/>
                 <a:ea typeface="標楷體" panose="03000509000000000000" pitchFamily="65" charset="-120"/>
               </a:rPr>
-              <a:t>功能一實作、功能二實作</a:t>
+              <a:t>功能一、功能二</a:t>
             </a:r>
           </a:p>
         </p:txBody>

--- a/資訊檢索系統期末專案.pptx
+++ b/資訊檢索系統期末專案.pptx
@@ -16,15 +16,19 @@
     <p:sldId id="269" r:id="rId10"/>
     <p:sldId id="279" r:id="rId11"/>
     <p:sldId id="270" r:id="rId12"/>
-    <p:sldId id="271" r:id="rId13"/>
-    <p:sldId id="273" r:id="rId14"/>
-    <p:sldId id="258" r:id="rId15"/>
-    <p:sldId id="274" r:id="rId16"/>
-    <p:sldId id="275" r:id="rId17"/>
-    <p:sldId id="276" r:id="rId18"/>
-    <p:sldId id="277" r:id="rId19"/>
-    <p:sldId id="278" r:id="rId20"/>
-    <p:sldId id="280" r:id="rId21"/>
+    <p:sldId id="283" r:id="rId13"/>
+    <p:sldId id="289" r:id="rId14"/>
+    <p:sldId id="284" r:id="rId15"/>
+    <p:sldId id="285" r:id="rId16"/>
+    <p:sldId id="286" r:id="rId17"/>
+    <p:sldId id="271" r:id="rId18"/>
+    <p:sldId id="281" r:id="rId19"/>
+    <p:sldId id="282" r:id="rId20"/>
+    <p:sldId id="287" r:id="rId21"/>
+    <p:sldId id="288" r:id="rId22"/>
+    <p:sldId id="258" r:id="rId23"/>
+    <p:sldId id="278" r:id="rId24"/>
+    <p:sldId id="280" r:id="rId25"/>
   </p:sldIdLst>
   <p:sldSz cx="12192000" cy="6858000"/>
   <p:notesSz cx="6858000" cy="9144000"/>
@@ -3347,7 +3351,7 @@
             <a:fld id="{B61BEF0D-F0BB-DE4B-95CE-6DB70DBA9567}" type="datetimeFigureOut">
               <a:rPr lang="en-US" dirty="0"/>
               <a:pPr/>
-              <a:t>5/7/2026</a:t>
+              <a:t>5/14/2026</a:t>
             </a:fld>
             <a:endParaRPr lang="en-US" dirty="0"/>
           </a:p>
@@ -3668,7 +3672,7 @@
             <a:fld id="{B61BEF0D-F0BB-DE4B-95CE-6DB70DBA9567}" type="datetimeFigureOut">
               <a:rPr lang="en-US" dirty="0"/>
               <a:pPr/>
-              <a:t>5/7/2026</a:t>
+              <a:t>5/14/2026</a:t>
             </a:fld>
             <a:endParaRPr lang="en-US" dirty="0"/>
           </a:p>
@@ -3913,7 +3917,7 @@
             <a:fld id="{B61BEF0D-F0BB-DE4B-95CE-6DB70DBA9567}" type="datetimeFigureOut">
               <a:rPr lang="en-US" dirty="0"/>
               <a:pPr/>
-              <a:t>5/7/2026</a:t>
+              <a:t>5/14/2026</a:t>
             </a:fld>
             <a:endParaRPr lang="en-US" dirty="0"/>
           </a:p>
@@ -4249,7 +4253,7 @@
             <a:fld id="{B61BEF0D-F0BB-DE4B-95CE-6DB70DBA9567}" type="datetimeFigureOut">
               <a:rPr lang="en-US" dirty="0"/>
               <a:pPr/>
-              <a:t>5/7/2026</a:t>
+              <a:t>5/14/2026</a:t>
             </a:fld>
             <a:endParaRPr lang="en-US" dirty="0"/>
           </a:p>
@@ -4593,7 +4597,7 @@
             <a:fld id="{B61BEF0D-F0BB-DE4B-95CE-6DB70DBA9567}" type="datetimeFigureOut">
               <a:rPr lang="en-US" dirty="0"/>
               <a:pPr/>
-              <a:t>5/7/2026</a:t>
+              <a:t>5/14/2026</a:t>
             </a:fld>
             <a:endParaRPr lang="en-US" dirty="0"/>
           </a:p>
@@ -4964,7 +4968,7 @@
             <a:fld id="{B61BEF0D-F0BB-DE4B-95CE-6DB70DBA9567}" type="datetimeFigureOut">
               <a:rPr lang="en-US" dirty="0"/>
               <a:pPr/>
-              <a:t>5/7/2026</a:t>
+              <a:t>5/14/2026</a:t>
             </a:fld>
             <a:endParaRPr lang="en-US" dirty="0"/>
           </a:p>
@@ -5431,7 +5435,7 @@
             <a:fld id="{B61BEF0D-F0BB-DE4B-95CE-6DB70DBA9567}" type="datetimeFigureOut">
               <a:rPr lang="en-US" dirty="0"/>
               <a:pPr/>
-              <a:t>5/7/2026</a:t>
+              <a:t>5/14/2026</a:t>
             </a:fld>
             <a:endParaRPr lang="en-US" dirty="0"/>
           </a:p>
@@ -5633,7 +5637,7 @@
             <a:fld id="{B61BEF0D-F0BB-DE4B-95CE-6DB70DBA9567}" type="datetimeFigureOut">
               <a:rPr lang="en-US" dirty="0"/>
               <a:pPr/>
-              <a:t>5/7/2026</a:t>
+              <a:t>5/14/2026</a:t>
             </a:fld>
             <a:endParaRPr lang="en-US" dirty="0"/>
           </a:p>
@@ -5841,7 +5845,7 @@
             <a:fld id="{B61BEF0D-F0BB-DE4B-95CE-6DB70DBA9567}" type="datetimeFigureOut">
               <a:rPr lang="en-US" dirty="0"/>
               <a:pPr/>
-              <a:t>5/7/2026</a:t>
+              <a:t>5/14/2026</a:t>
             </a:fld>
             <a:endParaRPr lang="en-US" dirty="0"/>
           </a:p>
@@ -6069,7 +6073,7 @@
           <a:p>
             <a:fld id="{52647F38-B617-4D2F-AE0A-013F0C4D2C57}" type="datetimeFigureOut">
               <a:rPr lang="en-US" dirty="0"/>
-              <a:t>5/7/2026</a:t>
+              <a:t>5/14/2026</a:t>
             </a:fld>
             <a:endParaRPr lang="en-US" dirty="0"/>
           </a:p>
@@ -6313,7 +6317,7 @@
             <a:fld id="{B61BEF0D-F0BB-DE4B-95CE-6DB70DBA9567}" type="datetimeFigureOut">
               <a:rPr lang="en-US" dirty="0"/>
               <a:pPr/>
-              <a:t>5/7/2026</a:t>
+              <a:t>5/14/2026</a:t>
             </a:fld>
             <a:endParaRPr lang="en-US" dirty="0"/>
           </a:p>
@@ -6607,7 +6611,7 @@
           <a:p>
             <a:fld id="{05BFA754-D5C3-4E66-96A6-867B257F58DC}" type="datetimeFigureOut">
               <a:rPr lang="en-US" dirty="0"/>
-              <a:t>5/7/2026</a:t>
+              <a:t>5/14/2026</a:t>
             </a:fld>
             <a:endParaRPr lang="en-US" dirty="0"/>
           </a:p>
@@ -6997,7 +7001,7 @@
             <a:fld id="{B61BEF0D-F0BB-DE4B-95CE-6DB70DBA9567}" type="datetimeFigureOut">
               <a:rPr lang="en-US" dirty="0"/>
               <a:pPr/>
-              <a:t>5/7/2026</a:t>
+              <a:t>5/14/2026</a:t>
             </a:fld>
             <a:endParaRPr lang="en-US" dirty="0"/>
           </a:p>
@@ -7143,7 +7147,7 @@
             <a:fld id="{B61BEF0D-F0BB-DE4B-95CE-6DB70DBA9567}" type="datetimeFigureOut">
               <a:rPr lang="en-US" dirty="0"/>
               <a:pPr/>
-              <a:t>5/7/2026</a:t>
+              <a:t>5/14/2026</a:t>
             </a:fld>
             <a:endParaRPr lang="en-US" dirty="0"/>
           </a:p>
@@ -7266,7 +7270,7 @@
             <a:fld id="{B61BEF0D-F0BB-DE4B-95CE-6DB70DBA9567}" type="datetimeFigureOut">
               <a:rPr lang="en-US" dirty="0"/>
               <a:pPr/>
-              <a:t>5/7/2026</a:t>
+              <a:t>5/14/2026</a:t>
             </a:fld>
             <a:endParaRPr lang="en-US" dirty="0"/>
           </a:p>
@@ -7518,7 +7522,7 @@
             <a:fld id="{B61BEF0D-F0BB-DE4B-95CE-6DB70DBA9567}" type="datetimeFigureOut">
               <a:rPr lang="en-US" dirty="0"/>
               <a:pPr/>
-              <a:t>5/7/2026</a:t>
+              <a:t>5/14/2026</a:t>
             </a:fld>
             <a:endParaRPr lang="en-US" dirty="0"/>
           </a:p>
@@ -7830,7 +7834,7 @@
             <a:fld id="{B61BEF0D-F0BB-DE4B-95CE-6DB70DBA9567}" type="datetimeFigureOut">
               <a:rPr lang="en-US" dirty="0"/>
               <a:pPr/>
-              <a:t>5/7/2026</a:t>
+              <a:t>5/14/2026</a:t>
             </a:fld>
             <a:endParaRPr lang="en-US" dirty="0"/>
           </a:p>
@@ -8178,7 +8182,7 @@
             <a:fld id="{B61BEF0D-F0BB-DE4B-95CE-6DB70DBA9567}" type="datetimeFigureOut">
               <a:rPr lang="en-US" dirty="0"/>
               <a:pPr/>
-              <a:t>5/7/2026</a:t>
+              <a:t>5/14/2026</a:t>
             </a:fld>
             <a:endParaRPr lang="en-US" dirty="0"/>
           </a:p>
@@ -8870,7 +8874,7 @@
 </file>
 
 <file path=ppt/slides/slide10.xml><?xml version="1.0" encoding="utf-8"?>
-<p:sld xmlns:a="http://schemas.openxmlformats.org/drawingml/2006/main" xmlns:r="http://schemas.openxmlformats.org/officeDocument/2006/relationships" xmlns:p="http://schemas.openxmlformats.org/presentationml/2006/main">
+<p:sld xmlns:a="http://schemas.openxmlformats.org/drawingml/2006/main" xmlns:r="http://schemas.openxmlformats.org/officeDocument/2006/relationships" xmlns:p="http://schemas.openxmlformats.org/presentationml/2006/main" show="0">
   <p:cSld>
     <p:spTree>
       <p:nvGrpSpPr>
@@ -9062,103 +9066,19 @@
           <a:chExt cx="0" cy="0"/>
         </a:xfrm>
       </p:grpSpPr>
-      <p:sp>
-        <p:nvSpPr>
-          <p:cNvPr id="2" name="標題 1">
+      <p:pic>
+        <p:nvPicPr>
+          <p:cNvPr id="6" name="圖片 5">
             <a:extLst>
               <a:ext uri="{FF2B5EF4-FFF2-40B4-BE49-F238E27FC236}">
-                <a16:creationId xmlns:a16="http://schemas.microsoft.com/office/drawing/2014/main" id="{2DE3768E-4ECB-4AFC-9D38-D8D0C87616D5}"/>
-              </a:ext>
-            </a:extLst>
-          </p:cNvPr>
-          <p:cNvSpPr>
-            <a:spLocks noGrp="1"/>
-          </p:cNvSpPr>
-          <p:nvPr>
-            <p:ph type="title"/>
-          </p:nvPr>
-        </p:nvSpPr>
-        <p:spPr/>
-        <p:txBody>
-          <a:bodyPr/>
-          <a:lstStyle/>
-          <a:p>
-            <a:pPr algn="l"/>
-            <a:r>
-              <a:rPr lang="zh-TW" altLang="en-US" dirty="0">
-                <a:latin typeface="標楷體" panose="03000509000000000000" pitchFamily="65" charset="-120"/>
-                <a:ea typeface="標楷體" panose="03000509000000000000" pitchFamily="65" charset="-120"/>
-              </a:rPr>
-              <a:t>功能一實作</a:t>
-            </a:r>
-            <a:r>
-              <a:rPr lang="en-US" altLang="zh-TW" dirty="0">
-                <a:latin typeface="標楷體" panose="03000509000000000000" pitchFamily="65" charset="-120"/>
-                <a:ea typeface="標楷體" panose="03000509000000000000" pitchFamily="65" charset="-120"/>
-              </a:rPr>
-              <a:t>(</a:t>
-            </a:r>
-            <a:r>
-              <a:rPr lang="en-US" altLang="zh-TW" dirty="0">
-                <a:latin typeface="Times New Roman" panose="02020603050405020304" pitchFamily="18" charset="0"/>
-                <a:ea typeface="標楷體" panose="03000509000000000000" pitchFamily="65" charset="-120"/>
-                <a:cs typeface="Times New Roman" panose="02020603050405020304" pitchFamily="18" charset="0"/>
-              </a:rPr>
-              <a:t>2025</a:t>
-            </a:r>
-            <a:r>
-              <a:rPr lang="zh-TW" altLang="en-US" dirty="0">
-                <a:latin typeface="Times New Roman" panose="02020603050405020304" pitchFamily="18" charset="0"/>
-                <a:ea typeface="標楷體" panose="03000509000000000000" pitchFamily="65" charset="-120"/>
-                <a:cs typeface="Times New Roman" panose="02020603050405020304" pitchFamily="18" charset="0"/>
-              </a:rPr>
-              <a:t>的</a:t>
-            </a:r>
-            <a:r>
-              <a:rPr lang="en-US" altLang="zh-TW" dirty="0">
-                <a:latin typeface="Times New Roman" panose="02020603050405020304" pitchFamily="18" charset="0"/>
-                <a:ea typeface="標楷體" panose="03000509000000000000" pitchFamily="65" charset="-120"/>
-                <a:cs typeface="Times New Roman" panose="02020603050405020304" pitchFamily="18" charset="0"/>
-              </a:rPr>
-              <a:t>547</a:t>
-            </a:r>
-            <a:r>
-              <a:rPr lang="zh-TW" altLang="en-US" dirty="0">
-                <a:latin typeface="Times New Roman" panose="02020603050405020304" pitchFamily="18" charset="0"/>
-                <a:ea typeface="標楷體" panose="03000509000000000000" pitchFamily="65" charset="-120"/>
-                <a:cs typeface="Times New Roman" panose="02020603050405020304" pitchFamily="18" charset="0"/>
-              </a:rPr>
-              <a:t>篇</a:t>
-            </a:r>
-            <a:r>
-              <a:rPr lang="en-US" altLang="zh-TW" dirty="0">
-                <a:latin typeface="標楷體" panose="03000509000000000000" pitchFamily="65" charset="-120"/>
-                <a:ea typeface="標楷體" panose="03000509000000000000" pitchFamily="65" charset="-120"/>
-              </a:rPr>
-              <a:t>)</a:t>
-            </a:r>
-            <a:endParaRPr lang="zh-TW" altLang="en-US" dirty="0">
-              <a:latin typeface="標楷體" panose="03000509000000000000" pitchFamily="65" charset="-120"/>
-              <a:ea typeface="標楷體" panose="03000509000000000000" pitchFamily="65" charset="-120"/>
-            </a:endParaRPr>
-          </a:p>
-        </p:txBody>
-      </p:sp>
-      <p:pic>
-        <p:nvPicPr>
-          <p:cNvPr id="9" name="內容版面配置區 8">
-            <a:extLst>
-              <a:ext uri="{FF2B5EF4-FFF2-40B4-BE49-F238E27FC236}">
-                <a16:creationId xmlns:a16="http://schemas.microsoft.com/office/drawing/2014/main" id="{871B16CB-BD06-4798-B7B1-34E9AAC8F17A}"/>
+                <a16:creationId xmlns:a16="http://schemas.microsoft.com/office/drawing/2014/main" id="{32BAB465-37D7-4BCA-843B-461EF200344C}"/>
               </a:ext>
             </a:extLst>
           </p:cNvPr>
           <p:cNvPicPr>
-            <a:picLocks noGrp="1" noChangeAspect="1"/>
+            <a:picLocks noChangeAspect="1"/>
           </p:cNvPicPr>
-          <p:nvPr>
-            <p:ph idx="1"/>
-          </p:nvPr>
+          <p:nvPr/>
         </p:nvPicPr>
         <p:blipFill>
           <a:blip r:embed="rId2"/>
@@ -9168,11 +9088,54 @@
         </p:blipFill>
         <p:spPr>
           <a:xfrm>
-            <a:off x="2444694" y="2423239"/>
-            <a:ext cx="7462704" cy="3834512"/>
+            <a:off x="1078072" y="606415"/>
+            <a:ext cx="10035855" cy="5645169"/>
+          </a:xfrm>
+          <a:prstGeom prst="rect">
+            <a:avLst/>
+          </a:prstGeom>
+        </p:spPr>
+      </p:pic>
+      <p:sp>
+        <p:nvSpPr>
+          <p:cNvPr id="2" name="標題 1">
+            <a:extLst>
+              <a:ext uri="{FF2B5EF4-FFF2-40B4-BE49-F238E27FC236}">
+                <a16:creationId xmlns:a16="http://schemas.microsoft.com/office/drawing/2014/main" id="{2DE3768E-4ECB-4AFC-9D38-D8D0C87616D5}"/>
+              </a:ext>
+            </a:extLst>
+          </p:cNvPr>
+          <p:cNvSpPr>
+            <a:spLocks noGrp="1"/>
+          </p:cNvSpPr>
+          <p:nvPr>
+            <p:ph type="title" idx="4294967295"/>
+          </p:nvPr>
+        </p:nvSpPr>
+        <p:spPr>
+          <a:xfrm>
+            <a:off x="8026780" y="2777330"/>
+            <a:ext cx="3087147" cy="1303337"/>
           </a:xfrm>
         </p:spPr>
-      </p:pic>
+        <p:txBody>
+          <a:bodyPr/>
+          <a:lstStyle/>
+          <a:p>
+            <a:pPr algn="l"/>
+            <a:r>
+              <a:rPr lang="zh-TW" altLang="en-US" dirty="0">
+                <a:solidFill>
+                  <a:schemeClr val="bg1"/>
+                </a:solidFill>
+                <a:latin typeface="標楷體" panose="03000509000000000000" pitchFamily="65" charset="-120"/>
+                <a:ea typeface="標楷體" panose="03000509000000000000" pitchFamily="65" charset="-120"/>
+              </a:rPr>
+              <a:t>功能一實作</a:t>
+            </a:r>
+          </a:p>
+        </p:txBody>
+      </p:sp>
     </p:spTree>
     <p:extLst>
       <p:ext uri="{BB962C8B-B14F-4D97-AF65-F5344CB8AC3E}">
@@ -9203,92 +9166,12 @@
           <a:chExt cx="0" cy="0"/>
         </a:xfrm>
       </p:grpSpPr>
-      <p:sp>
-        <p:nvSpPr>
-          <p:cNvPr id="2" name="標題 1">
+      <p:pic>
+        <p:nvPicPr>
+          <p:cNvPr id="4" name="圖片 3">
             <a:extLst>
               <a:ext uri="{FF2B5EF4-FFF2-40B4-BE49-F238E27FC236}">
-                <a16:creationId xmlns:a16="http://schemas.microsoft.com/office/drawing/2014/main" id="{2DE3768E-4ECB-4AFC-9D38-D8D0C87616D5}"/>
-              </a:ext>
-            </a:extLst>
-          </p:cNvPr>
-          <p:cNvSpPr>
-            <a:spLocks noGrp="1"/>
-          </p:cNvSpPr>
-          <p:nvPr>
-            <p:ph type="title"/>
-          </p:nvPr>
-        </p:nvSpPr>
-        <p:spPr/>
-        <p:txBody>
-          <a:bodyPr>
-            <a:normAutofit/>
-          </a:bodyPr>
-          <a:lstStyle/>
-          <a:p>
-            <a:pPr algn="l"/>
-            <a:r>
-              <a:rPr lang="zh-TW" altLang="en-US" dirty="0">
-                <a:latin typeface="標楷體" panose="03000509000000000000" pitchFamily="65" charset="-120"/>
-                <a:ea typeface="標楷體" panose="03000509000000000000" pitchFamily="65" charset="-120"/>
-              </a:rPr>
-              <a:t>功能二流程和實作</a:t>
-            </a:r>
-          </a:p>
-        </p:txBody>
-      </p:sp>
-      <p:sp>
-        <p:nvSpPr>
-          <p:cNvPr id="3" name="內容版面配置區 2">
-            <a:extLst>
-              <a:ext uri="{FF2B5EF4-FFF2-40B4-BE49-F238E27FC236}">
-                <a16:creationId xmlns:a16="http://schemas.microsoft.com/office/drawing/2014/main" id="{140B7DEE-05AE-4C0B-879F-0C5512A4BDD8}"/>
-              </a:ext>
-            </a:extLst>
-          </p:cNvPr>
-          <p:cNvSpPr>
-            <a:spLocks noGrp="1"/>
-          </p:cNvSpPr>
-          <p:nvPr>
-            <p:ph idx="1"/>
-          </p:nvPr>
-        </p:nvSpPr>
-        <p:spPr/>
-        <p:txBody>
-          <a:bodyPr/>
-          <a:lstStyle/>
-          <a:p>
-            <a:r>
-              <a:rPr lang="zh-TW" altLang="en-US" dirty="0">
-                <a:latin typeface="標楷體" panose="03000509000000000000" pitchFamily="65" charset="-120"/>
-                <a:ea typeface="標楷體" panose="03000509000000000000" pitchFamily="65" charset="-120"/>
-              </a:rPr>
-              <a:t>利用</a:t>
-            </a:r>
-            <a:r>
-              <a:rPr lang="en-US" altLang="zh-TW" dirty="0">
-                <a:latin typeface="Times New Roman" panose="02020603050405020304" pitchFamily="18" charset="0"/>
-                <a:ea typeface="標楷體" panose="03000509000000000000" pitchFamily="65" charset="-120"/>
-                <a:cs typeface="Times New Roman" panose="02020603050405020304" pitchFamily="18" charset="0"/>
-              </a:rPr>
-              <a:t>cos</a:t>
-            </a:r>
-            <a:r>
-              <a:rPr lang="zh-TW" altLang="en-US" dirty="0">
-                <a:latin typeface="標楷體" panose="03000509000000000000" pitchFamily="65" charset="-120"/>
-                <a:ea typeface="標楷體" panose="03000509000000000000" pitchFamily="65" charset="-120"/>
-              </a:rPr>
-              <a:t>相似度推薦給使用者前三名相關的文章</a:t>
-            </a:r>
-          </a:p>
-        </p:txBody>
-      </p:sp>
-      <p:pic>
-        <p:nvPicPr>
-          <p:cNvPr id="9" name="圖片 8">
-            <a:extLst>
-              <a:ext uri="{FF2B5EF4-FFF2-40B4-BE49-F238E27FC236}">
-                <a16:creationId xmlns:a16="http://schemas.microsoft.com/office/drawing/2014/main" id="{C24DA8DB-1000-4792-ADD0-3E6D5CC701CC}"/>
+                <a16:creationId xmlns:a16="http://schemas.microsoft.com/office/drawing/2014/main" id="{C770308A-BE45-4689-BE19-6B7E09114BFB}"/>
               </a:ext>
             </a:extLst>
           </p:cNvPr>
@@ -9305,18 +9188,58 @@
         </p:blipFill>
         <p:spPr>
           <a:xfrm>
-            <a:off x="1295401" y="2994844"/>
-            <a:ext cx="9285513" cy="3248356"/>
+            <a:off x="1048074" y="589542"/>
+            <a:ext cx="10095851" cy="5678916"/>
           </a:xfrm>
           <a:prstGeom prst="rect">
             <a:avLst/>
           </a:prstGeom>
         </p:spPr>
       </p:pic>
+      <p:sp>
+        <p:nvSpPr>
+          <p:cNvPr id="2" name="標題 1">
+            <a:extLst>
+              <a:ext uri="{FF2B5EF4-FFF2-40B4-BE49-F238E27FC236}">
+                <a16:creationId xmlns:a16="http://schemas.microsoft.com/office/drawing/2014/main" id="{2DE3768E-4ECB-4AFC-9D38-D8D0C87616D5}"/>
+              </a:ext>
+            </a:extLst>
+          </p:cNvPr>
+          <p:cNvSpPr>
+            <a:spLocks noGrp="1"/>
+          </p:cNvSpPr>
+          <p:nvPr>
+            <p:ph type="title" idx="4294967295"/>
+          </p:nvPr>
+        </p:nvSpPr>
+        <p:spPr>
+          <a:xfrm>
+            <a:off x="8056778" y="2777331"/>
+            <a:ext cx="3087147" cy="1303337"/>
+          </a:xfrm>
+        </p:spPr>
+        <p:txBody>
+          <a:bodyPr/>
+          <a:lstStyle/>
+          <a:p>
+            <a:pPr algn="l"/>
+            <a:r>
+              <a:rPr lang="zh-TW" altLang="en-US" dirty="0">
+                <a:solidFill>
+                  <a:schemeClr val="bg1"/>
+                </a:solidFill>
+                <a:latin typeface="標楷體" panose="03000509000000000000" pitchFamily="65" charset="-120"/>
+                <a:ea typeface="標楷體" panose="03000509000000000000" pitchFamily="65" charset="-120"/>
+              </a:rPr>
+              <a:t>功能一實作</a:t>
+            </a:r>
+          </a:p>
+        </p:txBody>
+      </p:sp>
     </p:spTree>
     <p:extLst>
       <p:ext uri="{BB962C8B-B14F-4D97-AF65-F5344CB8AC3E}">
-        <p14:creationId xmlns:p14="http://schemas.microsoft.com/office/powerpoint/2010/main" val="3853850552"/>
+        <p14:creationId xmlns:p14="http://schemas.microsoft.com/office/powerpoint/2010/main" val="3657981400"/>
       </p:ext>
     </p:extLst>
   </p:cSld>
@@ -9343,78 +9266,19 @@
           <a:chExt cx="0" cy="0"/>
         </a:xfrm>
       </p:grpSpPr>
-      <p:sp>
-        <p:nvSpPr>
-          <p:cNvPr id="2" name="標題 1">
+      <p:pic>
+        <p:nvPicPr>
+          <p:cNvPr id="5" name="圖片 4">
             <a:extLst>
               <a:ext uri="{FF2B5EF4-FFF2-40B4-BE49-F238E27FC236}">
-                <a16:creationId xmlns:a16="http://schemas.microsoft.com/office/drawing/2014/main" id="{2DE3768E-4ECB-4AFC-9D38-D8D0C87616D5}"/>
-              </a:ext>
-            </a:extLst>
-          </p:cNvPr>
-          <p:cNvSpPr>
-            <a:spLocks noGrp="1"/>
-          </p:cNvSpPr>
-          <p:nvPr>
-            <p:ph type="title"/>
-          </p:nvPr>
-        </p:nvSpPr>
-        <p:spPr/>
-        <p:txBody>
-          <a:bodyPr/>
-          <a:lstStyle/>
-          <a:p>
-            <a:pPr algn="l"/>
-            <a:r>
-              <a:rPr lang="zh-TW" altLang="en-US" dirty="0">
-                <a:latin typeface="標楷體" panose="03000509000000000000" pitchFamily="65" charset="-120"/>
-                <a:ea typeface="標楷體" panose="03000509000000000000" pitchFamily="65" charset="-120"/>
-              </a:rPr>
-              <a:t>停用詞</a:t>
-            </a:r>
-            <a:r>
-              <a:rPr lang="en-US" altLang="zh-TW" dirty="0">
-                <a:latin typeface="標楷體" panose="03000509000000000000" pitchFamily="65" charset="-120"/>
-                <a:ea typeface="標楷體" panose="03000509000000000000" pitchFamily="65" charset="-120"/>
-              </a:rPr>
-              <a:t>(</a:t>
-            </a:r>
-            <a:r>
-              <a:rPr lang="zh-TW" altLang="en-US" dirty="0">
-                <a:latin typeface="標楷體" panose="03000509000000000000" pitchFamily="65" charset="-120"/>
-                <a:ea typeface="標楷體" panose="03000509000000000000" pitchFamily="65" charset="-120"/>
-              </a:rPr>
-              <a:t>待決定</a:t>
-            </a:r>
-            <a:r>
-              <a:rPr lang="en-US" altLang="zh-TW" dirty="0">
-                <a:latin typeface="標楷體" panose="03000509000000000000" pitchFamily="65" charset="-120"/>
-                <a:ea typeface="標楷體" panose="03000509000000000000" pitchFamily="65" charset="-120"/>
-              </a:rPr>
-              <a:t>)</a:t>
-            </a:r>
-            <a:endParaRPr lang="zh-TW" altLang="en-US" dirty="0">
-              <a:latin typeface="標楷體" panose="03000509000000000000" pitchFamily="65" charset="-120"/>
-              <a:ea typeface="標楷體" panose="03000509000000000000" pitchFamily="65" charset="-120"/>
-            </a:endParaRPr>
-          </a:p>
-        </p:txBody>
-      </p:sp>
-      <p:pic>
-        <p:nvPicPr>
-          <p:cNvPr id="6" name="內容版面配置區 5">
-            <a:extLst>
-              <a:ext uri="{FF2B5EF4-FFF2-40B4-BE49-F238E27FC236}">
-                <a16:creationId xmlns:a16="http://schemas.microsoft.com/office/drawing/2014/main" id="{5C99F979-FA47-4BD6-98F5-841ED1C95C31}"/>
+                <a16:creationId xmlns:a16="http://schemas.microsoft.com/office/drawing/2014/main" id="{F1E6F8E2-F320-4C5A-919B-35368DC6B483}"/>
               </a:ext>
             </a:extLst>
           </p:cNvPr>
           <p:cNvPicPr>
-            <a:picLocks noGrp="1" noChangeAspect="1"/>
+            <a:picLocks noChangeAspect="1"/>
           </p:cNvPicPr>
-          <p:nvPr>
-            <p:ph idx="1"/>
-          </p:nvPr>
+          <p:nvPr/>
         </p:nvPicPr>
         <p:blipFill>
           <a:blip r:embed="rId2"/>
@@ -9424,15 +9288,58 @@
         </p:blipFill>
         <p:spPr>
           <a:xfrm>
-            <a:off x="1295402" y="2474752"/>
-            <a:ext cx="9837438" cy="1438808"/>
+            <a:off x="1048074" y="589542"/>
+            <a:ext cx="10095851" cy="5678916"/>
+          </a:xfrm>
+          <a:prstGeom prst="rect">
+            <a:avLst/>
+          </a:prstGeom>
+        </p:spPr>
+      </p:pic>
+      <p:sp>
+        <p:nvSpPr>
+          <p:cNvPr id="2" name="標題 1">
+            <a:extLst>
+              <a:ext uri="{FF2B5EF4-FFF2-40B4-BE49-F238E27FC236}">
+                <a16:creationId xmlns:a16="http://schemas.microsoft.com/office/drawing/2014/main" id="{2DE3768E-4ECB-4AFC-9D38-D8D0C87616D5}"/>
+              </a:ext>
+            </a:extLst>
+          </p:cNvPr>
+          <p:cNvSpPr>
+            <a:spLocks noGrp="1"/>
+          </p:cNvSpPr>
+          <p:nvPr>
+            <p:ph type="title" idx="4294967295"/>
+          </p:nvPr>
+        </p:nvSpPr>
+        <p:spPr>
+          <a:xfrm>
+            <a:off x="8056778" y="2777331"/>
+            <a:ext cx="3087147" cy="1303337"/>
           </a:xfrm>
         </p:spPr>
-      </p:pic>
+        <p:txBody>
+          <a:bodyPr/>
+          <a:lstStyle/>
+          <a:p>
+            <a:pPr algn="l"/>
+            <a:r>
+              <a:rPr lang="zh-TW" altLang="en-US" dirty="0">
+                <a:solidFill>
+                  <a:schemeClr val="bg1"/>
+                </a:solidFill>
+                <a:latin typeface="標楷體" panose="03000509000000000000" pitchFamily="65" charset="-120"/>
+                <a:ea typeface="標楷體" panose="03000509000000000000" pitchFamily="65" charset="-120"/>
+              </a:rPr>
+              <a:t>功能一實作</a:t>
+            </a:r>
+          </a:p>
+        </p:txBody>
+      </p:sp>
     </p:spTree>
     <p:extLst>
       <p:ext uri="{BB962C8B-B14F-4D97-AF65-F5344CB8AC3E}">
-        <p14:creationId xmlns:p14="http://schemas.microsoft.com/office/powerpoint/2010/main" val="950565359"/>
+        <p14:creationId xmlns:p14="http://schemas.microsoft.com/office/powerpoint/2010/main" val="3679205559"/>
       </p:ext>
     </p:extLst>
   </p:cSld>
@@ -9459,12 +9366,42 @@
           <a:chExt cx="0" cy="0"/>
         </a:xfrm>
       </p:grpSpPr>
+      <p:pic>
+        <p:nvPicPr>
+          <p:cNvPr id="5" name="圖片 4">
+            <a:extLst>
+              <a:ext uri="{FF2B5EF4-FFF2-40B4-BE49-F238E27FC236}">
+                <a16:creationId xmlns:a16="http://schemas.microsoft.com/office/drawing/2014/main" id="{BF34169A-9F1D-41A3-9EC3-A1F94668C807}"/>
+              </a:ext>
+            </a:extLst>
+          </p:cNvPr>
+          <p:cNvPicPr>
+            <a:picLocks noChangeAspect="1"/>
+          </p:cNvPicPr>
+          <p:nvPr/>
+        </p:nvPicPr>
+        <p:blipFill>
+          <a:blip r:embed="rId2"/>
+          <a:stretch>
+            <a:fillRect/>
+          </a:stretch>
+        </p:blipFill>
+        <p:spPr>
+          <a:xfrm>
+            <a:off x="1048074" y="589542"/>
+            <a:ext cx="10095851" cy="5678916"/>
+          </a:xfrm>
+          <a:prstGeom prst="rect">
+            <a:avLst/>
+          </a:prstGeom>
+        </p:spPr>
+      </p:pic>
       <p:sp>
         <p:nvSpPr>
           <p:cNvPr id="2" name="標題 1">
             <a:extLst>
               <a:ext uri="{FF2B5EF4-FFF2-40B4-BE49-F238E27FC236}">
-                <a16:creationId xmlns:a16="http://schemas.microsoft.com/office/drawing/2014/main" id="{FD584AA1-206F-4D0E-B712-E4BF12872D0E}"/>
+                <a16:creationId xmlns:a16="http://schemas.microsoft.com/office/drawing/2014/main" id="{2DE3768E-4ECB-4AFC-9D38-D8D0C87616D5}"/>
               </a:ext>
             </a:extLst>
           </p:cNvPr>
@@ -9472,82 +9409,37 @@
             <a:spLocks noGrp="1"/>
           </p:cNvSpPr>
           <p:nvPr>
-            <p:ph type="title"/>
-          </p:nvPr>
-        </p:nvSpPr>
-        <p:spPr/>
+            <p:ph type="title" idx="4294967295"/>
+          </p:nvPr>
+        </p:nvSpPr>
+        <p:spPr>
+          <a:xfrm>
+            <a:off x="8056778" y="2777331"/>
+            <a:ext cx="3087147" cy="1303337"/>
+          </a:xfrm>
+        </p:spPr>
         <p:txBody>
           <a:bodyPr/>
           <a:lstStyle/>
           <a:p>
+            <a:pPr algn="l"/>
             <a:r>
               <a:rPr lang="zh-TW" altLang="en-US" dirty="0">
+                <a:solidFill>
+                  <a:schemeClr val="bg1"/>
+                </a:solidFill>
                 <a:latin typeface="標楷體" panose="03000509000000000000" pitchFamily="65" charset="-120"/>
                 <a:ea typeface="標楷體" panose="03000509000000000000" pitchFamily="65" charset="-120"/>
               </a:rPr>
-              <a:t>相關連結</a:t>
-            </a:r>
-          </a:p>
-        </p:txBody>
-      </p:sp>
-      <p:sp>
-        <p:nvSpPr>
-          <p:cNvPr id="3" name="內容版面配置區 2">
-            <a:extLst>
-              <a:ext uri="{FF2B5EF4-FFF2-40B4-BE49-F238E27FC236}">
-                <a16:creationId xmlns:a16="http://schemas.microsoft.com/office/drawing/2014/main" id="{AA876783-6B37-4DAD-A196-F3B9DAA3E685}"/>
-              </a:ext>
-            </a:extLst>
-          </p:cNvPr>
-          <p:cNvSpPr>
-            <a:spLocks noGrp="1"/>
-          </p:cNvSpPr>
-          <p:nvPr>
-            <p:ph idx="1"/>
-          </p:nvPr>
-        </p:nvSpPr>
-        <p:spPr/>
-        <p:txBody>
-          <a:bodyPr/>
-          <a:lstStyle/>
-          <a:p>
-            <a:r>
-              <a:rPr lang="zh-TW" altLang="en-US" dirty="0">
-                <a:latin typeface="標楷體" panose="03000509000000000000" pitchFamily="65" charset="-120"/>
-                <a:ea typeface="標楷體" panose="03000509000000000000" pitchFamily="65" charset="-120"/>
-                <a:cs typeface="Times New Roman" panose="02020603050405020304" pitchFamily="18" charset="0"/>
-                <a:hlinkClick r:id="rId2"/>
-              </a:rPr>
-              <a:t>資訊檢索系統期末專案</a:t>
-            </a:r>
-            <a:endParaRPr lang="en-US" altLang="zh-TW" dirty="0">
-              <a:latin typeface="標楷體" panose="03000509000000000000" pitchFamily="65" charset="-120"/>
-              <a:ea typeface="標楷體" panose="03000509000000000000" pitchFamily="65" charset="-120"/>
-              <a:cs typeface="Times New Roman" panose="02020603050405020304" pitchFamily="18" charset="0"/>
-            </a:endParaRPr>
-          </a:p>
-          <a:p>
-            <a:r>
-              <a:rPr lang="zh-TW" altLang="en-US" dirty="0">
-                <a:latin typeface="標楷體" panose="03000509000000000000" pitchFamily="65" charset="-120"/>
-                <a:ea typeface="標楷體" panose="03000509000000000000" pitchFamily="65" charset="-120"/>
-                <a:cs typeface="Times New Roman" panose="02020603050405020304" pitchFamily="18" charset="0"/>
-                <a:hlinkClick r:id="rId3"/>
-              </a:rPr>
-              <a:t>台灣事實查核中心</a:t>
-            </a:r>
-            <a:endParaRPr lang="zh-TW" altLang="en-US" dirty="0">
-              <a:latin typeface="標楷體" panose="03000509000000000000" pitchFamily="65" charset="-120"/>
-              <a:ea typeface="標楷體" panose="03000509000000000000" pitchFamily="65" charset="-120"/>
-              <a:cs typeface="Times New Roman" panose="02020603050405020304" pitchFamily="18" charset="0"/>
-            </a:endParaRPr>
+              <a:t>功能一實作</a:t>
+            </a:r>
           </a:p>
         </p:txBody>
       </p:sp>
     </p:spTree>
     <p:extLst>
       <p:ext uri="{BB962C8B-B14F-4D97-AF65-F5344CB8AC3E}">
-        <p14:creationId xmlns:p14="http://schemas.microsoft.com/office/powerpoint/2010/main" val="1128931381"/>
+        <p14:creationId xmlns:p14="http://schemas.microsoft.com/office/powerpoint/2010/main" val="546576428"/>
       </p:ext>
     </p:extLst>
   </p:cSld>
@@ -9574,103 +9466,19 @@
           <a:chExt cx="0" cy="0"/>
         </a:xfrm>
       </p:grpSpPr>
-      <p:sp>
-        <p:nvSpPr>
-          <p:cNvPr id="2" name="標題 1">
+      <p:pic>
+        <p:nvPicPr>
+          <p:cNvPr id="4" name="圖片 3">
             <a:extLst>
               <a:ext uri="{FF2B5EF4-FFF2-40B4-BE49-F238E27FC236}">
-                <a16:creationId xmlns:a16="http://schemas.microsoft.com/office/drawing/2014/main" id="{2DE3768E-4ECB-4AFC-9D38-D8D0C87616D5}"/>
-              </a:ext>
-            </a:extLst>
-          </p:cNvPr>
-          <p:cNvSpPr>
-            <a:spLocks noGrp="1"/>
-          </p:cNvSpPr>
-          <p:nvPr>
-            <p:ph type="title"/>
-          </p:nvPr>
-        </p:nvSpPr>
-        <p:spPr/>
-        <p:txBody>
-          <a:bodyPr/>
-          <a:lstStyle/>
-          <a:p>
-            <a:pPr algn="l"/>
-            <a:r>
-              <a:rPr lang="zh-TW" altLang="en-US" dirty="0">
-                <a:latin typeface="標楷體" panose="03000509000000000000" pitchFamily="65" charset="-120"/>
-                <a:ea typeface="標楷體" panose="03000509000000000000" pitchFamily="65" charset="-120"/>
-              </a:rPr>
-              <a:t>功能一實作</a:t>
-            </a:r>
-            <a:r>
-              <a:rPr lang="en-US" altLang="zh-TW" dirty="0">
-                <a:latin typeface="標楷體" panose="03000509000000000000" pitchFamily="65" charset="-120"/>
-                <a:ea typeface="標楷體" panose="03000509000000000000" pitchFamily="65" charset="-120"/>
-              </a:rPr>
-              <a:t>(</a:t>
-            </a:r>
-            <a:r>
-              <a:rPr lang="en-US" altLang="zh-TW" dirty="0">
-                <a:latin typeface="Times New Roman" panose="02020603050405020304" pitchFamily="18" charset="0"/>
-                <a:ea typeface="標楷體" panose="03000509000000000000" pitchFamily="65" charset="-120"/>
-                <a:cs typeface="Times New Roman" panose="02020603050405020304" pitchFamily="18" charset="0"/>
-              </a:rPr>
-              <a:t>2024</a:t>
-            </a:r>
-            <a:r>
-              <a:rPr lang="zh-TW" altLang="en-US" dirty="0">
-                <a:latin typeface="Times New Roman" panose="02020603050405020304" pitchFamily="18" charset="0"/>
-                <a:ea typeface="標楷體" panose="03000509000000000000" pitchFamily="65" charset="-120"/>
-                <a:cs typeface="Times New Roman" panose="02020603050405020304" pitchFamily="18" charset="0"/>
-              </a:rPr>
-              <a:t>的</a:t>
-            </a:r>
-            <a:r>
-              <a:rPr lang="en-US" altLang="zh-TW" dirty="0">
-                <a:latin typeface="Times New Roman" panose="02020603050405020304" pitchFamily="18" charset="0"/>
-                <a:ea typeface="標楷體" panose="03000509000000000000" pitchFamily="65" charset="-120"/>
-                <a:cs typeface="Times New Roman" panose="02020603050405020304" pitchFamily="18" charset="0"/>
-              </a:rPr>
-              <a:t>642</a:t>
-            </a:r>
-            <a:r>
-              <a:rPr lang="zh-TW" altLang="en-US" dirty="0">
-                <a:latin typeface="Times New Roman" panose="02020603050405020304" pitchFamily="18" charset="0"/>
-                <a:ea typeface="標楷體" panose="03000509000000000000" pitchFamily="65" charset="-120"/>
-                <a:cs typeface="Times New Roman" panose="02020603050405020304" pitchFamily="18" charset="0"/>
-              </a:rPr>
-              <a:t>篇</a:t>
-            </a:r>
-            <a:r>
-              <a:rPr lang="en-US" altLang="zh-TW" dirty="0">
-                <a:latin typeface="標楷體" panose="03000509000000000000" pitchFamily="65" charset="-120"/>
-                <a:ea typeface="標楷體" panose="03000509000000000000" pitchFamily="65" charset="-120"/>
-              </a:rPr>
-              <a:t>)</a:t>
-            </a:r>
-            <a:endParaRPr lang="zh-TW" altLang="en-US" dirty="0">
-              <a:latin typeface="標楷體" panose="03000509000000000000" pitchFamily="65" charset="-120"/>
-              <a:ea typeface="標楷體" panose="03000509000000000000" pitchFamily="65" charset="-120"/>
-            </a:endParaRPr>
-          </a:p>
-        </p:txBody>
-      </p:sp>
-      <p:pic>
-        <p:nvPicPr>
-          <p:cNvPr id="6" name="內容版面配置區 5">
-            <a:extLst>
-              <a:ext uri="{FF2B5EF4-FFF2-40B4-BE49-F238E27FC236}">
-                <a16:creationId xmlns:a16="http://schemas.microsoft.com/office/drawing/2014/main" id="{91E9F06F-C9B8-44DC-9FD7-7048DBEA3FDD}"/>
+                <a16:creationId xmlns:a16="http://schemas.microsoft.com/office/drawing/2014/main" id="{2C91FC0A-1844-45AB-AF68-5EBF5F40E426}"/>
               </a:ext>
             </a:extLst>
           </p:cNvPr>
           <p:cNvPicPr>
-            <a:picLocks noGrp="1" noChangeAspect="1"/>
+            <a:picLocks noChangeAspect="1"/>
           </p:cNvPicPr>
-          <p:nvPr>
-            <p:ph idx="1"/>
-          </p:nvPr>
+          <p:nvPr/>
         </p:nvPicPr>
         <p:blipFill>
           <a:blip r:embed="rId2"/>
@@ -9680,15 +9488,58 @@
         </p:blipFill>
         <p:spPr>
           <a:xfrm>
-            <a:off x="2408213" y="2423238"/>
-            <a:ext cx="7447226" cy="3826559"/>
+            <a:off x="1048074" y="589542"/>
+            <a:ext cx="10095851" cy="5678916"/>
+          </a:xfrm>
+          <a:prstGeom prst="rect">
+            <a:avLst/>
+          </a:prstGeom>
+        </p:spPr>
+      </p:pic>
+      <p:sp>
+        <p:nvSpPr>
+          <p:cNvPr id="2" name="標題 1">
+            <a:extLst>
+              <a:ext uri="{FF2B5EF4-FFF2-40B4-BE49-F238E27FC236}">
+                <a16:creationId xmlns:a16="http://schemas.microsoft.com/office/drawing/2014/main" id="{2DE3768E-4ECB-4AFC-9D38-D8D0C87616D5}"/>
+              </a:ext>
+            </a:extLst>
+          </p:cNvPr>
+          <p:cNvSpPr>
+            <a:spLocks noGrp="1"/>
+          </p:cNvSpPr>
+          <p:nvPr>
+            <p:ph type="title" idx="4294967295"/>
+          </p:nvPr>
+        </p:nvSpPr>
+        <p:spPr>
+          <a:xfrm>
+            <a:off x="8056778" y="2777331"/>
+            <a:ext cx="3087147" cy="1303337"/>
           </a:xfrm>
         </p:spPr>
-      </p:pic>
+        <p:txBody>
+          <a:bodyPr/>
+          <a:lstStyle/>
+          <a:p>
+            <a:pPr algn="l"/>
+            <a:r>
+              <a:rPr lang="zh-TW" altLang="en-US" dirty="0">
+                <a:solidFill>
+                  <a:schemeClr val="bg1"/>
+                </a:solidFill>
+                <a:latin typeface="標楷體" panose="03000509000000000000" pitchFamily="65" charset="-120"/>
+                <a:ea typeface="標楷體" panose="03000509000000000000" pitchFamily="65" charset="-120"/>
+              </a:rPr>
+              <a:t>功能一實作</a:t>
+            </a:r>
+          </a:p>
+        </p:txBody>
+      </p:sp>
     </p:spTree>
     <p:extLst>
       <p:ext uri="{BB962C8B-B14F-4D97-AF65-F5344CB8AC3E}">
-        <p14:creationId xmlns:p14="http://schemas.microsoft.com/office/powerpoint/2010/main" val="3310180135"/>
+        <p14:creationId xmlns:p14="http://schemas.microsoft.com/office/powerpoint/2010/main" val="3065345189"/>
       </p:ext>
     </p:extLst>
   </p:cSld>
@@ -9715,103 +9566,19 @@
           <a:chExt cx="0" cy="0"/>
         </a:xfrm>
       </p:grpSpPr>
-      <p:sp>
-        <p:nvSpPr>
-          <p:cNvPr id="2" name="標題 1">
+      <p:pic>
+        <p:nvPicPr>
+          <p:cNvPr id="5" name="圖片 4">
             <a:extLst>
               <a:ext uri="{FF2B5EF4-FFF2-40B4-BE49-F238E27FC236}">
-                <a16:creationId xmlns:a16="http://schemas.microsoft.com/office/drawing/2014/main" id="{2DE3768E-4ECB-4AFC-9D38-D8D0C87616D5}"/>
-              </a:ext>
-            </a:extLst>
-          </p:cNvPr>
-          <p:cNvSpPr>
-            <a:spLocks noGrp="1"/>
-          </p:cNvSpPr>
-          <p:nvPr>
-            <p:ph type="title"/>
-          </p:nvPr>
-        </p:nvSpPr>
-        <p:spPr/>
-        <p:txBody>
-          <a:bodyPr/>
-          <a:lstStyle/>
-          <a:p>
-            <a:pPr algn="l"/>
-            <a:r>
-              <a:rPr lang="zh-TW" altLang="en-US" dirty="0">
-                <a:latin typeface="標楷體" panose="03000509000000000000" pitchFamily="65" charset="-120"/>
-                <a:ea typeface="標楷體" panose="03000509000000000000" pitchFamily="65" charset="-120"/>
-              </a:rPr>
-              <a:t>功能一實作</a:t>
-            </a:r>
-            <a:r>
-              <a:rPr lang="en-US" altLang="zh-TW" dirty="0">
-                <a:latin typeface="標楷體" panose="03000509000000000000" pitchFamily="65" charset="-120"/>
-                <a:ea typeface="標楷體" panose="03000509000000000000" pitchFamily="65" charset="-120"/>
-              </a:rPr>
-              <a:t>(</a:t>
-            </a:r>
-            <a:r>
-              <a:rPr lang="en-US" altLang="zh-TW" dirty="0">
-                <a:latin typeface="Times New Roman" panose="02020603050405020304" pitchFamily="18" charset="0"/>
-                <a:ea typeface="標楷體" panose="03000509000000000000" pitchFamily="65" charset="-120"/>
-                <a:cs typeface="Times New Roman" panose="02020603050405020304" pitchFamily="18" charset="0"/>
-              </a:rPr>
-              <a:t>2023</a:t>
-            </a:r>
-            <a:r>
-              <a:rPr lang="zh-TW" altLang="en-US" dirty="0">
-                <a:latin typeface="Times New Roman" panose="02020603050405020304" pitchFamily="18" charset="0"/>
-                <a:ea typeface="標楷體" panose="03000509000000000000" pitchFamily="65" charset="-120"/>
-                <a:cs typeface="Times New Roman" panose="02020603050405020304" pitchFamily="18" charset="0"/>
-              </a:rPr>
-              <a:t>的</a:t>
-            </a:r>
-            <a:r>
-              <a:rPr lang="en-US" altLang="zh-TW" dirty="0">
-                <a:latin typeface="Times New Roman" panose="02020603050405020304" pitchFamily="18" charset="0"/>
-                <a:ea typeface="標楷體" panose="03000509000000000000" pitchFamily="65" charset="-120"/>
-                <a:cs typeface="Times New Roman" panose="02020603050405020304" pitchFamily="18" charset="0"/>
-              </a:rPr>
-              <a:t>644</a:t>
-            </a:r>
-            <a:r>
-              <a:rPr lang="zh-TW" altLang="en-US" dirty="0">
-                <a:latin typeface="Times New Roman" panose="02020603050405020304" pitchFamily="18" charset="0"/>
-                <a:ea typeface="標楷體" panose="03000509000000000000" pitchFamily="65" charset="-120"/>
-                <a:cs typeface="Times New Roman" panose="02020603050405020304" pitchFamily="18" charset="0"/>
-              </a:rPr>
-              <a:t>篇</a:t>
-            </a:r>
-            <a:r>
-              <a:rPr lang="en-US" altLang="zh-TW" dirty="0">
-                <a:latin typeface="標楷體" panose="03000509000000000000" pitchFamily="65" charset="-120"/>
-                <a:ea typeface="標楷體" panose="03000509000000000000" pitchFamily="65" charset="-120"/>
-              </a:rPr>
-              <a:t>)</a:t>
-            </a:r>
-            <a:endParaRPr lang="zh-TW" altLang="en-US" dirty="0">
-              <a:latin typeface="標楷體" panose="03000509000000000000" pitchFamily="65" charset="-120"/>
-              <a:ea typeface="標楷體" panose="03000509000000000000" pitchFamily="65" charset="-120"/>
-            </a:endParaRPr>
-          </a:p>
-        </p:txBody>
-      </p:sp>
-      <p:pic>
-        <p:nvPicPr>
-          <p:cNvPr id="9" name="內容版面配置區 8">
-            <a:extLst>
-              <a:ext uri="{FF2B5EF4-FFF2-40B4-BE49-F238E27FC236}">
-                <a16:creationId xmlns:a16="http://schemas.microsoft.com/office/drawing/2014/main" id="{98517570-BCFD-4DE4-BF1B-E3CF1306889E}"/>
+                <a16:creationId xmlns:a16="http://schemas.microsoft.com/office/drawing/2014/main" id="{2CDCC122-D246-4CB6-A048-128F7C29C0D6}"/>
               </a:ext>
             </a:extLst>
           </p:cNvPr>
           <p:cNvPicPr>
-            <a:picLocks noGrp="1" noChangeAspect="1"/>
+            <a:picLocks noChangeAspect="1"/>
           </p:cNvPicPr>
-          <p:nvPr>
-            <p:ph idx="1"/>
-          </p:nvPr>
+          <p:nvPr/>
         </p:nvPicPr>
         <p:blipFill>
           <a:blip r:embed="rId2"/>
@@ -9821,15 +9588,58 @@
         </p:blipFill>
         <p:spPr>
           <a:xfrm>
-            <a:off x="2375417" y="2417967"/>
-            <a:ext cx="7441166" cy="3823442"/>
+            <a:off x="1048074" y="589542"/>
+            <a:ext cx="10095851" cy="5678916"/>
+          </a:xfrm>
+          <a:prstGeom prst="rect">
+            <a:avLst/>
+          </a:prstGeom>
+        </p:spPr>
+      </p:pic>
+      <p:sp>
+        <p:nvSpPr>
+          <p:cNvPr id="2" name="標題 1">
+            <a:extLst>
+              <a:ext uri="{FF2B5EF4-FFF2-40B4-BE49-F238E27FC236}">
+                <a16:creationId xmlns:a16="http://schemas.microsoft.com/office/drawing/2014/main" id="{2DE3768E-4ECB-4AFC-9D38-D8D0C87616D5}"/>
+              </a:ext>
+            </a:extLst>
+          </p:cNvPr>
+          <p:cNvSpPr>
+            <a:spLocks noGrp="1"/>
+          </p:cNvSpPr>
+          <p:nvPr>
+            <p:ph type="title" idx="4294967295"/>
+          </p:nvPr>
+        </p:nvSpPr>
+        <p:spPr>
+          <a:xfrm>
+            <a:off x="8056778" y="2777331"/>
+            <a:ext cx="3087147" cy="1303337"/>
           </a:xfrm>
         </p:spPr>
-      </p:pic>
+        <p:txBody>
+          <a:bodyPr/>
+          <a:lstStyle/>
+          <a:p>
+            <a:pPr algn="l"/>
+            <a:r>
+              <a:rPr lang="zh-TW" altLang="en-US" dirty="0">
+                <a:solidFill>
+                  <a:schemeClr val="bg1"/>
+                </a:solidFill>
+                <a:latin typeface="標楷體" panose="03000509000000000000" pitchFamily="65" charset="-120"/>
+                <a:ea typeface="標楷體" panose="03000509000000000000" pitchFamily="65" charset="-120"/>
+              </a:rPr>
+              <a:t>功能一實作</a:t>
+            </a:r>
+          </a:p>
+        </p:txBody>
+      </p:sp>
     </p:spTree>
     <p:extLst>
       <p:ext uri="{BB962C8B-B14F-4D97-AF65-F5344CB8AC3E}">
-        <p14:creationId xmlns:p14="http://schemas.microsoft.com/office/powerpoint/2010/main" val="2301068202"/>
+        <p14:creationId xmlns:p14="http://schemas.microsoft.com/office/powerpoint/2010/main" val="2338535730"/>
       </p:ext>
     </p:extLst>
   </p:cSld>
@@ -9874,7 +9684,9 @@
         </p:nvSpPr>
         <p:spPr/>
         <p:txBody>
-          <a:bodyPr/>
+          <a:bodyPr>
+            <a:normAutofit/>
+          </a:bodyPr>
           <a:lstStyle/>
           <a:p>
             <a:pPr algn="l"/>
@@ -9883,14 +9695,38 @@
                 <a:latin typeface="標楷體" panose="03000509000000000000" pitchFamily="65" charset="-120"/>
                 <a:ea typeface="標楷體" panose="03000509000000000000" pitchFamily="65" charset="-120"/>
               </a:rPr>
-              <a:t>功能一實作</a:t>
-            </a:r>
-            <a:r>
-              <a:rPr lang="en-US" altLang="zh-TW" dirty="0">
+              <a:t>功能二流程</a:t>
+            </a:r>
+          </a:p>
+        </p:txBody>
+      </p:sp>
+      <p:sp>
+        <p:nvSpPr>
+          <p:cNvPr id="3" name="內容版面配置區 2">
+            <a:extLst>
+              <a:ext uri="{FF2B5EF4-FFF2-40B4-BE49-F238E27FC236}">
+                <a16:creationId xmlns:a16="http://schemas.microsoft.com/office/drawing/2014/main" id="{140B7DEE-05AE-4C0B-879F-0C5512A4BDD8}"/>
+              </a:ext>
+            </a:extLst>
+          </p:cNvPr>
+          <p:cNvSpPr>
+            <a:spLocks noGrp="1"/>
+          </p:cNvSpPr>
+          <p:nvPr>
+            <p:ph idx="1"/>
+          </p:nvPr>
+        </p:nvSpPr>
+        <p:spPr/>
+        <p:txBody>
+          <a:bodyPr/>
+          <a:lstStyle/>
+          <a:p>
+            <a:r>
+              <a:rPr lang="zh-TW" altLang="en-US" dirty="0">
                 <a:latin typeface="標楷體" panose="03000509000000000000" pitchFamily="65" charset="-120"/>
                 <a:ea typeface="標楷體" panose="03000509000000000000" pitchFamily="65" charset="-120"/>
               </a:rPr>
-              <a:t>(</a:t>
+              <a:t>利用</a:t>
             </a:r>
             <a:r>
               <a:rPr lang="en-US" altLang="zh-TW" dirty="0">
@@ -9898,79 +9734,22 @@
                 <a:ea typeface="標楷體" panose="03000509000000000000" pitchFamily="65" charset="-120"/>
                 <a:cs typeface="Times New Roman" panose="02020603050405020304" pitchFamily="18" charset="0"/>
               </a:rPr>
-              <a:t>2022</a:t>
+              <a:t>cos</a:t>
             </a:r>
             <a:r>
               <a:rPr lang="zh-TW" altLang="en-US" dirty="0">
-                <a:latin typeface="Times New Roman" panose="02020603050405020304" pitchFamily="18" charset="0"/>
-                <a:ea typeface="標楷體" panose="03000509000000000000" pitchFamily="65" charset="-120"/>
-                <a:cs typeface="Times New Roman" panose="02020603050405020304" pitchFamily="18" charset="0"/>
-              </a:rPr>
-              <a:t>的</a:t>
-            </a:r>
-            <a:r>
-              <a:rPr lang="en-US" altLang="zh-TW" dirty="0">
-                <a:latin typeface="Times New Roman" panose="02020603050405020304" pitchFamily="18" charset="0"/>
-                <a:ea typeface="標楷體" panose="03000509000000000000" pitchFamily="65" charset="-120"/>
-                <a:cs typeface="Times New Roman" panose="02020603050405020304" pitchFamily="18" charset="0"/>
-              </a:rPr>
-              <a:t>703</a:t>
-            </a:r>
-            <a:r>
-              <a:rPr lang="zh-TW" altLang="en-US" dirty="0">
-                <a:latin typeface="Times New Roman" panose="02020603050405020304" pitchFamily="18" charset="0"/>
-                <a:ea typeface="標楷體" panose="03000509000000000000" pitchFamily="65" charset="-120"/>
-                <a:cs typeface="Times New Roman" panose="02020603050405020304" pitchFamily="18" charset="0"/>
-              </a:rPr>
-              <a:t>篇</a:t>
-            </a:r>
-            <a:r>
-              <a:rPr lang="en-US" altLang="zh-TW" dirty="0">
                 <a:latin typeface="標楷體" panose="03000509000000000000" pitchFamily="65" charset="-120"/>
                 <a:ea typeface="標楷體" panose="03000509000000000000" pitchFamily="65" charset="-120"/>
               </a:rPr>
-              <a:t>)</a:t>
-            </a:r>
-            <a:endParaRPr lang="zh-TW" altLang="en-US" dirty="0">
-              <a:latin typeface="標楷體" panose="03000509000000000000" pitchFamily="65" charset="-120"/>
-              <a:ea typeface="標楷體" panose="03000509000000000000" pitchFamily="65" charset="-120"/>
-            </a:endParaRPr>
-          </a:p>
-        </p:txBody>
-      </p:sp>
-      <p:pic>
-        <p:nvPicPr>
-          <p:cNvPr id="5" name="內容版面配置區 4">
-            <a:extLst>
-              <a:ext uri="{FF2B5EF4-FFF2-40B4-BE49-F238E27FC236}">
-                <a16:creationId xmlns:a16="http://schemas.microsoft.com/office/drawing/2014/main" id="{AFFEFD1B-09F6-41EB-9B2B-7F573C660641}"/>
-              </a:ext>
-            </a:extLst>
-          </p:cNvPr>
-          <p:cNvPicPr>
-            <a:picLocks noGrp="1" noChangeAspect="1"/>
-          </p:cNvPicPr>
-          <p:nvPr>
-            <p:ph idx="1"/>
-          </p:nvPr>
-        </p:nvPicPr>
-        <p:blipFill>
-          <a:blip r:embed="rId2"/>
-          <a:stretch>
-            <a:fillRect/>
-          </a:stretch>
-        </p:blipFill>
-        <p:spPr>
-          <a:xfrm>
-            <a:off x="2372386" y="2431628"/>
-            <a:ext cx="7447227" cy="3826559"/>
-          </a:xfrm>
-        </p:spPr>
-      </p:pic>
+              <a:t>相似度推薦給使用者前三名相關的文章</a:t>
+            </a:r>
+          </a:p>
+        </p:txBody>
+      </p:sp>
     </p:spTree>
     <p:extLst>
       <p:ext uri="{BB962C8B-B14F-4D97-AF65-F5344CB8AC3E}">
-        <p14:creationId xmlns:p14="http://schemas.microsoft.com/office/powerpoint/2010/main" val="1351768483"/>
+        <p14:creationId xmlns:p14="http://schemas.microsoft.com/office/powerpoint/2010/main" val="3853850552"/>
       </p:ext>
     </p:extLst>
   </p:cSld>
@@ -9997,103 +9776,19 @@
           <a:chExt cx="0" cy="0"/>
         </a:xfrm>
       </p:grpSpPr>
-      <p:sp>
-        <p:nvSpPr>
-          <p:cNvPr id="2" name="標題 1">
+      <p:pic>
+        <p:nvPicPr>
+          <p:cNvPr id="15" name="圖片 14">
             <a:extLst>
               <a:ext uri="{FF2B5EF4-FFF2-40B4-BE49-F238E27FC236}">
-                <a16:creationId xmlns:a16="http://schemas.microsoft.com/office/drawing/2014/main" id="{2DE3768E-4ECB-4AFC-9D38-D8D0C87616D5}"/>
-              </a:ext>
-            </a:extLst>
-          </p:cNvPr>
-          <p:cNvSpPr>
-            <a:spLocks noGrp="1"/>
-          </p:cNvSpPr>
-          <p:nvPr>
-            <p:ph type="title"/>
-          </p:nvPr>
-        </p:nvSpPr>
-        <p:spPr/>
-        <p:txBody>
-          <a:bodyPr/>
-          <a:lstStyle/>
-          <a:p>
-            <a:pPr algn="l"/>
-            <a:r>
-              <a:rPr lang="zh-TW" altLang="en-US" dirty="0">
-                <a:latin typeface="標楷體" panose="03000509000000000000" pitchFamily="65" charset="-120"/>
-                <a:ea typeface="標楷體" panose="03000509000000000000" pitchFamily="65" charset="-120"/>
-              </a:rPr>
-              <a:t>功能一實作</a:t>
-            </a:r>
-            <a:r>
-              <a:rPr lang="en-US" altLang="zh-TW" dirty="0">
-                <a:latin typeface="標楷體" panose="03000509000000000000" pitchFamily="65" charset="-120"/>
-                <a:ea typeface="標楷體" panose="03000509000000000000" pitchFamily="65" charset="-120"/>
-              </a:rPr>
-              <a:t>(</a:t>
-            </a:r>
-            <a:r>
-              <a:rPr lang="en-US" altLang="zh-TW" dirty="0">
-                <a:latin typeface="Times New Roman" panose="02020603050405020304" pitchFamily="18" charset="0"/>
-                <a:ea typeface="標楷體" panose="03000509000000000000" pitchFamily="65" charset="-120"/>
-                <a:cs typeface="Times New Roman" panose="02020603050405020304" pitchFamily="18" charset="0"/>
-              </a:rPr>
-              <a:t>2021</a:t>
-            </a:r>
-            <a:r>
-              <a:rPr lang="zh-TW" altLang="en-US" dirty="0">
-                <a:latin typeface="Times New Roman" panose="02020603050405020304" pitchFamily="18" charset="0"/>
-                <a:ea typeface="標楷體" panose="03000509000000000000" pitchFamily="65" charset="-120"/>
-                <a:cs typeface="Times New Roman" panose="02020603050405020304" pitchFamily="18" charset="0"/>
-              </a:rPr>
-              <a:t>的</a:t>
-            </a:r>
-            <a:r>
-              <a:rPr lang="en-US" altLang="zh-TW" dirty="0">
-                <a:latin typeface="Times New Roman" panose="02020603050405020304" pitchFamily="18" charset="0"/>
-                <a:ea typeface="標楷體" panose="03000509000000000000" pitchFamily="65" charset="-120"/>
-                <a:cs typeface="Times New Roman" panose="02020603050405020304" pitchFamily="18" charset="0"/>
-              </a:rPr>
-              <a:t>664</a:t>
-            </a:r>
-            <a:r>
-              <a:rPr lang="zh-TW" altLang="en-US" dirty="0">
-                <a:latin typeface="Times New Roman" panose="02020603050405020304" pitchFamily="18" charset="0"/>
-                <a:ea typeface="標楷體" panose="03000509000000000000" pitchFamily="65" charset="-120"/>
-                <a:cs typeface="Times New Roman" panose="02020603050405020304" pitchFamily="18" charset="0"/>
-              </a:rPr>
-              <a:t>篇</a:t>
-            </a:r>
-            <a:r>
-              <a:rPr lang="en-US" altLang="zh-TW" dirty="0">
-                <a:latin typeface="標楷體" panose="03000509000000000000" pitchFamily="65" charset="-120"/>
-                <a:ea typeface="標楷體" panose="03000509000000000000" pitchFamily="65" charset="-120"/>
-              </a:rPr>
-              <a:t>)</a:t>
-            </a:r>
-            <a:endParaRPr lang="zh-TW" altLang="en-US" dirty="0">
-              <a:latin typeface="標楷體" panose="03000509000000000000" pitchFamily="65" charset="-120"/>
-              <a:ea typeface="標楷體" panose="03000509000000000000" pitchFamily="65" charset="-120"/>
-            </a:endParaRPr>
-          </a:p>
-        </p:txBody>
-      </p:sp>
-      <p:pic>
-        <p:nvPicPr>
-          <p:cNvPr id="5" name="內容版面配置區 4">
-            <a:extLst>
-              <a:ext uri="{FF2B5EF4-FFF2-40B4-BE49-F238E27FC236}">
-                <a16:creationId xmlns:a16="http://schemas.microsoft.com/office/drawing/2014/main" id="{ED85F20C-7387-4B26-81DF-A6966C86666A}"/>
+                <a16:creationId xmlns:a16="http://schemas.microsoft.com/office/drawing/2014/main" id="{BEA20E96-0592-473D-8474-49AB112CD6C3}"/>
               </a:ext>
             </a:extLst>
           </p:cNvPr>
           <p:cNvPicPr>
-            <a:picLocks noGrp="1" noChangeAspect="1"/>
+            <a:picLocks noChangeAspect="1"/>
           </p:cNvPicPr>
-          <p:nvPr>
-            <p:ph idx="1"/>
-          </p:nvPr>
+          <p:nvPr/>
         </p:nvPicPr>
         <p:blipFill>
           <a:blip r:embed="rId2"/>
@@ -10103,15 +9798,59 @@
         </p:blipFill>
         <p:spPr>
           <a:xfrm>
-            <a:off x="2364224" y="2406462"/>
-            <a:ext cx="7463552" cy="3834947"/>
+            <a:off x="1109361" y="624015"/>
+            <a:ext cx="9973278" cy="5609970"/>
+          </a:xfrm>
+          <a:prstGeom prst="rect">
+            <a:avLst/>
+          </a:prstGeom>
+        </p:spPr>
+      </p:pic>
+      <p:sp>
+        <p:nvSpPr>
+          <p:cNvPr id="2" name="標題 1">
+            <a:extLst>
+              <a:ext uri="{FF2B5EF4-FFF2-40B4-BE49-F238E27FC236}">
+                <a16:creationId xmlns:a16="http://schemas.microsoft.com/office/drawing/2014/main" id="{2DE3768E-4ECB-4AFC-9D38-D8D0C87616D5}"/>
+              </a:ext>
+            </a:extLst>
+          </p:cNvPr>
+          <p:cNvSpPr>
+            <a:spLocks noGrp="1"/>
+          </p:cNvSpPr>
+          <p:nvPr>
+            <p:ph type="title" idx="4294967295"/>
+          </p:nvPr>
+        </p:nvSpPr>
+        <p:spPr>
+          <a:xfrm>
+            <a:off x="7565465" y="833508"/>
+            <a:ext cx="3517174" cy="1303337"/>
           </a:xfrm>
         </p:spPr>
-      </p:pic>
+        <p:txBody>
+          <a:bodyPr>
+            <a:normAutofit/>
+          </a:bodyPr>
+          <a:lstStyle/>
+          <a:p>
+            <a:r>
+              <a:rPr lang="zh-TW" altLang="en-US" dirty="0">
+                <a:solidFill>
+                  <a:schemeClr val="bg1"/>
+                </a:solidFill>
+                <a:latin typeface="標楷體" panose="03000509000000000000" pitchFamily="65" charset="-120"/>
+                <a:ea typeface="標楷體" panose="03000509000000000000" pitchFamily="65" charset="-120"/>
+              </a:rPr>
+              <a:t>功能二實作</a:t>
+            </a:r>
+          </a:p>
+        </p:txBody>
+      </p:sp>
     </p:spTree>
     <p:extLst>
       <p:ext uri="{BB962C8B-B14F-4D97-AF65-F5344CB8AC3E}">
-        <p14:creationId xmlns:p14="http://schemas.microsoft.com/office/powerpoint/2010/main" val="991228725"/>
+        <p14:creationId xmlns:p14="http://schemas.microsoft.com/office/powerpoint/2010/main" val="1109634566"/>
       </p:ext>
     </p:extLst>
   </p:cSld>
@@ -10123,6 +9862,662 @@
 
 <file path=ppt/slides/slide19.xml><?xml version="1.0" encoding="utf-8"?>
 <p:sld xmlns:a="http://schemas.openxmlformats.org/drawingml/2006/main" xmlns:r="http://schemas.openxmlformats.org/officeDocument/2006/relationships" xmlns:p="http://schemas.openxmlformats.org/presentationml/2006/main">
+  <p:cSld>
+    <p:spTree>
+      <p:nvGrpSpPr>
+        <p:cNvPr id="1" name=""/>
+        <p:cNvGrpSpPr/>
+        <p:nvPr/>
+      </p:nvGrpSpPr>
+      <p:grpSpPr>
+        <a:xfrm>
+          <a:off x="0" y="0"/>
+          <a:ext cx="0" cy="0"/>
+          <a:chOff x="0" y="0"/>
+          <a:chExt cx="0" cy="0"/>
+        </a:xfrm>
+      </p:grpSpPr>
+      <p:pic>
+        <p:nvPicPr>
+          <p:cNvPr id="17" name="圖片 16">
+            <a:extLst>
+              <a:ext uri="{FF2B5EF4-FFF2-40B4-BE49-F238E27FC236}">
+                <a16:creationId xmlns:a16="http://schemas.microsoft.com/office/drawing/2014/main" id="{EE8EB888-6E57-4BC0-8A3C-3FE621B32051}"/>
+              </a:ext>
+            </a:extLst>
+          </p:cNvPr>
+          <p:cNvPicPr>
+            <a:picLocks noChangeAspect="1"/>
+          </p:cNvPicPr>
+          <p:nvPr/>
+        </p:nvPicPr>
+        <p:blipFill>
+          <a:blip r:embed="rId2"/>
+          <a:stretch>
+            <a:fillRect/>
+          </a:stretch>
+        </p:blipFill>
+        <p:spPr>
+          <a:xfrm>
+            <a:off x="1083734" y="609600"/>
+            <a:ext cx="10024532" cy="5638799"/>
+          </a:xfrm>
+          <a:prstGeom prst="rect">
+            <a:avLst/>
+          </a:prstGeom>
+        </p:spPr>
+      </p:pic>
+      <p:sp>
+        <p:nvSpPr>
+          <p:cNvPr id="3" name="標題 1">
+            <a:extLst>
+              <a:ext uri="{FF2B5EF4-FFF2-40B4-BE49-F238E27FC236}">
+                <a16:creationId xmlns:a16="http://schemas.microsoft.com/office/drawing/2014/main" id="{66BC41E8-1F67-4DE5-B18F-58B876F05D86}"/>
+              </a:ext>
+            </a:extLst>
+          </p:cNvPr>
+          <p:cNvSpPr txBox="1">
+            <a:spLocks/>
+          </p:cNvSpPr>
+          <p:nvPr/>
+        </p:nvSpPr>
+        <p:spPr>
+          <a:xfrm>
+            <a:off x="7591092" y="4945062"/>
+            <a:ext cx="3517174" cy="1303337"/>
+          </a:xfrm>
+          <a:prstGeom prst="rect">
+            <a:avLst/>
+          </a:prstGeom>
+          <a:effectLst/>
+        </p:spPr>
+        <p:txBody>
+          <a:bodyPr vert="horz" lIns="91440" tIns="45720" rIns="91440" bIns="45720" rtlCol="0" anchor="ctr">
+            <a:normAutofit/>
+          </a:bodyPr>
+          <a:lstStyle>
+            <a:lvl1pPr algn="ctr" defTabSz="457200" rtl="0" eaLnBrk="1" latinLnBrk="0" hangingPunct="1">
+              <a:spcBef>
+                <a:spcPct val="0"/>
+              </a:spcBef>
+              <a:buNone/>
+              <a:defRPr sz="4400" kern="1200" cap="none">
+                <a:ln w="3175" cmpd="sng">
+                  <a:noFill/>
+                </a:ln>
+                <a:solidFill>
+                  <a:schemeClr val="tx1">
+                    <a:lumMod val="85000"/>
+                    <a:lumOff val="15000"/>
+                  </a:schemeClr>
+                </a:solidFill>
+                <a:effectLst/>
+                <a:latin typeface="+mj-lt"/>
+                <a:ea typeface="+mj-ea"/>
+                <a:cs typeface="+mj-cs"/>
+              </a:defRPr>
+            </a:lvl1pPr>
+            <a:lvl2pPr eaLnBrk="1" hangingPunct="1">
+              <a:defRPr>
+                <a:solidFill>
+                  <a:schemeClr val="tx2"/>
+                </a:solidFill>
+              </a:defRPr>
+            </a:lvl2pPr>
+            <a:lvl3pPr eaLnBrk="1" hangingPunct="1">
+              <a:defRPr>
+                <a:solidFill>
+                  <a:schemeClr val="tx2"/>
+                </a:solidFill>
+              </a:defRPr>
+            </a:lvl3pPr>
+            <a:lvl4pPr eaLnBrk="1" hangingPunct="1">
+              <a:defRPr>
+                <a:solidFill>
+                  <a:schemeClr val="tx2"/>
+                </a:solidFill>
+              </a:defRPr>
+            </a:lvl4pPr>
+            <a:lvl5pPr eaLnBrk="1" hangingPunct="1">
+              <a:defRPr>
+                <a:solidFill>
+                  <a:schemeClr val="tx2"/>
+                </a:solidFill>
+              </a:defRPr>
+            </a:lvl5pPr>
+            <a:lvl6pPr eaLnBrk="1" hangingPunct="1">
+              <a:defRPr>
+                <a:solidFill>
+                  <a:schemeClr val="tx2"/>
+                </a:solidFill>
+              </a:defRPr>
+            </a:lvl6pPr>
+            <a:lvl7pPr eaLnBrk="1" hangingPunct="1">
+              <a:defRPr>
+                <a:solidFill>
+                  <a:schemeClr val="tx2"/>
+                </a:solidFill>
+              </a:defRPr>
+            </a:lvl7pPr>
+            <a:lvl8pPr eaLnBrk="1" hangingPunct="1">
+              <a:defRPr>
+                <a:solidFill>
+                  <a:schemeClr val="tx2"/>
+                </a:solidFill>
+              </a:defRPr>
+            </a:lvl8pPr>
+            <a:lvl9pPr eaLnBrk="1" hangingPunct="1">
+              <a:defRPr>
+                <a:solidFill>
+                  <a:schemeClr val="tx2"/>
+                </a:solidFill>
+              </a:defRPr>
+            </a:lvl9pPr>
+          </a:lstStyle>
+          <a:p>
+            <a:r>
+              <a:rPr lang="zh-TW" altLang="en-US" dirty="0">
+                <a:solidFill>
+                  <a:schemeClr val="bg1"/>
+                </a:solidFill>
+                <a:latin typeface="標楷體" panose="03000509000000000000" pitchFamily="65" charset="-120"/>
+                <a:ea typeface="標楷體" panose="03000509000000000000" pitchFamily="65" charset="-120"/>
+              </a:rPr>
+              <a:t>功能二實作</a:t>
+            </a:r>
+          </a:p>
+        </p:txBody>
+      </p:sp>
+    </p:spTree>
+    <p:extLst>
+      <p:ext uri="{BB962C8B-B14F-4D97-AF65-F5344CB8AC3E}">
+        <p14:creationId xmlns:p14="http://schemas.microsoft.com/office/powerpoint/2010/main" val="3507384144"/>
+      </p:ext>
+    </p:extLst>
+  </p:cSld>
+  <p:clrMapOvr>
+    <a:masterClrMapping/>
+  </p:clrMapOvr>
+</p:sld>
+</file>
+
+<file path=ppt/slides/slide2.xml><?xml version="1.0" encoding="utf-8"?>
+<p:sld xmlns:a="http://schemas.openxmlformats.org/drawingml/2006/main" xmlns:r="http://schemas.openxmlformats.org/officeDocument/2006/relationships" xmlns:p="http://schemas.openxmlformats.org/presentationml/2006/main">
+  <p:cSld>
+    <p:spTree>
+      <p:nvGrpSpPr>
+        <p:cNvPr id="1" name=""/>
+        <p:cNvGrpSpPr/>
+        <p:nvPr/>
+      </p:nvGrpSpPr>
+      <p:grpSpPr>
+        <a:xfrm>
+          <a:off x="0" y="0"/>
+          <a:ext cx="0" cy="0"/>
+          <a:chOff x="0" y="0"/>
+          <a:chExt cx="0" cy="0"/>
+        </a:xfrm>
+      </p:grpSpPr>
+      <p:sp>
+        <p:nvSpPr>
+          <p:cNvPr id="4" name="標題 3">
+            <a:extLst>
+              <a:ext uri="{FF2B5EF4-FFF2-40B4-BE49-F238E27FC236}">
+                <a16:creationId xmlns:a16="http://schemas.microsoft.com/office/drawing/2014/main" id="{F1D5CE53-83F5-4BBA-BB3E-ABF11BF3B6B0}"/>
+              </a:ext>
+            </a:extLst>
+          </p:cNvPr>
+          <p:cNvSpPr>
+            <a:spLocks noGrp="1"/>
+          </p:cNvSpPr>
+          <p:nvPr>
+            <p:ph type="title"/>
+          </p:nvPr>
+        </p:nvSpPr>
+        <p:spPr/>
+        <p:txBody>
+          <a:bodyPr/>
+          <a:lstStyle/>
+          <a:p>
+            <a:r>
+              <a:rPr lang="zh-TW" altLang="en-US" dirty="0">
+                <a:latin typeface="標楷體" panose="03000509000000000000" pitchFamily="65" charset="-120"/>
+                <a:ea typeface="標楷體" panose="03000509000000000000" pitchFamily="65" charset="-120"/>
+              </a:rPr>
+              <a:t>對事實查核中心網站進行爬蟲</a:t>
+            </a:r>
+          </a:p>
+        </p:txBody>
+      </p:sp>
+      <p:sp>
+        <p:nvSpPr>
+          <p:cNvPr id="5" name="文字版面配置區 4">
+            <a:extLst>
+              <a:ext uri="{FF2B5EF4-FFF2-40B4-BE49-F238E27FC236}">
+                <a16:creationId xmlns:a16="http://schemas.microsoft.com/office/drawing/2014/main" id="{9F5CBA14-3D57-4898-86A7-E9F06D90C241}"/>
+              </a:ext>
+            </a:extLst>
+          </p:cNvPr>
+          <p:cNvSpPr>
+            <a:spLocks noGrp="1"/>
+          </p:cNvSpPr>
+          <p:nvPr>
+            <p:ph type="body" idx="1"/>
+          </p:nvPr>
+        </p:nvSpPr>
+        <p:spPr/>
+        <p:txBody>
+          <a:bodyPr/>
+          <a:lstStyle/>
+          <a:p>
+            <a:br>
+              <a:rPr lang="en-US" altLang="zh-TW" dirty="0">
+                <a:latin typeface="標楷體" panose="03000509000000000000" pitchFamily="65" charset="-120"/>
+                <a:ea typeface="標楷體" panose="03000509000000000000" pitchFamily="65" charset="-120"/>
+              </a:rPr>
+            </a:br>
+            <a:r>
+              <a:rPr lang="en-US" altLang="zh-TW" dirty="0">
+                <a:latin typeface="Times New Roman" panose="02020603050405020304" pitchFamily="18" charset="0"/>
+                <a:ea typeface="標楷體" panose="03000509000000000000" pitchFamily="65" charset="-120"/>
+                <a:cs typeface="Times New Roman" panose="02020603050405020304" pitchFamily="18" charset="0"/>
+              </a:rPr>
+              <a:t>4126</a:t>
+            </a:r>
+            <a:r>
+              <a:rPr lang="zh-TW" altLang="en-US" dirty="0">
+                <a:latin typeface="標楷體" panose="03000509000000000000" pitchFamily="65" charset="-120"/>
+                <a:ea typeface="標楷體" panose="03000509000000000000" pitchFamily="65" charset="-120"/>
+              </a:rPr>
+              <a:t>篇文章直到</a:t>
+            </a:r>
+            <a:r>
+              <a:rPr lang="en-US" altLang="zh-TW" dirty="0">
+                <a:latin typeface="Times New Roman" panose="02020603050405020304" pitchFamily="18" charset="0"/>
+                <a:ea typeface="標楷體" panose="03000509000000000000" pitchFamily="65" charset="-120"/>
+                <a:cs typeface="Times New Roman" panose="02020603050405020304" pitchFamily="18" charset="0"/>
+              </a:rPr>
+              <a:t>5/7</a:t>
+            </a:r>
+            <a:endParaRPr lang="zh-TW" altLang="en-US" dirty="0">
+              <a:latin typeface="標楷體" panose="03000509000000000000" pitchFamily="65" charset="-120"/>
+              <a:ea typeface="標楷體" panose="03000509000000000000" pitchFamily="65" charset="-120"/>
+            </a:endParaRPr>
+          </a:p>
+        </p:txBody>
+      </p:sp>
+    </p:spTree>
+    <p:extLst>
+      <p:ext uri="{BB962C8B-B14F-4D97-AF65-F5344CB8AC3E}">
+        <p14:creationId xmlns:p14="http://schemas.microsoft.com/office/powerpoint/2010/main" val="645880314"/>
+      </p:ext>
+    </p:extLst>
+  </p:cSld>
+  <p:clrMapOvr>
+    <a:masterClrMapping/>
+  </p:clrMapOvr>
+</p:sld>
+</file>
+
+<file path=ppt/slides/slide20.xml><?xml version="1.0" encoding="utf-8"?>
+<p:sld xmlns:a="http://schemas.openxmlformats.org/drawingml/2006/main" xmlns:r="http://schemas.openxmlformats.org/officeDocument/2006/relationships" xmlns:p="http://schemas.openxmlformats.org/presentationml/2006/main">
+  <p:cSld>
+    <p:spTree>
+      <p:nvGrpSpPr>
+        <p:cNvPr id="1" name=""/>
+        <p:cNvGrpSpPr/>
+        <p:nvPr/>
+      </p:nvGrpSpPr>
+      <p:grpSpPr>
+        <a:xfrm>
+          <a:off x="0" y="0"/>
+          <a:ext cx="0" cy="0"/>
+          <a:chOff x="0" y="0"/>
+          <a:chExt cx="0" cy="0"/>
+        </a:xfrm>
+      </p:grpSpPr>
+      <p:pic>
+        <p:nvPicPr>
+          <p:cNvPr id="17" name="圖片 16">
+            <a:extLst>
+              <a:ext uri="{FF2B5EF4-FFF2-40B4-BE49-F238E27FC236}">
+                <a16:creationId xmlns:a16="http://schemas.microsoft.com/office/drawing/2014/main" id="{AFDBDB3C-1067-4F36-A2A2-06B99E3D735F}"/>
+              </a:ext>
+            </a:extLst>
+          </p:cNvPr>
+          <p:cNvPicPr>
+            <a:picLocks noChangeAspect="1"/>
+          </p:cNvPicPr>
+          <p:nvPr/>
+        </p:nvPicPr>
+        <p:blipFill>
+          <a:blip r:embed="rId2"/>
+          <a:stretch>
+            <a:fillRect/>
+          </a:stretch>
+        </p:blipFill>
+        <p:spPr>
+          <a:xfrm>
+            <a:off x="1048074" y="589542"/>
+            <a:ext cx="10095851" cy="5678916"/>
+          </a:xfrm>
+          <a:prstGeom prst="rect">
+            <a:avLst/>
+          </a:prstGeom>
+        </p:spPr>
+      </p:pic>
+      <p:sp>
+        <p:nvSpPr>
+          <p:cNvPr id="2" name="標題 1">
+            <a:extLst>
+              <a:ext uri="{FF2B5EF4-FFF2-40B4-BE49-F238E27FC236}">
+                <a16:creationId xmlns:a16="http://schemas.microsoft.com/office/drawing/2014/main" id="{2DE3768E-4ECB-4AFC-9D38-D8D0C87616D5}"/>
+              </a:ext>
+            </a:extLst>
+          </p:cNvPr>
+          <p:cNvSpPr>
+            <a:spLocks noGrp="1"/>
+          </p:cNvSpPr>
+          <p:nvPr>
+            <p:ph type="title" idx="4294967295"/>
+          </p:nvPr>
+        </p:nvSpPr>
+        <p:spPr>
+          <a:xfrm>
+            <a:off x="7758268" y="801498"/>
+            <a:ext cx="3385657" cy="1136359"/>
+          </a:xfrm>
+        </p:spPr>
+        <p:txBody>
+          <a:bodyPr>
+            <a:normAutofit/>
+          </a:bodyPr>
+          <a:lstStyle/>
+          <a:p>
+            <a:pPr algn="l"/>
+            <a:r>
+              <a:rPr lang="zh-TW" altLang="en-US" dirty="0">
+                <a:solidFill>
+                  <a:schemeClr val="bg1"/>
+                </a:solidFill>
+                <a:latin typeface="標楷體" panose="03000509000000000000" pitchFamily="65" charset="-120"/>
+                <a:ea typeface="標楷體" panose="03000509000000000000" pitchFamily="65" charset="-120"/>
+              </a:rPr>
+              <a:t>停用詞</a:t>
+            </a:r>
+            <a:r>
+              <a:rPr lang="en-US" altLang="zh-TW" dirty="0">
+                <a:solidFill>
+                  <a:schemeClr val="bg1"/>
+                </a:solidFill>
+                <a:latin typeface="Times New Roman" panose="02020603050405020304" pitchFamily="18" charset="0"/>
+                <a:ea typeface="標楷體" panose="03000509000000000000" pitchFamily="65" charset="-120"/>
+                <a:cs typeface="Times New Roman" panose="02020603050405020304" pitchFamily="18" charset="0"/>
+              </a:rPr>
+              <a:t>(N/2)</a:t>
+            </a:r>
+            <a:endParaRPr lang="zh-TW" altLang="en-US" dirty="0">
+              <a:solidFill>
+                <a:schemeClr val="bg1"/>
+              </a:solidFill>
+              <a:latin typeface="Times New Roman" panose="02020603050405020304" pitchFamily="18" charset="0"/>
+              <a:ea typeface="標楷體" panose="03000509000000000000" pitchFamily="65" charset="-120"/>
+              <a:cs typeface="Times New Roman" panose="02020603050405020304" pitchFamily="18" charset="0"/>
+            </a:endParaRPr>
+          </a:p>
+        </p:txBody>
+      </p:sp>
+    </p:spTree>
+    <p:extLst>
+      <p:ext uri="{BB962C8B-B14F-4D97-AF65-F5344CB8AC3E}">
+        <p14:creationId xmlns:p14="http://schemas.microsoft.com/office/powerpoint/2010/main" val="4128522942"/>
+      </p:ext>
+    </p:extLst>
+  </p:cSld>
+  <p:clrMapOvr>
+    <a:masterClrMapping/>
+  </p:clrMapOvr>
+</p:sld>
+</file>
+
+<file path=ppt/slides/slide21.xml><?xml version="1.0" encoding="utf-8"?>
+<p:sld xmlns:a="http://schemas.openxmlformats.org/drawingml/2006/main" xmlns:r="http://schemas.openxmlformats.org/officeDocument/2006/relationships" xmlns:p="http://schemas.openxmlformats.org/presentationml/2006/main">
+  <p:cSld>
+    <p:spTree>
+      <p:nvGrpSpPr>
+        <p:cNvPr id="1" name=""/>
+        <p:cNvGrpSpPr/>
+        <p:nvPr/>
+      </p:nvGrpSpPr>
+      <p:grpSpPr>
+        <a:xfrm>
+          <a:off x="0" y="0"/>
+          <a:ext cx="0" cy="0"/>
+          <a:chOff x="0" y="0"/>
+          <a:chExt cx="0" cy="0"/>
+        </a:xfrm>
+      </p:grpSpPr>
+      <p:pic>
+        <p:nvPicPr>
+          <p:cNvPr id="4" name="圖片 3">
+            <a:extLst>
+              <a:ext uri="{FF2B5EF4-FFF2-40B4-BE49-F238E27FC236}">
+                <a16:creationId xmlns:a16="http://schemas.microsoft.com/office/drawing/2014/main" id="{929A3D59-4370-4DEC-B11D-92BABA4E2CB3}"/>
+              </a:ext>
+            </a:extLst>
+          </p:cNvPr>
+          <p:cNvPicPr>
+            <a:picLocks noChangeAspect="1"/>
+          </p:cNvPicPr>
+          <p:nvPr/>
+        </p:nvPicPr>
+        <p:blipFill>
+          <a:blip r:embed="rId2"/>
+          <a:stretch>
+            <a:fillRect/>
+          </a:stretch>
+        </p:blipFill>
+        <p:spPr>
+          <a:xfrm>
+            <a:off x="1048074" y="589542"/>
+            <a:ext cx="10095851" cy="5678916"/>
+          </a:xfrm>
+          <a:prstGeom prst="rect">
+            <a:avLst/>
+          </a:prstGeom>
+        </p:spPr>
+      </p:pic>
+      <p:sp>
+        <p:nvSpPr>
+          <p:cNvPr id="2" name="標題 1">
+            <a:extLst>
+              <a:ext uri="{FF2B5EF4-FFF2-40B4-BE49-F238E27FC236}">
+                <a16:creationId xmlns:a16="http://schemas.microsoft.com/office/drawing/2014/main" id="{2DE3768E-4ECB-4AFC-9D38-D8D0C87616D5}"/>
+              </a:ext>
+            </a:extLst>
+          </p:cNvPr>
+          <p:cNvSpPr>
+            <a:spLocks noGrp="1"/>
+          </p:cNvSpPr>
+          <p:nvPr>
+            <p:ph type="title" idx="4294967295"/>
+          </p:nvPr>
+        </p:nvSpPr>
+        <p:spPr>
+          <a:xfrm>
+            <a:off x="7758268" y="801498"/>
+            <a:ext cx="3385657" cy="1136359"/>
+          </a:xfrm>
+        </p:spPr>
+        <p:txBody>
+          <a:bodyPr>
+            <a:normAutofit/>
+          </a:bodyPr>
+          <a:lstStyle/>
+          <a:p>
+            <a:pPr algn="l"/>
+            <a:r>
+              <a:rPr lang="zh-TW" altLang="en-US" dirty="0">
+                <a:solidFill>
+                  <a:schemeClr val="bg1"/>
+                </a:solidFill>
+                <a:latin typeface="標楷體" panose="03000509000000000000" pitchFamily="65" charset="-120"/>
+                <a:ea typeface="標楷體" panose="03000509000000000000" pitchFamily="65" charset="-120"/>
+              </a:rPr>
+              <a:t>停用詞</a:t>
+            </a:r>
+            <a:r>
+              <a:rPr lang="en-US" altLang="zh-TW" dirty="0">
+                <a:solidFill>
+                  <a:schemeClr val="bg1"/>
+                </a:solidFill>
+                <a:latin typeface="Times New Roman" panose="02020603050405020304" pitchFamily="18" charset="0"/>
+                <a:ea typeface="標楷體" panose="03000509000000000000" pitchFamily="65" charset="-120"/>
+                <a:cs typeface="Times New Roman" panose="02020603050405020304" pitchFamily="18" charset="0"/>
+              </a:rPr>
+              <a:t>(N/3)</a:t>
+            </a:r>
+            <a:endParaRPr lang="zh-TW" altLang="en-US" dirty="0">
+              <a:solidFill>
+                <a:schemeClr val="bg1"/>
+              </a:solidFill>
+              <a:latin typeface="Times New Roman" panose="02020603050405020304" pitchFamily="18" charset="0"/>
+              <a:ea typeface="標楷體" panose="03000509000000000000" pitchFamily="65" charset="-120"/>
+              <a:cs typeface="Times New Roman" panose="02020603050405020304" pitchFamily="18" charset="0"/>
+            </a:endParaRPr>
+          </a:p>
+        </p:txBody>
+      </p:sp>
+    </p:spTree>
+    <p:extLst>
+      <p:ext uri="{BB962C8B-B14F-4D97-AF65-F5344CB8AC3E}">
+        <p14:creationId xmlns:p14="http://schemas.microsoft.com/office/powerpoint/2010/main" val="2132219431"/>
+      </p:ext>
+    </p:extLst>
+  </p:cSld>
+  <p:clrMapOvr>
+    <a:masterClrMapping/>
+  </p:clrMapOvr>
+</p:sld>
+</file>
+
+<file path=ppt/slides/slide22.xml><?xml version="1.0" encoding="utf-8"?>
+<p:sld xmlns:a="http://schemas.openxmlformats.org/drawingml/2006/main" xmlns:r="http://schemas.openxmlformats.org/officeDocument/2006/relationships" xmlns:p="http://schemas.openxmlformats.org/presentationml/2006/main">
+  <p:cSld>
+    <p:spTree>
+      <p:nvGrpSpPr>
+        <p:cNvPr id="1" name=""/>
+        <p:cNvGrpSpPr/>
+        <p:nvPr/>
+      </p:nvGrpSpPr>
+      <p:grpSpPr>
+        <a:xfrm>
+          <a:off x="0" y="0"/>
+          <a:ext cx="0" cy="0"/>
+          <a:chOff x="0" y="0"/>
+          <a:chExt cx="0" cy="0"/>
+        </a:xfrm>
+      </p:grpSpPr>
+      <p:sp>
+        <p:nvSpPr>
+          <p:cNvPr id="2" name="標題 1">
+            <a:extLst>
+              <a:ext uri="{FF2B5EF4-FFF2-40B4-BE49-F238E27FC236}">
+                <a16:creationId xmlns:a16="http://schemas.microsoft.com/office/drawing/2014/main" id="{FD584AA1-206F-4D0E-B712-E4BF12872D0E}"/>
+              </a:ext>
+            </a:extLst>
+          </p:cNvPr>
+          <p:cNvSpPr>
+            <a:spLocks noGrp="1"/>
+          </p:cNvSpPr>
+          <p:nvPr>
+            <p:ph type="title"/>
+          </p:nvPr>
+        </p:nvSpPr>
+        <p:spPr/>
+        <p:txBody>
+          <a:bodyPr/>
+          <a:lstStyle/>
+          <a:p>
+            <a:r>
+              <a:rPr lang="zh-TW" altLang="en-US" dirty="0">
+                <a:latin typeface="標楷體" panose="03000509000000000000" pitchFamily="65" charset="-120"/>
+                <a:ea typeface="標楷體" panose="03000509000000000000" pitchFamily="65" charset="-120"/>
+              </a:rPr>
+              <a:t>相關連結</a:t>
+            </a:r>
+          </a:p>
+        </p:txBody>
+      </p:sp>
+      <p:sp>
+        <p:nvSpPr>
+          <p:cNvPr id="3" name="內容版面配置區 2">
+            <a:extLst>
+              <a:ext uri="{FF2B5EF4-FFF2-40B4-BE49-F238E27FC236}">
+                <a16:creationId xmlns:a16="http://schemas.microsoft.com/office/drawing/2014/main" id="{AA876783-6B37-4DAD-A196-F3B9DAA3E685}"/>
+              </a:ext>
+            </a:extLst>
+          </p:cNvPr>
+          <p:cNvSpPr>
+            <a:spLocks noGrp="1"/>
+          </p:cNvSpPr>
+          <p:nvPr>
+            <p:ph idx="1"/>
+          </p:nvPr>
+        </p:nvSpPr>
+        <p:spPr/>
+        <p:txBody>
+          <a:bodyPr/>
+          <a:lstStyle/>
+          <a:p>
+            <a:r>
+              <a:rPr lang="zh-TW" altLang="en-US" dirty="0">
+                <a:latin typeface="標楷體" panose="03000509000000000000" pitchFamily="65" charset="-120"/>
+                <a:ea typeface="標楷體" panose="03000509000000000000" pitchFamily="65" charset="-120"/>
+                <a:cs typeface="Times New Roman" panose="02020603050405020304" pitchFamily="18" charset="0"/>
+                <a:hlinkClick r:id="rId2"/>
+              </a:rPr>
+              <a:t>資訊檢索系統期末專案</a:t>
+            </a:r>
+            <a:endParaRPr lang="en-US" altLang="zh-TW" dirty="0">
+              <a:latin typeface="標楷體" panose="03000509000000000000" pitchFamily="65" charset="-120"/>
+              <a:ea typeface="標楷體" panose="03000509000000000000" pitchFamily="65" charset="-120"/>
+              <a:cs typeface="Times New Roman" panose="02020603050405020304" pitchFamily="18" charset="0"/>
+            </a:endParaRPr>
+          </a:p>
+          <a:p>
+            <a:r>
+              <a:rPr lang="zh-TW" altLang="en-US" dirty="0">
+                <a:latin typeface="標楷體" panose="03000509000000000000" pitchFamily="65" charset="-120"/>
+                <a:ea typeface="標楷體" panose="03000509000000000000" pitchFamily="65" charset="-120"/>
+                <a:cs typeface="Times New Roman" panose="02020603050405020304" pitchFamily="18" charset="0"/>
+                <a:hlinkClick r:id="rId3"/>
+              </a:rPr>
+              <a:t>台灣事實查核中心</a:t>
+            </a:r>
+            <a:endParaRPr lang="zh-TW" altLang="en-US" dirty="0">
+              <a:latin typeface="標楷體" panose="03000509000000000000" pitchFamily="65" charset="-120"/>
+              <a:ea typeface="標楷體" panose="03000509000000000000" pitchFamily="65" charset="-120"/>
+              <a:cs typeface="Times New Roman" panose="02020603050405020304" pitchFamily="18" charset="0"/>
+            </a:endParaRPr>
+          </a:p>
+        </p:txBody>
+      </p:sp>
+    </p:spTree>
+    <p:extLst>
+      <p:ext uri="{BB962C8B-B14F-4D97-AF65-F5344CB8AC3E}">
+        <p14:creationId xmlns:p14="http://schemas.microsoft.com/office/powerpoint/2010/main" val="1128931381"/>
+      </p:ext>
+    </p:extLst>
+  </p:cSld>
+  <p:clrMapOvr>
+    <a:masterClrMapping/>
+  </p:clrMapOvr>
+</p:sld>
+</file>
+
+<file path=ppt/slides/slide23.xml><?xml version="1.0" encoding="utf-8"?>
+<p:sld xmlns:a="http://schemas.openxmlformats.org/drawingml/2006/main" xmlns:r="http://schemas.openxmlformats.org/officeDocument/2006/relationships" xmlns:p="http://schemas.openxmlformats.org/presentationml/2006/main" show="0">
   <p:cSld>
     <p:spTree>
       <p:nvGrpSpPr>
@@ -10219,126 +10614,8 @@
 </p:sld>
 </file>
 
-<file path=ppt/slides/slide2.xml><?xml version="1.0" encoding="utf-8"?>
-<p:sld xmlns:a="http://schemas.openxmlformats.org/drawingml/2006/main" xmlns:r="http://schemas.openxmlformats.org/officeDocument/2006/relationships" xmlns:p="http://schemas.openxmlformats.org/presentationml/2006/main">
-  <p:cSld>
-    <p:spTree>
-      <p:nvGrpSpPr>
-        <p:cNvPr id="1" name=""/>
-        <p:cNvGrpSpPr/>
-        <p:nvPr/>
-      </p:nvGrpSpPr>
-      <p:grpSpPr>
-        <a:xfrm>
-          <a:off x="0" y="0"/>
-          <a:ext cx="0" cy="0"/>
-          <a:chOff x="0" y="0"/>
-          <a:chExt cx="0" cy="0"/>
-        </a:xfrm>
-      </p:grpSpPr>
-      <p:sp>
-        <p:nvSpPr>
-          <p:cNvPr id="4" name="標題 3">
-            <a:extLst>
-              <a:ext uri="{FF2B5EF4-FFF2-40B4-BE49-F238E27FC236}">
-                <a16:creationId xmlns:a16="http://schemas.microsoft.com/office/drawing/2014/main" id="{F1D5CE53-83F5-4BBA-BB3E-ABF11BF3B6B0}"/>
-              </a:ext>
-            </a:extLst>
-          </p:cNvPr>
-          <p:cNvSpPr>
-            <a:spLocks noGrp="1"/>
-          </p:cNvSpPr>
-          <p:nvPr>
-            <p:ph type="title"/>
-          </p:nvPr>
-        </p:nvSpPr>
-        <p:spPr/>
-        <p:txBody>
-          <a:bodyPr/>
-          <a:lstStyle/>
-          <a:p>
-            <a:r>
-              <a:rPr lang="zh-TW" altLang="en-US" dirty="0">
-                <a:latin typeface="標楷體" panose="03000509000000000000" pitchFamily="65" charset="-120"/>
-                <a:ea typeface="標楷體" panose="03000509000000000000" pitchFamily="65" charset="-120"/>
-              </a:rPr>
-              <a:t>對事實查核中心網站進行爬蟲</a:t>
-            </a:r>
-          </a:p>
-        </p:txBody>
-      </p:sp>
-      <p:sp>
-        <p:nvSpPr>
-          <p:cNvPr id="5" name="文字版面配置區 4">
-            <a:extLst>
-              <a:ext uri="{FF2B5EF4-FFF2-40B4-BE49-F238E27FC236}">
-                <a16:creationId xmlns:a16="http://schemas.microsoft.com/office/drawing/2014/main" id="{9F5CBA14-3D57-4898-86A7-E9F06D90C241}"/>
-              </a:ext>
-            </a:extLst>
-          </p:cNvPr>
-          <p:cNvSpPr>
-            <a:spLocks noGrp="1"/>
-          </p:cNvSpPr>
-          <p:nvPr>
-            <p:ph type="body" idx="1"/>
-          </p:nvPr>
-        </p:nvSpPr>
-        <p:spPr/>
-        <p:txBody>
-          <a:bodyPr/>
-          <a:lstStyle/>
-          <a:p>
-            <a:br>
-              <a:rPr lang="en-US" altLang="zh-TW" dirty="0">
-                <a:latin typeface="標楷體" panose="03000509000000000000" pitchFamily="65" charset="-120"/>
-                <a:ea typeface="標楷體" panose="03000509000000000000" pitchFamily="65" charset="-120"/>
-              </a:rPr>
-            </a:br>
-            <a:r>
-              <a:rPr lang="en-US" altLang="zh-TW" dirty="0">
-                <a:latin typeface="Times New Roman" panose="02020603050405020304" pitchFamily="18" charset="0"/>
-                <a:ea typeface="標楷體" panose="03000509000000000000" pitchFamily="65" charset="-120"/>
-                <a:cs typeface="Times New Roman" panose="02020603050405020304" pitchFamily="18" charset="0"/>
-              </a:rPr>
-              <a:t>4140</a:t>
-            </a:r>
-            <a:r>
-              <a:rPr lang="zh-TW" altLang="en-US" dirty="0">
-                <a:latin typeface="標楷體" panose="03000509000000000000" pitchFamily="65" charset="-120"/>
-                <a:ea typeface="標楷體" panose="03000509000000000000" pitchFamily="65" charset="-120"/>
-              </a:rPr>
-              <a:t>篇文章直到</a:t>
-            </a:r>
-            <a:r>
-              <a:rPr lang="en-US" altLang="zh-TW" dirty="0">
-                <a:latin typeface="Times New Roman" panose="02020603050405020304" pitchFamily="18" charset="0"/>
-                <a:ea typeface="標楷體" panose="03000509000000000000" pitchFamily="65" charset="-120"/>
-                <a:cs typeface="Times New Roman" panose="02020603050405020304" pitchFamily="18" charset="0"/>
-              </a:rPr>
-              <a:t>5/7</a:t>
-            </a:r>
-            <a:endParaRPr lang="zh-TW" altLang="en-US" dirty="0">
-              <a:latin typeface="標楷體" panose="03000509000000000000" pitchFamily="65" charset="-120"/>
-              <a:ea typeface="標楷體" panose="03000509000000000000" pitchFamily="65" charset="-120"/>
-            </a:endParaRPr>
-          </a:p>
-        </p:txBody>
-      </p:sp>
-    </p:spTree>
-    <p:extLst>
-      <p:ext uri="{BB962C8B-B14F-4D97-AF65-F5344CB8AC3E}">
-        <p14:creationId xmlns:p14="http://schemas.microsoft.com/office/powerpoint/2010/main" val="645880314"/>
-      </p:ext>
-    </p:extLst>
-  </p:cSld>
-  <p:clrMapOvr>
-    <a:masterClrMapping/>
-  </p:clrMapOvr>
-</p:sld>
-</file>
-
-<file path=ppt/slides/slide20.xml><?xml version="1.0" encoding="utf-8"?>
-<p:sld xmlns:a="http://schemas.openxmlformats.org/drawingml/2006/main" xmlns:r="http://schemas.openxmlformats.org/officeDocument/2006/relationships" xmlns:p="http://schemas.openxmlformats.org/presentationml/2006/main">
+<file path=ppt/slides/slide24.xml><?xml version="1.0" encoding="utf-8"?>
+<p:sld xmlns:a="http://schemas.openxmlformats.org/drawingml/2006/main" xmlns:r="http://schemas.openxmlformats.org/officeDocument/2006/relationships" xmlns:p="http://schemas.openxmlformats.org/presentationml/2006/main" show="0">
   <p:cSld>
     <p:spTree>
       <p:nvGrpSpPr>
@@ -10776,7 +11053,7 @@
                 <a:latin typeface="標楷體" panose="03000509000000000000" pitchFamily="65" charset="-120"/>
                 <a:ea typeface="標楷體" panose="03000509000000000000" pitchFamily="65" charset="-120"/>
               </a:rPr>
-              <a:t>利用時間線整理關鍵字趨勢</a:t>
+              <a:t>利用時間整理關鍵字趨勢</a:t>
             </a:r>
             <a:endParaRPr lang="en-US" altLang="zh-TW" dirty="0">
               <a:latin typeface="標楷體" panose="03000509000000000000" pitchFamily="65" charset="-120"/>

--- a/資訊檢索系統期末專案.pptx
+++ b/資訊檢索系統期末專案.pptx
@@ -21,14 +21,21 @@
     <p:sldId id="284" r:id="rId15"/>
     <p:sldId id="285" r:id="rId16"/>
     <p:sldId id="286" r:id="rId17"/>
-    <p:sldId id="271" r:id="rId18"/>
-    <p:sldId id="281" r:id="rId19"/>
-    <p:sldId id="282" r:id="rId20"/>
-    <p:sldId id="287" r:id="rId21"/>
-    <p:sldId id="288" r:id="rId22"/>
-    <p:sldId id="258" r:id="rId23"/>
-    <p:sldId id="278" r:id="rId24"/>
-    <p:sldId id="280" r:id="rId25"/>
+    <p:sldId id="290" r:id="rId18"/>
+    <p:sldId id="291" r:id="rId19"/>
+    <p:sldId id="292" r:id="rId20"/>
+    <p:sldId id="271" r:id="rId21"/>
+    <p:sldId id="293" r:id="rId22"/>
+    <p:sldId id="294" r:id="rId23"/>
+    <p:sldId id="296" r:id="rId24"/>
+    <p:sldId id="295" r:id="rId25"/>
+    <p:sldId id="281" r:id="rId26"/>
+    <p:sldId id="282" r:id="rId27"/>
+    <p:sldId id="287" r:id="rId28"/>
+    <p:sldId id="288" r:id="rId29"/>
+    <p:sldId id="258" r:id="rId30"/>
+    <p:sldId id="278" r:id="rId31"/>
+    <p:sldId id="280" r:id="rId32"/>
   </p:sldIdLst>
   <p:sldSz cx="12192000" cy="6858000"/>
   <p:notesSz cx="6858000" cy="9144000"/>
@@ -3351,7 +3358,7 @@
             <a:fld id="{B61BEF0D-F0BB-DE4B-95CE-6DB70DBA9567}" type="datetimeFigureOut">
               <a:rPr lang="en-US" dirty="0"/>
               <a:pPr/>
-              <a:t>5/14/2026</a:t>
+              <a:t>5/21/2026</a:t>
             </a:fld>
             <a:endParaRPr lang="en-US" dirty="0"/>
           </a:p>
@@ -3672,7 +3679,7 @@
             <a:fld id="{B61BEF0D-F0BB-DE4B-95CE-6DB70DBA9567}" type="datetimeFigureOut">
               <a:rPr lang="en-US" dirty="0"/>
               <a:pPr/>
-              <a:t>5/14/2026</a:t>
+              <a:t>5/21/2026</a:t>
             </a:fld>
             <a:endParaRPr lang="en-US" dirty="0"/>
           </a:p>
@@ -3917,7 +3924,7 @@
             <a:fld id="{B61BEF0D-F0BB-DE4B-95CE-6DB70DBA9567}" type="datetimeFigureOut">
               <a:rPr lang="en-US" dirty="0"/>
               <a:pPr/>
-              <a:t>5/14/2026</a:t>
+              <a:t>5/21/2026</a:t>
             </a:fld>
             <a:endParaRPr lang="en-US" dirty="0"/>
           </a:p>
@@ -4253,7 +4260,7 @@
             <a:fld id="{B61BEF0D-F0BB-DE4B-95CE-6DB70DBA9567}" type="datetimeFigureOut">
               <a:rPr lang="en-US" dirty="0"/>
               <a:pPr/>
-              <a:t>5/14/2026</a:t>
+              <a:t>5/21/2026</a:t>
             </a:fld>
             <a:endParaRPr lang="en-US" dirty="0"/>
           </a:p>
@@ -4597,7 +4604,7 @@
             <a:fld id="{B61BEF0D-F0BB-DE4B-95CE-6DB70DBA9567}" type="datetimeFigureOut">
               <a:rPr lang="en-US" dirty="0"/>
               <a:pPr/>
-              <a:t>5/14/2026</a:t>
+              <a:t>5/21/2026</a:t>
             </a:fld>
             <a:endParaRPr lang="en-US" dirty="0"/>
           </a:p>
@@ -4968,7 +4975,7 @@
             <a:fld id="{B61BEF0D-F0BB-DE4B-95CE-6DB70DBA9567}" type="datetimeFigureOut">
               <a:rPr lang="en-US" dirty="0"/>
               <a:pPr/>
-              <a:t>5/14/2026</a:t>
+              <a:t>5/21/2026</a:t>
             </a:fld>
             <a:endParaRPr lang="en-US" dirty="0"/>
           </a:p>
@@ -5435,7 +5442,7 @@
             <a:fld id="{B61BEF0D-F0BB-DE4B-95CE-6DB70DBA9567}" type="datetimeFigureOut">
               <a:rPr lang="en-US" dirty="0"/>
               <a:pPr/>
-              <a:t>5/14/2026</a:t>
+              <a:t>5/21/2026</a:t>
             </a:fld>
             <a:endParaRPr lang="en-US" dirty="0"/>
           </a:p>
@@ -5637,7 +5644,7 @@
             <a:fld id="{B61BEF0D-F0BB-DE4B-95CE-6DB70DBA9567}" type="datetimeFigureOut">
               <a:rPr lang="en-US" dirty="0"/>
               <a:pPr/>
-              <a:t>5/14/2026</a:t>
+              <a:t>5/21/2026</a:t>
             </a:fld>
             <a:endParaRPr lang="en-US" dirty="0"/>
           </a:p>
@@ -5845,7 +5852,7 @@
             <a:fld id="{B61BEF0D-F0BB-DE4B-95CE-6DB70DBA9567}" type="datetimeFigureOut">
               <a:rPr lang="en-US" dirty="0"/>
               <a:pPr/>
-              <a:t>5/14/2026</a:t>
+              <a:t>5/21/2026</a:t>
             </a:fld>
             <a:endParaRPr lang="en-US" dirty="0"/>
           </a:p>
@@ -6073,7 +6080,7 @@
           <a:p>
             <a:fld id="{52647F38-B617-4D2F-AE0A-013F0C4D2C57}" type="datetimeFigureOut">
               <a:rPr lang="en-US" dirty="0"/>
-              <a:t>5/14/2026</a:t>
+              <a:t>5/21/2026</a:t>
             </a:fld>
             <a:endParaRPr lang="en-US" dirty="0"/>
           </a:p>
@@ -6317,7 +6324,7 @@
             <a:fld id="{B61BEF0D-F0BB-DE4B-95CE-6DB70DBA9567}" type="datetimeFigureOut">
               <a:rPr lang="en-US" dirty="0"/>
               <a:pPr/>
-              <a:t>5/14/2026</a:t>
+              <a:t>5/21/2026</a:t>
             </a:fld>
             <a:endParaRPr lang="en-US" dirty="0"/>
           </a:p>
@@ -6611,7 +6618,7 @@
           <a:p>
             <a:fld id="{05BFA754-D5C3-4E66-96A6-867B257F58DC}" type="datetimeFigureOut">
               <a:rPr lang="en-US" dirty="0"/>
-              <a:t>5/14/2026</a:t>
+              <a:t>5/21/2026</a:t>
             </a:fld>
             <a:endParaRPr lang="en-US" dirty="0"/>
           </a:p>
@@ -7001,7 +7008,7 @@
             <a:fld id="{B61BEF0D-F0BB-DE4B-95CE-6DB70DBA9567}" type="datetimeFigureOut">
               <a:rPr lang="en-US" dirty="0"/>
               <a:pPr/>
-              <a:t>5/14/2026</a:t>
+              <a:t>5/21/2026</a:t>
             </a:fld>
             <a:endParaRPr lang="en-US" dirty="0"/>
           </a:p>
@@ -7147,7 +7154,7 @@
             <a:fld id="{B61BEF0D-F0BB-DE4B-95CE-6DB70DBA9567}" type="datetimeFigureOut">
               <a:rPr lang="en-US" dirty="0"/>
               <a:pPr/>
-              <a:t>5/14/2026</a:t>
+              <a:t>5/21/2026</a:t>
             </a:fld>
             <a:endParaRPr lang="en-US" dirty="0"/>
           </a:p>
@@ -7270,7 +7277,7 @@
             <a:fld id="{B61BEF0D-F0BB-DE4B-95CE-6DB70DBA9567}" type="datetimeFigureOut">
               <a:rPr lang="en-US" dirty="0"/>
               <a:pPr/>
-              <a:t>5/14/2026</a:t>
+              <a:t>5/21/2026</a:t>
             </a:fld>
             <a:endParaRPr lang="en-US" dirty="0"/>
           </a:p>
@@ -7522,7 +7529,7 @@
             <a:fld id="{B61BEF0D-F0BB-DE4B-95CE-6DB70DBA9567}" type="datetimeFigureOut">
               <a:rPr lang="en-US" dirty="0"/>
               <a:pPr/>
-              <a:t>5/14/2026</a:t>
+              <a:t>5/21/2026</a:t>
             </a:fld>
             <a:endParaRPr lang="en-US" dirty="0"/>
           </a:p>
@@ -7834,7 +7841,7 @@
             <a:fld id="{B61BEF0D-F0BB-DE4B-95CE-6DB70DBA9567}" type="datetimeFigureOut">
               <a:rPr lang="en-US" dirty="0"/>
               <a:pPr/>
-              <a:t>5/14/2026</a:t>
+              <a:t>5/21/2026</a:t>
             </a:fld>
             <a:endParaRPr lang="en-US" dirty="0"/>
           </a:p>
@@ -8182,7 +8189,7 @@
             <a:fld id="{B61BEF0D-F0BB-DE4B-95CE-6DB70DBA9567}" type="datetimeFigureOut">
               <a:rPr lang="en-US" dirty="0"/>
               <a:pPr/>
-              <a:t>5/14/2026</a:t>
+              <a:t>5/21/2026</a:t>
             </a:fld>
             <a:endParaRPr lang="en-US" dirty="0"/>
           </a:p>
@@ -9050,7 +9057,7 @@
 </file>
 
 <file path=ppt/slides/slide11.xml><?xml version="1.0" encoding="utf-8"?>
-<p:sld xmlns:a="http://schemas.openxmlformats.org/drawingml/2006/main" xmlns:r="http://schemas.openxmlformats.org/officeDocument/2006/relationships" xmlns:p="http://schemas.openxmlformats.org/presentationml/2006/main">
+<p:sld xmlns:a="http://schemas.openxmlformats.org/drawingml/2006/main" xmlns:r="http://schemas.openxmlformats.org/officeDocument/2006/relationships" xmlns:p="http://schemas.openxmlformats.org/presentationml/2006/main" show="0">
   <p:cSld>
     <p:spTree>
       <p:nvGrpSpPr>
@@ -9150,7 +9157,7 @@
 </file>
 
 <file path=ppt/slides/slide12.xml><?xml version="1.0" encoding="utf-8"?>
-<p:sld xmlns:a="http://schemas.openxmlformats.org/drawingml/2006/main" xmlns:r="http://schemas.openxmlformats.org/officeDocument/2006/relationships" xmlns:p="http://schemas.openxmlformats.org/presentationml/2006/main">
+<p:sld xmlns:a="http://schemas.openxmlformats.org/drawingml/2006/main" xmlns:r="http://schemas.openxmlformats.org/officeDocument/2006/relationships" xmlns:p="http://schemas.openxmlformats.org/presentationml/2006/main" show="0">
   <p:cSld>
     <p:spTree>
       <p:nvGrpSpPr>
@@ -9250,7 +9257,7 @@
 </file>
 
 <file path=ppt/slides/slide13.xml><?xml version="1.0" encoding="utf-8"?>
-<p:sld xmlns:a="http://schemas.openxmlformats.org/drawingml/2006/main" xmlns:r="http://schemas.openxmlformats.org/officeDocument/2006/relationships" xmlns:p="http://schemas.openxmlformats.org/presentationml/2006/main">
+<p:sld xmlns:a="http://schemas.openxmlformats.org/drawingml/2006/main" xmlns:r="http://schemas.openxmlformats.org/officeDocument/2006/relationships" xmlns:p="http://schemas.openxmlformats.org/presentationml/2006/main" show="0">
   <p:cSld>
     <p:spTree>
       <p:nvGrpSpPr>
@@ -9350,7 +9357,7 @@
 </file>
 
 <file path=ppt/slides/slide14.xml><?xml version="1.0" encoding="utf-8"?>
-<p:sld xmlns:a="http://schemas.openxmlformats.org/drawingml/2006/main" xmlns:r="http://schemas.openxmlformats.org/officeDocument/2006/relationships" xmlns:p="http://schemas.openxmlformats.org/presentationml/2006/main">
+<p:sld xmlns:a="http://schemas.openxmlformats.org/drawingml/2006/main" xmlns:r="http://schemas.openxmlformats.org/officeDocument/2006/relationships" xmlns:p="http://schemas.openxmlformats.org/presentationml/2006/main" show="0">
   <p:cSld>
     <p:spTree>
       <p:nvGrpSpPr>
@@ -9450,7 +9457,7 @@
 </file>
 
 <file path=ppt/slides/slide15.xml><?xml version="1.0" encoding="utf-8"?>
-<p:sld xmlns:a="http://schemas.openxmlformats.org/drawingml/2006/main" xmlns:r="http://schemas.openxmlformats.org/officeDocument/2006/relationships" xmlns:p="http://schemas.openxmlformats.org/presentationml/2006/main">
+<p:sld xmlns:a="http://schemas.openxmlformats.org/drawingml/2006/main" xmlns:r="http://schemas.openxmlformats.org/officeDocument/2006/relationships" xmlns:p="http://schemas.openxmlformats.org/presentationml/2006/main" show="0">
   <p:cSld>
     <p:spTree>
       <p:nvGrpSpPr>
@@ -9550,7 +9557,7 @@
 </file>
 
 <file path=ppt/slides/slide16.xml><?xml version="1.0" encoding="utf-8"?>
-<p:sld xmlns:a="http://schemas.openxmlformats.org/drawingml/2006/main" xmlns:r="http://schemas.openxmlformats.org/officeDocument/2006/relationships" xmlns:p="http://schemas.openxmlformats.org/presentationml/2006/main">
+<p:sld xmlns:a="http://schemas.openxmlformats.org/drawingml/2006/main" xmlns:r="http://schemas.openxmlformats.org/officeDocument/2006/relationships" xmlns:p="http://schemas.openxmlformats.org/presentationml/2006/main" show="0">
   <p:cSld>
     <p:spTree>
       <p:nvGrpSpPr>
@@ -9666,6 +9673,304 @@
           <a:chExt cx="0" cy="0"/>
         </a:xfrm>
       </p:grpSpPr>
+      <p:pic>
+        <p:nvPicPr>
+          <p:cNvPr id="13" name="圖片 12">
+            <a:extLst>
+              <a:ext uri="{FF2B5EF4-FFF2-40B4-BE49-F238E27FC236}">
+                <a16:creationId xmlns:a16="http://schemas.microsoft.com/office/drawing/2014/main" id="{C55E60CD-B865-48DA-BE74-6ECA4AE727F0}"/>
+              </a:ext>
+            </a:extLst>
+          </p:cNvPr>
+          <p:cNvPicPr>
+            <a:picLocks noChangeAspect="1"/>
+          </p:cNvPicPr>
+          <p:nvPr/>
+        </p:nvPicPr>
+        <p:blipFill>
+          <a:blip r:embed="rId2"/>
+          <a:stretch>
+            <a:fillRect/>
+          </a:stretch>
+        </p:blipFill>
+        <p:spPr>
+          <a:xfrm>
+            <a:off x="0" y="381000"/>
+            <a:ext cx="12192000" cy="6096000"/>
+          </a:xfrm>
+          <a:prstGeom prst="rect">
+            <a:avLst/>
+          </a:prstGeom>
+        </p:spPr>
+      </p:pic>
+    </p:spTree>
+    <p:extLst>
+      <p:ext uri="{BB962C8B-B14F-4D97-AF65-F5344CB8AC3E}">
+        <p14:creationId xmlns:p14="http://schemas.microsoft.com/office/powerpoint/2010/main" val="1309527261"/>
+      </p:ext>
+    </p:extLst>
+  </p:cSld>
+  <p:clrMapOvr>
+    <a:masterClrMapping/>
+  </p:clrMapOvr>
+</p:sld>
+</file>
+
+<file path=ppt/slides/slide18.xml><?xml version="1.0" encoding="utf-8"?>
+<p:sld xmlns:a="http://schemas.openxmlformats.org/drawingml/2006/main" xmlns:r="http://schemas.openxmlformats.org/officeDocument/2006/relationships" xmlns:p="http://schemas.openxmlformats.org/presentationml/2006/main">
+  <p:cSld>
+    <p:spTree>
+      <p:nvGrpSpPr>
+        <p:cNvPr id="1" name=""/>
+        <p:cNvGrpSpPr/>
+        <p:nvPr/>
+      </p:nvGrpSpPr>
+      <p:grpSpPr>
+        <a:xfrm>
+          <a:off x="0" y="0"/>
+          <a:ext cx="0" cy="0"/>
+          <a:chOff x="0" y="0"/>
+          <a:chExt cx="0" cy="0"/>
+        </a:xfrm>
+      </p:grpSpPr>
+      <p:pic>
+        <p:nvPicPr>
+          <p:cNvPr id="5" name="圖片 4">
+            <a:extLst>
+              <a:ext uri="{FF2B5EF4-FFF2-40B4-BE49-F238E27FC236}">
+                <a16:creationId xmlns:a16="http://schemas.microsoft.com/office/drawing/2014/main" id="{D51CEC0C-F02A-4718-9D79-42771F8B5681}"/>
+              </a:ext>
+            </a:extLst>
+          </p:cNvPr>
+          <p:cNvPicPr>
+            <a:picLocks noChangeAspect="1"/>
+          </p:cNvPicPr>
+          <p:nvPr/>
+        </p:nvPicPr>
+        <p:blipFill>
+          <a:blip r:embed="rId2"/>
+          <a:stretch>
+            <a:fillRect/>
+          </a:stretch>
+        </p:blipFill>
+        <p:spPr>
+          <a:xfrm>
+            <a:off x="0" y="381000"/>
+            <a:ext cx="12192000" cy="6096000"/>
+          </a:xfrm>
+          <a:prstGeom prst="rect">
+            <a:avLst/>
+          </a:prstGeom>
+        </p:spPr>
+      </p:pic>
+    </p:spTree>
+    <p:extLst>
+      <p:ext uri="{BB962C8B-B14F-4D97-AF65-F5344CB8AC3E}">
+        <p14:creationId xmlns:p14="http://schemas.microsoft.com/office/powerpoint/2010/main" val="3260499772"/>
+      </p:ext>
+    </p:extLst>
+  </p:cSld>
+  <p:clrMapOvr>
+    <a:masterClrMapping/>
+  </p:clrMapOvr>
+</p:sld>
+</file>
+
+<file path=ppt/slides/slide19.xml><?xml version="1.0" encoding="utf-8"?>
+<p:sld xmlns:a="http://schemas.openxmlformats.org/drawingml/2006/main" xmlns:r="http://schemas.openxmlformats.org/officeDocument/2006/relationships" xmlns:p="http://schemas.openxmlformats.org/presentationml/2006/main">
+  <p:cSld>
+    <p:spTree>
+      <p:nvGrpSpPr>
+        <p:cNvPr id="1" name=""/>
+        <p:cNvGrpSpPr/>
+        <p:nvPr/>
+      </p:nvGrpSpPr>
+      <p:grpSpPr>
+        <a:xfrm>
+          <a:off x="0" y="0"/>
+          <a:ext cx="0" cy="0"/>
+          <a:chOff x="0" y="0"/>
+          <a:chExt cx="0" cy="0"/>
+        </a:xfrm>
+      </p:grpSpPr>
+      <p:pic>
+        <p:nvPicPr>
+          <p:cNvPr id="5" name="圖片 4">
+            <a:extLst>
+              <a:ext uri="{FF2B5EF4-FFF2-40B4-BE49-F238E27FC236}">
+                <a16:creationId xmlns:a16="http://schemas.microsoft.com/office/drawing/2014/main" id="{89C79972-1F8A-4562-97EC-E9C97F2B7A27}"/>
+              </a:ext>
+            </a:extLst>
+          </p:cNvPr>
+          <p:cNvPicPr>
+            <a:picLocks noChangeAspect="1"/>
+          </p:cNvPicPr>
+          <p:nvPr/>
+        </p:nvPicPr>
+        <p:blipFill>
+          <a:blip r:embed="rId2"/>
+          <a:stretch>
+            <a:fillRect/>
+          </a:stretch>
+        </p:blipFill>
+        <p:spPr>
+          <a:xfrm>
+            <a:off x="0" y="381000"/>
+            <a:ext cx="12192000" cy="6096000"/>
+          </a:xfrm>
+          <a:prstGeom prst="rect">
+            <a:avLst/>
+          </a:prstGeom>
+        </p:spPr>
+      </p:pic>
+    </p:spTree>
+    <p:extLst>
+      <p:ext uri="{BB962C8B-B14F-4D97-AF65-F5344CB8AC3E}">
+        <p14:creationId xmlns:p14="http://schemas.microsoft.com/office/powerpoint/2010/main" val="2426069399"/>
+      </p:ext>
+    </p:extLst>
+  </p:cSld>
+  <p:clrMapOvr>
+    <a:masterClrMapping/>
+  </p:clrMapOvr>
+</p:sld>
+</file>
+
+<file path=ppt/slides/slide2.xml><?xml version="1.0" encoding="utf-8"?>
+<p:sld xmlns:a="http://schemas.openxmlformats.org/drawingml/2006/main" xmlns:r="http://schemas.openxmlformats.org/officeDocument/2006/relationships" xmlns:p="http://schemas.openxmlformats.org/presentationml/2006/main" show="0">
+  <p:cSld>
+    <p:spTree>
+      <p:nvGrpSpPr>
+        <p:cNvPr id="1" name=""/>
+        <p:cNvGrpSpPr/>
+        <p:nvPr/>
+      </p:nvGrpSpPr>
+      <p:grpSpPr>
+        <a:xfrm>
+          <a:off x="0" y="0"/>
+          <a:ext cx="0" cy="0"/>
+          <a:chOff x="0" y="0"/>
+          <a:chExt cx="0" cy="0"/>
+        </a:xfrm>
+      </p:grpSpPr>
+      <p:sp>
+        <p:nvSpPr>
+          <p:cNvPr id="4" name="標題 3">
+            <a:extLst>
+              <a:ext uri="{FF2B5EF4-FFF2-40B4-BE49-F238E27FC236}">
+                <a16:creationId xmlns:a16="http://schemas.microsoft.com/office/drawing/2014/main" id="{F1D5CE53-83F5-4BBA-BB3E-ABF11BF3B6B0}"/>
+              </a:ext>
+            </a:extLst>
+          </p:cNvPr>
+          <p:cNvSpPr>
+            <a:spLocks noGrp="1"/>
+          </p:cNvSpPr>
+          <p:nvPr>
+            <p:ph type="title"/>
+          </p:nvPr>
+        </p:nvSpPr>
+        <p:spPr/>
+        <p:txBody>
+          <a:bodyPr/>
+          <a:lstStyle/>
+          <a:p>
+            <a:r>
+              <a:rPr lang="zh-TW" altLang="en-US" dirty="0">
+                <a:latin typeface="標楷體" panose="03000509000000000000" pitchFamily="65" charset="-120"/>
+                <a:ea typeface="標楷體" panose="03000509000000000000" pitchFamily="65" charset="-120"/>
+              </a:rPr>
+              <a:t>對事實查核中心網站進行爬蟲</a:t>
+            </a:r>
+          </a:p>
+        </p:txBody>
+      </p:sp>
+      <p:sp>
+        <p:nvSpPr>
+          <p:cNvPr id="5" name="文字版面配置區 4">
+            <a:extLst>
+              <a:ext uri="{FF2B5EF4-FFF2-40B4-BE49-F238E27FC236}">
+                <a16:creationId xmlns:a16="http://schemas.microsoft.com/office/drawing/2014/main" id="{9F5CBA14-3D57-4898-86A7-E9F06D90C241}"/>
+              </a:ext>
+            </a:extLst>
+          </p:cNvPr>
+          <p:cNvSpPr>
+            <a:spLocks noGrp="1"/>
+          </p:cNvSpPr>
+          <p:nvPr>
+            <p:ph type="body" idx="1"/>
+          </p:nvPr>
+        </p:nvSpPr>
+        <p:spPr/>
+        <p:txBody>
+          <a:bodyPr/>
+          <a:lstStyle/>
+          <a:p>
+            <a:br>
+              <a:rPr lang="en-US" altLang="zh-TW" dirty="0">
+                <a:latin typeface="標楷體" panose="03000509000000000000" pitchFamily="65" charset="-120"/>
+                <a:ea typeface="標楷體" panose="03000509000000000000" pitchFamily="65" charset="-120"/>
+              </a:rPr>
+            </a:br>
+            <a:r>
+              <a:rPr lang="en-US" altLang="zh-TW" dirty="0">
+                <a:latin typeface="Times New Roman" panose="02020603050405020304" pitchFamily="18" charset="0"/>
+                <a:ea typeface="標楷體" panose="03000509000000000000" pitchFamily="65" charset="-120"/>
+                <a:cs typeface="Times New Roman" panose="02020603050405020304" pitchFamily="18" charset="0"/>
+              </a:rPr>
+              <a:t>4126</a:t>
+            </a:r>
+            <a:r>
+              <a:rPr lang="zh-TW" altLang="en-US" dirty="0">
+                <a:latin typeface="標楷體" panose="03000509000000000000" pitchFamily="65" charset="-120"/>
+                <a:ea typeface="標楷體" panose="03000509000000000000" pitchFamily="65" charset="-120"/>
+              </a:rPr>
+              <a:t>篇文章直到</a:t>
+            </a:r>
+            <a:r>
+              <a:rPr lang="en-US" altLang="zh-TW" dirty="0">
+                <a:latin typeface="Times New Roman" panose="02020603050405020304" pitchFamily="18" charset="0"/>
+                <a:ea typeface="標楷體" panose="03000509000000000000" pitchFamily="65" charset="-120"/>
+                <a:cs typeface="Times New Roman" panose="02020603050405020304" pitchFamily="18" charset="0"/>
+              </a:rPr>
+              <a:t>5/7</a:t>
+            </a:r>
+            <a:endParaRPr lang="zh-TW" altLang="en-US" dirty="0">
+              <a:latin typeface="標楷體" panose="03000509000000000000" pitchFamily="65" charset="-120"/>
+              <a:ea typeface="標楷體" panose="03000509000000000000" pitchFamily="65" charset="-120"/>
+            </a:endParaRPr>
+          </a:p>
+        </p:txBody>
+      </p:sp>
+    </p:spTree>
+    <p:extLst>
+      <p:ext uri="{BB962C8B-B14F-4D97-AF65-F5344CB8AC3E}">
+        <p14:creationId xmlns:p14="http://schemas.microsoft.com/office/powerpoint/2010/main" val="645880314"/>
+      </p:ext>
+    </p:extLst>
+  </p:cSld>
+  <p:clrMapOvr>
+    <a:masterClrMapping/>
+  </p:clrMapOvr>
+</p:sld>
+</file>
+
+<file path=ppt/slides/slide20.xml><?xml version="1.0" encoding="utf-8"?>
+<p:sld xmlns:a="http://schemas.openxmlformats.org/drawingml/2006/main" xmlns:r="http://schemas.openxmlformats.org/officeDocument/2006/relationships" xmlns:p="http://schemas.openxmlformats.org/presentationml/2006/main">
+  <p:cSld>
+    <p:spTree>
+      <p:nvGrpSpPr>
+        <p:cNvPr id="1" name=""/>
+        <p:cNvGrpSpPr/>
+        <p:nvPr/>
+      </p:nvGrpSpPr>
+      <p:grpSpPr>
+        <a:xfrm>
+          <a:off x="0" y="0"/>
+          <a:ext cx="0" cy="0"/>
+          <a:chOff x="0" y="0"/>
+          <a:chExt cx="0" cy="0"/>
+        </a:xfrm>
+      </p:grpSpPr>
       <p:sp>
         <p:nvSpPr>
           <p:cNvPr id="2" name="標題 1">
@@ -9723,8 +10028,9 @@
           <a:p>
             <a:r>
               <a:rPr lang="zh-TW" altLang="en-US" dirty="0">
-                <a:latin typeface="標楷體" panose="03000509000000000000" pitchFamily="65" charset="-120"/>
+                <a:latin typeface="Times New Roman" panose="02020603050405020304" pitchFamily="18" charset="0"/>
                 <a:ea typeface="標楷體" panose="03000509000000000000" pitchFamily="65" charset="-120"/>
+                <a:cs typeface="Times New Roman" panose="02020603050405020304" pitchFamily="18" charset="0"/>
               </a:rPr>
               <a:t>利用</a:t>
             </a:r>
@@ -9738,10 +10044,59 @@
             </a:r>
             <a:r>
               <a:rPr lang="zh-TW" altLang="en-US" dirty="0">
-                <a:latin typeface="標楷體" panose="03000509000000000000" pitchFamily="65" charset="-120"/>
+                <a:latin typeface="Times New Roman" panose="02020603050405020304" pitchFamily="18" charset="0"/>
                 <a:ea typeface="標楷體" panose="03000509000000000000" pitchFamily="65" charset="-120"/>
+                <a:cs typeface="Times New Roman" panose="02020603050405020304" pitchFamily="18" charset="0"/>
               </a:rPr>
               <a:t>相似度推薦給使用者前三名相關的文章</a:t>
+            </a:r>
+            <a:endParaRPr lang="en-US" altLang="zh-TW" dirty="0">
+              <a:latin typeface="Times New Roman" panose="02020603050405020304" pitchFamily="18" charset="0"/>
+              <a:ea typeface="標楷體" panose="03000509000000000000" pitchFamily="65" charset="-120"/>
+              <a:cs typeface="Times New Roman" panose="02020603050405020304" pitchFamily="18" charset="0"/>
+            </a:endParaRPr>
+          </a:p>
+          <a:p>
+            <a:pPr lvl="1"/>
+            <a:r>
+              <a:rPr lang="en-US" altLang="zh-TW" dirty="0">
+                <a:latin typeface="Times New Roman" panose="02020603050405020304" pitchFamily="18" charset="0"/>
+                <a:ea typeface="標楷體" panose="03000509000000000000" pitchFamily="65" charset="-120"/>
+                <a:cs typeface="Times New Roman" panose="02020603050405020304" pitchFamily="18" charset="0"/>
+              </a:rPr>
+              <a:t>TF-IDF</a:t>
+            </a:r>
+            <a:r>
+              <a:rPr lang="zh-TW" altLang="en-US" dirty="0">
+                <a:latin typeface="Times New Roman" panose="02020603050405020304" pitchFamily="18" charset="0"/>
+                <a:ea typeface="標楷體" panose="03000509000000000000" pitchFamily="65" charset="-120"/>
+                <a:cs typeface="Times New Roman" panose="02020603050405020304" pitchFamily="18" charset="0"/>
+              </a:rPr>
+              <a:t>、</a:t>
+            </a:r>
+            <a:r>
+              <a:rPr lang="en-US" altLang="zh-TW" dirty="0">
+                <a:latin typeface="Times New Roman" panose="02020603050405020304" pitchFamily="18" charset="0"/>
+                <a:ea typeface="標楷體" panose="03000509000000000000" pitchFamily="65" charset="-120"/>
+                <a:cs typeface="Times New Roman" panose="02020603050405020304" pitchFamily="18" charset="0"/>
+              </a:rPr>
+              <a:t>Embedding(</a:t>
+            </a:r>
+            <a:r>
+              <a:rPr lang="en-US" altLang="zh-TW" dirty="0" err="1">
+                <a:latin typeface="Times New Roman" panose="02020603050405020304" pitchFamily="18" charset="0"/>
+                <a:ea typeface="標楷體" panose="03000509000000000000" pitchFamily="65" charset="-120"/>
+                <a:cs typeface="Times New Roman" panose="02020603050405020304" pitchFamily="18" charset="0"/>
+              </a:rPr>
+              <a:t>FastText</a:t>
+            </a:r>
+            <a:r>
+              <a:rPr lang="en-US" altLang="zh-TW" dirty="0">
+                <a:latin typeface="Times New Roman" panose="02020603050405020304" pitchFamily="18" charset="0"/>
+                <a:ea typeface="標楷體" panose="03000509000000000000" pitchFamily="65" charset="-120"/>
+                <a:cs typeface="Times New Roman" panose="02020603050405020304" pitchFamily="18" charset="0"/>
+              </a:rPr>
+              <a:t>)</a:t>
             </a:r>
           </a:p>
         </p:txBody>
@@ -9759,8 +10114,428 @@
 </p:sld>
 </file>
 
-<file path=ppt/slides/slide18.xml><?xml version="1.0" encoding="utf-8"?>
+<file path=ppt/slides/slide21.xml><?xml version="1.0" encoding="utf-8"?>
 <p:sld xmlns:a="http://schemas.openxmlformats.org/drawingml/2006/main" xmlns:r="http://schemas.openxmlformats.org/officeDocument/2006/relationships" xmlns:p="http://schemas.openxmlformats.org/presentationml/2006/main">
+  <p:cSld>
+    <p:spTree>
+      <p:nvGrpSpPr>
+        <p:cNvPr id="1" name=""/>
+        <p:cNvGrpSpPr/>
+        <p:nvPr/>
+      </p:nvGrpSpPr>
+      <p:grpSpPr>
+        <a:xfrm>
+          <a:off x="0" y="0"/>
+          <a:ext cx="0" cy="0"/>
+          <a:chOff x="0" y="0"/>
+          <a:chExt cx="0" cy="0"/>
+        </a:xfrm>
+      </p:grpSpPr>
+      <p:pic>
+        <p:nvPicPr>
+          <p:cNvPr id="5" name="圖片 4">
+            <a:extLst>
+              <a:ext uri="{FF2B5EF4-FFF2-40B4-BE49-F238E27FC236}">
+                <a16:creationId xmlns:a16="http://schemas.microsoft.com/office/drawing/2014/main" id="{945CAA75-D511-46C8-8368-D73E6695DCC4}"/>
+              </a:ext>
+            </a:extLst>
+          </p:cNvPr>
+          <p:cNvPicPr>
+            <a:picLocks noChangeAspect="1"/>
+          </p:cNvPicPr>
+          <p:nvPr/>
+        </p:nvPicPr>
+        <p:blipFill>
+          <a:blip r:embed="rId2"/>
+          <a:stretch>
+            <a:fillRect/>
+          </a:stretch>
+        </p:blipFill>
+        <p:spPr>
+          <a:xfrm>
+            <a:off x="595059" y="600581"/>
+            <a:ext cx="11001882" cy="5656838"/>
+          </a:xfrm>
+          <a:prstGeom prst="rect">
+            <a:avLst/>
+          </a:prstGeom>
+        </p:spPr>
+      </p:pic>
+    </p:spTree>
+    <p:extLst>
+      <p:ext uri="{BB962C8B-B14F-4D97-AF65-F5344CB8AC3E}">
+        <p14:creationId xmlns:p14="http://schemas.microsoft.com/office/powerpoint/2010/main" val="61383727"/>
+      </p:ext>
+    </p:extLst>
+  </p:cSld>
+  <p:clrMapOvr>
+    <a:masterClrMapping/>
+  </p:clrMapOvr>
+</p:sld>
+</file>
+
+<file path=ppt/slides/slide22.xml><?xml version="1.0" encoding="utf-8"?>
+<p:sld xmlns:a="http://schemas.openxmlformats.org/drawingml/2006/main" xmlns:r="http://schemas.openxmlformats.org/officeDocument/2006/relationships" xmlns:p="http://schemas.openxmlformats.org/presentationml/2006/main">
+  <p:cSld>
+    <p:spTree>
+      <p:nvGrpSpPr>
+        <p:cNvPr id="1" name=""/>
+        <p:cNvGrpSpPr/>
+        <p:nvPr/>
+      </p:nvGrpSpPr>
+      <p:grpSpPr>
+        <a:xfrm>
+          <a:off x="0" y="0"/>
+          <a:ext cx="0" cy="0"/>
+          <a:chOff x="0" y="0"/>
+          <a:chExt cx="0" cy="0"/>
+        </a:xfrm>
+      </p:grpSpPr>
+      <p:sp>
+        <p:nvSpPr>
+          <p:cNvPr id="2" name="標題 1">
+            <a:extLst>
+              <a:ext uri="{FF2B5EF4-FFF2-40B4-BE49-F238E27FC236}">
+                <a16:creationId xmlns:a16="http://schemas.microsoft.com/office/drawing/2014/main" id="{2DE3768E-4ECB-4AFC-9D38-D8D0C87616D5}"/>
+              </a:ext>
+            </a:extLst>
+          </p:cNvPr>
+          <p:cNvSpPr>
+            <a:spLocks noGrp="1"/>
+          </p:cNvSpPr>
+          <p:nvPr>
+            <p:ph type="title"/>
+          </p:nvPr>
+        </p:nvSpPr>
+        <p:spPr/>
+        <p:txBody>
+          <a:bodyPr>
+            <a:normAutofit/>
+          </a:bodyPr>
+          <a:lstStyle/>
+          <a:p>
+            <a:pPr algn="l"/>
+            <a:r>
+              <a:rPr lang="en-US" altLang="zh-TW" dirty="0" err="1">
+                <a:latin typeface="Times New Roman" panose="02020603050405020304" pitchFamily="18" charset="0"/>
+                <a:ea typeface="標楷體" panose="03000509000000000000" pitchFamily="65" charset="-120"/>
+                <a:cs typeface="Times New Roman" panose="02020603050405020304" pitchFamily="18" charset="0"/>
+              </a:rPr>
+              <a:t>FastText</a:t>
+            </a:r>
+            <a:r>
+              <a:rPr lang="en-US" altLang="zh-TW" dirty="0">
+                <a:latin typeface="Times New Roman" panose="02020603050405020304" pitchFamily="18" charset="0"/>
+                <a:ea typeface="標楷體" panose="03000509000000000000" pitchFamily="65" charset="-120"/>
+                <a:cs typeface="Times New Roman" panose="02020603050405020304" pitchFamily="18" charset="0"/>
+              </a:rPr>
+              <a:t> vs TF-IDF</a:t>
+            </a:r>
+            <a:endParaRPr lang="zh-TW" altLang="en-US" dirty="0">
+              <a:latin typeface="Times New Roman" panose="02020603050405020304" pitchFamily="18" charset="0"/>
+              <a:ea typeface="標楷體" panose="03000509000000000000" pitchFamily="65" charset="-120"/>
+              <a:cs typeface="Times New Roman" panose="02020603050405020304" pitchFamily="18" charset="0"/>
+            </a:endParaRPr>
+          </a:p>
+        </p:txBody>
+      </p:sp>
+      <p:sp>
+        <p:nvSpPr>
+          <p:cNvPr id="3" name="內容版面配置區 2">
+            <a:extLst>
+              <a:ext uri="{FF2B5EF4-FFF2-40B4-BE49-F238E27FC236}">
+                <a16:creationId xmlns:a16="http://schemas.microsoft.com/office/drawing/2014/main" id="{140B7DEE-05AE-4C0B-879F-0C5512A4BDD8}"/>
+              </a:ext>
+            </a:extLst>
+          </p:cNvPr>
+          <p:cNvSpPr>
+            <a:spLocks noGrp="1"/>
+          </p:cNvSpPr>
+          <p:nvPr>
+            <p:ph idx="1"/>
+          </p:nvPr>
+        </p:nvSpPr>
+        <p:spPr/>
+        <p:txBody>
+          <a:bodyPr/>
+          <a:lstStyle/>
+          <a:p>
+            <a:r>
+              <a:rPr lang="zh-TW" altLang="en-US" dirty="0">
+                <a:latin typeface="Times New Roman" panose="02020603050405020304" pitchFamily="18" charset="0"/>
+                <a:ea typeface="標楷體" panose="03000509000000000000" pitchFamily="65" charset="-120"/>
+                <a:cs typeface="Times New Roman" panose="02020603050405020304" pitchFamily="18" charset="0"/>
+              </a:rPr>
+              <a:t>根據觀察結果，進行</a:t>
+            </a:r>
+            <a:r>
+              <a:rPr lang="en-US" altLang="zh-TW" dirty="0">
+                <a:latin typeface="Times New Roman" panose="02020603050405020304" pitchFamily="18" charset="0"/>
+                <a:ea typeface="標楷體" panose="03000509000000000000" pitchFamily="65" charset="-120"/>
+                <a:cs typeface="Times New Roman" panose="02020603050405020304" pitchFamily="18" charset="0"/>
+              </a:rPr>
+              <a:t>30</a:t>
+            </a:r>
+            <a:r>
+              <a:rPr lang="zh-TW" altLang="en-US" dirty="0">
+                <a:latin typeface="Times New Roman" panose="02020603050405020304" pitchFamily="18" charset="0"/>
+                <a:ea typeface="標楷體" panose="03000509000000000000" pitchFamily="65" charset="-120"/>
+                <a:cs typeface="Times New Roman" panose="02020603050405020304" pitchFamily="18" charset="0"/>
+              </a:rPr>
+              <a:t>篇查核報告搜尋推薦文章比較，</a:t>
+            </a:r>
+            <a:r>
+              <a:rPr lang="en-US" altLang="zh-TW" dirty="0">
+                <a:latin typeface="Times New Roman" panose="02020603050405020304" pitchFamily="18" charset="0"/>
+                <a:ea typeface="標楷體" panose="03000509000000000000" pitchFamily="65" charset="-120"/>
+                <a:cs typeface="Times New Roman" panose="02020603050405020304" pitchFamily="18" charset="0"/>
+              </a:rPr>
+              <a:t>TF-IDF</a:t>
+            </a:r>
+            <a:r>
+              <a:rPr lang="zh-TW" altLang="en-US" dirty="0">
+                <a:latin typeface="Times New Roman" panose="02020603050405020304" pitchFamily="18" charset="0"/>
+                <a:ea typeface="標楷體" panose="03000509000000000000" pitchFamily="65" charset="-120"/>
+                <a:cs typeface="Times New Roman" panose="02020603050405020304" pitchFamily="18" charset="0"/>
+              </a:rPr>
+              <a:t>的推薦文章主題比較相關，</a:t>
+            </a:r>
+            <a:r>
+              <a:rPr lang="en-US" altLang="zh-TW" dirty="0" err="1">
+                <a:latin typeface="Times New Roman" panose="02020603050405020304" pitchFamily="18" charset="0"/>
+                <a:ea typeface="標楷體" panose="03000509000000000000" pitchFamily="65" charset="-120"/>
+                <a:cs typeface="Times New Roman" panose="02020603050405020304" pitchFamily="18" charset="0"/>
+              </a:rPr>
+              <a:t>FastText</a:t>
+            </a:r>
+            <a:r>
+              <a:rPr lang="zh-TW" altLang="en-US" dirty="0">
+                <a:latin typeface="Times New Roman" panose="02020603050405020304" pitchFamily="18" charset="0"/>
+                <a:ea typeface="標楷體" panose="03000509000000000000" pitchFamily="65" charset="-120"/>
+                <a:cs typeface="Times New Roman" panose="02020603050405020304" pitchFamily="18" charset="0"/>
+              </a:rPr>
+              <a:t>則容易產生不相關的文章。</a:t>
+            </a:r>
+            <a:endParaRPr lang="en-US" altLang="zh-TW" dirty="0">
+              <a:latin typeface="Times New Roman" panose="02020603050405020304" pitchFamily="18" charset="0"/>
+              <a:ea typeface="標楷體" panose="03000509000000000000" pitchFamily="65" charset="-120"/>
+              <a:cs typeface="Times New Roman" panose="02020603050405020304" pitchFamily="18" charset="0"/>
+            </a:endParaRPr>
+          </a:p>
+          <a:p>
+            <a:r>
+              <a:rPr lang="zh-TW" altLang="en-US" dirty="0">
+                <a:latin typeface="Times New Roman" panose="02020603050405020304" pitchFamily="18" charset="0"/>
+                <a:ea typeface="標楷體" panose="03000509000000000000" pitchFamily="65" charset="-120"/>
+                <a:cs typeface="Times New Roman" panose="02020603050405020304" pitchFamily="18" charset="0"/>
+              </a:rPr>
+              <a:t>推論原因：從第三名以後的推薦文章來看，只有結構相似，其主題面向差距過大。</a:t>
+            </a:r>
+            <a:endParaRPr lang="en-US" altLang="zh-TW" dirty="0">
+              <a:latin typeface="Times New Roman" panose="02020603050405020304" pitchFamily="18" charset="0"/>
+              <a:ea typeface="標楷體" panose="03000509000000000000" pitchFamily="65" charset="-120"/>
+              <a:cs typeface="Times New Roman" panose="02020603050405020304" pitchFamily="18" charset="0"/>
+            </a:endParaRPr>
+          </a:p>
+          <a:p>
+            <a:endParaRPr lang="zh-TW" altLang="en-US" dirty="0">
+              <a:latin typeface="Times New Roman" panose="02020603050405020304" pitchFamily="18" charset="0"/>
+              <a:ea typeface="標楷體" panose="03000509000000000000" pitchFamily="65" charset="-120"/>
+              <a:cs typeface="Times New Roman" panose="02020603050405020304" pitchFamily="18" charset="0"/>
+            </a:endParaRPr>
+          </a:p>
+        </p:txBody>
+      </p:sp>
+    </p:spTree>
+    <p:extLst>
+      <p:ext uri="{BB962C8B-B14F-4D97-AF65-F5344CB8AC3E}">
+        <p14:creationId xmlns:p14="http://schemas.microsoft.com/office/powerpoint/2010/main" val="365277382"/>
+      </p:ext>
+    </p:extLst>
+  </p:cSld>
+  <p:clrMapOvr>
+    <a:masterClrMapping/>
+  </p:clrMapOvr>
+</p:sld>
+</file>
+
+<file path=ppt/slides/slide23.xml><?xml version="1.0" encoding="utf-8"?>
+<p:sld xmlns:a="http://schemas.openxmlformats.org/drawingml/2006/main" xmlns:r="http://schemas.openxmlformats.org/officeDocument/2006/relationships" xmlns:p="http://schemas.openxmlformats.org/presentationml/2006/main" show="0">
+  <p:cSld>
+    <p:spTree>
+      <p:nvGrpSpPr>
+        <p:cNvPr id="1" name=""/>
+        <p:cNvGrpSpPr/>
+        <p:nvPr/>
+      </p:nvGrpSpPr>
+      <p:grpSpPr>
+        <a:xfrm>
+          <a:off x="0" y="0"/>
+          <a:ext cx="0" cy="0"/>
+          <a:chOff x="0" y="0"/>
+          <a:chExt cx="0" cy="0"/>
+        </a:xfrm>
+      </p:grpSpPr>
+      <p:pic>
+        <p:nvPicPr>
+          <p:cNvPr id="5" name="圖片 4">
+            <a:extLst>
+              <a:ext uri="{FF2B5EF4-FFF2-40B4-BE49-F238E27FC236}">
+                <a16:creationId xmlns:a16="http://schemas.microsoft.com/office/drawing/2014/main" id="{E8EFE3C5-DB9E-4E4D-B219-759477C9D9B7}"/>
+              </a:ext>
+            </a:extLst>
+          </p:cNvPr>
+          <p:cNvPicPr>
+            <a:picLocks noChangeAspect="1"/>
+          </p:cNvPicPr>
+          <p:nvPr/>
+        </p:nvPicPr>
+        <p:blipFill rotWithShape="1">
+          <a:blip r:embed="rId2"/>
+          <a:srcRect l="-141" r="37510"/>
+          <a:stretch/>
+        </p:blipFill>
+        <p:spPr>
+          <a:xfrm>
+            <a:off x="744461" y="1450571"/>
+            <a:ext cx="10700064" cy="3956857"/>
+          </a:xfrm>
+          <a:prstGeom prst="rect">
+            <a:avLst/>
+          </a:prstGeom>
+        </p:spPr>
+      </p:pic>
+      <p:pic>
+        <p:nvPicPr>
+          <p:cNvPr id="7" name="圖片 6">
+            <a:extLst>
+              <a:ext uri="{FF2B5EF4-FFF2-40B4-BE49-F238E27FC236}">
+                <a16:creationId xmlns:a16="http://schemas.microsoft.com/office/drawing/2014/main" id="{199D6A56-1B58-4CE1-8D4B-BFB67957E87D}"/>
+              </a:ext>
+            </a:extLst>
+          </p:cNvPr>
+          <p:cNvPicPr>
+            <a:picLocks noChangeAspect="1"/>
+          </p:cNvPicPr>
+          <p:nvPr/>
+        </p:nvPicPr>
+        <p:blipFill rotWithShape="1">
+          <a:blip r:embed="rId2"/>
+          <a:srcRect l="62419" t="15029" b="73643"/>
+          <a:stretch/>
+        </p:blipFill>
+        <p:spPr>
+          <a:xfrm>
+            <a:off x="6968238" y="2413931"/>
+            <a:ext cx="4476287" cy="312491"/>
+          </a:xfrm>
+          <a:prstGeom prst="rect">
+            <a:avLst/>
+          </a:prstGeom>
+        </p:spPr>
+      </p:pic>
+    </p:spTree>
+    <p:extLst>
+      <p:ext uri="{BB962C8B-B14F-4D97-AF65-F5344CB8AC3E}">
+        <p14:creationId xmlns:p14="http://schemas.microsoft.com/office/powerpoint/2010/main" val="1389637409"/>
+      </p:ext>
+    </p:extLst>
+  </p:cSld>
+  <p:clrMapOvr>
+    <a:masterClrMapping/>
+  </p:clrMapOvr>
+</p:sld>
+</file>
+
+<file path=ppt/slides/slide24.xml><?xml version="1.0" encoding="utf-8"?>
+<p:sld xmlns:a="http://schemas.openxmlformats.org/drawingml/2006/main" xmlns:r="http://schemas.openxmlformats.org/officeDocument/2006/relationships" xmlns:p="http://schemas.openxmlformats.org/presentationml/2006/main" show="0">
+  <p:cSld>
+    <p:spTree>
+      <p:nvGrpSpPr>
+        <p:cNvPr id="1" name=""/>
+        <p:cNvGrpSpPr/>
+        <p:nvPr/>
+      </p:nvGrpSpPr>
+      <p:grpSpPr>
+        <a:xfrm>
+          <a:off x="0" y="0"/>
+          <a:ext cx="0" cy="0"/>
+          <a:chOff x="0" y="0"/>
+          <a:chExt cx="0" cy="0"/>
+        </a:xfrm>
+      </p:grpSpPr>
+      <p:sp>
+        <p:nvSpPr>
+          <p:cNvPr id="2" name="標題 1">
+            <a:extLst>
+              <a:ext uri="{FF2B5EF4-FFF2-40B4-BE49-F238E27FC236}">
+                <a16:creationId xmlns:a16="http://schemas.microsoft.com/office/drawing/2014/main" id="{A3852A4F-37A4-4104-8CEB-F58C23E07226}"/>
+              </a:ext>
+            </a:extLst>
+          </p:cNvPr>
+          <p:cNvSpPr>
+            <a:spLocks noGrp="1"/>
+          </p:cNvSpPr>
+          <p:nvPr>
+            <p:ph type="title"/>
+          </p:nvPr>
+        </p:nvSpPr>
+        <p:spPr/>
+        <p:txBody>
+          <a:bodyPr/>
+          <a:lstStyle/>
+          <a:p>
+            <a:pPr algn="l"/>
+            <a:r>
+              <a:rPr lang="zh-TW" altLang="en-US" dirty="0">
+                <a:latin typeface="標楷體" panose="03000509000000000000" pitchFamily="65" charset="-120"/>
+                <a:ea typeface="標楷體" panose="03000509000000000000" pitchFamily="65" charset="-120"/>
+              </a:rPr>
+              <a:t>功能三未知</a:t>
+            </a:r>
+          </a:p>
+        </p:txBody>
+      </p:sp>
+      <p:sp>
+        <p:nvSpPr>
+          <p:cNvPr id="3" name="內容版面配置區 2">
+            <a:extLst>
+              <a:ext uri="{FF2B5EF4-FFF2-40B4-BE49-F238E27FC236}">
+                <a16:creationId xmlns:a16="http://schemas.microsoft.com/office/drawing/2014/main" id="{4C51B410-6441-4389-B809-21CDB44DF981}"/>
+              </a:ext>
+            </a:extLst>
+          </p:cNvPr>
+          <p:cNvSpPr>
+            <a:spLocks noGrp="1"/>
+          </p:cNvSpPr>
+          <p:nvPr>
+            <p:ph idx="1"/>
+          </p:nvPr>
+        </p:nvSpPr>
+        <p:spPr/>
+        <p:txBody>
+          <a:bodyPr/>
+          <a:lstStyle/>
+          <a:p>
+            <a:endParaRPr lang="zh-TW" altLang="en-US"/>
+          </a:p>
+        </p:txBody>
+      </p:sp>
+    </p:spTree>
+    <p:extLst>
+      <p:ext uri="{BB962C8B-B14F-4D97-AF65-F5344CB8AC3E}">
+        <p14:creationId xmlns:p14="http://schemas.microsoft.com/office/powerpoint/2010/main" val="768878564"/>
+      </p:ext>
+    </p:extLst>
+  </p:cSld>
+  <p:clrMapOvr>
+    <a:masterClrMapping/>
+  </p:clrMapOvr>
+</p:sld>
+</file>
+
+<file path=ppt/slides/slide25.xml><?xml version="1.0" encoding="utf-8"?>
+<p:sld xmlns:a="http://schemas.openxmlformats.org/drawingml/2006/main" xmlns:r="http://schemas.openxmlformats.org/officeDocument/2006/relationships" xmlns:p="http://schemas.openxmlformats.org/presentationml/2006/main" show="0">
   <p:cSld>
     <p:spTree>
       <p:nvGrpSpPr>
@@ -9860,8 +10635,8 @@
 </p:sld>
 </file>
 
-<file path=ppt/slides/slide19.xml><?xml version="1.0" encoding="utf-8"?>
-<p:sld xmlns:a="http://schemas.openxmlformats.org/drawingml/2006/main" xmlns:r="http://schemas.openxmlformats.org/officeDocument/2006/relationships" xmlns:p="http://schemas.openxmlformats.org/presentationml/2006/main">
+<file path=ppt/slides/slide26.xml><?xml version="1.0" encoding="utf-8"?>
+<p:sld xmlns:a="http://schemas.openxmlformats.org/drawingml/2006/main" xmlns:r="http://schemas.openxmlformats.org/officeDocument/2006/relationships" xmlns:p="http://schemas.openxmlformats.org/presentationml/2006/main" show="0">
   <p:cSld>
     <p:spTree>
       <p:nvGrpSpPr>
@@ -10041,126 +10816,8 @@
 </p:sld>
 </file>
 
-<file path=ppt/slides/slide2.xml><?xml version="1.0" encoding="utf-8"?>
-<p:sld xmlns:a="http://schemas.openxmlformats.org/drawingml/2006/main" xmlns:r="http://schemas.openxmlformats.org/officeDocument/2006/relationships" xmlns:p="http://schemas.openxmlformats.org/presentationml/2006/main">
-  <p:cSld>
-    <p:spTree>
-      <p:nvGrpSpPr>
-        <p:cNvPr id="1" name=""/>
-        <p:cNvGrpSpPr/>
-        <p:nvPr/>
-      </p:nvGrpSpPr>
-      <p:grpSpPr>
-        <a:xfrm>
-          <a:off x="0" y="0"/>
-          <a:ext cx="0" cy="0"/>
-          <a:chOff x="0" y="0"/>
-          <a:chExt cx="0" cy="0"/>
-        </a:xfrm>
-      </p:grpSpPr>
-      <p:sp>
-        <p:nvSpPr>
-          <p:cNvPr id="4" name="標題 3">
-            <a:extLst>
-              <a:ext uri="{FF2B5EF4-FFF2-40B4-BE49-F238E27FC236}">
-                <a16:creationId xmlns:a16="http://schemas.microsoft.com/office/drawing/2014/main" id="{F1D5CE53-83F5-4BBA-BB3E-ABF11BF3B6B0}"/>
-              </a:ext>
-            </a:extLst>
-          </p:cNvPr>
-          <p:cNvSpPr>
-            <a:spLocks noGrp="1"/>
-          </p:cNvSpPr>
-          <p:nvPr>
-            <p:ph type="title"/>
-          </p:nvPr>
-        </p:nvSpPr>
-        <p:spPr/>
-        <p:txBody>
-          <a:bodyPr/>
-          <a:lstStyle/>
-          <a:p>
-            <a:r>
-              <a:rPr lang="zh-TW" altLang="en-US" dirty="0">
-                <a:latin typeface="標楷體" panose="03000509000000000000" pitchFamily="65" charset="-120"/>
-                <a:ea typeface="標楷體" panose="03000509000000000000" pitchFamily="65" charset="-120"/>
-              </a:rPr>
-              <a:t>對事實查核中心網站進行爬蟲</a:t>
-            </a:r>
-          </a:p>
-        </p:txBody>
-      </p:sp>
-      <p:sp>
-        <p:nvSpPr>
-          <p:cNvPr id="5" name="文字版面配置區 4">
-            <a:extLst>
-              <a:ext uri="{FF2B5EF4-FFF2-40B4-BE49-F238E27FC236}">
-                <a16:creationId xmlns:a16="http://schemas.microsoft.com/office/drawing/2014/main" id="{9F5CBA14-3D57-4898-86A7-E9F06D90C241}"/>
-              </a:ext>
-            </a:extLst>
-          </p:cNvPr>
-          <p:cNvSpPr>
-            <a:spLocks noGrp="1"/>
-          </p:cNvSpPr>
-          <p:nvPr>
-            <p:ph type="body" idx="1"/>
-          </p:nvPr>
-        </p:nvSpPr>
-        <p:spPr/>
-        <p:txBody>
-          <a:bodyPr/>
-          <a:lstStyle/>
-          <a:p>
-            <a:br>
-              <a:rPr lang="en-US" altLang="zh-TW" dirty="0">
-                <a:latin typeface="標楷體" panose="03000509000000000000" pitchFamily="65" charset="-120"/>
-                <a:ea typeface="標楷體" panose="03000509000000000000" pitchFamily="65" charset="-120"/>
-              </a:rPr>
-            </a:br>
-            <a:r>
-              <a:rPr lang="en-US" altLang="zh-TW" dirty="0">
-                <a:latin typeface="Times New Roman" panose="02020603050405020304" pitchFamily="18" charset="0"/>
-                <a:ea typeface="標楷體" panose="03000509000000000000" pitchFamily="65" charset="-120"/>
-                <a:cs typeface="Times New Roman" panose="02020603050405020304" pitchFamily="18" charset="0"/>
-              </a:rPr>
-              <a:t>4126</a:t>
-            </a:r>
-            <a:r>
-              <a:rPr lang="zh-TW" altLang="en-US" dirty="0">
-                <a:latin typeface="標楷體" panose="03000509000000000000" pitchFamily="65" charset="-120"/>
-                <a:ea typeface="標楷體" panose="03000509000000000000" pitchFamily="65" charset="-120"/>
-              </a:rPr>
-              <a:t>篇文章直到</a:t>
-            </a:r>
-            <a:r>
-              <a:rPr lang="en-US" altLang="zh-TW" dirty="0">
-                <a:latin typeface="Times New Roman" panose="02020603050405020304" pitchFamily="18" charset="0"/>
-                <a:ea typeface="標楷體" panose="03000509000000000000" pitchFamily="65" charset="-120"/>
-                <a:cs typeface="Times New Roman" panose="02020603050405020304" pitchFamily="18" charset="0"/>
-              </a:rPr>
-              <a:t>5/7</a:t>
-            </a:r>
-            <a:endParaRPr lang="zh-TW" altLang="en-US" dirty="0">
-              <a:latin typeface="標楷體" panose="03000509000000000000" pitchFamily="65" charset="-120"/>
-              <a:ea typeface="標楷體" panose="03000509000000000000" pitchFamily="65" charset="-120"/>
-            </a:endParaRPr>
-          </a:p>
-        </p:txBody>
-      </p:sp>
-    </p:spTree>
-    <p:extLst>
-      <p:ext uri="{BB962C8B-B14F-4D97-AF65-F5344CB8AC3E}">
-        <p14:creationId xmlns:p14="http://schemas.microsoft.com/office/powerpoint/2010/main" val="645880314"/>
-      </p:ext>
-    </p:extLst>
-  </p:cSld>
-  <p:clrMapOvr>
-    <a:masterClrMapping/>
-  </p:clrMapOvr>
-</p:sld>
-</file>
-
-<file path=ppt/slides/slide20.xml><?xml version="1.0" encoding="utf-8"?>
-<p:sld xmlns:a="http://schemas.openxmlformats.org/drawingml/2006/main" xmlns:r="http://schemas.openxmlformats.org/officeDocument/2006/relationships" xmlns:p="http://schemas.openxmlformats.org/presentationml/2006/main">
+<file path=ppt/slides/slide27.xml><?xml version="1.0" encoding="utf-8"?>
+<p:sld xmlns:a="http://schemas.openxmlformats.org/drawingml/2006/main" xmlns:r="http://schemas.openxmlformats.org/officeDocument/2006/relationships" xmlns:p="http://schemas.openxmlformats.org/presentationml/2006/main" show="0">
   <p:cSld>
     <p:spTree>
       <p:nvGrpSpPr>
@@ -10280,8 +10937,8 @@
 </p:sld>
 </file>
 
-<file path=ppt/slides/slide21.xml><?xml version="1.0" encoding="utf-8"?>
-<p:sld xmlns:a="http://schemas.openxmlformats.org/drawingml/2006/main" xmlns:r="http://schemas.openxmlformats.org/officeDocument/2006/relationships" xmlns:p="http://schemas.openxmlformats.org/presentationml/2006/main">
+<file path=ppt/slides/slide28.xml><?xml version="1.0" encoding="utf-8"?>
+<p:sld xmlns:a="http://schemas.openxmlformats.org/drawingml/2006/main" xmlns:r="http://schemas.openxmlformats.org/officeDocument/2006/relationships" xmlns:p="http://schemas.openxmlformats.org/presentationml/2006/main" show="0">
   <p:cSld>
     <p:spTree>
       <p:nvGrpSpPr>
@@ -10401,7 +11058,7 @@
 </p:sld>
 </file>
 
-<file path=ppt/slides/slide22.xml><?xml version="1.0" encoding="utf-8"?>
+<file path=ppt/slides/slide29.xml><?xml version="1.0" encoding="utf-8"?>
 <p:sld xmlns:a="http://schemas.openxmlformats.org/drawingml/2006/main" xmlns:r="http://schemas.openxmlformats.org/officeDocument/2006/relationships" xmlns:p="http://schemas.openxmlformats.org/presentationml/2006/main">
   <p:cSld>
     <p:spTree>
@@ -10516,219 +11173,8 @@
 </p:sld>
 </file>
 
-<file path=ppt/slides/slide23.xml><?xml version="1.0" encoding="utf-8"?>
+<file path=ppt/slides/slide3.xml><?xml version="1.0" encoding="utf-8"?>
 <p:sld xmlns:a="http://schemas.openxmlformats.org/drawingml/2006/main" xmlns:r="http://schemas.openxmlformats.org/officeDocument/2006/relationships" xmlns:p="http://schemas.openxmlformats.org/presentationml/2006/main" show="0">
-  <p:cSld>
-    <p:spTree>
-      <p:nvGrpSpPr>
-        <p:cNvPr id="1" name=""/>
-        <p:cNvGrpSpPr/>
-        <p:nvPr/>
-      </p:nvGrpSpPr>
-      <p:grpSpPr>
-        <a:xfrm>
-          <a:off x="0" y="0"/>
-          <a:ext cx="0" cy="0"/>
-          <a:chOff x="0" y="0"/>
-          <a:chExt cx="0" cy="0"/>
-        </a:xfrm>
-      </p:grpSpPr>
-      <p:sp>
-        <p:nvSpPr>
-          <p:cNvPr id="2" name="標題 1">
-            <a:extLst>
-              <a:ext uri="{FF2B5EF4-FFF2-40B4-BE49-F238E27FC236}">
-                <a16:creationId xmlns:a16="http://schemas.microsoft.com/office/drawing/2014/main" id="{2DE3768E-4ECB-4AFC-9D38-D8D0C87616D5}"/>
-              </a:ext>
-            </a:extLst>
-          </p:cNvPr>
-          <p:cNvSpPr>
-            <a:spLocks noGrp="1"/>
-          </p:cNvSpPr>
-          <p:nvPr>
-            <p:ph type="title"/>
-          </p:nvPr>
-        </p:nvSpPr>
-        <p:spPr/>
-        <p:txBody>
-          <a:bodyPr>
-            <a:normAutofit/>
-          </a:bodyPr>
-          <a:lstStyle/>
-          <a:p>
-            <a:pPr algn="l"/>
-            <a:r>
-              <a:rPr lang="zh-TW" altLang="en-US" dirty="0">
-                <a:latin typeface="Times New Roman" panose="02020603050405020304" pitchFamily="18" charset="0"/>
-                <a:ea typeface="標楷體" panose="03000509000000000000" pitchFamily="65" charset="-120"/>
-                <a:cs typeface="Times New Roman" panose="02020603050405020304" pitchFamily="18" charset="0"/>
-              </a:rPr>
-              <a:t>詞彙在所有文章的總出現次數</a:t>
-            </a:r>
-            <a:endParaRPr lang="zh-TW" altLang="en-US" dirty="0">
-              <a:latin typeface="標楷體" panose="03000509000000000000" pitchFamily="65" charset="-120"/>
-              <a:ea typeface="標楷體" panose="03000509000000000000" pitchFamily="65" charset="-120"/>
-            </a:endParaRPr>
-          </a:p>
-        </p:txBody>
-      </p:sp>
-      <p:pic>
-        <p:nvPicPr>
-          <p:cNvPr id="7" name="內容版面配置區 6">
-            <a:extLst>
-              <a:ext uri="{FF2B5EF4-FFF2-40B4-BE49-F238E27FC236}">
-                <a16:creationId xmlns:a16="http://schemas.microsoft.com/office/drawing/2014/main" id="{2C47E4CA-9D20-4759-8DC9-398A25C8839E}"/>
-              </a:ext>
-            </a:extLst>
-          </p:cNvPr>
-          <p:cNvPicPr>
-            <a:picLocks noGrp="1" noChangeAspect="1"/>
-          </p:cNvPicPr>
-          <p:nvPr>
-            <p:ph idx="1"/>
-          </p:nvPr>
-        </p:nvPicPr>
-        <p:blipFill>
-          <a:blip r:embed="rId2"/>
-          <a:stretch>
-            <a:fillRect/>
-          </a:stretch>
-        </p:blipFill>
-        <p:spPr>
-          <a:xfrm>
-            <a:off x="4045744" y="2423240"/>
-            <a:ext cx="4100512" cy="3816579"/>
-          </a:xfrm>
-        </p:spPr>
-      </p:pic>
-    </p:spTree>
-    <p:extLst>
-      <p:ext uri="{BB962C8B-B14F-4D97-AF65-F5344CB8AC3E}">
-        <p14:creationId xmlns:p14="http://schemas.microsoft.com/office/powerpoint/2010/main" val="804054446"/>
-      </p:ext>
-    </p:extLst>
-  </p:cSld>
-  <p:clrMapOvr>
-    <a:masterClrMapping/>
-  </p:clrMapOvr>
-</p:sld>
-</file>
-
-<file path=ppt/slides/slide24.xml><?xml version="1.0" encoding="utf-8"?>
-<p:sld xmlns:a="http://schemas.openxmlformats.org/drawingml/2006/main" xmlns:r="http://schemas.openxmlformats.org/officeDocument/2006/relationships" xmlns:p="http://schemas.openxmlformats.org/presentationml/2006/main" show="0">
-  <p:cSld>
-    <p:spTree>
-      <p:nvGrpSpPr>
-        <p:cNvPr id="1" name=""/>
-        <p:cNvGrpSpPr/>
-        <p:nvPr/>
-      </p:nvGrpSpPr>
-      <p:grpSpPr>
-        <a:xfrm>
-          <a:off x="0" y="0"/>
-          <a:ext cx="0" cy="0"/>
-          <a:chOff x="0" y="0"/>
-          <a:chExt cx="0" cy="0"/>
-        </a:xfrm>
-      </p:grpSpPr>
-      <p:sp>
-        <p:nvSpPr>
-          <p:cNvPr id="2" name="標題 1">
-            <a:extLst>
-              <a:ext uri="{FF2B5EF4-FFF2-40B4-BE49-F238E27FC236}">
-                <a16:creationId xmlns:a16="http://schemas.microsoft.com/office/drawing/2014/main" id="{2DE3768E-4ECB-4AFC-9D38-D8D0C87616D5}"/>
-              </a:ext>
-            </a:extLst>
-          </p:cNvPr>
-          <p:cNvSpPr>
-            <a:spLocks noGrp="1"/>
-          </p:cNvSpPr>
-          <p:nvPr>
-            <p:ph type="title"/>
-          </p:nvPr>
-        </p:nvSpPr>
-        <p:spPr/>
-        <p:txBody>
-          <a:bodyPr/>
-          <a:lstStyle/>
-          <a:p>
-            <a:pPr algn="l"/>
-            <a:r>
-              <a:rPr lang="en-US" altLang="zh-TW" dirty="0">
-                <a:latin typeface="Times New Roman" panose="02020603050405020304" pitchFamily="18" charset="0"/>
-                <a:ea typeface="標楷體" panose="03000509000000000000" pitchFamily="65" charset="-120"/>
-                <a:cs typeface="Times New Roman" panose="02020603050405020304" pitchFamily="18" charset="0"/>
-              </a:rPr>
-              <a:t>2025</a:t>
-            </a:r>
-            <a:r>
-              <a:rPr lang="zh-TW" altLang="en-US" dirty="0">
-                <a:latin typeface="Times New Roman" panose="02020603050405020304" pitchFamily="18" charset="0"/>
-                <a:ea typeface="標楷體" panose="03000509000000000000" pitchFamily="65" charset="-120"/>
-                <a:cs typeface="Times New Roman" panose="02020603050405020304" pitchFamily="18" charset="0"/>
-              </a:rPr>
-              <a:t>年的</a:t>
-            </a:r>
-            <a:r>
-              <a:rPr lang="en-US" altLang="zh-TW" dirty="0">
-                <a:latin typeface="Times New Roman" panose="02020603050405020304" pitchFamily="18" charset="0"/>
-                <a:ea typeface="標楷體" panose="03000509000000000000" pitchFamily="65" charset="-120"/>
-                <a:cs typeface="Times New Roman" panose="02020603050405020304" pitchFamily="18" charset="0"/>
-              </a:rPr>
-              <a:t>DF</a:t>
-            </a:r>
-            <a:endParaRPr lang="zh-TW" altLang="en-US" dirty="0">
-              <a:latin typeface="Times New Roman" panose="02020603050405020304" pitchFamily="18" charset="0"/>
-              <a:ea typeface="標楷體" panose="03000509000000000000" pitchFamily="65" charset="-120"/>
-              <a:cs typeface="Times New Roman" panose="02020603050405020304" pitchFamily="18" charset="0"/>
-            </a:endParaRPr>
-          </a:p>
-        </p:txBody>
-      </p:sp>
-      <p:pic>
-        <p:nvPicPr>
-          <p:cNvPr id="17" name="內容版面配置區 16">
-            <a:extLst>
-              <a:ext uri="{FF2B5EF4-FFF2-40B4-BE49-F238E27FC236}">
-                <a16:creationId xmlns:a16="http://schemas.microsoft.com/office/drawing/2014/main" id="{47834B59-3F02-418A-83DC-A4716E092551}"/>
-              </a:ext>
-            </a:extLst>
-          </p:cNvPr>
-          <p:cNvPicPr>
-            <a:picLocks noGrp="1" noChangeAspect="1"/>
-          </p:cNvPicPr>
-          <p:nvPr>
-            <p:ph idx="1"/>
-          </p:nvPr>
-        </p:nvPicPr>
-        <p:blipFill>
-          <a:blip r:embed="rId2"/>
-          <a:stretch>
-            <a:fillRect/>
-          </a:stretch>
-        </p:blipFill>
-        <p:spPr>
-          <a:xfrm>
-            <a:off x="2362074" y="2431628"/>
-            <a:ext cx="7467851" cy="3837156"/>
-          </a:xfrm>
-        </p:spPr>
-      </p:pic>
-    </p:spTree>
-    <p:extLst>
-      <p:ext uri="{BB962C8B-B14F-4D97-AF65-F5344CB8AC3E}">
-        <p14:creationId xmlns:p14="http://schemas.microsoft.com/office/powerpoint/2010/main" val="2680993041"/>
-      </p:ext>
-    </p:extLst>
-  </p:cSld>
-  <p:clrMapOvr>
-    <a:masterClrMapping/>
-  </p:clrMapOvr>
-</p:sld>
-</file>
-
-<file path=ppt/slides/slide3.xml><?xml version="1.0" encoding="utf-8"?>
-<p:sld xmlns:a="http://schemas.openxmlformats.org/drawingml/2006/main" xmlns:r="http://schemas.openxmlformats.org/officeDocument/2006/relationships" xmlns:p="http://schemas.openxmlformats.org/presentationml/2006/main">
   <p:cSld>
     <p:spTree>
       <p:nvGrpSpPr>
@@ -10865,8 +11311,8 @@
 </p:sld>
 </file>
 
-<file path=ppt/slides/slide4.xml><?xml version="1.0" encoding="utf-8"?>
-<p:sld xmlns:a="http://schemas.openxmlformats.org/drawingml/2006/main" xmlns:r="http://schemas.openxmlformats.org/officeDocument/2006/relationships" xmlns:p="http://schemas.openxmlformats.org/presentationml/2006/main">
+<file path=ppt/slides/slide30.xml><?xml version="1.0" encoding="utf-8"?>
+<p:sld xmlns:a="http://schemas.openxmlformats.org/drawingml/2006/main" xmlns:r="http://schemas.openxmlformats.org/officeDocument/2006/relationships" xmlns:p="http://schemas.openxmlformats.org/presentationml/2006/main" show="0">
   <p:cSld>
     <p:spTree>
       <p:nvGrpSpPr>
@@ -10884,10 +11330,10 @@
       </p:grpSpPr>
       <p:sp>
         <p:nvSpPr>
-          <p:cNvPr id="4" name="標題 3">
+          <p:cNvPr id="2" name="標題 1">
             <a:extLst>
               <a:ext uri="{FF2B5EF4-FFF2-40B4-BE49-F238E27FC236}">
-                <a16:creationId xmlns:a16="http://schemas.microsoft.com/office/drawing/2014/main" id="{F1D5CE53-83F5-4BBA-BB3E-ABF11BF3B6B0}"/>
+                <a16:creationId xmlns:a16="http://schemas.microsoft.com/office/drawing/2014/main" id="{2DE3768E-4ECB-4AFC-9D38-D8D0C87616D5}"/>
               </a:ext>
             </a:extLst>
           </p:cNvPr>
@@ -10900,22 +11346,20 @@
         </p:nvSpPr>
         <p:spPr/>
         <p:txBody>
-          <a:bodyPr/>
+          <a:bodyPr>
+            <a:normAutofit/>
+          </a:bodyPr>
           <a:lstStyle/>
           <a:p>
+            <a:pPr algn="l"/>
             <a:r>
               <a:rPr lang="zh-TW" altLang="en-US" dirty="0">
-                <a:latin typeface="標楷體" panose="03000509000000000000" pitchFamily="65" charset="-120"/>
+                <a:latin typeface="Times New Roman" panose="02020603050405020304" pitchFamily="18" charset="0"/>
                 <a:ea typeface="標楷體" panose="03000509000000000000" pitchFamily="65" charset="-120"/>
+                <a:cs typeface="Times New Roman" panose="02020603050405020304" pitchFamily="18" charset="0"/>
               </a:rPr>
-              <a:t>功能說明</a:t>
-            </a:r>
-            <a:br>
-              <a:rPr lang="zh-TW" altLang="en-US" dirty="0">
-                <a:latin typeface="標楷體" panose="03000509000000000000" pitchFamily="65" charset="-120"/>
-                <a:ea typeface="標楷體" panose="03000509000000000000" pitchFamily="65" charset="-120"/>
-              </a:rPr>
-            </a:br>
+              <a:t>詞彙在所有文章的總出現次數</a:t>
+            </a:r>
             <a:endParaRPr lang="zh-TW" altLang="en-US" dirty="0">
               <a:latin typeface="標楷體" panose="03000509000000000000" pitchFamily="65" charset="-120"/>
               <a:ea typeface="標楷體" panose="03000509000000000000" pitchFamily="65" charset="-120"/>
@@ -10923,38 +11367,39 @@
           </a:p>
         </p:txBody>
       </p:sp>
-      <p:sp>
-        <p:nvSpPr>
-          <p:cNvPr id="5" name="文字版面配置區 4">
+      <p:pic>
+        <p:nvPicPr>
+          <p:cNvPr id="7" name="內容版面配置區 6">
             <a:extLst>
               <a:ext uri="{FF2B5EF4-FFF2-40B4-BE49-F238E27FC236}">
-                <a16:creationId xmlns:a16="http://schemas.microsoft.com/office/drawing/2014/main" id="{9F5CBA14-3D57-4898-86A7-E9F06D90C241}"/>
+                <a16:creationId xmlns:a16="http://schemas.microsoft.com/office/drawing/2014/main" id="{2C47E4CA-9D20-4759-8DC9-398A25C8839E}"/>
               </a:ext>
             </a:extLst>
           </p:cNvPr>
-          <p:cNvSpPr>
-            <a:spLocks noGrp="1"/>
-          </p:cNvSpPr>
-          <p:nvPr>
-            <p:ph type="body" idx="1"/>
-          </p:nvPr>
-        </p:nvSpPr>
-        <p:spPr/>
-        <p:txBody>
-          <a:bodyPr/>
-          <a:lstStyle/>
-          <a:p>
-            <a:endParaRPr lang="zh-TW" altLang="en-US" dirty="0">
-              <a:latin typeface="標楷體" panose="03000509000000000000" pitchFamily="65" charset="-120"/>
-              <a:ea typeface="標楷體" panose="03000509000000000000" pitchFamily="65" charset="-120"/>
-            </a:endParaRPr>
-          </a:p>
-        </p:txBody>
-      </p:sp>
+          <p:cNvPicPr>
+            <a:picLocks noGrp="1" noChangeAspect="1"/>
+          </p:cNvPicPr>
+          <p:nvPr>
+            <p:ph idx="1"/>
+          </p:nvPr>
+        </p:nvPicPr>
+        <p:blipFill>
+          <a:blip r:embed="rId2"/>
+          <a:stretch>
+            <a:fillRect/>
+          </a:stretch>
+        </p:blipFill>
+        <p:spPr>
+          <a:xfrm>
+            <a:off x="4045744" y="2423240"/>
+            <a:ext cx="4100512" cy="3816579"/>
+          </a:xfrm>
+        </p:spPr>
+      </p:pic>
     </p:spTree>
     <p:extLst>
       <p:ext uri="{BB962C8B-B14F-4D97-AF65-F5344CB8AC3E}">
-        <p14:creationId xmlns:p14="http://schemas.microsoft.com/office/powerpoint/2010/main" val="593641216"/>
+        <p14:creationId xmlns:p14="http://schemas.microsoft.com/office/powerpoint/2010/main" val="804054446"/>
       </p:ext>
     </p:extLst>
   </p:cSld>
@@ -10964,8 +11409,8 @@
 </p:sld>
 </file>
 
-<file path=ppt/slides/slide5.xml><?xml version="1.0" encoding="utf-8"?>
-<p:sld xmlns:a="http://schemas.openxmlformats.org/drawingml/2006/main" xmlns:r="http://schemas.openxmlformats.org/officeDocument/2006/relationships" xmlns:p="http://schemas.openxmlformats.org/presentationml/2006/main">
+<file path=ppt/slides/slide31.xml><?xml version="1.0" encoding="utf-8"?>
+<p:sld xmlns:a="http://schemas.openxmlformats.org/drawingml/2006/main" xmlns:r="http://schemas.openxmlformats.org/officeDocument/2006/relationships" xmlns:p="http://schemas.openxmlformats.org/presentationml/2006/main" show="0">
   <p:cSld>
     <p:spTree>
       <p:nvGrpSpPr>
@@ -11004,6 +11449,218 @@
           <a:p>
             <a:pPr algn="l"/>
             <a:r>
+              <a:rPr lang="en-US" altLang="zh-TW" dirty="0">
+                <a:latin typeface="Times New Roman" panose="02020603050405020304" pitchFamily="18" charset="0"/>
+                <a:ea typeface="標楷體" panose="03000509000000000000" pitchFamily="65" charset="-120"/>
+                <a:cs typeface="Times New Roman" panose="02020603050405020304" pitchFamily="18" charset="0"/>
+              </a:rPr>
+              <a:t>2025</a:t>
+            </a:r>
+            <a:r>
+              <a:rPr lang="zh-TW" altLang="en-US" dirty="0">
+                <a:latin typeface="Times New Roman" panose="02020603050405020304" pitchFamily="18" charset="0"/>
+                <a:ea typeface="標楷體" panose="03000509000000000000" pitchFamily="65" charset="-120"/>
+                <a:cs typeface="Times New Roman" panose="02020603050405020304" pitchFamily="18" charset="0"/>
+              </a:rPr>
+              <a:t>年的</a:t>
+            </a:r>
+            <a:r>
+              <a:rPr lang="en-US" altLang="zh-TW" dirty="0">
+                <a:latin typeface="Times New Roman" panose="02020603050405020304" pitchFamily="18" charset="0"/>
+                <a:ea typeface="標楷體" panose="03000509000000000000" pitchFamily="65" charset="-120"/>
+                <a:cs typeface="Times New Roman" panose="02020603050405020304" pitchFamily="18" charset="0"/>
+              </a:rPr>
+              <a:t>DF</a:t>
+            </a:r>
+            <a:endParaRPr lang="zh-TW" altLang="en-US" dirty="0">
+              <a:latin typeface="Times New Roman" panose="02020603050405020304" pitchFamily="18" charset="0"/>
+              <a:ea typeface="標楷體" panose="03000509000000000000" pitchFamily="65" charset="-120"/>
+              <a:cs typeface="Times New Roman" panose="02020603050405020304" pitchFamily="18" charset="0"/>
+            </a:endParaRPr>
+          </a:p>
+        </p:txBody>
+      </p:sp>
+      <p:pic>
+        <p:nvPicPr>
+          <p:cNvPr id="17" name="內容版面配置區 16">
+            <a:extLst>
+              <a:ext uri="{FF2B5EF4-FFF2-40B4-BE49-F238E27FC236}">
+                <a16:creationId xmlns:a16="http://schemas.microsoft.com/office/drawing/2014/main" id="{47834B59-3F02-418A-83DC-A4716E092551}"/>
+              </a:ext>
+            </a:extLst>
+          </p:cNvPr>
+          <p:cNvPicPr>
+            <a:picLocks noGrp="1" noChangeAspect="1"/>
+          </p:cNvPicPr>
+          <p:nvPr>
+            <p:ph idx="1"/>
+          </p:nvPr>
+        </p:nvPicPr>
+        <p:blipFill>
+          <a:blip r:embed="rId2"/>
+          <a:stretch>
+            <a:fillRect/>
+          </a:stretch>
+        </p:blipFill>
+        <p:spPr>
+          <a:xfrm>
+            <a:off x="2362074" y="2431628"/>
+            <a:ext cx="7467851" cy="3837156"/>
+          </a:xfrm>
+        </p:spPr>
+      </p:pic>
+    </p:spTree>
+    <p:extLst>
+      <p:ext uri="{BB962C8B-B14F-4D97-AF65-F5344CB8AC3E}">
+        <p14:creationId xmlns:p14="http://schemas.microsoft.com/office/powerpoint/2010/main" val="2680993041"/>
+      </p:ext>
+    </p:extLst>
+  </p:cSld>
+  <p:clrMapOvr>
+    <a:masterClrMapping/>
+  </p:clrMapOvr>
+</p:sld>
+</file>
+
+<file path=ppt/slides/slide4.xml><?xml version="1.0" encoding="utf-8"?>
+<p:sld xmlns:a="http://schemas.openxmlformats.org/drawingml/2006/main" xmlns:r="http://schemas.openxmlformats.org/officeDocument/2006/relationships" xmlns:p="http://schemas.openxmlformats.org/presentationml/2006/main" show="0">
+  <p:cSld>
+    <p:spTree>
+      <p:nvGrpSpPr>
+        <p:cNvPr id="1" name=""/>
+        <p:cNvGrpSpPr/>
+        <p:nvPr/>
+      </p:nvGrpSpPr>
+      <p:grpSpPr>
+        <a:xfrm>
+          <a:off x="0" y="0"/>
+          <a:ext cx="0" cy="0"/>
+          <a:chOff x="0" y="0"/>
+          <a:chExt cx="0" cy="0"/>
+        </a:xfrm>
+      </p:grpSpPr>
+      <p:sp>
+        <p:nvSpPr>
+          <p:cNvPr id="4" name="標題 3">
+            <a:extLst>
+              <a:ext uri="{FF2B5EF4-FFF2-40B4-BE49-F238E27FC236}">
+                <a16:creationId xmlns:a16="http://schemas.microsoft.com/office/drawing/2014/main" id="{F1D5CE53-83F5-4BBA-BB3E-ABF11BF3B6B0}"/>
+              </a:ext>
+            </a:extLst>
+          </p:cNvPr>
+          <p:cNvSpPr>
+            <a:spLocks noGrp="1"/>
+          </p:cNvSpPr>
+          <p:nvPr>
+            <p:ph type="title"/>
+          </p:nvPr>
+        </p:nvSpPr>
+        <p:spPr/>
+        <p:txBody>
+          <a:bodyPr/>
+          <a:lstStyle/>
+          <a:p>
+            <a:r>
+              <a:rPr lang="zh-TW" altLang="en-US" dirty="0">
+                <a:latin typeface="標楷體" panose="03000509000000000000" pitchFamily="65" charset="-120"/>
+                <a:ea typeface="標楷體" panose="03000509000000000000" pitchFamily="65" charset="-120"/>
+              </a:rPr>
+              <a:t>功能說明</a:t>
+            </a:r>
+            <a:br>
+              <a:rPr lang="zh-TW" altLang="en-US" dirty="0">
+                <a:latin typeface="標楷體" panose="03000509000000000000" pitchFamily="65" charset="-120"/>
+                <a:ea typeface="標楷體" panose="03000509000000000000" pitchFamily="65" charset="-120"/>
+              </a:rPr>
+            </a:br>
+            <a:endParaRPr lang="zh-TW" altLang="en-US" dirty="0">
+              <a:latin typeface="標楷體" panose="03000509000000000000" pitchFamily="65" charset="-120"/>
+              <a:ea typeface="標楷體" panose="03000509000000000000" pitchFamily="65" charset="-120"/>
+            </a:endParaRPr>
+          </a:p>
+        </p:txBody>
+      </p:sp>
+      <p:sp>
+        <p:nvSpPr>
+          <p:cNvPr id="5" name="文字版面配置區 4">
+            <a:extLst>
+              <a:ext uri="{FF2B5EF4-FFF2-40B4-BE49-F238E27FC236}">
+                <a16:creationId xmlns:a16="http://schemas.microsoft.com/office/drawing/2014/main" id="{9F5CBA14-3D57-4898-86A7-E9F06D90C241}"/>
+              </a:ext>
+            </a:extLst>
+          </p:cNvPr>
+          <p:cNvSpPr>
+            <a:spLocks noGrp="1"/>
+          </p:cNvSpPr>
+          <p:nvPr>
+            <p:ph type="body" idx="1"/>
+          </p:nvPr>
+        </p:nvSpPr>
+        <p:spPr/>
+        <p:txBody>
+          <a:bodyPr/>
+          <a:lstStyle/>
+          <a:p>
+            <a:endParaRPr lang="zh-TW" altLang="en-US" dirty="0">
+              <a:latin typeface="標楷體" panose="03000509000000000000" pitchFamily="65" charset="-120"/>
+              <a:ea typeface="標楷體" panose="03000509000000000000" pitchFamily="65" charset="-120"/>
+            </a:endParaRPr>
+          </a:p>
+        </p:txBody>
+      </p:sp>
+    </p:spTree>
+    <p:extLst>
+      <p:ext uri="{BB962C8B-B14F-4D97-AF65-F5344CB8AC3E}">
+        <p14:creationId xmlns:p14="http://schemas.microsoft.com/office/powerpoint/2010/main" val="593641216"/>
+      </p:ext>
+    </p:extLst>
+  </p:cSld>
+  <p:clrMapOvr>
+    <a:masterClrMapping/>
+  </p:clrMapOvr>
+</p:sld>
+</file>
+
+<file path=ppt/slides/slide5.xml><?xml version="1.0" encoding="utf-8"?>
+<p:sld xmlns:a="http://schemas.openxmlformats.org/drawingml/2006/main" xmlns:r="http://schemas.openxmlformats.org/officeDocument/2006/relationships" xmlns:p="http://schemas.openxmlformats.org/presentationml/2006/main" show="0">
+  <p:cSld>
+    <p:spTree>
+      <p:nvGrpSpPr>
+        <p:cNvPr id="1" name=""/>
+        <p:cNvGrpSpPr/>
+        <p:nvPr/>
+      </p:nvGrpSpPr>
+      <p:grpSpPr>
+        <a:xfrm>
+          <a:off x="0" y="0"/>
+          <a:ext cx="0" cy="0"/>
+          <a:chOff x="0" y="0"/>
+          <a:chExt cx="0" cy="0"/>
+        </a:xfrm>
+      </p:grpSpPr>
+      <p:sp>
+        <p:nvSpPr>
+          <p:cNvPr id="2" name="標題 1">
+            <a:extLst>
+              <a:ext uri="{FF2B5EF4-FFF2-40B4-BE49-F238E27FC236}">
+                <a16:creationId xmlns:a16="http://schemas.microsoft.com/office/drawing/2014/main" id="{2DE3768E-4ECB-4AFC-9D38-D8D0C87616D5}"/>
+              </a:ext>
+            </a:extLst>
+          </p:cNvPr>
+          <p:cNvSpPr>
+            <a:spLocks noGrp="1"/>
+          </p:cNvSpPr>
+          <p:nvPr>
+            <p:ph type="title"/>
+          </p:nvPr>
+        </p:nvSpPr>
+        <p:spPr/>
+        <p:txBody>
+          <a:bodyPr/>
+          <a:lstStyle/>
+          <a:p>
+            <a:pPr algn="l"/>
+            <a:r>
               <a:rPr lang="zh-TW" altLang="en-US" dirty="0">
                 <a:latin typeface="標楷體" panose="03000509000000000000" pitchFamily="65" charset="-120"/>
                 <a:ea typeface="標楷體" panose="03000509000000000000" pitchFamily="65" charset="-120"/>
@@ -11322,7 +11979,7 @@
 </file>
 
 <file path=ppt/slides/slide6.xml><?xml version="1.0" encoding="utf-8"?>
-<p:sld xmlns:a="http://schemas.openxmlformats.org/drawingml/2006/main" xmlns:r="http://schemas.openxmlformats.org/officeDocument/2006/relationships" xmlns:p="http://schemas.openxmlformats.org/presentationml/2006/main">
+<p:sld xmlns:a="http://schemas.openxmlformats.org/drawingml/2006/main" xmlns:r="http://schemas.openxmlformats.org/officeDocument/2006/relationships" xmlns:p="http://schemas.openxmlformats.org/presentationml/2006/main" show="0">
   <p:cSld>
     <p:spTree>
       <p:nvGrpSpPr>
@@ -11709,51 +12366,486 @@
           </a:p>
         </p:txBody>
       </p:sp>
-      <p:sp>
-        <p:nvSpPr>
-          <p:cNvPr id="3" name="內容版面配置區 2">
+      <mc:AlternateContent xmlns:mc="http://schemas.openxmlformats.org/markup-compatibility/2006">
+        <mc:Choice xmlns:a14="http://schemas.microsoft.com/office/drawing/2010/main" Requires="a14">
+          <p:sp>
+            <p:nvSpPr>
+              <p:cNvPr id="3" name="內容版面配置區 2">
+                <a:extLst>
+                  <a:ext uri="{FF2B5EF4-FFF2-40B4-BE49-F238E27FC236}">
+                    <a16:creationId xmlns:a16="http://schemas.microsoft.com/office/drawing/2014/main" id="{140B7DEE-05AE-4C0B-879F-0C5512A4BDD8}"/>
+                  </a:ext>
+                </a:extLst>
+              </p:cNvPr>
+              <p:cNvSpPr>
+                <a:spLocks noGrp="1"/>
+              </p:cNvSpPr>
+              <p:nvPr>
+                <p:ph idx="1"/>
+              </p:nvPr>
+            </p:nvSpPr>
+            <p:spPr/>
+            <p:txBody>
+              <a:bodyPr/>
+              <a:lstStyle/>
+              <a:p>
+                <a:r>
+                  <a:rPr lang="zh-TW" altLang="en-US" dirty="0">
+                    <a:latin typeface="Times New Roman" panose="02020603050405020304" pitchFamily="18" charset="0"/>
+                    <a:ea typeface="標楷體" panose="03000509000000000000" pitchFamily="65" charset="-120"/>
+                    <a:cs typeface="Times New Roman" panose="02020603050405020304" pitchFamily="18" charset="0"/>
+                  </a:rPr>
+                  <a:t>找出</a:t>
+                </a:r>
+                <a:r>
+                  <a:rPr lang="en-US" altLang="zh-TW" dirty="0" err="1">
+                    <a:latin typeface="Times New Roman" panose="02020603050405020304" pitchFamily="18" charset="0"/>
+                    <a:ea typeface="標楷體" panose="03000509000000000000" pitchFamily="65" charset="-120"/>
+                    <a:cs typeface="Times New Roman" panose="02020603050405020304" pitchFamily="18" charset="0"/>
+                  </a:rPr>
+                  <a:t>tf-idf</a:t>
+                </a:r>
+                <a:r>
+                  <a:rPr lang="zh-TW" altLang="en-US" dirty="0">
+                    <a:latin typeface="Times New Roman" panose="02020603050405020304" pitchFamily="18" charset="0"/>
+                    <a:ea typeface="標楷體" panose="03000509000000000000" pitchFamily="65" charset="-120"/>
+                    <a:cs typeface="Times New Roman" panose="02020603050405020304" pitchFamily="18" charset="0"/>
+                  </a:rPr>
+                  <a:t>前</a:t>
+                </a:r>
+                <a:r>
+                  <a:rPr lang="en-US" altLang="zh-TW" dirty="0">
+                    <a:latin typeface="Times New Roman" panose="02020603050405020304" pitchFamily="18" charset="0"/>
+                    <a:ea typeface="標楷體" panose="03000509000000000000" pitchFamily="65" charset="-120"/>
+                    <a:cs typeface="Times New Roman" panose="02020603050405020304" pitchFamily="18" charset="0"/>
+                  </a:rPr>
+                  <a:t>10</a:t>
+                </a:r>
+                <a:r>
+                  <a:rPr lang="zh-TW" altLang="en-US" dirty="0">
+                    <a:latin typeface="Times New Roman" panose="02020603050405020304" pitchFamily="18" charset="0"/>
+                    <a:ea typeface="標楷體" panose="03000509000000000000" pitchFamily="65" charset="-120"/>
+                    <a:cs typeface="Times New Roman" panose="02020603050405020304" pitchFamily="18" charset="0"/>
+                  </a:rPr>
+                  <a:t>名的詞彙</a:t>
+                </a:r>
+                <a:r>
+                  <a:rPr lang="en-US" altLang="zh-TW" dirty="0">
+                    <a:latin typeface="Times New Roman" panose="02020603050405020304" pitchFamily="18" charset="0"/>
+                    <a:ea typeface="標楷體" panose="03000509000000000000" pitchFamily="65" charset="-120"/>
+                    <a:cs typeface="Times New Roman" panose="02020603050405020304" pitchFamily="18" charset="0"/>
+                  </a:rPr>
+                  <a:t>(</a:t>
+                </a:r>
+                <a:r>
+                  <a:rPr lang="zh-TW" altLang="en-US" dirty="0">
+                    <a:latin typeface="Times New Roman" panose="02020603050405020304" pitchFamily="18" charset="0"/>
+                    <a:ea typeface="標楷體" panose="03000509000000000000" pitchFamily="65" charset="-120"/>
+                    <a:cs typeface="Times New Roman" panose="02020603050405020304" pitchFamily="18" charset="0"/>
+                  </a:rPr>
+                  <a:t>每篇文章</a:t>
+                </a:r>
+                <a:r>
+                  <a:rPr lang="en-US" altLang="zh-TW" dirty="0">
+                    <a:latin typeface="Times New Roman" panose="02020603050405020304" pitchFamily="18" charset="0"/>
+                    <a:ea typeface="標楷體" panose="03000509000000000000" pitchFamily="65" charset="-120"/>
+                    <a:cs typeface="Times New Roman" panose="02020603050405020304" pitchFamily="18" charset="0"/>
+                  </a:rPr>
+                  <a:t>)</a:t>
+                </a:r>
+              </a:p>
+              <a:p>
+                <a:r>
+                  <a:rPr lang="zh-TW" altLang="en-US" dirty="0">
+                    <a:latin typeface="Times New Roman" panose="02020603050405020304" pitchFamily="18" charset="0"/>
+                    <a:ea typeface="標楷體" panose="03000509000000000000" pitchFamily="65" charset="-120"/>
+                    <a:cs typeface="Times New Roman" panose="02020603050405020304" pitchFamily="18" charset="0"/>
+                  </a:rPr>
+                  <a:t>將詞彙成為核心詞彙</a:t>
+                </a:r>
+                <a:r>
+                  <a:rPr lang="en-US" altLang="zh-TW" dirty="0">
+                    <a:latin typeface="Times New Roman" panose="02020603050405020304" pitchFamily="18" charset="0"/>
+                    <a:ea typeface="標楷體" panose="03000509000000000000" pitchFamily="65" charset="-120"/>
+                    <a:cs typeface="Times New Roman" panose="02020603050405020304" pitchFamily="18" charset="0"/>
+                  </a:rPr>
+                  <a:t>(</a:t>
+                </a:r>
+                <a:r>
+                  <a:rPr lang="zh-TW" altLang="en-US" dirty="0">
+                    <a:latin typeface="Times New Roman" panose="02020603050405020304" pitchFamily="18" charset="0"/>
+                    <a:ea typeface="標楷體" panose="03000509000000000000" pitchFamily="65" charset="-120"/>
+                    <a:cs typeface="Times New Roman" panose="02020603050405020304" pitchFamily="18" charset="0"/>
+                  </a:rPr>
+                  <a:t>前</a:t>
+                </a:r>
+                <a:r>
+                  <a:rPr lang="en-US" altLang="zh-TW" dirty="0">
+                    <a:latin typeface="Times New Roman" panose="02020603050405020304" pitchFamily="18" charset="0"/>
+                    <a:ea typeface="標楷體" panose="03000509000000000000" pitchFamily="65" charset="-120"/>
+                    <a:cs typeface="Times New Roman" panose="02020603050405020304" pitchFamily="18" charset="0"/>
+                  </a:rPr>
+                  <a:t>10</a:t>
+                </a:r>
+                <a:r>
+                  <a:rPr lang="zh-TW" altLang="en-US" dirty="0">
+                    <a:latin typeface="Times New Roman" panose="02020603050405020304" pitchFamily="18" charset="0"/>
+                    <a:ea typeface="標楷體" panose="03000509000000000000" pitchFamily="65" charset="-120"/>
+                    <a:cs typeface="Times New Roman" panose="02020603050405020304" pitchFamily="18" charset="0"/>
+                  </a:rPr>
+                  <a:t>名</a:t>
+                </a:r>
+                <a:r>
+                  <a:rPr lang="en-US" altLang="zh-TW" dirty="0">
+                    <a:latin typeface="Times New Roman" panose="02020603050405020304" pitchFamily="18" charset="0"/>
+                    <a:ea typeface="標楷體" panose="03000509000000000000" pitchFamily="65" charset="-120"/>
+                    <a:cs typeface="Times New Roman" panose="02020603050405020304" pitchFamily="18" charset="0"/>
+                  </a:rPr>
+                  <a:t>)</a:t>
+                </a:r>
+                <a:r>
+                  <a:rPr lang="zh-TW" altLang="en-US" dirty="0">
+                    <a:latin typeface="Times New Roman" panose="02020603050405020304" pitchFamily="18" charset="0"/>
+                    <a:ea typeface="標楷體" panose="03000509000000000000" pitchFamily="65" charset="-120"/>
+                    <a:cs typeface="Times New Roman" panose="02020603050405020304" pitchFamily="18" charset="0"/>
+                  </a:rPr>
+                  <a:t>的篇數進行排名</a:t>
+                </a:r>
+                <a:endParaRPr lang="en-US" altLang="zh-TW" dirty="0">
+                  <a:latin typeface="Times New Roman" panose="02020603050405020304" pitchFamily="18" charset="0"/>
+                  <a:ea typeface="標楷體" panose="03000509000000000000" pitchFamily="65" charset="-120"/>
+                  <a:cs typeface="Times New Roman" panose="02020603050405020304" pitchFamily="18" charset="0"/>
+                </a:endParaRPr>
+              </a:p>
+              <a:p>
+                <a:r>
+                  <a:rPr lang="zh-TW" altLang="en-US" dirty="0">
+                    <a:latin typeface="Times New Roman" panose="02020603050405020304" pitchFamily="18" charset="0"/>
+                    <a:ea typeface="標楷體" panose="03000509000000000000" pitchFamily="65" charset="-120"/>
+                    <a:cs typeface="Times New Roman" panose="02020603050405020304" pitchFamily="18" charset="0"/>
+                  </a:rPr>
+                  <a:t>畫出折線圖</a:t>
+                </a:r>
+                <a:endParaRPr lang="en-US" altLang="zh-TW" dirty="0">
+                  <a:latin typeface="Times New Roman" panose="02020603050405020304" pitchFamily="18" charset="0"/>
+                  <a:ea typeface="標楷體" panose="03000509000000000000" pitchFamily="65" charset="-120"/>
+                  <a:cs typeface="Times New Roman" panose="02020603050405020304" pitchFamily="18" charset="0"/>
+                </a:endParaRPr>
+              </a:p>
+              <a:p>
+                <a:pPr lvl="1"/>
+                <a:r>
+                  <a:rPr lang="zh-TW" altLang="en-US" dirty="0">
+                    <a:latin typeface="Times New Roman" panose="02020603050405020304" pitchFamily="18" charset="0"/>
+                    <a:ea typeface="標楷體" panose="03000509000000000000" pitchFamily="65" charset="-120"/>
+                    <a:cs typeface="Times New Roman" panose="02020603050405020304" pitchFamily="18" charset="0"/>
+                  </a:rPr>
+                  <a:t>Ｘ軸為時間</a:t>
+                </a:r>
+                <a:r>
+                  <a:rPr lang="en-US" altLang="zh-TW" dirty="0">
+                    <a:latin typeface="Times New Roman" panose="02020603050405020304" pitchFamily="18" charset="0"/>
+                    <a:ea typeface="標楷體" panose="03000509000000000000" pitchFamily="65" charset="-120"/>
+                    <a:cs typeface="Times New Roman" panose="02020603050405020304" pitchFamily="18" charset="0"/>
+                  </a:rPr>
+                  <a:t>(</a:t>
+                </a:r>
+                <a:r>
+                  <a:rPr lang="zh-TW" altLang="en-US" dirty="0">
+                    <a:latin typeface="Times New Roman" panose="02020603050405020304" pitchFamily="18" charset="0"/>
+                    <a:ea typeface="標楷體" panose="03000509000000000000" pitchFamily="65" charset="-120"/>
+                    <a:cs typeface="Times New Roman" panose="02020603050405020304" pitchFamily="18" charset="0"/>
+                  </a:rPr>
+                  <a:t>年</a:t>
+                </a:r>
+                <a:r>
+                  <a:rPr lang="en-US" altLang="zh-TW" dirty="0">
+                    <a:latin typeface="Times New Roman" panose="02020603050405020304" pitchFamily="18" charset="0"/>
+                    <a:ea typeface="標楷體" panose="03000509000000000000" pitchFamily="65" charset="-120"/>
+                    <a:cs typeface="Times New Roman" panose="02020603050405020304" pitchFamily="18" charset="0"/>
+                  </a:rPr>
+                  <a:t>/</a:t>
+                </a:r>
+                <a:r>
+                  <a:rPr lang="zh-TW" altLang="en-US" dirty="0">
+                    <a:latin typeface="Times New Roman" panose="02020603050405020304" pitchFamily="18" charset="0"/>
+                    <a:ea typeface="標楷體" panose="03000509000000000000" pitchFamily="65" charset="-120"/>
+                    <a:cs typeface="Times New Roman" panose="02020603050405020304" pitchFamily="18" charset="0"/>
+                  </a:rPr>
+                  <a:t>半年</a:t>
+                </a:r>
+                <a:r>
+                  <a:rPr lang="en-US" altLang="zh-TW" dirty="0">
+                    <a:latin typeface="Times New Roman" panose="02020603050405020304" pitchFamily="18" charset="0"/>
+                    <a:ea typeface="標楷體" panose="03000509000000000000" pitchFamily="65" charset="-120"/>
+                    <a:cs typeface="Times New Roman" panose="02020603050405020304" pitchFamily="18" charset="0"/>
+                  </a:rPr>
+                  <a:t>/</a:t>
+                </a:r>
+                <a:r>
+                  <a:rPr lang="zh-TW" altLang="en-US" dirty="0">
+                    <a:latin typeface="Times New Roman" panose="02020603050405020304" pitchFamily="18" charset="0"/>
+                    <a:ea typeface="標楷體" panose="03000509000000000000" pitchFamily="65" charset="-120"/>
+                    <a:cs typeface="Times New Roman" panose="02020603050405020304" pitchFamily="18" charset="0"/>
+                  </a:rPr>
+                  <a:t>季</a:t>
+                </a:r>
+                <a:r>
+                  <a:rPr lang="en-US" altLang="zh-TW" dirty="0">
+                    <a:latin typeface="Times New Roman" panose="02020603050405020304" pitchFamily="18" charset="0"/>
+                    <a:ea typeface="標楷體" panose="03000509000000000000" pitchFamily="65" charset="-120"/>
+                    <a:cs typeface="Times New Roman" panose="02020603050405020304" pitchFamily="18" charset="0"/>
+                  </a:rPr>
+                  <a:t>)</a:t>
+                </a:r>
+                <a:r>
+                  <a:rPr lang="zh-TW" altLang="en-US" dirty="0">
+                    <a:latin typeface="Times New Roman" panose="02020603050405020304" pitchFamily="18" charset="0"/>
+                    <a:ea typeface="標楷體" panose="03000509000000000000" pitchFamily="65" charset="-120"/>
+                    <a:cs typeface="Times New Roman" panose="02020603050405020304" pitchFamily="18" charset="0"/>
+                  </a:rPr>
+                  <a:t>，</a:t>
+                </a:r>
+                <a:r>
+                  <a:rPr lang="en-US" altLang="zh-TW" dirty="0">
+                    <a:latin typeface="Times New Roman" panose="02020603050405020304" pitchFamily="18" charset="0"/>
+                    <a:ea typeface="標楷體" panose="03000509000000000000" pitchFamily="65" charset="-120"/>
+                    <a:cs typeface="Times New Roman" panose="02020603050405020304" pitchFamily="18" charset="0"/>
+                  </a:rPr>
+                  <a:t>Y</a:t>
+                </a:r>
+                <a:r>
+                  <a:rPr lang="zh-TW" altLang="en-US" dirty="0">
+                    <a:latin typeface="Times New Roman" panose="02020603050405020304" pitchFamily="18" charset="0"/>
+                    <a:ea typeface="標楷體" panose="03000509000000000000" pitchFamily="65" charset="-120"/>
+                    <a:cs typeface="Times New Roman" panose="02020603050405020304" pitchFamily="18" charset="0"/>
+                  </a:rPr>
+                  <a:t>軸為成為核心詞彙的佔比</a:t>
+                </a:r>
+                <a:r>
+                  <a:rPr lang="en-US" altLang="zh-TW" dirty="0">
+                    <a:latin typeface="Times New Roman" panose="02020603050405020304" pitchFamily="18" charset="0"/>
+                    <a:ea typeface="標楷體" panose="03000509000000000000" pitchFamily="65" charset="-120"/>
+                    <a:cs typeface="Times New Roman" panose="02020603050405020304" pitchFamily="18" charset="0"/>
+                  </a:rPr>
+                  <a:t>(%)</a:t>
+                </a:r>
+              </a:p>
+              <a:p>
+                <a:pPr lvl="1"/>
+                <a14:m>
+                  <m:oMath xmlns:m="http://schemas.openxmlformats.org/officeDocument/2006/math">
+                    <m:r>
+                      <a:rPr lang="zh-TW" altLang="en-US" i="1" dirty="0">
+                        <a:latin typeface="Cambria Math" panose="02040503050406030204" pitchFamily="18" charset="0"/>
+                        <a:ea typeface="標楷體" panose="03000509000000000000" pitchFamily="65" charset="-120"/>
+                      </a:rPr>
+                      <m:t>成為核心詞彙</m:t>
+                    </m:r>
+                    <m:r>
+                      <a:rPr lang="zh-TW" altLang="en-US" i="1" dirty="0">
+                        <a:latin typeface="Cambria Math" panose="02040503050406030204" pitchFamily="18" charset="0"/>
+                        <a:ea typeface="標楷體" panose="03000509000000000000" pitchFamily="65" charset="-120"/>
+                      </a:rPr>
+                      <m:t>的佔比</m:t>
+                    </m:r>
+                    <m:r>
+                      <a:rPr lang="en-US" altLang="zh-TW" i="1" dirty="0">
+                        <a:latin typeface="Cambria Math" panose="02040503050406030204" pitchFamily="18" charset="0"/>
+                        <a:ea typeface="標楷體" panose="03000509000000000000" pitchFamily="65" charset="-120"/>
+                      </a:rPr>
+                      <m:t>=</m:t>
+                    </m:r>
+                    <m:f>
+                      <m:fPr>
+                        <m:ctrlPr>
+                          <a:rPr lang="en-US" altLang="zh-TW" i="1" smtClean="0">
+                            <a:latin typeface="Cambria Math" panose="02040503050406030204" pitchFamily="18" charset="0"/>
+                            <a:ea typeface="標楷體" panose="03000509000000000000" pitchFamily="65" charset="-120"/>
+                          </a:rPr>
+                        </m:ctrlPr>
+                      </m:fPr>
+                      <m:num>
+                        <m:r>
+                          <a:rPr lang="zh-TW" altLang="en-US" i="1">
+                            <a:latin typeface="Cambria Math" panose="02040503050406030204" pitchFamily="18" charset="0"/>
+                            <a:ea typeface="標楷體" panose="03000509000000000000" pitchFamily="65" charset="-120"/>
+                          </a:rPr>
+                          <m:t>成為</m:t>
+                        </m:r>
+                        <m:r>
+                          <a:rPr lang="zh-TW" altLang="en-US" i="1">
+                            <a:latin typeface="Cambria Math" panose="02040503050406030204" pitchFamily="18" charset="0"/>
+                            <a:ea typeface="標楷體" panose="03000509000000000000" pitchFamily="65" charset="-120"/>
+                          </a:rPr>
+                          <m:t>核心</m:t>
+                        </m:r>
+                        <m:r>
+                          <a:rPr lang="zh-TW" altLang="en-US" i="1" smtClean="0">
+                            <a:latin typeface="Cambria Math" panose="02040503050406030204" pitchFamily="18" charset="0"/>
+                            <a:ea typeface="標楷體" panose="03000509000000000000" pitchFamily="65" charset="-120"/>
+                          </a:rPr>
+                          <m:t>詞彙</m:t>
+                        </m:r>
+                        <m:r>
+                          <a:rPr lang="zh-TW" altLang="en-US" i="1">
+                            <a:latin typeface="Cambria Math" panose="02040503050406030204" pitchFamily="18" charset="0"/>
+                            <a:ea typeface="標楷體" panose="03000509000000000000" pitchFamily="65" charset="-120"/>
+                          </a:rPr>
+                          <m:t>的</m:t>
+                        </m:r>
+                        <m:r>
+                          <a:rPr lang="zh-TW" altLang="en-US" i="1" smtClean="0">
+                            <a:latin typeface="Cambria Math" panose="02040503050406030204" pitchFamily="18" charset="0"/>
+                            <a:ea typeface="標楷體" panose="03000509000000000000" pitchFamily="65" charset="-120"/>
+                          </a:rPr>
+                          <m:t>篇數</m:t>
+                        </m:r>
+                      </m:num>
+                      <m:den>
+                        <m:r>
+                          <a:rPr lang="zh-TW" altLang="en-US" i="1" smtClean="0">
+                            <a:latin typeface="Cambria Math" panose="02040503050406030204" pitchFamily="18" charset="0"/>
+                            <a:ea typeface="標楷體" panose="03000509000000000000" pitchFamily="65" charset="-120"/>
+                          </a:rPr>
+                          <m:t>當期</m:t>
+                        </m:r>
+                        <m:r>
+                          <a:rPr lang="zh-TW" altLang="en-US" i="1" smtClean="0">
+                            <a:latin typeface="Cambria Math" panose="02040503050406030204" pitchFamily="18" charset="0"/>
+                            <a:ea typeface="標楷體" panose="03000509000000000000" pitchFamily="65" charset="-120"/>
+                          </a:rPr>
+                          <m:t>的總篇數</m:t>
+                        </m:r>
+                      </m:den>
+                    </m:f>
+                  </m:oMath>
+                </a14:m>
+                <a:endParaRPr lang="en-US" altLang="zh-TW" dirty="0">
+                  <a:latin typeface="Times New Roman" panose="02020603050405020304" pitchFamily="18" charset="0"/>
+                  <a:ea typeface="標楷體" panose="03000509000000000000" pitchFamily="65" charset="-120"/>
+                  <a:cs typeface="Times New Roman" panose="02020603050405020304" pitchFamily="18" charset="0"/>
+                </a:endParaRPr>
+              </a:p>
+            </p:txBody>
+          </p:sp>
+        </mc:Choice>
+        <mc:Fallback>
+          <p:sp>
+            <p:nvSpPr>
+              <p:cNvPr id="3" name="內容版面配置區 2">
+                <a:extLst>
+                  <a:ext uri="{FF2B5EF4-FFF2-40B4-BE49-F238E27FC236}">
+                    <a16:creationId xmlns:a16="http://schemas.microsoft.com/office/drawing/2014/main" id="{140B7DEE-05AE-4C0B-879F-0C5512A4BDD8}"/>
+                  </a:ext>
+                </a:extLst>
+              </p:cNvPr>
+              <p:cNvSpPr>
+                <a:spLocks noGrp="1" noRot="1" noChangeAspect="1" noMove="1" noResize="1" noEditPoints="1" noAdjustHandles="1" noChangeArrowheads="1" noChangeShapeType="1" noTextEdit="1"/>
+              </p:cNvSpPr>
+              <p:nvPr>
+                <p:ph idx="1"/>
+              </p:nvPr>
+            </p:nvSpPr>
+            <p:spPr>
+              <a:blipFill>
+                <a:blip r:embed="rId2"/>
+                <a:stretch>
+                  <a:fillRect l="-1144" t="-2569"/>
+                </a:stretch>
+              </a:blipFill>
+            </p:spPr>
+            <p:txBody>
+              <a:bodyPr/>
+              <a:lstStyle/>
+              <a:p>
+                <a:r>
+                  <a:rPr lang="zh-TW" altLang="en-US">
+                    <a:noFill/>
+                  </a:rPr>
+                  <a:t> </a:t>
+                </a:r>
+              </a:p>
+            </p:txBody>
+          </p:sp>
+        </mc:Fallback>
+      </mc:AlternateContent>
+      <p:pic>
+        <p:nvPicPr>
+          <p:cNvPr id="7" name="圖片 6">
             <a:extLst>
               <a:ext uri="{FF2B5EF4-FFF2-40B4-BE49-F238E27FC236}">
-                <a16:creationId xmlns:a16="http://schemas.microsoft.com/office/drawing/2014/main" id="{140B7DEE-05AE-4C0B-879F-0C5512A4BDD8}"/>
+                <a16:creationId xmlns:a16="http://schemas.microsoft.com/office/drawing/2014/main" id="{4DBE36EB-2804-4D38-8A85-A81E015DC345}"/>
               </a:ext>
             </a:extLst>
           </p:cNvPr>
-          <p:cNvSpPr>
-            <a:spLocks noGrp="1"/>
-          </p:cNvSpPr>
-          <p:nvPr>
-            <p:ph idx="1"/>
-          </p:nvPr>
-        </p:nvSpPr>
-        <p:spPr/>
-        <p:txBody>
-          <a:bodyPr/>
+          <p:cNvPicPr>
+            <a:picLocks noChangeAspect="1"/>
+          </p:cNvPicPr>
+          <p:nvPr/>
+        </p:nvPicPr>
+        <p:blipFill>
+          <a:blip r:embed="rId3"/>
+          <a:stretch>
+            <a:fillRect/>
+          </a:stretch>
+        </p:blipFill>
+        <p:spPr>
+          <a:xfrm>
+            <a:off x="8528176" y="2431535"/>
+            <a:ext cx="1538613" cy="3788282"/>
+          </a:xfrm>
+          <a:prstGeom prst="rect">
+            <a:avLst/>
+          </a:prstGeom>
+        </p:spPr>
+      </p:pic>
+      <p:sp>
+        <p:nvSpPr>
+          <p:cNvPr id="9" name="文字方塊 8">
+            <a:extLst>
+              <a:ext uri="{FF2B5EF4-FFF2-40B4-BE49-F238E27FC236}">
+                <a16:creationId xmlns:a16="http://schemas.microsoft.com/office/drawing/2014/main" id="{17709886-1310-4F75-BA80-F64C610255A1}"/>
+              </a:ext>
+            </a:extLst>
+          </p:cNvPr>
+          <p:cNvSpPr txBox="1"/>
+          <p:nvPr/>
+        </p:nvSpPr>
+        <p:spPr>
+          <a:xfrm>
+            <a:off x="10293291" y="2734811"/>
+            <a:ext cx="1367406" cy="1323439"/>
+          </a:xfrm>
+          <a:prstGeom prst="rect">
+            <a:avLst/>
+          </a:prstGeom>
+          <a:noFill/>
+        </p:spPr>
+        <p:txBody>
+          <a:bodyPr wrap="square" rtlCol="0">
+            <a:spAutoFit/>
+          </a:bodyPr>
           <a:lstStyle/>
           <a:p>
             <a:r>
-              <a:rPr lang="zh-TW" altLang="en-US" dirty="0">
-                <a:latin typeface="標楷體" panose="03000509000000000000" pitchFamily="65" charset="-120"/>
-                <a:ea typeface="標楷體" panose="03000509000000000000" pitchFamily="65" charset="-120"/>
-              </a:rPr>
-              <a:t>找出</a:t>
-            </a:r>
-            <a:r>
-              <a:rPr lang="en-US" altLang="zh-TW" dirty="0" err="1">
+              <a:rPr lang="en-US" altLang="zh-TW" sz="2000" dirty="0">
                 <a:latin typeface="Times New Roman" panose="02020603050405020304" pitchFamily="18" charset="0"/>
                 <a:ea typeface="標楷體" panose="03000509000000000000" pitchFamily="65" charset="-120"/>
                 <a:cs typeface="Times New Roman" panose="02020603050405020304" pitchFamily="18" charset="0"/>
               </a:rPr>
-              <a:t>tf-idf</a:t>
-            </a:r>
-            <a:r>
-              <a:rPr lang="zh-TW" altLang="en-US" dirty="0">
-                <a:latin typeface="標楷體" panose="03000509000000000000" pitchFamily="65" charset="-120"/>
+              <a:t>2019~2025</a:t>
+            </a:r>
+            <a:r>
+              <a:rPr lang="zh-TW" altLang="en-US" sz="2000" dirty="0">
+                <a:latin typeface="Times New Roman" panose="02020603050405020304" pitchFamily="18" charset="0"/>
                 <a:ea typeface="標楷體" panose="03000509000000000000" pitchFamily="65" charset="-120"/>
+                <a:cs typeface="Times New Roman" panose="02020603050405020304" pitchFamily="18" charset="0"/>
               </a:rPr>
-              <a:t>前</a:t>
-            </a:r>
-            <a:r>
-              <a:rPr lang="en-US" altLang="zh-TW" dirty="0">
+              <a:t>的總年度前</a:t>
+            </a:r>
+            <a:r>
+              <a:rPr lang="en-US" altLang="zh-TW" sz="2000" dirty="0">
                 <a:latin typeface="Times New Roman" panose="02020603050405020304" pitchFamily="18" charset="0"/>
                 <a:ea typeface="標楷體" panose="03000509000000000000" pitchFamily="65" charset="-120"/>
                 <a:cs typeface="Times New Roman" panose="02020603050405020304" pitchFamily="18" charset="0"/>
@@ -11761,102 +12853,59 @@
               <a:t>10</a:t>
             </a:r>
             <a:r>
-              <a:rPr lang="zh-TW" altLang="en-US" dirty="0">
-                <a:latin typeface="標楷體" panose="03000509000000000000" pitchFamily="65" charset="-120"/>
-                <a:ea typeface="標楷體" panose="03000509000000000000" pitchFamily="65" charset="-120"/>
-              </a:rPr>
-              <a:t>名的詞彙</a:t>
-            </a:r>
-            <a:r>
-              <a:rPr lang="en-US" altLang="zh-TW" dirty="0">
-                <a:latin typeface="標楷體" panose="03000509000000000000" pitchFamily="65" charset="-120"/>
-                <a:ea typeface="標楷體" panose="03000509000000000000" pitchFamily="65" charset="-120"/>
-              </a:rPr>
-              <a:t>(</a:t>
-            </a:r>
-            <a:r>
-              <a:rPr lang="zh-TW" altLang="en-US" dirty="0">
-                <a:latin typeface="標楷體" panose="03000509000000000000" pitchFamily="65" charset="-120"/>
-                <a:ea typeface="標楷體" panose="03000509000000000000" pitchFamily="65" charset="-120"/>
-              </a:rPr>
-              <a:t>每篇文章</a:t>
-            </a:r>
-            <a:r>
-              <a:rPr lang="en-US" altLang="zh-TW" dirty="0">
-                <a:latin typeface="標楷體" panose="03000509000000000000" pitchFamily="65" charset="-120"/>
-                <a:ea typeface="標楷體" panose="03000509000000000000" pitchFamily="65" charset="-120"/>
-              </a:rPr>
-              <a:t>)</a:t>
-            </a:r>
-          </a:p>
-          <a:p>
-            <a:r>
-              <a:rPr lang="zh-TW" altLang="en-US" dirty="0">
-                <a:latin typeface="標楷體" panose="03000509000000000000" pitchFamily="65" charset="-120"/>
-                <a:ea typeface="標楷體" panose="03000509000000000000" pitchFamily="65" charset="-120"/>
-              </a:rPr>
-              <a:t>將詞彙成為核心詞彙</a:t>
-            </a:r>
-            <a:r>
-              <a:rPr lang="en-US" altLang="zh-TW" dirty="0">
-                <a:latin typeface="標楷體" panose="03000509000000000000" pitchFamily="65" charset="-120"/>
-                <a:ea typeface="標楷體" panose="03000509000000000000" pitchFamily="65" charset="-120"/>
-              </a:rPr>
-              <a:t>(</a:t>
-            </a:r>
-            <a:r>
-              <a:rPr lang="zh-TW" altLang="en-US" dirty="0">
-                <a:latin typeface="標楷體" panose="03000509000000000000" pitchFamily="65" charset="-120"/>
-                <a:ea typeface="標楷體" panose="03000509000000000000" pitchFamily="65" charset="-120"/>
-              </a:rPr>
-              <a:t>前</a:t>
-            </a:r>
-            <a:r>
-              <a:rPr lang="en-US" altLang="zh-TW" dirty="0">
+              <a:rPr lang="zh-TW" altLang="en-US" sz="2000" dirty="0">
                 <a:latin typeface="Times New Roman" panose="02020603050405020304" pitchFamily="18" charset="0"/>
                 <a:ea typeface="標楷體" panose="03000509000000000000" pitchFamily="65" charset="-120"/>
                 <a:cs typeface="Times New Roman" panose="02020603050405020304" pitchFamily="18" charset="0"/>
               </a:rPr>
-              <a:t>10</a:t>
-            </a:r>
-            <a:r>
-              <a:rPr lang="zh-TW" altLang="en-US" dirty="0">
-                <a:latin typeface="標楷體" panose="03000509000000000000" pitchFamily="65" charset="-120"/>
-                <a:ea typeface="標楷體" panose="03000509000000000000" pitchFamily="65" charset="-120"/>
-              </a:rPr>
-              <a:t>名</a:t>
-            </a:r>
-            <a:r>
-              <a:rPr lang="en-US" altLang="zh-TW" dirty="0">
-                <a:latin typeface="標楷體" panose="03000509000000000000" pitchFamily="65" charset="-120"/>
-                <a:ea typeface="標楷體" panose="03000509000000000000" pitchFamily="65" charset="-120"/>
-              </a:rPr>
-              <a:t>)</a:t>
-            </a:r>
-            <a:r>
-              <a:rPr lang="zh-TW" altLang="en-US" dirty="0">
-                <a:latin typeface="標楷體" panose="03000509000000000000" pitchFamily="65" charset="-120"/>
-                <a:ea typeface="標楷體" panose="03000509000000000000" pitchFamily="65" charset="-120"/>
-              </a:rPr>
-              <a:t>的篇數進行排名</a:t>
-            </a:r>
-            <a:endParaRPr lang="en-US" altLang="zh-TW" dirty="0">
-              <a:latin typeface="標楷體" panose="03000509000000000000" pitchFamily="65" charset="-120"/>
-              <a:ea typeface="標楷體" panose="03000509000000000000" pitchFamily="65" charset="-120"/>
-            </a:endParaRPr>
-          </a:p>
-          <a:p>
-            <a:r>
-              <a:rPr lang="zh-TW" altLang="en-US" dirty="0">
-                <a:latin typeface="標楷體" panose="03000509000000000000" pitchFamily="65" charset="-120"/>
-                <a:ea typeface="標楷體" panose="03000509000000000000" pitchFamily="65" charset="-120"/>
-              </a:rPr>
-              <a:t>取排名前三當作年度關鍵字</a:t>
-            </a:r>
-            <a:endParaRPr lang="en-US" altLang="zh-TW" dirty="0">
-              <a:latin typeface="標楷體" panose="03000509000000000000" pitchFamily="65" charset="-120"/>
-              <a:ea typeface="標楷體" panose="03000509000000000000" pitchFamily="65" charset="-120"/>
-            </a:endParaRPr>
+              <a:t>核心詞彙</a:t>
+            </a:r>
+          </a:p>
+        </p:txBody>
+      </p:sp>
+      <p:sp>
+        <p:nvSpPr>
+          <p:cNvPr id="10" name="箭號: 向左 9">
+            <a:extLst>
+              <a:ext uri="{FF2B5EF4-FFF2-40B4-BE49-F238E27FC236}">
+                <a16:creationId xmlns:a16="http://schemas.microsoft.com/office/drawing/2014/main" id="{70375702-19FF-479F-84D3-5872FA9B9301}"/>
+              </a:ext>
+            </a:extLst>
+          </p:cNvPr>
+          <p:cNvSpPr/>
+          <p:nvPr/>
+        </p:nvSpPr>
+        <p:spPr>
+          <a:xfrm>
+            <a:off x="10087411" y="3255279"/>
+            <a:ext cx="226502" cy="159391"/>
+          </a:xfrm>
+          <a:prstGeom prst="leftArrow">
+            <a:avLst/>
+          </a:prstGeom>
+        </p:spPr>
+        <p:style>
+          <a:lnRef idx="2">
+            <a:schemeClr val="accent1">
+              <a:shade val="50000"/>
+            </a:schemeClr>
+          </a:lnRef>
+          <a:fillRef idx="1">
+            <a:schemeClr val="accent1"/>
+          </a:fillRef>
+          <a:effectRef idx="0">
+            <a:schemeClr val="accent1"/>
+          </a:effectRef>
+          <a:fontRef idx="minor">
+            <a:schemeClr val="lt1"/>
+          </a:fontRef>
+        </p:style>
+        <p:txBody>
+          <a:bodyPr rtlCol="0" anchor="ctr"/>
+          <a:lstStyle/>
+          <a:p>
+            <a:pPr algn="ctr"/>
+            <a:endParaRPr lang="zh-TW" altLang="en-US"/>
           </a:p>
         </p:txBody>
       </p:sp>
